--- a/20242-NLP-LLM/lecture notes/Part 1 - Introduction to NLP/1.1-introduction to NLP.pptx
+++ b/20242-NLP-LLM/lecture notes/Part 1 - Introduction to NLP/1.1-introduction to NLP.pptx
@@ -5,7 +5,7 @@
     <p:sldMasterId id="2147483648" r:id="rId1"/>
   </p:sldMasterIdLst>
   <p:notesMasterIdLst>
-    <p:notesMasterId r:id="rId37"/>
+    <p:notesMasterId r:id="rId36"/>
   </p:notesMasterIdLst>
   <p:sldIdLst>
     <p:sldId id="256" r:id="rId2"/>
@@ -27,22 +27,21 @@
     <p:sldId id="270" r:id="rId18"/>
     <p:sldId id="293" r:id="rId19"/>
     <p:sldId id="271" r:id="rId20"/>
-    <p:sldId id="272" r:id="rId21"/>
-    <p:sldId id="273" r:id="rId22"/>
-    <p:sldId id="274" r:id="rId23"/>
-    <p:sldId id="275" r:id="rId24"/>
-    <p:sldId id="276" r:id="rId25"/>
-    <p:sldId id="277" r:id="rId26"/>
-    <p:sldId id="278" r:id="rId27"/>
-    <p:sldId id="279" r:id="rId28"/>
-    <p:sldId id="280" r:id="rId29"/>
-    <p:sldId id="281" r:id="rId30"/>
-    <p:sldId id="286" r:id="rId31"/>
-    <p:sldId id="287" r:id="rId32"/>
-    <p:sldId id="288" r:id="rId33"/>
-    <p:sldId id="295" r:id="rId34"/>
-    <p:sldId id="291" r:id="rId35"/>
-    <p:sldId id="290" r:id="rId36"/>
+    <p:sldId id="274" r:id="rId21"/>
+    <p:sldId id="272" r:id="rId22"/>
+    <p:sldId id="275" r:id="rId23"/>
+    <p:sldId id="276" r:id="rId24"/>
+    <p:sldId id="277" r:id="rId25"/>
+    <p:sldId id="278" r:id="rId26"/>
+    <p:sldId id="279" r:id="rId27"/>
+    <p:sldId id="280" r:id="rId28"/>
+    <p:sldId id="281" r:id="rId29"/>
+    <p:sldId id="286" r:id="rId30"/>
+    <p:sldId id="287" r:id="rId31"/>
+    <p:sldId id="288" r:id="rId32"/>
+    <p:sldId id="295" r:id="rId33"/>
+    <p:sldId id="291" r:id="rId34"/>
+    <p:sldId id="290" r:id="rId35"/>
   </p:sldIdLst>
   <p:sldSz cx="12192000" cy="6858000"/>
   <p:notesSz cx="6858000" cy="9144000"/>
@@ -158,7 +157,7 @@
 <file path=ppt/revisionInfo.xml><?xml version="1.0" encoding="utf-8"?>
 <p1510:revInfo xmlns:a="http://schemas.openxmlformats.org/drawingml/2006/main" xmlns:r="http://schemas.openxmlformats.org/officeDocument/2006/relationships" xmlns:p1510="http://schemas.microsoft.com/office/powerpoint/2015/10/main">
   <p1510:revLst>
-    <p1510:client id="{CD467BAA-958C-43DD-AE6C-14EC1A9C72D6}" v="141" dt="2025-03-25T04:15:21.797"/>
+    <p1510:client id="{CD467BAA-958C-43DD-AE6C-14EC1A9C72D6}" v="184" dt="2025-03-27T06:19:07.519"/>
   </p1510:revLst>
 </p1510:revInfo>
 </file>
@@ -166,9 +165,93 @@
 <file path=ppt/changesInfos/changesInfo1.xml><?xml version="1.0" encoding="utf-8"?>
 <pc:chgInfo xmlns:a="http://schemas.openxmlformats.org/drawingml/2006/main" xmlns:r="http://schemas.openxmlformats.org/officeDocument/2006/relationships" xmlns:ac="http://schemas.microsoft.com/office/drawing/2013/main/command" xmlns:pc="http://schemas.microsoft.com/office/powerpoint/2013/main/command">
   <pc:docChgLst>
+    <pc:chgData name="Mohammed Fasha" userId="cc64f42d-a1a6-4f08-b97b-0c37f877119f" providerId="ADAL" clId="{18637E31-0E18-4A5A-AC68-AF9D3439D974}"/>
+    <pc:docChg chg="undo custSel delSld modSld sldOrd">
+      <pc:chgData name="Mohammed Fasha" userId="cc64f42d-a1a6-4f08-b97b-0c37f877119f" providerId="ADAL" clId="{18637E31-0E18-4A5A-AC68-AF9D3439D974}" dt="2025-03-25T08:02:14.603" v="201" actId="113"/>
+      <pc:docMkLst>
+        <pc:docMk/>
+      </pc:docMkLst>
+      <pc:sldChg chg="del">
+        <pc:chgData name="Mohammed Fasha" userId="cc64f42d-a1a6-4f08-b97b-0c37f877119f" providerId="ADAL" clId="{18637E31-0E18-4A5A-AC68-AF9D3439D974}" dt="2025-03-25T07:35:56.861" v="5" actId="2696"/>
+        <pc:sldMkLst>
+          <pc:docMk/>
+          <pc:sldMk cId="0" sldId="273"/>
+        </pc:sldMkLst>
+      </pc:sldChg>
+      <pc:sldChg chg="ord">
+        <pc:chgData name="Mohammed Fasha" userId="cc64f42d-a1a6-4f08-b97b-0c37f877119f" providerId="ADAL" clId="{18637E31-0E18-4A5A-AC68-AF9D3439D974}" dt="2025-03-25T07:35:51.921" v="4"/>
+        <pc:sldMkLst>
+          <pc:docMk/>
+          <pc:sldMk cId="0" sldId="274"/>
+        </pc:sldMkLst>
+      </pc:sldChg>
+      <pc:sldChg chg="addSp delSp modSp mod">
+        <pc:chgData name="Mohammed Fasha" userId="cc64f42d-a1a6-4f08-b97b-0c37f877119f" providerId="ADAL" clId="{18637E31-0E18-4A5A-AC68-AF9D3439D974}" dt="2025-03-25T07:52:52.611" v="43" actId="1076"/>
+        <pc:sldMkLst>
+          <pc:docMk/>
+          <pc:sldMk cId="0" sldId="275"/>
+        </pc:sldMkLst>
+        <pc:spChg chg="mod">
+          <ac:chgData name="Mohammed Fasha" userId="cc64f42d-a1a6-4f08-b97b-0c37f877119f" providerId="ADAL" clId="{18637E31-0E18-4A5A-AC68-AF9D3439D974}" dt="2025-03-25T07:36:05.331" v="15" actId="20577"/>
+          <ac:spMkLst>
+            <pc:docMk/>
+            <pc:sldMk cId="0" sldId="275"/>
+            <ac:spMk id="145" creationId="{00000000-0000-0000-0000-000000000000}"/>
+          </ac:spMkLst>
+        </pc:spChg>
+        <pc:spChg chg="mod">
+          <ac:chgData name="Mohammed Fasha" userId="cc64f42d-a1a6-4f08-b97b-0c37f877119f" providerId="ADAL" clId="{18637E31-0E18-4A5A-AC68-AF9D3439D974}" dt="2025-03-25T07:52:49.123" v="42" actId="14100"/>
+          <ac:spMkLst>
+            <pc:docMk/>
+            <pc:sldMk cId="0" sldId="275"/>
+            <ac:spMk id="146" creationId="{00000000-0000-0000-0000-000000000000}"/>
+          </ac:spMkLst>
+        </pc:spChg>
+        <pc:picChg chg="add mod">
+          <ac:chgData name="Mohammed Fasha" userId="cc64f42d-a1a6-4f08-b97b-0c37f877119f" providerId="ADAL" clId="{18637E31-0E18-4A5A-AC68-AF9D3439D974}" dt="2025-03-25T07:52:52.611" v="43" actId="1076"/>
+          <ac:picMkLst>
+            <pc:docMk/>
+            <pc:sldMk cId="0" sldId="275"/>
+            <ac:picMk id="3" creationId="{15EEB7E5-33DF-486D-A03F-C24FCFB0A2BF}"/>
+          </ac:picMkLst>
+        </pc:picChg>
+      </pc:sldChg>
+      <pc:sldChg chg="modSp mod">
+        <pc:chgData name="Mohammed Fasha" userId="cc64f42d-a1a6-4f08-b97b-0c37f877119f" providerId="ADAL" clId="{18637E31-0E18-4A5A-AC68-AF9D3439D974}" dt="2025-03-25T08:02:14.603" v="201" actId="113"/>
+        <pc:sldMkLst>
+          <pc:docMk/>
+          <pc:sldMk cId="0" sldId="276"/>
+        </pc:sldMkLst>
+        <pc:spChg chg="mod">
+          <ac:chgData name="Mohammed Fasha" userId="cc64f42d-a1a6-4f08-b97b-0c37f877119f" providerId="ADAL" clId="{18637E31-0E18-4A5A-AC68-AF9D3439D974}" dt="2025-03-25T07:55:25.446" v="46" actId="14100"/>
+          <ac:spMkLst>
+            <pc:docMk/>
+            <pc:sldMk cId="0" sldId="276"/>
+            <ac:spMk id="151" creationId="{00000000-0000-0000-0000-000000000000}"/>
+          </ac:spMkLst>
+        </pc:spChg>
+      </pc:sldChg>
+      <pc:sldChg chg="modSp mod">
+        <pc:chgData name="Mohammed Fasha" userId="cc64f42d-a1a6-4f08-b97b-0c37f877119f" providerId="ADAL" clId="{18637E31-0E18-4A5A-AC68-AF9D3439D974}" dt="2025-03-25T07:35:39.640" v="0" actId="21"/>
+        <pc:sldMkLst>
+          <pc:docMk/>
+          <pc:sldMk cId="3862054301" sldId="293"/>
+        </pc:sldMkLst>
+        <pc:spChg chg="mod">
+          <ac:chgData name="Mohammed Fasha" userId="cc64f42d-a1a6-4f08-b97b-0c37f877119f" providerId="ADAL" clId="{18637E31-0E18-4A5A-AC68-AF9D3439D974}" dt="2025-03-25T07:35:39.640" v="0" actId="21"/>
+          <ac:spMkLst>
+            <pc:docMk/>
+            <pc:sldMk cId="3862054301" sldId="293"/>
+            <ac:spMk id="3" creationId="{8AEDF9A6-3E2A-ECD5-AC94-898AAFEDC346}"/>
+          </ac:spMkLst>
+        </pc:spChg>
+      </pc:sldChg>
+    </pc:docChg>
+  </pc:docChgLst>
+  <pc:docChgLst>
     <pc:chgData name="Mohammed Fasha" userId="cc64f42d-a1a6-4f08-b97b-0c37f877119f" providerId="ADAL" clId="{CD467BAA-958C-43DD-AE6C-14EC1A9C72D6}"/>
-    <pc:docChg chg="undo custSel addSld delSld modSld sldOrd">
-      <pc:chgData name="Mohammed Fasha" userId="cc64f42d-a1a6-4f08-b97b-0c37f877119f" providerId="ADAL" clId="{CD467BAA-958C-43DD-AE6C-14EC1A9C72D6}" dt="2025-03-25T06:00:26.204" v="2592" actId="47"/>
+    <pc:docChg chg="undo redo custSel addSld delSld modSld sldOrd">
+      <pc:chgData name="Mohammed Fasha" userId="cc64f42d-a1a6-4f08-b97b-0c37f877119f" providerId="ADAL" clId="{CD467BAA-958C-43DD-AE6C-14EC1A9C72D6}" dt="2025-03-27T06:20:00.723" v="3664" actId="255"/>
       <pc:docMkLst>
         <pc:docMk/>
       </pc:docMkLst>
@@ -513,37 +596,125 @@
           <pc:docMk/>
           <pc:sldMk cId="0" sldId="273"/>
         </pc:sldMkLst>
-        <pc:spChg chg="mod">
-          <ac:chgData name="Mohammed Fasha" userId="cc64f42d-a1a6-4f08-b97b-0c37f877119f" providerId="ADAL" clId="{CD467BAA-958C-43DD-AE6C-14EC1A9C72D6}" dt="2025-03-25T02:52:08.885" v="309" actId="21"/>
-          <ac:spMkLst>
-            <pc:docMk/>
-            <pc:sldMk cId="0" sldId="273"/>
-            <ac:spMk id="140" creationId="{00000000-0000-0000-0000-000000000000}"/>
-          </ac:spMkLst>
-        </pc:spChg>
       </pc:sldChg>
-      <pc:sldChg chg="modSp add mod">
-        <pc:chgData name="Mohammed Fasha" userId="cc64f42d-a1a6-4f08-b97b-0c37f877119f" providerId="ADAL" clId="{CD467BAA-958C-43DD-AE6C-14EC1A9C72D6}" dt="2025-03-25T04:14:03.553" v="2580" actId="207"/>
+      <pc:sldChg chg="addSp delSp modSp add mod">
+        <pc:chgData name="Mohammed Fasha" userId="cc64f42d-a1a6-4f08-b97b-0c37f877119f" providerId="ADAL" clId="{CD467BAA-958C-43DD-AE6C-14EC1A9C72D6}" dt="2025-03-27T05:21:58.114" v="2622" actId="1076"/>
         <pc:sldMkLst>
           <pc:docMk/>
           <pc:sldMk cId="0" sldId="274"/>
         </pc:sldMkLst>
         <pc:spChg chg="mod">
-          <ac:chgData name="Mohammed Fasha" userId="cc64f42d-a1a6-4f08-b97b-0c37f877119f" providerId="ADAL" clId="{CD467BAA-958C-43DD-AE6C-14EC1A9C72D6}" dt="2025-03-25T04:13:20.791" v="2579" actId="404"/>
+          <ac:chgData name="Mohammed Fasha" userId="cc64f42d-a1a6-4f08-b97b-0c37f877119f" providerId="ADAL" clId="{CD467BAA-958C-43DD-AE6C-14EC1A9C72D6}" dt="2025-03-27T05:20:44.943" v="2609" actId="14100"/>
           <ac:spMkLst>
             <pc:docMk/>
             <pc:sldMk cId="0" sldId="274"/>
             <ac:spMk id="143" creationId="{00000000-0000-0000-0000-000000000000}"/>
           </ac:spMkLst>
         </pc:spChg>
-        <pc:spChg chg="mod">
-          <ac:chgData name="Mohammed Fasha" userId="cc64f42d-a1a6-4f08-b97b-0c37f877119f" providerId="ADAL" clId="{CD467BAA-958C-43DD-AE6C-14EC1A9C72D6}" dt="2025-03-25T04:14:03.553" v="2580" actId="207"/>
+        <pc:spChg chg="del mod">
+          <ac:chgData name="Mohammed Fasha" userId="cc64f42d-a1a6-4f08-b97b-0c37f877119f" providerId="ADAL" clId="{CD467BAA-958C-43DD-AE6C-14EC1A9C72D6}" dt="2025-03-27T05:19:15.475" v="2597" actId="478"/>
           <ac:spMkLst>
             <pc:docMk/>
             <pc:sldMk cId="0" sldId="274"/>
             <ac:spMk id="144" creationId="{00000000-0000-0000-0000-000000000000}"/>
           </ac:spMkLst>
         </pc:spChg>
+        <pc:graphicFrameChg chg="add mod">
+          <ac:chgData name="Mohammed Fasha" userId="cc64f42d-a1a6-4f08-b97b-0c37f877119f" providerId="ADAL" clId="{CD467BAA-958C-43DD-AE6C-14EC1A9C72D6}" dt="2025-03-27T05:19:03.076" v="2596"/>
+          <ac:graphicFrameMkLst>
+            <pc:docMk/>
+            <pc:sldMk cId="0" sldId="274"/>
+            <ac:graphicFrameMk id="3" creationId="{943F8939-7019-FDC9-F76E-9D1D5E805B2D}"/>
+          </ac:graphicFrameMkLst>
+        </pc:graphicFrameChg>
+        <pc:graphicFrameChg chg="add mod">
+          <ac:chgData name="Mohammed Fasha" userId="cc64f42d-a1a6-4f08-b97b-0c37f877119f" providerId="ADAL" clId="{CD467BAA-958C-43DD-AE6C-14EC1A9C72D6}" dt="2025-03-27T05:19:03.076" v="2596"/>
+          <ac:graphicFrameMkLst>
+            <pc:docMk/>
+            <pc:sldMk cId="0" sldId="274"/>
+            <ac:graphicFrameMk id="4" creationId="{BE1417B1-B8A0-7DE0-ED24-CA72E0927F59}"/>
+          </ac:graphicFrameMkLst>
+        </pc:graphicFrameChg>
+        <pc:graphicFrameChg chg="add mod">
+          <ac:chgData name="Mohammed Fasha" userId="cc64f42d-a1a6-4f08-b97b-0c37f877119f" providerId="ADAL" clId="{CD467BAA-958C-43DD-AE6C-14EC1A9C72D6}" dt="2025-03-27T05:19:03.076" v="2596"/>
+          <ac:graphicFrameMkLst>
+            <pc:docMk/>
+            <pc:sldMk cId="0" sldId="274"/>
+            <ac:graphicFrameMk id="5" creationId="{F88CA1D9-6F8E-37E0-42F1-94A4243B1FDA}"/>
+          </ac:graphicFrameMkLst>
+        </pc:graphicFrameChg>
+        <pc:graphicFrameChg chg="add mod">
+          <ac:chgData name="Mohammed Fasha" userId="cc64f42d-a1a6-4f08-b97b-0c37f877119f" providerId="ADAL" clId="{CD467BAA-958C-43DD-AE6C-14EC1A9C72D6}" dt="2025-03-27T05:19:03.076" v="2596"/>
+          <ac:graphicFrameMkLst>
+            <pc:docMk/>
+            <pc:sldMk cId="0" sldId="274"/>
+            <ac:graphicFrameMk id="6" creationId="{8AF51F17-DADB-5748-4869-C80702E6706E}"/>
+          </ac:graphicFrameMkLst>
+        </pc:graphicFrameChg>
+        <pc:graphicFrameChg chg="add mod">
+          <ac:chgData name="Mohammed Fasha" userId="cc64f42d-a1a6-4f08-b97b-0c37f877119f" providerId="ADAL" clId="{CD467BAA-958C-43DD-AE6C-14EC1A9C72D6}" dt="2025-03-27T05:19:03.076" v="2596"/>
+          <ac:graphicFrameMkLst>
+            <pc:docMk/>
+            <pc:sldMk cId="0" sldId="274"/>
+            <ac:graphicFrameMk id="8" creationId="{09663822-EF0F-D18E-EA82-FDC8A1048DF2}"/>
+          </ac:graphicFrameMkLst>
+        </pc:graphicFrameChg>
+        <pc:graphicFrameChg chg="add mod">
+          <ac:chgData name="Mohammed Fasha" userId="cc64f42d-a1a6-4f08-b97b-0c37f877119f" providerId="ADAL" clId="{CD467BAA-958C-43DD-AE6C-14EC1A9C72D6}" dt="2025-03-27T05:19:03.076" v="2596"/>
+          <ac:graphicFrameMkLst>
+            <pc:docMk/>
+            <pc:sldMk cId="0" sldId="274"/>
+            <ac:graphicFrameMk id="9" creationId="{892984AE-2F94-77EA-F1E6-8C8E273D34E9}"/>
+          </ac:graphicFrameMkLst>
+        </pc:graphicFrameChg>
+        <pc:graphicFrameChg chg="add mod">
+          <ac:chgData name="Mohammed Fasha" userId="cc64f42d-a1a6-4f08-b97b-0c37f877119f" providerId="ADAL" clId="{CD467BAA-958C-43DD-AE6C-14EC1A9C72D6}" dt="2025-03-27T05:19:03.076" v="2596"/>
+          <ac:graphicFrameMkLst>
+            <pc:docMk/>
+            <pc:sldMk cId="0" sldId="274"/>
+            <ac:graphicFrameMk id="10" creationId="{9CC5E6A6-7767-6D93-0EA6-BA0A5BAB85D2}"/>
+          </ac:graphicFrameMkLst>
+        </pc:graphicFrameChg>
+        <pc:graphicFrameChg chg="add mod">
+          <ac:chgData name="Mohammed Fasha" userId="cc64f42d-a1a6-4f08-b97b-0c37f877119f" providerId="ADAL" clId="{CD467BAA-958C-43DD-AE6C-14EC1A9C72D6}" dt="2025-03-27T05:19:03.076" v="2596"/>
+          <ac:graphicFrameMkLst>
+            <pc:docMk/>
+            <pc:sldMk cId="0" sldId="274"/>
+            <ac:graphicFrameMk id="11" creationId="{448BB0A9-6D15-67E5-6B37-EA881BBEB9C3}"/>
+          </ac:graphicFrameMkLst>
+        </pc:graphicFrameChg>
+        <pc:graphicFrameChg chg="add mod">
+          <ac:chgData name="Mohammed Fasha" userId="cc64f42d-a1a6-4f08-b97b-0c37f877119f" providerId="ADAL" clId="{CD467BAA-958C-43DD-AE6C-14EC1A9C72D6}" dt="2025-03-27T05:19:03.076" v="2596"/>
+          <ac:graphicFrameMkLst>
+            <pc:docMk/>
+            <pc:sldMk cId="0" sldId="274"/>
+            <ac:graphicFrameMk id="12" creationId="{23A603C1-B7D4-B9AA-799E-577583F2E8FB}"/>
+          </ac:graphicFrameMkLst>
+        </pc:graphicFrameChg>
+        <pc:graphicFrameChg chg="add mod">
+          <ac:chgData name="Mohammed Fasha" userId="cc64f42d-a1a6-4f08-b97b-0c37f877119f" providerId="ADAL" clId="{CD467BAA-958C-43DD-AE6C-14EC1A9C72D6}" dt="2025-03-27T05:19:03.076" v="2596"/>
+          <ac:graphicFrameMkLst>
+            <pc:docMk/>
+            <pc:sldMk cId="0" sldId="274"/>
+            <ac:graphicFrameMk id="13" creationId="{B1839904-368A-BD0C-3DE6-8690B7B71E9C}"/>
+          </ac:graphicFrameMkLst>
+        </pc:graphicFrameChg>
+        <pc:graphicFrameChg chg="add del mod modGraphic">
+          <ac:chgData name="Mohammed Fasha" userId="cc64f42d-a1a6-4f08-b97b-0c37f877119f" providerId="ADAL" clId="{CD467BAA-958C-43DD-AE6C-14EC1A9C72D6}" dt="2025-03-27T05:21:53.225" v="2621" actId="478"/>
+          <ac:graphicFrameMkLst>
+            <pc:docMk/>
+            <pc:sldMk cId="0" sldId="274"/>
+            <ac:graphicFrameMk id="15" creationId="{EEA346B6-3EFC-18F8-90EA-B9CFD338305E}"/>
+          </ac:graphicFrameMkLst>
+        </pc:graphicFrameChg>
+        <pc:graphicFrameChg chg="add mod modGraphic">
+          <ac:chgData name="Mohammed Fasha" userId="cc64f42d-a1a6-4f08-b97b-0c37f877119f" providerId="ADAL" clId="{CD467BAA-958C-43DD-AE6C-14EC1A9C72D6}" dt="2025-03-27T05:21:58.114" v="2622" actId="1076"/>
+          <ac:graphicFrameMkLst>
+            <pc:docMk/>
+            <pc:sldMk cId="0" sldId="274"/>
+            <ac:graphicFrameMk id="16" creationId="{BC0E043D-BB8A-32DC-EAC8-72A7D0CA169C}"/>
+          </ac:graphicFrameMkLst>
+        </pc:graphicFrameChg>
       </pc:sldChg>
       <pc:sldChg chg="modSp add mod">
         <pc:chgData name="Mohammed Fasha" userId="cc64f42d-a1a6-4f08-b97b-0c37f877119f" providerId="ADAL" clId="{CD467BAA-958C-43DD-AE6C-14EC1A9C72D6}" dt="2025-03-25T03:17:12.169" v="2046" actId="6549"/>
@@ -560,27 +731,203 @@
           </ac:spMkLst>
         </pc:spChg>
       </pc:sldChg>
-      <pc:sldChg chg="add">
-        <pc:chgData name="Mohammed Fasha" userId="cc64f42d-a1a6-4f08-b97b-0c37f877119f" providerId="ADAL" clId="{CD467BAA-958C-43DD-AE6C-14EC1A9C72D6}" dt="2025-03-25T02:49:01.516" v="1"/>
+      <pc:sldChg chg="addSp delSp modSp add mod">
+        <pc:chgData name="Mohammed Fasha" userId="cc64f42d-a1a6-4f08-b97b-0c37f877119f" providerId="ADAL" clId="{CD467BAA-958C-43DD-AE6C-14EC1A9C72D6}" dt="2025-03-27T06:20:00.723" v="3664" actId="255"/>
         <pc:sldMkLst>
           <pc:docMk/>
           <pc:sldMk cId="0" sldId="276"/>
         </pc:sldMkLst>
+        <pc:spChg chg="add">
+          <ac:chgData name="Mohammed Fasha" userId="cc64f42d-a1a6-4f08-b97b-0c37f877119f" providerId="ADAL" clId="{CD467BAA-958C-43DD-AE6C-14EC1A9C72D6}" dt="2025-03-27T05:48:32.837" v="2652"/>
+          <ac:spMkLst>
+            <pc:docMk/>
+            <pc:sldMk cId="0" sldId="276"/>
+            <ac:spMk id="2" creationId="{565313BA-B162-8FC5-B3AE-29FBDBE33BAC}"/>
+          </ac:spMkLst>
+        </pc:spChg>
+        <pc:spChg chg="add">
+          <ac:chgData name="Mohammed Fasha" userId="cc64f42d-a1a6-4f08-b97b-0c37f877119f" providerId="ADAL" clId="{CD467BAA-958C-43DD-AE6C-14EC1A9C72D6}" dt="2025-03-27T05:48:42.218" v="2653"/>
+          <ac:spMkLst>
+            <pc:docMk/>
+            <pc:sldMk cId="0" sldId="276"/>
+            <ac:spMk id="3" creationId="{3823C19C-0038-FCAB-871B-D33B6755F5F0}"/>
+          </ac:spMkLst>
+        </pc:spChg>
+        <pc:spChg chg="add">
+          <ac:chgData name="Mohammed Fasha" userId="cc64f42d-a1a6-4f08-b97b-0c37f877119f" providerId="ADAL" clId="{CD467BAA-958C-43DD-AE6C-14EC1A9C72D6}" dt="2025-03-27T05:48:53.581" v="2657"/>
+          <ac:spMkLst>
+            <pc:docMk/>
+            <pc:sldMk cId="0" sldId="276"/>
+            <ac:spMk id="4" creationId="{7A1FEEAD-C5E8-D5E0-679A-BAD1BCEB242B}"/>
+          </ac:spMkLst>
+        </pc:spChg>
+        <pc:spChg chg="add">
+          <ac:chgData name="Mohammed Fasha" userId="cc64f42d-a1a6-4f08-b97b-0c37f877119f" providerId="ADAL" clId="{CD467BAA-958C-43DD-AE6C-14EC1A9C72D6}" dt="2025-03-27T05:49:04.348" v="2658"/>
+          <ac:spMkLst>
+            <pc:docMk/>
+            <pc:sldMk cId="0" sldId="276"/>
+            <ac:spMk id="5" creationId="{4650BECD-576E-2A7C-4AAD-51FCBD3740CC}"/>
+          </ac:spMkLst>
+        </pc:spChg>
+        <pc:spChg chg="add mod">
+          <ac:chgData name="Mohammed Fasha" userId="cc64f42d-a1a6-4f08-b97b-0c37f877119f" providerId="ADAL" clId="{CD467BAA-958C-43DD-AE6C-14EC1A9C72D6}" dt="2025-03-27T06:13:34.717" v="3490" actId="14100"/>
+          <ac:spMkLst>
+            <pc:docMk/>
+            <pc:sldMk cId="0" sldId="276"/>
+            <ac:spMk id="9" creationId="{1CF1029F-413A-0DA0-F481-FF0BFD26F06A}"/>
+          </ac:spMkLst>
+        </pc:spChg>
+        <pc:spChg chg="add mod">
+          <ac:chgData name="Mohammed Fasha" userId="cc64f42d-a1a6-4f08-b97b-0c37f877119f" providerId="ADAL" clId="{CD467BAA-958C-43DD-AE6C-14EC1A9C72D6}" dt="2025-03-27T06:19:46.558" v="3662" actId="1076"/>
+          <ac:spMkLst>
+            <pc:docMk/>
+            <pc:sldMk cId="0" sldId="276"/>
+            <ac:spMk id="11" creationId="{56739892-FDDF-71A9-ADC6-BAF89F0C2A35}"/>
+          </ac:spMkLst>
+        </pc:spChg>
+        <pc:spChg chg="add mod">
+          <ac:chgData name="Mohammed Fasha" userId="cc64f42d-a1a6-4f08-b97b-0c37f877119f" providerId="ADAL" clId="{CD467BAA-958C-43DD-AE6C-14EC1A9C72D6}" dt="2025-03-27T06:13:14.605" v="3483" actId="1036"/>
+          <ac:spMkLst>
+            <pc:docMk/>
+            <pc:sldMk cId="0" sldId="276"/>
+            <ac:spMk id="13" creationId="{329226C2-42F0-F928-D90B-44EDC623A50D}"/>
+          </ac:spMkLst>
+        </pc:spChg>
+        <pc:spChg chg="add">
+          <ac:chgData name="Mohammed Fasha" userId="cc64f42d-a1a6-4f08-b97b-0c37f877119f" providerId="ADAL" clId="{CD467BAA-958C-43DD-AE6C-14EC1A9C72D6}" dt="2025-03-27T06:04:17.819" v="3096"/>
+          <ac:spMkLst>
+            <pc:docMk/>
+            <pc:sldMk cId="0" sldId="276"/>
+            <ac:spMk id="14" creationId="{743A9E0B-6637-9B47-4EA7-1B324570A4F7}"/>
+          </ac:spMkLst>
+        </pc:spChg>
+        <pc:spChg chg="add del mod">
+          <ac:chgData name="Mohammed Fasha" userId="cc64f42d-a1a6-4f08-b97b-0c37f877119f" providerId="ADAL" clId="{CD467BAA-958C-43DD-AE6C-14EC1A9C72D6}" dt="2025-03-27T06:05:21.233" v="3127" actId="478"/>
+          <ac:spMkLst>
+            <pc:docMk/>
+            <pc:sldMk cId="0" sldId="276"/>
+            <ac:spMk id="15" creationId="{2B4F5602-A614-CBA7-5F65-AA87AA04C1D7}"/>
+          </ac:spMkLst>
+        </pc:spChg>
+        <pc:spChg chg="add mod">
+          <ac:chgData name="Mohammed Fasha" userId="cc64f42d-a1a6-4f08-b97b-0c37f877119f" providerId="ADAL" clId="{CD467BAA-958C-43DD-AE6C-14EC1A9C72D6}" dt="2025-03-27T06:14:34.525" v="3518" actId="20577"/>
+          <ac:spMkLst>
+            <pc:docMk/>
+            <pc:sldMk cId="0" sldId="276"/>
+            <ac:spMk id="16" creationId="{20602073-7B6E-A022-6568-96518DFCE75D}"/>
+          </ac:spMkLst>
+        </pc:spChg>
+        <pc:spChg chg="add mod">
+          <ac:chgData name="Mohammed Fasha" userId="cc64f42d-a1a6-4f08-b97b-0c37f877119f" providerId="ADAL" clId="{CD467BAA-958C-43DD-AE6C-14EC1A9C72D6}" dt="2025-03-27T06:04:53.040" v="3105"/>
+          <ac:spMkLst>
+            <pc:docMk/>
+            <pc:sldMk cId="0" sldId="276"/>
+            <ac:spMk id="17" creationId="{B540BE22-8186-46A0-F1C9-0A0C3133F8DA}"/>
+          </ac:spMkLst>
+        </pc:spChg>
+        <pc:spChg chg="add mod">
+          <ac:chgData name="Mohammed Fasha" userId="cc64f42d-a1a6-4f08-b97b-0c37f877119f" providerId="ADAL" clId="{CD467BAA-958C-43DD-AE6C-14EC1A9C72D6}" dt="2025-03-27T06:19:58.593" v="3663" actId="404"/>
+          <ac:spMkLst>
+            <pc:docMk/>
+            <pc:sldMk cId="0" sldId="276"/>
+            <ac:spMk id="18" creationId="{512AA434-8263-878C-DF21-A4A805DE2E23}"/>
+          </ac:spMkLst>
+        </pc:spChg>
+        <pc:spChg chg="add mod">
+          <ac:chgData name="Mohammed Fasha" userId="cc64f42d-a1a6-4f08-b97b-0c37f877119f" providerId="ADAL" clId="{CD467BAA-958C-43DD-AE6C-14EC1A9C72D6}" dt="2025-03-27T06:20:00.723" v="3664" actId="255"/>
+          <ac:spMkLst>
+            <pc:docMk/>
+            <pc:sldMk cId="0" sldId="276"/>
+            <ac:spMk id="19" creationId="{A602EDBC-7A21-5A70-2F21-BA09B5929E01}"/>
+          </ac:spMkLst>
+        </pc:spChg>
+        <pc:spChg chg="mod">
+          <ac:chgData name="Mohammed Fasha" userId="cc64f42d-a1a6-4f08-b97b-0c37f877119f" providerId="ADAL" clId="{CD467BAA-958C-43DD-AE6C-14EC1A9C72D6}" dt="2025-03-27T05:59:07.047" v="2964" actId="27636"/>
+          <ac:spMkLst>
+            <pc:docMk/>
+            <pc:sldMk cId="0" sldId="276"/>
+            <ac:spMk id="148" creationId="{00000000-0000-0000-0000-000000000000}"/>
+          </ac:spMkLst>
+        </pc:spChg>
+        <pc:spChg chg="del mod">
+          <ac:chgData name="Mohammed Fasha" userId="cc64f42d-a1a6-4f08-b97b-0c37f877119f" providerId="ADAL" clId="{CD467BAA-958C-43DD-AE6C-14EC1A9C72D6}" dt="2025-03-27T05:59:10.765" v="2965" actId="478"/>
+          <ac:spMkLst>
+            <pc:docMk/>
+            <pc:sldMk cId="0" sldId="276"/>
+            <ac:spMk id="149" creationId="{00000000-0000-0000-0000-000000000000}"/>
+          </ac:spMkLst>
+        </pc:spChg>
+        <pc:spChg chg="mod">
+          <ac:chgData name="Mohammed Fasha" userId="cc64f42d-a1a6-4f08-b97b-0c37f877119f" providerId="ADAL" clId="{CD467BAA-958C-43DD-AE6C-14EC1A9C72D6}" dt="2025-03-27T06:13:38.309" v="3491" actId="14100"/>
+          <ac:spMkLst>
+            <pc:docMk/>
+            <pc:sldMk cId="0" sldId="276"/>
+            <ac:spMk id="151" creationId="{00000000-0000-0000-0000-000000000000}"/>
+          </ac:spMkLst>
+        </pc:spChg>
+        <pc:graphicFrameChg chg="add mod modGraphic">
+          <ac:chgData name="Mohammed Fasha" userId="cc64f42d-a1a6-4f08-b97b-0c37f877119f" providerId="ADAL" clId="{CD467BAA-958C-43DD-AE6C-14EC1A9C72D6}" dt="2025-03-27T06:01:44.867" v="3056" actId="1076"/>
+          <ac:graphicFrameMkLst>
+            <pc:docMk/>
+            <pc:sldMk cId="0" sldId="276"/>
+            <ac:graphicFrameMk id="6" creationId="{421512CA-3C45-56E1-C100-CE4E8F0E14B1}"/>
+          </ac:graphicFrameMkLst>
+        </pc:graphicFrameChg>
+        <pc:graphicFrameChg chg="add del mod modGraphic">
+          <ac:chgData name="Mohammed Fasha" userId="cc64f42d-a1a6-4f08-b97b-0c37f877119f" providerId="ADAL" clId="{CD467BAA-958C-43DD-AE6C-14EC1A9C72D6}" dt="2025-03-27T06:00:07.919" v="3001" actId="21"/>
+          <ac:graphicFrameMkLst>
+            <pc:docMk/>
+            <pc:sldMk cId="0" sldId="276"/>
+            <ac:graphicFrameMk id="7" creationId="{5A50D271-6099-8848-32B9-52F0C96B2575}"/>
+          </ac:graphicFrameMkLst>
+        </pc:graphicFrameChg>
+        <pc:graphicFrameChg chg="add mod modGraphic">
+          <ac:chgData name="Mohammed Fasha" userId="cc64f42d-a1a6-4f08-b97b-0c37f877119f" providerId="ADAL" clId="{CD467BAA-958C-43DD-AE6C-14EC1A9C72D6}" dt="2025-03-27T06:11:08.603" v="3345" actId="1076"/>
+          <ac:graphicFrameMkLst>
+            <pc:docMk/>
+            <pc:sldMk cId="0" sldId="276"/>
+            <ac:graphicFrameMk id="8" creationId="{0D439BFF-3BEA-55C6-98CA-7A1F9774EDF5}"/>
+          </ac:graphicFrameMkLst>
+        </pc:graphicFrameChg>
+        <pc:graphicFrameChg chg="add mod modGraphic">
+          <ac:chgData name="Mohammed Fasha" userId="cc64f42d-a1a6-4f08-b97b-0c37f877119f" providerId="ADAL" clId="{CD467BAA-958C-43DD-AE6C-14EC1A9C72D6}" dt="2025-03-27T06:11:15.021" v="3347" actId="1076"/>
+          <ac:graphicFrameMkLst>
+            <pc:docMk/>
+            <pc:sldMk cId="0" sldId="276"/>
+            <ac:graphicFrameMk id="12" creationId="{8BD96D17-9F2B-B7C4-8E4F-0B510D15EB97}"/>
+          </ac:graphicFrameMkLst>
+        </pc:graphicFrameChg>
+        <pc:graphicFrameChg chg="del">
+          <ac:chgData name="Mohammed Fasha" userId="cc64f42d-a1a6-4f08-b97b-0c37f877119f" providerId="ADAL" clId="{CD467BAA-958C-43DD-AE6C-14EC1A9C72D6}" dt="2025-03-27T05:51:12.737" v="2665" actId="478"/>
+          <ac:graphicFrameMkLst>
+            <pc:docMk/>
+            <pc:sldMk cId="0" sldId="276"/>
+            <ac:graphicFrameMk id="150" creationId="{00000000-0000-0000-0000-000000000000}"/>
+          </ac:graphicFrameMkLst>
+        </pc:graphicFrameChg>
       </pc:sldChg>
       <pc:sldChg chg="modSp add mod">
-        <pc:chgData name="Mohammed Fasha" userId="cc64f42d-a1a6-4f08-b97b-0c37f877119f" providerId="ADAL" clId="{CD467BAA-958C-43DD-AE6C-14EC1A9C72D6}" dt="2025-03-25T03:17:35.603" v="2048" actId="404"/>
+        <pc:chgData name="Mohammed Fasha" userId="cc64f42d-a1a6-4f08-b97b-0c37f877119f" providerId="ADAL" clId="{CD467BAA-958C-43DD-AE6C-14EC1A9C72D6}" dt="2025-03-27T06:17:35.667" v="3549" actId="14100"/>
         <pc:sldMkLst>
           <pc:docMk/>
           <pc:sldMk cId="0" sldId="277"/>
         </pc:sldMkLst>
         <pc:spChg chg="mod">
-          <ac:chgData name="Mohammed Fasha" userId="cc64f42d-a1a6-4f08-b97b-0c37f877119f" providerId="ADAL" clId="{CD467BAA-958C-43DD-AE6C-14EC1A9C72D6}" dt="2025-03-25T03:17:35.603" v="2048" actId="404"/>
+          <ac:chgData name="Mohammed Fasha" userId="cc64f42d-a1a6-4f08-b97b-0c37f877119f" providerId="ADAL" clId="{CD467BAA-958C-43DD-AE6C-14EC1A9C72D6}" dt="2025-03-27T06:17:35.667" v="3549" actId="14100"/>
           <ac:spMkLst>
             <pc:docMk/>
             <pc:sldMk cId="0" sldId="277"/>
             <ac:spMk id="153" creationId="{00000000-0000-0000-0000-000000000000}"/>
           </ac:spMkLst>
         </pc:spChg>
+        <pc:graphicFrameChg chg="mod modGraphic">
+          <ac:chgData name="Mohammed Fasha" userId="cc64f42d-a1a6-4f08-b97b-0c37f877119f" providerId="ADAL" clId="{CD467BAA-958C-43DD-AE6C-14EC1A9C72D6}" dt="2025-03-27T06:16:39.293" v="3545" actId="1076"/>
+          <ac:graphicFrameMkLst>
+            <pc:docMk/>
+            <pc:sldMk cId="0" sldId="277"/>
+            <ac:graphicFrameMk id="154" creationId="{00000000-0000-0000-0000-000000000000}"/>
+          </ac:graphicFrameMkLst>
+        </pc:graphicFrameChg>
       </pc:sldChg>
       <pc:sldChg chg="modSp add mod">
         <pc:chgData name="Mohammed Fasha" userId="cc64f42d-a1a6-4f08-b97b-0c37f877119f" providerId="ADAL" clId="{CD467BAA-958C-43DD-AE6C-14EC1A9C72D6}" dt="2025-03-25T03:17:43.981" v="2049" actId="255"/>
@@ -631,14 +978,6 @@
             <pc:docMk/>
             <pc:sldMk cId="0" sldId="281"/>
             <ac:spMk id="162" creationId="{00000000-0000-0000-0000-000000000000}"/>
-          </ac:spMkLst>
-        </pc:spChg>
-        <pc:spChg chg="del mod">
-          <ac:chgData name="Mohammed Fasha" userId="cc64f42d-a1a6-4f08-b97b-0c37f877119f" providerId="ADAL" clId="{CD467BAA-958C-43DD-AE6C-14EC1A9C72D6}" dt="2025-03-25T03:57:40.441" v="2290" actId="21"/>
-          <ac:spMkLst>
-            <pc:docMk/>
-            <pc:sldMk cId="0" sldId="281"/>
-            <ac:spMk id="163" creationId="{00000000-0000-0000-0000-000000000000}"/>
           </ac:spMkLst>
         </pc:spChg>
         <pc:picChg chg="mod">
@@ -737,38 +1076,6 @@
           <pc:docMk/>
           <pc:sldMk cId="0" sldId="289"/>
         </pc:sldMkLst>
-        <pc:spChg chg="add mod">
-          <ac:chgData name="Mohammed Fasha" userId="cc64f42d-a1a6-4f08-b97b-0c37f877119f" providerId="ADAL" clId="{CD467BAA-958C-43DD-AE6C-14EC1A9C72D6}" dt="2025-03-25T03:26:49.097" v="2168"/>
-          <ac:spMkLst>
-            <pc:docMk/>
-            <pc:sldMk cId="0" sldId="289"/>
-            <ac:spMk id="2" creationId="{B43C3519-A286-776C-EEEF-7C6302D45288}"/>
-          </ac:spMkLst>
-        </pc:spChg>
-        <pc:spChg chg="mod">
-          <ac:chgData name="Mohammed Fasha" userId="cc64f42d-a1a6-4f08-b97b-0c37f877119f" providerId="ADAL" clId="{CD467BAA-958C-43DD-AE6C-14EC1A9C72D6}" dt="2025-03-25T04:10:26.248" v="2508" actId="21"/>
-          <ac:spMkLst>
-            <pc:docMk/>
-            <pc:sldMk cId="0" sldId="289"/>
-            <ac:spMk id="176" creationId="{00000000-0000-0000-0000-000000000000}"/>
-          </ac:spMkLst>
-        </pc:spChg>
-        <pc:spChg chg="mod">
-          <ac:chgData name="Mohammed Fasha" userId="cc64f42d-a1a6-4f08-b97b-0c37f877119f" providerId="ADAL" clId="{CD467BAA-958C-43DD-AE6C-14EC1A9C72D6}" dt="2025-03-25T03:27:01.393" v="2171"/>
-          <ac:spMkLst>
-            <pc:docMk/>
-            <pc:sldMk cId="0" sldId="289"/>
-            <ac:spMk id="177" creationId="{00000000-0000-0000-0000-000000000000}"/>
-          </ac:spMkLst>
-        </pc:spChg>
-        <pc:spChg chg="mod">
-          <ac:chgData name="Mohammed Fasha" userId="cc64f42d-a1a6-4f08-b97b-0c37f877119f" providerId="ADAL" clId="{CD467BAA-958C-43DD-AE6C-14EC1A9C72D6}" dt="2025-03-25T03:25:37.375" v="2154" actId="15"/>
-          <ac:spMkLst>
-            <pc:docMk/>
-            <pc:sldMk cId="0" sldId="289"/>
-            <ac:spMk id="178" creationId="{00000000-0000-0000-0000-000000000000}"/>
-          </ac:spMkLst>
-        </pc:spChg>
       </pc:sldChg>
       <pc:sldChg chg="modSp add mod">
         <pc:chgData name="Mohammed Fasha" userId="cc64f42d-a1a6-4f08-b97b-0c37f877119f" providerId="ADAL" clId="{CD467BAA-958C-43DD-AE6C-14EC1A9C72D6}" dt="2025-03-25T02:49:01.611" v="8" actId="27636"/>
@@ -889,14 +1196,6 @@
             <pc:docMk/>
             <pc:sldMk cId="1219703126" sldId="295"/>
             <ac:picMk id="164" creationId="{98D75408-003A-ED3D-468E-0FC6FA95A427}"/>
-          </ac:picMkLst>
-        </pc:picChg>
-        <pc:picChg chg="del">
-          <ac:chgData name="Mohammed Fasha" userId="cc64f42d-a1a6-4f08-b97b-0c37f877119f" providerId="ADAL" clId="{CD467BAA-958C-43DD-AE6C-14EC1A9C72D6}" dt="2025-03-25T04:11:07.244" v="2567" actId="21"/>
-          <ac:picMkLst>
-            <pc:docMk/>
-            <pc:sldMk cId="1219703126" sldId="295"/>
-            <ac:picMk id="2050" creationId="{568C58B4-4F5A-EE36-3303-08B75745096C}"/>
           </ac:picMkLst>
         </pc:picChg>
       </pc:sldChg>
@@ -5585,7 +5884,7 @@
           <a:p>
             <a:fld id="{13BA03A4-B9F1-404C-8A74-B1AFD6480953}" type="datetimeFigureOut">
               <a:rPr lang="en-US" smtClean="0"/>
-              <a:t>3/25/2025</a:t>
+              <a:t>3/27/2025</a:t>
             </a:fld>
             <a:endParaRPr lang="en-US"/>
           </a:p>
@@ -5999,7 +6298,7 @@
           <a:p>
             <a:fld id="{0DB78E95-DE77-44D3-BDB9-E242948FB112}" type="datetimeFigureOut">
               <a:rPr lang="en-US" smtClean="0"/>
-              <a:t>3/25/2025</a:t>
+              <a:t>3/27/2025</a:t>
             </a:fld>
             <a:endParaRPr lang="en-US"/>
           </a:p>
@@ -6227,7 +6526,7 @@
           <a:p>
             <a:fld id="{0DB78E95-DE77-44D3-BDB9-E242948FB112}" type="datetimeFigureOut">
               <a:rPr lang="en-US" smtClean="0"/>
-              <a:t>3/25/2025</a:t>
+              <a:t>3/27/2025</a:t>
             </a:fld>
             <a:endParaRPr lang="en-US"/>
           </a:p>
@@ -6435,7 +6734,7 @@
           <a:p>
             <a:fld id="{0DB78E95-DE77-44D3-BDB9-E242948FB112}" type="datetimeFigureOut">
               <a:rPr lang="en-US" smtClean="0"/>
-              <a:t>3/25/2025</a:t>
+              <a:t>3/27/2025</a:t>
             </a:fld>
             <a:endParaRPr lang="en-US"/>
           </a:p>
@@ -7162,7 +7461,7 @@
           <a:p>
             <a:fld id="{0DB78E95-DE77-44D3-BDB9-E242948FB112}" type="datetimeFigureOut">
               <a:rPr lang="en-US" smtClean="0"/>
-              <a:t>3/25/2025</a:t>
+              <a:t>3/27/2025</a:t>
             </a:fld>
             <a:endParaRPr lang="en-US"/>
           </a:p>
@@ -7541,7 +7840,7 @@
           <a:p>
             <a:fld id="{0DB78E95-DE77-44D3-BDB9-E242948FB112}" type="datetimeFigureOut">
               <a:rPr lang="en-US" smtClean="0"/>
-              <a:t>3/25/2025</a:t>
+              <a:t>3/27/2025</a:t>
             </a:fld>
             <a:endParaRPr lang="en-US"/>
           </a:p>
@@ -7953,7 +8252,7 @@
           <a:p>
             <a:fld id="{0DB78E95-DE77-44D3-BDB9-E242948FB112}" type="datetimeFigureOut">
               <a:rPr lang="en-US" smtClean="0"/>
-              <a:t>3/25/2025</a:t>
+              <a:t>3/27/2025</a:t>
             </a:fld>
             <a:endParaRPr lang="en-US"/>
           </a:p>
@@ -8094,7 +8393,7 @@
           <a:p>
             <a:fld id="{0DB78E95-DE77-44D3-BDB9-E242948FB112}" type="datetimeFigureOut">
               <a:rPr lang="en-US" smtClean="0"/>
-              <a:t>3/25/2025</a:t>
+              <a:t>3/27/2025</a:t>
             </a:fld>
             <a:endParaRPr lang="en-US"/>
           </a:p>
@@ -8207,7 +8506,7 @@
           <a:p>
             <a:fld id="{0DB78E95-DE77-44D3-BDB9-E242948FB112}" type="datetimeFigureOut">
               <a:rPr lang="en-US" smtClean="0"/>
-              <a:t>3/25/2025</a:t>
+              <a:t>3/27/2025</a:t>
             </a:fld>
             <a:endParaRPr lang="en-US"/>
           </a:p>
@@ -8518,7 +8817,7 @@
           <a:p>
             <a:fld id="{0DB78E95-DE77-44D3-BDB9-E242948FB112}" type="datetimeFigureOut">
               <a:rPr lang="en-US" smtClean="0"/>
-              <a:t>3/25/2025</a:t>
+              <a:t>3/27/2025</a:t>
             </a:fld>
             <a:endParaRPr lang="en-US"/>
           </a:p>
@@ -8806,7 +9105,7 @@
           <a:p>
             <a:fld id="{0DB78E95-DE77-44D3-BDB9-E242948FB112}" type="datetimeFigureOut">
               <a:rPr lang="en-US" smtClean="0"/>
-              <a:t>3/25/2025</a:t>
+              <a:t>3/27/2025</a:t>
             </a:fld>
             <a:endParaRPr lang="en-US"/>
           </a:p>
@@ -9047,7 +9346,7 @@
           <a:p>
             <a:fld id="{0DB78E95-DE77-44D3-BDB9-E242948FB112}" type="datetimeFigureOut">
               <a:rPr lang="en-US" smtClean="0"/>
-              <a:t>3/25/2025</a:t>
+              <a:t>3/27/2025</a:t>
             </a:fld>
             <a:endParaRPr lang="en-US"/>
           </a:p>
@@ -14220,13 +14519,8 @@
           <a:p>
             <a:r>
               <a:rPr lang="en-US" dirty="0"/>
-              <a:t>Converting Text into Numbers, Bag of Words Method </a:t>
-            </a:r>
-            <a:r>
-              <a:rPr lang="en-US" dirty="0" err="1"/>
-              <a:t>BoW</a:t>
-            </a:r>
-            <a:endParaRPr lang="en-US" dirty="0"/>
+              <a:t>Converting Text into Numbers</a:t>
+            </a:r>
           </a:p>
         </p:txBody>
       </p:sp>
@@ -15028,6 +15322,1980 @@
       </p:grpSpPr>
       <p:sp>
         <p:nvSpPr>
+          <p:cNvPr id="142" name="PlaceHolder 1"/>
+          <p:cNvSpPr>
+            <a:spLocks noGrp="1"/>
+          </p:cNvSpPr>
+          <p:nvPr>
+            <p:ph type="title"/>
+          </p:nvPr>
+        </p:nvSpPr>
+        <p:spPr>
+          <a:xfrm>
+            <a:off x="838080" y="797400"/>
+            <a:ext cx="10515240" cy="747720"/>
+          </a:xfrm>
+          <a:prstGeom prst="rect">
+            <a:avLst/>
+          </a:prstGeom>
+          <a:solidFill>
+            <a:srgbClr val="67337A"/>
+          </a:solidFill>
+          <a:ln w="0">
+            <a:noFill/>
+          </a:ln>
+        </p:spPr>
+        <p:txBody>
+          <a:bodyPr lIns="91440" tIns="45720" rIns="91440" bIns="45720" anchor="ctr">
+            <a:noAutofit/>
+          </a:bodyPr>
+          <a:lstStyle/>
+          <a:p>
+            <a:pPr indent="0" defTabSz="914400">
+              <a:lnSpc>
+                <a:spcPct val="90000"/>
+              </a:lnSpc>
+              <a:buNone/>
+            </a:pPr>
+            <a:r>
+              <a:rPr lang="en-US" sz="2800" b="0" u="none" strike="noStrike">
+                <a:solidFill>
+                  <a:schemeClr val="lt1"/>
+                </a:solidFill>
+                <a:uFillTx/>
+                <a:latin typeface="Calibri Light"/>
+              </a:rPr>
+              <a:t>BoW Basic Term Frequency Example</a:t>
+            </a:r>
+            <a:endParaRPr lang="en-US" sz="2800" b="0" u="none" strike="noStrike">
+              <a:solidFill>
+                <a:schemeClr val="dk1"/>
+              </a:solidFill>
+              <a:uFillTx/>
+              <a:latin typeface="Calibri"/>
+            </a:endParaRPr>
+          </a:p>
+        </p:txBody>
+      </p:sp>
+      <p:sp>
+        <p:nvSpPr>
+          <p:cNvPr id="143" name="TextBox 2"/>
+          <p:cNvSpPr/>
+          <p:nvPr/>
+        </p:nvSpPr>
+        <p:spPr>
+          <a:xfrm>
+            <a:off x="838080" y="1828800"/>
+            <a:ext cx="7794932" cy="2431456"/>
+          </a:xfrm>
+          <a:prstGeom prst="rect">
+            <a:avLst/>
+          </a:prstGeom>
+          <a:solidFill>
+            <a:schemeClr val="bg1">
+              <a:lumMod val="85000"/>
+            </a:schemeClr>
+          </a:solidFill>
+          <a:ln w="0">
+            <a:noFill/>
+          </a:ln>
+        </p:spPr>
+        <p:style>
+          <a:lnRef idx="0">
+            <a:scrgbClr r="0" g="0" b="0"/>
+          </a:lnRef>
+          <a:fillRef idx="0">
+            <a:scrgbClr r="0" g="0" b="0"/>
+          </a:fillRef>
+          <a:effectRef idx="0">
+            <a:scrgbClr r="0" g="0" b="0"/>
+          </a:effectRef>
+          <a:fontRef idx="minor"/>
+        </p:style>
+        <p:txBody>
+          <a:bodyPr wrap="square" lIns="90000" tIns="45000" rIns="90000" bIns="45000" anchor="t">
+            <a:spAutoFit/>
+          </a:bodyPr>
+          <a:lstStyle/>
+          <a:p>
+            <a:pPr defTabSz="914400">
+              <a:lnSpc>
+                <a:spcPts val="1426"/>
+              </a:lnSpc>
+            </a:pPr>
+            <a:r>
+              <a:rPr lang="en-US" sz="1600" b="0" u="none" strike="noStrike" dirty="0">
+                <a:solidFill>
+                  <a:srgbClr val="0000FF"/>
+                </a:solidFill>
+                <a:uFillTx/>
+                <a:latin typeface="Consolas"/>
+              </a:rPr>
+              <a:t>from</a:t>
+            </a:r>
+            <a:r>
+              <a:rPr lang="en-US" sz="1600" b="0" u="none" strike="noStrike" dirty="0">
+                <a:solidFill>
+                  <a:srgbClr val="000000"/>
+                </a:solidFill>
+                <a:uFillTx/>
+                <a:latin typeface="Consolas"/>
+              </a:rPr>
+              <a:t> </a:t>
+            </a:r>
+            <a:r>
+              <a:rPr lang="en-US" sz="1600" b="0" u="none" strike="noStrike" dirty="0" err="1">
+                <a:solidFill>
+                  <a:srgbClr val="000000"/>
+                </a:solidFill>
+                <a:uFillTx/>
+                <a:latin typeface="Consolas"/>
+              </a:rPr>
+              <a:t>sklearn.feature_extraction.text</a:t>
+            </a:r>
+            <a:r>
+              <a:rPr lang="en-US" sz="1600" b="0" u="none" strike="noStrike" dirty="0">
+                <a:solidFill>
+                  <a:srgbClr val="000000"/>
+                </a:solidFill>
+                <a:uFillTx/>
+                <a:latin typeface="Consolas"/>
+              </a:rPr>
+              <a:t> </a:t>
+            </a:r>
+            <a:r>
+              <a:rPr lang="en-US" sz="1600" b="0" u="none" strike="noStrike" dirty="0">
+                <a:solidFill>
+                  <a:srgbClr val="0000FF"/>
+                </a:solidFill>
+                <a:uFillTx/>
+                <a:latin typeface="Consolas"/>
+              </a:rPr>
+              <a:t>import</a:t>
+            </a:r>
+            <a:r>
+              <a:rPr lang="en-US" sz="1600" b="0" u="none" strike="noStrike" dirty="0">
+                <a:solidFill>
+                  <a:srgbClr val="000000"/>
+                </a:solidFill>
+                <a:uFillTx/>
+                <a:latin typeface="Consolas"/>
+              </a:rPr>
+              <a:t> </a:t>
+            </a:r>
+            <a:r>
+              <a:rPr lang="en-US" sz="1600" b="0" u="none" strike="noStrike" dirty="0" err="1">
+                <a:solidFill>
+                  <a:srgbClr val="000000"/>
+                </a:solidFill>
+                <a:uFillTx/>
+                <a:latin typeface="Consolas"/>
+              </a:rPr>
+              <a:t>CountVectorizer</a:t>
+            </a:r>
+            <a:endParaRPr lang="en-US" sz="1600" b="0" u="none" strike="noStrike" dirty="0">
+              <a:solidFill>
+                <a:srgbClr val="000000"/>
+              </a:solidFill>
+              <a:uFillTx/>
+              <a:latin typeface="Arial"/>
+            </a:endParaRPr>
+          </a:p>
+          <a:p>
+            <a:pPr defTabSz="914400">
+              <a:lnSpc>
+                <a:spcPts val="1426"/>
+              </a:lnSpc>
+            </a:pPr>
+            <a:br>
+              <a:rPr sz="1600" dirty="0"/>
+            </a:br>
+            <a:r>
+              <a:rPr lang="en-US" sz="1600" b="0" u="none" strike="noStrike" dirty="0">
+                <a:solidFill>
+                  <a:srgbClr val="000000"/>
+                </a:solidFill>
+                <a:uFillTx/>
+                <a:latin typeface="Consolas"/>
+              </a:rPr>
+              <a:t>corpus = [</a:t>
+            </a:r>
+            <a:endParaRPr lang="en-US" sz="1600" b="0" u="none" strike="noStrike" dirty="0">
+              <a:solidFill>
+                <a:srgbClr val="000000"/>
+              </a:solidFill>
+              <a:uFillTx/>
+              <a:latin typeface="Arial"/>
+            </a:endParaRPr>
+          </a:p>
+          <a:p>
+            <a:pPr defTabSz="914400">
+              <a:lnSpc>
+                <a:spcPts val="1426"/>
+              </a:lnSpc>
+            </a:pPr>
+            <a:r>
+              <a:rPr lang="en-US" sz="1600" b="0" u="none" strike="noStrike" dirty="0">
+                <a:solidFill>
+                  <a:srgbClr val="000000"/>
+                </a:solidFill>
+                <a:uFillTx/>
+                <a:latin typeface="Consolas"/>
+              </a:rPr>
+              <a:t>    </a:t>
+            </a:r>
+            <a:r>
+              <a:rPr lang="en-US" sz="1600" b="0" u="none" strike="noStrike" dirty="0">
+                <a:solidFill>
+                  <a:srgbClr val="A31515"/>
+                </a:solidFill>
+                <a:uFillTx/>
+                <a:latin typeface="Consolas"/>
+              </a:rPr>
+              <a:t>"Large language models revolutionize business."</a:t>
+            </a:r>
+            <a:r>
+              <a:rPr lang="en-US" sz="1600" b="0" u="none" strike="noStrike" dirty="0">
+                <a:solidFill>
+                  <a:srgbClr val="000000"/>
+                </a:solidFill>
+                <a:uFillTx/>
+                <a:latin typeface="Consolas"/>
+              </a:rPr>
+              <a:t>,</a:t>
+            </a:r>
+            <a:endParaRPr lang="en-US" sz="1600" b="0" u="none" strike="noStrike" dirty="0">
+              <a:solidFill>
+                <a:srgbClr val="000000"/>
+              </a:solidFill>
+              <a:uFillTx/>
+              <a:latin typeface="Arial"/>
+            </a:endParaRPr>
+          </a:p>
+          <a:p>
+            <a:pPr defTabSz="914400">
+              <a:lnSpc>
+                <a:spcPts val="1426"/>
+              </a:lnSpc>
+            </a:pPr>
+            <a:r>
+              <a:rPr lang="en-US" sz="1600" b="0" u="none" strike="noStrike" dirty="0">
+                <a:solidFill>
+                  <a:srgbClr val="000000"/>
+                </a:solidFill>
+                <a:uFillTx/>
+                <a:latin typeface="Consolas"/>
+              </a:rPr>
+              <a:t>    </a:t>
+            </a:r>
+            <a:r>
+              <a:rPr lang="en-US" sz="1600" b="0" u="none" strike="noStrike" dirty="0">
+                <a:solidFill>
+                  <a:srgbClr val="A31515"/>
+                </a:solidFill>
+                <a:uFillTx/>
+                <a:latin typeface="Consolas"/>
+              </a:rPr>
+              <a:t>"Business applications benefit from AI."</a:t>
+            </a:r>
+            <a:r>
+              <a:rPr lang="en-US" sz="1600" b="0" u="none" strike="noStrike" dirty="0">
+                <a:solidFill>
+                  <a:srgbClr val="000000"/>
+                </a:solidFill>
+                <a:uFillTx/>
+                <a:latin typeface="Consolas"/>
+              </a:rPr>
+              <a:t>,</a:t>
+            </a:r>
+            <a:endParaRPr lang="en-US" sz="1600" b="0" u="none" strike="noStrike" dirty="0">
+              <a:solidFill>
+                <a:srgbClr val="000000"/>
+              </a:solidFill>
+              <a:uFillTx/>
+              <a:latin typeface="Arial"/>
+            </a:endParaRPr>
+          </a:p>
+          <a:p>
+            <a:pPr defTabSz="914400">
+              <a:lnSpc>
+                <a:spcPts val="1426"/>
+              </a:lnSpc>
+            </a:pPr>
+            <a:r>
+              <a:rPr lang="en-US" sz="1600" b="0" u="none" strike="noStrike" dirty="0">
+                <a:solidFill>
+                  <a:srgbClr val="000000"/>
+                </a:solidFill>
+                <a:uFillTx/>
+                <a:latin typeface="Consolas"/>
+              </a:rPr>
+              <a:t>    </a:t>
+            </a:r>
+            <a:r>
+              <a:rPr lang="en-US" sz="1600" b="0" u="none" strike="noStrike" dirty="0">
+                <a:solidFill>
+                  <a:srgbClr val="A31515"/>
+                </a:solidFill>
+                <a:uFillTx/>
+                <a:latin typeface="Consolas"/>
+              </a:rPr>
+              <a:t>"Language models learn from text data."</a:t>
+            </a:r>
+            <a:endParaRPr lang="en-US" sz="1600" b="0" u="none" strike="noStrike" dirty="0">
+              <a:solidFill>
+                <a:srgbClr val="000000"/>
+              </a:solidFill>
+              <a:uFillTx/>
+              <a:latin typeface="Arial"/>
+            </a:endParaRPr>
+          </a:p>
+          <a:p>
+            <a:pPr defTabSz="914400">
+              <a:lnSpc>
+                <a:spcPts val="1426"/>
+              </a:lnSpc>
+            </a:pPr>
+            <a:r>
+              <a:rPr lang="en-US" sz="1600" b="0" u="none" strike="noStrike" dirty="0">
+                <a:solidFill>
+                  <a:srgbClr val="000000"/>
+                </a:solidFill>
+                <a:uFillTx/>
+                <a:latin typeface="Consolas"/>
+              </a:rPr>
+              <a:t>]</a:t>
+            </a:r>
+            <a:endParaRPr lang="en-US" sz="1600" b="0" u="none" strike="noStrike" dirty="0">
+              <a:solidFill>
+                <a:srgbClr val="000000"/>
+              </a:solidFill>
+              <a:uFillTx/>
+              <a:latin typeface="Arial"/>
+            </a:endParaRPr>
+          </a:p>
+          <a:p>
+            <a:pPr defTabSz="914400">
+              <a:lnSpc>
+                <a:spcPts val="1426"/>
+              </a:lnSpc>
+            </a:pPr>
+            <a:br>
+              <a:rPr sz="1600" dirty="0"/>
+            </a:br>
+            <a:r>
+              <a:rPr lang="en-US" sz="1600" b="0" u="none" strike="noStrike" dirty="0">
+                <a:solidFill>
+                  <a:srgbClr val="000000"/>
+                </a:solidFill>
+                <a:uFillTx/>
+                <a:latin typeface="Consolas"/>
+              </a:rPr>
+              <a:t>vectorizer = </a:t>
+            </a:r>
+            <a:r>
+              <a:rPr lang="en-US" sz="1600" b="0" u="none" strike="noStrike" dirty="0" err="1">
+                <a:solidFill>
+                  <a:srgbClr val="000000"/>
+                </a:solidFill>
+                <a:uFillTx/>
+                <a:latin typeface="Consolas"/>
+              </a:rPr>
+              <a:t>CountVectorizer</a:t>
+            </a:r>
+            <a:r>
+              <a:rPr lang="en-US" sz="1600" b="0" u="none" strike="noStrike" dirty="0">
+                <a:solidFill>
+                  <a:srgbClr val="000000"/>
+                </a:solidFill>
+                <a:uFillTx/>
+                <a:latin typeface="Consolas"/>
+              </a:rPr>
+              <a:t>()</a:t>
+            </a:r>
+            <a:endParaRPr lang="en-US" sz="1600" b="0" u="none" strike="noStrike" dirty="0">
+              <a:solidFill>
+                <a:srgbClr val="000000"/>
+              </a:solidFill>
+              <a:uFillTx/>
+              <a:latin typeface="Arial"/>
+            </a:endParaRPr>
+          </a:p>
+          <a:p>
+            <a:pPr defTabSz="914400">
+              <a:lnSpc>
+                <a:spcPts val="1426"/>
+              </a:lnSpc>
+            </a:pPr>
+            <a:r>
+              <a:rPr lang="en-US" sz="1600" b="0" u="none" strike="noStrike" dirty="0">
+                <a:solidFill>
+                  <a:srgbClr val="000000"/>
+                </a:solidFill>
+                <a:uFillTx/>
+                <a:latin typeface="Consolas"/>
+              </a:rPr>
+              <a:t>X = </a:t>
+            </a:r>
+            <a:r>
+              <a:rPr lang="en-US" sz="1600" b="0" u="none" strike="noStrike" dirty="0" err="1">
+                <a:solidFill>
+                  <a:srgbClr val="000000"/>
+                </a:solidFill>
+                <a:uFillTx/>
+                <a:latin typeface="Consolas"/>
+              </a:rPr>
+              <a:t>vectorizer.fit_transform</a:t>
+            </a:r>
+            <a:r>
+              <a:rPr lang="en-US" sz="1600" b="0" u="none" strike="noStrike" dirty="0">
+                <a:solidFill>
+                  <a:srgbClr val="000000"/>
+                </a:solidFill>
+                <a:uFillTx/>
+                <a:latin typeface="Consolas"/>
+              </a:rPr>
+              <a:t>(corpus)</a:t>
+            </a:r>
+            <a:endParaRPr lang="en-US" sz="1600" b="0" u="none" strike="noStrike" dirty="0">
+              <a:solidFill>
+                <a:srgbClr val="000000"/>
+              </a:solidFill>
+              <a:uFillTx/>
+              <a:latin typeface="Arial"/>
+            </a:endParaRPr>
+          </a:p>
+          <a:p>
+            <a:pPr defTabSz="914400">
+              <a:lnSpc>
+                <a:spcPts val="1426"/>
+              </a:lnSpc>
+            </a:pPr>
+            <a:br>
+              <a:rPr sz="1600" dirty="0"/>
+            </a:br>
+            <a:r>
+              <a:rPr lang="en-US" sz="1600" b="0" u="none" strike="noStrike" dirty="0">
+                <a:solidFill>
+                  <a:srgbClr val="000000"/>
+                </a:solidFill>
+                <a:uFillTx/>
+                <a:latin typeface="Consolas"/>
+              </a:rPr>
+              <a:t>print(</a:t>
+            </a:r>
+            <a:r>
+              <a:rPr lang="en-US" sz="1600" b="0" u="none" strike="noStrike" dirty="0" err="1">
+                <a:solidFill>
+                  <a:srgbClr val="000000"/>
+                </a:solidFill>
+                <a:uFillTx/>
+                <a:latin typeface="Consolas"/>
+              </a:rPr>
+              <a:t>vectorizer.get_feature_names_out</a:t>
+            </a:r>
+            <a:r>
+              <a:rPr lang="en-US" sz="1600" b="0" u="none" strike="noStrike" dirty="0">
+                <a:solidFill>
+                  <a:srgbClr val="000000"/>
+                </a:solidFill>
+                <a:uFillTx/>
+                <a:latin typeface="Consolas"/>
+              </a:rPr>
+              <a:t>())</a:t>
+            </a:r>
+            <a:endParaRPr lang="en-US" sz="1600" b="0" u="none" strike="noStrike" dirty="0">
+              <a:solidFill>
+                <a:srgbClr val="000000"/>
+              </a:solidFill>
+              <a:uFillTx/>
+              <a:latin typeface="Arial"/>
+            </a:endParaRPr>
+          </a:p>
+          <a:p>
+            <a:pPr defTabSz="914400">
+              <a:lnSpc>
+                <a:spcPts val="1426"/>
+              </a:lnSpc>
+            </a:pPr>
+            <a:r>
+              <a:rPr lang="en-US" sz="1600" b="0" u="none" strike="noStrike" dirty="0">
+                <a:solidFill>
+                  <a:srgbClr val="000000"/>
+                </a:solidFill>
+                <a:uFillTx/>
+                <a:latin typeface="Consolas"/>
+              </a:rPr>
+              <a:t>print(</a:t>
+            </a:r>
+            <a:r>
+              <a:rPr lang="en-US" sz="1600" b="0" u="none" strike="noStrike" dirty="0" err="1">
+                <a:solidFill>
+                  <a:srgbClr val="000000"/>
+                </a:solidFill>
+                <a:uFillTx/>
+                <a:latin typeface="Consolas"/>
+              </a:rPr>
+              <a:t>X.toarray</a:t>
+            </a:r>
+            <a:r>
+              <a:rPr lang="en-US" sz="1600" b="0" u="none" strike="noStrike" dirty="0">
+                <a:solidFill>
+                  <a:srgbClr val="000000"/>
+                </a:solidFill>
+                <a:uFillTx/>
+                <a:latin typeface="Consolas"/>
+              </a:rPr>
+              <a:t>())</a:t>
+            </a:r>
+            <a:endParaRPr lang="en-US" sz="1600" b="0" u="none" strike="noStrike" dirty="0">
+              <a:solidFill>
+                <a:srgbClr val="000000"/>
+              </a:solidFill>
+              <a:uFillTx/>
+              <a:latin typeface="Arial"/>
+            </a:endParaRPr>
+          </a:p>
+        </p:txBody>
+      </p:sp>
+      <p:graphicFrame>
+        <p:nvGraphicFramePr>
+          <p:cNvPr id="16" name="Table 15">
+            <a:extLst>
+              <a:ext uri="{FF2B5EF4-FFF2-40B4-BE49-F238E27FC236}">
+                <a16:creationId xmlns:a16="http://schemas.microsoft.com/office/drawing/2014/main" id="{BC0E043D-BB8A-32DC-EAC8-72A7D0CA169C}"/>
+              </a:ext>
+            </a:extLst>
+          </p:cNvPr>
+          <p:cNvGraphicFramePr>
+            <a:graphicFrameLocks noGrp="1"/>
+          </p:cNvGraphicFramePr>
+          <p:nvPr>
+            <p:extLst>
+              <p:ext uri="{D42A27DB-BD31-4B8C-83A1-F6EECF244321}">
+                <p14:modId xmlns:p14="http://schemas.microsoft.com/office/powerpoint/2010/main" val="979654954"/>
+              </p:ext>
+            </p:extLst>
+          </p:nvPr>
+        </p:nvGraphicFramePr>
+        <p:xfrm>
+          <a:off x="838080" y="4543936"/>
+          <a:ext cx="7924800" cy="952500"/>
+        </p:xfrm>
+        <a:graphic>
+          <a:graphicData uri="http://schemas.openxmlformats.org/drawingml/2006/table">
+            <a:tbl>
+              <a:tblPr>
+                <a:tableStyleId>{5940675A-B579-460E-94D1-54222C63F5DA}</a:tableStyleId>
+              </a:tblPr>
+              <a:tblGrid>
+                <a:gridCol w="609600">
+                  <a:extLst>
+                    <a:ext uri="{9D8B030D-6E8A-4147-A177-3AD203B41FA5}">
+                      <a16:colId xmlns:a16="http://schemas.microsoft.com/office/drawing/2014/main" val="254143390"/>
+                    </a:ext>
+                  </a:extLst>
+                </a:gridCol>
+                <a:gridCol w="609600">
+                  <a:extLst>
+                    <a:ext uri="{9D8B030D-6E8A-4147-A177-3AD203B41FA5}">
+                      <a16:colId xmlns:a16="http://schemas.microsoft.com/office/drawing/2014/main" val="3842396351"/>
+                    </a:ext>
+                  </a:extLst>
+                </a:gridCol>
+                <a:gridCol w="609600">
+                  <a:extLst>
+                    <a:ext uri="{9D8B030D-6E8A-4147-A177-3AD203B41FA5}">
+                      <a16:colId xmlns:a16="http://schemas.microsoft.com/office/drawing/2014/main" val="2475232128"/>
+                    </a:ext>
+                  </a:extLst>
+                </a:gridCol>
+                <a:gridCol w="609600">
+                  <a:extLst>
+                    <a:ext uri="{9D8B030D-6E8A-4147-A177-3AD203B41FA5}">
+                      <a16:colId xmlns:a16="http://schemas.microsoft.com/office/drawing/2014/main" val="2314262909"/>
+                    </a:ext>
+                  </a:extLst>
+                </a:gridCol>
+                <a:gridCol w="609600">
+                  <a:extLst>
+                    <a:ext uri="{9D8B030D-6E8A-4147-A177-3AD203B41FA5}">
+                      <a16:colId xmlns:a16="http://schemas.microsoft.com/office/drawing/2014/main" val="2837760356"/>
+                    </a:ext>
+                  </a:extLst>
+                </a:gridCol>
+                <a:gridCol w="609600">
+                  <a:extLst>
+                    <a:ext uri="{9D8B030D-6E8A-4147-A177-3AD203B41FA5}">
+                      <a16:colId xmlns:a16="http://schemas.microsoft.com/office/drawing/2014/main" val="923368252"/>
+                    </a:ext>
+                  </a:extLst>
+                </a:gridCol>
+                <a:gridCol w="609600">
+                  <a:extLst>
+                    <a:ext uri="{9D8B030D-6E8A-4147-A177-3AD203B41FA5}">
+                      <a16:colId xmlns:a16="http://schemas.microsoft.com/office/drawing/2014/main" val="3291792508"/>
+                    </a:ext>
+                  </a:extLst>
+                </a:gridCol>
+                <a:gridCol w="609600">
+                  <a:extLst>
+                    <a:ext uri="{9D8B030D-6E8A-4147-A177-3AD203B41FA5}">
+                      <a16:colId xmlns:a16="http://schemas.microsoft.com/office/drawing/2014/main" val="2872816298"/>
+                    </a:ext>
+                  </a:extLst>
+                </a:gridCol>
+                <a:gridCol w="609600">
+                  <a:extLst>
+                    <a:ext uri="{9D8B030D-6E8A-4147-A177-3AD203B41FA5}">
+                      <a16:colId xmlns:a16="http://schemas.microsoft.com/office/drawing/2014/main" val="1651679254"/>
+                    </a:ext>
+                  </a:extLst>
+                </a:gridCol>
+                <a:gridCol w="609600">
+                  <a:extLst>
+                    <a:ext uri="{9D8B030D-6E8A-4147-A177-3AD203B41FA5}">
+                      <a16:colId xmlns:a16="http://schemas.microsoft.com/office/drawing/2014/main" val="3640445226"/>
+                    </a:ext>
+                  </a:extLst>
+                </a:gridCol>
+                <a:gridCol w="609600">
+                  <a:extLst>
+                    <a:ext uri="{9D8B030D-6E8A-4147-A177-3AD203B41FA5}">
+                      <a16:colId xmlns:a16="http://schemas.microsoft.com/office/drawing/2014/main" val="1341501605"/>
+                    </a:ext>
+                  </a:extLst>
+                </a:gridCol>
+                <a:gridCol w="609600">
+                  <a:extLst>
+                    <a:ext uri="{9D8B030D-6E8A-4147-A177-3AD203B41FA5}">
+                      <a16:colId xmlns:a16="http://schemas.microsoft.com/office/drawing/2014/main" val="1801874761"/>
+                    </a:ext>
+                  </a:extLst>
+                </a:gridCol>
+                <a:gridCol w="609600">
+                  <a:extLst>
+                    <a:ext uri="{9D8B030D-6E8A-4147-A177-3AD203B41FA5}">
+                      <a16:colId xmlns:a16="http://schemas.microsoft.com/office/drawing/2014/main" val="2320014948"/>
+                    </a:ext>
+                  </a:extLst>
+                </a:gridCol>
+              </a:tblGrid>
+              <a:tr h="381000">
+                <a:tc>
+                  <a:txBody>
+                    <a:bodyPr/>
+                    <a:lstStyle/>
+                    <a:p>
+                      <a:pPr algn="ctr" fontAlgn="ctr"/>
+                      <a:endParaRPr lang="en-US" sz="1100" b="1" i="0" u="none" strike="noStrike">
+                        <a:solidFill>
+                          <a:srgbClr val="000000"/>
+                        </a:solidFill>
+                        <a:effectLst/>
+                        <a:latin typeface="Aptos Narrow" panose="020B0004020202020204" pitchFamily="34" charset="0"/>
+                      </a:endParaRPr>
+                    </a:p>
+                  </a:txBody>
+                  <a:tcPr marL="9525" marR="9525" marT="9525" marB="0" anchor="ctr">
+                    <a:solidFill>
+                      <a:schemeClr val="bg1">
+                        <a:lumMod val="85000"/>
+                      </a:schemeClr>
+                    </a:solidFill>
+                  </a:tcPr>
+                </a:tc>
+                <a:tc>
+                  <a:txBody>
+                    <a:bodyPr/>
+                    <a:lstStyle/>
+                    <a:p>
+                      <a:pPr algn="ctr" fontAlgn="ctr"/>
+                      <a:r>
+                        <a:rPr lang="en-US" sz="1100" b="1" u="none" strike="noStrike">
+                          <a:effectLst/>
+                        </a:rPr>
+                        <a:t>ai</a:t>
+                      </a:r>
+                      <a:endParaRPr lang="en-US" sz="1100" b="1" i="0" u="none" strike="noStrike">
+                        <a:solidFill>
+                          <a:srgbClr val="000000"/>
+                        </a:solidFill>
+                        <a:effectLst/>
+                        <a:latin typeface="Aptos Narrow" panose="020B0004020202020204" pitchFamily="34" charset="0"/>
+                      </a:endParaRPr>
+                    </a:p>
+                  </a:txBody>
+                  <a:tcPr marL="9525" marR="9525" marT="9525" marB="0" anchor="ctr">
+                    <a:solidFill>
+                      <a:schemeClr val="bg1">
+                        <a:lumMod val="85000"/>
+                      </a:schemeClr>
+                    </a:solidFill>
+                  </a:tcPr>
+                </a:tc>
+                <a:tc>
+                  <a:txBody>
+                    <a:bodyPr/>
+                    <a:lstStyle/>
+                    <a:p>
+                      <a:pPr algn="ctr" fontAlgn="ctr"/>
+                      <a:r>
+                        <a:rPr lang="en-US" sz="1100" b="1" u="none" strike="noStrike">
+                          <a:effectLst/>
+                        </a:rPr>
+                        <a:t>applications</a:t>
+                      </a:r>
+                      <a:endParaRPr lang="en-US" sz="1100" b="1" i="0" u="none" strike="noStrike">
+                        <a:solidFill>
+                          <a:srgbClr val="000000"/>
+                        </a:solidFill>
+                        <a:effectLst/>
+                        <a:latin typeface="Aptos Narrow" panose="020B0004020202020204" pitchFamily="34" charset="0"/>
+                      </a:endParaRPr>
+                    </a:p>
+                  </a:txBody>
+                  <a:tcPr marL="9525" marR="9525" marT="9525" marB="0" anchor="ctr">
+                    <a:solidFill>
+                      <a:schemeClr val="bg1">
+                        <a:lumMod val="85000"/>
+                      </a:schemeClr>
+                    </a:solidFill>
+                  </a:tcPr>
+                </a:tc>
+                <a:tc>
+                  <a:txBody>
+                    <a:bodyPr/>
+                    <a:lstStyle/>
+                    <a:p>
+                      <a:pPr algn="ctr" fontAlgn="ctr"/>
+                      <a:r>
+                        <a:rPr lang="en-US" sz="1100" b="1" u="none" strike="noStrike">
+                          <a:effectLst/>
+                        </a:rPr>
+                        <a:t>benefit</a:t>
+                      </a:r>
+                      <a:endParaRPr lang="en-US" sz="1100" b="1" i="0" u="none" strike="noStrike">
+                        <a:solidFill>
+                          <a:srgbClr val="000000"/>
+                        </a:solidFill>
+                        <a:effectLst/>
+                        <a:latin typeface="Aptos Narrow" panose="020B0004020202020204" pitchFamily="34" charset="0"/>
+                      </a:endParaRPr>
+                    </a:p>
+                  </a:txBody>
+                  <a:tcPr marL="9525" marR="9525" marT="9525" marB="0" anchor="ctr">
+                    <a:solidFill>
+                      <a:schemeClr val="bg1">
+                        <a:lumMod val="85000"/>
+                      </a:schemeClr>
+                    </a:solidFill>
+                  </a:tcPr>
+                </a:tc>
+                <a:tc>
+                  <a:txBody>
+                    <a:bodyPr/>
+                    <a:lstStyle/>
+                    <a:p>
+                      <a:pPr algn="ctr" fontAlgn="ctr"/>
+                      <a:r>
+                        <a:rPr lang="en-US" sz="1100" b="1" u="none" strike="noStrike">
+                          <a:effectLst/>
+                        </a:rPr>
+                        <a:t>business</a:t>
+                      </a:r>
+                      <a:endParaRPr lang="en-US" sz="1100" b="1" i="0" u="none" strike="noStrike">
+                        <a:solidFill>
+                          <a:srgbClr val="000000"/>
+                        </a:solidFill>
+                        <a:effectLst/>
+                        <a:latin typeface="Aptos Narrow" panose="020B0004020202020204" pitchFamily="34" charset="0"/>
+                      </a:endParaRPr>
+                    </a:p>
+                  </a:txBody>
+                  <a:tcPr marL="9525" marR="9525" marT="9525" marB="0" anchor="ctr">
+                    <a:solidFill>
+                      <a:schemeClr val="bg1">
+                        <a:lumMod val="85000"/>
+                      </a:schemeClr>
+                    </a:solidFill>
+                  </a:tcPr>
+                </a:tc>
+                <a:tc>
+                  <a:txBody>
+                    <a:bodyPr/>
+                    <a:lstStyle/>
+                    <a:p>
+                      <a:pPr algn="ctr" fontAlgn="ctr"/>
+                      <a:r>
+                        <a:rPr lang="en-US" sz="1100" b="1" u="none" strike="noStrike">
+                          <a:effectLst/>
+                        </a:rPr>
+                        <a:t>data</a:t>
+                      </a:r>
+                      <a:endParaRPr lang="en-US" sz="1100" b="1" i="0" u="none" strike="noStrike">
+                        <a:solidFill>
+                          <a:srgbClr val="000000"/>
+                        </a:solidFill>
+                        <a:effectLst/>
+                        <a:latin typeface="Aptos Narrow" panose="020B0004020202020204" pitchFamily="34" charset="0"/>
+                      </a:endParaRPr>
+                    </a:p>
+                  </a:txBody>
+                  <a:tcPr marL="9525" marR="9525" marT="9525" marB="0" anchor="ctr">
+                    <a:solidFill>
+                      <a:schemeClr val="bg1">
+                        <a:lumMod val="85000"/>
+                      </a:schemeClr>
+                    </a:solidFill>
+                  </a:tcPr>
+                </a:tc>
+                <a:tc>
+                  <a:txBody>
+                    <a:bodyPr/>
+                    <a:lstStyle/>
+                    <a:p>
+                      <a:pPr algn="ctr" fontAlgn="ctr"/>
+                      <a:r>
+                        <a:rPr lang="en-US" sz="1100" b="1" u="none" strike="noStrike">
+                          <a:effectLst/>
+                        </a:rPr>
+                        <a:t>from</a:t>
+                      </a:r>
+                      <a:endParaRPr lang="en-US" sz="1100" b="1" i="0" u="none" strike="noStrike">
+                        <a:solidFill>
+                          <a:srgbClr val="000000"/>
+                        </a:solidFill>
+                        <a:effectLst/>
+                        <a:latin typeface="Aptos Narrow" panose="020B0004020202020204" pitchFamily="34" charset="0"/>
+                      </a:endParaRPr>
+                    </a:p>
+                  </a:txBody>
+                  <a:tcPr marL="9525" marR="9525" marT="9525" marB="0" anchor="ctr">
+                    <a:solidFill>
+                      <a:schemeClr val="bg1">
+                        <a:lumMod val="85000"/>
+                      </a:schemeClr>
+                    </a:solidFill>
+                  </a:tcPr>
+                </a:tc>
+                <a:tc>
+                  <a:txBody>
+                    <a:bodyPr/>
+                    <a:lstStyle/>
+                    <a:p>
+                      <a:pPr algn="ctr" fontAlgn="ctr"/>
+                      <a:r>
+                        <a:rPr lang="en-US" sz="1100" b="1" u="none" strike="noStrike" dirty="0">
+                          <a:effectLst/>
+                        </a:rPr>
+                        <a:t>language</a:t>
+                      </a:r>
+                      <a:endParaRPr lang="en-US" sz="1100" b="1" i="0" u="none" strike="noStrike" dirty="0">
+                        <a:solidFill>
+                          <a:srgbClr val="000000"/>
+                        </a:solidFill>
+                        <a:effectLst/>
+                        <a:latin typeface="Aptos Narrow" panose="020B0004020202020204" pitchFamily="34" charset="0"/>
+                      </a:endParaRPr>
+                    </a:p>
+                  </a:txBody>
+                  <a:tcPr marL="9525" marR="9525" marT="9525" marB="0" anchor="ctr">
+                    <a:solidFill>
+                      <a:schemeClr val="bg1">
+                        <a:lumMod val="85000"/>
+                      </a:schemeClr>
+                    </a:solidFill>
+                  </a:tcPr>
+                </a:tc>
+                <a:tc>
+                  <a:txBody>
+                    <a:bodyPr/>
+                    <a:lstStyle/>
+                    <a:p>
+                      <a:pPr algn="ctr" fontAlgn="ctr"/>
+                      <a:r>
+                        <a:rPr lang="en-US" sz="1100" b="1" u="none" strike="noStrike">
+                          <a:effectLst/>
+                        </a:rPr>
+                        <a:t>large</a:t>
+                      </a:r>
+                      <a:endParaRPr lang="en-US" sz="1100" b="1" i="0" u="none" strike="noStrike">
+                        <a:solidFill>
+                          <a:srgbClr val="000000"/>
+                        </a:solidFill>
+                        <a:effectLst/>
+                        <a:latin typeface="Aptos Narrow" panose="020B0004020202020204" pitchFamily="34" charset="0"/>
+                      </a:endParaRPr>
+                    </a:p>
+                  </a:txBody>
+                  <a:tcPr marL="9525" marR="9525" marT="9525" marB="0" anchor="ctr">
+                    <a:solidFill>
+                      <a:schemeClr val="bg1">
+                        <a:lumMod val="85000"/>
+                      </a:schemeClr>
+                    </a:solidFill>
+                  </a:tcPr>
+                </a:tc>
+                <a:tc>
+                  <a:txBody>
+                    <a:bodyPr/>
+                    <a:lstStyle/>
+                    <a:p>
+                      <a:pPr algn="ctr" fontAlgn="ctr"/>
+                      <a:r>
+                        <a:rPr lang="en-US" sz="1100" b="1" u="none" strike="noStrike">
+                          <a:effectLst/>
+                        </a:rPr>
+                        <a:t>learn</a:t>
+                      </a:r>
+                      <a:endParaRPr lang="en-US" sz="1100" b="1" i="0" u="none" strike="noStrike">
+                        <a:solidFill>
+                          <a:srgbClr val="000000"/>
+                        </a:solidFill>
+                        <a:effectLst/>
+                        <a:latin typeface="Aptos Narrow" panose="020B0004020202020204" pitchFamily="34" charset="0"/>
+                      </a:endParaRPr>
+                    </a:p>
+                  </a:txBody>
+                  <a:tcPr marL="9525" marR="9525" marT="9525" marB="0" anchor="ctr">
+                    <a:solidFill>
+                      <a:schemeClr val="bg1">
+                        <a:lumMod val="85000"/>
+                      </a:schemeClr>
+                    </a:solidFill>
+                  </a:tcPr>
+                </a:tc>
+                <a:tc>
+                  <a:txBody>
+                    <a:bodyPr/>
+                    <a:lstStyle/>
+                    <a:p>
+                      <a:pPr algn="ctr" fontAlgn="ctr"/>
+                      <a:r>
+                        <a:rPr lang="en-US" sz="1100" b="1" u="none" strike="noStrike">
+                          <a:effectLst/>
+                        </a:rPr>
+                        <a:t>models</a:t>
+                      </a:r>
+                      <a:endParaRPr lang="en-US" sz="1100" b="1" i="0" u="none" strike="noStrike">
+                        <a:solidFill>
+                          <a:srgbClr val="000000"/>
+                        </a:solidFill>
+                        <a:effectLst/>
+                        <a:latin typeface="Aptos Narrow" panose="020B0004020202020204" pitchFamily="34" charset="0"/>
+                      </a:endParaRPr>
+                    </a:p>
+                  </a:txBody>
+                  <a:tcPr marL="9525" marR="9525" marT="9525" marB="0" anchor="ctr">
+                    <a:solidFill>
+                      <a:schemeClr val="bg1">
+                        <a:lumMod val="85000"/>
+                      </a:schemeClr>
+                    </a:solidFill>
+                  </a:tcPr>
+                </a:tc>
+                <a:tc>
+                  <a:txBody>
+                    <a:bodyPr/>
+                    <a:lstStyle/>
+                    <a:p>
+                      <a:pPr algn="ctr" fontAlgn="ctr"/>
+                      <a:r>
+                        <a:rPr lang="en-US" sz="1100" b="1" u="none" strike="noStrike">
+                          <a:effectLst/>
+                        </a:rPr>
+                        <a:t>revolutionize</a:t>
+                      </a:r>
+                      <a:endParaRPr lang="en-US" sz="1100" b="1" i="0" u="none" strike="noStrike">
+                        <a:solidFill>
+                          <a:srgbClr val="000000"/>
+                        </a:solidFill>
+                        <a:effectLst/>
+                        <a:latin typeface="Aptos Narrow" panose="020B0004020202020204" pitchFamily="34" charset="0"/>
+                      </a:endParaRPr>
+                    </a:p>
+                  </a:txBody>
+                  <a:tcPr marL="9525" marR="9525" marT="9525" marB="0" anchor="ctr">
+                    <a:solidFill>
+                      <a:schemeClr val="bg1">
+                        <a:lumMod val="85000"/>
+                      </a:schemeClr>
+                    </a:solidFill>
+                  </a:tcPr>
+                </a:tc>
+                <a:tc>
+                  <a:txBody>
+                    <a:bodyPr/>
+                    <a:lstStyle/>
+                    <a:p>
+                      <a:pPr algn="ctr" fontAlgn="ctr"/>
+                      <a:r>
+                        <a:rPr lang="en-US" sz="1100" b="1" u="none" strike="noStrike" dirty="0">
+                          <a:effectLst/>
+                        </a:rPr>
+                        <a:t>text</a:t>
+                      </a:r>
+                      <a:endParaRPr lang="en-US" sz="1100" b="1" i="0" u="none" strike="noStrike" dirty="0">
+                        <a:solidFill>
+                          <a:srgbClr val="000000"/>
+                        </a:solidFill>
+                        <a:effectLst/>
+                        <a:latin typeface="Aptos Narrow" panose="020B0004020202020204" pitchFamily="34" charset="0"/>
+                      </a:endParaRPr>
+                    </a:p>
+                  </a:txBody>
+                  <a:tcPr marL="9525" marR="9525" marT="9525" marB="0" anchor="ctr">
+                    <a:solidFill>
+                      <a:schemeClr val="bg1">
+                        <a:lumMod val="85000"/>
+                      </a:schemeClr>
+                    </a:solidFill>
+                  </a:tcPr>
+                </a:tc>
+                <a:extLst>
+                  <a:ext uri="{0D108BD9-81ED-4DB2-BD59-A6C34878D82A}">
+                    <a16:rowId xmlns:a16="http://schemas.microsoft.com/office/drawing/2014/main" val="3747941118"/>
+                  </a:ext>
+                </a:extLst>
+              </a:tr>
+              <a:tr h="190500">
+                <a:tc>
+                  <a:txBody>
+                    <a:bodyPr/>
+                    <a:lstStyle/>
+                    <a:p>
+                      <a:pPr algn="ctr" fontAlgn="ctr"/>
+                      <a:r>
+                        <a:rPr lang="en-US" sz="1100" b="1" u="none" strike="noStrike">
+                          <a:effectLst/>
+                        </a:rPr>
+                        <a:t>Vector 1</a:t>
+                      </a:r>
+                      <a:endParaRPr lang="en-US" sz="1100" b="1" i="0" u="none" strike="noStrike">
+                        <a:solidFill>
+                          <a:srgbClr val="000000"/>
+                        </a:solidFill>
+                        <a:effectLst/>
+                        <a:latin typeface="Aptos Narrow" panose="020B0004020202020204" pitchFamily="34" charset="0"/>
+                      </a:endParaRPr>
+                    </a:p>
+                  </a:txBody>
+                  <a:tcPr marL="9525" marR="9525" marT="9525" marB="0" anchor="ctr"/>
+                </a:tc>
+                <a:tc>
+                  <a:txBody>
+                    <a:bodyPr/>
+                    <a:lstStyle/>
+                    <a:p>
+                      <a:pPr algn="ctr" fontAlgn="ctr"/>
+                      <a:r>
+                        <a:rPr lang="en-US" sz="1100" u="none" strike="noStrike">
+                          <a:effectLst/>
+                        </a:rPr>
+                        <a:t>0</a:t>
+                      </a:r>
+                      <a:endParaRPr lang="en-US" sz="1100" b="0" i="0" u="none" strike="noStrike">
+                        <a:solidFill>
+                          <a:srgbClr val="000000"/>
+                        </a:solidFill>
+                        <a:effectLst/>
+                        <a:latin typeface="Aptos Narrow" panose="020B0004020202020204" pitchFamily="34" charset="0"/>
+                      </a:endParaRPr>
+                    </a:p>
+                  </a:txBody>
+                  <a:tcPr marL="9525" marR="9525" marT="9525" marB="0" anchor="ctr"/>
+                </a:tc>
+                <a:tc>
+                  <a:txBody>
+                    <a:bodyPr/>
+                    <a:lstStyle/>
+                    <a:p>
+                      <a:pPr algn="ctr" fontAlgn="ctr"/>
+                      <a:r>
+                        <a:rPr lang="en-US" sz="1100" u="none" strike="noStrike">
+                          <a:effectLst/>
+                        </a:rPr>
+                        <a:t>0</a:t>
+                      </a:r>
+                      <a:endParaRPr lang="en-US" sz="1100" b="0" i="0" u="none" strike="noStrike">
+                        <a:solidFill>
+                          <a:srgbClr val="000000"/>
+                        </a:solidFill>
+                        <a:effectLst/>
+                        <a:latin typeface="Aptos Narrow" panose="020B0004020202020204" pitchFamily="34" charset="0"/>
+                      </a:endParaRPr>
+                    </a:p>
+                  </a:txBody>
+                  <a:tcPr marL="9525" marR="9525" marT="9525" marB="0" anchor="ctr"/>
+                </a:tc>
+                <a:tc>
+                  <a:txBody>
+                    <a:bodyPr/>
+                    <a:lstStyle/>
+                    <a:p>
+                      <a:pPr algn="ctr" fontAlgn="ctr"/>
+                      <a:r>
+                        <a:rPr lang="en-US" sz="1100" u="none" strike="noStrike">
+                          <a:effectLst/>
+                        </a:rPr>
+                        <a:t>0</a:t>
+                      </a:r>
+                      <a:endParaRPr lang="en-US" sz="1100" b="0" i="0" u="none" strike="noStrike">
+                        <a:solidFill>
+                          <a:srgbClr val="000000"/>
+                        </a:solidFill>
+                        <a:effectLst/>
+                        <a:latin typeface="Aptos Narrow" panose="020B0004020202020204" pitchFamily="34" charset="0"/>
+                      </a:endParaRPr>
+                    </a:p>
+                  </a:txBody>
+                  <a:tcPr marL="9525" marR="9525" marT="9525" marB="0" anchor="ctr"/>
+                </a:tc>
+                <a:tc>
+                  <a:txBody>
+                    <a:bodyPr/>
+                    <a:lstStyle/>
+                    <a:p>
+                      <a:pPr algn="ctr" fontAlgn="ctr"/>
+                      <a:r>
+                        <a:rPr lang="en-US" sz="1100" u="none" strike="noStrike">
+                          <a:effectLst/>
+                        </a:rPr>
+                        <a:t>1</a:t>
+                      </a:r>
+                      <a:endParaRPr lang="en-US" sz="1100" b="0" i="0" u="none" strike="noStrike">
+                        <a:solidFill>
+                          <a:srgbClr val="000000"/>
+                        </a:solidFill>
+                        <a:effectLst/>
+                        <a:latin typeface="Aptos Narrow" panose="020B0004020202020204" pitchFamily="34" charset="0"/>
+                      </a:endParaRPr>
+                    </a:p>
+                  </a:txBody>
+                  <a:tcPr marL="9525" marR="9525" marT="9525" marB="0" anchor="ctr"/>
+                </a:tc>
+                <a:tc>
+                  <a:txBody>
+                    <a:bodyPr/>
+                    <a:lstStyle/>
+                    <a:p>
+                      <a:pPr algn="ctr" fontAlgn="ctr"/>
+                      <a:r>
+                        <a:rPr lang="en-US" sz="1100" u="none" strike="noStrike">
+                          <a:effectLst/>
+                        </a:rPr>
+                        <a:t>0</a:t>
+                      </a:r>
+                      <a:endParaRPr lang="en-US" sz="1100" b="0" i="0" u="none" strike="noStrike">
+                        <a:solidFill>
+                          <a:srgbClr val="000000"/>
+                        </a:solidFill>
+                        <a:effectLst/>
+                        <a:latin typeface="Aptos Narrow" panose="020B0004020202020204" pitchFamily="34" charset="0"/>
+                      </a:endParaRPr>
+                    </a:p>
+                  </a:txBody>
+                  <a:tcPr marL="9525" marR="9525" marT="9525" marB="0" anchor="ctr"/>
+                </a:tc>
+                <a:tc>
+                  <a:txBody>
+                    <a:bodyPr/>
+                    <a:lstStyle/>
+                    <a:p>
+                      <a:pPr algn="ctr" fontAlgn="ctr"/>
+                      <a:r>
+                        <a:rPr lang="en-US" sz="1100" u="none" strike="noStrike">
+                          <a:effectLst/>
+                        </a:rPr>
+                        <a:t>0</a:t>
+                      </a:r>
+                      <a:endParaRPr lang="en-US" sz="1100" b="0" i="0" u="none" strike="noStrike">
+                        <a:solidFill>
+                          <a:srgbClr val="000000"/>
+                        </a:solidFill>
+                        <a:effectLst/>
+                        <a:latin typeface="Aptos Narrow" panose="020B0004020202020204" pitchFamily="34" charset="0"/>
+                      </a:endParaRPr>
+                    </a:p>
+                  </a:txBody>
+                  <a:tcPr marL="9525" marR="9525" marT="9525" marB="0" anchor="ctr"/>
+                </a:tc>
+                <a:tc>
+                  <a:txBody>
+                    <a:bodyPr/>
+                    <a:lstStyle/>
+                    <a:p>
+                      <a:pPr algn="ctr" fontAlgn="ctr"/>
+                      <a:r>
+                        <a:rPr lang="en-US" sz="1100" u="none" strike="noStrike">
+                          <a:effectLst/>
+                        </a:rPr>
+                        <a:t>1</a:t>
+                      </a:r>
+                      <a:endParaRPr lang="en-US" sz="1100" b="0" i="0" u="none" strike="noStrike">
+                        <a:solidFill>
+                          <a:srgbClr val="000000"/>
+                        </a:solidFill>
+                        <a:effectLst/>
+                        <a:latin typeface="Aptos Narrow" panose="020B0004020202020204" pitchFamily="34" charset="0"/>
+                      </a:endParaRPr>
+                    </a:p>
+                  </a:txBody>
+                  <a:tcPr marL="9525" marR="9525" marT="9525" marB="0" anchor="ctr"/>
+                </a:tc>
+                <a:tc>
+                  <a:txBody>
+                    <a:bodyPr/>
+                    <a:lstStyle/>
+                    <a:p>
+                      <a:pPr algn="ctr" fontAlgn="ctr"/>
+                      <a:r>
+                        <a:rPr lang="en-US" sz="1100" u="none" strike="noStrike">
+                          <a:effectLst/>
+                        </a:rPr>
+                        <a:t>1</a:t>
+                      </a:r>
+                      <a:endParaRPr lang="en-US" sz="1100" b="0" i="0" u="none" strike="noStrike">
+                        <a:solidFill>
+                          <a:srgbClr val="000000"/>
+                        </a:solidFill>
+                        <a:effectLst/>
+                        <a:latin typeface="Aptos Narrow" panose="020B0004020202020204" pitchFamily="34" charset="0"/>
+                      </a:endParaRPr>
+                    </a:p>
+                  </a:txBody>
+                  <a:tcPr marL="9525" marR="9525" marT="9525" marB="0" anchor="ctr"/>
+                </a:tc>
+                <a:tc>
+                  <a:txBody>
+                    <a:bodyPr/>
+                    <a:lstStyle/>
+                    <a:p>
+                      <a:pPr algn="ctr" fontAlgn="ctr"/>
+                      <a:r>
+                        <a:rPr lang="en-US" sz="1100" u="none" strike="noStrike">
+                          <a:effectLst/>
+                        </a:rPr>
+                        <a:t>0</a:t>
+                      </a:r>
+                      <a:endParaRPr lang="en-US" sz="1100" b="0" i="0" u="none" strike="noStrike">
+                        <a:solidFill>
+                          <a:srgbClr val="000000"/>
+                        </a:solidFill>
+                        <a:effectLst/>
+                        <a:latin typeface="Aptos Narrow" panose="020B0004020202020204" pitchFamily="34" charset="0"/>
+                      </a:endParaRPr>
+                    </a:p>
+                  </a:txBody>
+                  <a:tcPr marL="9525" marR="9525" marT="9525" marB="0" anchor="ctr"/>
+                </a:tc>
+                <a:tc>
+                  <a:txBody>
+                    <a:bodyPr/>
+                    <a:lstStyle/>
+                    <a:p>
+                      <a:pPr algn="ctr" fontAlgn="ctr"/>
+                      <a:r>
+                        <a:rPr lang="en-US" sz="1100" u="none" strike="noStrike">
+                          <a:effectLst/>
+                        </a:rPr>
+                        <a:t>1</a:t>
+                      </a:r>
+                      <a:endParaRPr lang="en-US" sz="1100" b="0" i="0" u="none" strike="noStrike">
+                        <a:solidFill>
+                          <a:srgbClr val="000000"/>
+                        </a:solidFill>
+                        <a:effectLst/>
+                        <a:latin typeface="Aptos Narrow" panose="020B0004020202020204" pitchFamily="34" charset="0"/>
+                      </a:endParaRPr>
+                    </a:p>
+                  </a:txBody>
+                  <a:tcPr marL="9525" marR="9525" marT="9525" marB="0" anchor="ctr"/>
+                </a:tc>
+                <a:tc>
+                  <a:txBody>
+                    <a:bodyPr/>
+                    <a:lstStyle/>
+                    <a:p>
+                      <a:pPr algn="ctr" fontAlgn="ctr"/>
+                      <a:r>
+                        <a:rPr lang="en-US" sz="1100" u="none" strike="noStrike">
+                          <a:effectLst/>
+                        </a:rPr>
+                        <a:t>1</a:t>
+                      </a:r>
+                      <a:endParaRPr lang="en-US" sz="1100" b="0" i="0" u="none" strike="noStrike">
+                        <a:solidFill>
+                          <a:srgbClr val="000000"/>
+                        </a:solidFill>
+                        <a:effectLst/>
+                        <a:latin typeface="Aptos Narrow" panose="020B0004020202020204" pitchFamily="34" charset="0"/>
+                      </a:endParaRPr>
+                    </a:p>
+                  </a:txBody>
+                  <a:tcPr marL="9525" marR="9525" marT="9525" marB="0" anchor="ctr"/>
+                </a:tc>
+                <a:tc>
+                  <a:txBody>
+                    <a:bodyPr/>
+                    <a:lstStyle/>
+                    <a:p>
+                      <a:pPr algn="ctr" fontAlgn="ctr"/>
+                      <a:r>
+                        <a:rPr lang="en-US" sz="1100" u="none" strike="noStrike">
+                          <a:effectLst/>
+                        </a:rPr>
+                        <a:t>0</a:t>
+                      </a:r>
+                      <a:endParaRPr lang="en-US" sz="1100" b="0" i="0" u="none" strike="noStrike">
+                        <a:solidFill>
+                          <a:srgbClr val="000000"/>
+                        </a:solidFill>
+                        <a:effectLst/>
+                        <a:latin typeface="Aptos Narrow" panose="020B0004020202020204" pitchFamily="34" charset="0"/>
+                      </a:endParaRPr>
+                    </a:p>
+                  </a:txBody>
+                  <a:tcPr marL="9525" marR="9525" marT="9525" marB="0" anchor="ctr"/>
+                </a:tc>
+                <a:extLst>
+                  <a:ext uri="{0D108BD9-81ED-4DB2-BD59-A6C34878D82A}">
+                    <a16:rowId xmlns:a16="http://schemas.microsoft.com/office/drawing/2014/main" val="2077337671"/>
+                  </a:ext>
+                </a:extLst>
+              </a:tr>
+              <a:tr h="190500">
+                <a:tc>
+                  <a:txBody>
+                    <a:bodyPr/>
+                    <a:lstStyle/>
+                    <a:p>
+                      <a:pPr algn="ctr" fontAlgn="ctr"/>
+                      <a:r>
+                        <a:rPr lang="en-US" sz="1100" b="1" u="none" strike="noStrike">
+                          <a:effectLst/>
+                        </a:rPr>
+                        <a:t>Vector 2</a:t>
+                      </a:r>
+                      <a:endParaRPr lang="en-US" sz="1100" b="1" i="0" u="none" strike="noStrike">
+                        <a:solidFill>
+                          <a:srgbClr val="000000"/>
+                        </a:solidFill>
+                        <a:effectLst/>
+                        <a:latin typeface="Aptos Narrow" panose="020B0004020202020204" pitchFamily="34" charset="0"/>
+                      </a:endParaRPr>
+                    </a:p>
+                  </a:txBody>
+                  <a:tcPr marL="9525" marR="9525" marT="9525" marB="0" anchor="ctr"/>
+                </a:tc>
+                <a:tc>
+                  <a:txBody>
+                    <a:bodyPr/>
+                    <a:lstStyle/>
+                    <a:p>
+                      <a:pPr algn="ctr" fontAlgn="ctr"/>
+                      <a:r>
+                        <a:rPr lang="en-US" sz="1100" u="none" strike="noStrike">
+                          <a:effectLst/>
+                        </a:rPr>
+                        <a:t>1</a:t>
+                      </a:r>
+                      <a:endParaRPr lang="en-US" sz="1100" b="0" i="0" u="none" strike="noStrike">
+                        <a:solidFill>
+                          <a:srgbClr val="000000"/>
+                        </a:solidFill>
+                        <a:effectLst/>
+                        <a:latin typeface="Aptos Narrow" panose="020B0004020202020204" pitchFamily="34" charset="0"/>
+                      </a:endParaRPr>
+                    </a:p>
+                  </a:txBody>
+                  <a:tcPr marL="9525" marR="9525" marT="9525" marB="0" anchor="ctr"/>
+                </a:tc>
+                <a:tc>
+                  <a:txBody>
+                    <a:bodyPr/>
+                    <a:lstStyle/>
+                    <a:p>
+                      <a:pPr algn="ctr" fontAlgn="ctr"/>
+                      <a:r>
+                        <a:rPr lang="en-US" sz="1100" u="none" strike="noStrike">
+                          <a:effectLst/>
+                        </a:rPr>
+                        <a:t>1</a:t>
+                      </a:r>
+                      <a:endParaRPr lang="en-US" sz="1100" b="0" i="0" u="none" strike="noStrike">
+                        <a:solidFill>
+                          <a:srgbClr val="000000"/>
+                        </a:solidFill>
+                        <a:effectLst/>
+                        <a:latin typeface="Aptos Narrow" panose="020B0004020202020204" pitchFamily="34" charset="0"/>
+                      </a:endParaRPr>
+                    </a:p>
+                  </a:txBody>
+                  <a:tcPr marL="9525" marR="9525" marT="9525" marB="0" anchor="ctr"/>
+                </a:tc>
+                <a:tc>
+                  <a:txBody>
+                    <a:bodyPr/>
+                    <a:lstStyle/>
+                    <a:p>
+                      <a:pPr algn="ctr" fontAlgn="ctr"/>
+                      <a:r>
+                        <a:rPr lang="en-US" sz="1100" u="none" strike="noStrike">
+                          <a:effectLst/>
+                        </a:rPr>
+                        <a:t>1</a:t>
+                      </a:r>
+                      <a:endParaRPr lang="en-US" sz="1100" b="0" i="0" u="none" strike="noStrike">
+                        <a:solidFill>
+                          <a:srgbClr val="000000"/>
+                        </a:solidFill>
+                        <a:effectLst/>
+                        <a:latin typeface="Aptos Narrow" panose="020B0004020202020204" pitchFamily="34" charset="0"/>
+                      </a:endParaRPr>
+                    </a:p>
+                  </a:txBody>
+                  <a:tcPr marL="9525" marR="9525" marT="9525" marB="0" anchor="ctr"/>
+                </a:tc>
+                <a:tc>
+                  <a:txBody>
+                    <a:bodyPr/>
+                    <a:lstStyle/>
+                    <a:p>
+                      <a:pPr algn="ctr" fontAlgn="ctr"/>
+                      <a:r>
+                        <a:rPr lang="en-US" sz="1100" u="none" strike="noStrike">
+                          <a:effectLst/>
+                        </a:rPr>
+                        <a:t>0</a:t>
+                      </a:r>
+                      <a:endParaRPr lang="en-US" sz="1100" b="0" i="0" u="none" strike="noStrike">
+                        <a:solidFill>
+                          <a:srgbClr val="000000"/>
+                        </a:solidFill>
+                        <a:effectLst/>
+                        <a:latin typeface="Aptos Narrow" panose="020B0004020202020204" pitchFamily="34" charset="0"/>
+                      </a:endParaRPr>
+                    </a:p>
+                  </a:txBody>
+                  <a:tcPr marL="9525" marR="9525" marT="9525" marB="0" anchor="ctr"/>
+                </a:tc>
+                <a:tc>
+                  <a:txBody>
+                    <a:bodyPr/>
+                    <a:lstStyle/>
+                    <a:p>
+                      <a:pPr algn="ctr" fontAlgn="ctr"/>
+                      <a:r>
+                        <a:rPr lang="en-US" sz="1100" u="none" strike="noStrike">
+                          <a:effectLst/>
+                        </a:rPr>
+                        <a:t>0</a:t>
+                      </a:r>
+                      <a:endParaRPr lang="en-US" sz="1100" b="0" i="0" u="none" strike="noStrike">
+                        <a:solidFill>
+                          <a:srgbClr val="000000"/>
+                        </a:solidFill>
+                        <a:effectLst/>
+                        <a:latin typeface="Aptos Narrow" panose="020B0004020202020204" pitchFamily="34" charset="0"/>
+                      </a:endParaRPr>
+                    </a:p>
+                  </a:txBody>
+                  <a:tcPr marL="9525" marR="9525" marT="9525" marB="0" anchor="ctr"/>
+                </a:tc>
+                <a:tc>
+                  <a:txBody>
+                    <a:bodyPr/>
+                    <a:lstStyle/>
+                    <a:p>
+                      <a:pPr algn="ctr" fontAlgn="ctr"/>
+                      <a:r>
+                        <a:rPr lang="en-US" sz="1100" u="none" strike="noStrike">
+                          <a:effectLst/>
+                        </a:rPr>
+                        <a:t>0</a:t>
+                      </a:r>
+                      <a:endParaRPr lang="en-US" sz="1100" b="0" i="0" u="none" strike="noStrike">
+                        <a:solidFill>
+                          <a:srgbClr val="000000"/>
+                        </a:solidFill>
+                        <a:effectLst/>
+                        <a:latin typeface="Aptos Narrow" panose="020B0004020202020204" pitchFamily="34" charset="0"/>
+                      </a:endParaRPr>
+                    </a:p>
+                  </a:txBody>
+                  <a:tcPr marL="9525" marR="9525" marT="9525" marB="0" anchor="ctr"/>
+                </a:tc>
+                <a:tc>
+                  <a:txBody>
+                    <a:bodyPr/>
+                    <a:lstStyle/>
+                    <a:p>
+                      <a:pPr algn="ctr" fontAlgn="ctr"/>
+                      <a:r>
+                        <a:rPr lang="en-US" sz="1100" u="none" strike="noStrike">
+                          <a:effectLst/>
+                        </a:rPr>
+                        <a:t>0</a:t>
+                      </a:r>
+                      <a:endParaRPr lang="en-US" sz="1100" b="0" i="0" u="none" strike="noStrike">
+                        <a:solidFill>
+                          <a:srgbClr val="000000"/>
+                        </a:solidFill>
+                        <a:effectLst/>
+                        <a:latin typeface="Aptos Narrow" panose="020B0004020202020204" pitchFamily="34" charset="0"/>
+                      </a:endParaRPr>
+                    </a:p>
+                  </a:txBody>
+                  <a:tcPr marL="9525" marR="9525" marT="9525" marB="0" anchor="ctr"/>
+                </a:tc>
+                <a:tc>
+                  <a:txBody>
+                    <a:bodyPr/>
+                    <a:lstStyle/>
+                    <a:p>
+                      <a:pPr algn="ctr" fontAlgn="ctr"/>
+                      <a:r>
+                        <a:rPr lang="en-US" sz="1100" u="none" strike="noStrike">
+                          <a:effectLst/>
+                        </a:rPr>
+                        <a:t>0</a:t>
+                      </a:r>
+                      <a:endParaRPr lang="en-US" sz="1100" b="0" i="0" u="none" strike="noStrike">
+                        <a:solidFill>
+                          <a:srgbClr val="000000"/>
+                        </a:solidFill>
+                        <a:effectLst/>
+                        <a:latin typeface="Aptos Narrow" panose="020B0004020202020204" pitchFamily="34" charset="0"/>
+                      </a:endParaRPr>
+                    </a:p>
+                  </a:txBody>
+                  <a:tcPr marL="9525" marR="9525" marT="9525" marB="0" anchor="ctr"/>
+                </a:tc>
+                <a:tc>
+                  <a:txBody>
+                    <a:bodyPr/>
+                    <a:lstStyle/>
+                    <a:p>
+                      <a:pPr algn="ctr" fontAlgn="ctr"/>
+                      <a:r>
+                        <a:rPr lang="en-US" sz="1100" u="none" strike="noStrike">
+                          <a:effectLst/>
+                        </a:rPr>
+                        <a:t>0</a:t>
+                      </a:r>
+                      <a:endParaRPr lang="en-US" sz="1100" b="0" i="0" u="none" strike="noStrike">
+                        <a:solidFill>
+                          <a:srgbClr val="000000"/>
+                        </a:solidFill>
+                        <a:effectLst/>
+                        <a:latin typeface="Aptos Narrow" panose="020B0004020202020204" pitchFamily="34" charset="0"/>
+                      </a:endParaRPr>
+                    </a:p>
+                  </a:txBody>
+                  <a:tcPr marL="9525" marR="9525" marT="9525" marB="0" anchor="ctr"/>
+                </a:tc>
+                <a:tc>
+                  <a:txBody>
+                    <a:bodyPr/>
+                    <a:lstStyle/>
+                    <a:p>
+                      <a:pPr algn="ctr" fontAlgn="ctr"/>
+                      <a:r>
+                        <a:rPr lang="en-US" sz="1100" u="none" strike="noStrike">
+                          <a:effectLst/>
+                        </a:rPr>
+                        <a:t>0</a:t>
+                      </a:r>
+                      <a:endParaRPr lang="en-US" sz="1100" b="0" i="0" u="none" strike="noStrike">
+                        <a:solidFill>
+                          <a:srgbClr val="000000"/>
+                        </a:solidFill>
+                        <a:effectLst/>
+                        <a:latin typeface="Aptos Narrow" panose="020B0004020202020204" pitchFamily="34" charset="0"/>
+                      </a:endParaRPr>
+                    </a:p>
+                  </a:txBody>
+                  <a:tcPr marL="9525" marR="9525" marT="9525" marB="0" anchor="ctr"/>
+                </a:tc>
+                <a:tc>
+                  <a:txBody>
+                    <a:bodyPr/>
+                    <a:lstStyle/>
+                    <a:p>
+                      <a:pPr algn="ctr" fontAlgn="ctr"/>
+                      <a:r>
+                        <a:rPr lang="en-US" sz="1100" u="none" strike="noStrike">
+                          <a:effectLst/>
+                        </a:rPr>
+                        <a:t>0</a:t>
+                      </a:r>
+                      <a:endParaRPr lang="en-US" sz="1100" b="0" i="0" u="none" strike="noStrike">
+                        <a:solidFill>
+                          <a:srgbClr val="000000"/>
+                        </a:solidFill>
+                        <a:effectLst/>
+                        <a:latin typeface="Aptos Narrow" panose="020B0004020202020204" pitchFamily="34" charset="0"/>
+                      </a:endParaRPr>
+                    </a:p>
+                  </a:txBody>
+                  <a:tcPr marL="9525" marR="9525" marT="9525" marB="0" anchor="ctr"/>
+                </a:tc>
+                <a:tc>
+                  <a:txBody>
+                    <a:bodyPr/>
+                    <a:lstStyle/>
+                    <a:p>
+                      <a:pPr algn="ctr" fontAlgn="ctr"/>
+                      <a:r>
+                        <a:rPr lang="en-US" sz="1100" u="none" strike="noStrike">
+                          <a:effectLst/>
+                        </a:rPr>
+                        <a:t>0</a:t>
+                      </a:r>
+                      <a:endParaRPr lang="en-US" sz="1100" b="0" i="0" u="none" strike="noStrike">
+                        <a:solidFill>
+                          <a:srgbClr val="000000"/>
+                        </a:solidFill>
+                        <a:effectLst/>
+                        <a:latin typeface="Aptos Narrow" panose="020B0004020202020204" pitchFamily="34" charset="0"/>
+                      </a:endParaRPr>
+                    </a:p>
+                  </a:txBody>
+                  <a:tcPr marL="9525" marR="9525" marT="9525" marB="0" anchor="ctr"/>
+                </a:tc>
+                <a:extLst>
+                  <a:ext uri="{0D108BD9-81ED-4DB2-BD59-A6C34878D82A}">
+                    <a16:rowId xmlns:a16="http://schemas.microsoft.com/office/drawing/2014/main" val="944389738"/>
+                  </a:ext>
+                </a:extLst>
+              </a:tr>
+              <a:tr h="190500">
+                <a:tc>
+                  <a:txBody>
+                    <a:bodyPr/>
+                    <a:lstStyle/>
+                    <a:p>
+                      <a:pPr algn="ctr" fontAlgn="ctr"/>
+                      <a:r>
+                        <a:rPr lang="en-US" sz="1100" b="1" u="none" strike="noStrike" dirty="0">
+                          <a:effectLst/>
+                        </a:rPr>
+                        <a:t>Vector 3</a:t>
+                      </a:r>
+                      <a:endParaRPr lang="en-US" sz="1100" b="1" i="0" u="none" strike="noStrike" dirty="0">
+                        <a:solidFill>
+                          <a:srgbClr val="000000"/>
+                        </a:solidFill>
+                        <a:effectLst/>
+                        <a:latin typeface="Aptos Narrow" panose="020B0004020202020204" pitchFamily="34" charset="0"/>
+                      </a:endParaRPr>
+                    </a:p>
+                  </a:txBody>
+                  <a:tcPr marL="9525" marR="9525" marT="9525" marB="0" anchor="ctr"/>
+                </a:tc>
+                <a:tc>
+                  <a:txBody>
+                    <a:bodyPr/>
+                    <a:lstStyle/>
+                    <a:p>
+                      <a:pPr algn="ctr" fontAlgn="ctr"/>
+                      <a:r>
+                        <a:rPr lang="en-US" sz="1100" u="none" strike="noStrike">
+                          <a:effectLst/>
+                        </a:rPr>
+                        <a:t>0</a:t>
+                      </a:r>
+                      <a:endParaRPr lang="en-US" sz="1100" b="0" i="0" u="none" strike="noStrike">
+                        <a:solidFill>
+                          <a:srgbClr val="000000"/>
+                        </a:solidFill>
+                        <a:effectLst/>
+                        <a:latin typeface="Aptos Narrow" panose="020B0004020202020204" pitchFamily="34" charset="0"/>
+                      </a:endParaRPr>
+                    </a:p>
+                  </a:txBody>
+                  <a:tcPr marL="9525" marR="9525" marT="9525" marB="0" anchor="ctr"/>
+                </a:tc>
+                <a:tc>
+                  <a:txBody>
+                    <a:bodyPr/>
+                    <a:lstStyle/>
+                    <a:p>
+                      <a:pPr algn="ctr" fontAlgn="ctr"/>
+                      <a:r>
+                        <a:rPr lang="en-US" sz="1100" u="none" strike="noStrike">
+                          <a:effectLst/>
+                        </a:rPr>
+                        <a:t>0</a:t>
+                      </a:r>
+                      <a:endParaRPr lang="en-US" sz="1100" b="0" i="0" u="none" strike="noStrike">
+                        <a:solidFill>
+                          <a:srgbClr val="000000"/>
+                        </a:solidFill>
+                        <a:effectLst/>
+                        <a:latin typeface="Aptos Narrow" panose="020B0004020202020204" pitchFamily="34" charset="0"/>
+                      </a:endParaRPr>
+                    </a:p>
+                  </a:txBody>
+                  <a:tcPr marL="9525" marR="9525" marT="9525" marB="0" anchor="ctr"/>
+                </a:tc>
+                <a:tc>
+                  <a:txBody>
+                    <a:bodyPr/>
+                    <a:lstStyle/>
+                    <a:p>
+                      <a:pPr algn="ctr" fontAlgn="ctr"/>
+                      <a:r>
+                        <a:rPr lang="en-US" sz="1100" u="none" strike="noStrike">
+                          <a:effectLst/>
+                        </a:rPr>
+                        <a:t>0</a:t>
+                      </a:r>
+                      <a:endParaRPr lang="en-US" sz="1100" b="0" i="0" u="none" strike="noStrike">
+                        <a:solidFill>
+                          <a:srgbClr val="000000"/>
+                        </a:solidFill>
+                        <a:effectLst/>
+                        <a:latin typeface="Aptos Narrow" panose="020B0004020202020204" pitchFamily="34" charset="0"/>
+                      </a:endParaRPr>
+                    </a:p>
+                  </a:txBody>
+                  <a:tcPr marL="9525" marR="9525" marT="9525" marB="0" anchor="ctr"/>
+                </a:tc>
+                <a:tc>
+                  <a:txBody>
+                    <a:bodyPr/>
+                    <a:lstStyle/>
+                    <a:p>
+                      <a:pPr algn="ctr" fontAlgn="ctr"/>
+                      <a:r>
+                        <a:rPr lang="en-US" sz="1100" u="none" strike="noStrike">
+                          <a:effectLst/>
+                        </a:rPr>
+                        <a:t>0</a:t>
+                      </a:r>
+                      <a:endParaRPr lang="en-US" sz="1100" b="0" i="0" u="none" strike="noStrike">
+                        <a:solidFill>
+                          <a:srgbClr val="000000"/>
+                        </a:solidFill>
+                        <a:effectLst/>
+                        <a:latin typeface="Aptos Narrow" panose="020B0004020202020204" pitchFamily="34" charset="0"/>
+                      </a:endParaRPr>
+                    </a:p>
+                  </a:txBody>
+                  <a:tcPr marL="9525" marR="9525" marT="9525" marB="0" anchor="ctr"/>
+                </a:tc>
+                <a:tc>
+                  <a:txBody>
+                    <a:bodyPr/>
+                    <a:lstStyle/>
+                    <a:p>
+                      <a:pPr algn="ctr" fontAlgn="ctr"/>
+                      <a:r>
+                        <a:rPr lang="en-US" sz="1100" u="none" strike="noStrike">
+                          <a:effectLst/>
+                        </a:rPr>
+                        <a:t>1</a:t>
+                      </a:r>
+                      <a:endParaRPr lang="en-US" sz="1100" b="0" i="0" u="none" strike="noStrike">
+                        <a:solidFill>
+                          <a:srgbClr val="000000"/>
+                        </a:solidFill>
+                        <a:effectLst/>
+                        <a:latin typeface="Aptos Narrow" panose="020B0004020202020204" pitchFamily="34" charset="0"/>
+                      </a:endParaRPr>
+                    </a:p>
+                  </a:txBody>
+                  <a:tcPr marL="9525" marR="9525" marT="9525" marB="0" anchor="ctr"/>
+                </a:tc>
+                <a:tc>
+                  <a:txBody>
+                    <a:bodyPr/>
+                    <a:lstStyle/>
+                    <a:p>
+                      <a:pPr algn="ctr" fontAlgn="ctr"/>
+                      <a:r>
+                        <a:rPr lang="en-US" sz="1100" u="none" strike="noStrike">
+                          <a:effectLst/>
+                        </a:rPr>
+                        <a:t>1</a:t>
+                      </a:r>
+                      <a:endParaRPr lang="en-US" sz="1100" b="0" i="0" u="none" strike="noStrike">
+                        <a:solidFill>
+                          <a:srgbClr val="000000"/>
+                        </a:solidFill>
+                        <a:effectLst/>
+                        <a:latin typeface="Aptos Narrow" panose="020B0004020202020204" pitchFamily="34" charset="0"/>
+                      </a:endParaRPr>
+                    </a:p>
+                  </a:txBody>
+                  <a:tcPr marL="9525" marR="9525" marT="9525" marB="0" anchor="ctr"/>
+                </a:tc>
+                <a:tc>
+                  <a:txBody>
+                    <a:bodyPr/>
+                    <a:lstStyle/>
+                    <a:p>
+                      <a:pPr algn="ctr" fontAlgn="ctr"/>
+                      <a:r>
+                        <a:rPr lang="en-US" sz="1100" u="none" strike="noStrike">
+                          <a:effectLst/>
+                        </a:rPr>
+                        <a:t>1</a:t>
+                      </a:r>
+                      <a:endParaRPr lang="en-US" sz="1100" b="0" i="0" u="none" strike="noStrike">
+                        <a:solidFill>
+                          <a:srgbClr val="000000"/>
+                        </a:solidFill>
+                        <a:effectLst/>
+                        <a:latin typeface="Aptos Narrow" panose="020B0004020202020204" pitchFamily="34" charset="0"/>
+                      </a:endParaRPr>
+                    </a:p>
+                  </a:txBody>
+                  <a:tcPr marL="9525" marR="9525" marT="9525" marB="0" anchor="ctr"/>
+                </a:tc>
+                <a:tc>
+                  <a:txBody>
+                    <a:bodyPr/>
+                    <a:lstStyle/>
+                    <a:p>
+                      <a:pPr algn="ctr" fontAlgn="ctr"/>
+                      <a:r>
+                        <a:rPr lang="en-US" sz="1100" u="none" strike="noStrike">
+                          <a:effectLst/>
+                        </a:rPr>
+                        <a:t>0</a:t>
+                      </a:r>
+                      <a:endParaRPr lang="en-US" sz="1100" b="0" i="0" u="none" strike="noStrike">
+                        <a:solidFill>
+                          <a:srgbClr val="000000"/>
+                        </a:solidFill>
+                        <a:effectLst/>
+                        <a:latin typeface="Aptos Narrow" panose="020B0004020202020204" pitchFamily="34" charset="0"/>
+                      </a:endParaRPr>
+                    </a:p>
+                  </a:txBody>
+                  <a:tcPr marL="9525" marR="9525" marT="9525" marB="0" anchor="ctr"/>
+                </a:tc>
+                <a:tc>
+                  <a:txBody>
+                    <a:bodyPr/>
+                    <a:lstStyle/>
+                    <a:p>
+                      <a:pPr algn="ctr" fontAlgn="ctr"/>
+                      <a:r>
+                        <a:rPr lang="en-US" sz="1100" u="none" strike="noStrike">
+                          <a:effectLst/>
+                        </a:rPr>
+                        <a:t>1</a:t>
+                      </a:r>
+                      <a:endParaRPr lang="en-US" sz="1100" b="0" i="0" u="none" strike="noStrike">
+                        <a:solidFill>
+                          <a:srgbClr val="000000"/>
+                        </a:solidFill>
+                        <a:effectLst/>
+                        <a:latin typeface="Aptos Narrow" panose="020B0004020202020204" pitchFamily="34" charset="0"/>
+                      </a:endParaRPr>
+                    </a:p>
+                  </a:txBody>
+                  <a:tcPr marL="9525" marR="9525" marT="9525" marB="0" anchor="ctr"/>
+                </a:tc>
+                <a:tc>
+                  <a:txBody>
+                    <a:bodyPr/>
+                    <a:lstStyle/>
+                    <a:p>
+                      <a:pPr algn="ctr" fontAlgn="ctr"/>
+                      <a:r>
+                        <a:rPr lang="en-US" sz="1100" u="none" strike="noStrike">
+                          <a:effectLst/>
+                        </a:rPr>
+                        <a:t>1</a:t>
+                      </a:r>
+                      <a:endParaRPr lang="en-US" sz="1100" b="0" i="0" u="none" strike="noStrike">
+                        <a:solidFill>
+                          <a:srgbClr val="000000"/>
+                        </a:solidFill>
+                        <a:effectLst/>
+                        <a:latin typeface="Aptos Narrow" panose="020B0004020202020204" pitchFamily="34" charset="0"/>
+                      </a:endParaRPr>
+                    </a:p>
+                  </a:txBody>
+                  <a:tcPr marL="9525" marR="9525" marT="9525" marB="0" anchor="ctr"/>
+                </a:tc>
+                <a:tc>
+                  <a:txBody>
+                    <a:bodyPr/>
+                    <a:lstStyle/>
+                    <a:p>
+                      <a:pPr algn="ctr" fontAlgn="b"/>
+                      <a:endParaRPr lang="en-US" sz="1100" b="0" i="0" u="none" strike="noStrike">
+                        <a:solidFill>
+                          <a:srgbClr val="000000"/>
+                        </a:solidFill>
+                        <a:effectLst/>
+                        <a:latin typeface="Aptos Narrow" panose="020B0004020202020204" pitchFamily="34" charset="0"/>
+                      </a:endParaRPr>
+                    </a:p>
+                  </a:txBody>
+                  <a:tcPr marL="9525" marR="9525" marT="9525" marB="0" anchor="b"/>
+                </a:tc>
+                <a:tc>
+                  <a:txBody>
+                    <a:bodyPr/>
+                    <a:lstStyle/>
+                    <a:p>
+                      <a:pPr algn="ctr" fontAlgn="b"/>
+                      <a:endParaRPr lang="en-US" sz="1100" b="0" i="0" u="none" strike="noStrike" dirty="0">
+                        <a:solidFill>
+                          <a:srgbClr val="000000"/>
+                        </a:solidFill>
+                        <a:effectLst/>
+                        <a:latin typeface="Aptos Narrow" panose="020B0004020202020204" pitchFamily="34" charset="0"/>
+                      </a:endParaRPr>
+                    </a:p>
+                  </a:txBody>
+                  <a:tcPr marL="9525" marR="9525" marT="9525" marB="0" anchor="b"/>
+                </a:tc>
+                <a:extLst>
+                  <a:ext uri="{0D108BD9-81ED-4DB2-BD59-A6C34878D82A}">
+                    <a16:rowId xmlns:a16="http://schemas.microsoft.com/office/drawing/2014/main" val="1991684092"/>
+                  </a:ext>
+                </a:extLst>
+              </a:tr>
+            </a:tbl>
+          </a:graphicData>
+        </a:graphic>
+      </p:graphicFrame>
+    </p:spTree>
+  </p:cSld>
+  <p:clrMapOvr>
+    <a:masterClrMapping/>
+  </p:clrMapOvr>
+</p:sld>
+</file>
+
+<file path=ppt/slides/slide21.xml><?xml version="1.0" encoding="utf-8"?>
+<p:sld xmlns:a="http://schemas.openxmlformats.org/drawingml/2006/main" xmlns:r="http://schemas.openxmlformats.org/officeDocument/2006/relationships" xmlns:p="http://schemas.openxmlformats.org/presentationml/2006/main">
+  <p:cSld>
+    <p:spTree>
+      <p:nvGrpSpPr>
+        <p:cNvPr id="1" name=""/>
+        <p:cNvGrpSpPr/>
+        <p:nvPr/>
+      </p:nvGrpSpPr>
+      <p:grpSpPr>
+        <a:xfrm>
+          <a:off x="0" y="0"/>
+          <a:ext cx="0" cy="0"/>
+          <a:chOff x="0" y="0"/>
+          <a:chExt cx="0" cy="0"/>
+        </a:xfrm>
+      </p:grpSpPr>
+      <p:sp>
+        <p:nvSpPr>
           <p:cNvPr id="138" name="PlaceHolder 1"/>
           <p:cNvSpPr>
             <a:spLocks noGrp="1"/>
@@ -15353,912 +17621,7 @@
 </p:sld>
 </file>
 
-<file path=ppt/slides/slide21.xml><?xml version="1.0" encoding="utf-8"?>
-<p:sld xmlns:a="http://schemas.openxmlformats.org/drawingml/2006/main" xmlns:r="http://schemas.openxmlformats.org/officeDocument/2006/relationships" xmlns:p="http://schemas.openxmlformats.org/presentationml/2006/main">
-  <p:cSld>
-    <p:spTree>
-      <p:nvGrpSpPr>
-        <p:cNvPr id="1" name=""/>
-        <p:cNvGrpSpPr/>
-        <p:nvPr/>
-      </p:nvGrpSpPr>
-      <p:grpSpPr>
-        <a:xfrm>
-          <a:off x="0" y="0"/>
-          <a:ext cx="0" cy="0"/>
-          <a:chOff x="0" y="0"/>
-          <a:chExt cx="0" cy="0"/>
-        </a:xfrm>
-      </p:grpSpPr>
-      <p:sp>
-        <p:nvSpPr>
-          <p:cNvPr id="140" name="PlaceHolder 1"/>
-          <p:cNvSpPr>
-            <a:spLocks noGrp="1"/>
-          </p:cNvSpPr>
-          <p:nvPr>
-            <p:ph type="title"/>
-          </p:nvPr>
-        </p:nvSpPr>
-        <p:spPr>
-          <a:xfrm>
-            <a:off x="838080" y="797400"/>
-            <a:ext cx="10515240" cy="747720"/>
-          </a:xfrm>
-          <a:prstGeom prst="rect">
-            <a:avLst/>
-          </a:prstGeom>
-          <a:solidFill>
-            <a:srgbClr val="67337A"/>
-          </a:solidFill>
-          <a:ln w="0">
-            <a:noFill/>
-          </a:ln>
-        </p:spPr>
-        <p:txBody>
-          <a:bodyPr lIns="91440" tIns="45720" rIns="91440" bIns="45720" anchor="ctr">
-            <a:noAutofit/>
-          </a:bodyPr>
-          <a:lstStyle/>
-          <a:p>
-            <a:pPr indent="0" defTabSz="914400">
-              <a:lnSpc>
-                <a:spcPct val="90000"/>
-              </a:lnSpc>
-              <a:buNone/>
-            </a:pPr>
-            <a:r>
-              <a:rPr lang="en-US" sz="2800" b="0" u="none" strike="noStrike" dirty="0">
-                <a:solidFill>
-                  <a:schemeClr val="lt1"/>
-                </a:solidFill>
-                <a:uFillTx/>
-                <a:latin typeface="Calibri Light"/>
-              </a:rPr>
-              <a:t>Two Ways for implementing </a:t>
-            </a:r>
-            <a:r>
-              <a:rPr lang="en-US" sz="2800" b="0" u="none" strike="noStrike" dirty="0" err="1">
-                <a:solidFill>
-                  <a:schemeClr val="lt1"/>
-                </a:solidFill>
-                <a:uFillTx/>
-                <a:latin typeface="Calibri Light"/>
-              </a:rPr>
-              <a:t>BoW</a:t>
-            </a:r>
-            <a:endParaRPr lang="en-US" sz="2800" b="0" u="none" strike="noStrike" dirty="0">
-              <a:solidFill>
-                <a:schemeClr val="dk1"/>
-              </a:solidFill>
-              <a:uFillTx/>
-              <a:latin typeface="Calibri"/>
-            </a:endParaRPr>
-          </a:p>
-        </p:txBody>
-      </p:sp>
-      <p:sp>
-        <p:nvSpPr>
-          <p:cNvPr id="141" name="PlaceHolder 2"/>
-          <p:cNvSpPr>
-            <a:spLocks noGrp="1"/>
-          </p:cNvSpPr>
-          <p:nvPr>
-            <p:ph/>
-          </p:nvPr>
-        </p:nvSpPr>
-        <p:spPr>
-          <a:xfrm>
-            <a:off x="838080" y="1706040"/>
-            <a:ext cx="10515240" cy="4990680"/>
-          </a:xfrm>
-          <a:prstGeom prst="rect">
-            <a:avLst/>
-          </a:prstGeom>
-          <a:noFill/>
-          <a:ln w="0">
-            <a:noFill/>
-          </a:ln>
-        </p:spPr>
-        <p:txBody>
-          <a:bodyPr lIns="91440" tIns="45720" rIns="91440" bIns="45720" anchor="t">
-            <a:noAutofit/>
-          </a:bodyPr>
-          <a:lstStyle/>
-          <a:p>
-            <a:pPr marL="457200" indent="0" defTabSz="914400">
-              <a:lnSpc>
-                <a:spcPct val="90000"/>
-              </a:lnSpc>
-              <a:spcBef>
-                <a:spcPts val="1001"/>
-              </a:spcBef>
-              <a:buNone/>
-            </a:pPr>
-            <a:endParaRPr lang="en-US" sz="2400" b="0" u="none" strike="noStrike">
-              <a:solidFill>
-                <a:schemeClr val="dk1"/>
-              </a:solidFill>
-              <a:uFillTx/>
-              <a:latin typeface="Calibri"/>
-            </a:endParaRPr>
-          </a:p>
-          <a:p>
-            <a:pPr marL="457200" indent="-457200" defTabSz="914400">
-              <a:lnSpc>
-                <a:spcPct val="90000"/>
-              </a:lnSpc>
-              <a:spcBef>
-                <a:spcPts val="1001"/>
-              </a:spcBef>
-              <a:buClr>
-                <a:srgbClr val="000000"/>
-              </a:buClr>
-              <a:buFont typeface="Calibri Light"/>
-              <a:buAutoNum type="arabicPeriod"/>
-            </a:pPr>
-            <a:r>
-              <a:rPr lang="en-US" sz="2400" b="0" u="none" strike="noStrike">
-                <a:solidFill>
-                  <a:schemeClr val="dk1"/>
-                </a:solidFill>
-                <a:uFillTx/>
-                <a:latin typeface="Calibri"/>
-              </a:rPr>
-              <a:t>Basic Term Count/Frequency Method</a:t>
-            </a:r>
-          </a:p>
-          <a:p>
-            <a:pPr marL="457200" indent="-457200" defTabSz="914400">
-              <a:lnSpc>
-                <a:spcPct val="90000"/>
-              </a:lnSpc>
-              <a:spcBef>
-                <a:spcPts val="1001"/>
-              </a:spcBef>
-              <a:buClr>
-                <a:srgbClr val="000000"/>
-              </a:buClr>
-              <a:buFont typeface="Calibri Light"/>
-              <a:buAutoNum type="arabicPeriod"/>
-            </a:pPr>
-            <a:r>
-              <a:rPr lang="en-US" sz="2400" b="0" u="none" strike="noStrike">
-                <a:solidFill>
-                  <a:schemeClr val="dk1"/>
-                </a:solidFill>
-                <a:uFillTx/>
-                <a:latin typeface="Calibri"/>
-              </a:rPr>
-              <a:t>TF-IDF (Term Frequency-Inverse Document Frequency)</a:t>
-            </a:r>
-          </a:p>
-          <a:p>
-            <a:pPr indent="0" defTabSz="914400">
-              <a:lnSpc>
-                <a:spcPct val="90000"/>
-              </a:lnSpc>
-              <a:spcBef>
-                <a:spcPts val="1001"/>
-              </a:spcBef>
-              <a:buNone/>
-            </a:pPr>
-            <a:endParaRPr lang="en-US" sz="2400" b="0" u="none" strike="noStrike">
-              <a:solidFill>
-                <a:schemeClr val="dk1"/>
-              </a:solidFill>
-              <a:uFillTx/>
-              <a:latin typeface="Calibri"/>
-            </a:endParaRPr>
-          </a:p>
-        </p:txBody>
-      </p:sp>
-    </p:spTree>
-  </p:cSld>
-  <p:clrMapOvr>
-    <a:masterClrMapping/>
-  </p:clrMapOvr>
-</p:sld>
-</file>
-
 <file path=ppt/slides/slide22.xml><?xml version="1.0" encoding="utf-8"?>
-<p:sld xmlns:a="http://schemas.openxmlformats.org/drawingml/2006/main" xmlns:r="http://schemas.openxmlformats.org/officeDocument/2006/relationships" xmlns:p="http://schemas.openxmlformats.org/presentationml/2006/main">
-  <p:cSld>
-    <p:spTree>
-      <p:nvGrpSpPr>
-        <p:cNvPr id="1" name=""/>
-        <p:cNvGrpSpPr/>
-        <p:nvPr/>
-      </p:nvGrpSpPr>
-      <p:grpSpPr>
-        <a:xfrm>
-          <a:off x="0" y="0"/>
-          <a:ext cx="0" cy="0"/>
-          <a:chOff x="0" y="0"/>
-          <a:chExt cx="0" cy="0"/>
-        </a:xfrm>
-      </p:grpSpPr>
-      <p:sp>
-        <p:nvSpPr>
-          <p:cNvPr id="142" name="PlaceHolder 1"/>
-          <p:cNvSpPr>
-            <a:spLocks noGrp="1"/>
-          </p:cNvSpPr>
-          <p:nvPr>
-            <p:ph type="title"/>
-          </p:nvPr>
-        </p:nvSpPr>
-        <p:spPr>
-          <a:xfrm>
-            <a:off x="838080" y="797400"/>
-            <a:ext cx="10515240" cy="747720"/>
-          </a:xfrm>
-          <a:prstGeom prst="rect">
-            <a:avLst/>
-          </a:prstGeom>
-          <a:solidFill>
-            <a:srgbClr val="67337A"/>
-          </a:solidFill>
-          <a:ln w="0">
-            <a:noFill/>
-          </a:ln>
-        </p:spPr>
-        <p:txBody>
-          <a:bodyPr lIns="91440" tIns="45720" rIns="91440" bIns="45720" anchor="ctr">
-            <a:noAutofit/>
-          </a:bodyPr>
-          <a:lstStyle/>
-          <a:p>
-            <a:pPr indent="0" defTabSz="914400">
-              <a:lnSpc>
-                <a:spcPct val="90000"/>
-              </a:lnSpc>
-              <a:buNone/>
-            </a:pPr>
-            <a:r>
-              <a:rPr lang="en-US" sz="2800" b="0" u="none" strike="noStrike">
-                <a:solidFill>
-                  <a:schemeClr val="lt1"/>
-                </a:solidFill>
-                <a:uFillTx/>
-                <a:latin typeface="Calibri Light"/>
-              </a:rPr>
-              <a:t>BoW Basic Term Frequency Example</a:t>
-            </a:r>
-            <a:endParaRPr lang="en-US" sz="2800" b="0" u="none" strike="noStrike">
-              <a:solidFill>
-                <a:schemeClr val="dk1"/>
-              </a:solidFill>
-              <a:uFillTx/>
-              <a:latin typeface="Calibri"/>
-            </a:endParaRPr>
-          </a:p>
-        </p:txBody>
-      </p:sp>
-      <p:sp>
-        <p:nvSpPr>
-          <p:cNvPr id="143" name="TextBox 2"/>
-          <p:cNvSpPr/>
-          <p:nvPr/>
-        </p:nvSpPr>
-        <p:spPr>
-          <a:xfrm>
-            <a:off x="838080" y="1828800"/>
-            <a:ext cx="9687240" cy="2443680"/>
-          </a:xfrm>
-          <a:prstGeom prst="rect">
-            <a:avLst/>
-          </a:prstGeom>
-          <a:solidFill>
-            <a:schemeClr val="bg1">
-              <a:lumMod val="85000"/>
-            </a:schemeClr>
-          </a:solidFill>
-          <a:ln w="0">
-            <a:noFill/>
-          </a:ln>
-        </p:spPr>
-        <p:style>
-          <a:lnRef idx="0">
-            <a:scrgbClr r="0" g="0" b="0"/>
-          </a:lnRef>
-          <a:fillRef idx="0">
-            <a:scrgbClr r="0" g="0" b="0"/>
-          </a:fillRef>
-          <a:effectRef idx="0">
-            <a:scrgbClr r="0" g="0" b="0"/>
-          </a:effectRef>
-          <a:fontRef idx="minor"/>
-        </p:style>
-        <p:txBody>
-          <a:bodyPr lIns="90000" tIns="45000" rIns="90000" bIns="45000" anchor="t">
-            <a:spAutoFit/>
-          </a:bodyPr>
-          <a:lstStyle/>
-          <a:p>
-            <a:pPr defTabSz="914400">
-              <a:lnSpc>
-                <a:spcPts val="1426"/>
-              </a:lnSpc>
-            </a:pPr>
-            <a:r>
-              <a:rPr lang="en-US" sz="1600" b="0" u="none" strike="noStrike" dirty="0">
-                <a:solidFill>
-                  <a:srgbClr val="0000FF"/>
-                </a:solidFill>
-                <a:uFillTx/>
-                <a:latin typeface="Consolas"/>
-              </a:rPr>
-              <a:t>from</a:t>
-            </a:r>
-            <a:r>
-              <a:rPr lang="en-US" sz="1600" b="0" u="none" strike="noStrike" dirty="0">
-                <a:solidFill>
-                  <a:srgbClr val="000000"/>
-                </a:solidFill>
-                <a:uFillTx/>
-                <a:latin typeface="Consolas"/>
-              </a:rPr>
-              <a:t> </a:t>
-            </a:r>
-            <a:r>
-              <a:rPr lang="en-US" sz="1600" b="0" u="none" strike="noStrike" dirty="0" err="1">
-                <a:solidFill>
-                  <a:srgbClr val="000000"/>
-                </a:solidFill>
-                <a:uFillTx/>
-                <a:latin typeface="Consolas"/>
-              </a:rPr>
-              <a:t>sklearn.feature_extraction.text</a:t>
-            </a:r>
-            <a:r>
-              <a:rPr lang="en-US" sz="1600" b="0" u="none" strike="noStrike" dirty="0">
-                <a:solidFill>
-                  <a:srgbClr val="000000"/>
-                </a:solidFill>
-                <a:uFillTx/>
-                <a:latin typeface="Consolas"/>
-              </a:rPr>
-              <a:t> </a:t>
-            </a:r>
-            <a:r>
-              <a:rPr lang="en-US" sz="1600" b="0" u="none" strike="noStrike" dirty="0">
-                <a:solidFill>
-                  <a:srgbClr val="0000FF"/>
-                </a:solidFill>
-                <a:uFillTx/>
-                <a:latin typeface="Consolas"/>
-              </a:rPr>
-              <a:t>import</a:t>
-            </a:r>
-            <a:r>
-              <a:rPr lang="en-US" sz="1600" b="0" u="none" strike="noStrike" dirty="0">
-                <a:solidFill>
-                  <a:srgbClr val="000000"/>
-                </a:solidFill>
-                <a:uFillTx/>
-                <a:latin typeface="Consolas"/>
-              </a:rPr>
-              <a:t> </a:t>
-            </a:r>
-            <a:r>
-              <a:rPr lang="en-US" sz="1600" b="0" u="none" strike="noStrike" dirty="0" err="1">
-                <a:solidFill>
-                  <a:srgbClr val="000000"/>
-                </a:solidFill>
-                <a:uFillTx/>
-                <a:latin typeface="Consolas"/>
-              </a:rPr>
-              <a:t>CountVectorizer</a:t>
-            </a:r>
-            <a:endParaRPr lang="en-US" sz="1600" b="0" u="none" strike="noStrike" dirty="0">
-              <a:solidFill>
-                <a:srgbClr val="000000"/>
-              </a:solidFill>
-              <a:uFillTx/>
-              <a:latin typeface="Arial"/>
-            </a:endParaRPr>
-          </a:p>
-          <a:p>
-            <a:pPr defTabSz="914400">
-              <a:lnSpc>
-                <a:spcPts val="1426"/>
-              </a:lnSpc>
-            </a:pPr>
-            <a:br>
-              <a:rPr sz="1600" dirty="0"/>
-            </a:br>
-            <a:r>
-              <a:rPr lang="en-US" sz="1600" b="0" u="none" strike="noStrike" dirty="0">
-                <a:solidFill>
-                  <a:srgbClr val="000000"/>
-                </a:solidFill>
-                <a:uFillTx/>
-                <a:latin typeface="Consolas"/>
-              </a:rPr>
-              <a:t>corpus = [</a:t>
-            </a:r>
-            <a:endParaRPr lang="en-US" sz="1600" b="0" u="none" strike="noStrike" dirty="0">
-              <a:solidFill>
-                <a:srgbClr val="000000"/>
-              </a:solidFill>
-              <a:uFillTx/>
-              <a:latin typeface="Arial"/>
-            </a:endParaRPr>
-          </a:p>
-          <a:p>
-            <a:pPr defTabSz="914400">
-              <a:lnSpc>
-                <a:spcPts val="1426"/>
-              </a:lnSpc>
-            </a:pPr>
-            <a:r>
-              <a:rPr lang="en-US" sz="1600" b="0" u="none" strike="noStrike" dirty="0">
-                <a:solidFill>
-                  <a:srgbClr val="000000"/>
-                </a:solidFill>
-                <a:uFillTx/>
-                <a:latin typeface="Consolas"/>
-              </a:rPr>
-              <a:t>    </a:t>
-            </a:r>
-            <a:r>
-              <a:rPr lang="en-US" sz="1600" b="0" u="none" strike="noStrike" dirty="0">
-                <a:solidFill>
-                  <a:srgbClr val="A31515"/>
-                </a:solidFill>
-                <a:uFillTx/>
-                <a:latin typeface="Consolas"/>
-              </a:rPr>
-              <a:t>"Large language models revolutionize business."</a:t>
-            </a:r>
-            <a:r>
-              <a:rPr lang="en-US" sz="1600" b="0" u="none" strike="noStrike" dirty="0">
-                <a:solidFill>
-                  <a:srgbClr val="000000"/>
-                </a:solidFill>
-                <a:uFillTx/>
-                <a:latin typeface="Consolas"/>
-              </a:rPr>
-              <a:t>,</a:t>
-            </a:r>
-            <a:endParaRPr lang="en-US" sz="1600" b="0" u="none" strike="noStrike" dirty="0">
-              <a:solidFill>
-                <a:srgbClr val="000000"/>
-              </a:solidFill>
-              <a:uFillTx/>
-              <a:latin typeface="Arial"/>
-            </a:endParaRPr>
-          </a:p>
-          <a:p>
-            <a:pPr defTabSz="914400">
-              <a:lnSpc>
-                <a:spcPts val="1426"/>
-              </a:lnSpc>
-            </a:pPr>
-            <a:r>
-              <a:rPr lang="en-US" sz="1600" b="0" u="none" strike="noStrike" dirty="0">
-                <a:solidFill>
-                  <a:srgbClr val="000000"/>
-                </a:solidFill>
-                <a:uFillTx/>
-                <a:latin typeface="Consolas"/>
-              </a:rPr>
-              <a:t>    </a:t>
-            </a:r>
-            <a:r>
-              <a:rPr lang="en-US" sz="1600" b="0" u="none" strike="noStrike" dirty="0">
-                <a:solidFill>
-                  <a:srgbClr val="A31515"/>
-                </a:solidFill>
-                <a:uFillTx/>
-                <a:latin typeface="Consolas"/>
-              </a:rPr>
-              <a:t>"Business applications benefit from AI."</a:t>
-            </a:r>
-            <a:r>
-              <a:rPr lang="en-US" sz="1600" b="0" u="none" strike="noStrike" dirty="0">
-                <a:solidFill>
-                  <a:srgbClr val="000000"/>
-                </a:solidFill>
-                <a:uFillTx/>
-                <a:latin typeface="Consolas"/>
-              </a:rPr>
-              <a:t>,</a:t>
-            </a:r>
-            <a:endParaRPr lang="en-US" sz="1600" b="0" u="none" strike="noStrike" dirty="0">
-              <a:solidFill>
-                <a:srgbClr val="000000"/>
-              </a:solidFill>
-              <a:uFillTx/>
-              <a:latin typeface="Arial"/>
-            </a:endParaRPr>
-          </a:p>
-          <a:p>
-            <a:pPr defTabSz="914400">
-              <a:lnSpc>
-                <a:spcPts val="1426"/>
-              </a:lnSpc>
-            </a:pPr>
-            <a:r>
-              <a:rPr lang="en-US" sz="1600" b="0" u="none" strike="noStrike" dirty="0">
-                <a:solidFill>
-                  <a:srgbClr val="000000"/>
-                </a:solidFill>
-                <a:uFillTx/>
-                <a:latin typeface="Consolas"/>
-              </a:rPr>
-              <a:t>    </a:t>
-            </a:r>
-            <a:r>
-              <a:rPr lang="en-US" sz="1600" b="0" u="none" strike="noStrike" dirty="0">
-                <a:solidFill>
-                  <a:srgbClr val="A31515"/>
-                </a:solidFill>
-                <a:uFillTx/>
-                <a:latin typeface="Consolas"/>
-              </a:rPr>
-              <a:t>"Language models learn from text data."</a:t>
-            </a:r>
-            <a:endParaRPr lang="en-US" sz="1600" b="0" u="none" strike="noStrike" dirty="0">
-              <a:solidFill>
-                <a:srgbClr val="000000"/>
-              </a:solidFill>
-              <a:uFillTx/>
-              <a:latin typeface="Arial"/>
-            </a:endParaRPr>
-          </a:p>
-          <a:p>
-            <a:pPr defTabSz="914400">
-              <a:lnSpc>
-                <a:spcPts val="1426"/>
-              </a:lnSpc>
-            </a:pPr>
-            <a:r>
-              <a:rPr lang="en-US" sz="1600" b="0" u="none" strike="noStrike" dirty="0">
-                <a:solidFill>
-                  <a:srgbClr val="000000"/>
-                </a:solidFill>
-                <a:uFillTx/>
-                <a:latin typeface="Consolas"/>
-              </a:rPr>
-              <a:t>]</a:t>
-            </a:r>
-            <a:endParaRPr lang="en-US" sz="1600" b="0" u="none" strike="noStrike" dirty="0">
-              <a:solidFill>
-                <a:srgbClr val="000000"/>
-              </a:solidFill>
-              <a:uFillTx/>
-              <a:latin typeface="Arial"/>
-            </a:endParaRPr>
-          </a:p>
-          <a:p>
-            <a:pPr defTabSz="914400">
-              <a:lnSpc>
-                <a:spcPts val="1426"/>
-              </a:lnSpc>
-            </a:pPr>
-            <a:br>
-              <a:rPr sz="1600" dirty="0"/>
-            </a:br>
-            <a:r>
-              <a:rPr lang="en-US" sz="1600" b="0" u="none" strike="noStrike" dirty="0">
-                <a:solidFill>
-                  <a:srgbClr val="000000"/>
-                </a:solidFill>
-                <a:uFillTx/>
-                <a:latin typeface="Consolas"/>
-              </a:rPr>
-              <a:t>vectorizer = </a:t>
-            </a:r>
-            <a:r>
-              <a:rPr lang="en-US" sz="1600" b="0" u="none" strike="noStrike" dirty="0" err="1">
-                <a:solidFill>
-                  <a:srgbClr val="000000"/>
-                </a:solidFill>
-                <a:uFillTx/>
-                <a:latin typeface="Consolas"/>
-              </a:rPr>
-              <a:t>CountVectorizer</a:t>
-            </a:r>
-            <a:r>
-              <a:rPr lang="en-US" sz="1600" b="0" u="none" strike="noStrike" dirty="0">
-                <a:solidFill>
-                  <a:srgbClr val="000000"/>
-                </a:solidFill>
-                <a:uFillTx/>
-                <a:latin typeface="Consolas"/>
-              </a:rPr>
-              <a:t>()</a:t>
-            </a:r>
-            <a:endParaRPr lang="en-US" sz="1600" b="0" u="none" strike="noStrike" dirty="0">
-              <a:solidFill>
-                <a:srgbClr val="000000"/>
-              </a:solidFill>
-              <a:uFillTx/>
-              <a:latin typeface="Arial"/>
-            </a:endParaRPr>
-          </a:p>
-          <a:p>
-            <a:pPr defTabSz="914400">
-              <a:lnSpc>
-                <a:spcPts val="1426"/>
-              </a:lnSpc>
-            </a:pPr>
-            <a:r>
-              <a:rPr lang="en-US" sz="1600" b="0" u="none" strike="noStrike" dirty="0">
-                <a:solidFill>
-                  <a:srgbClr val="000000"/>
-                </a:solidFill>
-                <a:uFillTx/>
-                <a:latin typeface="Consolas"/>
-              </a:rPr>
-              <a:t>X = </a:t>
-            </a:r>
-            <a:r>
-              <a:rPr lang="en-US" sz="1600" b="0" u="none" strike="noStrike" dirty="0" err="1">
-                <a:solidFill>
-                  <a:srgbClr val="000000"/>
-                </a:solidFill>
-                <a:uFillTx/>
-                <a:latin typeface="Consolas"/>
-              </a:rPr>
-              <a:t>vectorizer.fit_transform</a:t>
-            </a:r>
-            <a:r>
-              <a:rPr lang="en-US" sz="1600" b="0" u="none" strike="noStrike" dirty="0">
-                <a:solidFill>
-                  <a:srgbClr val="000000"/>
-                </a:solidFill>
-                <a:uFillTx/>
-                <a:latin typeface="Consolas"/>
-              </a:rPr>
-              <a:t>(corpus)</a:t>
-            </a:r>
-            <a:endParaRPr lang="en-US" sz="1600" b="0" u="none" strike="noStrike" dirty="0">
-              <a:solidFill>
-                <a:srgbClr val="000000"/>
-              </a:solidFill>
-              <a:uFillTx/>
-              <a:latin typeface="Arial"/>
-            </a:endParaRPr>
-          </a:p>
-          <a:p>
-            <a:pPr defTabSz="914400">
-              <a:lnSpc>
-                <a:spcPts val="1426"/>
-              </a:lnSpc>
-            </a:pPr>
-            <a:br>
-              <a:rPr sz="1600" dirty="0"/>
-            </a:br>
-            <a:r>
-              <a:rPr lang="en-US" sz="1600" b="0" u="none" strike="noStrike" dirty="0">
-                <a:solidFill>
-                  <a:srgbClr val="000000"/>
-                </a:solidFill>
-                <a:uFillTx/>
-                <a:latin typeface="Consolas"/>
-              </a:rPr>
-              <a:t>print(</a:t>
-            </a:r>
-            <a:r>
-              <a:rPr lang="en-US" sz="1600" b="0" u="none" strike="noStrike" dirty="0" err="1">
-                <a:solidFill>
-                  <a:srgbClr val="000000"/>
-                </a:solidFill>
-                <a:uFillTx/>
-                <a:latin typeface="Consolas"/>
-              </a:rPr>
-              <a:t>vectorizer.get_feature_names_out</a:t>
-            </a:r>
-            <a:r>
-              <a:rPr lang="en-US" sz="1600" b="0" u="none" strike="noStrike" dirty="0">
-                <a:solidFill>
-                  <a:srgbClr val="000000"/>
-                </a:solidFill>
-                <a:uFillTx/>
-                <a:latin typeface="Consolas"/>
-              </a:rPr>
-              <a:t>())</a:t>
-            </a:r>
-            <a:endParaRPr lang="en-US" sz="1600" b="0" u="none" strike="noStrike" dirty="0">
-              <a:solidFill>
-                <a:srgbClr val="000000"/>
-              </a:solidFill>
-              <a:uFillTx/>
-              <a:latin typeface="Arial"/>
-            </a:endParaRPr>
-          </a:p>
-          <a:p>
-            <a:pPr defTabSz="914400">
-              <a:lnSpc>
-                <a:spcPts val="1426"/>
-              </a:lnSpc>
-            </a:pPr>
-            <a:r>
-              <a:rPr lang="en-US" sz="1600" b="0" u="none" strike="noStrike" dirty="0">
-                <a:solidFill>
-                  <a:srgbClr val="000000"/>
-                </a:solidFill>
-                <a:uFillTx/>
-                <a:latin typeface="Consolas"/>
-              </a:rPr>
-              <a:t>print(</a:t>
-            </a:r>
-            <a:r>
-              <a:rPr lang="en-US" sz="1600" b="0" u="none" strike="noStrike" dirty="0" err="1">
-                <a:solidFill>
-                  <a:srgbClr val="000000"/>
-                </a:solidFill>
-                <a:uFillTx/>
-                <a:latin typeface="Consolas"/>
-              </a:rPr>
-              <a:t>X.toarray</a:t>
-            </a:r>
-            <a:r>
-              <a:rPr lang="en-US" sz="1600" b="0" u="none" strike="noStrike" dirty="0">
-                <a:solidFill>
-                  <a:srgbClr val="000000"/>
-                </a:solidFill>
-                <a:uFillTx/>
-                <a:latin typeface="Consolas"/>
-              </a:rPr>
-              <a:t>())</a:t>
-            </a:r>
-            <a:endParaRPr lang="en-US" sz="1600" b="0" u="none" strike="noStrike" dirty="0">
-              <a:solidFill>
-                <a:srgbClr val="000000"/>
-              </a:solidFill>
-              <a:uFillTx/>
-              <a:latin typeface="Arial"/>
-            </a:endParaRPr>
-          </a:p>
-        </p:txBody>
-      </p:sp>
-      <p:sp>
-        <p:nvSpPr>
-          <p:cNvPr id="144" name="TextBox 8"/>
-          <p:cNvSpPr/>
-          <p:nvPr/>
-        </p:nvSpPr>
-        <p:spPr>
-          <a:xfrm>
-            <a:off x="838080" y="4572000"/>
-            <a:ext cx="10813680" cy="1198875"/>
-          </a:xfrm>
-          <a:prstGeom prst="rect">
-            <a:avLst/>
-          </a:prstGeom>
-          <a:noFill/>
-          <a:ln w="0">
-            <a:noFill/>
-          </a:ln>
-        </p:spPr>
-        <p:style>
-          <a:lnRef idx="0">
-            <a:scrgbClr r="0" g="0" b="0"/>
-          </a:lnRef>
-          <a:fillRef idx="0">
-            <a:scrgbClr r="0" g="0" b="0"/>
-          </a:fillRef>
-          <a:effectRef idx="0">
-            <a:scrgbClr r="0" g="0" b="0"/>
-          </a:effectRef>
-          <a:fontRef idx="minor"/>
-        </p:style>
-        <p:txBody>
-          <a:bodyPr lIns="90000" tIns="45000" rIns="90000" bIns="45000" anchor="t">
-            <a:spAutoFit/>
-          </a:bodyPr>
-          <a:lstStyle/>
-          <a:p>
-            <a:pPr defTabSz="914400">
-              <a:lnSpc>
-                <a:spcPct val="100000"/>
-              </a:lnSpc>
-            </a:pPr>
-            <a:r>
-              <a:rPr lang="en-US" sz="1800" b="0" u="none" strike="noStrike" dirty="0">
-                <a:solidFill>
-                  <a:srgbClr val="0070C0"/>
-                </a:solidFill>
-                <a:uFillTx/>
-                <a:latin typeface="Calibri"/>
-              </a:rPr>
-              <a:t>['ai' 'applications' 'benefit' 'business' 'data' 'from' 'language' 'large' 'learn' 'models' 'revolutionize' 'text’]</a:t>
-            </a:r>
-            <a:endParaRPr lang="en-US" sz="1800" b="0" u="none" strike="noStrike" dirty="0">
-              <a:solidFill>
-                <a:srgbClr val="0070C0"/>
-              </a:solidFill>
-              <a:uFillTx/>
-              <a:latin typeface="Arial"/>
-            </a:endParaRPr>
-          </a:p>
-          <a:p>
-            <a:pPr defTabSz="914400">
-              <a:lnSpc>
-                <a:spcPct val="100000"/>
-              </a:lnSpc>
-            </a:pPr>
-            <a:r>
-              <a:rPr lang="en-US" sz="1800" b="0" u="none" strike="noStrike" dirty="0">
-                <a:solidFill>
-                  <a:srgbClr val="0070C0"/>
-                </a:solidFill>
-                <a:uFillTx/>
-                <a:latin typeface="Calibri"/>
-              </a:rPr>
-              <a:t>[[0 0 0 1 0 0 1 1 0 1 1 0] </a:t>
-            </a:r>
-            <a:endParaRPr lang="en-US" sz="1800" b="0" u="none" strike="noStrike" dirty="0">
-              <a:solidFill>
-                <a:srgbClr val="0070C0"/>
-              </a:solidFill>
-              <a:uFillTx/>
-              <a:latin typeface="Arial"/>
-            </a:endParaRPr>
-          </a:p>
-          <a:p>
-            <a:pPr defTabSz="914400">
-              <a:lnSpc>
-                <a:spcPct val="100000"/>
-              </a:lnSpc>
-            </a:pPr>
-            <a:r>
-              <a:rPr lang="en-US" sz="1800" b="0" u="none" strike="noStrike" dirty="0">
-                <a:solidFill>
-                  <a:srgbClr val="0070C0"/>
-                </a:solidFill>
-                <a:uFillTx/>
-                <a:latin typeface="Calibri"/>
-              </a:rPr>
-              <a:t>[1 1 1 1 0 1 0 0 0 0 0 0] </a:t>
-            </a:r>
-            <a:endParaRPr lang="en-US" sz="1800" b="0" u="none" strike="noStrike" dirty="0">
-              <a:solidFill>
-                <a:srgbClr val="0070C0"/>
-              </a:solidFill>
-              <a:uFillTx/>
-              <a:latin typeface="Arial"/>
-            </a:endParaRPr>
-          </a:p>
-          <a:p>
-            <a:pPr defTabSz="914400">
-              <a:lnSpc>
-                <a:spcPct val="100000"/>
-              </a:lnSpc>
-            </a:pPr>
-            <a:r>
-              <a:rPr lang="en-US" sz="1800" b="0" u="none" strike="noStrike" dirty="0">
-                <a:solidFill>
-                  <a:srgbClr val="0070C0"/>
-                </a:solidFill>
-                <a:uFillTx/>
-                <a:latin typeface="Calibri"/>
-              </a:rPr>
-              <a:t>[0 0 0 0 1 1 1 0 1 1 0 1]]</a:t>
-            </a:r>
-            <a:endParaRPr lang="en-US" sz="1800" b="0" u="none" strike="noStrike" dirty="0">
-              <a:solidFill>
-                <a:srgbClr val="0070C0"/>
-              </a:solidFill>
-              <a:uFillTx/>
-              <a:latin typeface="Arial"/>
-            </a:endParaRPr>
-          </a:p>
-        </p:txBody>
-      </p:sp>
-    </p:spTree>
-  </p:cSld>
-  <p:clrMapOvr>
-    <a:masterClrMapping/>
-  </p:clrMapOvr>
-</p:sld>
-</file>
-
-<file path=ppt/slides/slide23.xml><?xml version="1.0" encoding="utf-8"?>
 <p:sld xmlns:a="http://schemas.openxmlformats.org/drawingml/2006/main" xmlns:r="http://schemas.openxmlformats.org/officeDocument/2006/relationships" xmlns:p="http://schemas.openxmlformats.org/presentationml/2006/main">
   <p:cSld>
     <p:spTree>
@@ -16313,16 +17676,16 @@
               <a:buNone/>
             </a:pPr>
             <a:r>
-              <a:rPr lang="en-US" sz="2400" b="0" u="none" strike="noStrike">
+              <a:rPr lang="en-US" sz="2400" b="0" u="none" strike="noStrike" dirty="0">
                 <a:solidFill>
                   <a:schemeClr val="lt1"/>
                 </a:solidFill>
                 <a:uFillTx/>
                 <a:latin typeface="Calibri Light"/>
               </a:rPr>
-              <a:t>BoW - TF-IDF (Term Frequency-Inverse Document Frequency)</a:t>
-            </a:r>
-            <a:endParaRPr lang="en-US" sz="2400" b="0" u="none" strike="noStrike">
+              <a:t>TF-IDF (Term Frequency-Inverse Document Frequency) Method</a:t>
+            </a:r>
+            <a:endParaRPr lang="en-US" sz="2400" b="0" u="none" strike="noStrike" dirty="0">
               <a:solidFill>
                 <a:schemeClr val="dk1"/>
               </a:solidFill>
@@ -16344,8 +17707,8 @@
         </p:nvSpPr>
         <p:spPr>
           <a:xfrm>
-            <a:off x="838080" y="1706040"/>
-            <a:ext cx="10515240" cy="5151600"/>
+            <a:off x="838079" y="1706040"/>
+            <a:ext cx="10515240" cy="4262960"/>
           </a:xfrm>
           <a:prstGeom prst="rect">
             <a:avLst/>
@@ -16378,7 +17741,7 @@
               </a:tabLst>
             </a:pPr>
             <a:r>
-              <a:rPr lang="en-US" sz="2000" b="0" u="none" strike="noStrike" dirty="0">
+              <a:rPr lang="en-US" sz="1800" b="0" u="none" strike="noStrike" dirty="0">
                 <a:solidFill>
                   <a:schemeClr val="dk1"/>
                 </a:solidFill>
@@ -16388,7 +17751,7 @@
               <a:t>TF-IDF</a:t>
             </a:r>
             <a:r>
-              <a:rPr lang="en-US" sz="2000" b="1" u="none" strike="noStrike" dirty="0">
+              <a:rPr lang="en-US" sz="1800" b="1" u="none" strike="noStrike" dirty="0">
                 <a:solidFill>
                   <a:schemeClr val="dk1"/>
                 </a:solidFill>
@@ -16398,7 +17761,7 @@
               <a:t> </a:t>
             </a:r>
             <a:r>
-              <a:rPr lang="en-US" sz="2000" b="0" u="none" strike="noStrike" dirty="0">
+              <a:rPr lang="en-US" sz="1800" b="0" u="none" strike="noStrike" dirty="0">
                 <a:solidFill>
                   <a:schemeClr val="dk1"/>
                 </a:solidFill>
@@ -16426,7 +17789,7 @@
               </a:tabLst>
             </a:pPr>
             <a:r>
-              <a:rPr lang="en-US" sz="2000" b="0" u="none" strike="noStrike" dirty="0">
+              <a:rPr lang="en-US" sz="1800" b="0" u="none" strike="noStrike" dirty="0">
                 <a:solidFill>
                   <a:schemeClr val="dk1"/>
                 </a:solidFill>
@@ -16437,7 +17800,7 @@
             </a:r>
           </a:p>
           <a:p>
-            <a:pPr marL="228600" indent="-228600" defTabSz="914400">
+            <a:pPr indent="0" defTabSz="914400">
               <a:lnSpc>
                 <a:spcPct val="90000"/>
               </a:lnSpc>
@@ -16449,17 +17812,140 @@
                 <a:tab pos="0" algn="l"/>
               </a:tabLst>
             </a:pPr>
-            <a:r>
-              <a:rPr lang="en-US" sz="2000" b="1" u="none" strike="noStrike" dirty="0">
+            <a:endParaRPr lang="en-US" sz="1800" b="1" u="none" strike="noStrike" dirty="0">
+              <a:solidFill>
+                <a:schemeClr val="dk1"/>
+              </a:solidFill>
+              <a:uFillTx/>
+              <a:latin typeface="Calibri"/>
+            </a:endParaRPr>
+          </a:p>
+          <a:p>
+            <a:pPr indent="0" defTabSz="914400">
+              <a:lnSpc>
+                <a:spcPct val="90000"/>
+              </a:lnSpc>
+              <a:spcBef>
+                <a:spcPts val="1001"/>
+              </a:spcBef>
+              <a:buNone/>
+              <a:tabLst>
+                <a:tab pos="0" algn="l"/>
+              </a:tabLst>
+            </a:pPr>
+            <a:endParaRPr lang="en-US" sz="1800" b="1" dirty="0">
+              <a:solidFill>
+                <a:schemeClr val="dk1"/>
+              </a:solidFill>
+              <a:latin typeface="Calibri"/>
+            </a:endParaRPr>
+          </a:p>
+          <a:p>
+            <a:pPr indent="0" defTabSz="914400">
+              <a:lnSpc>
+                <a:spcPct val="90000"/>
+              </a:lnSpc>
+              <a:spcBef>
+                <a:spcPts val="1001"/>
+              </a:spcBef>
+              <a:buNone/>
+              <a:tabLst>
+                <a:tab pos="0" algn="l"/>
+              </a:tabLst>
+            </a:pPr>
+            <a:endParaRPr lang="en-US" sz="1800" b="1" u="none" strike="noStrike" dirty="0">
+              <a:solidFill>
+                <a:schemeClr val="dk1"/>
+              </a:solidFill>
+              <a:uFillTx/>
+              <a:latin typeface="Calibri"/>
+            </a:endParaRPr>
+          </a:p>
+          <a:p>
+            <a:pPr indent="0" defTabSz="914400">
+              <a:lnSpc>
+                <a:spcPct val="90000"/>
+              </a:lnSpc>
+              <a:spcBef>
+                <a:spcPts val="1001"/>
+              </a:spcBef>
+              <a:buNone/>
+              <a:tabLst>
+                <a:tab pos="0" algn="l"/>
+              </a:tabLst>
+            </a:pPr>
+            <a:endParaRPr lang="en-US" sz="1800" b="1" dirty="0">
+              <a:solidFill>
+                <a:schemeClr val="dk1"/>
+              </a:solidFill>
+              <a:latin typeface="Calibri"/>
+            </a:endParaRPr>
+          </a:p>
+          <a:p>
+            <a:pPr indent="0" defTabSz="914400">
+              <a:lnSpc>
+                <a:spcPct val="90000"/>
+              </a:lnSpc>
+              <a:spcBef>
+                <a:spcPts val="1001"/>
+              </a:spcBef>
+              <a:buNone/>
+              <a:tabLst>
+                <a:tab pos="0" algn="l"/>
+              </a:tabLst>
+            </a:pPr>
+            <a:endParaRPr lang="en-US" sz="1800" b="1" dirty="0">
+              <a:solidFill>
+                <a:schemeClr val="dk1"/>
+              </a:solidFill>
+              <a:latin typeface="Calibri"/>
+            </a:endParaRPr>
+          </a:p>
+          <a:p>
+            <a:pPr indent="0" defTabSz="914400">
+              <a:lnSpc>
+                <a:spcPct val="90000"/>
+              </a:lnSpc>
+              <a:spcBef>
+                <a:spcPts val="1001"/>
+              </a:spcBef>
+              <a:buNone/>
+              <a:tabLst>
+                <a:tab pos="0" algn="l"/>
+              </a:tabLst>
+            </a:pPr>
+            <a:endParaRPr lang="en-US" sz="1800" b="1" u="none" strike="noStrike" dirty="0">
+              <a:solidFill>
+                <a:schemeClr val="dk1"/>
+              </a:solidFill>
+              <a:uFillTx/>
+              <a:latin typeface="Calibri"/>
+            </a:endParaRPr>
+          </a:p>
+          <a:p>
+            <a:pPr indent="0" defTabSz="914400">
+              <a:lnSpc>
+                <a:spcPct val="90000"/>
+              </a:lnSpc>
+              <a:spcBef>
+                <a:spcPts val="1001"/>
+              </a:spcBef>
+              <a:buNone/>
+              <a:tabLst>
+                <a:tab pos="0" algn="l"/>
+              </a:tabLst>
+            </a:pPr>
+            <a:r>
+              <a:rPr lang="en-US" sz="1800" b="1" u="none" strike="noStrike" dirty="0">
                 <a:solidFill>
                   <a:schemeClr val="dk1"/>
                 </a:solidFill>
                 <a:uFillTx/>
                 <a:latin typeface="Calibri"/>
               </a:rPr>
-              <a:t>Formula:</a:t>
-            </a:r>
-            <a:endParaRPr lang="en-US" sz="2000" b="0" u="none" strike="noStrike" dirty="0">
+              <a:t>Key Idea:</a:t>
+            </a:r>
+            <a:endParaRPr lang="en-US" sz="1800" b="0" u="none" strike="noStrike" dirty="0">
               <a:solidFill>
                 <a:schemeClr val="dk1"/>
               </a:solidFill>
@@ -16485,352 +17971,52 @@
               </a:tabLst>
             </a:pPr>
             <a:r>
-              <a:rPr lang="en-US" sz="2000" b="1" u="none" strike="noStrike" dirty="0">
+              <a:rPr lang="en-US" sz="1800" b="0" u="none" strike="noStrike" dirty="0">
                 <a:solidFill>
                   <a:schemeClr val="dk1"/>
                 </a:solidFill>
                 <a:uFillTx/>
                 <a:latin typeface="Calibri"/>
               </a:rPr>
-              <a:t>TF(t, d)</a:t>
-            </a:r>
-            <a:r>
-              <a:rPr lang="en-US" sz="2000" b="0" u="none" strike="noStrike" dirty="0">
-                <a:solidFill>
-                  <a:schemeClr val="dk1"/>
-                </a:solidFill>
-                <a:uFillTx/>
-                <a:latin typeface="Calibri"/>
-              </a:rPr>
-              <a:t>: Term Frequency – how often term </a:t>
-            </a:r>
-            <a:r>
-              <a:rPr lang="en-US" sz="2000" b="0" i="1" u="none" strike="noStrike" dirty="0">
-                <a:solidFill>
-                  <a:schemeClr val="dk1"/>
-                </a:solidFill>
-                <a:uFillTx/>
-                <a:latin typeface="Calibri"/>
-              </a:rPr>
-              <a:t>t</a:t>
-            </a:r>
-            <a:r>
-              <a:rPr lang="en-US" sz="2000" b="0" u="none" strike="noStrike" dirty="0">
-                <a:solidFill>
-                  <a:schemeClr val="dk1"/>
-                </a:solidFill>
-                <a:uFillTx/>
-                <a:latin typeface="Calibri"/>
-              </a:rPr>
-              <a:t> appears in document </a:t>
-            </a:r>
-            <a:r>
-              <a:rPr lang="en-US" sz="2000" b="0" i="1" u="none" strike="noStrike" dirty="0">
-                <a:solidFill>
-                  <a:schemeClr val="dk1"/>
-                </a:solidFill>
-                <a:uFillTx/>
-                <a:latin typeface="Calibri"/>
-              </a:rPr>
-              <a:t>d</a:t>
-            </a:r>
-            <a:r>
-              <a:rPr lang="en-US" sz="2000" b="0" u="none" strike="noStrike" dirty="0">
-                <a:solidFill>
-                  <a:schemeClr val="dk1"/>
-                </a:solidFill>
-                <a:uFillTx/>
-                <a:latin typeface="Calibri"/>
-              </a:rPr>
-              <a:t>.</a:t>
-            </a:r>
-          </a:p>
-          <a:p>
-            <a:pPr marL="228600" indent="-228600" defTabSz="914400">
-              <a:lnSpc>
-                <a:spcPct val="90000"/>
-              </a:lnSpc>
-              <a:spcBef>
-                <a:spcPts val="1001"/>
-              </a:spcBef>
-              <a:buClr>
-                <a:srgbClr val="000000"/>
-              </a:buClr>
-              <a:buFont typeface="Arial"/>
-              <a:buChar char="•"/>
-              <a:tabLst>
-                <a:tab pos="0" algn="l"/>
-              </a:tabLst>
-            </a:pPr>
-            <a:r>
-              <a:rPr lang="en-US" sz="2000" b="1" u="none" strike="noStrike" dirty="0">
-                <a:solidFill>
-                  <a:schemeClr val="dk1"/>
-                </a:solidFill>
-                <a:uFillTx/>
-                <a:latin typeface="Calibri"/>
-              </a:rPr>
-              <a:t>IDF(t)</a:t>
-            </a:r>
-            <a:r>
-              <a:rPr lang="en-US" sz="2000" b="0" u="none" strike="noStrike" dirty="0">
-                <a:solidFill>
-                  <a:schemeClr val="dk1"/>
-                </a:solidFill>
-                <a:uFillTx/>
-                <a:latin typeface="Calibri"/>
-              </a:rPr>
-              <a:t>: Inverse Document Frequency – how rare term </a:t>
-            </a:r>
-            <a:r>
-              <a:rPr lang="en-US" sz="2000" b="0" i="1" u="none" strike="noStrike" dirty="0">
-                <a:solidFill>
-                  <a:schemeClr val="dk1"/>
-                </a:solidFill>
-                <a:uFillTx/>
-                <a:latin typeface="Calibri"/>
-              </a:rPr>
-              <a:t>t</a:t>
-            </a:r>
-            <a:r>
-              <a:rPr lang="en-US" sz="2000" b="0" u="none" strike="noStrike" dirty="0">
-                <a:solidFill>
-                  <a:schemeClr val="dk1"/>
-                </a:solidFill>
-                <a:uFillTx/>
-                <a:latin typeface="Calibri"/>
-              </a:rPr>
-              <a:t> is across the corpus:</a:t>
-            </a:r>
-          </a:p>
-          <a:p>
-            <a:pPr indent="0" defTabSz="914400">
-              <a:lnSpc>
-                <a:spcPct val="90000"/>
-              </a:lnSpc>
-              <a:spcBef>
-                <a:spcPts val="1001"/>
-              </a:spcBef>
-              <a:buNone/>
-              <a:tabLst>
-                <a:tab pos="0" algn="l"/>
-              </a:tabLst>
-            </a:pPr>
-            <a:endParaRPr lang="en-US" sz="2000" b="0" u="none" strike="noStrike" dirty="0">
-              <a:solidFill>
-                <a:schemeClr val="dk1"/>
-              </a:solidFill>
-              <a:uFillTx/>
-              <a:latin typeface="Calibri"/>
-            </a:endParaRPr>
-          </a:p>
-          <a:p>
-            <a:pPr marL="228600" indent="-228600" defTabSz="914400">
-              <a:lnSpc>
-                <a:spcPct val="90000"/>
-              </a:lnSpc>
-              <a:spcBef>
-                <a:spcPts val="1001"/>
-              </a:spcBef>
-              <a:buClr>
-                <a:srgbClr val="000000"/>
-              </a:buClr>
-              <a:buFont typeface="Arial"/>
-              <a:buChar char="•"/>
-              <a:tabLst>
-                <a:tab pos="0" algn="l"/>
-              </a:tabLst>
-            </a:pPr>
-            <a:r>
-              <a:rPr lang="en-US" sz="2000" b="0" i="1" u="none" strike="noStrike" dirty="0">
-                <a:solidFill>
-                  <a:schemeClr val="dk1"/>
-                </a:solidFill>
-                <a:uFillTx/>
-                <a:latin typeface="Calibri"/>
-              </a:rPr>
-              <a:t>N</a:t>
-            </a:r>
-            <a:r>
-              <a:rPr lang="en-US" sz="2000" b="0" u="none" strike="noStrike" dirty="0">
-                <a:solidFill>
-                  <a:schemeClr val="dk1"/>
-                </a:solidFill>
-                <a:uFillTx/>
-                <a:latin typeface="Calibri"/>
-              </a:rPr>
-              <a:t> = total number of documents</a:t>
-            </a:r>
-          </a:p>
-          <a:p>
-            <a:pPr marL="228600" indent="-228600" defTabSz="914400">
-              <a:lnSpc>
-                <a:spcPct val="90000"/>
-              </a:lnSpc>
-              <a:spcBef>
-                <a:spcPts val="1001"/>
-              </a:spcBef>
-              <a:buClr>
-                <a:srgbClr val="000000"/>
-              </a:buClr>
-              <a:buFont typeface="Arial"/>
-              <a:buChar char="•"/>
-              <a:tabLst>
-                <a:tab pos="0" algn="l"/>
-              </a:tabLst>
-            </a:pPr>
-            <a:r>
-              <a:rPr lang="en-US" sz="2000" b="0" i="1" u="none" strike="noStrike" dirty="0" err="1">
-                <a:solidFill>
-                  <a:schemeClr val="dk1"/>
-                </a:solidFill>
-                <a:uFillTx/>
-                <a:latin typeface="Calibri"/>
-              </a:rPr>
-              <a:t>df</a:t>
-            </a:r>
-            <a:r>
-              <a:rPr lang="en-US" sz="2000" b="0" i="1" u="none" strike="noStrike" dirty="0">
-                <a:solidFill>
-                  <a:schemeClr val="dk1"/>
-                </a:solidFill>
-                <a:uFillTx/>
-                <a:latin typeface="Calibri"/>
-              </a:rPr>
-              <a:t>(t)</a:t>
-            </a:r>
-            <a:r>
-              <a:rPr lang="en-US" sz="2000" b="0" u="none" strike="noStrike" dirty="0">
-                <a:solidFill>
-                  <a:schemeClr val="dk1"/>
-                </a:solidFill>
-                <a:uFillTx/>
-                <a:latin typeface="Calibri"/>
-              </a:rPr>
-              <a:t> = number of documents containing term </a:t>
-            </a:r>
-            <a:r>
-              <a:rPr lang="en-US" sz="2000" b="0" i="1" u="none" strike="noStrike" dirty="0">
-                <a:solidFill>
-                  <a:schemeClr val="dk1"/>
-                </a:solidFill>
-                <a:uFillTx/>
-                <a:latin typeface="Calibri"/>
-              </a:rPr>
-              <a:t>t</a:t>
-            </a:r>
-            <a:endParaRPr lang="en-US" sz="2000" b="0" u="none" strike="noStrike" dirty="0">
-              <a:solidFill>
-                <a:schemeClr val="dk1"/>
-              </a:solidFill>
-              <a:uFillTx/>
-              <a:latin typeface="Calibri"/>
-            </a:endParaRPr>
-          </a:p>
-          <a:p>
-            <a:pPr indent="0" defTabSz="914400">
-              <a:lnSpc>
-                <a:spcPct val="90000"/>
-              </a:lnSpc>
-              <a:spcBef>
-                <a:spcPts val="1001"/>
-              </a:spcBef>
-              <a:buNone/>
-              <a:tabLst>
-                <a:tab pos="0" algn="l"/>
-              </a:tabLst>
-            </a:pPr>
-            <a:r>
-              <a:rPr lang="en-US" sz="2000" b="1" u="none" strike="noStrike" dirty="0">
-                <a:solidFill>
-                  <a:schemeClr val="dk1"/>
-                </a:solidFill>
-                <a:uFillTx/>
-                <a:latin typeface="Calibri"/>
-              </a:rPr>
-              <a:t>Key Idea:</a:t>
-            </a:r>
-            <a:endParaRPr lang="en-US" sz="2000" b="0" u="none" strike="noStrike" dirty="0">
-              <a:solidFill>
-                <a:schemeClr val="dk1"/>
-              </a:solidFill>
-              <a:uFillTx/>
-              <a:latin typeface="Calibri"/>
-            </a:endParaRPr>
-          </a:p>
-          <a:p>
-            <a:pPr marL="228600" indent="-228600" defTabSz="914400">
-              <a:lnSpc>
-                <a:spcPct val="90000"/>
-              </a:lnSpc>
-              <a:spcBef>
-                <a:spcPts val="1001"/>
-              </a:spcBef>
-              <a:buClr>
-                <a:srgbClr val="000000"/>
-              </a:buClr>
-              <a:buFont typeface="Arial"/>
-              <a:buChar char="•"/>
-              <a:tabLst>
-                <a:tab pos="0" algn="l"/>
-              </a:tabLst>
-            </a:pPr>
-            <a:r>
-              <a:rPr lang="en-US" sz="2000" b="0" u="none" strike="noStrike" dirty="0">
-                <a:solidFill>
-                  <a:schemeClr val="dk1"/>
-                </a:solidFill>
-                <a:uFillTx/>
-                <a:latin typeface="Calibri"/>
-              </a:rPr>
               <a:t>TF-IDF increases when a word appears frequently in a document but rarely across the corpus, making it a good indicator of relevance.</a:t>
             </a:r>
-          </a:p>
-          <a:p>
-            <a:pPr indent="0" defTabSz="914400">
-              <a:lnSpc>
-                <a:spcPct val="90000"/>
-              </a:lnSpc>
-              <a:spcBef>
-                <a:spcPts val="1001"/>
-              </a:spcBef>
-              <a:buNone/>
-              <a:tabLst>
-                <a:tab pos="0" algn="l"/>
-              </a:tabLst>
-            </a:pPr>
-            <a:endParaRPr lang="en-US" sz="2000" b="0" u="none" strike="noStrike" dirty="0">
-              <a:solidFill>
-                <a:schemeClr val="dk1"/>
-              </a:solidFill>
-              <a:uFillTx/>
-              <a:latin typeface="Calibri"/>
-            </a:endParaRPr>
           </a:p>
         </p:txBody>
       </p:sp>
       <p:pic>
         <p:nvPicPr>
-          <p:cNvPr id="147" name="Picture 4"/>
-          <p:cNvPicPr/>
+          <p:cNvPr id="3" name="Picture 2">
+            <a:extLst>
+              <a:ext uri="{FF2B5EF4-FFF2-40B4-BE49-F238E27FC236}">
+                <a16:creationId xmlns:a16="http://schemas.microsoft.com/office/drawing/2014/main" id="{15EEB7E5-33DF-486D-A03F-C24FCFB0A2BF}"/>
+              </a:ext>
+            </a:extLst>
+          </p:cNvPr>
+          <p:cNvPicPr>
+            <a:picLocks noChangeAspect="1"/>
+          </p:cNvPicPr>
           <p:nvPr/>
         </p:nvPicPr>
         <p:blipFill>
-          <a:blip r:embed="rId2"/>
-          <a:stretch/>
+          <a:blip r:embed="rId2">
+            <a:extLst>
+              <a:ext uri="{28A0092B-C50C-407E-A947-70E740481C1C}">
+                <a14:useLocalDpi xmlns:a14="http://schemas.microsoft.com/office/drawing/2010/main" val="0"/>
+              </a:ext>
+            </a:extLst>
+          </a:blip>
+          <a:stretch>
+            <a:fillRect/>
+          </a:stretch>
         </p:blipFill>
         <p:spPr>
           <a:xfrm>
-            <a:off x="1065600" y="4281840"/>
-            <a:ext cx="1911960" cy="664200"/>
+            <a:off x="4230385" y="2798132"/>
+            <a:ext cx="3231429" cy="2078775"/>
           </a:xfrm>
           <a:prstGeom prst="rect">
             <a:avLst/>
           </a:prstGeom>
-          <a:noFill/>
-          <a:ln w="0">
-            <a:noFill/>
-          </a:ln>
         </p:spPr>
       </p:pic>
     </p:spTree>
@@ -16841,7 +18027,7 @@
 </p:sld>
 </file>
 
-<file path=ppt/slides/slide24.xml><?xml version="1.0" encoding="utf-8"?>
+<file path=ppt/slides/slide23.xml><?xml version="1.0" encoding="utf-8"?>
 <p:sld xmlns:a="http://schemas.openxmlformats.org/drawingml/2006/main" xmlns:r="http://schemas.openxmlformats.org/officeDocument/2006/relationships" xmlns:p="http://schemas.openxmlformats.org/presentationml/2006/main">
   <p:cSld>
     <p:spTree>
@@ -16889,1393 +18075,18 @@
           </a:bodyPr>
           <a:lstStyle/>
           <a:p>
-            <a:pPr indent="0" defTabSz="914400">
-              <a:lnSpc>
-                <a:spcPct val="90000"/>
-              </a:lnSpc>
-              <a:buNone/>
-            </a:pPr>
-            <a:r>
-              <a:rPr lang="en-US" sz="2800" b="0" u="none" strike="noStrike">
+            <a:r>
+              <a:rPr lang="en-US" sz="2500" dirty="0">
                 <a:solidFill>
                   <a:schemeClr val="lt1"/>
                 </a:solidFill>
-                <a:uFillTx/>
                 <a:latin typeface="Calibri Light"/>
               </a:rPr>
-              <a:t>Example – Word A vs. Word B</a:t>
-            </a:r>
-            <a:endParaRPr lang="en-US" sz="2800" b="0" u="none" strike="noStrike">
-              <a:solidFill>
-                <a:schemeClr val="dk1"/>
-              </a:solidFill>
-              <a:uFillTx/>
-              <a:latin typeface="Calibri"/>
-            </a:endParaRPr>
+              <a:t>TF/IDF Example: Compute the TD/IDF for the words learn and data in sentence 1</a:t>
+            </a:r>
           </a:p>
         </p:txBody>
       </p:sp>
-      <p:sp>
-        <p:nvSpPr>
-          <p:cNvPr id="149" name="PlaceHolder 2"/>
-          <p:cNvSpPr>
-            <a:spLocks noGrp="1"/>
-          </p:cNvSpPr>
-          <p:nvPr>
-            <p:ph/>
-          </p:nvPr>
-        </p:nvSpPr>
-        <p:spPr>
-          <a:xfrm>
-            <a:off x="838080" y="1706040"/>
-            <a:ext cx="10515240" cy="1722600"/>
-          </a:xfrm>
-          <a:prstGeom prst="rect">
-            <a:avLst/>
-          </a:prstGeom>
-          <a:noFill/>
-          <a:ln w="0">
-            <a:noFill/>
-          </a:ln>
-        </p:spPr>
-        <p:txBody>
-          <a:bodyPr lIns="91440" tIns="45720" rIns="91440" bIns="45720" anchor="t">
-            <a:normAutofit/>
-          </a:bodyPr>
-          <a:lstStyle/>
-          <a:p>
-            <a:pPr marL="228600" indent="-228600" defTabSz="914400">
-              <a:lnSpc>
-                <a:spcPct val="90000"/>
-              </a:lnSpc>
-              <a:spcBef>
-                <a:spcPts val="1001"/>
-              </a:spcBef>
-              <a:buNone/>
-              <a:tabLst>
-                <a:tab pos="0" algn="l"/>
-              </a:tabLst>
-            </a:pPr>
-            <a:r>
-              <a:rPr lang="en-US" sz="2000" b="1" u="none" strike="noStrike">
-                <a:solidFill>
-                  <a:schemeClr val="dk1"/>
-                </a:solidFill>
-                <a:uFillTx/>
-                <a:latin typeface="Calibri"/>
-              </a:rPr>
-              <a:t>Corpus size:</a:t>
-            </a:r>
-            <a:r>
-              <a:rPr lang="en-US" sz="2000" b="0" u="none" strike="noStrike">
-                <a:solidFill>
-                  <a:schemeClr val="dk1"/>
-                </a:solidFill>
-                <a:uFillTx/>
-                <a:latin typeface="Calibri"/>
-              </a:rPr>
-              <a:t> 10 documents</a:t>
-            </a:r>
-          </a:p>
-          <a:p>
-            <a:pPr marL="345960" lvl="1" indent="-228600" defTabSz="914400">
-              <a:lnSpc>
-                <a:spcPct val="90000"/>
-              </a:lnSpc>
-              <a:spcBef>
-                <a:spcPts val="499"/>
-              </a:spcBef>
-              <a:buClr>
-                <a:srgbClr val="000000"/>
-              </a:buClr>
-              <a:buFont typeface="Arial"/>
-              <a:buChar char="•"/>
-              <a:tabLst>
-                <a:tab pos="0" algn="l"/>
-              </a:tabLst>
-            </a:pPr>
-            <a:r>
-              <a:rPr lang="en-US" sz="2000" b="1" u="none" strike="noStrike">
-                <a:solidFill>
-                  <a:schemeClr val="dk1"/>
-                </a:solidFill>
-                <a:uFillTx/>
-                <a:latin typeface="Calibri"/>
-              </a:rPr>
-              <a:t>Word A</a:t>
-            </a:r>
-            <a:r>
-              <a:rPr lang="en-US" sz="2000" b="0" u="none" strike="noStrike">
-                <a:solidFill>
-                  <a:schemeClr val="dk1"/>
-                </a:solidFill>
-                <a:uFillTx/>
-                <a:latin typeface="Calibri"/>
-              </a:rPr>
-              <a:t> appears in </a:t>
-            </a:r>
-            <a:r>
-              <a:rPr lang="en-US" sz="2000" b="1" u="none" strike="noStrike">
-                <a:solidFill>
-                  <a:schemeClr val="dk1"/>
-                </a:solidFill>
-                <a:uFillTx/>
-                <a:latin typeface="Calibri"/>
-              </a:rPr>
-              <a:t>1</a:t>
-            </a:r>
-            <a:r>
-              <a:rPr lang="en-US" sz="2000" b="0" u="none" strike="noStrike">
-                <a:solidFill>
-                  <a:schemeClr val="dk1"/>
-                </a:solidFill>
-                <a:uFillTx/>
-                <a:latin typeface="Calibri"/>
-              </a:rPr>
-              <a:t> document</a:t>
-            </a:r>
-          </a:p>
-          <a:p>
-            <a:pPr marL="345960" lvl="1" indent="-228600" defTabSz="914400">
-              <a:lnSpc>
-                <a:spcPct val="90000"/>
-              </a:lnSpc>
-              <a:spcBef>
-                <a:spcPts val="499"/>
-              </a:spcBef>
-              <a:buClr>
-                <a:srgbClr val="000000"/>
-              </a:buClr>
-              <a:buFont typeface="Arial"/>
-              <a:buChar char="•"/>
-              <a:tabLst>
-                <a:tab pos="0" algn="l"/>
-              </a:tabLst>
-            </a:pPr>
-            <a:r>
-              <a:rPr lang="en-US" sz="2000" b="1" u="none" strike="noStrike">
-                <a:solidFill>
-                  <a:schemeClr val="dk1"/>
-                </a:solidFill>
-                <a:uFillTx/>
-                <a:latin typeface="Calibri"/>
-              </a:rPr>
-              <a:t>Word B</a:t>
-            </a:r>
-            <a:r>
-              <a:rPr lang="en-US" sz="2000" b="0" u="none" strike="noStrike">
-                <a:solidFill>
-                  <a:schemeClr val="dk1"/>
-                </a:solidFill>
-                <a:uFillTx/>
-                <a:latin typeface="Calibri"/>
-              </a:rPr>
-              <a:t> appears in </a:t>
-            </a:r>
-            <a:r>
-              <a:rPr lang="en-US" sz="2000" b="1" u="none" strike="noStrike">
-                <a:solidFill>
-                  <a:schemeClr val="dk1"/>
-                </a:solidFill>
-                <a:uFillTx/>
-                <a:latin typeface="Calibri"/>
-              </a:rPr>
-              <a:t>8</a:t>
-            </a:r>
-            <a:r>
-              <a:rPr lang="en-US" sz="2000" b="0" u="none" strike="noStrike">
-                <a:solidFill>
-                  <a:schemeClr val="dk1"/>
-                </a:solidFill>
-                <a:uFillTx/>
-                <a:latin typeface="Calibri"/>
-              </a:rPr>
-              <a:t> documents</a:t>
-            </a:r>
-          </a:p>
-          <a:p>
-            <a:pPr marL="345960" lvl="1" indent="-228600" defTabSz="914400">
-              <a:lnSpc>
-                <a:spcPct val="90000"/>
-              </a:lnSpc>
-              <a:spcBef>
-                <a:spcPts val="499"/>
-              </a:spcBef>
-              <a:buClr>
-                <a:srgbClr val="000000"/>
-              </a:buClr>
-              <a:buFont typeface="Arial"/>
-              <a:buChar char="•"/>
-              <a:tabLst>
-                <a:tab pos="0" algn="l"/>
-              </a:tabLst>
-            </a:pPr>
-            <a:r>
-              <a:rPr lang="en-US" sz="2000" b="0" u="none" strike="noStrike">
-                <a:solidFill>
-                  <a:schemeClr val="dk1"/>
-                </a:solidFill>
-                <a:uFillTx/>
-                <a:latin typeface="Calibri"/>
-              </a:rPr>
-              <a:t>In the target document, both words appear </a:t>
-            </a:r>
-            <a:r>
-              <a:rPr lang="en-US" sz="2000" b="1" u="none" strike="noStrike">
-                <a:solidFill>
-                  <a:schemeClr val="dk1"/>
-                </a:solidFill>
-                <a:uFillTx/>
-                <a:latin typeface="Calibri"/>
-              </a:rPr>
-              <a:t>once</a:t>
-            </a:r>
-            <a:r>
-              <a:rPr lang="en-US" sz="2000" b="0" u="none" strike="noStrike">
-                <a:solidFill>
-                  <a:schemeClr val="dk1"/>
-                </a:solidFill>
-                <a:uFillTx/>
-                <a:latin typeface="Calibri"/>
-              </a:rPr>
-              <a:t> (TF = 1)</a:t>
-            </a:r>
-          </a:p>
-        </p:txBody>
-      </p:sp>
-      <p:graphicFrame>
-        <p:nvGraphicFramePr>
-          <p:cNvPr id="150" name="Table 26"/>
-          <p:cNvGraphicFramePr/>
-          <p:nvPr/>
-        </p:nvGraphicFramePr>
-        <p:xfrm>
-          <a:off x="2633040" y="3508920"/>
-          <a:ext cx="6924960" cy="1188480"/>
-        </p:xfrm>
-        <a:graphic>
-          <a:graphicData uri="http://schemas.openxmlformats.org/drawingml/2006/table">
-            <a:tbl>
-              <a:tblPr/>
-              <a:tblGrid>
-                <a:gridCol w="756000">
-                  <a:extLst>
-                    <a:ext uri="{9D8B030D-6E8A-4147-A177-3AD203B41FA5}">
-                      <a16:colId xmlns:a16="http://schemas.microsoft.com/office/drawing/2014/main" val="20000"/>
-                    </a:ext>
-                  </a:extLst>
-                </a:gridCol>
-                <a:gridCol w="699840">
-                  <a:extLst>
-                    <a:ext uri="{9D8B030D-6E8A-4147-A177-3AD203B41FA5}">
-                      <a16:colId xmlns:a16="http://schemas.microsoft.com/office/drawing/2014/main" val="20001"/>
-                    </a:ext>
-                  </a:extLst>
-                </a:gridCol>
-                <a:gridCol w="1229400">
-                  <a:extLst>
-                    <a:ext uri="{9D8B030D-6E8A-4147-A177-3AD203B41FA5}">
-                      <a16:colId xmlns:a16="http://schemas.microsoft.com/office/drawing/2014/main" val="20002"/>
-                    </a:ext>
-                  </a:extLst>
-                </a:gridCol>
-                <a:gridCol w="1332360">
-                  <a:extLst>
-                    <a:ext uri="{9D8B030D-6E8A-4147-A177-3AD203B41FA5}">
-                      <a16:colId xmlns:a16="http://schemas.microsoft.com/office/drawing/2014/main" val="20003"/>
-                    </a:ext>
-                  </a:extLst>
-                </a:gridCol>
-                <a:gridCol w="751320">
-                  <a:extLst>
-                    <a:ext uri="{9D8B030D-6E8A-4147-A177-3AD203B41FA5}">
-                      <a16:colId xmlns:a16="http://schemas.microsoft.com/office/drawing/2014/main" val="20004"/>
-                    </a:ext>
-                  </a:extLst>
-                </a:gridCol>
-                <a:gridCol w="2156040">
-                  <a:extLst>
-                    <a:ext uri="{9D8B030D-6E8A-4147-A177-3AD203B41FA5}">
-                      <a16:colId xmlns:a16="http://schemas.microsoft.com/office/drawing/2014/main" val="20005"/>
-                    </a:ext>
-                  </a:extLst>
-                </a:gridCol>
-              </a:tblGrid>
-              <a:tr h="272160">
-                <a:tc>
-                  <a:txBody>
-                    <a:bodyPr/>
-                    <a:lstStyle/>
-                    <a:p>
-                      <a:pPr algn="ctr" defTabSz="914400">
-                        <a:lnSpc>
-                          <a:spcPct val="100000"/>
-                        </a:lnSpc>
-                      </a:pPr>
-                      <a:r>
-                        <a:rPr lang="en-US" sz="1100" b="1" u="none" strike="noStrike">
-                          <a:solidFill>
-                            <a:schemeClr val="dk1"/>
-                          </a:solidFill>
-                          <a:uFillTx/>
-                          <a:latin typeface="Calibri"/>
-                        </a:rPr>
-                        <a:t>Term</a:t>
-                      </a:r>
-                      <a:endParaRPr lang="en-US" sz="1100" b="0" u="none" strike="noStrike">
-                        <a:solidFill>
-                          <a:srgbClr val="000000"/>
-                        </a:solidFill>
-                        <a:uFillTx/>
-                        <a:latin typeface="Arial"/>
-                      </a:endParaRPr>
-                    </a:p>
-                  </a:txBody>
-                  <a:tcPr marL="9360" marR="9360" anchor="ctr">
-                    <a:lnL w="12240">
-                      <a:solidFill>
-                        <a:srgbClr val="000000"/>
-                      </a:solidFill>
-                      <a:prstDash val="solid"/>
-                    </a:lnL>
-                    <a:lnR w="12240">
-                      <a:solidFill>
-                        <a:srgbClr val="000000"/>
-                      </a:solidFill>
-                      <a:prstDash val="solid"/>
-                    </a:lnR>
-                    <a:lnT w="12240">
-                      <a:solidFill>
-                        <a:srgbClr val="000000"/>
-                      </a:solidFill>
-                      <a:prstDash val="solid"/>
-                    </a:lnT>
-                    <a:lnB w="12240">
-                      <a:solidFill>
-                        <a:srgbClr val="000000"/>
-                      </a:solidFill>
-                      <a:prstDash val="solid"/>
-                    </a:lnB>
-                    <a:solidFill>
-                      <a:schemeClr val="lt1">
-                        <a:lumMod val="75000"/>
-                      </a:schemeClr>
-                    </a:solidFill>
-                  </a:tcPr>
-                </a:tc>
-                <a:tc>
-                  <a:txBody>
-                    <a:bodyPr/>
-                    <a:lstStyle/>
-                    <a:p>
-                      <a:pPr algn="ctr" defTabSz="914400">
-                        <a:lnSpc>
-                          <a:spcPct val="100000"/>
-                        </a:lnSpc>
-                      </a:pPr>
-                      <a:r>
-                        <a:rPr lang="en-US" sz="1100" b="1" u="none" strike="noStrike">
-                          <a:solidFill>
-                            <a:schemeClr val="dk1"/>
-                          </a:solidFill>
-                          <a:uFillTx/>
-                          <a:latin typeface="Calibri"/>
-                        </a:rPr>
-                        <a:t>df(t)</a:t>
-                      </a:r>
-                      <a:endParaRPr lang="en-US" sz="1100" b="0" u="none" strike="noStrike">
-                        <a:solidFill>
-                          <a:srgbClr val="000000"/>
-                        </a:solidFill>
-                        <a:uFillTx/>
-                        <a:latin typeface="Arial"/>
-                      </a:endParaRPr>
-                    </a:p>
-                  </a:txBody>
-                  <a:tcPr marL="9360" marR="9360" anchor="ctr">
-                    <a:lnL w="12240">
-                      <a:solidFill>
-                        <a:srgbClr val="000000"/>
-                      </a:solidFill>
-                      <a:prstDash val="solid"/>
-                    </a:lnL>
-                    <a:lnR w="12240">
-                      <a:solidFill>
-                        <a:srgbClr val="000000"/>
-                      </a:solidFill>
-                      <a:prstDash val="solid"/>
-                    </a:lnR>
-                    <a:lnT w="12240">
-                      <a:solidFill>
-                        <a:srgbClr val="000000"/>
-                      </a:solidFill>
-                      <a:prstDash val="solid"/>
-                    </a:lnT>
-                    <a:lnB w="12240">
-                      <a:solidFill>
-                        <a:srgbClr val="000000"/>
-                      </a:solidFill>
-                      <a:prstDash val="solid"/>
-                    </a:lnB>
-                    <a:solidFill>
-                      <a:schemeClr val="lt1">
-                        <a:lumMod val="75000"/>
-                      </a:schemeClr>
-                    </a:solidFill>
-                  </a:tcPr>
-                </a:tc>
-                <a:tc>
-                  <a:txBody>
-                    <a:bodyPr/>
-                    <a:lstStyle/>
-                    <a:p>
-                      <a:pPr algn="ctr" defTabSz="914400">
-                        <a:lnSpc>
-                          <a:spcPct val="100000"/>
-                        </a:lnSpc>
-                      </a:pPr>
-                      <a:r>
-                        <a:rPr lang="en-US" sz="1100" b="1" u="none" strike="noStrike">
-                          <a:solidFill>
-                            <a:schemeClr val="dk1"/>
-                          </a:solidFill>
-                          <a:uFillTx/>
-                          <a:latin typeface="Calibri"/>
-                        </a:rPr>
-                        <a:t>TF in the Current Document</a:t>
-                      </a:r>
-                      <a:endParaRPr lang="en-US" sz="1100" b="0" u="none" strike="noStrike">
-                        <a:solidFill>
-                          <a:srgbClr val="000000"/>
-                        </a:solidFill>
-                        <a:uFillTx/>
-                        <a:latin typeface="Arial"/>
-                      </a:endParaRPr>
-                    </a:p>
-                  </a:txBody>
-                  <a:tcPr marL="9360" marR="9360" anchor="ctr">
-                    <a:lnL w="12240">
-                      <a:solidFill>
-                        <a:srgbClr val="000000"/>
-                      </a:solidFill>
-                      <a:prstDash val="solid"/>
-                    </a:lnL>
-                    <a:lnR w="12240">
-                      <a:solidFill>
-                        <a:srgbClr val="000000"/>
-                      </a:solidFill>
-                      <a:prstDash val="solid"/>
-                    </a:lnR>
-                    <a:lnT w="12240">
-                      <a:solidFill>
-                        <a:srgbClr val="000000"/>
-                      </a:solidFill>
-                      <a:prstDash val="solid"/>
-                    </a:lnT>
-                    <a:lnB w="12240">
-                      <a:solidFill>
-                        <a:srgbClr val="000000"/>
-                      </a:solidFill>
-                      <a:prstDash val="solid"/>
-                    </a:lnB>
-                    <a:solidFill>
-                      <a:schemeClr val="lt1">
-                        <a:lumMod val="75000"/>
-                      </a:schemeClr>
-                    </a:solidFill>
-                  </a:tcPr>
-                </a:tc>
-                <a:tc>
-                  <a:txBody>
-                    <a:bodyPr/>
-                    <a:lstStyle/>
-                    <a:p>
-                      <a:pPr algn="ctr" defTabSz="914400">
-                        <a:lnSpc>
-                          <a:spcPct val="100000"/>
-                        </a:lnSpc>
-                      </a:pPr>
-                      <a:r>
-                        <a:rPr lang="en-US" sz="1100" b="1" u="none" strike="noStrike">
-                          <a:solidFill>
-                            <a:schemeClr val="dk1"/>
-                          </a:solidFill>
-                          <a:uFillTx/>
-                          <a:latin typeface="Calibri"/>
-                        </a:rPr>
-                        <a:t>IDF (log₁₀(N/df))</a:t>
-                      </a:r>
-                      <a:endParaRPr lang="en-US" sz="1100" b="0" u="none" strike="noStrike">
-                        <a:solidFill>
-                          <a:srgbClr val="000000"/>
-                        </a:solidFill>
-                        <a:uFillTx/>
-                        <a:latin typeface="Arial"/>
-                      </a:endParaRPr>
-                    </a:p>
-                  </a:txBody>
-                  <a:tcPr marL="9360" marR="9360" anchor="ctr">
-                    <a:lnL w="12240">
-                      <a:solidFill>
-                        <a:srgbClr val="000000"/>
-                      </a:solidFill>
-                      <a:prstDash val="solid"/>
-                    </a:lnL>
-                    <a:lnR w="12240">
-                      <a:solidFill>
-                        <a:srgbClr val="000000"/>
-                      </a:solidFill>
-                      <a:prstDash val="solid"/>
-                    </a:lnR>
-                    <a:lnT w="12240">
-                      <a:solidFill>
-                        <a:srgbClr val="000000"/>
-                      </a:solidFill>
-                      <a:prstDash val="solid"/>
-                    </a:lnT>
-                    <a:lnB w="12240">
-                      <a:solidFill>
-                        <a:srgbClr val="000000"/>
-                      </a:solidFill>
-                      <a:prstDash val="solid"/>
-                    </a:lnB>
-                    <a:solidFill>
-                      <a:schemeClr val="lt1">
-                        <a:lumMod val="75000"/>
-                      </a:schemeClr>
-                    </a:solidFill>
-                  </a:tcPr>
-                </a:tc>
-                <a:tc>
-                  <a:txBody>
-                    <a:bodyPr/>
-                    <a:lstStyle/>
-                    <a:p>
-                      <a:pPr algn="ctr" defTabSz="914400">
-                        <a:lnSpc>
-                          <a:spcPct val="100000"/>
-                        </a:lnSpc>
-                      </a:pPr>
-                      <a:r>
-                        <a:rPr lang="en-US" sz="1100" b="1" u="none" strike="noStrike">
-                          <a:solidFill>
-                            <a:schemeClr val="dk1"/>
-                          </a:solidFill>
-                          <a:uFillTx/>
-                          <a:latin typeface="Calibri"/>
-                        </a:rPr>
-                        <a:t>TF-IDF</a:t>
-                      </a:r>
-                      <a:endParaRPr lang="en-US" sz="1100" b="0" u="none" strike="noStrike">
-                        <a:solidFill>
-                          <a:srgbClr val="000000"/>
-                        </a:solidFill>
-                        <a:uFillTx/>
-                        <a:latin typeface="Arial"/>
-                      </a:endParaRPr>
-                    </a:p>
-                  </a:txBody>
-                  <a:tcPr marL="9360" marR="9360" anchor="ctr">
-                    <a:lnL w="12240">
-                      <a:solidFill>
-                        <a:srgbClr val="000000"/>
-                      </a:solidFill>
-                      <a:prstDash val="solid"/>
-                    </a:lnL>
-                    <a:lnR w="12240">
-                      <a:solidFill>
-                        <a:srgbClr val="000000"/>
-                      </a:solidFill>
-                      <a:prstDash val="solid"/>
-                    </a:lnR>
-                    <a:lnT w="12240">
-                      <a:solidFill>
-                        <a:srgbClr val="000000"/>
-                      </a:solidFill>
-                      <a:prstDash val="solid"/>
-                    </a:lnT>
-                    <a:lnB w="12240">
-                      <a:solidFill>
-                        <a:srgbClr val="000000"/>
-                      </a:solidFill>
-                      <a:prstDash val="solid"/>
-                    </a:lnB>
-                    <a:solidFill>
-                      <a:schemeClr val="lt1">
-                        <a:lumMod val="75000"/>
-                      </a:schemeClr>
-                    </a:solidFill>
-                  </a:tcPr>
-                </a:tc>
-                <a:tc>
-                  <a:txBody>
-                    <a:bodyPr/>
-                    <a:lstStyle/>
-                    <a:p>
-                      <a:pPr algn="ctr" defTabSz="914400">
-                        <a:lnSpc>
-                          <a:spcPct val="100000"/>
-                        </a:lnSpc>
-                      </a:pPr>
-                      <a:r>
-                        <a:rPr lang="en-US" sz="1800" b="0" u="none" strike="noStrike">
-                          <a:solidFill>
-                            <a:schemeClr val="dk1"/>
-                          </a:solidFill>
-                          <a:uFillTx/>
-                          <a:latin typeface="Calibri"/>
-                        </a:rPr>
-                        <a:t>Result</a:t>
-                      </a:r>
-                      <a:endParaRPr lang="en-US" sz="1800" b="0" u="none" strike="noStrike">
-                        <a:solidFill>
-                          <a:srgbClr val="000000"/>
-                        </a:solidFill>
-                        <a:uFillTx/>
-                        <a:latin typeface="Arial"/>
-                      </a:endParaRPr>
-                    </a:p>
-                  </a:txBody>
-                  <a:tcPr anchor="ctr">
-                    <a:lnL w="12240">
-                      <a:solidFill>
-                        <a:srgbClr val="000000"/>
-                      </a:solidFill>
-                      <a:prstDash val="solid"/>
-                    </a:lnL>
-                    <a:lnR w="12240">
-                      <a:solidFill>
-                        <a:srgbClr val="000000"/>
-                      </a:solidFill>
-                      <a:prstDash val="solid"/>
-                    </a:lnR>
-                    <a:lnT w="12240">
-                      <a:solidFill>
-                        <a:srgbClr val="000000"/>
-                      </a:solidFill>
-                      <a:prstDash val="solid"/>
-                    </a:lnT>
-                    <a:lnB w="12240">
-                      <a:solidFill>
-                        <a:srgbClr val="000000"/>
-                      </a:solidFill>
-                      <a:prstDash val="solid"/>
-                    </a:lnB>
-                    <a:solidFill>
-                      <a:schemeClr val="lt1">
-                        <a:lumMod val="75000"/>
-                      </a:schemeClr>
-                    </a:solidFill>
-                  </a:tcPr>
-                </a:tc>
-                <a:extLst>
-                  <a:ext uri="{0D108BD9-81ED-4DB2-BD59-A6C34878D82A}">
-                    <a16:rowId xmlns:a16="http://schemas.microsoft.com/office/drawing/2014/main" val="10000"/>
-                  </a:ext>
-                </a:extLst>
-              </a:tr>
-              <a:tr h="380880">
-                <a:tc>
-                  <a:txBody>
-                    <a:bodyPr/>
-                    <a:lstStyle/>
-                    <a:p>
-                      <a:pPr algn="ctr" defTabSz="914400">
-                        <a:lnSpc>
-                          <a:spcPct val="100000"/>
-                        </a:lnSpc>
-                      </a:pPr>
-                      <a:r>
-                        <a:rPr lang="en-US" sz="1100" b="0" u="none" strike="noStrike">
-                          <a:solidFill>
-                            <a:schemeClr val="dk1"/>
-                          </a:solidFill>
-                          <a:uFillTx/>
-                          <a:latin typeface="Calibri"/>
-                        </a:rPr>
-                        <a:t>Word A</a:t>
-                      </a:r>
-                      <a:endParaRPr lang="en-US" sz="1100" b="0" u="none" strike="noStrike">
-                        <a:solidFill>
-                          <a:srgbClr val="000000"/>
-                        </a:solidFill>
-                        <a:uFillTx/>
-                        <a:latin typeface="Arial"/>
-                      </a:endParaRPr>
-                    </a:p>
-                  </a:txBody>
-                  <a:tcPr marL="9360" marR="9360" anchor="ctr">
-                    <a:lnL w="12240">
-                      <a:solidFill>
-                        <a:srgbClr val="000000"/>
-                      </a:solidFill>
-                      <a:prstDash val="solid"/>
-                    </a:lnL>
-                    <a:lnR w="12240">
-                      <a:solidFill>
-                        <a:srgbClr val="000000"/>
-                      </a:solidFill>
-                      <a:prstDash val="solid"/>
-                    </a:lnR>
-                    <a:lnT w="12240">
-                      <a:solidFill>
-                        <a:srgbClr val="000000"/>
-                      </a:solidFill>
-                      <a:prstDash val="solid"/>
-                    </a:lnT>
-                    <a:lnB w="12240">
-                      <a:solidFill>
-                        <a:srgbClr val="000000"/>
-                      </a:solidFill>
-                      <a:prstDash val="solid"/>
-                    </a:lnB>
-                    <a:noFill/>
-                  </a:tcPr>
-                </a:tc>
-                <a:tc>
-                  <a:txBody>
-                    <a:bodyPr/>
-                    <a:lstStyle/>
-                    <a:p>
-                      <a:pPr algn="ctr" defTabSz="914400">
-                        <a:lnSpc>
-                          <a:spcPct val="100000"/>
-                        </a:lnSpc>
-                      </a:pPr>
-                      <a:r>
-                        <a:rPr lang="en-US" sz="1100" b="0" u="none" strike="noStrike">
-                          <a:solidFill>
-                            <a:schemeClr val="dk1"/>
-                          </a:solidFill>
-                          <a:uFillTx/>
-                          <a:latin typeface="Calibri"/>
-                        </a:rPr>
-                        <a:t>1</a:t>
-                      </a:r>
-                      <a:endParaRPr lang="en-US" sz="1100" b="0" u="none" strike="noStrike">
-                        <a:solidFill>
-                          <a:srgbClr val="000000"/>
-                        </a:solidFill>
-                        <a:uFillTx/>
-                        <a:latin typeface="Arial"/>
-                      </a:endParaRPr>
-                    </a:p>
-                  </a:txBody>
-                  <a:tcPr marL="9360" marR="9360" anchor="ctr">
-                    <a:lnL w="12240">
-                      <a:solidFill>
-                        <a:srgbClr val="000000"/>
-                      </a:solidFill>
-                      <a:prstDash val="solid"/>
-                    </a:lnL>
-                    <a:lnR w="12240">
-                      <a:solidFill>
-                        <a:srgbClr val="000000"/>
-                      </a:solidFill>
-                      <a:prstDash val="solid"/>
-                    </a:lnR>
-                    <a:lnT w="12240">
-                      <a:solidFill>
-                        <a:srgbClr val="000000"/>
-                      </a:solidFill>
-                      <a:prstDash val="solid"/>
-                    </a:lnT>
-                    <a:lnB w="12240">
-                      <a:solidFill>
-                        <a:srgbClr val="000000"/>
-                      </a:solidFill>
-                      <a:prstDash val="solid"/>
-                    </a:lnB>
-                    <a:noFill/>
-                  </a:tcPr>
-                </a:tc>
-                <a:tc>
-                  <a:txBody>
-                    <a:bodyPr/>
-                    <a:lstStyle/>
-                    <a:p>
-                      <a:pPr algn="ctr" defTabSz="914400">
-                        <a:lnSpc>
-                          <a:spcPct val="100000"/>
-                        </a:lnSpc>
-                      </a:pPr>
-                      <a:r>
-                        <a:rPr lang="en-US" sz="1100" b="0" u="none" strike="noStrike">
-                          <a:solidFill>
-                            <a:schemeClr val="dk1"/>
-                          </a:solidFill>
-                          <a:uFillTx/>
-                          <a:latin typeface="Calibri"/>
-                        </a:rPr>
-                        <a:t>1</a:t>
-                      </a:r>
-                      <a:endParaRPr lang="en-US" sz="1100" b="0" u="none" strike="noStrike">
-                        <a:solidFill>
-                          <a:srgbClr val="000000"/>
-                        </a:solidFill>
-                        <a:uFillTx/>
-                        <a:latin typeface="Arial"/>
-                      </a:endParaRPr>
-                    </a:p>
-                  </a:txBody>
-                  <a:tcPr marL="9360" marR="9360" anchor="ctr">
-                    <a:lnL w="12240">
-                      <a:solidFill>
-                        <a:srgbClr val="000000"/>
-                      </a:solidFill>
-                      <a:prstDash val="solid"/>
-                    </a:lnL>
-                    <a:lnR w="12240">
-                      <a:solidFill>
-                        <a:srgbClr val="000000"/>
-                      </a:solidFill>
-                      <a:prstDash val="solid"/>
-                    </a:lnR>
-                    <a:lnT w="12240">
-                      <a:solidFill>
-                        <a:srgbClr val="000000"/>
-                      </a:solidFill>
-                      <a:prstDash val="solid"/>
-                    </a:lnT>
-                    <a:lnB w="12240">
-                      <a:solidFill>
-                        <a:srgbClr val="000000"/>
-                      </a:solidFill>
-                      <a:prstDash val="solid"/>
-                    </a:lnB>
-                    <a:noFill/>
-                  </a:tcPr>
-                </a:tc>
-                <a:tc>
-                  <a:txBody>
-                    <a:bodyPr/>
-                    <a:lstStyle/>
-                    <a:p>
-                      <a:pPr algn="ctr" defTabSz="914400">
-                        <a:lnSpc>
-                          <a:spcPct val="100000"/>
-                        </a:lnSpc>
-                      </a:pPr>
-                      <a:r>
-                        <a:rPr lang="en-US" sz="1100" b="0" u="none" strike="noStrike">
-                          <a:solidFill>
-                            <a:schemeClr val="dk1"/>
-                          </a:solidFill>
-                          <a:uFillTx/>
-                          <a:latin typeface="Calibri"/>
-                        </a:rPr>
-                        <a:t>log(10/1) = 1.00</a:t>
-                      </a:r>
-                      <a:endParaRPr lang="en-US" sz="1100" b="0" u="none" strike="noStrike">
-                        <a:solidFill>
-                          <a:srgbClr val="000000"/>
-                        </a:solidFill>
-                        <a:uFillTx/>
-                        <a:latin typeface="Arial"/>
-                      </a:endParaRPr>
-                    </a:p>
-                  </a:txBody>
-                  <a:tcPr marL="9360" marR="9360" anchor="ctr">
-                    <a:lnL w="12240">
-                      <a:solidFill>
-                        <a:srgbClr val="000000"/>
-                      </a:solidFill>
-                      <a:prstDash val="solid"/>
-                    </a:lnL>
-                    <a:lnR w="12240">
-                      <a:solidFill>
-                        <a:srgbClr val="000000"/>
-                      </a:solidFill>
-                      <a:prstDash val="solid"/>
-                    </a:lnR>
-                    <a:lnT w="12240">
-                      <a:solidFill>
-                        <a:srgbClr val="000000"/>
-                      </a:solidFill>
-                      <a:prstDash val="solid"/>
-                    </a:lnT>
-                    <a:lnB w="12240">
-                      <a:solidFill>
-                        <a:srgbClr val="000000"/>
-                      </a:solidFill>
-                      <a:prstDash val="solid"/>
-                    </a:lnB>
-                    <a:noFill/>
-                  </a:tcPr>
-                </a:tc>
-                <a:tc>
-                  <a:txBody>
-                    <a:bodyPr/>
-                    <a:lstStyle/>
-                    <a:p>
-                      <a:pPr algn="ctr" defTabSz="914400">
-                        <a:lnSpc>
-                          <a:spcPct val="100000"/>
-                        </a:lnSpc>
-                      </a:pPr>
-                      <a:r>
-                        <a:rPr lang="en-US" sz="1100" b="0" u="none" strike="noStrike">
-                          <a:solidFill>
-                            <a:schemeClr val="dk1"/>
-                          </a:solidFill>
-                          <a:uFillTx/>
-                          <a:latin typeface="Calibri"/>
-                        </a:rPr>
-                        <a:t>1</a:t>
-                      </a:r>
-                      <a:endParaRPr lang="en-US" sz="1100" b="0" u="none" strike="noStrike">
-                        <a:solidFill>
-                          <a:srgbClr val="000000"/>
-                        </a:solidFill>
-                        <a:uFillTx/>
-                        <a:latin typeface="Arial"/>
-                      </a:endParaRPr>
-                    </a:p>
-                  </a:txBody>
-                  <a:tcPr marL="9360" marR="9360" anchor="ctr">
-                    <a:lnL w="12240">
-                      <a:solidFill>
-                        <a:srgbClr val="000000"/>
-                      </a:solidFill>
-                      <a:prstDash val="solid"/>
-                    </a:lnL>
-                    <a:lnR w="12240">
-                      <a:solidFill>
-                        <a:srgbClr val="000000"/>
-                      </a:solidFill>
-                      <a:prstDash val="solid"/>
-                    </a:lnR>
-                    <a:lnT w="12240">
-                      <a:solidFill>
-                        <a:srgbClr val="000000"/>
-                      </a:solidFill>
-                      <a:prstDash val="solid"/>
-                    </a:lnT>
-                    <a:lnB w="12240">
-                      <a:solidFill>
-                        <a:srgbClr val="000000"/>
-                      </a:solidFill>
-                      <a:prstDash val="solid"/>
-                    </a:lnB>
-                    <a:noFill/>
-                  </a:tcPr>
-                </a:tc>
-                <a:tc>
-                  <a:txBody>
-                    <a:bodyPr/>
-                    <a:lstStyle/>
-                    <a:p>
-                      <a:pPr defTabSz="914400">
-                        <a:lnSpc>
-                          <a:spcPct val="100000"/>
-                        </a:lnSpc>
-                      </a:pPr>
-                      <a:r>
-                        <a:rPr lang="en-US" sz="1100" b="0" u="none" strike="noStrike">
-                          <a:solidFill>
-                            <a:schemeClr val="dk1"/>
-                          </a:solidFill>
-                          <a:uFillTx/>
-                          <a:latin typeface="Calibri"/>
-                        </a:rPr>
-                        <a:t>High importance (distinct)</a:t>
-                      </a:r>
-                      <a:endParaRPr lang="en-US" sz="1100" b="0" u="none" strike="noStrike">
-                        <a:solidFill>
-                          <a:srgbClr val="000000"/>
-                        </a:solidFill>
-                        <a:uFillTx/>
-                        <a:latin typeface="Arial"/>
-                      </a:endParaRPr>
-                    </a:p>
-                  </a:txBody>
-                  <a:tcPr anchor="ctr">
-                    <a:lnL w="12240">
-                      <a:solidFill>
-                        <a:srgbClr val="000000"/>
-                      </a:solidFill>
-                      <a:prstDash val="solid"/>
-                    </a:lnL>
-                    <a:lnR w="12240">
-                      <a:solidFill>
-                        <a:srgbClr val="000000"/>
-                      </a:solidFill>
-                      <a:prstDash val="solid"/>
-                    </a:lnR>
-                    <a:lnT w="12240">
-                      <a:solidFill>
-                        <a:srgbClr val="000000"/>
-                      </a:solidFill>
-                      <a:prstDash val="solid"/>
-                    </a:lnT>
-                    <a:lnB w="12240">
-                      <a:solidFill>
-                        <a:srgbClr val="000000"/>
-                      </a:solidFill>
-                      <a:prstDash val="solid"/>
-                    </a:lnB>
-                    <a:noFill/>
-                  </a:tcPr>
-                </a:tc>
-                <a:extLst>
-                  <a:ext uri="{0D108BD9-81ED-4DB2-BD59-A6C34878D82A}">
-                    <a16:rowId xmlns:a16="http://schemas.microsoft.com/office/drawing/2014/main" val="10001"/>
-                  </a:ext>
-                </a:extLst>
-              </a:tr>
-              <a:tr h="380880">
-                <a:tc>
-                  <a:txBody>
-                    <a:bodyPr/>
-                    <a:lstStyle/>
-                    <a:p>
-                      <a:pPr algn="ctr" defTabSz="914400">
-                        <a:lnSpc>
-                          <a:spcPct val="100000"/>
-                        </a:lnSpc>
-                      </a:pPr>
-                      <a:r>
-                        <a:rPr lang="en-US" sz="1100" b="0" u="none" strike="noStrike">
-                          <a:solidFill>
-                            <a:schemeClr val="dk1"/>
-                          </a:solidFill>
-                          <a:uFillTx/>
-                          <a:latin typeface="Calibri"/>
-                        </a:rPr>
-                        <a:t>Word B</a:t>
-                      </a:r>
-                      <a:endParaRPr lang="en-US" sz="1100" b="0" u="none" strike="noStrike">
-                        <a:solidFill>
-                          <a:srgbClr val="000000"/>
-                        </a:solidFill>
-                        <a:uFillTx/>
-                        <a:latin typeface="Arial"/>
-                      </a:endParaRPr>
-                    </a:p>
-                  </a:txBody>
-                  <a:tcPr marL="9360" marR="9360" anchor="ctr">
-                    <a:lnL w="12240">
-                      <a:solidFill>
-                        <a:srgbClr val="000000"/>
-                      </a:solidFill>
-                      <a:prstDash val="solid"/>
-                    </a:lnL>
-                    <a:lnR w="12240">
-                      <a:solidFill>
-                        <a:srgbClr val="000000"/>
-                      </a:solidFill>
-                      <a:prstDash val="solid"/>
-                    </a:lnR>
-                    <a:lnT w="12240">
-                      <a:solidFill>
-                        <a:srgbClr val="000000"/>
-                      </a:solidFill>
-                      <a:prstDash val="solid"/>
-                    </a:lnT>
-                    <a:lnB w="12240">
-                      <a:solidFill>
-                        <a:srgbClr val="000000"/>
-                      </a:solidFill>
-                      <a:prstDash val="solid"/>
-                    </a:lnB>
-                    <a:noFill/>
-                  </a:tcPr>
-                </a:tc>
-                <a:tc>
-                  <a:txBody>
-                    <a:bodyPr/>
-                    <a:lstStyle/>
-                    <a:p>
-                      <a:pPr algn="ctr" defTabSz="914400">
-                        <a:lnSpc>
-                          <a:spcPct val="100000"/>
-                        </a:lnSpc>
-                      </a:pPr>
-                      <a:r>
-                        <a:rPr lang="en-US" sz="1100" b="0" u="none" strike="noStrike">
-                          <a:solidFill>
-                            <a:schemeClr val="dk1"/>
-                          </a:solidFill>
-                          <a:uFillTx/>
-                          <a:latin typeface="Calibri"/>
-                        </a:rPr>
-                        <a:t>8</a:t>
-                      </a:r>
-                      <a:endParaRPr lang="en-US" sz="1100" b="0" u="none" strike="noStrike">
-                        <a:solidFill>
-                          <a:srgbClr val="000000"/>
-                        </a:solidFill>
-                        <a:uFillTx/>
-                        <a:latin typeface="Arial"/>
-                      </a:endParaRPr>
-                    </a:p>
-                  </a:txBody>
-                  <a:tcPr marL="9360" marR="9360" anchor="ctr">
-                    <a:lnL w="12240">
-                      <a:solidFill>
-                        <a:srgbClr val="000000"/>
-                      </a:solidFill>
-                      <a:prstDash val="solid"/>
-                    </a:lnL>
-                    <a:lnR w="12240">
-                      <a:solidFill>
-                        <a:srgbClr val="000000"/>
-                      </a:solidFill>
-                      <a:prstDash val="solid"/>
-                    </a:lnR>
-                    <a:lnT w="12240">
-                      <a:solidFill>
-                        <a:srgbClr val="000000"/>
-                      </a:solidFill>
-                      <a:prstDash val="solid"/>
-                    </a:lnT>
-                    <a:lnB w="12240">
-                      <a:solidFill>
-                        <a:srgbClr val="000000"/>
-                      </a:solidFill>
-                      <a:prstDash val="solid"/>
-                    </a:lnB>
-                    <a:noFill/>
-                  </a:tcPr>
-                </a:tc>
-                <a:tc>
-                  <a:txBody>
-                    <a:bodyPr/>
-                    <a:lstStyle/>
-                    <a:p>
-                      <a:pPr algn="ctr" defTabSz="914400">
-                        <a:lnSpc>
-                          <a:spcPct val="100000"/>
-                        </a:lnSpc>
-                      </a:pPr>
-                      <a:r>
-                        <a:rPr lang="en-US" sz="1100" b="0" u="none" strike="noStrike">
-                          <a:solidFill>
-                            <a:schemeClr val="dk1"/>
-                          </a:solidFill>
-                          <a:uFillTx/>
-                          <a:latin typeface="Calibri"/>
-                        </a:rPr>
-                        <a:t>1</a:t>
-                      </a:r>
-                      <a:endParaRPr lang="en-US" sz="1100" b="0" u="none" strike="noStrike">
-                        <a:solidFill>
-                          <a:srgbClr val="000000"/>
-                        </a:solidFill>
-                        <a:uFillTx/>
-                        <a:latin typeface="Arial"/>
-                      </a:endParaRPr>
-                    </a:p>
-                  </a:txBody>
-                  <a:tcPr marL="9360" marR="9360" anchor="ctr">
-                    <a:lnL w="12240">
-                      <a:solidFill>
-                        <a:srgbClr val="000000"/>
-                      </a:solidFill>
-                      <a:prstDash val="solid"/>
-                    </a:lnL>
-                    <a:lnR w="12240">
-                      <a:solidFill>
-                        <a:srgbClr val="000000"/>
-                      </a:solidFill>
-                      <a:prstDash val="solid"/>
-                    </a:lnR>
-                    <a:lnT w="12240">
-                      <a:solidFill>
-                        <a:srgbClr val="000000"/>
-                      </a:solidFill>
-                      <a:prstDash val="solid"/>
-                    </a:lnT>
-                    <a:lnB w="12240">
-                      <a:solidFill>
-                        <a:srgbClr val="000000"/>
-                      </a:solidFill>
-                      <a:prstDash val="solid"/>
-                    </a:lnB>
-                    <a:noFill/>
-                  </a:tcPr>
-                </a:tc>
-                <a:tc>
-                  <a:txBody>
-                    <a:bodyPr/>
-                    <a:lstStyle/>
-                    <a:p>
-                      <a:pPr algn="ctr" defTabSz="914400">
-                        <a:lnSpc>
-                          <a:spcPct val="100000"/>
-                        </a:lnSpc>
-                      </a:pPr>
-                      <a:r>
-                        <a:rPr lang="en-US" sz="1100" b="0" u="none" strike="noStrike">
-                          <a:solidFill>
-                            <a:schemeClr val="dk1"/>
-                          </a:solidFill>
-                          <a:uFillTx/>
-                          <a:latin typeface="Calibri"/>
-                        </a:rPr>
-                        <a:t>log(10/8) ≈ 0.096</a:t>
-                      </a:r>
-                      <a:endParaRPr lang="en-US" sz="1100" b="0" u="none" strike="noStrike">
-                        <a:solidFill>
-                          <a:srgbClr val="000000"/>
-                        </a:solidFill>
-                        <a:uFillTx/>
-                        <a:latin typeface="Arial"/>
-                      </a:endParaRPr>
-                    </a:p>
-                  </a:txBody>
-                  <a:tcPr marL="9360" marR="9360" anchor="ctr">
-                    <a:lnL w="12240">
-                      <a:solidFill>
-                        <a:srgbClr val="000000"/>
-                      </a:solidFill>
-                      <a:prstDash val="solid"/>
-                    </a:lnL>
-                    <a:lnR w="12240">
-                      <a:solidFill>
-                        <a:srgbClr val="000000"/>
-                      </a:solidFill>
-                      <a:prstDash val="solid"/>
-                    </a:lnR>
-                    <a:lnT w="12240">
-                      <a:solidFill>
-                        <a:srgbClr val="000000"/>
-                      </a:solidFill>
-                      <a:prstDash val="solid"/>
-                    </a:lnT>
-                    <a:lnB w="12240">
-                      <a:solidFill>
-                        <a:srgbClr val="000000"/>
-                      </a:solidFill>
-                      <a:prstDash val="solid"/>
-                    </a:lnB>
-                    <a:noFill/>
-                  </a:tcPr>
-                </a:tc>
-                <a:tc>
-                  <a:txBody>
-                    <a:bodyPr/>
-                    <a:lstStyle/>
-                    <a:p>
-                      <a:pPr algn="ctr" defTabSz="914400">
-                        <a:lnSpc>
-                          <a:spcPct val="100000"/>
-                        </a:lnSpc>
-                      </a:pPr>
-                      <a:r>
-                        <a:rPr lang="en-US" sz="1100" b="0" u="none" strike="noStrike">
-                          <a:solidFill>
-                            <a:schemeClr val="dk1"/>
-                          </a:solidFill>
-                          <a:uFillTx/>
-                          <a:latin typeface="Calibri"/>
-                        </a:rPr>
-                        <a:t>0.1</a:t>
-                      </a:r>
-                      <a:endParaRPr lang="en-US" sz="1100" b="0" u="none" strike="noStrike">
-                        <a:solidFill>
-                          <a:srgbClr val="000000"/>
-                        </a:solidFill>
-                        <a:uFillTx/>
-                        <a:latin typeface="Arial"/>
-                      </a:endParaRPr>
-                    </a:p>
-                  </a:txBody>
-                  <a:tcPr marL="9360" marR="9360" anchor="ctr">
-                    <a:lnL w="12240">
-                      <a:solidFill>
-                        <a:srgbClr val="000000"/>
-                      </a:solidFill>
-                      <a:prstDash val="solid"/>
-                    </a:lnL>
-                    <a:lnR w="12240">
-                      <a:solidFill>
-                        <a:srgbClr val="000000"/>
-                      </a:solidFill>
-                      <a:prstDash val="solid"/>
-                    </a:lnR>
-                    <a:lnT w="12240">
-                      <a:solidFill>
-                        <a:srgbClr val="000000"/>
-                      </a:solidFill>
-                      <a:prstDash val="solid"/>
-                    </a:lnT>
-                    <a:lnB w="12240">
-                      <a:solidFill>
-                        <a:srgbClr val="000000"/>
-                      </a:solidFill>
-                      <a:prstDash val="solid"/>
-                    </a:lnB>
-                    <a:noFill/>
-                  </a:tcPr>
-                </a:tc>
-                <a:tc>
-                  <a:txBody>
-                    <a:bodyPr/>
-                    <a:lstStyle/>
-                    <a:p>
-                      <a:pPr defTabSz="914400">
-                        <a:lnSpc>
-                          <a:spcPct val="100000"/>
-                        </a:lnSpc>
-                      </a:pPr>
-                      <a:r>
-                        <a:rPr lang="en-US" sz="1100" b="0" u="none" strike="noStrike">
-                          <a:solidFill>
-                            <a:schemeClr val="dk1"/>
-                          </a:solidFill>
-                          <a:uFillTx/>
-                          <a:latin typeface="Calibri"/>
-                        </a:rPr>
-                        <a:t>Low importance (common)</a:t>
-                      </a:r>
-                      <a:endParaRPr lang="en-US" sz="1100" b="0" u="none" strike="noStrike">
-                        <a:solidFill>
-                          <a:srgbClr val="000000"/>
-                        </a:solidFill>
-                        <a:uFillTx/>
-                        <a:latin typeface="Arial"/>
-                      </a:endParaRPr>
-                    </a:p>
-                  </a:txBody>
-                  <a:tcPr anchor="ctr">
-                    <a:lnL w="12240">
-                      <a:solidFill>
-                        <a:srgbClr val="000000"/>
-                      </a:solidFill>
-                      <a:prstDash val="solid"/>
-                    </a:lnL>
-                    <a:lnR w="12240">
-                      <a:solidFill>
-                        <a:srgbClr val="000000"/>
-                      </a:solidFill>
-                      <a:prstDash val="solid"/>
-                    </a:lnR>
-                    <a:lnT w="12240">
-                      <a:solidFill>
-                        <a:srgbClr val="000000"/>
-                      </a:solidFill>
-                      <a:prstDash val="solid"/>
-                    </a:lnT>
-                    <a:lnB w="12240">
-                      <a:solidFill>
-                        <a:srgbClr val="000000"/>
-                      </a:solidFill>
-                      <a:prstDash val="solid"/>
-                    </a:lnB>
-                    <a:noFill/>
-                  </a:tcPr>
-                </a:tc>
-                <a:extLst>
-                  <a:ext uri="{0D108BD9-81ED-4DB2-BD59-A6C34878D82A}">
-                    <a16:rowId xmlns:a16="http://schemas.microsoft.com/office/drawing/2014/main" val="10002"/>
-                  </a:ext>
-                </a:extLst>
-              </a:tr>
-            </a:tbl>
-          </a:graphicData>
-        </a:graphic>
-      </p:graphicFrame>
       <p:sp>
         <p:nvSpPr>
           <p:cNvPr id="151" name="TextBox 28"/>
@@ -18284,8 +18095,8 @@
         </p:nvSpPr>
         <p:spPr>
           <a:xfrm>
-            <a:off x="838080" y="5022000"/>
-            <a:ext cx="11413080" cy="912600"/>
+            <a:off x="802220" y="2548779"/>
+            <a:ext cx="7641984" cy="275545"/>
           </a:xfrm>
           <a:prstGeom prst="rect">
             <a:avLst/>
@@ -18308,62 +18119,1463 @@
           <a:fontRef idx="minor"/>
         </p:style>
         <p:txBody>
-          <a:bodyPr lIns="90000" tIns="45000" rIns="90000" bIns="45000" anchor="t">
+          <a:bodyPr wrap="square" lIns="90000" tIns="45000" rIns="90000" bIns="45000" anchor="t">
             <a:spAutoFit/>
           </a:bodyPr>
           <a:lstStyle/>
           <a:p>
-            <a:pPr defTabSz="914400">
-              <a:lnSpc>
-                <a:spcPct val="100000"/>
-              </a:lnSpc>
-            </a:pPr>
-            <a:r>
-              <a:rPr lang="en-US" sz="1800" b="1" u="none" strike="noStrike">
-                <a:solidFill>
-                  <a:schemeClr val="dk1"/>
-                </a:solidFill>
-                <a:uFillTx/>
-                <a:latin typeface="Calibri"/>
-              </a:rPr>
-              <a:t>Interpretation:</a:t>
-            </a:r>
-            <a:endParaRPr lang="en-US" sz="1800" b="0" u="none" strike="noStrike">
+            <a:r>
+              <a:rPr lang="en-US" sz="1200" b="1" dirty="0">
+                <a:solidFill>
+                  <a:srgbClr val="0070C0"/>
+                </a:solidFill>
+              </a:rPr>
+              <a:t>1. Compute Term Frequency (TF) = Occurrences of word in document / Total words in document</a:t>
+            </a:r>
+          </a:p>
+        </p:txBody>
+      </p:sp>
+      <p:graphicFrame>
+        <p:nvGraphicFramePr>
+          <p:cNvPr id="6" name="Table 5">
+            <a:extLst>
+              <a:ext uri="{FF2B5EF4-FFF2-40B4-BE49-F238E27FC236}">
+                <a16:creationId xmlns:a16="http://schemas.microsoft.com/office/drawing/2014/main" id="{421512CA-3C45-56E1-C100-CE4E8F0E14B1}"/>
+              </a:ext>
+            </a:extLst>
+          </p:cNvPr>
+          <p:cNvGraphicFramePr>
+            <a:graphicFrameLocks noGrp="1"/>
+          </p:cNvGraphicFramePr>
+          <p:nvPr>
+            <p:extLst>
+              <p:ext uri="{D42A27DB-BD31-4B8C-83A1-F6EECF244321}">
+                <p14:modId xmlns:p14="http://schemas.microsoft.com/office/powerpoint/2010/main" val="1079553369"/>
+              </p:ext>
+            </p:extLst>
+          </p:nvPr>
+        </p:nvGraphicFramePr>
+        <p:xfrm>
+          <a:off x="838079" y="2881853"/>
+          <a:ext cx="6060141" cy="577215"/>
+        </p:xfrm>
+        <a:graphic>
+          <a:graphicData uri="http://schemas.openxmlformats.org/drawingml/2006/table">
+            <a:tbl>
+              <a:tblPr>
+                <a:tableStyleId>{5940675A-B579-460E-94D1-54222C63F5DA}</a:tableStyleId>
+              </a:tblPr>
+              <a:tblGrid>
+                <a:gridCol w="1116226">
+                  <a:extLst>
+                    <a:ext uri="{9D8B030D-6E8A-4147-A177-3AD203B41FA5}">
+                      <a16:colId xmlns:a16="http://schemas.microsoft.com/office/drawing/2014/main" val="3580683569"/>
+                    </a:ext>
+                  </a:extLst>
+                </a:gridCol>
+                <a:gridCol w="2303929">
+                  <a:extLst>
+                    <a:ext uri="{9D8B030D-6E8A-4147-A177-3AD203B41FA5}">
+                      <a16:colId xmlns:a16="http://schemas.microsoft.com/office/drawing/2014/main" val="1635125070"/>
+                    </a:ext>
+                  </a:extLst>
+                </a:gridCol>
+                <a:gridCol w="2639986">
+                  <a:extLst>
+                    <a:ext uri="{9D8B030D-6E8A-4147-A177-3AD203B41FA5}">
+                      <a16:colId xmlns:a16="http://schemas.microsoft.com/office/drawing/2014/main" val="224697517"/>
+                    </a:ext>
+                  </a:extLst>
+                </a:gridCol>
+              </a:tblGrid>
+              <a:tr h="133380">
+                <a:tc>
+                  <a:txBody>
+                    <a:bodyPr/>
+                    <a:lstStyle/>
+                    <a:p>
+                      <a:pPr algn="ctr" fontAlgn="ctr"/>
+                      <a:r>
+                        <a:rPr lang="en-US" sz="1200" b="1" u="none" strike="noStrike" dirty="0">
+                          <a:effectLst/>
+                        </a:rPr>
+                        <a:t>Word</a:t>
+                      </a:r>
+                      <a:endParaRPr lang="en-US" sz="1200" b="1" i="0" u="none" strike="noStrike" dirty="0">
+                        <a:solidFill>
+                          <a:srgbClr val="000000"/>
+                        </a:solidFill>
+                        <a:effectLst/>
+                        <a:latin typeface="Aptos Narrow" panose="020B0004020202020204" pitchFamily="34" charset="0"/>
+                      </a:endParaRPr>
+                    </a:p>
+                  </a:txBody>
+                  <a:tcPr marL="9525" marR="9525" marT="9525" marB="0" anchor="ctr">
+                    <a:solidFill>
+                      <a:schemeClr val="bg1">
+                        <a:lumMod val="85000"/>
+                      </a:schemeClr>
+                    </a:solidFill>
+                  </a:tcPr>
+                </a:tc>
+                <a:tc>
+                  <a:txBody>
+                    <a:bodyPr/>
+                    <a:lstStyle/>
+                    <a:p>
+                      <a:pPr algn="ctr" fontAlgn="ctr"/>
+                      <a:r>
+                        <a:rPr lang="en-US" sz="1200" b="1" u="none" strike="noStrike" dirty="0">
+                          <a:effectLst/>
+                        </a:rPr>
+                        <a:t>Sentence 1 (5 words)</a:t>
+                      </a:r>
+                      <a:endParaRPr lang="en-US" sz="1200" b="1" i="0" u="none" strike="noStrike" dirty="0">
+                        <a:solidFill>
+                          <a:srgbClr val="000000"/>
+                        </a:solidFill>
+                        <a:effectLst/>
+                        <a:latin typeface="Aptos Narrow" panose="020B0004020202020204" pitchFamily="34" charset="0"/>
+                      </a:endParaRPr>
+                    </a:p>
+                  </a:txBody>
+                  <a:tcPr marL="9525" marR="9525" marT="9525" marB="0" anchor="ctr">
+                    <a:solidFill>
+                      <a:schemeClr val="bg1">
+                        <a:lumMod val="85000"/>
+                      </a:schemeClr>
+                    </a:solidFill>
+                  </a:tcPr>
+                </a:tc>
+                <a:tc>
+                  <a:txBody>
+                    <a:bodyPr/>
+                    <a:lstStyle/>
+                    <a:p>
+                      <a:pPr algn="ctr" fontAlgn="ctr"/>
+                      <a:r>
+                        <a:rPr lang="en-US" sz="1200" b="1" u="none" strike="noStrike" dirty="0">
+                          <a:effectLst/>
+                        </a:rPr>
+                        <a:t>Sentence 2 (4 words)</a:t>
+                      </a:r>
+                      <a:endParaRPr lang="en-US" sz="1200" b="1" i="0" u="none" strike="noStrike" dirty="0">
+                        <a:solidFill>
+                          <a:srgbClr val="000000"/>
+                        </a:solidFill>
+                        <a:effectLst/>
+                        <a:latin typeface="Aptos Narrow" panose="020B0004020202020204" pitchFamily="34" charset="0"/>
+                      </a:endParaRPr>
+                    </a:p>
+                  </a:txBody>
+                  <a:tcPr marL="9525" marR="9525" marT="9525" marB="0" anchor="ctr">
+                    <a:solidFill>
+                      <a:schemeClr val="bg1">
+                        <a:lumMod val="85000"/>
+                      </a:schemeClr>
+                    </a:solidFill>
+                  </a:tcPr>
+                </a:tc>
+                <a:extLst>
+                  <a:ext uri="{0D108BD9-81ED-4DB2-BD59-A6C34878D82A}">
+                    <a16:rowId xmlns:a16="http://schemas.microsoft.com/office/drawing/2014/main" val="4049083425"/>
+                  </a:ext>
+                </a:extLst>
+              </a:tr>
+              <a:tr h="174362">
+                <a:tc>
+                  <a:txBody>
+                    <a:bodyPr/>
+                    <a:lstStyle/>
+                    <a:p>
+                      <a:pPr algn="ctr" fontAlgn="ctr"/>
+                      <a:r>
+                        <a:rPr lang="en-US" sz="1200" u="none" strike="noStrike" dirty="0">
+                          <a:effectLst/>
+                        </a:rPr>
+                        <a:t>data</a:t>
+                      </a:r>
+                      <a:endParaRPr lang="en-US" sz="1200" b="0" i="0" u="none" strike="noStrike" dirty="0">
+                        <a:solidFill>
+                          <a:srgbClr val="000000"/>
+                        </a:solidFill>
+                        <a:effectLst/>
+                        <a:latin typeface="Aptos Narrow" panose="020B0004020202020204" pitchFamily="34" charset="0"/>
+                      </a:endParaRPr>
+                    </a:p>
+                  </a:txBody>
+                  <a:tcPr marL="9525" marR="9525" marT="9525" marB="0" anchor="ctr"/>
+                </a:tc>
+                <a:tc>
+                  <a:txBody>
+                    <a:bodyPr/>
+                    <a:lstStyle/>
+                    <a:p>
+                      <a:pPr algn="ctr" fontAlgn="ctr"/>
+                      <a:r>
+                        <a:rPr lang="en-US" sz="1200" u="none" strike="noStrike" dirty="0">
+                          <a:effectLst/>
+                        </a:rPr>
+                        <a:t>1 / 5 = 0.2</a:t>
+                      </a:r>
+                      <a:endParaRPr lang="en-US" sz="1200" b="0" i="0" u="none" strike="noStrike" dirty="0">
+                        <a:solidFill>
+                          <a:srgbClr val="000000"/>
+                        </a:solidFill>
+                        <a:effectLst/>
+                        <a:latin typeface="Aptos Narrow" panose="020B0004020202020204" pitchFamily="34" charset="0"/>
+                      </a:endParaRPr>
+                    </a:p>
+                  </a:txBody>
+                  <a:tcPr marL="9525" marR="9525" marT="9525" marB="0" anchor="ctr"/>
+                </a:tc>
+                <a:tc>
+                  <a:txBody>
+                    <a:bodyPr/>
+                    <a:lstStyle/>
+                    <a:p>
+                      <a:pPr algn="ctr" fontAlgn="ctr"/>
+                      <a:r>
+                        <a:rPr lang="en-US" sz="1200" u="none" strike="noStrike" dirty="0">
+                          <a:effectLst/>
+                        </a:rPr>
+                        <a:t>1 / 4 = 0.25</a:t>
+                      </a:r>
+                      <a:endParaRPr lang="en-US" sz="1200" b="0" i="0" u="none" strike="noStrike" dirty="0">
+                        <a:solidFill>
+                          <a:srgbClr val="000000"/>
+                        </a:solidFill>
+                        <a:effectLst/>
+                        <a:latin typeface="Aptos Narrow" panose="020B0004020202020204" pitchFamily="34" charset="0"/>
+                      </a:endParaRPr>
+                    </a:p>
+                  </a:txBody>
+                  <a:tcPr marL="9525" marR="9525" marT="9525" marB="0" anchor="ctr"/>
+                </a:tc>
+                <a:extLst>
+                  <a:ext uri="{0D108BD9-81ED-4DB2-BD59-A6C34878D82A}">
+                    <a16:rowId xmlns:a16="http://schemas.microsoft.com/office/drawing/2014/main" val="4088394637"/>
+                  </a:ext>
+                </a:extLst>
+              </a:tr>
+              <a:tr h="133380">
+                <a:tc>
+                  <a:txBody>
+                    <a:bodyPr/>
+                    <a:lstStyle/>
+                    <a:p>
+                      <a:pPr algn="ctr" fontAlgn="ctr"/>
+                      <a:r>
+                        <a:rPr lang="en-US" sz="1200" u="none" strike="noStrike" dirty="0">
+                          <a:effectLst/>
+                        </a:rPr>
+                        <a:t>learn</a:t>
+                      </a:r>
+                      <a:endParaRPr lang="en-US" sz="1200" b="0" i="0" u="none" strike="noStrike" dirty="0">
+                        <a:solidFill>
+                          <a:srgbClr val="000000"/>
+                        </a:solidFill>
+                        <a:effectLst/>
+                        <a:latin typeface="Aptos Narrow" panose="020B0004020202020204" pitchFamily="34" charset="0"/>
+                      </a:endParaRPr>
+                    </a:p>
+                  </a:txBody>
+                  <a:tcPr marL="9525" marR="9525" marT="9525" marB="0" anchor="ctr"/>
+                </a:tc>
+                <a:tc>
+                  <a:txBody>
+                    <a:bodyPr/>
+                    <a:lstStyle/>
+                    <a:p>
+                      <a:pPr algn="ctr" fontAlgn="ctr"/>
+                      <a:r>
+                        <a:rPr lang="en-US" sz="1200" u="none" strike="noStrike" dirty="0">
+                          <a:effectLst/>
+                        </a:rPr>
+                        <a:t>1 / 5 = 0.2</a:t>
+                      </a:r>
+                      <a:endParaRPr lang="en-US" sz="1200" b="0" i="0" u="none" strike="noStrike" dirty="0">
+                        <a:solidFill>
+                          <a:srgbClr val="000000"/>
+                        </a:solidFill>
+                        <a:effectLst/>
+                        <a:latin typeface="Aptos Narrow" panose="020B0004020202020204" pitchFamily="34" charset="0"/>
+                      </a:endParaRPr>
+                    </a:p>
+                  </a:txBody>
+                  <a:tcPr marL="9525" marR="9525" marT="9525" marB="0" anchor="ctr"/>
+                </a:tc>
+                <a:tc>
+                  <a:txBody>
+                    <a:bodyPr/>
+                    <a:lstStyle/>
+                    <a:p>
+                      <a:pPr algn="ctr" fontAlgn="ctr"/>
+                      <a:r>
+                        <a:rPr lang="en-US" sz="1200" u="none" strike="noStrike" dirty="0">
+                          <a:effectLst/>
+                        </a:rPr>
+                        <a:t>0 / 4 = 0</a:t>
+                      </a:r>
+                      <a:endParaRPr lang="en-US" sz="1200" b="0" i="0" u="none" strike="noStrike" dirty="0">
+                        <a:solidFill>
+                          <a:srgbClr val="000000"/>
+                        </a:solidFill>
+                        <a:effectLst/>
+                        <a:latin typeface="Aptos Narrow" panose="020B0004020202020204" pitchFamily="34" charset="0"/>
+                      </a:endParaRPr>
+                    </a:p>
+                  </a:txBody>
+                  <a:tcPr marL="9525" marR="9525" marT="9525" marB="0" anchor="ctr"/>
+                </a:tc>
+                <a:extLst>
+                  <a:ext uri="{0D108BD9-81ED-4DB2-BD59-A6C34878D82A}">
+                    <a16:rowId xmlns:a16="http://schemas.microsoft.com/office/drawing/2014/main" val="683118396"/>
+                  </a:ext>
+                </a:extLst>
+              </a:tr>
+            </a:tbl>
+          </a:graphicData>
+        </a:graphic>
+      </p:graphicFrame>
+      <p:graphicFrame>
+        <p:nvGraphicFramePr>
+          <p:cNvPr id="8" name="Table 7">
+            <a:extLst>
+              <a:ext uri="{FF2B5EF4-FFF2-40B4-BE49-F238E27FC236}">
+                <a16:creationId xmlns:a16="http://schemas.microsoft.com/office/drawing/2014/main" id="{0D439BFF-3BEA-55C6-98CA-7A1F9774EDF5}"/>
+              </a:ext>
+            </a:extLst>
+          </p:cNvPr>
+          <p:cNvGraphicFramePr>
+            <a:graphicFrameLocks noGrp="1"/>
+          </p:cNvGraphicFramePr>
+          <p:nvPr>
+            <p:extLst>
+              <p:ext uri="{D42A27DB-BD31-4B8C-83A1-F6EECF244321}">
+                <p14:modId xmlns:p14="http://schemas.microsoft.com/office/powerpoint/2010/main" val="2705266242"/>
+              </p:ext>
+            </p:extLst>
+          </p:nvPr>
+        </p:nvGraphicFramePr>
+        <p:xfrm>
+          <a:off x="838079" y="4021498"/>
+          <a:ext cx="6060140" cy="760095"/>
+        </p:xfrm>
+        <a:graphic>
+          <a:graphicData uri="http://schemas.openxmlformats.org/drawingml/2006/table">
+            <a:tbl>
+              <a:tblPr>
+                <a:tableStyleId>{5940675A-B579-460E-94D1-54222C63F5DA}</a:tableStyleId>
+              </a:tblPr>
+              <a:tblGrid>
+                <a:gridCol w="1515035">
+                  <a:extLst>
+                    <a:ext uri="{9D8B030D-6E8A-4147-A177-3AD203B41FA5}">
+                      <a16:colId xmlns:a16="http://schemas.microsoft.com/office/drawing/2014/main" val="1055588419"/>
+                    </a:ext>
+                  </a:extLst>
+                </a:gridCol>
+                <a:gridCol w="1515035">
+                  <a:extLst>
+                    <a:ext uri="{9D8B030D-6E8A-4147-A177-3AD203B41FA5}">
+                      <a16:colId xmlns:a16="http://schemas.microsoft.com/office/drawing/2014/main" val="4063376633"/>
+                    </a:ext>
+                  </a:extLst>
+                </a:gridCol>
+                <a:gridCol w="1515035">
+                  <a:extLst>
+                    <a:ext uri="{9D8B030D-6E8A-4147-A177-3AD203B41FA5}">
+                      <a16:colId xmlns:a16="http://schemas.microsoft.com/office/drawing/2014/main" val="1195277480"/>
+                    </a:ext>
+                  </a:extLst>
+                </a:gridCol>
+                <a:gridCol w="1515035">
+                  <a:extLst>
+                    <a:ext uri="{9D8B030D-6E8A-4147-A177-3AD203B41FA5}">
+                      <a16:colId xmlns:a16="http://schemas.microsoft.com/office/drawing/2014/main" val="413112516"/>
+                    </a:ext>
+                  </a:extLst>
+                </a:gridCol>
+              </a:tblGrid>
+              <a:tr h="132343">
+                <a:tc>
+                  <a:txBody>
+                    <a:bodyPr/>
+                    <a:lstStyle/>
+                    <a:p>
+                      <a:pPr algn="ctr" fontAlgn="ctr"/>
+                      <a:r>
+                        <a:rPr lang="en-US" sz="1200" b="1" u="none" strike="noStrike" dirty="0">
+                          <a:effectLst/>
+                        </a:rPr>
+                        <a:t>Word</a:t>
+                      </a:r>
+                      <a:endParaRPr lang="en-US" sz="1200" b="1" i="0" u="none" strike="noStrike" dirty="0">
+                        <a:solidFill>
+                          <a:srgbClr val="000000"/>
+                        </a:solidFill>
+                        <a:effectLst/>
+                        <a:latin typeface="Aptos Narrow" panose="020B0004020202020204" pitchFamily="34" charset="0"/>
+                      </a:endParaRPr>
+                    </a:p>
+                  </a:txBody>
+                  <a:tcPr marL="9525" marR="9525" marT="9525" marB="0" anchor="ctr">
+                    <a:solidFill>
+                      <a:schemeClr val="bg1">
+                        <a:lumMod val="85000"/>
+                      </a:schemeClr>
+                    </a:solidFill>
+                  </a:tcPr>
+                </a:tc>
+                <a:tc>
+                  <a:txBody>
+                    <a:bodyPr/>
+                    <a:lstStyle/>
+                    <a:p>
+                      <a:pPr algn="ctr" fontAlgn="ctr"/>
+                      <a:r>
+                        <a:rPr lang="en-US" sz="1200" b="1" dirty="0"/>
+                        <a:t>Count of Documents Containing Word</a:t>
+                      </a:r>
+                      <a:endParaRPr lang="en-US" sz="1200" b="1" i="0" u="none" strike="noStrike" dirty="0">
+                        <a:solidFill>
+                          <a:srgbClr val="000000"/>
+                        </a:solidFill>
+                        <a:effectLst/>
+                        <a:latin typeface="Aptos Narrow" panose="020B0004020202020204" pitchFamily="34" charset="0"/>
+                      </a:endParaRPr>
+                    </a:p>
+                  </a:txBody>
+                  <a:tcPr marL="9525" marR="9525" marT="9525" marB="0" anchor="ctr">
+                    <a:solidFill>
+                      <a:schemeClr val="bg1">
+                        <a:lumMod val="85000"/>
+                      </a:schemeClr>
+                    </a:solidFill>
+                  </a:tcPr>
+                </a:tc>
+                <a:tc>
+                  <a:txBody>
+                    <a:bodyPr/>
+                    <a:lstStyle/>
+                    <a:p>
+                      <a:pPr algn="ctr" fontAlgn="ctr"/>
+                      <a:r>
+                        <a:rPr lang="en-US" sz="1200" b="1" dirty="0"/>
+                        <a:t>Count of all</a:t>
+                      </a:r>
+                    </a:p>
+                    <a:p>
+                      <a:pPr algn="ctr" fontAlgn="ctr"/>
+                      <a:r>
+                        <a:rPr lang="en-US" sz="1200" b="1" dirty="0"/>
+                        <a:t>Documents </a:t>
+                      </a:r>
+                      <a:endParaRPr lang="en-US" sz="1200" b="1" i="0" u="none" strike="noStrike" dirty="0">
+                        <a:solidFill>
+                          <a:srgbClr val="000000"/>
+                        </a:solidFill>
+                        <a:effectLst/>
+                        <a:latin typeface="Aptos Narrow" panose="020B0004020202020204" pitchFamily="34" charset="0"/>
+                      </a:endParaRPr>
+                    </a:p>
+                  </a:txBody>
+                  <a:tcPr marL="9525" marR="9525" marT="9525" marB="0" anchor="ctr">
+                    <a:solidFill>
+                      <a:schemeClr val="bg1">
+                        <a:lumMod val="85000"/>
+                      </a:schemeClr>
+                    </a:solidFill>
+                  </a:tcPr>
+                </a:tc>
+                <a:tc>
+                  <a:txBody>
+                    <a:bodyPr/>
+                    <a:lstStyle/>
+                    <a:p>
+                      <a:pPr algn="ctr" fontAlgn="ctr"/>
+                      <a:r>
+                        <a:rPr lang="en-US" sz="1200" b="1" u="none" strike="noStrike" dirty="0">
+                          <a:effectLst/>
+                        </a:rPr>
+                        <a:t>IDF</a:t>
+                      </a:r>
+                      <a:endParaRPr lang="en-US" sz="1200" b="1" i="0" u="none" strike="noStrike" dirty="0">
+                        <a:solidFill>
+                          <a:srgbClr val="000000"/>
+                        </a:solidFill>
+                        <a:effectLst/>
+                        <a:latin typeface="Aptos Narrow" panose="020B0004020202020204" pitchFamily="34" charset="0"/>
+                      </a:endParaRPr>
+                    </a:p>
+                  </a:txBody>
+                  <a:tcPr marL="9525" marR="9525" marT="9525" marB="0" anchor="ctr">
+                    <a:solidFill>
+                      <a:schemeClr val="bg1">
+                        <a:lumMod val="85000"/>
+                      </a:schemeClr>
+                    </a:solidFill>
+                  </a:tcPr>
+                </a:tc>
+                <a:extLst>
+                  <a:ext uri="{0D108BD9-81ED-4DB2-BD59-A6C34878D82A}">
+                    <a16:rowId xmlns:a16="http://schemas.microsoft.com/office/drawing/2014/main" val="876264482"/>
+                  </a:ext>
+                </a:extLst>
+              </a:tr>
+              <a:tr h="0">
+                <a:tc>
+                  <a:txBody>
+                    <a:bodyPr/>
+                    <a:lstStyle/>
+                    <a:p>
+                      <a:pPr algn="ctr" fontAlgn="ctr"/>
+                      <a:r>
+                        <a:rPr lang="en-US" sz="1200" u="none" strike="noStrike">
+                          <a:effectLst/>
+                        </a:rPr>
+                        <a:t>data</a:t>
+                      </a:r>
+                      <a:endParaRPr lang="en-US" sz="1200" b="0" i="0" u="none" strike="noStrike">
+                        <a:solidFill>
+                          <a:srgbClr val="000000"/>
+                        </a:solidFill>
+                        <a:effectLst/>
+                        <a:latin typeface="Aptos Narrow" panose="020B0004020202020204" pitchFamily="34" charset="0"/>
+                      </a:endParaRPr>
+                    </a:p>
+                  </a:txBody>
+                  <a:tcPr marL="9525" marR="9525" marT="9525" marB="0" anchor="ctr"/>
+                </a:tc>
+                <a:tc>
+                  <a:txBody>
+                    <a:bodyPr/>
+                    <a:lstStyle/>
+                    <a:p>
+                      <a:pPr algn="ctr" fontAlgn="ctr"/>
+                      <a:r>
+                        <a:rPr lang="en-US" sz="1200" u="none" strike="noStrike" dirty="0">
+                          <a:effectLst/>
+                        </a:rPr>
+                        <a:t>2</a:t>
+                      </a:r>
+                      <a:endParaRPr lang="en-US" sz="1200" b="0" i="0" u="none" strike="noStrike" dirty="0">
+                        <a:solidFill>
+                          <a:srgbClr val="000000"/>
+                        </a:solidFill>
+                        <a:effectLst/>
+                        <a:latin typeface="Aptos Narrow" panose="020B0004020202020204" pitchFamily="34" charset="0"/>
+                      </a:endParaRPr>
+                    </a:p>
+                  </a:txBody>
+                  <a:tcPr marL="9525" marR="9525" marT="9525" marB="0" anchor="ctr"/>
+                </a:tc>
+                <a:tc rowSpan="2">
+                  <a:txBody>
+                    <a:bodyPr/>
+                    <a:lstStyle/>
+                    <a:p>
+                      <a:pPr algn="ctr" fontAlgn="ctr"/>
+                      <a:r>
+                        <a:rPr lang="en-US" sz="1200" b="0" i="0" u="none" strike="noStrike" dirty="0">
+                          <a:solidFill>
+                            <a:srgbClr val="000000"/>
+                          </a:solidFill>
+                          <a:effectLst/>
+                          <a:latin typeface="Aptos Narrow" panose="020B0004020202020204" pitchFamily="34" charset="0"/>
+                        </a:rPr>
+                        <a:t>2</a:t>
+                      </a:r>
+                    </a:p>
+                  </a:txBody>
+                  <a:tcPr marL="9525" marR="9525" marT="9525" marB="0" anchor="ctr"/>
+                </a:tc>
+                <a:tc>
+                  <a:txBody>
+                    <a:bodyPr/>
+                    <a:lstStyle/>
+                    <a:p>
+                      <a:pPr algn="ctr" fontAlgn="ctr"/>
+                      <a:r>
+                        <a:rPr lang="en-US" sz="1200" u="none" strike="noStrike">
+                          <a:effectLst/>
+                        </a:rPr>
+                        <a:t>log(2/2) = 0</a:t>
+                      </a:r>
+                      <a:endParaRPr lang="en-US" sz="1200" b="0" i="0" u="none" strike="noStrike">
+                        <a:solidFill>
+                          <a:srgbClr val="000000"/>
+                        </a:solidFill>
+                        <a:effectLst/>
+                        <a:latin typeface="Aptos Narrow" panose="020B0004020202020204" pitchFamily="34" charset="0"/>
+                      </a:endParaRPr>
+                    </a:p>
+                  </a:txBody>
+                  <a:tcPr marL="9525" marR="9525" marT="9525" marB="0" anchor="ctr"/>
+                </a:tc>
+                <a:extLst>
+                  <a:ext uri="{0D108BD9-81ED-4DB2-BD59-A6C34878D82A}">
+                    <a16:rowId xmlns:a16="http://schemas.microsoft.com/office/drawing/2014/main" val="1082431438"/>
+                  </a:ext>
+                </a:extLst>
+              </a:tr>
+              <a:tr h="132343">
+                <a:tc>
+                  <a:txBody>
+                    <a:bodyPr/>
+                    <a:lstStyle/>
+                    <a:p>
+                      <a:pPr algn="ctr" fontAlgn="ctr"/>
+                      <a:r>
+                        <a:rPr lang="en-US" sz="1200" u="none" strike="noStrike" dirty="0">
+                          <a:effectLst/>
+                        </a:rPr>
+                        <a:t>learn</a:t>
+                      </a:r>
+                      <a:endParaRPr lang="en-US" sz="1200" b="0" i="0" u="none" strike="noStrike" dirty="0">
+                        <a:solidFill>
+                          <a:srgbClr val="000000"/>
+                        </a:solidFill>
+                        <a:effectLst/>
+                        <a:latin typeface="Aptos Narrow" panose="020B0004020202020204" pitchFamily="34" charset="0"/>
+                      </a:endParaRPr>
+                    </a:p>
+                  </a:txBody>
+                  <a:tcPr marL="9525" marR="9525" marT="9525" marB="0" anchor="ctr"/>
+                </a:tc>
+                <a:tc>
+                  <a:txBody>
+                    <a:bodyPr/>
+                    <a:lstStyle/>
+                    <a:p>
+                      <a:pPr algn="ctr" fontAlgn="ctr"/>
+                      <a:r>
+                        <a:rPr lang="en-US" sz="1200" u="none" strike="noStrike" dirty="0">
+                          <a:effectLst/>
+                        </a:rPr>
+                        <a:t>1</a:t>
+                      </a:r>
+                      <a:endParaRPr lang="en-US" sz="1200" b="0" i="0" u="none" strike="noStrike" dirty="0">
+                        <a:solidFill>
+                          <a:srgbClr val="000000"/>
+                        </a:solidFill>
+                        <a:effectLst/>
+                        <a:latin typeface="Aptos Narrow" panose="020B0004020202020204" pitchFamily="34" charset="0"/>
+                      </a:endParaRPr>
+                    </a:p>
+                  </a:txBody>
+                  <a:tcPr marL="9525" marR="9525" marT="9525" marB="0" anchor="ctr"/>
+                </a:tc>
+                <a:tc vMerge="1">
+                  <a:txBody>
+                    <a:bodyPr/>
+                    <a:lstStyle/>
+                    <a:p>
+                      <a:endParaRPr dirty="0"/>
+                    </a:p>
+                  </a:txBody>
+                  <a:tcPr marL="9525" marR="9525" marT="9525" marB="0" anchor="ctr"/>
+                </a:tc>
+                <a:tc>
+                  <a:txBody>
+                    <a:bodyPr/>
+                    <a:lstStyle/>
+                    <a:p>
+                      <a:pPr algn="ctr" fontAlgn="ctr"/>
+                      <a:r>
+                        <a:rPr lang="en-US" sz="1200" u="none" strike="noStrike" dirty="0">
+                          <a:effectLst/>
+                        </a:rPr>
+                        <a:t>log(2/1) ≈ 0.693</a:t>
+                      </a:r>
+                      <a:endParaRPr lang="en-US" sz="1200" b="0" i="0" u="none" strike="noStrike" dirty="0">
+                        <a:solidFill>
+                          <a:srgbClr val="000000"/>
+                        </a:solidFill>
+                        <a:effectLst/>
+                        <a:latin typeface="Aptos Narrow" panose="020B0004020202020204" pitchFamily="34" charset="0"/>
+                      </a:endParaRPr>
+                    </a:p>
+                  </a:txBody>
+                  <a:tcPr marL="9525" marR="9525" marT="9525" marB="0" anchor="ctr"/>
+                </a:tc>
+                <a:extLst>
+                  <a:ext uri="{0D108BD9-81ED-4DB2-BD59-A6C34878D82A}">
+                    <a16:rowId xmlns:a16="http://schemas.microsoft.com/office/drawing/2014/main" val="745846780"/>
+                  </a:ext>
+                </a:extLst>
+              </a:tr>
+            </a:tbl>
+          </a:graphicData>
+        </a:graphic>
+      </p:graphicFrame>
+      <p:sp>
+        <p:nvSpPr>
+          <p:cNvPr id="9" name="TextBox 28">
+            <a:extLst>
+              <a:ext uri="{FF2B5EF4-FFF2-40B4-BE49-F238E27FC236}">
+                <a16:creationId xmlns:a16="http://schemas.microsoft.com/office/drawing/2014/main" id="{1CF1029F-413A-0DA0-F481-FF0BFD26F06A}"/>
+              </a:ext>
+            </a:extLst>
+          </p:cNvPr>
+          <p:cNvSpPr/>
+          <p:nvPr/>
+        </p:nvSpPr>
+        <p:spPr>
+          <a:xfrm>
+            <a:off x="802220" y="3686066"/>
+            <a:ext cx="7641984" cy="275545"/>
+          </a:xfrm>
+          <a:prstGeom prst="rect">
+            <a:avLst/>
+          </a:prstGeom>
+          <a:noFill/>
+          <a:ln w="0">
+            <a:noFill/>
+          </a:ln>
+        </p:spPr>
+        <p:style>
+          <a:lnRef idx="0">
+            <a:scrgbClr r="0" g="0" b="0"/>
+          </a:lnRef>
+          <a:fillRef idx="0">
+            <a:scrgbClr r="0" g="0" b="0"/>
+          </a:fillRef>
+          <a:effectRef idx="0">
+            <a:scrgbClr r="0" g="0" b="0"/>
+          </a:effectRef>
+          <a:fontRef idx="minor"/>
+        </p:style>
+        <p:txBody>
+          <a:bodyPr wrap="square" lIns="90000" tIns="45000" rIns="90000" bIns="45000" anchor="t">
+            <a:spAutoFit/>
+          </a:bodyPr>
+          <a:lstStyle/>
+          <a:p>
+            <a:r>
+              <a:rPr lang="en-US" sz="1200" b="1" dirty="0">
+                <a:solidFill>
+                  <a:srgbClr val="0070C0"/>
+                </a:solidFill>
+              </a:rPr>
+              <a:t>2. Compute Inverse Document Frequency (IDF) = log(Count of all Documents / Count of Documents Containing Word)</a:t>
+            </a:r>
+          </a:p>
+        </p:txBody>
+      </p:sp>
+      <p:sp>
+        <p:nvSpPr>
+          <p:cNvPr id="11" name="TextBox 10">
+            <a:extLst>
+              <a:ext uri="{FF2B5EF4-FFF2-40B4-BE49-F238E27FC236}">
+                <a16:creationId xmlns:a16="http://schemas.microsoft.com/office/drawing/2014/main" id="{56739892-FDDF-71A9-ADC6-BAF89F0C2A35}"/>
+              </a:ext>
+            </a:extLst>
+          </p:cNvPr>
+          <p:cNvSpPr txBox="1"/>
+          <p:nvPr/>
+        </p:nvSpPr>
+        <p:spPr>
+          <a:xfrm>
+            <a:off x="802220" y="1611742"/>
+            <a:ext cx="7035494" cy="830997"/>
+          </a:xfrm>
+          <a:prstGeom prst="rect">
+            <a:avLst/>
+          </a:prstGeom>
+          <a:noFill/>
+        </p:spPr>
+        <p:txBody>
+          <a:bodyPr wrap="square">
+            <a:spAutoFit/>
+          </a:bodyPr>
+          <a:lstStyle/>
+          <a:p>
+            <a:pPr marL="0" indent="0" defTabSz="914400">
+              <a:buFont typeface="Arial" panose="020B0604020202020204" pitchFamily="34" charset="0"/>
+              <a:buNone/>
+              <a:tabLst>
+                <a:tab pos="0" algn="l"/>
+              </a:tabLst>
+            </a:pPr>
+            <a:r>
+              <a:rPr lang="en-US" sz="1600" b="1" u="none" strike="noStrike" dirty="0">
+                <a:uFillTx/>
+                <a:latin typeface="+mn-lt"/>
+              </a:rPr>
+              <a:t>We have two documents, document 1 and document 2</a:t>
+            </a:r>
+          </a:p>
+          <a:p>
+            <a:pPr marL="285750" indent="-285750" defTabSz="914400">
+              <a:buFont typeface="Arial" panose="020B0604020202020204" pitchFamily="34" charset="0"/>
+              <a:buChar char="•"/>
+              <a:tabLst>
+                <a:tab pos="0" algn="l"/>
+              </a:tabLst>
+            </a:pPr>
+            <a:r>
+              <a:rPr lang="en-US" sz="1600" u="none" strike="noStrike" dirty="0">
+                <a:uFillTx/>
+                <a:latin typeface="+mn-lt"/>
+              </a:rPr>
+              <a:t>Document 1: </a:t>
+            </a:r>
+            <a:r>
+              <a:rPr lang="en-US" sz="1600" u="none" strike="noStrike" dirty="0">
+                <a:solidFill>
+                  <a:srgbClr val="00B050"/>
+                </a:solidFill>
+                <a:uFillTx/>
+                <a:latin typeface="+mn-lt"/>
+              </a:rPr>
+              <a:t>AI models learn from data</a:t>
+            </a:r>
+          </a:p>
+          <a:p>
+            <a:pPr marL="285750" indent="-285750">
+              <a:buFont typeface="Arial" panose="020B0604020202020204" pitchFamily="34" charset="0"/>
+              <a:buChar char="•"/>
+              <a:tabLst>
+                <a:tab pos="0" algn="l"/>
+              </a:tabLst>
+            </a:pPr>
+            <a:r>
+              <a:rPr lang="en-US" sz="1600" u="none" strike="noStrike" dirty="0">
+                <a:uFillTx/>
+                <a:latin typeface="+mn-lt"/>
+              </a:rPr>
+              <a:t>Document 2: </a:t>
+            </a:r>
+            <a:r>
+              <a:rPr lang="en-US" sz="1600" u="none" strike="noStrike" dirty="0">
+                <a:solidFill>
+                  <a:srgbClr val="00B050"/>
+                </a:solidFill>
+                <a:uFillTx/>
+                <a:latin typeface="+mn-lt"/>
+              </a:rPr>
+              <a:t>Data drives business decisions</a:t>
+            </a:r>
+            <a:endParaRPr lang="en-US" sz="1600" b="0" i="0" u="none" strike="noStrike" dirty="0">
               <a:solidFill>
-                <a:srgbClr val="000000"/>
+                <a:srgbClr val="00B050"/>
               </a:solidFill>
-              <a:uFillTx/>
-              <a:latin typeface="Arial"/>
+              <a:effectLst/>
+              <a:latin typeface="Aptos Narrow" panose="020B0004020202020204" pitchFamily="34" charset="0"/>
             </a:endParaRPr>
           </a:p>
-          <a:p>
-            <a:pPr marL="285840" indent="-285840" defTabSz="914400">
-              <a:lnSpc>
-                <a:spcPct val="100000"/>
-              </a:lnSpc>
-              <a:buClr>
-                <a:srgbClr val="000000"/>
-              </a:buClr>
-              <a:buFont typeface="Arial"/>
-              <a:buChar char="•"/>
-            </a:pPr>
-            <a:r>
-              <a:rPr lang="en-US" sz="1800" b="0" u="none" strike="noStrike">
-                <a:solidFill>
-                  <a:schemeClr val="dk1"/>
-                </a:solidFill>
-                <a:uFillTx/>
-                <a:latin typeface="Calibri"/>
-              </a:rPr>
-              <a:t>Word A is more distinctive and carries more weight in the document. Word B, being common across the corpus, contributes less to identifying document relevance.</a:t>
-            </a:r>
-            <a:endParaRPr lang="en-US" sz="1800" b="0" u="none" strike="noStrike">
-              <a:solidFill>
-                <a:srgbClr val="000000"/>
-              </a:solidFill>
-              <a:uFillTx/>
-              <a:latin typeface="Arial"/>
-            </a:endParaRPr>
+        </p:txBody>
+      </p:sp>
+      <p:graphicFrame>
+        <p:nvGraphicFramePr>
+          <p:cNvPr id="12" name="Table 11">
+            <a:extLst>
+              <a:ext uri="{FF2B5EF4-FFF2-40B4-BE49-F238E27FC236}">
+                <a16:creationId xmlns:a16="http://schemas.microsoft.com/office/drawing/2014/main" id="{8BD96D17-9F2B-B7C4-8E4F-0B510D15EB97}"/>
+              </a:ext>
+            </a:extLst>
+          </p:cNvPr>
+          <p:cNvGraphicFramePr>
+            <a:graphicFrameLocks noGrp="1"/>
+          </p:cNvGraphicFramePr>
+          <p:nvPr>
+            <p:extLst>
+              <p:ext uri="{D42A27DB-BD31-4B8C-83A1-F6EECF244321}">
+                <p14:modId xmlns:p14="http://schemas.microsoft.com/office/powerpoint/2010/main" val="440238593"/>
+              </p:ext>
+            </p:extLst>
+          </p:nvPr>
+        </p:nvGraphicFramePr>
+        <p:xfrm>
+          <a:off x="838079" y="5311884"/>
+          <a:ext cx="6060140" cy="748716"/>
+        </p:xfrm>
+        <a:graphic>
+          <a:graphicData uri="http://schemas.openxmlformats.org/drawingml/2006/table">
+            <a:tbl>
+              <a:tblPr>
+                <a:tableStyleId>{5940675A-B579-460E-94D1-54222C63F5DA}</a:tableStyleId>
+              </a:tblPr>
+              <a:tblGrid>
+                <a:gridCol w="1515035">
+                  <a:extLst>
+                    <a:ext uri="{9D8B030D-6E8A-4147-A177-3AD203B41FA5}">
+                      <a16:colId xmlns:a16="http://schemas.microsoft.com/office/drawing/2014/main" val="2592950918"/>
+                    </a:ext>
+                  </a:extLst>
+                </a:gridCol>
+                <a:gridCol w="1515035">
+                  <a:extLst>
+                    <a:ext uri="{9D8B030D-6E8A-4147-A177-3AD203B41FA5}">
+                      <a16:colId xmlns:a16="http://schemas.microsoft.com/office/drawing/2014/main" val="1449381176"/>
+                    </a:ext>
+                  </a:extLst>
+                </a:gridCol>
+                <a:gridCol w="1515035">
+                  <a:extLst>
+                    <a:ext uri="{9D8B030D-6E8A-4147-A177-3AD203B41FA5}">
+                      <a16:colId xmlns:a16="http://schemas.microsoft.com/office/drawing/2014/main" val="2569897095"/>
+                    </a:ext>
+                  </a:extLst>
+                </a:gridCol>
+                <a:gridCol w="1515035">
+                  <a:extLst>
+                    <a:ext uri="{9D8B030D-6E8A-4147-A177-3AD203B41FA5}">
+                      <a16:colId xmlns:a16="http://schemas.microsoft.com/office/drawing/2014/main" val="1102147587"/>
+                    </a:ext>
+                  </a:extLst>
+                </a:gridCol>
+              </a:tblGrid>
+              <a:tr h="273566">
+                <a:tc>
+                  <a:txBody>
+                    <a:bodyPr/>
+                    <a:lstStyle/>
+                    <a:p>
+                      <a:pPr algn="ctr" fontAlgn="ctr"/>
+                      <a:r>
+                        <a:rPr lang="en-US" sz="1100" b="1" u="none" strike="noStrike">
+                          <a:effectLst/>
+                        </a:rPr>
+                        <a:t>Word</a:t>
+                      </a:r>
+                      <a:endParaRPr lang="en-US" sz="1100" b="1" i="0" u="none" strike="noStrike">
+                        <a:solidFill>
+                          <a:srgbClr val="000000"/>
+                        </a:solidFill>
+                        <a:effectLst/>
+                        <a:latin typeface="Aptos Narrow" panose="020B0004020202020204" pitchFamily="34" charset="0"/>
+                      </a:endParaRPr>
+                    </a:p>
+                  </a:txBody>
+                  <a:tcPr marL="9525" marR="9525" marT="9525" marB="0" anchor="ctr">
+                    <a:solidFill>
+                      <a:schemeClr val="bg1">
+                        <a:lumMod val="85000"/>
+                      </a:schemeClr>
+                    </a:solidFill>
+                  </a:tcPr>
+                </a:tc>
+                <a:tc>
+                  <a:txBody>
+                    <a:bodyPr/>
+                    <a:lstStyle/>
+                    <a:p>
+                      <a:pPr algn="ctr" fontAlgn="ctr"/>
+                      <a:r>
+                        <a:rPr lang="en-US" sz="1100" b="1" u="none" strike="noStrike" dirty="0">
+                          <a:effectLst/>
+                        </a:rPr>
+                        <a:t>Document 1 TF</a:t>
+                      </a:r>
+                      <a:endParaRPr lang="en-US" sz="1100" b="1" i="0" u="none" strike="noStrike" dirty="0">
+                        <a:solidFill>
+                          <a:srgbClr val="000000"/>
+                        </a:solidFill>
+                        <a:effectLst/>
+                        <a:latin typeface="Aptos Narrow" panose="020B0004020202020204" pitchFamily="34" charset="0"/>
+                      </a:endParaRPr>
+                    </a:p>
+                  </a:txBody>
+                  <a:tcPr marL="9525" marR="9525" marT="9525" marB="0" anchor="ctr">
+                    <a:solidFill>
+                      <a:schemeClr val="bg1">
+                        <a:lumMod val="85000"/>
+                      </a:schemeClr>
+                    </a:solidFill>
+                  </a:tcPr>
+                </a:tc>
+                <a:tc>
+                  <a:txBody>
+                    <a:bodyPr/>
+                    <a:lstStyle/>
+                    <a:p>
+                      <a:pPr algn="ctr" fontAlgn="ctr"/>
+                      <a:r>
+                        <a:rPr lang="en-US" sz="1100" b="1" u="none" strike="noStrike" dirty="0">
+                          <a:effectLst/>
+                        </a:rPr>
+                        <a:t>IDF</a:t>
+                      </a:r>
+                      <a:endParaRPr lang="en-US" sz="1100" b="1" i="0" u="none" strike="noStrike" dirty="0">
+                        <a:solidFill>
+                          <a:srgbClr val="000000"/>
+                        </a:solidFill>
+                        <a:effectLst/>
+                        <a:latin typeface="Aptos Narrow" panose="020B0004020202020204" pitchFamily="34" charset="0"/>
+                      </a:endParaRPr>
+                    </a:p>
+                  </a:txBody>
+                  <a:tcPr marL="9525" marR="9525" marT="9525" marB="0" anchor="ctr">
+                    <a:solidFill>
+                      <a:schemeClr val="bg1">
+                        <a:lumMod val="85000"/>
+                      </a:schemeClr>
+                    </a:solidFill>
+                  </a:tcPr>
+                </a:tc>
+                <a:tc>
+                  <a:txBody>
+                    <a:bodyPr/>
+                    <a:lstStyle/>
+                    <a:p>
+                      <a:pPr algn="ctr" fontAlgn="ctr"/>
+                      <a:r>
+                        <a:rPr lang="en-US" sz="1100" b="1" u="none" strike="noStrike" dirty="0">
+                          <a:effectLst/>
+                        </a:rPr>
+                        <a:t>TF-IDF</a:t>
+                      </a:r>
+                      <a:endParaRPr lang="en-US" sz="1100" b="1" i="0" u="none" strike="noStrike" dirty="0">
+                        <a:solidFill>
+                          <a:srgbClr val="000000"/>
+                        </a:solidFill>
+                        <a:effectLst/>
+                        <a:latin typeface="Aptos Narrow" panose="020B0004020202020204" pitchFamily="34" charset="0"/>
+                      </a:endParaRPr>
+                    </a:p>
+                  </a:txBody>
+                  <a:tcPr marL="9525" marR="9525" marT="9525" marB="0" anchor="ctr">
+                    <a:solidFill>
+                      <a:schemeClr val="bg1">
+                        <a:lumMod val="85000"/>
+                      </a:schemeClr>
+                    </a:solidFill>
+                  </a:tcPr>
+                </a:tc>
+                <a:extLst>
+                  <a:ext uri="{0D108BD9-81ED-4DB2-BD59-A6C34878D82A}">
+                    <a16:rowId xmlns:a16="http://schemas.microsoft.com/office/drawing/2014/main" val="2539222744"/>
+                  </a:ext>
+                </a:extLst>
+              </a:tr>
+              <a:tr h="201584">
+                <a:tc>
+                  <a:txBody>
+                    <a:bodyPr/>
+                    <a:lstStyle/>
+                    <a:p>
+                      <a:pPr algn="ctr" fontAlgn="ctr"/>
+                      <a:r>
+                        <a:rPr lang="en-US" sz="1100" u="none" strike="noStrike">
+                          <a:effectLst/>
+                        </a:rPr>
+                        <a:t>data</a:t>
+                      </a:r>
+                      <a:endParaRPr lang="en-US" sz="1100" b="0" i="0" u="none" strike="noStrike">
+                        <a:solidFill>
+                          <a:srgbClr val="000000"/>
+                        </a:solidFill>
+                        <a:effectLst/>
+                        <a:latin typeface="Aptos Narrow" panose="020B0004020202020204" pitchFamily="34" charset="0"/>
+                      </a:endParaRPr>
+                    </a:p>
+                  </a:txBody>
+                  <a:tcPr marL="9525" marR="9525" marT="9525" marB="0" anchor="ctr"/>
+                </a:tc>
+                <a:tc>
+                  <a:txBody>
+                    <a:bodyPr/>
+                    <a:lstStyle/>
+                    <a:p>
+                      <a:pPr algn="ctr" fontAlgn="ctr"/>
+                      <a:r>
+                        <a:rPr lang="en-US" sz="1100" u="none" strike="noStrike">
+                          <a:effectLst/>
+                        </a:rPr>
+                        <a:t>0.2</a:t>
+                      </a:r>
+                      <a:endParaRPr lang="en-US" sz="1100" b="0" i="0" u="none" strike="noStrike">
+                        <a:solidFill>
+                          <a:srgbClr val="000000"/>
+                        </a:solidFill>
+                        <a:effectLst/>
+                        <a:latin typeface="Aptos Narrow" panose="020B0004020202020204" pitchFamily="34" charset="0"/>
+                      </a:endParaRPr>
+                    </a:p>
+                  </a:txBody>
+                  <a:tcPr marL="9525" marR="9525" marT="9525" marB="0" anchor="ctr"/>
+                </a:tc>
+                <a:tc>
+                  <a:txBody>
+                    <a:bodyPr/>
+                    <a:lstStyle/>
+                    <a:p>
+                      <a:pPr algn="ctr" fontAlgn="ctr"/>
+                      <a:r>
+                        <a:rPr lang="en-US" sz="1100" u="none" strike="noStrike" dirty="0">
+                          <a:effectLst/>
+                        </a:rPr>
+                        <a:t>0</a:t>
+                      </a:r>
+                      <a:endParaRPr lang="en-US" sz="1100" b="0" i="0" u="none" strike="noStrike" dirty="0">
+                        <a:solidFill>
+                          <a:srgbClr val="000000"/>
+                        </a:solidFill>
+                        <a:effectLst/>
+                        <a:latin typeface="Aptos Narrow" panose="020B0004020202020204" pitchFamily="34" charset="0"/>
+                      </a:endParaRPr>
+                    </a:p>
+                  </a:txBody>
+                  <a:tcPr marL="9525" marR="9525" marT="9525" marB="0" anchor="ctr"/>
+                </a:tc>
+                <a:tc>
+                  <a:txBody>
+                    <a:bodyPr/>
+                    <a:lstStyle/>
+                    <a:p>
+                      <a:pPr algn="ctr" fontAlgn="ctr"/>
+                      <a:r>
+                        <a:rPr lang="en-US" sz="1100" u="none" strike="noStrike">
+                          <a:effectLst/>
+                        </a:rPr>
+                        <a:t>0.2 × 0 = 0.0</a:t>
+                      </a:r>
+                      <a:endParaRPr lang="en-US" sz="1100" b="0" i="0" u="none" strike="noStrike">
+                        <a:solidFill>
+                          <a:srgbClr val="000000"/>
+                        </a:solidFill>
+                        <a:effectLst/>
+                        <a:latin typeface="Aptos Narrow" panose="020B0004020202020204" pitchFamily="34" charset="0"/>
+                      </a:endParaRPr>
+                    </a:p>
+                  </a:txBody>
+                  <a:tcPr marL="9525" marR="9525" marT="9525" marB="0" anchor="ctr"/>
+                </a:tc>
+                <a:extLst>
+                  <a:ext uri="{0D108BD9-81ED-4DB2-BD59-A6C34878D82A}">
+                    <a16:rowId xmlns:a16="http://schemas.microsoft.com/office/drawing/2014/main" val="1037965860"/>
+                  </a:ext>
+                </a:extLst>
+              </a:tr>
+              <a:tr h="273566">
+                <a:tc>
+                  <a:txBody>
+                    <a:bodyPr/>
+                    <a:lstStyle/>
+                    <a:p>
+                      <a:pPr algn="ctr" fontAlgn="ctr"/>
+                      <a:r>
+                        <a:rPr lang="en-US" sz="1100" u="none" strike="noStrike">
+                          <a:effectLst/>
+                        </a:rPr>
+                        <a:t>learn</a:t>
+                      </a:r>
+                      <a:endParaRPr lang="en-US" sz="1100" b="0" i="0" u="none" strike="noStrike">
+                        <a:solidFill>
+                          <a:srgbClr val="000000"/>
+                        </a:solidFill>
+                        <a:effectLst/>
+                        <a:latin typeface="Aptos Narrow" panose="020B0004020202020204" pitchFamily="34" charset="0"/>
+                      </a:endParaRPr>
+                    </a:p>
+                  </a:txBody>
+                  <a:tcPr marL="9525" marR="9525" marT="9525" marB="0" anchor="ctr"/>
+                </a:tc>
+                <a:tc>
+                  <a:txBody>
+                    <a:bodyPr/>
+                    <a:lstStyle/>
+                    <a:p>
+                      <a:pPr algn="ctr" fontAlgn="ctr"/>
+                      <a:r>
+                        <a:rPr lang="en-US" sz="1100" u="none" strike="noStrike" dirty="0">
+                          <a:effectLst/>
+                        </a:rPr>
+                        <a:t>0.2</a:t>
+                      </a:r>
+                      <a:endParaRPr lang="en-US" sz="1100" b="0" i="0" u="none" strike="noStrike" dirty="0">
+                        <a:solidFill>
+                          <a:srgbClr val="000000"/>
+                        </a:solidFill>
+                        <a:effectLst/>
+                        <a:latin typeface="Aptos Narrow" panose="020B0004020202020204" pitchFamily="34" charset="0"/>
+                      </a:endParaRPr>
+                    </a:p>
+                  </a:txBody>
+                  <a:tcPr marL="9525" marR="9525" marT="9525" marB="0" anchor="ctr"/>
+                </a:tc>
+                <a:tc>
+                  <a:txBody>
+                    <a:bodyPr/>
+                    <a:lstStyle/>
+                    <a:p>
+                      <a:pPr algn="ctr" fontAlgn="ctr"/>
+                      <a:r>
+                        <a:rPr lang="en-US" sz="1100" u="none" strike="noStrike">
+                          <a:effectLst/>
+                        </a:rPr>
+                        <a:t>0.693</a:t>
+                      </a:r>
+                      <a:endParaRPr lang="en-US" sz="1100" b="0" i="0" u="none" strike="noStrike">
+                        <a:solidFill>
+                          <a:srgbClr val="000000"/>
+                        </a:solidFill>
+                        <a:effectLst/>
+                        <a:latin typeface="Aptos Narrow" panose="020B0004020202020204" pitchFamily="34" charset="0"/>
+                      </a:endParaRPr>
+                    </a:p>
+                  </a:txBody>
+                  <a:tcPr marL="9525" marR="9525" marT="9525" marB="0" anchor="ctr"/>
+                </a:tc>
+                <a:tc>
+                  <a:txBody>
+                    <a:bodyPr/>
+                    <a:lstStyle/>
+                    <a:p>
+                      <a:pPr algn="ctr" fontAlgn="ctr"/>
+                      <a:r>
+                        <a:rPr lang="en-US" sz="1100" u="none" strike="noStrike" dirty="0">
+                          <a:effectLst/>
+                        </a:rPr>
+                        <a:t>0.2 × 0.693 ≈ 0.1386</a:t>
+                      </a:r>
+                      <a:endParaRPr lang="en-US" sz="1100" b="0" i="0" u="none" strike="noStrike" dirty="0">
+                        <a:solidFill>
+                          <a:srgbClr val="000000"/>
+                        </a:solidFill>
+                        <a:effectLst/>
+                        <a:latin typeface="Aptos Narrow" panose="020B0004020202020204" pitchFamily="34" charset="0"/>
+                      </a:endParaRPr>
+                    </a:p>
+                  </a:txBody>
+                  <a:tcPr marL="9525" marR="9525" marT="9525" marB="0" anchor="ctr"/>
+                </a:tc>
+                <a:extLst>
+                  <a:ext uri="{0D108BD9-81ED-4DB2-BD59-A6C34878D82A}">
+                    <a16:rowId xmlns:a16="http://schemas.microsoft.com/office/drawing/2014/main" val="4092325735"/>
+                  </a:ext>
+                </a:extLst>
+              </a:tr>
+            </a:tbl>
+          </a:graphicData>
+        </a:graphic>
+      </p:graphicFrame>
+      <p:sp>
+        <p:nvSpPr>
+          <p:cNvPr id="13" name="TextBox 28">
+            <a:extLst>
+              <a:ext uri="{FF2B5EF4-FFF2-40B4-BE49-F238E27FC236}">
+                <a16:creationId xmlns:a16="http://schemas.microsoft.com/office/drawing/2014/main" id="{329226C2-42F0-F928-D90B-44EDC623A50D}"/>
+              </a:ext>
+            </a:extLst>
+          </p:cNvPr>
+          <p:cNvSpPr/>
+          <p:nvPr/>
+        </p:nvSpPr>
+        <p:spPr>
+          <a:xfrm>
+            <a:off x="802220" y="4970713"/>
+            <a:ext cx="10515240" cy="275545"/>
+          </a:xfrm>
+          <a:prstGeom prst="rect">
+            <a:avLst/>
+          </a:prstGeom>
+          <a:noFill/>
+          <a:ln w="0">
+            <a:noFill/>
+          </a:ln>
+        </p:spPr>
+        <p:style>
+          <a:lnRef idx="0">
+            <a:scrgbClr r="0" g="0" b="0"/>
+          </a:lnRef>
+          <a:fillRef idx="0">
+            <a:scrgbClr r="0" g="0" b="0"/>
+          </a:fillRef>
+          <a:effectRef idx="0">
+            <a:scrgbClr r="0" g="0" b="0"/>
+          </a:effectRef>
+          <a:fontRef idx="minor"/>
+        </p:style>
+        <p:txBody>
+          <a:bodyPr wrap="square" lIns="90000" tIns="45000" rIns="90000" bIns="45000" anchor="t">
+            <a:spAutoFit/>
+          </a:bodyPr>
+          <a:lstStyle/>
+          <a:p>
+            <a:r>
+              <a:rPr lang="en-US" sz="1200" b="1" dirty="0">
+                <a:solidFill>
+                  <a:srgbClr val="0070C0"/>
+                </a:solidFill>
+              </a:rPr>
+              <a:t>3. Compute TF/IDF = TF x IDF</a:t>
+            </a:r>
+          </a:p>
+        </p:txBody>
+      </p:sp>
+      <p:sp>
+        <p:nvSpPr>
+          <p:cNvPr id="16" name="TextBox 28">
+            <a:extLst>
+              <a:ext uri="{FF2B5EF4-FFF2-40B4-BE49-F238E27FC236}">
+                <a16:creationId xmlns:a16="http://schemas.microsoft.com/office/drawing/2014/main" id="{20602073-7B6E-A022-6568-96518DFCE75D}"/>
+              </a:ext>
+            </a:extLst>
+          </p:cNvPr>
+          <p:cNvSpPr/>
+          <p:nvPr/>
+        </p:nvSpPr>
+        <p:spPr>
+          <a:xfrm>
+            <a:off x="802220" y="6241683"/>
+            <a:ext cx="6095999" cy="521766"/>
+          </a:xfrm>
+          <a:prstGeom prst="rect">
+            <a:avLst/>
+          </a:prstGeom>
+          <a:noFill/>
+          <a:ln w="0">
+            <a:noFill/>
+          </a:ln>
+        </p:spPr>
+        <p:style>
+          <a:lnRef idx="0">
+            <a:scrgbClr r="0" g="0" b="0"/>
+          </a:lnRef>
+          <a:fillRef idx="0">
+            <a:scrgbClr r="0" g="0" b="0"/>
+          </a:fillRef>
+          <a:effectRef idx="0">
+            <a:scrgbClr r="0" g="0" b="0"/>
+          </a:effectRef>
+          <a:fontRef idx="minor"/>
+        </p:style>
+        <p:txBody>
+          <a:bodyPr wrap="square" lIns="90000" tIns="45000" rIns="90000" bIns="45000" anchor="t">
+            <a:spAutoFit/>
+          </a:bodyPr>
+          <a:lstStyle/>
+          <a:p>
+            <a:r>
+              <a:rPr lang="en-US" sz="1400" b="1" dirty="0">
+                <a:solidFill>
+                  <a:srgbClr val="FF0000"/>
+                </a:solidFill>
+              </a:rPr>
+              <a:t>data is more common across documents → TF-IDF = 0 (less informative)</a:t>
+            </a:r>
+          </a:p>
+          <a:p>
+            <a:r>
+              <a:rPr lang="en-US" sz="1400" b="1" dirty="0">
+                <a:solidFill>
+                  <a:srgbClr val="FF0000"/>
+                </a:solidFill>
+              </a:rPr>
+              <a:t>learn is unique to document 1 → Higher TF-IDF (more informative)</a:t>
+            </a:r>
+          </a:p>
+        </p:txBody>
+      </p:sp>
+      <p:sp>
+        <p:nvSpPr>
+          <p:cNvPr id="18" name="TextBox 28">
+            <a:extLst>
+              <a:ext uri="{FF2B5EF4-FFF2-40B4-BE49-F238E27FC236}">
+                <a16:creationId xmlns:a16="http://schemas.microsoft.com/office/drawing/2014/main" id="{512AA434-8263-878C-DF21-A4A805DE2E23}"/>
+              </a:ext>
+            </a:extLst>
+          </p:cNvPr>
+          <p:cNvSpPr/>
+          <p:nvPr/>
+        </p:nvSpPr>
+        <p:spPr>
+          <a:xfrm>
+            <a:off x="6898219" y="4374522"/>
+            <a:ext cx="5427520" cy="306323"/>
+          </a:xfrm>
+          <a:prstGeom prst="rect">
+            <a:avLst/>
+          </a:prstGeom>
+          <a:noFill/>
+          <a:ln w="0">
+            <a:noFill/>
+          </a:ln>
+        </p:spPr>
+        <p:style>
+          <a:lnRef idx="0">
+            <a:scrgbClr r="0" g="0" b="0"/>
+          </a:lnRef>
+          <a:fillRef idx="0">
+            <a:scrgbClr r="0" g="0" b="0"/>
+          </a:fillRef>
+          <a:effectRef idx="0">
+            <a:scrgbClr r="0" g="0" b="0"/>
+          </a:effectRef>
+          <a:fontRef idx="minor"/>
+        </p:style>
+        <p:txBody>
+          <a:bodyPr wrap="square" lIns="90000" tIns="45000" rIns="90000" bIns="45000" anchor="t">
+            <a:spAutoFit/>
+          </a:bodyPr>
+          <a:lstStyle/>
+          <a:p>
+            <a:r>
+              <a:rPr lang="en-US" sz="1400" b="1" dirty="0">
+                <a:solidFill>
+                  <a:srgbClr val="FF0000"/>
+                </a:solidFill>
+              </a:rPr>
+              <a:t>Weights a word across all documents (General Index)</a:t>
+            </a:r>
+          </a:p>
+        </p:txBody>
+      </p:sp>
+      <p:sp>
+        <p:nvSpPr>
+          <p:cNvPr id="19" name="TextBox 28">
+            <a:extLst>
+              <a:ext uri="{FF2B5EF4-FFF2-40B4-BE49-F238E27FC236}">
+                <a16:creationId xmlns:a16="http://schemas.microsoft.com/office/drawing/2014/main" id="{A602EDBC-7A21-5A70-2F21-BA09B5929E01}"/>
+              </a:ext>
+            </a:extLst>
+          </p:cNvPr>
+          <p:cNvSpPr/>
+          <p:nvPr/>
+        </p:nvSpPr>
+        <p:spPr>
+          <a:xfrm>
+            <a:off x="6898219" y="3059716"/>
+            <a:ext cx="5427520" cy="306323"/>
+          </a:xfrm>
+          <a:prstGeom prst="rect">
+            <a:avLst/>
+          </a:prstGeom>
+          <a:noFill/>
+          <a:ln w="0">
+            <a:noFill/>
+          </a:ln>
+        </p:spPr>
+        <p:style>
+          <a:lnRef idx="0">
+            <a:scrgbClr r="0" g="0" b="0"/>
+          </a:lnRef>
+          <a:fillRef idx="0">
+            <a:scrgbClr r="0" g="0" b="0"/>
+          </a:fillRef>
+          <a:effectRef idx="0">
+            <a:scrgbClr r="0" g="0" b="0"/>
+          </a:effectRef>
+          <a:fontRef idx="minor"/>
+        </p:style>
+        <p:txBody>
+          <a:bodyPr wrap="square" lIns="90000" tIns="45000" rIns="90000" bIns="45000" anchor="t">
+            <a:spAutoFit/>
+          </a:bodyPr>
+          <a:lstStyle/>
+          <a:p>
+            <a:r>
+              <a:rPr lang="en-US" sz="1400" b="1" dirty="0">
+                <a:solidFill>
+                  <a:srgbClr val="FF0000"/>
+                </a:solidFill>
+              </a:rPr>
+              <a:t>Weights a word in a single document</a:t>
+            </a:r>
           </a:p>
         </p:txBody>
       </p:sp>
@@ -18375,7 +19587,7 @@
 </p:sld>
 </file>
 
-<file path=ppt/slides/slide25.xml><?xml version="1.0" encoding="utf-8"?>
+<file path=ppt/slides/slide24.xml><?xml version="1.0" encoding="utf-8"?>
 <p:sld xmlns:a="http://schemas.openxmlformats.org/drawingml/2006/main" xmlns:r="http://schemas.openxmlformats.org/officeDocument/2006/relationships" xmlns:p="http://schemas.openxmlformats.org/presentationml/2006/main">
   <p:cSld>
     <p:spTree>
@@ -18458,7 +19670,7 @@
         <p:spPr>
           <a:xfrm>
             <a:off x="838080" y="1784160"/>
-            <a:ext cx="11466720" cy="2610992"/>
+            <a:ext cx="10515240" cy="3330420"/>
           </a:xfrm>
           <a:prstGeom prst="rect">
             <a:avLst/>
@@ -18485,436 +19697,568 @@
           <a:fontRef idx="minor"/>
         </p:style>
         <p:txBody>
-          <a:bodyPr lIns="90000" tIns="45000" rIns="90000" bIns="45000" anchor="t">
+          <a:bodyPr wrap="square" lIns="90000" tIns="45000" rIns="90000" bIns="45000" anchor="t">
             <a:spAutoFit/>
           </a:bodyPr>
           <a:lstStyle/>
           <a:p>
-            <a:pPr defTabSz="914400">
-              <a:lnSpc>
-                <a:spcPts val="1426"/>
-              </a:lnSpc>
-            </a:pPr>
-            <a:r>
-              <a:rPr lang="en-US" sz="1600" b="0" u="none" strike="noStrike" dirty="0">
+            <a:pPr>
+              <a:lnSpc>
+                <a:spcPts val="1425"/>
+              </a:lnSpc>
+              <a:buNone/>
+            </a:pPr>
+            <a:r>
+              <a:rPr lang="en-US" sz="1600" b="0" dirty="0">
                 <a:solidFill>
                   <a:srgbClr val="0000FF"/>
                 </a:solidFill>
-                <a:uFillTx/>
-                <a:latin typeface="Consolas"/>
+                <a:effectLst/>
+                <a:latin typeface="Consolas" panose="020B0609020204030204" pitchFamily="49" charset="0"/>
               </a:rPr>
               <a:t>from</a:t>
             </a:r>
             <a:r>
-              <a:rPr lang="en-US" sz="1600" b="0" u="none" strike="noStrike" dirty="0">
+              <a:rPr lang="en-US" sz="1600" b="0" dirty="0">
                 <a:solidFill>
                   <a:srgbClr val="000000"/>
                 </a:solidFill>
-                <a:uFillTx/>
-                <a:latin typeface="Consolas"/>
+                <a:effectLst/>
+                <a:latin typeface="Consolas" panose="020B0609020204030204" pitchFamily="49" charset="0"/>
               </a:rPr>
               <a:t> </a:t>
             </a:r>
             <a:r>
-              <a:rPr lang="en-US" sz="1600" b="0" u="none" strike="noStrike" dirty="0" err="1">
+              <a:rPr lang="en-US" sz="1600" b="0" dirty="0" err="1">
                 <a:solidFill>
                   <a:srgbClr val="000000"/>
                 </a:solidFill>
-                <a:uFillTx/>
-                <a:latin typeface="Consolas"/>
+                <a:effectLst/>
+                <a:latin typeface="Consolas" panose="020B0609020204030204" pitchFamily="49" charset="0"/>
               </a:rPr>
               <a:t>sklearn.feature_extraction.text</a:t>
             </a:r>
             <a:r>
-              <a:rPr lang="en-US" sz="1600" b="0" u="none" strike="noStrike" dirty="0">
+              <a:rPr lang="en-US" sz="1600" b="0" dirty="0">
                 <a:solidFill>
                   <a:srgbClr val="000000"/>
                 </a:solidFill>
-                <a:uFillTx/>
-                <a:latin typeface="Consolas"/>
+                <a:effectLst/>
+                <a:latin typeface="Consolas" panose="020B0609020204030204" pitchFamily="49" charset="0"/>
               </a:rPr>
               <a:t> </a:t>
             </a:r>
             <a:r>
-              <a:rPr lang="en-US" sz="1600" b="0" u="none" strike="noStrike" dirty="0">
+              <a:rPr lang="en-US" sz="1600" b="0" dirty="0">
                 <a:solidFill>
                   <a:srgbClr val="0000FF"/>
                 </a:solidFill>
-                <a:uFillTx/>
-                <a:latin typeface="Consolas"/>
+                <a:effectLst/>
+                <a:latin typeface="Consolas" panose="020B0609020204030204" pitchFamily="49" charset="0"/>
               </a:rPr>
               <a:t>import</a:t>
             </a:r>
             <a:r>
-              <a:rPr lang="en-US" sz="1600" b="0" u="none" strike="noStrike" dirty="0">
+              <a:rPr lang="en-US" sz="1600" b="0" dirty="0">
                 <a:solidFill>
                   <a:srgbClr val="000000"/>
                 </a:solidFill>
-                <a:uFillTx/>
-                <a:latin typeface="Consolas"/>
+                <a:effectLst/>
+                <a:latin typeface="Consolas" panose="020B0609020204030204" pitchFamily="49" charset="0"/>
               </a:rPr>
               <a:t> </a:t>
             </a:r>
             <a:r>
-              <a:rPr lang="en-US" sz="1600" b="0" u="none" strike="noStrike" dirty="0" err="1">
+              <a:rPr lang="en-US" sz="1600" b="0" dirty="0" err="1">
                 <a:solidFill>
                   <a:srgbClr val="000000"/>
                 </a:solidFill>
-                <a:uFillTx/>
-                <a:latin typeface="Consolas"/>
+                <a:effectLst/>
+                <a:latin typeface="Consolas" panose="020B0609020204030204" pitchFamily="49" charset="0"/>
               </a:rPr>
               <a:t>TfidfVectorizer</a:t>
             </a:r>
-            <a:endParaRPr lang="en-US" sz="1600" b="0" u="none" strike="noStrike" dirty="0">
+            <a:endParaRPr lang="en-US" sz="1600" b="0" dirty="0">
               <a:solidFill>
                 <a:srgbClr val="000000"/>
               </a:solidFill>
-              <a:uFillTx/>
-              <a:latin typeface="Arial"/>
+              <a:effectLst/>
+              <a:latin typeface="Consolas" panose="020B0609020204030204" pitchFamily="49" charset="0"/>
             </a:endParaRPr>
           </a:p>
           <a:p>
-            <a:pPr defTabSz="914400">
-              <a:lnSpc>
-                <a:spcPts val="1426"/>
-              </a:lnSpc>
+            <a:pPr>
+              <a:lnSpc>
+                <a:spcPts val="1425"/>
+              </a:lnSpc>
+              <a:buNone/>
             </a:pPr>
             <a:br>
-              <a:rPr sz="1600" dirty="0"/>
+              <a:rPr lang="en-US" sz="1600" b="0" dirty="0">
+                <a:solidFill>
+                  <a:srgbClr val="000000"/>
+                </a:solidFill>
+                <a:effectLst/>
+                <a:latin typeface="Consolas" panose="020B0609020204030204" pitchFamily="49" charset="0"/>
+              </a:rPr>
             </a:br>
             <a:r>
-              <a:rPr lang="en-US" sz="1600" b="0" u="none" strike="noStrike" dirty="0" err="1">
+              <a:rPr lang="en-US" sz="1600" b="0" dirty="0">
                 <a:solidFill>
                   <a:srgbClr val="000000"/>
                 </a:solidFill>
-                <a:uFillTx/>
-                <a:latin typeface="Consolas"/>
-              </a:rPr>
-              <a:t>tfidf_vectorizer</a:t>
-            </a:r>
-            <a:r>
-              <a:rPr lang="en-US" sz="1600" b="0" u="none" strike="noStrike" dirty="0">
+                <a:effectLst/>
+                <a:latin typeface="Consolas" panose="020B0609020204030204" pitchFamily="49" charset="0"/>
+              </a:rPr>
+              <a:t>corpus = [</a:t>
+            </a:r>
+          </a:p>
+          <a:p>
+            <a:pPr>
+              <a:lnSpc>
+                <a:spcPts val="1425"/>
+              </a:lnSpc>
+              <a:buNone/>
+            </a:pPr>
+            <a:r>
+              <a:rPr lang="en-US" sz="1600" b="0" dirty="0">
                 <a:solidFill>
                   <a:srgbClr val="000000"/>
                 </a:solidFill>
-                <a:uFillTx/>
-                <a:latin typeface="Consolas"/>
-              </a:rPr>
-              <a:t> = </a:t>
-            </a:r>
-            <a:r>
-              <a:rPr lang="en-US" sz="1600" b="0" u="none" strike="noStrike" dirty="0" err="1">
+                <a:effectLst/>
+                <a:latin typeface="Consolas" panose="020B0609020204030204" pitchFamily="49" charset="0"/>
+              </a:rPr>
+              <a:t>    </a:t>
+            </a:r>
+            <a:r>
+              <a:rPr lang="en-US" sz="1600" b="0" dirty="0">
+                <a:solidFill>
+                  <a:srgbClr val="A31515"/>
+                </a:solidFill>
+                <a:effectLst/>
+                <a:latin typeface="Consolas" panose="020B0609020204030204" pitchFamily="49" charset="0"/>
+              </a:rPr>
+              <a:t>"Large language models revolutionize business."</a:t>
+            </a:r>
+            <a:r>
+              <a:rPr lang="en-US" sz="1600" b="0" dirty="0">
                 <a:solidFill>
                   <a:srgbClr val="000000"/>
                 </a:solidFill>
-                <a:uFillTx/>
-                <a:latin typeface="Consolas"/>
-              </a:rPr>
-              <a:t>TfidfVectorizer</a:t>
-            </a:r>
-            <a:r>
-              <a:rPr lang="en-US" sz="1600" b="0" u="none" strike="noStrike" dirty="0">
+                <a:effectLst/>
+                <a:latin typeface="Consolas" panose="020B0609020204030204" pitchFamily="49" charset="0"/>
+              </a:rPr>
+              <a:t>,</a:t>
+            </a:r>
+          </a:p>
+          <a:p>
+            <a:pPr>
+              <a:lnSpc>
+                <a:spcPts val="1425"/>
+              </a:lnSpc>
+              <a:buNone/>
+            </a:pPr>
+            <a:r>
+              <a:rPr lang="en-US" sz="1600" b="0" dirty="0">
                 <a:solidFill>
                   <a:srgbClr val="000000"/>
                 </a:solidFill>
-                <a:uFillTx/>
-                <a:latin typeface="Consolas"/>
-              </a:rPr>
-              <a:t>()</a:t>
-            </a:r>
-            <a:endParaRPr lang="en-US" sz="1600" b="0" u="none" strike="noStrike" dirty="0">
+                <a:effectLst/>
+                <a:latin typeface="Consolas" panose="020B0609020204030204" pitchFamily="49" charset="0"/>
+              </a:rPr>
+              <a:t>    </a:t>
+            </a:r>
+            <a:r>
+              <a:rPr lang="en-US" sz="1600" b="0" dirty="0">
+                <a:solidFill>
+                  <a:srgbClr val="A31515"/>
+                </a:solidFill>
+                <a:effectLst/>
+                <a:latin typeface="Consolas" panose="020B0609020204030204" pitchFamily="49" charset="0"/>
+              </a:rPr>
+              <a:t>"Business applications benefit from AI."</a:t>
+            </a:r>
+            <a:r>
+              <a:rPr lang="en-US" sz="1600" b="0" dirty="0">
+                <a:solidFill>
+                  <a:srgbClr val="000000"/>
+                </a:solidFill>
+                <a:effectLst/>
+                <a:latin typeface="Consolas" panose="020B0609020204030204" pitchFamily="49" charset="0"/>
+              </a:rPr>
+              <a:t>,</a:t>
+            </a:r>
+          </a:p>
+          <a:p>
+            <a:pPr>
+              <a:lnSpc>
+                <a:spcPts val="1425"/>
+              </a:lnSpc>
+              <a:buNone/>
+            </a:pPr>
+            <a:r>
+              <a:rPr lang="en-US" sz="1600" b="0" dirty="0">
+                <a:solidFill>
+                  <a:srgbClr val="000000"/>
+                </a:solidFill>
+                <a:effectLst/>
+                <a:latin typeface="Consolas" panose="020B0609020204030204" pitchFamily="49" charset="0"/>
+              </a:rPr>
+              <a:t>    </a:t>
+            </a:r>
+            <a:r>
+              <a:rPr lang="en-US" sz="1600" b="0" dirty="0">
+                <a:solidFill>
+                  <a:srgbClr val="A31515"/>
+                </a:solidFill>
+                <a:effectLst/>
+                <a:latin typeface="Consolas" panose="020B0609020204030204" pitchFamily="49" charset="0"/>
+              </a:rPr>
+              <a:t>"Language models learn from text data."</a:t>
+            </a:r>
+            <a:endParaRPr lang="en-US" sz="1600" b="0" dirty="0">
               <a:solidFill>
                 <a:srgbClr val="000000"/>
               </a:solidFill>
-              <a:uFillTx/>
-              <a:latin typeface="Arial"/>
+              <a:effectLst/>
+              <a:latin typeface="Consolas" panose="020B0609020204030204" pitchFamily="49" charset="0"/>
             </a:endParaRPr>
           </a:p>
           <a:p>
-            <a:pPr defTabSz="914400">
-              <a:lnSpc>
-                <a:spcPts val="1426"/>
-              </a:lnSpc>
+            <a:pPr>
+              <a:lnSpc>
+                <a:spcPts val="1425"/>
+              </a:lnSpc>
+              <a:buNone/>
+            </a:pPr>
+            <a:r>
+              <a:rPr lang="en-US" sz="1600" b="0" dirty="0">
+                <a:solidFill>
+                  <a:srgbClr val="000000"/>
+                </a:solidFill>
+                <a:effectLst/>
+                <a:latin typeface="Consolas" panose="020B0609020204030204" pitchFamily="49" charset="0"/>
+              </a:rPr>
+              <a:t>]</a:t>
+            </a:r>
+          </a:p>
+          <a:p>
+            <a:pPr>
+              <a:lnSpc>
+                <a:spcPts val="1425"/>
+              </a:lnSpc>
+              <a:buNone/>
             </a:pPr>
             <a:br>
-              <a:rPr sz="1600" dirty="0"/>
+              <a:rPr lang="en-US" sz="1600" b="0" dirty="0">
+                <a:solidFill>
+                  <a:srgbClr val="000000"/>
+                </a:solidFill>
+                <a:effectLst/>
+                <a:latin typeface="Consolas" panose="020B0609020204030204" pitchFamily="49" charset="0"/>
+              </a:rPr>
             </a:br>
             <a:r>
-              <a:rPr lang="en-US" sz="1600" b="0" u="none" strike="noStrike" dirty="0">
+              <a:rPr lang="en-US" sz="1600" b="0" dirty="0" err="1">
+                <a:solidFill>
+                  <a:srgbClr val="000000"/>
+                </a:solidFill>
+                <a:effectLst/>
+                <a:latin typeface="Consolas" panose="020B0609020204030204" pitchFamily="49" charset="0"/>
+              </a:rPr>
+              <a:t>tfidf_vectorizer</a:t>
+            </a:r>
+            <a:r>
+              <a:rPr lang="en-US" sz="1600" b="0" dirty="0">
+                <a:solidFill>
+                  <a:srgbClr val="000000"/>
+                </a:solidFill>
+                <a:effectLst/>
+                <a:latin typeface="Consolas" panose="020B0609020204030204" pitchFamily="49" charset="0"/>
+              </a:rPr>
+              <a:t> = </a:t>
+            </a:r>
+            <a:r>
+              <a:rPr lang="en-US" sz="1600" b="0" dirty="0" err="1">
+                <a:solidFill>
+                  <a:srgbClr val="000000"/>
+                </a:solidFill>
+                <a:effectLst/>
+                <a:latin typeface="Consolas" panose="020B0609020204030204" pitchFamily="49" charset="0"/>
+              </a:rPr>
+              <a:t>TfidfVectorizer</a:t>
+            </a:r>
+            <a:r>
+              <a:rPr lang="en-US" sz="1600" b="0" dirty="0">
+                <a:solidFill>
+                  <a:srgbClr val="000000"/>
+                </a:solidFill>
+                <a:effectLst/>
+                <a:latin typeface="Consolas" panose="020B0609020204030204" pitchFamily="49" charset="0"/>
+              </a:rPr>
+              <a:t>()</a:t>
+            </a:r>
+          </a:p>
+          <a:p>
+            <a:pPr>
+              <a:lnSpc>
+                <a:spcPts val="1425"/>
+              </a:lnSpc>
+              <a:buNone/>
+            </a:pPr>
+            <a:br>
+              <a:rPr lang="en-US" sz="1600" b="0" dirty="0">
+                <a:solidFill>
+                  <a:srgbClr val="000000"/>
+                </a:solidFill>
+                <a:effectLst/>
+                <a:latin typeface="Consolas" panose="020B0609020204030204" pitchFamily="49" charset="0"/>
+              </a:rPr>
+            </a:br>
+            <a:r>
+              <a:rPr lang="en-US" sz="1600" b="0" dirty="0">
                 <a:solidFill>
                   <a:srgbClr val="008000"/>
                 </a:solidFill>
-                <a:uFillTx/>
-                <a:latin typeface="Consolas"/>
-              </a:rPr>
-              <a:t># Transform the corpus into a document-term matrix, each row represents a document in the corpus, each column represents a unique word in the corpus</a:t>
-            </a:r>
-            <a:endParaRPr lang="en-US" sz="1600" b="0" u="none" strike="noStrike" dirty="0">
+                <a:effectLst/>
+                <a:latin typeface="Consolas" panose="020B0609020204030204" pitchFamily="49" charset="0"/>
+              </a:rPr>
+              <a:t># Transform the corpus into a document-term matrix</a:t>
+            </a:r>
+            <a:endParaRPr lang="en-US" sz="1600" b="0" dirty="0">
               <a:solidFill>
                 <a:srgbClr val="000000"/>
               </a:solidFill>
-              <a:uFillTx/>
-              <a:latin typeface="Arial"/>
+              <a:effectLst/>
+              <a:latin typeface="Consolas" panose="020B0609020204030204" pitchFamily="49" charset="0"/>
             </a:endParaRPr>
           </a:p>
           <a:p>
-            <a:pPr defTabSz="914400">
-              <a:lnSpc>
-                <a:spcPts val="1426"/>
-              </a:lnSpc>
-            </a:pPr>
-            <a:r>
-              <a:rPr lang="en-US" sz="1600" b="0" u="none" strike="noStrike" dirty="0" err="1">
-                <a:solidFill>
-                  <a:srgbClr val="000000"/>
-                </a:solidFill>
-                <a:uFillTx/>
-                <a:latin typeface="Consolas"/>
-              </a:rPr>
-              <a:t>X_tfidf</a:t>
-            </a:r>
-            <a:r>
-              <a:rPr lang="en-US" sz="1600" b="0" u="none" strike="noStrike" dirty="0">
-                <a:solidFill>
-                  <a:srgbClr val="000000"/>
-                </a:solidFill>
-                <a:uFillTx/>
-                <a:latin typeface="Consolas"/>
-              </a:rPr>
-              <a:t> = </a:t>
-            </a:r>
-            <a:r>
-              <a:rPr lang="en-US" sz="1600" b="0" u="none" strike="noStrike" dirty="0" err="1">
-                <a:solidFill>
-                  <a:srgbClr val="000000"/>
-                </a:solidFill>
-                <a:uFillTx/>
-                <a:latin typeface="Consolas"/>
-              </a:rPr>
-              <a:t>tfidf_vectorizer.fit_transform</a:t>
-            </a:r>
-            <a:r>
-              <a:rPr lang="en-US" sz="1600" b="0" u="none" strike="noStrike" dirty="0">
-                <a:solidFill>
-                  <a:srgbClr val="000000"/>
-                </a:solidFill>
-                <a:uFillTx/>
-                <a:latin typeface="Consolas"/>
-              </a:rPr>
-              <a:t>(corpus)</a:t>
-            </a:r>
-            <a:endParaRPr lang="en-US" sz="1600" b="0" u="none" strike="noStrike" dirty="0">
+            <a:pPr>
+              <a:lnSpc>
+                <a:spcPts val="1425"/>
+              </a:lnSpc>
+              <a:buNone/>
+            </a:pPr>
+            <a:r>
+              <a:rPr lang="en-US" sz="1600" b="0" dirty="0">
+                <a:solidFill>
+                  <a:srgbClr val="008000"/>
+                </a:solidFill>
+                <a:effectLst/>
+                <a:latin typeface="Consolas" panose="020B0609020204030204" pitchFamily="49" charset="0"/>
+              </a:rPr>
+              <a:t># Each row represents a document in the corpus</a:t>
+            </a:r>
+            <a:endParaRPr lang="en-US" sz="1600" b="0" dirty="0">
               <a:solidFill>
                 <a:srgbClr val="000000"/>
               </a:solidFill>
-              <a:uFillTx/>
-              <a:latin typeface="Arial"/>
+              <a:effectLst/>
+              <a:latin typeface="Consolas" panose="020B0609020204030204" pitchFamily="49" charset="0"/>
             </a:endParaRPr>
           </a:p>
           <a:p>
-            <a:pPr defTabSz="914400">
-              <a:lnSpc>
-                <a:spcPts val="1426"/>
-              </a:lnSpc>
-            </a:pPr>
-            <a:br>
-              <a:rPr sz="1600" dirty="0"/>
-            </a:br>
-            <a:r>
-              <a:rPr lang="en-US" sz="1600" b="0" u="none" strike="noStrike" dirty="0">
+            <a:pPr>
+              <a:lnSpc>
+                <a:spcPts val="1425"/>
+              </a:lnSpc>
+              <a:buNone/>
+            </a:pPr>
+            <a:r>
+              <a:rPr lang="en-US" sz="1600" b="0" dirty="0">
                 <a:solidFill>
                   <a:srgbClr val="008000"/>
                 </a:solidFill>
-                <a:uFillTx/>
-                <a:latin typeface="Consolas"/>
-              </a:rPr>
-              <a:t># Get the unique words in the corpus</a:t>
-            </a:r>
-            <a:endParaRPr lang="en-US" sz="1600" b="0" u="none" strike="noStrike" dirty="0">
+                <a:effectLst/>
+                <a:latin typeface="Consolas" panose="020B0609020204030204" pitchFamily="49" charset="0"/>
+              </a:rPr>
+              <a:t># Each column represents a unique word in the corpus</a:t>
+            </a:r>
+            <a:endParaRPr lang="en-US" sz="1600" b="0" dirty="0">
               <a:solidFill>
                 <a:srgbClr val="000000"/>
               </a:solidFill>
-              <a:uFillTx/>
-              <a:latin typeface="Arial"/>
+              <a:effectLst/>
+              <a:latin typeface="Consolas" panose="020B0609020204030204" pitchFamily="49" charset="0"/>
             </a:endParaRPr>
           </a:p>
           <a:p>
-            <a:pPr defTabSz="914400">
-              <a:lnSpc>
-                <a:spcPts val="1426"/>
-              </a:lnSpc>
-            </a:pPr>
-            <a:r>
-              <a:rPr lang="en-US" sz="1600" b="0" u="none" strike="noStrike" dirty="0">
+            <a:pPr>
+              <a:lnSpc>
+                <a:spcPts val="1425"/>
+              </a:lnSpc>
+              <a:buNone/>
+            </a:pPr>
+            <a:r>
+              <a:rPr lang="en-US" sz="1600" b="0" dirty="0" err="1">
                 <a:solidFill>
                   <a:srgbClr val="000000"/>
                 </a:solidFill>
-                <a:uFillTx/>
-                <a:latin typeface="Consolas"/>
-              </a:rPr>
-              <a:t>print(</a:t>
-            </a:r>
-            <a:r>
-              <a:rPr lang="en-US" sz="1600" b="0" u="none" strike="noStrike" dirty="0">
-                <a:solidFill>
-                  <a:srgbClr val="A31515"/>
-                </a:solidFill>
-                <a:uFillTx/>
-                <a:latin typeface="Consolas"/>
-              </a:rPr>
-              <a:t>"\n Unique words in the corpus:\n"</a:t>
-            </a:r>
-            <a:r>
-              <a:rPr lang="en-US" sz="1600" b="0" u="none" strike="noStrike" dirty="0">
+                <a:effectLst/>
+                <a:latin typeface="Consolas" panose="020B0609020204030204" pitchFamily="49" charset="0"/>
+              </a:rPr>
+              <a:t>X_tfidf</a:t>
+            </a:r>
+            <a:r>
+              <a:rPr lang="en-US" sz="1600" b="0" dirty="0">
                 <a:solidFill>
                   <a:srgbClr val="000000"/>
                 </a:solidFill>
-                <a:uFillTx/>
-                <a:latin typeface="Consolas"/>
-              </a:rPr>
-              <a:t>)</a:t>
-            </a:r>
-            <a:endParaRPr lang="en-US" sz="1600" b="0" u="none" strike="noStrike" dirty="0">
+                <a:effectLst/>
+                <a:latin typeface="Consolas" panose="020B0609020204030204" pitchFamily="49" charset="0"/>
+              </a:rPr>
+              <a:t> = </a:t>
+            </a:r>
+            <a:r>
+              <a:rPr lang="en-US" sz="1600" b="0" dirty="0" err="1">
+                <a:solidFill>
+                  <a:srgbClr val="000000"/>
+                </a:solidFill>
+                <a:effectLst/>
+                <a:latin typeface="Consolas" panose="020B0609020204030204" pitchFamily="49" charset="0"/>
+              </a:rPr>
+              <a:t>tfidf_vectorizer.fit_transform</a:t>
+            </a:r>
+            <a:r>
+              <a:rPr lang="en-US" sz="1600" b="0" dirty="0">
+                <a:solidFill>
+                  <a:srgbClr val="000000"/>
+                </a:solidFill>
+                <a:effectLst/>
+                <a:latin typeface="Consolas" panose="020B0609020204030204" pitchFamily="49" charset="0"/>
+              </a:rPr>
+              <a:t>(corpus)</a:t>
+            </a:r>
+          </a:p>
+          <a:p>
+            <a:pPr>
+              <a:lnSpc>
+                <a:spcPts val="1425"/>
+              </a:lnSpc>
+              <a:buNone/>
+            </a:pPr>
+            <a:br>
+              <a:rPr lang="en-US" sz="1600" b="0" dirty="0">
+                <a:solidFill>
+                  <a:srgbClr val="000000"/>
+                </a:solidFill>
+                <a:effectLst/>
+                <a:latin typeface="Consolas" panose="020B0609020204030204" pitchFamily="49" charset="0"/>
+              </a:rPr>
+            </a:br>
+            <a:br>
+              <a:rPr lang="en-US" sz="1600" b="0" dirty="0">
+                <a:solidFill>
+                  <a:srgbClr val="000000"/>
+                </a:solidFill>
+                <a:effectLst/>
+                <a:latin typeface="Consolas" panose="020B0609020204030204" pitchFamily="49" charset="0"/>
+              </a:rPr>
+            </a:br>
+            <a:r>
+              <a:rPr lang="en-US" sz="1600" b="0" dirty="0" err="1">
+                <a:solidFill>
+                  <a:srgbClr val="000000"/>
+                </a:solidFill>
+                <a:effectLst/>
+                <a:latin typeface="Consolas" panose="020B0609020204030204" pitchFamily="49" charset="0"/>
+              </a:rPr>
+              <a:t>df</a:t>
+            </a:r>
+            <a:r>
+              <a:rPr lang="en-US" sz="1600" b="0" dirty="0">
+                <a:solidFill>
+                  <a:srgbClr val="000000"/>
+                </a:solidFill>
+                <a:effectLst/>
+                <a:latin typeface="Consolas" panose="020B0609020204030204" pitchFamily="49" charset="0"/>
+              </a:rPr>
+              <a:t> = </a:t>
+            </a:r>
+            <a:r>
+              <a:rPr lang="en-US" sz="1600" b="0" dirty="0" err="1">
+                <a:solidFill>
+                  <a:srgbClr val="000000"/>
+                </a:solidFill>
+                <a:effectLst/>
+                <a:latin typeface="Consolas" panose="020B0609020204030204" pitchFamily="49" charset="0"/>
+              </a:rPr>
+              <a:t>pd.DataFrame</a:t>
+            </a:r>
+            <a:r>
+              <a:rPr lang="en-US" sz="1600" b="0" dirty="0">
+                <a:solidFill>
+                  <a:srgbClr val="000000"/>
+                </a:solidFill>
+                <a:effectLst/>
+                <a:latin typeface="Consolas" panose="020B0609020204030204" pitchFamily="49" charset="0"/>
+              </a:rPr>
+              <a:t>(</a:t>
+            </a:r>
+            <a:r>
+              <a:rPr lang="en-US" sz="1600" b="0" dirty="0" err="1">
+                <a:solidFill>
+                  <a:srgbClr val="000000"/>
+                </a:solidFill>
+                <a:effectLst/>
+                <a:latin typeface="Consolas" panose="020B0609020204030204" pitchFamily="49" charset="0"/>
+              </a:rPr>
+              <a:t>X_tfidf.toarray</a:t>
+            </a:r>
+            <a:r>
+              <a:rPr lang="en-US" sz="1600" b="0" dirty="0">
+                <a:solidFill>
+                  <a:srgbClr val="000000"/>
+                </a:solidFill>
+                <a:effectLst/>
+                <a:latin typeface="Consolas" panose="020B0609020204030204" pitchFamily="49" charset="0"/>
+              </a:rPr>
+              <a:t>(), columns=</a:t>
+            </a:r>
+            <a:r>
+              <a:rPr lang="en-US" sz="1600" b="0" dirty="0" err="1">
+                <a:solidFill>
+                  <a:srgbClr val="000000"/>
+                </a:solidFill>
+                <a:effectLst/>
+                <a:latin typeface="Consolas" panose="020B0609020204030204" pitchFamily="49" charset="0"/>
+              </a:rPr>
+              <a:t>tfidf_vectorizer.get_feature_names_out</a:t>
+            </a:r>
+            <a:r>
+              <a:rPr lang="en-US" sz="1600" b="0" dirty="0">
+                <a:solidFill>
+                  <a:srgbClr val="000000"/>
+                </a:solidFill>
+                <a:effectLst/>
+                <a:latin typeface="Consolas" panose="020B0609020204030204" pitchFamily="49" charset="0"/>
+              </a:rPr>
+              <a:t>())</a:t>
+            </a:r>
+          </a:p>
+          <a:p>
+            <a:pPr>
+              <a:lnSpc>
+                <a:spcPts val="1425"/>
+              </a:lnSpc>
+            </a:pPr>
+            <a:r>
+              <a:rPr lang="en-US" sz="1600" b="0" dirty="0" err="1">
+                <a:solidFill>
+                  <a:srgbClr val="000000"/>
+                </a:solidFill>
+                <a:effectLst/>
+                <a:latin typeface="Consolas" panose="020B0609020204030204" pitchFamily="49" charset="0"/>
+              </a:rPr>
+              <a:t>df</a:t>
+            </a:r>
+            <a:endParaRPr lang="en-US" sz="1600" b="0" dirty="0">
               <a:solidFill>
                 <a:srgbClr val="000000"/>
               </a:solidFill>
-              <a:uFillTx/>
-              <a:latin typeface="Arial"/>
-            </a:endParaRPr>
-          </a:p>
-          <a:p>
-            <a:pPr defTabSz="914400">
-              <a:lnSpc>
-                <a:spcPts val="1426"/>
-              </a:lnSpc>
-            </a:pPr>
-            <a:r>
-              <a:rPr lang="en-US" sz="1600" b="0" u="none" strike="noStrike" dirty="0">
-                <a:solidFill>
-                  <a:srgbClr val="000000"/>
-                </a:solidFill>
-                <a:uFillTx/>
-                <a:latin typeface="Consolas"/>
-              </a:rPr>
-              <a:t>print(</a:t>
-            </a:r>
-            <a:r>
-              <a:rPr lang="en-US" sz="1600" b="0" u="none" strike="noStrike" dirty="0" err="1">
-                <a:solidFill>
-                  <a:srgbClr val="000000"/>
-                </a:solidFill>
-                <a:uFillTx/>
-                <a:latin typeface="Consolas"/>
-              </a:rPr>
-              <a:t>tfidf_vectorizer.get_feature_names_out</a:t>
-            </a:r>
-            <a:r>
-              <a:rPr lang="en-US" sz="1600" b="0" u="none" strike="noStrike" dirty="0">
-                <a:solidFill>
-                  <a:srgbClr val="000000"/>
-                </a:solidFill>
-                <a:uFillTx/>
-                <a:latin typeface="Consolas"/>
-              </a:rPr>
-              <a:t>())</a:t>
-            </a:r>
-            <a:endParaRPr lang="en-US" sz="1600" b="0" u="none" strike="noStrike" dirty="0">
-              <a:solidFill>
-                <a:srgbClr val="000000"/>
-              </a:solidFill>
-              <a:uFillTx/>
-              <a:latin typeface="Arial"/>
-            </a:endParaRPr>
-          </a:p>
-          <a:p>
-            <a:pPr defTabSz="914400">
-              <a:lnSpc>
-                <a:spcPts val="1426"/>
-              </a:lnSpc>
-            </a:pPr>
-            <a:br>
-              <a:rPr sz="1600" dirty="0"/>
-            </a:br>
-            <a:r>
-              <a:rPr lang="en-US" sz="1600" b="0" u="none" strike="noStrike" dirty="0">
-                <a:solidFill>
-                  <a:srgbClr val="000000"/>
-                </a:solidFill>
-                <a:uFillTx/>
-                <a:latin typeface="Consolas"/>
-              </a:rPr>
-              <a:t>print(</a:t>
-            </a:r>
-            <a:r>
-              <a:rPr lang="en-US" sz="1600" b="0" u="none" strike="noStrike" dirty="0">
-                <a:solidFill>
-                  <a:srgbClr val="A31515"/>
-                </a:solidFill>
-                <a:uFillTx/>
-                <a:latin typeface="Consolas"/>
-              </a:rPr>
-              <a:t>"\n All documents in the corpus are represented as a matrix of TF-IDF features:\n"</a:t>
-            </a:r>
-            <a:r>
-              <a:rPr lang="en-US" sz="1600" b="0" u="none" strike="noStrike" dirty="0">
-                <a:solidFill>
-                  <a:srgbClr val="000000"/>
-                </a:solidFill>
-                <a:uFillTx/>
-                <a:latin typeface="Consolas"/>
-              </a:rPr>
-              <a:t>)</a:t>
-            </a:r>
-            <a:endParaRPr lang="en-US" sz="1600" b="0" u="none" strike="noStrike" dirty="0">
-              <a:solidFill>
-                <a:srgbClr val="000000"/>
-              </a:solidFill>
-              <a:uFillTx/>
-              <a:latin typeface="Arial"/>
-            </a:endParaRPr>
-          </a:p>
-          <a:p>
-            <a:pPr defTabSz="914400">
-              <a:lnSpc>
-                <a:spcPts val="1426"/>
-              </a:lnSpc>
-            </a:pPr>
-            <a:r>
-              <a:rPr lang="en-US" sz="1600" b="0" u="none" strike="noStrike" dirty="0">
-                <a:solidFill>
-                  <a:srgbClr val="000000"/>
-                </a:solidFill>
-                <a:uFillTx/>
-                <a:latin typeface="Consolas"/>
-              </a:rPr>
-              <a:t>print(</a:t>
-            </a:r>
-            <a:r>
-              <a:rPr lang="en-US" sz="1600" b="0" u="none" strike="noStrike" dirty="0" err="1">
-                <a:solidFill>
-                  <a:srgbClr val="000000"/>
-                </a:solidFill>
-                <a:uFillTx/>
-                <a:latin typeface="Consolas"/>
-              </a:rPr>
-              <a:t>X_tfidf.toarray</a:t>
-            </a:r>
-            <a:r>
-              <a:rPr lang="en-US" sz="1600" b="0" u="none" strike="noStrike" dirty="0">
-                <a:solidFill>
-                  <a:srgbClr val="000000"/>
-                </a:solidFill>
-                <a:uFillTx/>
-                <a:latin typeface="Consolas"/>
-              </a:rPr>
-              <a:t>())</a:t>
-            </a:r>
-            <a:endParaRPr lang="en-US" sz="1600" b="0" u="none" strike="noStrike" dirty="0">
-              <a:solidFill>
-                <a:srgbClr val="000000"/>
-              </a:solidFill>
-              <a:uFillTx/>
-              <a:latin typeface="Arial"/>
+              <a:effectLst/>
+              <a:latin typeface="Consolas" panose="020B0609020204030204" pitchFamily="49" charset="0"/>
             </a:endParaRPr>
           </a:p>
         </p:txBody>
@@ -18923,10 +20267,16 @@
         <p:nvGraphicFramePr>
           <p:cNvPr id="154" name="Table 6"/>
           <p:cNvGraphicFramePr/>
-          <p:nvPr/>
+          <p:nvPr>
+            <p:extLst>
+              <p:ext uri="{D42A27DB-BD31-4B8C-83A1-F6EECF244321}">
+                <p14:modId xmlns:p14="http://schemas.microsoft.com/office/powerpoint/2010/main" val="4255696938"/>
+              </p:ext>
+            </p:extLst>
+          </p:nvPr>
         </p:nvGraphicFramePr>
         <p:xfrm>
-          <a:off x="838080" y="4744440"/>
+          <a:off x="838080" y="5542440"/>
           <a:ext cx="11021400" cy="1036320"/>
         </p:xfrm>
         <a:graphic>
@@ -20283,18 +21633,18 @@
                         </a:lnSpc>
                       </a:pPr>
                       <a:r>
-                        <a:rPr lang="en-US" sz="1100" b="0" u="none" strike="noStrike">
+                        <a:rPr lang="en-US" sz="1100" b="1" u="none" strike="noStrike" dirty="0">
                           <a:solidFill>
-                            <a:srgbClr val="000000"/>
+                            <a:srgbClr val="FF0000"/>
                           </a:solidFill>
                           <a:uFillTx/>
                           <a:latin typeface="Calibri"/>
                         </a:rPr>
                         <a:t>0.5174</a:t>
                       </a:r>
-                      <a:endParaRPr lang="en-US" sz="1100" b="0" u="none" strike="noStrike">
+                      <a:endParaRPr lang="en-US" sz="1100" b="1" u="none" strike="noStrike" dirty="0">
                         <a:solidFill>
-                          <a:srgbClr val="000000"/>
+                          <a:srgbClr val="FF0000"/>
                         </a:solidFill>
                         <a:uFillTx/>
                         <a:latin typeface="Arial"/>
@@ -20454,18 +21804,18 @@
                         </a:lnSpc>
                       </a:pPr>
                       <a:r>
-                        <a:rPr lang="en-US" sz="1100" b="0" u="none" strike="noStrike">
+                        <a:rPr lang="en-US" sz="1100" b="1" u="none" strike="noStrike" dirty="0">
                           <a:solidFill>
-                            <a:srgbClr val="000000"/>
+                            <a:srgbClr val="FF0000"/>
                           </a:solidFill>
                           <a:uFillTx/>
                           <a:latin typeface="Calibri"/>
                         </a:rPr>
                         <a:t>0.5174</a:t>
                       </a:r>
-                      <a:endParaRPr lang="en-US" sz="1100" b="0" u="none" strike="noStrike">
+                      <a:endParaRPr lang="en-US" sz="1100" b="1" u="none" strike="noStrike" dirty="0">
                         <a:solidFill>
-                          <a:srgbClr val="000000"/>
+                          <a:srgbClr val="FF0000"/>
                         </a:solidFill>
                         <a:uFillTx/>
                         <a:latin typeface="Arial"/>
@@ -20636,18 +21986,18 @@
                         </a:lnSpc>
                       </a:pPr>
                       <a:r>
-                        <a:rPr lang="en-US" sz="1100" b="0" u="none" strike="noStrike">
+                        <a:rPr lang="en-US" sz="1100" b="1" u="none" strike="noStrike" dirty="0">
                           <a:solidFill>
-                            <a:srgbClr val="000000"/>
+                            <a:srgbClr val="FF0000"/>
                           </a:solidFill>
                           <a:uFillTx/>
                           <a:latin typeface="Calibri"/>
                         </a:rPr>
                         <a:t>0.4905</a:t>
                       </a:r>
-                      <a:endParaRPr lang="en-US" sz="1100" b="0" u="none" strike="noStrike">
+                      <a:endParaRPr lang="en-US" sz="1100" b="1" u="none" strike="noStrike" dirty="0">
                         <a:solidFill>
-                          <a:srgbClr val="000000"/>
+                          <a:srgbClr val="FF0000"/>
                         </a:solidFill>
                         <a:uFillTx/>
                         <a:latin typeface="Arial"/>
@@ -20693,18 +22043,18 @@
                         </a:lnSpc>
                       </a:pPr>
                       <a:r>
-                        <a:rPr lang="en-US" sz="1100" b="0" u="none" strike="noStrike">
+                        <a:rPr lang="en-US" sz="1100" b="1" u="none" strike="noStrike" dirty="0">
                           <a:solidFill>
-                            <a:srgbClr val="000000"/>
+                            <a:srgbClr val="FF0000"/>
                           </a:solidFill>
                           <a:uFillTx/>
                           <a:latin typeface="Calibri"/>
                         </a:rPr>
                         <a:t>0.4905</a:t>
                       </a:r>
-                      <a:endParaRPr lang="en-US" sz="1100" b="0" u="none" strike="noStrike">
+                      <a:endParaRPr lang="en-US" sz="1100" b="1" u="none" strike="noStrike" dirty="0">
                         <a:solidFill>
-                          <a:srgbClr val="000000"/>
+                          <a:srgbClr val="FF0000"/>
                         </a:solidFill>
                         <a:uFillTx/>
                         <a:latin typeface="Arial"/>
@@ -20750,18 +22100,18 @@
                         </a:lnSpc>
                       </a:pPr>
                       <a:r>
-                        <a:rPr lang="en-US" sz="1100" b="0" u="none" strike="noStrike">
+                        <a:rPr lang="en-US" sz="1100" b="1" u="none" strike="noStrike" dirty="0">
                           <a:solidFill>
-                            <a:srgbClr val="000000"/>
+                            <a:srgbClr val="FF0000"/>
                           </a:solidFill>
                           <a:uFillTx/>
                           <a:latin typeface="Calibri"/>
                         </a:rPr>
                         <a:t>0.4905</a:t>
                       </a:r>
-                      <a:endParaRPr lang="en-US" sz="1100" b="0" u="none" strike="noStrike">
+                      <a:endParaRPr lang="en-US" sz="1100" b="1" u="none" strike="noStrike" dirty="0">
                         <a:solidFill>
-                          <a:srgbClr val="000000"/>
+                          <a:srgbClr val="FF0000"/>
                         </a:solidFill>
                         <a:uFillTx/>
                         <a:latin typeface="Arial"/>
@@ -21616,18 +22966,18 @@
                         </a:lnSpc>
                       </a:pPr>
                       <a:r>
-                        <a:rPr lang="en-US" sz="1100" b="0" u="none" strike="noStrike">
+                        <a:rPr lang="en-US" sz="1100" b="1" u="none" strike="noStrike" dirty="0">
                           <a:solidFill>
-                            <a:srgbClr val="000000"/>
+                            <a:srgbClr val="FF0000"/>
                           </a:solidFill>
                           <a:uFillTx/>
                           <a:latin typeface="Calibri"/>
                         </a:rPr>
                         <a:t>0.4595</a:t>
                       </a:r>
-                      <a:endParaRPr lang="en-US" sz="1100" b="0" u="none" strike="noStrike">
+                      <a:endParaRPr lang="en-US" sz="1100" b="1" u="none" strike="noStrike" dirty="0">
                         <a:solidFill>
-                          <a:srgbClr val="000000"/>
+                          <a:srgbClr val="FF0000"/>
                         </a:solidFill>
                         <a:uFillTx/>
                         <a:latin typeface="Arial"/>
@@ -21844,18 +23194,18 @@
                         </a:lnSpc>
                       </a:pPr>
                       <a:r>
-                        <a:rPr lang="en-US" sz="1100" b="0" u="none" strike="noStrike">
+                        <a:rPr lang="en-US" sz="1100" b="1" u="none" strike="noStrike" dirty="0">
                           <a:solidFill>
-                            <a:srgbClr val="000000"/>
+                            <a:srgbClr val="FF0000"/>
                           </a:solidFill>
                           <a:uFillTx/>
                           <a:latin typeface="Calibri"/>
                         </a:rPr>
                         <a:t>0.4595</a:t>
                       </a:r>
-                      <a:endParaRPr lang="en-US" sz="1100" b="0" u="none" strike="noStrike">
+                      <a:endParaRPr lang="en-US" sz="1100" b="1" u="none" strike="noStrike" dirty="0">
                         <a:solidFill>
-                          <a:srgbClr val="000000"/>
+                          <a:srgbClr val="FF0000"/>
                         </a:solidFill>
                         <a:uFillTx/>
                         <a:latin typeface="Arial"/>
@@ -22015,18 +23365,18 @@
                         </a:lnSpc>
                       </a:pPr>
                       <a:r>
-                        <a:rPr lang="en-US" sz="1100" b="0" u="none" strike="noStrike">
+                        <a:rPr lang="en-US" sz="1100" b="1" u="none" strike="noStrike" dirty="0">
                           <a:solidFill>
-                            <a:srgbClr val="000000"/>
+                            <a:srgbClr val="FF0000"/>
                           </a:solidFill>
                           <a:uFillTx/>
                           <a:latin typeface="Calibri"/>
                         </a:rPr>
                         <a:t>0.4595</a:t>
                       </a:r>
-                      <a:endParaRPr lang="en-US" sz="1100" b="0" u="none" strike="noStrike">
+                      <a:endParaRPr lang="en-US" sz="1100" b="1" u="none" strike="noStrike" dirty="0">
                         <a:solidFill>
-                          <a:srgbClr val="000000"/>
+                          <a:srgbClr val="FF0000"/>
                         </a:solidFill>
                         <a:uFillTx/>
                         <a:latin typeface="Arial"/>
@@ -22079,7 +23429,7 @@
 </p:sld>
 </file>
 
-<file path=ppt/slides/slide26.xml><?xml version="1.0" encoding="utf-8"?>
+<file path=ppt/slides/slide25.xml><?xml version="1.0" encoding="utf-8"?>
 <p:sld xmlns:a="http://schemas.openxmlformats.org/drawingml/2006/main" xmlns:r="http://schemas.openxmlformats.org/officeDocument/2006/relationships" xmlns:p="http://schemas.openxmlformats.org/presentationml/2006/main">
   <p:cSld>
     <p:spTree>
@@ -22526,7 +23876,7 @@
 </p:sld>
 </file>
 
-<file path=ppt/slides/slide27.xml><?xml version="1.0" encoding="utf-8"?>
+<file path=ppt/slides/slide26.xml><?xml version="1.0" encoding="utf-8"?>
 <p:sld xmlns:a="http://schemas.openxmlformats.org/drawingml/2006/main" xmlns:r="http://schemas.openxmlformats.org/officeDocument/2006/relationships" xmlns:p="http://schemas.openxmlformats.org/presentationml/2006/main">
   <p:cSld>
     <p:spTree>
@@ -22767,7 +24117,7 @@
 </p:sld>
 </file>
 
-<file path=ppt/slides/slide28.xml><?xml version="1.0" encoding="utf-8"?>
+<file path=ppt/slides/slide27.xml><?xml version="1.0" encoding="utf-8"?>
 <p:sld xmlns:a="http://schemas.openxmlformats.org/drawingml/2006/main" xmlns:r="http://schemas.openxmlformats.org/officeDocument/2006/relationships" xmlns:p="http://schemas.openxmlformats.org/presentationml/2006/main">
   <p:cSld>
     <p:spTree>
@@ -22908,7 +24258,7 @@
 </p:sld>
 </file>
 
-<file path=ppt/slides/slide29.xml><?xml version="1.0" encoding="utf-8"?>
+<file path=ppt/slides/slide28.xml><?xml version="1.0" encoding="utf-8"?>
 <p:sld xmlns:a="http://schemas.openxmlformats.org/drawingml/2006/main" xmlns:r="http://schemas.openxmlformats.org/officeDocument/2006/relationships" xmlns:p="http://schemas.openxmlformats.org/presentationml/2006/main">
   <p:cSld>
     <p:spTree>
@@ -23234,6 +24584,136 @@
           </a:extLst>
         </p:spPr>
       </p:pic>
+    </p:spTree>
+  </p:cSld>
+  <p:clrMapOvr>
+    <a:masterClrMapping/>
+  </p:clrMapOvr>
+</p:sld>
+</file>
+
+<file path=ppt/slides/slide29.xml><?xml version="1.0" encoding="utf-8"?>
+<p:sld xmlns:a="http://schemas.openxmlformats.org/drawingml/2006/main" xmlns:r="http://schemas.openxmlformats.org/officeDocument/2006/relationships" xmlns:p="http://schemas.openxmlformats.org/presentationml/2006/main">
+  <p:cSld>
+    <p:spTree>
+      <p:nvGrpSpPr>
+        <p:cNvPr id="1" name=""/>
+        <p:cNvGrpSpPr/>
+        <p:nvPr/>
+      </p:nvGrpSpPr>
+      <p:grpSpPr>
+        <a:xfrm>
+          <a:off x="0" y="0"/>
+          <a:ext cx="0" cy="0"/>
+          <a:chOff x="0" y="0"/>
+          <a:chExt cx="0" cy="0"/>
+        </a:xfrm>
+      </p:grpSpPr>
+      <p:sp>
+        <p:nvSpPr>
+          <p:cNvPr id="169" name="PlaceHolder 1"/>
+          <p:cNvSpPr>
+            <a:spLocks noGrp="1"/>
+          </p:cNvSpPr>
+          <p:nvPr>
+            <p:ph type="title"/>
+          </p:nvPr>
+        </p:nvSpPr>
+        <p:spPr>
+          <a:xfrm>
+            <a:off x="831960" y="3429000"/>
+            <a:ext cx="10515240" cy="1410120"/>
+          </a:xfrm>
+          <a:prstGeom prst="rect">
+            <a:avLst/>
+          </a:prstGeom>
+          <a:noFill/>
+          <a:ln w="0">
+            <a:noFill/>
+          </a:ln>
+        </p:spPr>
+        <p:txBody>
+          <a:bodyPr lIns="91440" tIns="45720" rIns="91440" bIns="45720" anchor="b">
+            <a:noAutofit/>
+          </a:bodyPr>
+          <a:lstStyle/>
+          <a:p>
+            <a:pPr indent="0" defTabSz="914400">
+              <a:lnSpc>
+                <a:spcPct val="90000"/>
+              </a:lnSpc>
+              <a:buNone/>
+            </a:pPr>
+            <a:r>
+              <a:rPr lang="en-US" sz="6000" b="0" u="none" strike="noStrike">
+                <a:solidFill>
+                  <a:schemeClr val="dk1"/>
+                </a:solidFill>
+                <a:uFillTx/>
+                <a:latin typeface="Calibri Light"/>
+              </a:rPr>
+              <a:t>Language Models</a:t>
+            </a:r>
+            <a:endParaRPr lang="en-US" sz="6000" b="0" u="none" strike="noStrike">
+              <a:solidFill>
+                <a:schemeClr val="dk1"/>
+              </a:solidFill>
+              <a:uFillTx/>
+              <a:latin typeface="Calibri"/>
+            </a:endParaRPr>
+          </a:p>
+        </p:txBody>
+      </p:sp>
+      <p:sp>
+        <p:nvSpPr>
+          <p:cNvPr id="170" name="PlaceHolder 2"/>
+          <p:cNvSpPr>
+            <a:spLocks noGrp="1"/>
+          </p:cNvSpPr>
+          <p:nvPr>
+            <p:ph/>
+          </p:nvPr>
+        </p:nvSpPr>
+        <p:spPr>
+          <a:xfrm>
+            <a:off x="831960" y="4956120"/>
+            <a:ext cx="10515240" cy="1133280"/>
+          </a:xfrm>
+          <a:prstGeom prst="rect">
+            <a:avLst/>
+          </a:prstGeom>
+          <a:noFill/>
+          <a:ln w="0">
+            <a:noFill/>
+          </a:ln>
+        </p:spPr>
+        <p:txBody>
+          <a:bodyPr lIns="91440" tIns="45720" rIns="91440" bIns="45720" anchor="t">
+            <a:noAutofit/>
+          </a:bodyPr>
+          <a:lstStyle/>
+          <a:p>
+            <a:pPr indent="0">
+              <a:lnSpc>
+                <a:spcPct val="90000"/>
+              </a:lnSpc>
+              <a:spcBef>
+                <a:spcPts val="1417"/>
+              </a:spcBef>
+              <a:buNone/>
+            </a:pPr>
+            <a:endParaRPr lang="en-US" sz="2400" b="0" u="none" strike="noStrike">
+              <a:solidFill>
+                <a:schemeClr val="dk1">
+                  <a:tint val="75000"/>
+                </a:schemeClr>
+              </a:solidFill>
+              <a:uFillTx/>
+              <a:latin typeface="Calibri"/>
+            </a:endParaRPr>
+          </a:p>
+        </p:txBody>
+      </p:sp>
     </p:spTree>
   </p:cSld>
   <p:clrMapOvr>
@@ -24041,136 +25521,6 @@
       </p:grpSpPr>
       <p:sp>
         <p:nvSpPr>
-          <p:cNvPr id="169" name="PlaceHolder 1"/>
-          <p:cNvSpPr>
-            <a:spLocks noGrp="1"/>
-          </p:cNvSpPr>
-          <p:nvPr>
-            <p:ph type="title"/>
-          </p:nvPr>
-        </p:nvSpPr>
-        <p:spPr>
-          <a:xfrm>
-            <a:off x="831960" y="3429000"/>
-            <a:ext cx="10515240" cy="1410120"/>
-          </a:xfrm>
-          <a:prstGeom prst="rect">
-            <a:avLst/>
-          </a:prstGeom>
-          <a:noFill/>
-          <a:ln w="0">
-            <a:noFill/>
-          </a:ln>
-        </p:spPr>
-        <p:txBody>
-          <a:bodyPr lIns="91440" tIns="45720" rIns="91440" bIns="45720" anchor="b">
-            <a:noAutofit/>
-          </a:bodyPr>
-          <a:lstStyle/>
-          <a:p>
-            <a:pPr indent="0" defTabSz="914400">
-              <a:lnSpc>
-                <a:spcPct val="90000"/>
-              </a:lnSpc>
-              <a:buNone/>
-            </a:pPr>
-            <a:r>
-              <a:rPr lang="en-US" sz="6000" b="0" u="none" strike="noStrike">
-                <a:solidFill>
-                  <a:schemeClr val="dk1"/>
-                </a:solidFill>
-                <a:uFillTx/>
-                <a:latin typeface="Calibri Light"/>
-              </a:rPr>
-              <a:t>Language Models</a:t>
-            </a:r>
-            <a:endParaRPr lang="en-US" sz="6000" b="0" u="none" strike="noStrike">
-              <a:solidFill>
-                <a:schemeClr val="dk1"/>
-              </a:solidFill>
-              <a:uFillTx/>
-              <a:latin typeface="Calibri"/>
-            </a:endParaRPr>
-          </a:p>
-        </p:txBody>
-      </p:sp>
-      <p:sp>
-        <p:nvSpPr>
-          <p:cNvPr id="170" name="PlaceHolder 2"/>
-          <p:cNvSpPr>
-            <a:spLocks noGrp="1"/>
-          </p:cNvSpPr>
-          <p:nvPr>
-            <p:ph/>
-          </p:nvPr>
-        </p:nvSpPr>
-        <p:spPr>
-          <a:xfrm>
-            <a:off x="831960" y="4956120"/>
-            <a:ext cx="10515240" cy="1133280"/>
-          </a:xfrm>
-          <a:prstGeom prst="rect">
-            <a:avLst/>
-          </a:prstGeom>
-          <a:noFill/>
-          <a:ln w="0">
-            <a:noFill/>
-          </a:ln>
-        </p:spPr>
-        <p:txBody>
-          <a:bodyPr lIns="91440" tIns="45720" rIns="91440" bIns="45720" anchor="t">
-            <a:noAutofit/>
-          </a:bodyPr>
-          <a:lstStyle/>
-          <a:p>
-            <a:pPr indent="0">
-              <a:lnSpc>
-                <a:spcPct val="90000"/>
-              </a:lnSpc>
-              <a:spcBef>
-                <a:spcPts val="1417"/>
-              </a:spcBef>
-              <a:buNone/>
-            </a:pPr>
-            <a:endParaRPr lang="en-US" sz="2400" b="0" u="none" strike="noStrike">
-              <a:solidFill>
-                <a:schemeClr val="dk1">
-                  <a:tint val="75000"/>
-                </a:schemeClr>
-              </a:solidFill>
-              <a:uFillTx/>
-              <a:latin typeface="Calibri"/>
-            </a:endParaRPr>
-          </a:p>
-        </p:txBody>
-      </p:sp>
-    </p:spTree>
-  </p:cSld>
-  <p:clrMapOvr>
-    <a:masterClrMapping/>
-  </p:clrMapOvr>
-</p:sld>
-</file>
-
-<file path=ppt/slides/slide31.xml><?xml version="1.0" encoding="utf-8"?>
-<p:sld xmlns:a="http://schemas.openxmlformats.org/drawingml/2006/main" xmlns:r="http://schemas.openxmlformats.org/officeDocument/2006/relationships" xmlns:p="http://schemas.openxmlformats.org/presentationml/2006/main">
-  <p:cSld>
-    <p:spTree>
-      <p:nvGrpSpPr>
-        <p:cNvPr id="1" name=""/>
-        <p:cNvGrpSpPr/>
-        <p:nvPr/>
-      </p:nvGrpSpPr>
-      <p:grpSpPr>
-        <a:xfrm>
-          <a:off x="0" y="0"/>
-          <a:ext cx="0" cy="0"/>
-          <a:chOff x="0" y="0"/>
-          <a:chExt cx="0" cy="0"/>
-        </a:xfrm>
-      </p:grpSpPr>
-      <p:sp>
-        <p:nvSpPr>
           <p:cNvPr id="171" name="PlaceHolder 1"/>
           <p:cNvSpPr>
             <a:spLocks noGrp="1"/>
@@ -24830,7 +26180,7 @@
 </p:sld>
 </file>
 
-<file path=ppt/slides/slide32.xml><?xml version="1.0" encoding="utf-8"?>
+<file path=ppt/slides/slide31.xml><?xml version="1.0" encoding="utf-8"?>
 <p:sld xmlns:a="http://schemas.openxmlformats.org/drawingml/2006/main" xmlns:r="http://schemas.openxmlformats.org/officeDocument/2006/relationships" xmlns:p="http://schemas.openxmlformats.org/presentationml/2006/main">
   <p:cSld>
     <p:spTree>
@@ -25102,7 +26452,7 @@
 </p:sld>
 </file>
 
-<file path=ppt/slides/slide33.xml><?xml version="1.0" encoding="utf-8"?>
+<file path=ppt/slides/slide32.xml><?xml version="1.0" encoding="utf-8"?>
 <p:sld xmlns:a="http://schemas.openxmlformats.org/drawingml/2006/main" xmlns:r="http://schemas.openxmlformats.org/officeDocument/2006/relationships" xmlns:p="http://schemas.openxmlformats.org/presentationml/2006/main">
   <p:cSld>
     <p:spTree>
@@ -25341,7 +26691,7 @@
 </p:sld>
 </file>
 
-<file path=ppt/slides/slide34.xml><?xml version="1.0" encoding="utf-8"?>
+<file path=ppt/slides/slide33.xml><?xml version="1.0" encoding="utf-8"?>
 <p:sld xmlns:a="http://schemas.openxmlformats.org/drawingml/2006/main" xmlns:r="http://schemas.openxmlformats.org/officeDocument/2006/relationships" xmlns:p="http://schemas.openxmlformats.org/presentationml/2006/main">
   <p:cSld>
     <p:spTree>
@@ -25596,7 +26946,7 @@
 </p:sld>
 </file>
 
-<file path=ppt/slides/slide35.xml><?xml version="1.0" encoding="utf-8"?>
+<file path=ppt/slides/slide34.xml><?xml version="1.0" encoding="utf-8"?>
 <p:sld xmlns:a="http://schemas.openxmlformats.org/drawingml/2006/main" xmlns:r="http://schemas.openxmlformats.org/officeDocument/2006/relationships" xmlns:p="http://schemas.openxmlformats.org/presentationml/2006/main">
   <p:cSld>
     <p:spTree>

--- a/20242-NLP-LLM/lecture notes/Part 1 - Introduction to NLP/1.1-introduction to NLP.pptx
+++ b/20242-NLP-LLM/lecture notes/Part 1 - Introduction to NLP/1.1-introduction to NLP.pptx
@@ -157,7 +157,7 @@
 <file path=ppt/revisionInfo.xml><?xml version="1.0" encoding="utf-8"?>
 <p1510:revInfo xmlns:a="http://schemas.openxmlformats.org/drawingml/2006/main" xmlns:r="http://schemas.openxmlformats.org/officeDocument/2006/relationships" xmlns:p1510="http://schemas.microsoft.com/office/powerpoint/2015/10/main">
   <p1510:revLst>
-    <p1510:client id="{CD467BAA-958C-43DD-AE6C-14EC1A9C72D6}" v="184" dt="2025-03-27T06:19:07.519"/>
+    <p1510:client id="{1430C6B2-0695-4939-9A81-7D403BE3894B}" v="4" dt="2025-04-03T03:24:44.757"/>
   </p1510:revLst>
 </p1510:revInfo>
 </file>
@@ -611,102 +611,6 @@
             <ac:spMk id="143" creationId="{00000000-0000-0000-0000-000000000000}"/>
           </ac:spMkLst>
         </pc:spChg>
-        <pc:spChg chg="del mod">
-          <ac:chgData name="Mohammed Fasha" userId="cc64f42d-a1a6-4f08-b97b-0c37f877119f" providerId="ADAL" clId="{CD467BAA-958C-43DD-AE6C-14EC1A9C72D6}" dt="2025-03-27T05:19:15.475" v="2597" actId="478"/>
-          <ac:spMkLst>
-            <pc:docMk/>
-            <pc:sldMk cId="0" sldId="274"/>
-            <ac:spMk id="144" creationId="{00000000-0000-0000-0000-000000000000}"/>
-          </ac:spMkLst>
-        </pc:spChg>
-        <pc:graphicFrameChg chg="add mod">
-          <ac:chgData name="Mohammed Fasha" userId="cc64f42d-a1a6-4f08-b97b-0c37f877119f" providerId="ADAL" clId="{CD467BAA-958C-43DD-AE6C-14EC1A9C72D6}" dt="2025-03-27T05:19:03.076" v="2596"/>
-          <ac:graphicFrameMkLst>
-            <pc:docMk/>
-            <pc:sldMk cId="0" sldId="274"/>
-            <ac:graphicFrameMk id="3" creationId="{943F8939-7019-FDC9-F76E-9D1D5E805B2D}"/>
-          </ac:graphicFrameMkLst>
-        </pc:graphicFrameChg>
-        <pc:graphicFrameChg chg="add mod">
-          <ac:chgData name="Mohammed Fasha" userId="cc64f42d-a1a6-4f08-b97b-0c37f877119f" providerId="ADAL" clId="{CD467BAA-958C-43DD-AE6C-14EC1A9C72D6}" dt="2025-03-27T05:19:03.076" v="2596"/>
-          <ac:graphicFrameMkLst>
-            <pc:docMk/>
-            <pc:sldMk cId="0" sldId="274"/>
-            <ac:graphicFrameMk id="4" creationId="{BE1417B1-B8A0-7DE0-ED24-CA72E0927F59}"/>
-          </ac:graphicFrameMkLst>
-        </pc:graphicFrameChg>
-        <pc:graphicFrameChg chg="add mod">
-          <ac:chgData name="Mohammed Fasha" userId="cc64f42d-a1a6-4f08-b97b-0c37f877119f" providerId="ADAL" clId="{CD467BAA-958C-43DD-AE6C-14EC1A9C72D6}" dt="2025-03-27T05:19:03.076" v="2596"/>
-          <ac:graphicFrameMkLst>
-            <pc:docMk/>
-            <pc:sldMk cId="0" sldId="274"/>
-            <ac:graphicFrameMk id="5" creationId="{F88CA1D9-6F8E-37E0-42F1-94A4243B1FDA}"/>
-          </ac:graphicFrameMkLst>
-        </pc:graphicFrameChg>
-        <pc:graphicFrameChg chg="add mod">
-          <ac:chgData name="Mohammed Fasha" userId="cc64f42d-a1a6-4f08-b97b-0c37f877119f" providerId="ADAL" clId="{CD467BAA-958C-43DD-AE6C-14EC1A9C72D6}" dt="2025-03-27T05:19:03.076" v="2596"/>
-          <ac:graphicFrameMkLst>
-            <pc:docMk/>
-            <pc:sldMk cId="0" sldId="274"/>
-            <ac:graphicFrameMk id="6" creationId="{8AF51F17-DADB-5748-4869-C80702E6706E}"/>
-          </ac:graphicFrameMkLst>
-        </pc:graphicFrameChg>
-        <pc:graphicFrameChg chg="add mod">
-          <ac:chgData name="Mohammed Fasha" userId="cc64f42d-a1a6-4f08-b97b-0c37f877119f" providerId="ADAL" clId="{CD467BAA-958C-43DD-AE6C-14EC1A9C72D6}" dt="2025-03-27T05:19:03.076" v="2596"/>
-          <ac:graphicFrameMkLst>
-            <pc:docMk/>
-            <pc:sldMk cId="0" sldId="274"/>
-            <ac:graphicFrameMk id="8" creationId="{09663822-EF0F-D18E-EA82-FDC8A1048DF2}"/>
-          </ac:graphicFrameMkLst>
-        </pc:graphicFrameChg>
-        <pc:graphicFrameChg chg="add mod">
-          <ac:chgData name="Mohammed Fasha" userId="cc64f42d-a1a6-4f08-b97b-0c37f877119f" providerId="ADAL" clId="{CD467BAA-958C-43DD-AE6C-14EC1A9C72D6}" dt="2025-03-27T05:19:03.076" v="2596"/>
-          <ac:graphicFrameMkLst>
-            <pc:docMk/>
-            <pc:sldMk cId="0" sldId="274"/>
-            <ac:graphicFrameMk id="9" creationId="{892984AE-2F94-77EA-F1E6-8C8E273D34E9}"/>
-          </ac:graphicFrameMkLst>
-        </pc:graphicFrameChg>
-        <pc:graphicFrameChg chg="add mod">
-          <ac:chgData name="Mohammed Fasha" userId="cc64f42d-a1a6-4f08-b97b-0c37f877119f" providerId="ADAL" clId="{CD467BAA-958C-43DD-AE6C-14EC1A9C72D6}" dt="2025-03-27T05:19:03.076" v="2596"/>
-          <ac:graphicFrameMkLst>
-            <pc:docMk/>
-            <pc:sldMk cId="0" sldId="274"/>
-            <ac:graphicFrameMk id="10" creationId="{9CC5E6A6-7767-6D93-0EA6-BA0A5BAB85D2}"/>
-          </ac:graphicFrameMkLst>
-        </pc:graphicFrameChg>
-        <pc:graphicFrameChg chg="add mod">
-          <ac:chgData name="Mohammed Fasha" userId="cc64f42d-a1a6-4f08-b97b-0c37f877119f" providerId="ADAL" clId="{CD467BAA-958C-43DD-AE6C-14EC1A9C72D6}" dt="2025-03-27T05:19:03.076" v="2596"/>
-          <ac:graphicFrameMkLst>
-            <pc:docMk/>
-            <pc:sldMk cId="0" sldId="274"/>
-            <ac:graphicFrameMk id="11" creationId="{448BB0A9-6D15-67E5-6B37-EA881BBEB9C3}"/>
-          </ac:graphicFrameMkLst>
-        </pc:graphicFrameChg>
-        <pc:graphicFrameChg chg="add mod">
-          <ac:chgData name="Mohammed Fasha" userId="cc64f42d-a1a6-4f08-b97b-0c37f877119f" providerId="ADAL" clId="{CD467BAA-958C-43DD-AE6C-14EC1A9C72D6}" dt="2025-03-27T05:19:03.076" v="2596"/>
-          <ac:graphicFrameMkLst>
-            <pc:docMk/>
-            <pc:sldMk cId="0" sldId="274"/>
-            <ac:graphicFrameMk id="12" creationId="{23A603C1-B7D4-B9AA-799E-577583F2E8FB}"/>
-          </ac:graphicFrameMkLst>
-        </pc:graphicFrameChg>
-        <pc:graphicFrameChg chg="add mod">
-          <ac:chgData name="Mohammed Fasha" userId="cc64f42d-a1a6-4f08-b97b-0c37f877119f" providerId="ADAL" clId="{CD467BAA-958C-43DD-AE6C-14EC1A9C72D6}" dt="2025-03-27T05:19:03.076" v="2596"/>
-          <ac:graphicFrameMkLst>
-            <pc:docMk/>
-            <pc:sldMk cId="0" sldId="274"/>
-            <ac:graphicFrameMk id="13" creationId="{B1839904-368A-BD0C-3DE6-8690B7B71E9C}"/>
-          </ac:graphicFrameMkLst>
-        </pc:graphicFrameChg>
-        <pc:graphicFrameChg chg="add del mod modGraphic">
-          <ac:chgData name="Mohammed Fasha" userId="cc64f42d-a1a6-4f08-b97b-0c37f877119f" providerId="ADAL" clId="{CD467BAA-958C-43DD-AE6C-14EC1A9C72D6}" dt="2025-03-27T05:21:53.225" v="2621" actId="478"/>
-          <ac:graphicFrameMkLst>
-            <pc:docMk/>
-            <pc:sldMk cId="0" sldId="274"/>
-            <ac:graphicFrameMk id="15" creationId="{EEA346B6-3EFC-18F8-90EA-B9CFD338305E}"/>
-          </ac:graphicFrameMkLst>
-        </pc:graphicFrameChg>
         <pc:graphicFrameChg chg="add mod modGraphic">
           <ac:chgData name="Mohammed Fasha" userId="cc64f42d-a1a6-4f08-b97b-0c37f877119f" providerId="ADAL" clId="{CD467BAA-958C-43DD-AE6C-14EC1A9C72D6}" dt="2025-03-27T05:21:58.114" v="2622" actId="1076"/>
           <ac:graphicFrameMkLst>
@@ -737,38 +641,6 @@
           <pc:docMk/>
           <pc:sldMk cId="0" sldId="276"/>
         </pc:sldMkLst>
-        <pc:spChg chg="add">
-          <ac:chgData name="Mohammed Fasha" userId="cc64f42d-a1a6-4f08-b97b-0c37f877119f" providerId="ADAL" clId="{CD467BAA-958C-43DD-AE6C-14EC1A9C72D6}" dt="2025-03-27T05:48:32.837" v="2652"/>
-          <ac:spMkLst>
-            <pc:docMk/>
-            <pc:sldMk cId="0" sldId="276"/>
-            <ac:spMk id="2" creationId="{565313BA-B162-8FC5-B3AE-29FBDBE33BAC}"/>
-          </ac:spMkLst>
-        </pc:spChg>
-        <pc:spChg chg="add">
-          <ac:chgData name="Mohammed Fasha" userId="cc64f42d-a1a6-4f08-b97b-0c37f877119f" providerId="ADAL" clId="{CD467BAA-958C-43DD-AE6C-14EC1A9C72D6}" dt="2025-03-27T05:48:42.218" v="2653"/>
-          <ac:spMkLst>
-            <pc:docMk/>
-            <pc:sldMk cId="0" sldId="276"/>
-            <ac:spMk id="3" creationId="{3823C19C-0038-FCAB-871B-D33B6755F5F0}"/>
-          </ac:spMkLst>
-        </pc:spChg>
-        <pc:spChg chg="add">
-          <ac:chgData name="Mohammed Fasha" userId="cc64f42d-a1a6-4f08-b97b-0c37f877119f" providerId="ADAL" clId="{CD467BAA-958C-43DD-AE6C-14EC1A9C72D6}" dt="2025-03-27T05:48:53.581" v="2657"/>
-          <ac:spMkLst>
-            <pc:docMk/>
-            <pc:sldMk cId="0" sldId="276"/>
-            <ac:spMk id="4" creationId="{7A1FEEAD-C5E8-D5E0-679A-BAD1BCEB242B}"/>
-          </ac:spMkLst>
-        </pc:spChg>
-        <pc:spChg chg="add">
-          <ac:chgData name="Mohammed Fasha" userId="cc64f42d-a1a6-4f08-b97b-0c37f877119f" providerId="ADAL" clId="{CD467BAA-958C-43DD-AE6C-14EC1A9C72D6}" dt="2025-03-27T05:49:04.348" v="2658"/>
-          <ac:spMkLst>
-            <pc:docMk/>
-            <pc:sldMk cId="0" sldId="276"/>
-            <ac:spMk id="5" creationId="{4650BECD-576E-2A7C-4AAD-51FCBD3740CC}"/>
-          </ac:spMkLst>
-        </pc:spChg>
         <pc:spChg chg="add mod">
           <ac:chgData name="Mohammed Fasha" userId="cc64f42d-a1a6-4f08-b97b-0c37f877119f" providerId="ADAL" clId="{CD467BAA-958C-43DD-AE6C-14EC1A9C72D6}" dt="2025-03-27T06:13:34.717" v="3490" actId="14100"/>
           <ac:spMkLst>
@@ -793,36 +665,12 @@
             <ac:spMk id="13" creationId="{329226C2-42F0-F928-D90B-44EDC623A50D}"/>
           </ac:spMkLst>
         </pc:spChg>
-        <pc:spChg chg="add">
-          <ac:chgData name="Mohammed Fasha" userId="cc64f42d-a1a6-4f08-b97b-0c37f877119f" providerId="ADAL" clId="{CD467BAA-958C-43DD-AE6C-14EC1A9C72D6}" dt="2025-03-27T06:04:17.819" v="3096"/>
-          <ac:spMkLst>
-            <pc:docMk/>
-            <pc:sldMk cId="0" sldId="276"/>
-            <ac:spMk id="14" creationId="{743A9E0B-6637-9B47-4EA7-1B324570A4F7}"/>
-          </ac:spMkLst>
-        </pc:spChg>
-        <pc:spChg chg="add del mod">
-          <ac:chgData name="Mohammed Fasha" userId="cc64f42d-a1a6-4f08-b97b-0c37f877119f" providerId="ADAL" clId="{CD467BAA-958C-43DD-AE6C-14EC1A9C72D6}" dt="2025-03-27T06:05:21.233" v="3127" actId="478"/>
-          <ac:spMkLst>
-            <pc:docMk/>
-            <pc:sldMk cId="0" sldId="276"/>
-            <ac:spMk id="15" creationId="{2B4F5602-A614-CBA7-5F65-AA87AA04C1D7}"/>
-          </ac:spMkLst>
-        </pc:spChg>
         <pc:spChg chg="add mod">
           <ac:chgData name="Mohammed Fasha" userId="cc64f42d-a1a6-4f08-b97b-0c37f877119f" providerId="ADAL" clId="{CD467BAA-958C-43DD-AE6C-14EC1A9C72D6}" dt="2025-03-27T06:14:34.525" v="3518" actId="20577"/>
           <ac:spMkLst>
             <pc:docMk/>
             <pc:sldMk cId="0" sldId="276"/>
             <ac:spMk id="16" creationId="{20602073-7B6E-A022-6568-96518DFCE75D}"/>
-          </ac:spMkLst>
-        </pc:spChg>
-        <pc:spChg chg="add mod">
-          <ac:chgData name="Mohammed Fasha" userId="cc64f42d-a1a6-4f08-b97b-0c37f877119f" providerId="ADAL" clId="{CD467BAA-958C-43DD-AE6C-14EC1A9C72D6}" dt="2025-03-27T06:04:53.040" v="3105"/>
-          <ac:spMkLst>
-            <pc:docMk/>
-            <pc:sldMk cId="0" sldId="276"/>
-            <ac:spMk id="17" creationId="{B540BE22-8186-46A0-F1C9-0A0C3133F8DA}"/>
           </ac:spMkLst>
         </pc:spChg>
         <pc:spChg chg="add mod">
@@ -849,14 +697,6 @@
             <ac:spMk id="148" creationId="{00000000-0000-0000-0000-000000000000}"/>
           </ac:spMkLst>
         </pc:spChg>
-        <pc:spChg chg="del mod">
-          <ac:chgData name="Mohammed Fasha" userId="cc64f42d-a1a6-4f08-b97b-0c37f877119f" providerId="ADAL" clId="{CD467BAA-958C-43DD-AE6C-14EC1A9C72D6}" dt="2025-03-27T05:59:10.765" v="2965" actId="478"/>
-          <ac:spMkLst>
-            <pc:docMk/>
-            <pc:sldMk cId="0" sldId="276"/>
-            <ac:spMk id="149" creationId="{00000000-0000-0000-0000-000000000000}"/>
-          </ac:spMkLst>
-        </pc:spChg>
         <pc:spChg chg="mod">
           <ac:chgData name="Mohammed Fasha" userId="cc64f42d-a1a6-4f08-b97b-0c37f877119f" providerId="ADAL" clId="{CD467BAA-958C-43DD-AE6C-14EC1A9C72D6}" dt="2025-03-27T06:13:38.309" v="3491" actId="14100"/>
           <ac:spMkLst>
@@ -873,14 +713,6 @@
             <ac:graphicFrameMk id="6" creationId="{421512CA-3C45-56E1-C100-CE4E8F0E14B1}"/>
           </ac:graphicFrameMkLst>
         </pc:graphicFrameChg>
-        <pc:graphicFrameChg chg="add del mod modGraphic">
-          <ac:chgData name="Mohammed Fasha" userId="cc64f42d-a1a6-4f08-b97b-0c37f877119f" providerId="ADAL" clId="{CD467BAA-958C-43DD-AE6C-14EC1A9C72D6}" dt="2025-03-27T06:00:07.919" v="3001" actId="21"/>
-          <ac:graphicFrameMkLst>
-            <pc:docMk/>
-            <pc:sldMk cId="0" sldId="276"/>
-            <ac:graphicFrameMk id="7" creationId="{5A50D271-6099-8848-32B9-52F0C96B2575}"/>
-          </ac:graphicFrameMkLst>
-        </pc:graphicFrameChg>
         <pc:graphicFrameChg chg="add mod modGraphic">
           <ac:chgData name="Mohammed Fasha" userId="cc64f42d-a1a6-4f08-b97b-0c37f877119f" providerId="ADAL" clId="{CD467BAA-958C-43DD-AE6C-14EC1A9C72D6}" dt="2025-03-27T06:11:08.603" v="3345" actId="1076"/>
           <ac:graphicFrameMkLst>
@@ -895,14 +727,6 @@
             <pc:docMk/>
             <pc:sldMk cId="0" sldId="276"/>
             <ac:graphicFrameMk id="12" creationId="{8BD96D17-9F2B-B7C4-8E4F-0B510D15EB97}"/>
-          </ac:graphicFrameMkLst>
-        </pc:graphicFrameChg>
-        <pc:graphicFrameChg chg="del">
-          <ac:chgData name="Mohammed Fasha" userId="cc64f42d-a1a6-4f08-b97b-0c37f877119f" providerId="ADAL" clId="{CD467BAA-958C-43DD-AE6C-14EC1A9C72D6}" dt="2025-03-27T05:51:12.737" v="2665" actId="478"/>
-          <ac:graphicFrameMkLst>
-            <pc:docMk/>
-            <pc:sldMk cId="0" sldId="276"/>
-            <ac:graphicFrameMk id="150" creationId="{00000000-0000-0000-0000-000000000000}"/>
           </ac:graphicFrameMkLst>
         </pc:graphicFrameChg>
       </pc:sldChg>
@@ -2031,6 +1855,38 @@
           <pc:docMk/>
           <pc:sldMk cId="3043812923" sldId="718"/>
         </pc:sldMkLst>
+      </pc:sldChg>
+    </pc:docChg>
+  </pc:docChgLst>
+  <pc:docChgLst>
+    <pc:chgData name="Mohammed Fasha" userId="cc64f42d-a1a6-4f08-b97b-0c37f877119f" providerId="ADAL" clId="{1430C6B2-0695-4939-9A81-7D403BE3894B}"/>
+    <pc:docChg chg="modSld">
+      <pc:chgData name="Mohammed Fasha" userId="cc64f42d-a1a6-4f08-b97b-0c37f877119f" providerId="ADAL" clId="{1430C6B2-0695-4939-9A81-7D403BE3894B}" dt="2025-04-03T03:24:44.757" v="3"/>
+      <pc:docMkLst>
+        <pc:docMk/>
+      </pc:docMkLst>
+      <pc:sldChg chg="addSp modSp">
+        <pc:chgData name="Mohammed Fasha" userId="cc64f42d-a1a6-4f08-b97b-0c37f877119f" providerId="ADAL" clId="{1430C6B2-0695-4939-9A81-7D403BE3894B}" dt="2025-04-03T03:24:44.757" v="3"/>
+        <pc:sldMkLst>
+          <pc:docMk/>
+          <pc:sldMk cId="0" sldId="281"/>
+        </pc:sldMkLst>
+        <pc:spChg chg="add mod">
+          <ac:chgData name="Mohammed Fasha" userId="cc64f42d-a1a6-4f08-b97b-0c37f877119f" providerId="ADAL" clId="{1430C6B2-0695-4939-9A81-7D403BE3894B}" dt="2025-04-03T03:24:44.757" v="3"/>
+          <ac:spMkLst>
+            <pc:docMk/>
+            <pc:sldMk cId="0" sldId="281"/>
+            <ac:spMk id="2" creationId="{F3E208A7-9D3D-C8FD-62BA-246574698579}"/>
+          </ac:spMkLst>
+        </pc:spChg>
+        <pc:picChg chg="mod">
+          <ac:chgData name="Mohammed Fasha" userId="cc64f42d-a1a6-4f08-b97b-0c37f877119f" providerId="ADAL" clId="{1430C6B2-0695-4939-9A81-7D403BE3894B}" dt="2025-04-03T03:22:32.423" v="2" actId="1076"/>
+          <ac:picMkLst>
+            <pc:docMk/>
+            <pc:sldMk cId="0" sldId="281"/>
+            <ac:picMk id="2050" creationId="{62F3EE30-1250-B624-2F54-4CC416515993}"/>
+          </ac:picMkLst>
+        </pc:picChg>
       </pc:sldChg>
     </pc:docChg>
   </pc:docChgLst>
@@ -5884,7 +5740,7 @@
           <a:p>
             <a:fld id="{13BA03A4-B9F1-404C-8A74-B1AFD6480953}" type="datetimeFigureOut">
               <a:rPr lang="en-US" smtClean="0"/>
-              <a:t>3/27/2025</a:t>
+              <a:t>4/3/2025</a:t>
             </a:fld>
             <a:endParaRPr lang="en-US"/>
           </a:p>
@@ -6298,7 +6154,7 @@
           <a:p>
             <a:fld id="{0DB78E95-DE77-44D3-BDB9-E242948FB112}" type="datetimeFigureOut">
               <a:rPr lang="en-US" smtClean="0"/>
-              <a:t>3/27/2025</a:t>
+              <a:t>4/3/2025</a:t>
             </a:fld>
             <a:endParaRPr lang="en-US"/>
           </a:p>
@@ -6526,7 +6382,7 @@
           <a:p>
             <a:fld id="{0DB78E95-DE77-44D3-BDB9-E242948FB112}" type="datetimeFigureOut">
               <a:rPr lang="en-US" smtClean="0"/>
-              <a:t>3/27/2025</a:t>
+              <a:t>4/3/2025</a:t>
             </a:fld>
             <a:endParaRPr lang="en-US"/>
           </a:p>
@@ -6734,7 +6590,7 @@
           <a:p>
             <a:fld id="{0DB78E95-DE77-44D3-BDB9-E242948FB112}" type="datetimeFigureOut">
               <a:rPr lang="en-US" smtClean="0"/>
-              <a:t>3/27/2025</a:t>
+              <a:t>4/3/2025</a:t>
             </a:fld>
             <a:endParaRPr lang="en-US"/>
           </a:p>
@@ -7461,7 +7317,7 @@
           <a:p>
             <a:fld id="{0DB78E95-DE77-44D3-BDB9-E242948FB112}" type="datetimeFigureOut">
               <a:rPr lang="en-US" smtClean="0"/>
-              <a:t>3/27/2025</a:t>
+              <a:t>4/3/2025</a:t>
             </a:fld>
             <a:endParaRPr lang="en-US"/>
           </a:p>
@@ -7840,7 +7696,7 @@
           <a:p>
             <a:fld id="{0DB78E95-DE77-44D3-BDB9-E242948FB112}" type="datetimeFigureOut">
               <a:rPr lang="en-US" smtClean="0"/>
-              <a:t>3/27/2025</a:t>
+              <a:t>4/3/2025</a:t>
             </a:fld>
             <a:endParaRPr lang="en-US"/>
           </a:p>
@@ -8252,7 +8108,7 @@
           <a:p>
             <a:fld id="{0DB78E95-DE77-44D3-BDB9-E242948FB112}" type="datetimeFigureOut">
               <a:rPr lang="en-US" smtClean="0"/>
-              <a:t>3/27/2025</a:t>
+              <a:t>4/3/2025</a:t>
             </a:fld>
             <a:endParaRPr lang="en-US"/>
           </a:p>
@@ -8393,7 +8249,7 @@
           <a:p>
             <a:fld id="{0DB78E95-DE77-44D3-BDB9-E242948FB112}" type="datetimeFigureOut">
               <a:rPr lang="en-US" smtClean="0"/>
-              <a:t>3/27/2025</a:t>
+              <a:t>4/3/2025</a:t>
             </a:fld>
             <a:endParaRPr lang="en-US"/>
           </a:p>
@@ -8506,7 +8362,7 @@
           <a:p>
             <a:fld id="{0DB78E95-DE77-44D3-BDB9-E242948FB112}" type="datetimeFigureOut">
               <a:rPr lang="en-US" smtClean="0"/>
-              <a:t>3/27/2025</a:t>
+              <a:t>4/3/2025</a:t>
             </a:fld>
             <a:endParaRPr lang="en-US"/>
           </a:p>
@@ -8817,7 +8673,7 @@
           <a:p>
             <a:fld id="{0DB78E95-DE77-44D3-BDB9-E242948FB112}" type="datetimeFigureOut">
               <a:rPr lang="en-US" smtClean="0"/>
-              <a:t>3/27/2025</a:t>
+              <a:t>4/3/2025</a:t>
             </a:fld>
             <a:endParaRPr lang="en-US"/>
           </a:p>
@@ -9105,7 +8961,7 @@
           <a:p>
             <a:fld id="{0DB78E95-DE77-44D3-BDB9-E242948FB112}" type="datetimeFigureOut">
               <a:rPr lang="en-US" smtClean="0"/>
-              <a:t>3/27/2025</a:t>
+              <a:t>4/3/2025</a:t>
             </a:fld>
             <a:endParaRPr lang="en-US"/>
           </a:p>
@@ -9346,7 +9202,7 @@
           <a:p>
             <a:fld id="{0DB78E95-DE77-44D3-BDB9-E242948FB112}" type="datetimeFigureOut">
               <a:rPr lang="en-US" smtClean="0"/>
-              <a:t>3/27/2025</a:t>
+              <a:t>4/3/2025</a:t>
             </a:fld>
             <a:endParaRPr lang="en-US"/>
           </a:p>
@@ -24525,8 +24381,8 @@
         </p:blipFill>
         <p:spPr>
           <a:xfrm>
-            <a:off x="7536277" y="2472480"/>
-            <a:ext cx="1114200" cy="190080"/>
+            <a:off x="8390293" y="4730618"/>
+            <a:ext cx="1469701" cy="289956"/>
           </a:xfrm>
           <a:prstGeom prst="rect">
             <a:avLst/>
@@ -24566,7 +24422,7 @@
         </p:blipFill>
         <p:spPr bwMode="auto">
           <a:xfrm>
-            <a:off x="3552268" y="3815532"/>
+            <a:off x="838080" y="3769934"/>
             <a:ext cx="4913870" cy="2764052"/>
           </a:xfrm>
           <a:prstGeom prst="rect">
@@ -24584,6 +24440,65 @@
           </a:extLst>
         </p:spPr>
       </p:pic>
+      <p:sp>
+        <p:nvSpPr>
+          <p:cNvPr id="2" name="PlaceHolder 2">
+            <a:extLst>
+              <a:ext uri="{FF2B5EF4-FFF2-40B4-BE49-F238E27FC236}">
+                <a16:creationId xmlns:a16="http://schemas.microsoft.com/office/drawing/2014/main" id="{F3E208A7-9D3D-C8FD-62BA-246574698579}"/>
+              </a:ext>
+            </a:extLst>
+          </p:cNvPr>
+          <p:cNvSpPr>
+            <a:spLocks noGrp="1"/>
+          </p:cNvSpPr>
+          <p:nvPr>
+            <p:ph/>
+          </p:nvPr>
+        </p:nvSpPr>
+        <p:spPr>
+          <a:xfrm>
+            <a:off x="7290915" y="5128518"/>
+            <a:ext cx="3940677" cy="356984"/>
+          </a:xfrm>
+          <a:prstGeom prst="rect">
+            <a:avLst/>
+          </a:prstGeom>
+          <a:noFill/>
+          <a:ln w="0">
+            <a:noFill/>
+          </a:ln>
+        </p:spPr>
+        <p:txBody>
+          <a:bodyPr lIns="91440" tIns="45720" rIns="91440" bIns="45720" anchor="t">
+            <a:noAutofit/>
+          </a:bodyPr>
+          <a:lstStyle/>
+          <a:p>
+            <a:pPr defTabSz="914400">
+              <a:lnSpc>
+                <a:spcPct val="90000"/>
+              </a:lnSpc>
+              <a:spcBef>
+                <a:spcPts val="1001"/>
+              </a:spcBef>
+              <a:buClr>
+                <a:srgbClr val="000000"/>
+              </a:buClr>
+            </a:pPr>
+            <a:r>
+              <a:rPr lang="en-US" sz="1400" b="0" u="none" strike="noStrike" dirty="0">
+                <a:solidFill>
+                  <a:schemeClr val="dk1"/>
+                </a:solidFill>
+                <a:uFillTx/>
+                <a:latin typeface="Calibri"/>
+              </a:rPr>
+              <a:t>Goto  Sentiment Analysis Example in the Notebook</a:t>
+            </a:r>
+          </a:p>
+        </p:txBody>
+      </p:sp>
     </p:spTree>
   </p:cSld>
   <p:clrMapOvr>
@@ -26643,39 +26558,32 @@
       </p:sp>
       <p:pic>
         <p:nvPicPr>
-          <p:cNvPr id="164" name="Graphic 6">
-            <a:hlinkClick r:id="rId2"/>
+          <p:cNvPr id="3" name="Picture 2">
             <a:extLst>
               <a:ext uri="{FF2B5EF4-FFF2-40B4-BE49-F238E27FC236}">
-                <a16:creationId xmlns:a16="http://schemas.microsoft.com/office/drawing/2014/main" id="{98D75408-003A-ED3D-468E-0FC6FA95A427}"/>
+                <a16:creationId xmlns:a16="http://schemas.microsoft.com/office/drawing/2014/main" id="{7E335CC5-CC5A-4EDC-EFCF-AD1985688A1C}"/>
               </a:ext>
             </a:extLst>
           </p:cNvPr>
-          <p:cNvPicPr/>
+          <p:cNvPicPr>
+            <a:picLocks noChangeAspect="1"/>
+          </p:cNvPicPr>
           <p:nvPr/>
         </p:nvPicPr>
         <p:blipFill>
-          <a:blip r:embed="rId3">
-            <a:extLst>
-              <a:ext uri="{96DAC541-7B7A-43D3-8B79-37D633B846F1}">
-                <asvg:svgBlip xmlns:asvg="http://schemas.microsoft.com/office/drawing/2016/SVG/main" r:embed="rId4"/>
-              </a:ext>
-            </a:extLst>
-          </a:blip>
-          <a:stretch/>
+          <a:blip r:embed="rId2"/>
+          <a:stretch>
+            <a:fillRect/>
+          </a:stretch>
         </p:blipFill>
         <p:spPr>
           <a:xfrm>
-            <a:off x="7505385" y="2206810"/>
-            <a:ext cx="1114200" cy="190080"/>
+            <a:off x="7536431" y="2173317"/>
+            <a:ext cx="1466850" cy="285750"/>
           </a:xfrm>
           <a:prstGeom prst="rect">
             <a:avLst/>
           </a:prstGeom>
-          <a:noFill/>
-          <a:ln w="0">
-            <a:noFill/>
-          </a:ln>
         </p:spPr>
       </p:pic>
     </p:spTree>
@@ -26777,8 +26685,8 @@
         </p:nvSpPr>
         <p:spPr>
           <a:xfrm>
-            <a:off x="838080" y="1706040"/>
-            <a:ext cx="10515240" cy="4990680"/>
+            <a:off x="838079" y="1706040"/>
+            <a:ext cx="11282033" cy="4990680"/>
           </a:xfrm>
           <a:prstGeom prst="rect">
             <a:avLst/>
@@ -26808,14 +26716,24 @@
               <a:buChar char="•"/>
             </a:pPr>
             <a:r>
-              <a:rPr lang="en-US" sz="2400" b="0" u="none" strike="noStrike">
+              <a:rPr lang="en-US" sz="2400" b="1" u="none" strike="noStrike" dirty="0">
                 <a:solidFill>
                   <a:schemeClr val="dk1"/>
                 </a:solidFill>
                 <a:uFillTx/>
                 <a:latin typeface="Calibri"/>
               </a:rPr>
-              <a:t>Limited context: Only consider a fixed number of previous words</a:t>
+              <a:t>Limited context: </a:t>
+            </a:r>
+            <a:r>
+              <a:rPr lang="en-US" sz="2400" b="0" u="none" strike="noStrike" dirty="0">
+                <a:solidFill>
+                  <a:schemeClr val="dk1"/>
+                </a:solidFill>
+                <a:uFillTx/>
+                <a:latin typeface="Calibri"/>
+              </a:rPr>
+              <a:t>Only consider a fixed number of previous words</a:t>
             </a:r>
           </a:p>
           <a:p>
@@ -26833,14 +26751,24 @@
               <a:buChar char="•"/>
             </a:pPr>
             <a:r>
-              <a:rPr lang="en-US" sz="2400" b="0" u="none" strike="noStrike">
+              <a:rPr lang="en-US" sz="2400" b="1" u="none" strike="noStrike" dirty="0">
                 <a:solidFill>
                   <a:schemeClr val="dk1"/>
                 </a:solidFill>
                 <a:uFillTx/>
                 <a:latin typeface="Calibri"/>
               </a:rPr>
-              <a:t>No long-range dependencies: Cannot capture relationships between distant words</a:t>
+              <a:t>No long-range dependencies: </a:t>
+            </a:r>
+            <a:r>
+              <a:rPr lang="en-US" sz="2400" b="0" u="none" strike="noStrike" dirty="0">
+                <a:solidFill>
+                  <a:schemeClr val="dk1"/>
+                </a:solidFill>
+                <a:uFillTx/>
+                <a:latin typeface="Calibri"/>
+              </a:rPr>
+              <a:t>Cannot capture relationships between distant words</a:t>
             </a:r>
           </a:p>
           <a:p>
@@ -26858,14 +26786,24 @@
               <a:buChar char="•"/>
             </a:pPr>
             <a:r>
-              <a:rPr lang="en-US" sz="2400" b="0" u="none" strike="noStrike">
+              <a:rPr lang="en-US" sz="2400" b="1" u="none" strike="noStrike" dirty="0">
                 <a:solidFill>
                   <a:schemeClr val="dk1"/>
                 </a:solidFill>
                 <a:uFillTx/>
                 <a:latin typeface="Calibri"/>
               </a:rPr>
-              <a:t>No semantic understanding: Model captures statistical patterns but not meaning</a:t>
+              <a:t>No semantic understanding: </a:t>
+            </a:r>
+            <a:r>
+              <a:rPr lang="en-US" sz="2400" b="0" u="none" strike="noStrike" dirty="0">
+                <a:solidFill>
+                  <a:schemeClr val="dk1"/>
+                </a:solidFill>
+                <a:uFillTx/>
+                <a:latin typeface="Calibri"/>
+              </a:rPr>
+              <a:t>Model captures statistical patterns but not meaning</a:t>
             </a:r>
           </a:p>
           <a:p>
@@ -26883,14 +26821,24 @@
               <a:buChar char="•"/>
             </a:pPr>
             <a:r>
-              <a:rPr lang="en-US" sz="2400" b="0" u="none" strike="noStrike">
+              <a:rPr lang="en-US" sz="2400" b="1" u="none" strike="noStrike" dirty="0">
                 <a:solidFill>
                   <a:schemeClr val="dk1"/>
                 </a:solidFill>
                 <a:uFillTx/>
                 <a:latin typeface="Calibri"/>
               </a:rPr>
-              <a:t>Memory intensive: Storing all possible n-grams requires significant space</a:t>
+              <a:t>Memory intensive: </a:t>
+            </a:r>
+            <a:r>
+              <a:rPr lang="en-US" sz="2400" b="0" u="none" strike="noStrike" dirty="0">
+                <a:solidFill>
+                  <a:schemeClr val="dk1"/>
+                </a:solidFill>
+                <a:uFillTx/>
+                <a:latin typeface="Calibri"/>
+              </a:rPr>
+              <a:t>Storing all possible n-grams requires significant space</a:t>
             </a:r>
           </a:p>
           <a:p>
@@ -26908,14 +26856,24 @@
               <a:buChar char="•"/>
             </a:pPr>
             <a:r>
-              <a:rPr lang="en-US" sz="2400" b="0" u="none" strike="noStrike">
+              <a:rPr lang="en-US" sz="2400" b="1" u="none" strike="noStrike" dirty="0">
                 <a:solidFill>
                   <a:schemeClr val="dk1"/>
                 </a:solidFill>
                 <a:uFillTx/>
                 <a:latin typeface="Calibri"/>
               </a:rPr>
-              <a:t>Data sparsity: Many valid word combinations don't appear in training data</a:t>
+              <a:t>Data sparsity: </a:t>
+            </a:r>
+            <a:r>
+              <a:rPr lang="en-US" sz="2400" b="0" u="none" strike="noStrike" dirty="0">
+                <a:solidFill>
+                  <a:schemeClr val="dk1"/>
+                </a:solidFill>
+                <a:uFillTx/>
+                <a:latin typeface="Calibri"/>
+              </a:rPr>
+              <a:t>Many valid word combinations don't appear in training data</a:t>
             </a:r>
           </a:p>
           <a:p>
@@ -26928,7 +26886,7 @@
               </a:spcBef>
               <a:buNone/>
             </a:pPr>
-            <a:endParaRPr lang="en-US" sz="2400" b="0" u="none" strike="noStrike">
+            <a:endParaRPr lang="en-US" sz="2400" b="0" u="none" strike="noStrike" dirty="0">
               <a:solidFill>
                 <a:schemeClr val="dk1"/>
               </a:solidFill>
@@ -27062,7 +27020,7 @@
               </a:tabLst>
             </a:pPr>
             <a:r>
-              <a:rPr lang="en-US" sz="2400" b="0" u="none" strike="noStrike">
+              <a:rPr lang="en-US" sz="2400" b="0" u="none" strike="noStrike" dirty="0">
                 <a:solidFill>
                   <a:schemeClr val="dk1"/>
                 </a:solidFill>
@@ -27086,7 +27044,7 @@
               </a:tabLst>
             </a:pPr>
             <a:r>
-              <a:rPr lang="en-US" sz="2400" b="1" u="none" strike="noStrike">
+              <a:rPr lang="en-US" sz="2400" b="1" u="none" strike="noStrike" dirty="0">
                 <a:solidFill>
                   <a:schemeClr val="dk1"/>
                 </a:solidFill>
@@ -27095,7 +27053,7 @@
               </a:rPr>
               <a:t>What It Means</a:t>
             </a:r>
-            <a:endParaRPr lang="en-US" sz="2400" b="0" u="none" strike="noStrike">
+            <a:endParaRPr lang="en-US" sz="2400" b="0" u="none" strike="noStrike" dirty="0">
               <a:solidFill>
                 <a:schemeClr val="dk1"/>
               </a:solidFill>
@@ -27121,7 +27079,7 @@
               </a:tabLst>
             </a:pPr>
             <a:r>
-              <a:rPr lang="en-US" sz="2400" b="1" u="none" strike="noStrike">
+              <a:rPr lang="en-US" sz="2400" b="1" u="none" strike="noStrike" dirty="0">
                 <a:solidFill>
                   <a:schemeClr val="dk1"/>
                 </a:solidFill>
@@ -27131,7 +27089,7 @@
               <a:t>Lower perplexity</a:t>
             </a:r>
             <a:r>
-              <a:rPr lang="en-US" sz="2400" b="0" u="none" strike="noStrike">
+              <a:rPr lang="en-US" sz="2400" b="0" u="none" strike="noStrike" dirty="0">
                 <a:solidFill>
                   <a:schemeClr val="dk1"/>
                 </a:solidFill>
@@ -27159,7 +27117,7 @@
               </a:tabLst>
             </a:pPr>
             <a:r>
-              <a:rPr lang="en-US" sz="2400" b="1" u="none" strike="noStrike">
+              <a:rPr lang="en-US" sz="2400" b="1" u="none" strike="noStrike" dirty="0">
                 <a:solidFill>
                   <a:schemeClr val="dk1"/>
                 </a:solidFill>
@@ -27169,7 +27127,7 @@
               <a:t>Higher perplexity</a:t>
             </a:r>
             <a:r>
-              <a:rPr lang="en-US" sz="2400" b="0" u="none" strike="noStrike">
+              <a:rPr lang="en-US" sz="2400" b="0" u="none" strike="noStrike" dirty="0">
                 <a:solidFill>
                   <a:schemeClr val="dk1"/>
                 </a:solidFill>
@@ -27193,7 +27151,7 @@
               </a:tabLst>
             </a:pPr>
             <a:r>
-              <a:rPr lang="en-US" sz="2400" b="1" u="none" strike="noStrike">
+              <a:rPr lang="en-US" sz="2400" b="1" u="none" strike="noStrike" dirty="0">
                 <a:solidFill>
                   <a:schemeClr val="dk1"/>
                 </a:solidFill>
@@ -27202,7 +27160,7 @@
               </a:rPr>
               <a:t>Simple Example</a:t>
             </a:r>
-            <a:endParaRPr lang="en-US" sz="2400" b="0" u="none" strike="noStrike">
+            <a:endParaRPr lang="en-US" sz="2400" b="0" u="none" strike="noStrike" dirty="0">
               <a:solidFill>
                 <a:schemeClr val="dk1"/>
               </a:solidFill>
@@ -27224,7 +27182,7 @@
               </a:tabLst>
             </a:pPr>
             <a:r>
-              <a:rPr lang="en-US" sz="2400" b="0" u="none" strike="noStrike">
+              <a:rPr lang="en-US" sz="2400" b="0" u="none" strike="noStrike" dirty="0">
                 <a:solidFill>
                   <a:schemeClr val="dk1"/>
                 </a:solidFill>
@@ -27252,7 +27210,7 @@
               </a:tabLst>
             </a:pPr>
             <a:r>
-              <a:rPr lang="en-US" sz="2400" b="0" u="none" strike="noStrike">
+              <a:rPr lang="en-US" sz="2400" b="0" u="none" strike="noStrike" dirty="0">
                 <a:solidFill>
                   <a:schemeClr val="dk1"/>
                 </a:solidFill>
@@ -27280,7 +27238,7 @@
               </a:tabLst>
             </a:pPr>
             <a:r>
-              <a:rPr lang="en-US" sz="2400" b="0" u="none" strike="noStrike">
+              <a:rPr lang="en-US" sz="2400" b="0" u="none" strike="noStrike" dirty="0">
                 <a:solidFill>
                   <a:schemeClr val="dk1"/>
                 </a:solidFill>
@@ -27291,7 +27249,7 @@
             </a:r>
           </a:p>
           <a:p>
-            <a:pPr marL="228600" indent="-228600" defTabSz="914400">
+            <a:pPr defTabSz="914400">
               <a:lnSpc>
                 <a:spcPct val="90000"/>
               </a:lnSpc>
@@ -27304,7 +27262,7 @@
               </a:tabLst>
             </a:pPr>
             <a:r>
-              <a:rPr lang="en-US" sz="2400" b="0" u="none" strike="noStrike">
+              <a:rPr lang="en-US" sz="2400" b="0" u="none" strike="noStrike" dirty="0">
                 <a:solidFill>
                   <a:schemeClr val="dk1"/>
                 </a:solidFill>
@@ -27328,7 +27286,7 @@
               </a:tabLst>
             </a:pPr>
             <a:r>
-              <a:rPr lang="en-US" sz="2400" b="1" u="none" strike="noStrike">
+              <a:rPr lang="en-US" sz="2400" b="1" u="none" strike="noStrike" dirty="0">
                 <a:solidFill>
                   <a:schemeClr val="dk1"/>
                 </a:solidFill>
@@ -27337,7 +27295,7 @@
               </a:rPr>
               <a:t>Real-World Comparison</a:t>
             </a:r>
-            <a:endParaRPr lang="en-US" sz="2400" b="0" u="none" strike="noStrike">
+            <a:endParaRPr lang="en-US" sz="2400" b="0" u="none" strike="noStrike" dirty="0">
               <a:solidFill>
                 <a:schemeClr val="dk1"/>
               </a:solidFill>
@@ -27359,7 +27317,7 @@
               </a:tabLst>
             </a:pPr>
             <a:r>
-              <a:rPr lang="en-US" sz="2400" b="0" u="none" strike="noStrike">
+              <a:rPr lang="en-US" sz="2400" b="0" u="none" strike="noStrike" dirty="0">
                 <a:solidFill>
                   <a:schemeClr val="dk1"/>
                 </a:solidFill>
@@ -27383,7 +27341,7 @@
               </a:tabLst>
             </a:pPr>
             <a:r>
-              <a:rPr lang="en-US" sz="2400" b="1" u="none" strike="noStrike">
+              <a:rPr lang="en-US" sz="2400" b="1" u="none" strike="noStrike" dirty="0">
                 <a:solidFill>
                   <a:schemeClr val="dk1"/>
                 </a:solidFill>
@@ -27392,7 +27350,7 @@
               </a:rPr>
               <a:t>Why It Matters</a:t>
             </a:r>
-            <a:endParaRPr lang="en-US" sz="2400" b="0" u="none" strike="noStrike">
+            <a:endParaRPr lang="en-US" sz="2400" b="0" u="none" strike="noStrike" dirty="0">
               <a:solidFill>
                 <a:schemeClr val="dk1"/>
               </a:solidFill>
@@ -27414,7 +27372,7 @@
               </a:tabLst>
             </a:pPr>
             <a:r>
-              <a:rPr lang="en-US" sz="2400" b="0" u="none" strike="noStrike">
+              <a:rPr lang="en-US" sz="2400" b="0" u="none" strike="noStrike" dirty="0">
                 <a:solidFill>
                   <a:schemeClr val="dk1"/>
                 </a:solidFill>
@@ -27442,7 +27400,7 @@
               </a:tabLst>
             </a:pPr>
             <a:r>
-              <a:rPr lang="en-US" sz="2400" b="0" u="none" strike="noStrike">
+              <a:rPr lang="en-US" sz="2400" b="0" u="none" strike="noStrike" dirty="0">
                 <a:solidFill>
                   <a:schemeClr val="dk1"/>
                 </a:solidFill>
@@ -27470,7 +27428,7 @@
               </a:tabLst>
             </a:pPr>
             <a:r>
-              <a:rPr lang="en-US" sz="2400" b="0" u="none" strike="noStrike">
+              <a:rPr lang="en-US" sz="2400" b="0" u="none" strike="noStrike" dirty="0">
                 <a:solidFill>
                   <a:schemeClr val="dk1"/>
                 </a:solidFill>
@@ -27498,7 +27456,7 @@
               </a:tabLst>
             </a:pPr>
             <a:r>
-              <a:rPr lang="en-US" sz="2400" b="0" u="none" strike="noStrike">
+              <a:rPr lang="en-US" sz="2400" b="0" u="none" strike="noStrike" dirty="0">
                 <a:solidFill>
                   <a:schemeClr val="dk1"/>
                 </a:solidFill>
@@ -27526,7 +27484,7 @@
               </a:tabLst>
             </a:pPr>
             <a:r>
-              <a:rPr lang="en-US" sz="2400" b="0" u="none" strike="noStrike">
+              <a:rPr lang="en-US" sz="2400" b="0" u="none" strike="noStrike" dirty="0">
                 <a:solidFill>
                   <a:schemeClr val="dk1"/>
                 </a:solidFill>
@@ -27549,7 +27507,7 @@
                 <a:tab pos="0" algn="l"/>
               </a:tabLst>
             </a:pPr>
-            <a:endParaRPr lang="en-US" sz="2400" b="0" u="none" strike="noStrike">
+            <a:endParaRPr lang="en-US" sz="2400" b="0" u="none" strike="noStrike" dirty="0">
               <a:solidFill>
                 <a:schemeClr val="dk1"/>
               </a:solidFill>

--- a/20242-NLP-LLM/lecture notes/Part 1 - Introduction to NLP/1.1-introduction to NLP.pptx
+++ b/20242-NLP-LLM/lecture notes/Part 1 - Introduction to NLP/1.1-introduction to NLP.pptx
@@ -5,7 +5,7 @@
     <p:sldMasterId id="2147483648" r:id="rId1"/>
   </p:sldMasterIdLst>
   <p:notesMasterIdLst>
-    <p:notesMasterId r:id="rId36"/>
+    <p:notesMasterId r:id="rId46"/>
   </p:notesMasterIdLst>
   <p:sldIdLst>
     <p:sldId id="256" r:id="rId2"/>
@@ -33,15 +33,25 @@
     <p:sldId id="276" r:id="rId24"/>
     <p:sldId id="277" r:id="rId25"/>
     <p:sldId id="278" r:id="rId26"/>
-    <p:sldId id="279" r:id="rId27"/>
-    <p:sldId id="280" r:id="rId28"/>
-    <p:sldId id="281" r:id="rId29"/>
-    <p:sldId id="286" r:id="rId30"/>
-    <p:sldId id="287" r:id="rId31"/>
-    <p:sldId id="288" r:id="rId32"/>
-    <p:sldId id="295" r:id="rId33"/>
-    <p:sldId id="291" r:id="rId34"/>
-    <p:sldId id="290" r:id="rId35"/>
+    <p:sldId id="280" r:id="rId27"/>
+    <p:sldId id="281" r:id="rId28"/>
+    <p:sldId id="298" r:id="rId29"/>
+    <p:sldId id="308" r:id="rId30"/>
+    <p:sldId id="307" r:id="rId31"/>
+    <p:sldId id="299" r:id="rId32"/>
+    <p:sldId id="300" r:id="rId33"/>
+    <p:sldId id="301" r:id="rId34"/>
+    <p:sldId id="302" r:id="rId35"/>
+    <p:sldId id="303" r:id="rId36"/>
+    <p:sldId id="304" r:id="rId37"/>
+    <p:sldId id="305" r:id="rId38"/>
+    <p:sldId id="306" r:id="rId39"/>
+    <p:sldId id="286" r:id="rId40"/>
+    <p:sldId id="287" r:id="rId41"/>
+    <p:sldId id="288" r:id="rId42"/>
+    <p:sldId id="295" r:id="rId43"/>
+    <p:sldId id="291" r:id="rId44"/>
+    <p:sldId id="290" r:id="rId45"/>
   </p:sldIdLst>
   <p:sldSz cx="12192000" cy="6858000"/>
   <p:notesSz cx="6858000" cy="9144000"/>
@@ -157,7 +167,7 @@
 <file path=ppt/revisionInfo.xml><?xml version="1.0" encoding="utf-8"?>
 <p1510:revInfo xmlns:a="http://schemas.openxmlformats.org/drawingml/2006/main" xmlns:r="http://schemas.openxmlformats.org/officeDocument/2006/relationships" xmlns:p1510="http://schemas.microsoft.com/office/powerpoint/2015/10/main">
   <p1510:revLst>
-    <p1510:client id="{1430C6B2-0695-4939-9A81-7D403BE3894B}" v="4" dt="2025-04-03T03:24:44.757"/>
+    <p1510:client id="{1430C6B2-0695-4939-9A81-7D403BE3894B}" v="45" dt="2025-04-06T04:26:48.307"/>
   </p1510:revLst>
 </p1510:revInfo>
 </file>
@@ -774,14 +784,6 @@
           <pc:docMk/>
           <pc:sldMk cId="0" sldId="279"/>
         </pc:sldMkLst>
-        <pc:spChg chg="mod">
-          <ac:chgData name="Mohammed Fasha" userId="cc64f42d-a1a6-4f08-b97b-0c37f877119f" providerId="ADAL" clId="{CD467BAA-958C-43DD-AE6C-14EC1A9C72D6}" dt="2025-03-25T03:18:08.640" v="2053" actId="12"/>
-          <ac:spMkLst>
-            <pc:docMk/>
-            <pc:sldMk cId="0" sldId="279"/>
-            <ac:spMk id="158" creationId="{00000000-0000-0000-0000-000000000000}"/>
-          </ac:spMkLst>
-        </pc:spChg>
       </pc:sldChg>
       <pc:sldChg chg="add">
         <pc:chgData name="Mohammed Fasha" userId="cc64f42d-a1a6-4f08-b97b-0c37f877119f" providerId="ADAL" clId="{CD467BAA-958C-43DD-AE6C-14EC1A9C72D6}" dt="2025-03-25T02:49:01.516" v="1"/>
@@ -804,14 +806,6 @@
             <ac:spMk id="162" creationId="{00000000-0000-0000-0000-000000000000}"/>
           </ac:spMkLst>
         </pc:spChg>
-        <pc:picChg chg="mod">
-          <ac:chgData name="Mohammed Fasha" userId="cc64f42d-a1a6-4f08-b97b-0c37f877119f" providerId="ADAL" clId="{CD467BAA-958C-43DD-AE6C-14EC1A9C72D6}" dt="2025-03-25T04:01:24.543" v="2424" actId="1076"/>
-          <ac:picMkLst>
-            <pc:docMk/>
-            <pc:sldMk cId="0" sldId="281"/>
-            <ac:picMk id="164" creationId="{00000000-0000-0000-0000-000000000000}"/>
-          </ac:picMkLst>
-        </pc:picChg>
         <pc:picChg chg="add mod">
           <ac:chgData name="Mohammed Fasha" userId="cc64f42d-a1a6-4f08-b97b-0c37f877119f" providerId="ADAL" clId="{CD467BAA-958C-43DD-AE6C-14EC1A9C72D6}" dt="2025-03-25T04:00:25.603" v="2296" actId="1076"/>
           <ac:picMkLst>
@@ -1014,14 +1008,6 @@
             <ac:spMk id="162" creationId="{61A7CF95-C71E-5859-7D68-2CAA57803025}"/>
           </ac:spMkLst>
         </pc:spChg>
-        <pc:picChg chg="mod">
-          <ac:chgData name="Mohammed Fasha" userId="cc64f42d-a1a6-4f08-b97b-0c37f877119f" providerId="ADAL" clId="{CD467BAA-958C-43DD-AE6C-14EC1A9C72D6}" dt="2025-03-25T04:10:57.490" v="2564" actId="1076"/>
-          <ac:picMkLst>
-            <pc:docMk/>
-            <pc:sldMk cId="1219703126" sldId="295"/>
-            <ac:picMk id="164" creationId="{98D75408-003A-ED3D-468E-0FC6FA95A427}"/>
-          </ac:picMkLst>
-        </pc:picChg>
       </pc:sldChg>
       <pc:sldChg chg="new del">
         <pc:chgData name="Mohammed Fasha" userId="cc64f42d-a1a6-4f08-b97b-0c37f877119f" providerId="ADAL" clId="{CD467BAA-958C-43DD-AE6C-14EC1A9C72D6}" dt="2025-03-25T04:15:23.576" v="2587" actId="47"/>
@@ -1860,31 +1846,879 @@
   </pc:docChgLst>
   <pc:docChgLst>
     <pc:chgData name="Mohammed Fasha" userId="cc64f42d-a1a6-4f08-b97b-0c37f877119f" providerId="ADAL" clId="{1430C6B2-0695-4939-9A81-7D403BE3894B}"/>
-    <pc:docChg chg="modSld">
-      <pc:chgData name="Mohammed Fasha" userId="cc64f42d-a1a6-4f08-b97b-0c37f877119f" providerId="ADAL" clId="{1430C6B2-0695-4939-9A81-7D403BE3894B}" dt="2025-04-03T03:24:44.757" v="3"/>
+    <pc:docChg chg="undo redo custSel addSld delSld modSld">
+      <pc:chgData name="Mohammed Fasha" userId="cc64f42d-a1a6-4f08-b97b-0c37f877119f" providerId="ADAL" clId="{1430C6B2-0695-4939-9A81-7D403BE3894B}" dt="2025-04-06T04:27:46.978" v="903" actId="2696"/>
       <pc:docMkLst>
         <pc:docMk/>
       </pc:docMkLst>
-      <pc:sldChg chg="addSp modSp">
-        <pc:chgData name="Mohammed Fasha" userId="cc64f42d-a1a6-4f08-b97b-0c37f877119f" providerId="ADAL" clId="{1430C6B2-0695-4939-9A81-7D403BE3894B}" dt="2025-04-03T03:24:44.757" v="3"/>
+      <pc:sldChg chg="modSp mod">
+        <pc:chgData name="Mohammed Fasha" userId="cc64f42d-a1a6-4f08-b97b-0c37f877119f" providerId="ADAL" clId="{1430C6B2-0695-4939-9A81-7D403BE3894B}" dt="2025-04-06T04:24:59.692" v="855" actId="122"/>
+        <pc:sldMkLst>
+          <pc:docMk/>
+          <pc:sldMk cId="0" sldId="264"/>
+        </pc:sldMkLst>
+        <pc:spChg chg="mod">
+          <ac:chgData name="Mohammed Fasha" userId="cc64f42d-a1a6-4f08-b97b-0c37f877119f" providerId="ADAL" clId="{1430C6B2-0695-4939-9A81-7D403BE3894B}" dt="2025-04-06T04:24:59.692" v="855" actId="122"/>
+          <ac:spMkLst>
+            <pc:docMk/>
+            <pc:sldMk cId="0" sldId="264"/>
+            <ac:spMk id="114" creationId="{00000000-0000-0000-0000-000000000000}"/>
+          </ac:spMkLst>
+        </pc:spChg>
+      </pc:sldChg>
+      <pc:sldChg chg="addSp modSp mod">
+        <pc:chgData name="Mohammed Fasha" userId="cc64f42d-a1a6-4f08-b97b-0c37f877119f" providerId="ADAL" clId="{1430C6B2-0695-4939-9A81-7D403BE3894B}" dt="2025-04-06T04:24:56.008" v="854" actId="122"/>
+        <pc:sldMkLst>
+          <pc:docMk/>
+          <pc:sldMk cId="0" sldId="265"/>
+        </pc:sldMkLst>
+        <pc:spChg chg="add mod">
+          <ac:chgData name="Mohammed Fasha" userId="cc64f42d-a1a6-4f08-b97b-0c37f877119f" providerId="ADAL" clId="{1430C6B2-0695-4939-9A81-7D403BE3894B}" dt="2025-04-06T04:24:56.008" v="854" actId="122"/>
+          <ac:spMkLst>
+            <pc:docMk/>
+            <pc:sldMk cId="0" sldId="265"/>
+            <ac:spMk id="2" creationId="{C087ADBF-4222-9D29-4601-72D8C5ECAF67}"/>
+          </ac:spMkLst>
+        </pc:spChg>
+        <pc:picChg chg="add mod">
+          <ac:chgData name="Mohammed Fasha" userId="cc64f42d-a1a6-4f08-b97b-0c37f877119f" providerId="ADAL" clId="{1430C6B2-0695-4939-9A81-7D403BE3894B}" dt="2025-04-06T04:22:18.308" v="769"/>
+          <ac:picMkLst>
+            <pc:docMk/>
+            <pc:sldMk cId="0" sldId="265"/>
+            <ac:picMk id="3" creationId="{68EA6CB0-BFE2-482A-D045-9E2274E13790}"/>
+          </ac:picMkLst>
+        </pc:picChg>
+      </pc:sldChg>
+      <pc:sldChg chg="addSp modSp mod">
+        <pc:chgData name="Mohammed Fasha" userId="cc64f42d-a1a6-4f08-b97b-0c37f877119f" providerId="ADAL" clId="{1430C6B2-0695-4939-9A81-7D403BE3894B}" dt="2025-04-06T04:24:51.521" v="853" actId="122"/>
+        <pc:sldMkLst>
+          <pc:docMk/>
+          <pc:sldMk cId="0" sldId="266"/>
+        </pc:sldMkLst>
+        <pc:spChg chg="add mod">
+          <ac:chgData name="Mohammed Fasha" userId="cc64f42d-a1a6-4f08-b97b-0c37f877119f" providerId="ADAL" clId="{1430C6B2-0695-4939-9A81-7D403BE3894B}" dt="2025-04-06T04:24:51.521" v="853" actId="122"/>
+          <ac:spMkLst>
+            <pc:docMk/>
+            <pc:sldMk cId="0" sldId="266"/>
+            <ac:spMk id="2" creationId="{728194F7-5559-14E2-09BA-A66A8287EE8C}"/>
+          </ac:spMkLst>
+        </pc:spChg>
+        <pc:picChg chg="add mod">
+          <ac:chgData name="Mohammed Fasha" userId="cc64f42d-a1a6-4f08-b97b-0c37f877119f" providerId="ADAL" clId="{1430C6B2-0695-4939-9A81-7D403BE3894B}" dt="2025-04-06T04:22:49.064" v="793"/>
+          <ac:picMkLst>
+            <pc:docMk/>
+            <pc:sldMk cId="0" sldId="266"/>
+            <ac:picMk id="3" creationId="{53D1A3D5-A337-E152-A2D3-43439D59A1BE}"/>
+          </ac:picMkLst>
+        </pc:picChg>
+      </pc:sldChg>
+      <pc:sldChg chg="addSp modSp mod">
+        <pc:chgData name="Mohammed Fasha" userId="cc64f42d-a1a6-4f08-b97b-0c37f877119f" providerId="ADAL" clId="{1430C6B2-0695-4939-9A81-7D403BE3894B}" dt="2025-04-06T04:24:44.721" v="852" actId="122"/>
+        <pc:sldMkLst>
+          <pc:docMk/>
+          <pc:sldMk cId="0" sldId="270"/>
+        </pc:sldMkLst>
+        <pc:spChg chg="add mod">
+          <ac:chgData name="Mohammed Fasha" userId="cc64f42d-a1a6-4f08-b97b-0c37f877119f" providerId="ADAL" clId="{1430C6B2-0695-4939-9A81-7D403BE3894B}" dt="2025-04-06T04:24:44.721" v="852" actId="122"/>
+          <ac:spMkLst>
+            <pc:docMk/>
+            <pc:sldMk cId="0" sldId="270"/>
+            <ac:spMk id="2" creationId="{41E2257B-B6B3-4705-2781-EF4AE061934E}"/>
+          </ac:spMkLst>
+        </pc:spChg>
+        <pc:picChg chg="add mod">
+          <ac:chgData name="Mohammed Fasha" userId="cc64f42d-a1a6-4f08-b97b-0c37f877119f" providerId="ADAL" clId="{1430C6B2-0695-4939-9A81-7D403BE3894B}" dt="2025-04-06T04:23:03.398" v="805"/>
+          <ac:picMkLst>
+            <pc:docMk/>
+            <pc:sldMk cId="0" sldId="270"/>
+            <ac:picMk id="3" creationId="{E9501D06-4E28-42B8-54EC-6C48C4567DB7}"/>
+          </ac:picMkLst>
+        </pc:picChg>
+      </pc:sldChg>
+      <pc:sldChg chg="modSp mod">
+        <pc:chgData name="Mohammed Fasha" userId="cc64f42d-a1a6-4f08-b97b-0c37f877119f" providerId="ADAL" clId="{1430C6B2-0695-4939-9A81-7D403BE3894B}" dt="2025-04-06T04:27:41.567" v="902" actId="113"/>
+        <pc:sldMkLst>
+          <pc:docMk/>
+          <pc:sldMk cId="0" sldId="272"/>
+        </pc:sldMkLst>
+        <pc:spChg chg="mod">
+          <ac:chgData name="Mohammed Fasha" userId="cc64f42d-a1a6-4f08-b97b-0c37f877119f" providerId="ADAL" clId="{1430C6B2-0695-4939-9A81-7D403BE3894B}" dt="2025-04-06T04:27:41.567" v="902" actId="113"/>
+          <ac:spMkLst>
+            <pc:docMk/>
+            <pc:sldMk cId="0" sldId="272"/>
+            <ac:spMk id="139" creationId="{00000000-0000-0000-0000-000000000000}"/>
+          </ac:spMkLst>
+        </pc:spChg>
+      </pc:sldChg>
+      <pc:sldChg chg="addSp modSp mod">
+        <pc:chgData name="Mohammed Fasha" userId="cc64f42d-a1a6-4f08-b97b-0c37f877119f" providerId="ADAL" clId="{1430C6B2-0695-4939-9A81-7D403BE3894B}" dt="2025-04-06T04:24:38.949" v="851" actId="122"/>
+        <pc:sldMkLst>
+          <pc:docMk/>
+          <pc:sldMk cId="0" sldId="274"/>
+        </pc:sldMkLst>
+        <pc:spChg chg="add mod">
+          <ac:chgData name="Mohammed Fasha" userId="cc64f42d-a1a6-4f08-b97b-0c37f877119f" providerId="ADAL" clId="{1430C6B2-0695-4939-9A81-7D403BE3894B}" dt="2025-04-06T04:24:38.949" v="851" actId="122"/>
+          <ac:spMkLst>
+            <pc:docMk/>
+            <pc:sldMk cId="0" sldId="274"/>
+            <ac:spMk id="2" creationId="{11147F20-7F9A-6F30-2416-024618CB1325}"/>
+          </ac:spMkLst>
+        </pc:spChg>
+        <pc:picChg chg="add mod">
+          <ac:chgData name="Mohammed Fasha" userId="cc64f42d-a1a6-4f08-b97b-0c37f877119f" providerId="ADAL" clId="{1430C6B2-0695-4939-9A81-7D403BE3894B}" dt="2025-04-06T04:23:15.680" v="814"/>
+          <ac:picMkLst>
+            <pc:docMk/>
+            <pc:sldMk cId="0" sldId="274"/>
+            <ac:picMk id="3" creationId="{2137DE1E-E18E-A534-77E6-28A80EF44BD2}"/>
+          </ac:picMkLst>
+        </pc:picChg>
+      </pc:sldChg>
+      <pc:sldChg chg="addSp modSp mod">
+        <pc:chgData name="Mohammed Fasha" userId="cc64f42d-a1a6-4f08-b97b-0c37f877119f" providerId="ADAL" clId="{1430C6B2-0695-4939-9A81-7D403BE3894B}" dt="2025-04-06T04:25:58.362" v="871" actId="1076"/>
+        <pc:sldMkLst>
+          <pc:docMk/>
+          <pc:sldMk cId="0" sldId="277"/>
+        </pc:sldMkLst>
+        <pc:spChg chg="add mod">
+          <ac:chgData name="Mohammed Fasha" userId="cc64f42d-a1a6-4f08-b97b-0c37f877119f" providerId="ADAL" clId="{1430C6B2-0695-4939-9A81-7D403BE3894B}" dt="2025-04-06T04:24:32.235" v="850" actId="122"/>
+          <ac:spMkLst>
+            <pc:docMk/>
+            <pc:sldMk cId="0" sldId="277"/>
+            <ac:spMk id="2" creationId="{9F86630B-6277-607F-1A5C-CDB3A4D93BB7}"/>
+          </ac:spMkLst>
+        </pc:spChg>
+        <pc:spChg chg="mod">
+          <ac:chgData name="Mohammed Fasha" userId="cc64f42d-a1a6-4f08-b97b-0c37f877119f" providerId="ADAL" clId="{1430C6B2-0695-4939-9A81-7D403BE3894B}" dt="2025-04-06T04:25:51.958" v="870" actId="948"/>
+          <ac:spMkLst>
+            <pc:docMk/>
+            <pc:sldMk cId="0" sldId="277"/>
+            <ac:spMk id="153" creationId="{00000000-0000-0000-0000-000000000000}"/>
+          </ac:spMkLst>
+        </pc:spChg>
+        <pc:graphicFrameChg chg="mod">
+          <ac:chgData name="Mohammed Fasha" userId="cc64f42d-a1a6-4f08-b97b-0c37f877119f" providerId="ADAL" clId="{1430C6B2-0695-4939-9A81-7D403BE3894B}" dt="2025-04-06T04:25:58.362" v="871" actId="1076"/>
+          <ac:graphicFrameMkLst>
+            <pc:docMk/>
+            <pc:sldMk cId="0" sldId="277"/>
+            <ac:graphicFrameMk id="154" creationId="{00000000-0000-0000-0000-000000000000}"/>
+          </ac:graphicFrameMkLst>
+        </pc:graphicFrameChg>
+        <pc:picChg chg="add mod">
+          <ac:chgData name="Mohammed Fasha" userId="cc64f42d-a1a6-4f08-b97b-0c37f877119f" providerId="ADAL" clId="{1430C6B2-0695-4939-9A81-7D403BE3894B}" dt="2025-04-06T04:23:30.931" v="818"/>
+          <ac:picMkLst>
+            <pc:docMk/>
+            <pc:sldMk cId="0" sldId="277"/>
+            <ac:picMk id="3" creationId="{12B2D59F-BB12-6EC1-7754-F99FB98DC6B1}"/>
+          </ac:picMkLst>
+        </pc:picChg>
+      </pc:sldChg>
+      <pc:sldChg chg="del">
+        <pc:chgData name="Mohammed Fasha" userId="cc64f42d-a1a6-4f08-b97b-0c37f877119f" providerId="ADAL" clId="{1430C6B2-0695-4939-9A81-7D403BE3894B}" dt="2025-04-06T04:26:43.308" v="872" actId="2696"/>
+        <pc:sldMkLst>
+          <pc:docMk/>
+          <pc:sldMk cId="0" sldId="279"/>
+        </pc:sldMkLst>
+      </pc:sldChg>
+      <pc:sldChg chg="add del">
+        <pc:chgData name="Mohammed Fasha" userId="cc64f42d-a1a6-4f08-b97b-0c37f877119f" providerId="ADAL" clId="{1430C6B2-0695-4939-9A81-7D403BE3894B}" dt="2025-04-06T04:27:46.978" v="903" actId="2696"/>
+        <pc:sldMkLst>
+          <pc:docMk/>
+          <pc:sldMk cId="2629794120" sldId="279"/>
+        </pc:sldMkLst>
+      </pc:sldChg>
+      <pc:sldChg chg="addSp delSp modSp mod modClrScheme chgLayout">
+        <pc:chgData name="Mohammed Fasha" userId="cc64f42d-a1a6-4f08-b97b-0c37f877119f" providerId="ADAL" clId="{1430C6B2-0695-4939-9A81-7D403BE3894B}" dt="2025-04-06T04:24:26.500" v="849" actId="122"/>
         <pc:sldMkLst>
           <pc:docMk/>
           <pc:sldMk cId="0" sldId="281"/>
         </pc:sldMkLst>
-        <pc:spChg chg="add mod">
-          <ac:chgData name="Mohammed Fasha" userId="cc64f42d-a1a6-4f08-b97b-0c37f877119f" providerId="ADAL" clId="{1430C6B2-0695-4939-9A81-7D403BE3894B}" dt="2025-04-03T03:24:44.757" v="3"/>
+        <pc:spChg chg="add del mod">
+          <ac:chgData name="Mohammed Fasha" userId="cc64f42d-a1a6-4f08-b97b-0c37f877119f" providerId="ADAL" clId="{1430C6B2-0695-4939-9A81-7D403BE3894B}" dt="2025-04-06T04:24:00.222" v="827" actId="478"/>
           <ac:spMkLst>
             <pc:docMk/>
             <pc:sldMk cId="0" sldId="281"/>
             <ac:spMk id="2" creationId="{F3E208A7-9D3D-C8FD-62BA-246574698579}"/>
           </ac:spMkLst>
         </pc:spChg>
+        <pc:spChg chg="add mod">
+          <ac:chgData name="Mohammed Fasha" userId="cc64f42d-a1a6-4f08-b97b-0c37f877119f" providerId="ADAL" clId="{1430C6B2-0695-4939-9A81-7D403BE3894B}" dt="2025-04-06T04:24:26.500" v="849" actId="122"/>
+          <ac:spMkLst>
+            <pc:docMk/>
+            <pc:sldMk cId="0" sldId="281"/>
+            <ac:spMk id="3" creationId="{7322A9D0-3D18-E1FF-3896-23ACCCD217FC}"/>
+          </ac:spMkLst>
+        </pc:spChg>
+        <pc:spChg chg="add del mod">
+          <ac:chgData name="Mohammed Fasha" userId="cc64f42d-a1a6-4f08-b97b-0c37f877119f" providerId="ADAL" clId="{1430C6B2-0695-4939-9A81-7D403BE3894B}" dt="2025-04-06T04:24:11.165" v="828" actId="700"/>
+          <ac:spMkLst>
+            <pc:docMk/>
+            <pc:sldMk cId="0" sldId="281"/>
+            <ac:spMk id="6" creationId="{50244078-DE8E-7D59-0D8C-B01FDB5F6DE3}"/>
+          </ac:spMkLst>
+        </pc:spChg>
+        <pc:spChg chg="mod ord">
+          <ac:chgData name="Mohammed Fasha" userId="cc64f42d-a1a6-4f08-b97b-0c37f877119f" providerId="ADAL" clId="{1430C6B2-0695-4939-9A81-7D403BE3894B}" dt="2025-04-06T04:24:11.165" v="828" actId="700"/>
+          <ac:spMkLst>
+            <pc:docMk/>
+            <pc:sldMk cId="0" sldId="281"/>
+            <ac:spMk id="161" creationId="{00000000-0000-0000-0000-000000000000}"/>
+          </ac:spMkLst>
+        </pc:spChg>
+        <pc:spChg chg="mod ord">
+          <ac:chgData name="Mohammed Fasha" userId="cc64f42d-a1a6-4f08-b97b-0c37f877119f" providerId="ADAL" clId="{1430C6B2-0695-4939-9A81-7D403BE3894B}" dt="2025-04-06T04:24:11.165" v="828" actId="700"/>
+          <ac:spMkLst>
+            <pc:docMk/>
+            <pc:sldMk cId="0" sldId="281"/>
+            <ac:spMk id="162" creationId="{00000000-0000-0000-0000-000000000000}"/>
+          </ac:spMkLst>
+        </pc:spChg>
+        <pc:picChg chg="add mod">
+          <ac:chgData name="Mohammed Fasha" userId="cc64f42d-a1a6-4f08-b97b-0c37f877119f" providerId="ADAL" clId="{1430C6B2-0695-4939-9A81-7D403BE3894B}" dt="2025-04-06T04:23:57.050" v="826"/>
+          <ac:picMkLst>
+            <pc:docMk/>
+            <pc:sldMk cId="0" sldId="281"/>
+            <ac:picMk id="4" creationId="{C1F36920-6CAD-70BE-C466-935BEA705640}"/>
+          </ac:picMkLst>
+        </pc:picChg>
+        <pc:picChg chg="del">
+          <ac:chgData name="Mohammed Fasha" userId="cc64f42d-a1a6-4f08-b97b-0c37f877119f" providerId="ADAL" clId="{1430C6B2-0695-4939-9A81-7D403BE3894B}" dt="2025-04-06T04:24:00.222" v="827" actId="478"/>
+          <ac:picMkLst>
+            <pc:docMk/>
+            <pc:sldMk cId="0" sldId="281"/>
+            <ac:picMk id="164" creationId="{00000000-0000-0000-0000-000000000000}"/>
+          </ac:picMkLst>
+        </pc:picChg>
         <pc:picChg chg="mod">
           <ac:chgData name="Mohammed Fasha" userId="cc64f42d-a1a6-4f08-b97b-0c37f877119f" providerId="ADAL" clId="{1430C6B2-0695-4939-9A81-7D403BE3894B}" dt="2025-04-03T03:22:32.423" v="2" actId="1076"/>
           <ac:picMkLst>
             <pc:docMk/>
             <pc:sldMk cId="0" sldId="281"/>
             <ac:picMk id="2050" creationId="{62F3EE30-1250-B624-2F54-4CC416515993}"/>
+          </ac:picMkLst>
+        </pc:picChg>
+      </pc:sldChg>
+      <pc:sldChg chg="new del">
+        <pc:chgData name="Mohammed Fasha" userId="cc64f42d-a1a6-4f08-b97b-0c37f877119f" providerId="ADAL" clId="{1430C6B2-0695-4939-9A81-7D403BE3894B}" dt="2025-04-06T02:57:40.858" v="105" actId="47"/>
+        <pc:sldMkLst>
+          <pc:docMk/>
+          <pc:sldMk cId="1751160689" sldId="296"/>
+        </pc:sldMkLst>
+      </pc:sldChg>
+      <pc:sldChg chg="add del">
+        <pc:chgData name="Mohammed Fasha" userId="cc64f42d-a1a6-4f08-b97b-0c37f877119f" providerId="ADAL" clId="{1430C6B2-0695-4939-9A81-7D403BE3894B}" dt="2025-04-06T03:05:17.178" v="107" actId="47"/>
+        <pc:sldMkLst>
+          <pc:docMk/>
+          <pc:sldMk cId="0" sldId="297"/>
+        </pc:sldMkLst>
+      </pc:sldChg>
+      <pc:sldChg chg="addSp delSp modSp add mod">
+        <pc:chgData name="Mohammed Fasha" userId="cc64f42d-a1a6-4f08-b97b-0c37f877119f" providerId="ADAL" clId="{1430C6B2-0695-4939-9A81-7D403BE3894B}" dt="2025-04-06T04:04:18.059" v="637" actId="14100"/>
+        <pc:sldMkLst>
+          <pc:docMk/>
+          <pc:sldMk cId="0" sldId="298"/>
+        </pc:sldMkLst>
+        <pc:spChg chg="mod">
+          <ac:chgData name="Mohammed Fasha" userId="cc64f42d-a1a6-4f08-b97b-0c37f877119f" providerId="ADAL" clId="{1430C6B2-0695-4939-9A81-7D403BE3894B}" dt="2025-04-06T03:05:15.222" v="106"/>
+          <ac:spMkLst>
+            <pc:docMk/>
+            <pc:sldMk cId="0" sldId="298"/>
+            <ac:spMk id="2" creationId="{00000000-0000-0000-0000-000000000000}"/>
+          </ac:spMkLst>
+        </pc:spChg>
+        <pc:spChg chg="mod">
+          <ac:chgData name="Mohammed Fasha" userId="cc64f42d-a1a6-4f08-b97b-0c37f877119f" providerId="ADAL" clId="{1430C6B2-0695-4939-9A81-7D403BE3894B}" dt="2025-04-06T03:05:54.921" v="115" actId="27636"/>
+          <ac:spMkLst>
+            <pc:docMk/>
+            <pc:sldMk cId="0" sldId="298"/>
+            <ac:spMk id="3" creationId="{00000000-0000-0000-0000-000000000000}"/>
+          </ac:spMkLst>
+        </pc:spChg>
+        <pc:spChg chg="add del mod">
+          <ac:chgData name="Mohammed Fasha" userId="cc64f42d-a1a6-4f08-b97b-0c37f877119f" providerId="ADAL" clId="{1430C6B2-0695-4939-9A81-7D403BE3894B}" dt="2025-04-06T03:43:25.151" v="344" actId="478"/>
+          <ac:spMkLst>
+            <pc:docMk/>
+            <pc:sldMk cId="0" sldId="298"/>
+            <ac:spMk id="9" creationId="{BF1C49D3-AB51-52FE-CD42-1D7CBB62DC29}"/>
+          </ac:spMkLst>
+        </pc:spChg>
+        <pc:spChg chg="add del mod">
+          <ac:chgData name="Mohammed Fasha" userId="cc64f42d-a1a6-4f08-b97b-0c37f877119f" providerId="ADAL" clId="{1430C6B2-0695-4939-9A81-7D403BE3894B}" dt="2025-04-06T03:43:21.260" v="341" actId="478"/>
+          <ac:spMkLst>
+            <pc:docMk/>
+            <pc:sldMk cId="0" sldId="298"/>
+            <ac:spMk id="10" creationId="{9188DB93-0884-0E87-6CCC-CF8AA25D502A}"/>
+          </ac:spMkLst>
+        </pc:spChg>
+        <pc:spChg chg="add del mod">
+          <ac:chgData name="Mohammed Fasha" userId="cc64f42d-a1a6-4f08-b97b-0c37f877119f" providerId="ADAL" clId="{1430C6B2-0695-4939-9A81-7D403BE3894B}" dt="2025-04-06T04:00:52.327" v="558" actId="478"/>
+          <ac:spMkLst>
+            <pc:docMk/>
+            <pc:sldMk cId="0" sldId="298"/>
+            <ac:spMk id="17" creationId="{E8E32B4B-4A1F-2C28-FA92-794823C343B9}"/>
+          </ac:spMkLst>
+        </pc:spChg>
+        <pc:spChg chg="add del mod">
+          <ac:chgData name="Mohammed Fasha" userId="cc64f42d-a1a6-4f08-b97b-0c37f877119f" providerId="ADAL" clId="{1430C6B2-0695-4939-9A81-7D403BE3894B}" dt="2025-04-06T03:43:23.486" v="343" actId="478"/>
+          <ac:spMkLst>
+            <pc:docMk/>
+            <pc:sldMk cId="0" sldId="298"/>
+            <ac:spMk id="19" creationId="{EF78452A-FEB2-847E-CEA3-A2E181033D0D}"/>
+          </ac:spMkLst>
+        </pc:spChg>
+        <pc:spChg chg="add del mod">
+          <ac:chgData name="Mohammed Fasha" userId="cc64f42d-a1a6-4f08-b97b-0c37f877119f" providerId="ADAL" clId="{1430C6B2-0695-4939-9A81-7D403BE3894B}" dt="2025-04-06T03:43:26.288" v="345" actId="478"/>
+          <ac:spMkLst>
+            <pc:docMk/>
+            <pc:sldMk cId="0" sldId="298"/>
+            <ac:spMk id="21" creationId="{21C0AE5A-7AE7-7BB3-629B-A8DA6C1BF438}"/>
+          </ac:spMkLst>
+        </pc:spChg>
+        <pc:spChg chg="add mod">
+          <ac:chgData name="Mohammed Fasha" userId="cc64f42d-a1a6-4f08-b97b-0c37f877119f" providerId="ADAL" clId="{1430C6B2-0695-4939-9A81-7D403BE3894B}" dt="2025-04-06T04:04:14.717" v="636" actId="1076"/>
+          <ac:spMkLst>
+            <pc:docMk/>
+            <pc:sldMk cId="0" sldId="298"/>
+            <ac:spMk id="36" creationId="{8A872414-729F-9E03-B477-BAABC9F887E1}"/>
+          </ac:spMkLst>
+        </pc:spChg>
+        <pc:spChg chg="add mod">
+          <ac:chgData name="Mohammed Fasha" userId="cc64f42d-a1a6-4f08-b97b-0c37f877119f" providerId="ADAL" clId="{1430C6B2-0695-4939-9A81-7D403BE3894B}" dt="2025-04-06T04:02:52.506" v="610"/>
+          <ac:spMkLst>
+            <pc:docMk/>
+            <pc:sldMk cId="0" sldId="298"/>
+            <ac:spMk id="37" creationId="{20BD6CB6-17EB-1B10-C421-A2DD8C4AC45D}"/>
+          </ac:spMkLst>
+        </pc:spChg>
+        <pc:graphicFrameChg chg="add del mod modGraphic">
+          <ac:chgData name="Mohammed Fasha" userId="cc64f42d-a1a6-4f08-b97b-0c37f877119f" providerId="ADAL" clId="{1430C6B2-0695-4939-9A81-7D403BE3894B}" dt="2025-04-06T04:01:31.073" v="575" actId="478"/>
+          <ac:graphicFrameMkLst>
+            <pc:docMk/>
+            <pc:sldMk cId="0" sldId="298"/>
+            <ac:graphicFrameMk id="22" creationId="{ECBDF53B-F6F0-3E15-F7EA-B36D7AC14043}"/>
+          </ac:graphicFrameMkLst>
+        </pc:graphicFrameChg>
+        <pc:picChg chg="add del mod">
+          <ac:chgData name="Mohammed Fasha" userId="cc64f42d-a1a6-4f08-b97b-0c37f877119f" providerId="ADAL" clId="{1430C6B2-0695-4939-9A81-7D403BE3894B}" dt="2025-04-06T03:43:22.142" v="342" actId="478"/>
+          <ac:picMkLst>
+            <pc:docMk/>
+            <pc:sldMk cId="0" sldId="298"/>
+            <ac:picMk id="15" creationId="{8BC5E033-71BE-62C1-7B2A-FC92726EF751}"/>
+          </ac:picMkLst>
+        </pc:picChg>
+        <pc:picChg chg="add del mod">
+          <ac:chgData name="Mohammed Fasha" userId="cc64f42d-a1a6-4f08-b97b-0c37f877119f" providerId="ADAL" clId="{1430C6B2-0695-4939-9A81-7D403BE3894B}" dt="2025-04-06T03:54:10.319" v="480" actId="478"/>
+          <ac:picMkLst>
+            <pc:docMk/>
+            <pc:sldMk cId="0" sldId="298"/>
+            <ac:picMk id="24" creationId="{AE2F3EE9-92C5-4097-10F9-C9D7C35143DB}"/>
+          </ac:picMkLst>
+        </pc:picChg>
+        <pc:picChg chg="add del mod">
+          <ac:chgData name="Mohammed Fasha" userId="cc64f42d-a1a6-4f08-b97b-0c37f877119f" providerId="ADAL" clId="{1430C6B2-0695-4939-9A81-7D403BE3894B}" dt="2025-04-06T03:54:10.741" v="481" actId="478"/>
+          <ac:picMkLst>
+            <pc:docMk/>
+            <pc:sldMk cId="0" sldId="298"/>
+            <ac:picMk id="26" creationId="{62C2CF5A-FA8B-23CE-7FD6-BAB8AAEFF1E7}"/>
+          </ac:picMkLst>
+        </pc:picChg>
+        <pc:picChg chg="add del mod">
+          <ac:chgData name="Mohammed Fasha" userId="cc64f42d-a1a6-4f08-b97b-0c37f877119f" providerId="ADAL" clId="{1430C6B2-0695-4939-9A81-7D403BE3894B}" dt="2025-04-06T04:01:31.975" v="576" actId="478"/>
+          <ac:picMkLst>
+            <pc:docMk/>
+            <pc:sldMk cId="0" sldId="298"/>
+            <ac:picMk id="28" creationId="{42FED3E9-9B26-3AD8-D893-8698E513D1B0}"/>
+          </ac:picMkLst>
+        </pc:picChg>
+        <pc:picChg chg="add del mod">
+          <ac:chgData name="Mohammed Fasha" userId="cc64f42d-a1a6-4f08-b97b-0c37f877119f" providerId="ADAL" clId="{1430C6B2-0695-4939-9A81-7D403BE3894B}" dt="2025-04-06T04:00:52.600" v="566" actId="21"/>
+          <ac:picMkLst>
+            <pc:docMk/>
+            <pc:sldMk cId="0" sldId="298"/>
+            <ac:picMk id="30" creationId="{BBCDC69E-5848-BC97-BC87-C60F8416C402}"/>
+          </ac:picMkLst>
+        </pc:picChg>
+        <pc:picChg chg="add del mod">
+          <ac:chgData name="Mohammed Fasha" userId="cc64f42d-a1a6-4f08-b97b-0c37f877119f" providerId="ADAL" clId="{1430C6B2-0695-4939-9A81-7D403BE3894B}" dt="2025-04-06T04:00:52.666" v="568" actId="14100"/>
+          <ac:picMkLst>
+            <pc:docMk/>
+            <pc:sldMk cId="0" sldId="298"/>
+            <ac:picMk id="32" creationId="{D4E70C0B-CB58-ABE7-5B5E-0B4085ED8903}"/>
+          </ac:picMkLst>
+        </pc:picChg>
+        <pc:picChg chg="add del mod">
+          <ac:chgData name="Mohammed Fasha" userId="cc64f42d-a1a6-4f08-b97b-0c37f877119f" providerId="ADAL" clId="{1430C6B2-0695-4939-9A81-7D403BE3894B}" dt="2025-04-06T03:43:16.811" v="338" actId="478"/>
+          <ac:picMkLst>
+            <pc:docMk/>
+            <pc:sldMk cId="0" sldId="298"/>
+            <ac:picMk id="1026" creationId="{D90B3094-14CC-B8F6-2571-3048767F0E27}"/>
+          </ac:picMkLst>
+        </pc:picChg>
+        <pc:picChg chg="add mod">
+          <ac:chgData name="Mohammed Fasha" userId="cc64f42d-a1a6-4f08-b97b-0c37f877119f" providerId="ADAL" clId="{1430C6B2-0695-4939-9A81-7D403BE3894B}" dt="2025-04-06T04:01:52.879" v="581" actId="1076"/>
+          <ac:picMkLst>
+            <pc:docMk/>
+            <pc:sldMk cId="0" sldId="298"/>
+            <ac:picMk id="1028" creationId="{974A0B8E-89DD-B734-C25D-CBAC00E08EDD}"/>
+          </ac:picMkLst>
+        </pc:picChg>
+        <pc:cxnChg chg="add mod">
+          <ac:chgData name="Mohammed Fasha" userId="cc64f42d-a1a6-4f08-b97b-0c37f877119f" providerId="ADAL" clId="{1430C6B2-0695-4939-9A81-7D403BE3894B}" dt="2025-04-06T02:50:18.372" v="34" actId="11529"/>
+          <ac:cxnSpMkLst>
+            <pc:docMk/>
+            <pc:sldMk cId="0" sldId="298"/>
+            <ac:cxnSpMk id="5" creationId="{28788DE7-3693-C70C-B93C-60A1888D03D2}"/>
+          </ac:cxnSpMkLst>
+        </pc:cxnChg>
+        <pc:cxnChg chg="add del mod">
+          <ac:chgData name="Mohammed Fasha" userId="cc64f42d-a1a6-4f08-b97b-0c37f877119f" providerId="ADAL" clId="{1430C6B2-0695-4939-9A81-7D403BE3894B}" dt="2025-04-06T03:43:18.459" v="339" actId="478"/>
+          <ac:cxnSpMkLst>
+            <pc:docMk/>
+            <pc:sldMk cId="0" sldId="298"/>
+            <ac:cxnSpMk id="7" creationId="{F2FB1721-316B-2BD4-8B07-946FF3A96A1A}"/>
+          </ac:cxnSpMkLst>
+        </pc:cxnChg>
+        <pc:cxnChg chg="add del mod">
+          <ac:chgData name="Mohammed Fasha" userId="cc64f42d-a1a6-4f08-b97b-0c37f877119f" providerId="ADAL" clId="{1430C6B2-0695-4939-9A81-7D403BE3894B}" dt="2025-04-06T03:43:19.577" v="340" actId="478"/>
+          <ac:cxnSpMkLst>
+            <pc:docMk/>
+            <pc:sldMk cId="0" sldId="298"/>
+            <ac:cxnSpMk id="11" creationId="{1A2205F4-FEC4-AAD7-55A1-4CC392654425}"/>
+          </ac:cxnSpMkLst>
+        </pc:cxnChg>
+        <pc:cxnChg chg="add mod">
+          <ac:chgData name="Mohammed Fasha" userId="cc64f42d-a1a6-4f08-b97b-0c37f877119f" providerId="ADAL" clId="{1430C6B2-0695-4939-9A81-7D403BE3894B}" dt="2025-04-06T04:03:11.548" v="617" actId="14100"/>
+          <ac:cxnSpMkLst>
+            <pc:docMk/>
+            <pc:sldMk cId="0" sldId="298"/>
+            <ac:cxnSpMk id="34" creationId="{F314804B-B785-97DA-92C0-0F635BD5F896}"/>
+          </ac:cxnSpMkLst>
+        </pc:cxnChg>
+        <pc:cxnChg chg="add mod">
+          <ac:chgData name="Mohammed Fasha" userId="cc64f42d-a1a6-4f08-b97b-0c37f877119f" providerId="ADAL" clId="{1430C6B2-0695-4939-9A81-7D403BE3894B}" dt="2025-04-06T04:04:18.059" v="637" actId="14100"/>
+          <ac:cxnSpMkLst>
+            <pc:docMk/>
+            <pc:sldMk cId="0" sldId="298"/>
+            <ac:cxnSpMk id="39" creationId="{B977B6F6-7628-93C6-1CCA-377325D2C96B}"/>
+          </ac:cxnSpMkLst>
+        </pc:cxnChg>
+        <pc:cxnChg chg="add del mod">
+          <ac:chgData name="Mohammed Fasha" userId="cc64f42d-a1a6-4f08-b97b-0c37f877119f" providerId="ADAL" clId="{1430C6B2-0695-4939-9A81-7D403BE3894B}" dt="2025-04-06T04:03:59.863" v="632" actId="11529"/>
+          <ac:cxnSpMkLst>
+            <pc:docMk/>
+            <pc:sldMk cId="0" sldId="298"/>
+            <ac:cxnSpMk id="43" creationId="{420FC466-2708-F1AC-9CBB-C186860CBA73}"/>
+          </ac:cxnSpMkLst>
+        </pc:cxnChg>
+      </pc:sldChg>
+      <pc:sldChg chg="modSp add mod">
+        <pc:chgData name="Mohammed Fasha" userId="cc64f42d-a1a6-4f08-b97b-0c37f877119f" providerId="ADAL" clId="{1430C6B2-0695-4939-9A81-7D403BE3894B}" dt="2025-04-06T02:49:07.784" v="32" actId="207"/>
+        <pc:sldMkLst>
+          <pc:docMk/>
+          <pc:sldMk cId="0" sldId="299"/>
+        </pc:sldMkLst>
+        <pc:spChg chg="mod">
+          <ac:chgData name="Mohammed Fasha" userId="cc64f42d-a1a6-4f08-b97b-0c37f877119f" providerId="ADAL" clId="{1430C6B2-0695-4939-9A81-7D403BE3894B}" dt="2025-04-06T02:49:07.784" v="32" actId="207"/>
+          <ac:spMkLst>
+            <pc:docMk/>
+            <pc:sldMk cId="0" sldId="299"/>
+            <ac:spMk id="3" creationId="{00000000-0000-0000-0000-000000000000}"/>
+          </ac:spMkLst>
+        </pc:spChg>
+      </pc:sldChg>
+      <pc:sldChg chg="modSp add mod">
+        <pc:chgData name="Mohammed Fasha" userId="cc64f42d-a1a6-4f08-b97b-0c37f877119f" providerId="ADAL" clId="{1430C6B2-0695-4939-9A81-7D403BE3894B}" dt="2025-04-06T03:06:14.458" v="117" actId="5793"/>
+        <pc:sldMkLst>
+          <pc:docMk/>
+          <pc:sldMk cId="0" sldId="300"/>
+        </pc:sldMkLst>
+        <pc:spChg chg="mod">
+          <ac:chgData name="Mohammed Fasha" userId="cc64f42d-a1a6-4f08-b97b-0c37f877119f" providerId="ADAL" clId="{1430C6B2-0695-4939-9A81-7D403BE3894B}" dt="2025-04-06T03:06:14.458" v="117" actId="5793"/>
+          <ac:spMkLst>
+            <pc:docMk/>
+            <pc:sldMk cId="0" sldId="300"/>
+            <ac:spMk id="3" creationId="{00000000-0000-0000-0000-000000000000}"/>
+          </ac:spMkLst>
+        </pc:spChg>
+      </pc:sldChg>
+      <pc:sldChg chg="addSp delSp modSp add mod">
+        <pc:chgData name="Mohammed Fasha" userId="cc64f42d-a1a6-4f08-b97b-0c37f877119f" providerId="ADAL" clId="{1430C6B2-0695-4939-9A81-7D403BE3894B}" dt="2025-04-06T03:09:29.653" v="151" actId="1076"/>
+        <pc:sldMkLst>
+          <pc:docMk/>
+          <pc:sldMk cId="0" sldId="301"/>
+        </pc:sldMkLst>
+        <pc:spChg chg="mod">
+          <ac:chgData name="Mohammed Fasha" userId="cc64f42d-a1a6-4f08-b97b-0c37f877119f" providerId="ADAL" clId="{1430C6B2-0695-4939-9A81-7D403BE3894B}" dt="2025-04-06T03:07:12.307" v="120" actId="14100"/>
+          <ac:spMkLst>
+            <pc:docMk/>
+            <pc:sldMk cId="0" sldId="301"/>
+            <ac:spMk id="3" creationId="{00000000-0000-0000-0000-000000000000}"/>
+          </ac:spMkLst>
+        </pc:spChg>
+        <pc:spChg chg="add del mod">
+          <ac:chgData name="Mohammed Fasha" userId="cc64f42d-a1a6-4f08-b97b-0c37f877119f" providerId="ADAL" clId="{1430C6B2-0695-4939-9A81-7D403BE3894B}" dt="2025-04-06T03:08:51.701" v="142" actId="478"/>
+          <ac:spMkLst>
+            <pc:docMk/>
+            <pc:sldMk cId="0" sldId="301"/>
+            <ac:spMk id="5" creationId="{9B1F7FA5-2A7B-819D-25CE-3A87F91D9B79}"/>
+          </ac:spMkLst>
+        </pc:spChg>
+        <pc:spChg chg="add mod">
+          <ac:chgData name="Mohammed Fasha" userId="cc64f42d-a1a6-4f08-b97b-0c37f877119f" providerId="ADAL" clId="{1430C6B2-0695-4939-9A81-7D403BE3894B}" dt="2025-04-06T03:08:01.400" v="131"/>
+          <ac:spMkLst>
+            <pc:docMk/>
+            <pc:sldMk cId="0" sldId="301"/>
+            <ac:spMk id="7" creationId="{4C10014B-4295-96D8-228C-AD3A1860D128}"/>
+          </ac:spMkLst>
+        </pc:spChg>
+        <pc:graphicFrameChg chg="add mod">
+          <ac:chgData name="Mohammed Fasha" userId="cc64f42d-a1a6-4f08-b97b-0c37f877119f" providerId="ADAL" clId="{1430C6B2-0695-4939-9A81-7D403BE3894B}" dt="2025-04-06T03:07:57.018" v="130"/>
+          <ac:graphicFrameMkLst>
+            <pc:docMk/>
+            <pc:sldMk cId="0" sldId="301"/>
+            <ac:graphicFrameMk id="6" creationId="{5E805BF9-A5DE-4441-9608-983B6749EEBB}"/>
+          </ac:graphicFrameMkLst>
+        </pc:graphicFrameChg>
+        <pc:graphicFrameChg chg="add mod modGraphic">
+          <ac:chgData name="Mohammed Fasha" userId="cc64f42d-a1a6-4f08-b97b-0c37f877119f" providerId="ADAL" clId="{1430C6B2-0695-4939-9A81-7D403BE3894B}" dt="2025-04-06T03:09:29.653" v="151" actId="1076"/>
+          <ac:graphicFrameMkLst>
+            <pc:docMk/>
+            <pc:sldMk cId="0" sldId="301"/>
+            <ac:graphicFrameMk id="8" creationId="{BF509A1C-22C8-318A-67E2-B4F741CEEA6A}"/>
+          </ac:graphicFrameMkLst>
+        </pc:graphicFrameChg>
+      </pc:sldChg>
+      <pc:sldChg chg="modSp add mod">
+        <pc:chgData name="Mohammed Fasha" userId="cc64f42d-a1a6-4f08-b97b-0c37f877119f" providerId="ADAL" clId="{1430C6B2-0695-4939-9A81-7D403BE3894B}" dt="2025-04-06T03:09:43.145" v="153" actId="5793"/>
+        <pc:sldMkLst>
+          <pc:docMk/>
+          <pc:sldMk cId="0" sldId="302"/>
+        </pc:sldMkLst>
+        <pc:spChg chg="mod">
+          <ac:chgData name="Mohammed Fasha" userId="cc64f42d-a1a6-4f08-b97b-0c37f877119f" providerId="ADAL" clId="{1430C6B2-0695-4939-9A81-7D403BE3894B}" dt="2025-04-06T03:09:43.145" v="153" actId="5793"/>
+          <ac:spMkLst>
+            <pc:docMk/>
+            <pc:sldMk cId="0" sldId="302"/>
+            <ac:spMk id="3" creationId="{00000000-0000-0000-0000-000000000000}"/>
+          </ac:spMkLst>
+        </pc:spChg>
+      </pc:sldChg>
+      <pc:sldChg chg="addSp delSp modSp add mod">
+        <pc:chgData name="Mohammed Fasha" userId="cc64f42d-a1a6-4f08-b97b-0c37f877119f" providerId="ADAL" clId="{1430C6B2-0695-4939-9A81-7D403BE3894B}" dt="2025-04-06T04:09:38.503" v="657" actId="1076"/>
+        <pc:sldMkLst>
+          <pc:docMk/>
+          <pc:sldMk cId="0" sldId="303"/>
+        </pc:sldMkLst>
+        <pc:spChg chg="add del mod">
+          <ac:chgData name="Mohammed Fasha" userId="cc64f42d-a1a6-4f08-b97b-0c37f877119f" providerId="ADAL" clId="{1430C6B2-0695-4939-9A81-7D403BE3894B}" dt="2025-04-06T03:14:32.635" v="174" actId="478"/>
+          <ac:spMkLst>
+            <pc:docMk/>
+            <pc:sldMk cId="0" sldId="303"/>
+            <ac:spMk id="3" creationId="{00000000-0000-0000-0000-000000000000}"/>
+          </ac:spMkLst>
+        </pc:spChg>
+        <pc:spChg chg="add del mod">
+          <ac:chgData name="Mohammed Fasha" userId="cc64f42d-a1a6-4f08-b97b-0c37f877119f" providerId="ADAL" clId="{1430C6B2-0695-4939-9A81-7D403BE3894B}" dt="2025-04-06T03:13:36.459" v="167" actId="478"/>
+          <ac:spMkLst>
+            <pc:docMk/>
+            <pc:sldMk cId="0" sldId="303"/>
+            <ac:spMk id="5" creationId="{5E45DA4A-AE2D-F776-BC09-2B28E22C2E11}"/>
+          </ac:spMkLst>
+        </pc:spChg>
+        <pc:spChg chg="add del mod">
+          <ac:chgData name="Mohammed Fasha" userId="cc64f42d-a1a6-4f08-b97b-0c37f877119f" providerId="ADAL" clId="{1430C6B2-0695-4939-9A81-7D403BE3894B}" dt="2025-04-06T03:14:52.359" v="178" actId="22"/>
+          <ac:spMkLst>
+            <pc:docMk/>
+            <pc:sldMk cId="0" sldId="303"/>
+            <ac:spMk id="15" creationId="{308F0E32-B23C-BEC6-0CD8-FDC9149AAB75}"/>
+          </ac:spMkLst>
+        </pc:spChg>
+        <pc:picChg chg="add del mod ord">
+          <ac:chgData name="Mohammed Fasha" userId="cc64f42d-a1a6-4f08-b97b-0c37f877119f" providerId="ADAL" clId="{1430C6B2-0695-4939-9A81-7D403BE3894B}" dt="2025-04-06T03:11:58.603" v="158" actId="22"/>
+          <ac:picMkLst>
+            <pc:docMk/>
+            <pc:sldMk cId="0" sldId="303"/>
+            <ac:picMk id="7" creationId="{E18A42F6-9EFD-4885-B3B8-193BEFB5B0C0}"/>
+          </ac:picMkLst>
+        </pc:picChg>
+        <pc:picChg chg="add del mod ord">
+          <ac:chgData name="Mohammed Fasha" userId="cc64f42d-a1a6-4f08-b97b-0c37f877119f" providerId="ADAL" clId="{1430C6B2-0695-4939-9A81-7D403BE3894B}" dt="2025-04-06T03:12:10.943" v="164" actId="22"/>
+          <ac:picMkLst>
+            <pc:docMk/>
+            <pc:sldMk cId="0" sldId="303"/>
+            <ac:picMk id="9" creationId="{CB9CEB62-57BC-21B3-21F8-45F0CA3DB980}"/>
+          </ac:picMkLst>
+        </pc:picChg>
+        <pc:picChg chg="add del mod ord">
+          <ac:chgData name="Mohammed Fasha" userId="cc64f42d-a1a6-4f08-b97b-0c37f877119f" providerId="ADAL" clId="{1430C6B2-0695-4939-9A81-7D403BE3894B}" dt="2025-04-06T03:13:36.191" v="166" actId="22"/>
+          <ac:picMkLst>
+            <pc:docMk/>
+            <pc:sldMk cId="0" sldId="303"/>
+            <ac:picMk id="11" creationId="{69DC0A5F-4CE6-86BA-9CDE-3EAA9DFDFB5B}"/>
+          </ac:picMkLst>
+        </pc:picChg>
+        <pc:picChg chg="add del mod">
+          <ac:chgData name="Mohammed Fasha" userId="cc64f42d-a1a6-4f08-b97b-0c37f877119f" providerId="ADAL" clId="{1430C6B2-0695-4939-9A81-7D403BE3894B}" dt="2025-04-06T03:14:37.237" v="176" actId="478"/>
+          <ac:picMkLst>
+            <pc:docMk/>
+            <pc:sldMk cId="0" sldId="303"/>
+            <ac:picMk id="13" creationId="{4D8811F4-881A-AB33-725E-15BF45AECD46}"/>
+          </ac:picMkLst>
+        </pc:picChg>
+        <pc:picChg chg="add mod ord">
+          <ac:chgData name="Mohammed Fasha" userId="cc64f42d-a1a6-4f08-b97b-0c37f877119f" providerId="ADAL" clId="{1430C6B2-0695-4939-9A81-7D403BE3894B}" dt="2025-04-06T04:09:38.503" v="657" actId="1076"/>
+          <ac:picMkLst>
+            <pc:docMk/>
+            <pc:sldMk cId="0" sldId="303"/>
+            <ac:picMk id="17" creationId="{7E184D5F-AB91-4FC3-B4FD-043A5C589982}"/>
+          </ac:picMkLst>
+        </pc:picChg>
+      </pc:sldChg>
+      <pc:sldChg chg="addSp delSp modSp add mod">
+        <pc:chgData name="Mohammed Fasha" userId="cc64f42d-a1a6-4f08-b97b-0c37f877119f" providerId="ADAL" clId="{1430C6B2-0695-4939-9A81-7D403BE3894B}" dt="2025-04-06T03:16:28.440" v="183" actId="1076"/>
+        <pc:sldMkLst>
+          <pc:docMk/>
+          <pc:sldMk cId="0" sldId="304"/>
+        </pc:sldMkLst>
+        <pc:spChg chg="del mod">
+          <ac:chgData name="Mohammed Fasha" userId="cc64f42d-a1a6-4f08-b97b-0c37f877119f" providerId="ADAL" clId="{1430C6B2-0695-4939-9A81-7D403BE3894B}" dt="2025-04-06T03:14:22.095" v="172" actId="478"/>
+          <ac:spMkLst>
+            <pc:docMk/>
+            <pc:sldMk cId="0" sldId="304"/>
+            <ac:spMk id="3" creationId="{00000000-0000-0000-0000-000000000000}"/>
+          </ac:spMkLst>
+        </pc:spChg>
+        <pc:spChg chg="add del mod">
+          <ac:chgData name="Mohammed Fasha" userId="cc64f42d-a1a6-4f08-b97b-0c37f877119f" providerId="ADAL" clId="{1430C6B2-0695-4939-9A81-7D403BE3894B}" dt="2025-04-06T03:14:24.322" v="173" actId="22"/>
+          <ac:spMkLst>
+            <pc:docMk/>
+            <pc:sldMk cId="0" sldId="304"/>
+            <ac:spMk id="5" creationId="{32B7B2C7-2967-CD2D-CCC4-88DCFB4CE86C}"/>
+          </ac:spMkLst>
+        </pc:spChg>
+        <pc:picChg chg="add mod ord">
+          <ac:chgData name="Mohammed Fasha" userId="cc64f42d-a1a6-4f08-b97b-0c37f877119f" providerId="ADAL" clId="{1430C6B2-0695-4939-9A81-7D403BE3894B}" dt="2025-04-06T03:16:28.440" v="183" actId="1076"/>
+          <ac:picMkLst>
+            <pc:docMk/>
+            <pc:sldMk cId="0" sldId="304"/>
+            <ac:picMk id="7" creationId="{CA11F557-4092-5303-C3E7-245686D24A6B}"/>
+          </ac:picMkLst>
+        </pc:picChg>
+      </pc:sldChg>
+      <pc:sldChg chg="addSp delSp modSp add mod">
+        <pc:chgData name="Mohammed Fasha" userId="cc64f42d-a1a6-4f08-b97b-0c37f877119f" providerId="ADAL" clId="{1430C6B2-0695-4939-9A81-7D403BE3894B}" dt="2025-04-06T03:16:35.636" v="185" actId="1076"/>
+        <pc:sldMkLst>
+          <pc:docMk/>
+          <pc:sldMk cId="0" sldId="305"/>
+        </pc:sldMkLst>
+        <pc:spChg chg="del mod">
+          <ac:chgData name="Mohammed Fasha" userId="cc64f42d-a1a6-4f08-b97b-0c37f877119f" providerId="ADAL" clId="{1430C6B2-0695-4939-9A81-7D403BE3894B}" dt="2025-04-06T03:15:31.854" v="179" actId="478"/>
+          <ac:spMkLst>
+            <pc:docMk/>
+            <pc:sldMk cId="0" sldId="305"/>
+            <ac:spMk id="3" creationId="{00000000-0000-0000-0000-000000000000}"/>
+          </ac:spMkLst>
+        </pc:spChg>
+        <pc:spChg chg="add del mod">
+          <ac:chgData name="Mohammed Fasha" userId="cc64f42d-a1a6-4f08-b97b-0c37f877119f" providerId="ADAL" clId="{1430C6B2-0695-4939-9A81-7D403BE3894B}" dt="2025-04-06T03:15:33.437" v="180" actId="22"/>
+          <ac:spMkLst>
+            <pc:docMk/>
+            <pc:sldMk cId="0" sldId="305"/>
+            <ac:spMk id="5" creationId="{79D88F59-7758-403B-6D74-113A4AC520F3}"/>
+          </ac:spMkLst>
+        </pc:spChg>
+        <pc:picChg chg="add mod ord">
+          <ac:chgData name="Mohammed Fasha" userId="cc64f42d-a1a6-4f08-b97b-0c37f877119f" providerId="ADAL" clId="{1430C6B2-0695-4939-9A81-7D403BE3894B}" dt="2025-04-06T03:16:35.636" v="185" actId="1076"/>
+          <ac:picMkLst>
+            <pc:docMk/>
+            <pc:sldMk cId="0" sldId="305"/>
+            <ac:picMk id="7" creationId="{C161519D-5871-0665-567B-918E90876D30}"/>
+          </ac:picMkLst>
+        </pc:picChg>
+      </pc:sldChg>
+      <pc:sldChg chg="addSp delSp modSp add mod">
+        <pc:chgData name="Mohammed Fasha" userId="cc64f42d-a1a6-4f08-b97b-0c37f877119f" providerId="ADAL" clId="{1430C6B2-0695-4939-9A81-7D403BE3894B}" dt="2025-04-06T03:17:06.488" v="191" actId="1076"/>
+        <pc:sldMkLst>
+          <pc:docMk/>
+          <pc:sldMk cId="0" sldId="306"/>
+        </pc:sldMkLst>
+        <pc:spChg chg="add del mod">
+          <ac:chgData name="Mohammed Fasha" userId="cc64f42d-a1a6-4f08-b97b-0c37f877119f" providerId="ADAL" clId="{1430C6B2-0695-4939-9A81-7D403BE3894B}" dt="2025-04-06T03:17:01.446" v="188" actId="478"/>
+          <ac:spMkLst>
+            <pc:docMk/>
+            <pc:sldMk cId="0" sldId="306"/>
+            <ac:spMk id="3" creationId="{00000000-0000-0000-0000-000000000000}"/>
+          </ac:spMkLst>
+        </pc:spChg>
+        <pc:spChg chg="add del mod">
+          <ac:chgData name="Mohammed Fasha" userId="cc64f42d-a1a6-4f08-b97b-0c37f877119f" providerId="ADAL" clId="{1430C6B2-0695-4939-9A81-7D403BE3894B}" dt="2025-04-06T03:16:59.503" v="187" actId="478"/>
+          <ac:spMkLst>
+            <pc:docMk/>
+            <pc:sldMk cId="0" sldId="306"/>
+            <ac:spMk id="5" creationId="{4427958B-45FE-6D08-A0CB-9AA1B13E0E3E}"/>
+          </ac:spMkLst>
+        </pc:spChg>
+        <pc:spChg chg="add del mod">
+          <ac:chgData name="Mohammed Fasha" userId="cc64f42d-a1a6-4f08-b97b-0c37f877119f" providerId="ADAL" clId="{1430C6B2-0695-4939-9A81-7D403BE3894B}" dt="2025-04-06T03:17:02.943" v="189" actId="22"/>
+          <ac:spMkLst>
+            <pc:docMk/>
+            <pc:sldMk cId="0" sldId="306"/>
+            <ac:spMk id="7" creationId="{ED88EDAB-5A62-C409-E76C-84016BE6969B}"/>
+          </ac:spMkLst>
+        </pc:spChg>
+        <pc:picChg chg="add mod ord">
+          <ac:chgData name="Mohammed Fasha" userId="cc64f42d-a1a6-4f08-b97b-0c37f877119f" providerId="ADAL" clId="{1430C6B2-0695-4939-9A81-7D403BE3894B}" dt="2025-04-06T03:17:06.488" v="191" actId="1076"/>
+          <ac:picMkLst>
+            <pc:docMk/>
+            <pc:sldMk cId="0" sldId="306"/>
+            <ac:picMk id="9" creationId="{F6DB4D3B-209A-3F7B-B0C5-EDC2EC27C070}"/>
+          </ac:picMkLst>
+        </pc:picChg>
+      </pc:sldChg>
+      <pc:sldChg chg="modSp add del mod">
+        <pc:chgData name="Mohammed Fasha" userId="cc64f42d-a1a6-4f08-b97b-0c37f877119f" providerId="ADAL" clId="{1430C6B2-0695-4939-9A81-7D403BE3894B}" dt="2025-04-06T03:17:10.927" v="192" actId="2696"/>
+        <pc:sldMkLst>
+          <pc:docMk/>
+          <pc:sldMk cId="0" sldId="307"/>
+        </pc:sldMkLst>
+        <pc:spChg chg="mod">
+          <ac:chgData name="Mohammed Fasha" userId="cc64f42d-a1a6-4f08-b97b-0c37f877119f" providerId="ADAL" clId="{1430C6B2-0695-4939-9A81-7D403BE3894B}" dt="2025-04-06T02:57:24.481" v="100" actId="20577"/>
+          <ac:spMkLst>
+            <pc:docMk/>
+            <pc:sldMk cId="0" sldId="307"/>
+            <ac:spMk id="3" creationId="{00000000-0000-0000-0000-000000000000}"/>
+          </ac:spMkLst>
+        </pc:spChg>
+      </pc:sldChg>
+      <pc:sldChg chg="addSp delSp modSp add mod">
+        <pc:chgData name="Mohammed Fasha" userId="cc64f42d-a1a6-4f08-b97b-0c37f877119f" providerId="ADAL" clId="{1430C6B2-0695-4939-9A81-7D403BE3894B}" dt="2025-04-06T04:08:17.019" v="656" actId="1076"/>
+        <pc:sldMkLst>
+          <pc:docMk/>
+          <pc:sldMk cId="566407149" sldId="307"/>
+        </pc:sldMkLst>
+        <pc:spChg chg="del">
+          <ac:chgData name="Mohammed Fasha" userId="cc64f42d-a1a6-4f08-b97b-0c37f877119f" providerId="ADAL" clId="{1430C6B2-0695-4939-9A81-7D403BE3894B}" dt="2025-04-06T04:01:05.657" v="571" actId="21"/>
+          <ac:spMkLst>
+            <pc:docMk/>
+            <pc:sldMk cId="566407149" sldId="307"/>
+            <ac:spMk id="3" creationId="{C2C9FBEA-1DC7-7AC8-4035-11136361261D}"/>
+          </ac:spMkLst>
+        </pc:spChg>
+        <pc:spChg chg="add del mod">
+          <ac:chgData name="Mohammed Fasha" userId="cc64f42d-a1a6-4f08-b97b-0c37f877119f" providerId="ADAL" clId="{1430C6B2-0695-4939-9A81-7D403BE3894B}" dt="2025-04-06T04:01:18.274" v="572" actId="22"/>
+          <ac:spMkLst>
+            <pc:docMk/>
+            <pc:sldMk cId="566407149" sldId="307"/>
+            <ac:spMk id="5" creationId="{7C34EF74-ABDF-C5B4-A5E1-F91BAC3168BE}"/>
+          </ac:spMkLst>
+        </pc:spChg>
+        <pc:picChg chg="add mod ord">
+          <ac:chgData name="Mohammed Fasha" userId="cc64f42d-a1a6-4f08-b97b-0c37f877119f" providerId="ADAL" clId="{1430C6B2-0695-4939-9A81-7D403BE3894B}" dt="2025-04-06T04:01:25.568" v="574" actId="1076"/>
+          <ac:picMkLst>
+            <pc:docMk/>
+            <pc:sldMk cId="566407149" sldId="307"/>
+            <ac:picMk id="7" creationId="{52F9A5DE-4DA5-02A4-E05C-513BE84CC55D}"/>
+          </ac:picMkLst>
+        </pc:picChg>
+        <pc:picChg chg="add mod">
+          <ac:chgData name="Mohammed Fasha" userId="cc64f42d-a1a6-4f08-b97b-0c37f877119f" providerId="ADAL" clId="{1430C6B2-0695-4939-9A81-7D403BE3894B}" dt="2025-04-06T04:08:17.019" v="656" actId="1076"/>
+          <ac:picMkLst>
+            <pc:docMk/>
+            <pc:sldMk cId="566407149" sldId="307"/>
+            <ac:picMk id="9" creationId="{A97FD6D9-93B3-C33B-BA1A-25EAA798FBF7}"/>
+          </ac:picMkLst>
+        </pc:picChg>
+        <pc:picChg chg="add mod">
+          <ac:chgData name="Mohammed Fasha" userId="cc64f42d-a1a6-4f08-b97b-0c37f877119f" providerId="ADAL" clId="{1430C6B2-0695-4939-9A81-7D403BE3894B}" dt="2025-04-06T04:08:08.555" v="652" actId="1076"/>
+          <ac:picMkLst>
+            <pc:docMk/>
+            <pc:sldMk cId="566407149" sldId="307"/>
+            <ac:picMk id="11" creationId="{0402BC08-439D-17A5-DBFC-F0D1CA4DBB8D}"/>
+          </ac:picMkLst>
+        </pc:picChg>
+        <pc:picChg chg="del mod">
+          <ac:chgData name="Mohammed Fasha" userId="cc64f42d-a1a6-4f08-b97b-0c37f877119f" providerId="ADAL" clId="{1430C6B2-0695-4939-9A81-7D403BE3894B}" dt="2025-04-06T04:08:01.772" v="649" actId="478"/>
+          <ac:picMkLst>
+            <pc:docMk/>
+            <pc:sldMk cId="566407149" sldId="307"/>
+            <ac:picMk id="28" creationId="{52C53B5C-821D-E045-632E-9DBBE5B7E0D8}"/>
+          </ac:picMkLst>
+        </pc:picChg>
+        <pc:picChg chg="del">
+          <ac:chgData name="Mohammed Fasha" userId="cc64f42d-a1a6-4f08-b97b-0c37f877119f" providerId="ADAL" clId="{1430C6B2-0695-4939-9A81-7D403BE3894B}" dt="2025-04-06T04:01:01.567" v="570" actId="21"/>
+          <ac:picMkLst>
+            <pc:docMk/>
+            <pc:sldMk cId="566407149" sldId="307"/>
+            <ac:picMk id="32" creationId="{9255DE30-DC9A-368C-F8B3-E155F88AE569}"/>
+          </ac:picMkLst>
+        </pc:picChg>
+      </pc:sldChg>
+      <pc:sldChg chg="modSp add del mod">
+        <pc:chgData name="Mohammed Fasha" userId="cc64f42d-a1a6-4f08-b97b-0c37f877119f" providerId="ADAL" clId="{1430C6B2-0695-4939-9A81-7D403BE3894B}" dt="2025-04-06T03:17:13.337" v="193" actId="2696"/>
+        <pc:sldMkLst>
+          <pc:docMk/>
+          <pc:sldMk cId="0" sldId="308"/>
+        </pc:sldMkLst>
+        <pc:spChg chg="mod">
+          <ac:chgData name="Mohammed Fasha" userId="cc64f42d-a1a6-4f08-b97b-0c37f877119f" providerId="ADAL" clId="{1430C6B2-0695-4939-9A81-7D403BE3894B}" dt="2025-04-06T02:57:37.807" v="104" actId="20577"/>
+          <ac:spMkLst>
+            <pc:docMk/>
+            <pc:sldMk cId="0" sldId="308"/>
+            <ac:spMk id="3" creationId="{00000000-0000-0000-0000-000000000000}"/>
+          </ac:spMkLst>
+        </pc:spChg>
+      </pc:sldChg>
+      <pc:sldChg chg="addSp delSp modSp new mod">
+        <pc:chgData name="Mohammed Fasha" userId="cc64f42d-a1a6-4f08-b97b-0c37f877119f" providerId="ADAL" clId="{1430C6B2-0695-4939-9A81-7D403BE3894B}" dt="2025-04-06T04:17:45.506" v="716" actId="14100"/>
+        <pc:sldMkLst>
+          <pc:docMk/>
+          <pc:sldMk cId="2501734364" sldId="308"/>
+        </pc:sldMkLst>
+        <pc:spChg chg="mod">
+          <ac:chgData name="Mohammed Fasha" userId="cc64f42d-a1a6-4f08-b97b-0c37f877119f" providerId="ADAL" clId="{1430C6B2-0695-4939-9A81-7D403BE3894B}" dt="2025-04-06T04:17:33.796" v="712" actId="20577"/>
+          <ac:spMkLst>
+            <pc:docMk/>
+            <pc:sldMk cId="2501734364" sldId="308"/>
+            <ac:spMk id="2" creationId="{41BDA84C-AD74-5814-D82A-5F88FC8C9069}"/>
+          </ac:spMkLst>
+        </pc:spChg>
+        <pc:spChg chg="del">
+          <ac:chgData name="Mohammed Fasha" userId="cc64f42d-a1a6-4f08-b97b-0c37f877119f" providerId="ADAL" clId="{1430C6B2-0695-4939-9A81-7D403BE3894B}" dt="2025-04-06T04:15:43.743" v="659" actId="22"/>
+          <ac:spMkLst>
+            <pc:docMk/>
+            <pc:sldMk cId="2501734364" sldId="308"/>
+            <ac:spMk id="3" creationId="{03D3A865-6C4F-6733-10D7-57B4BA9C3752}"/>
+          </ac:spMkLst>
+        </pc:spChg>
+        <pc:spChg chg="add del mod">
+          <ac:chgData name="Mohammed Fasha" userId="cc64f42d-a1a6-4f08-b97b-0c37f877119f" providerId="ADAL" clId="{1430C6B2-0695-4939-9A81-7D403BE3894B}" dt="2025-04-06T04:16:15.499" v="663" actId="22"/>
+          <ac:spMkLst>
+            <pc:docMk/>
+            <pc:sldMk cId="2501734364" sldId="308"/>
+            <ac:spMk id="7" creationId="{A5BCEE4D-678A-42B0-5476-FD4309C747DA}"/>
+          </ac:spMkLst>
+        </pc:spChg>
+        <pc:picChg chg="add del mod ord">
+          <ac:chgData name="Mohammed Fasha" userId="cc64f42d-a1a6-4f08-b97b-0c37f877119f" providerId="ADAL" clId="{1430C6B2-0695-4939-9A81-7D403BE3894B}" dt="2025-04-06T04:16:12.314" v="662" actId="478"/>
+          <ac:picMkLst>
+            <pc:docMk/>
+            <pc:sldMk cId="2501734364" sldId="308"/>
+            <ac:picMk id="5" creationId="{83E099EE-8125-2C56-9333-143A0ECBCC54}"/>
+          </ac:picMkLst>
+        </pc:picChg>
+        <pc:picChg chg="add mod ord">
+          <ac:chgData name="Mohammed Fasha" userId="cc64f42d-a1a6-4f08-b97b-0c37f877119f" providerId="ADAL" clId="{1430C6B2-0695-4939-9A81-7D403BE3894B}" dt="2025-04-06T04:17:45.506" v="716" actId="14100"/>
+          <ac:picMkLst>
+            <pc:docMk/>
+            <pc:sldMk cId="2501734364" sldId="308"/>
+            <ac:picMk id="9" creationId="{F079DF9D-D91F-8F19-E096-CEB55AE60F5E}"/>
+          </ac:picMkLst>
+        </pc:picChg>
+        <pc:picChg chg="add mod">
+          <ac:chgData name="Mohammed Fasha" userId="cc64f42d-a1a6-4f08-b97b-0c37f877119f" providerId="ADAL" clId="{1430C6B2-0695-4939-9A81-7D403BE3894B}" dt="2025-04-06T04:17:43.677" v="715" actId="1076"/>
+          <ac:picMkLst>
+            <pc:docMk/>
+            <pc:sldMk cId="2501734364" sldId="308"/>
+            <ac:picMk id="11" creationId="{A62FBA81-FB50-9A3F-4551-5D02D03696AD}"/>
           </ac:picMkLst>
         </pc:picChg>
       </pc:sldChg>
@@ -5740,7 +6574,7 @@
           <a:p>
             <a:fld id="{13BA03A4-B9F1-404C-8A74-B1AFD6480953}" type="datetimeFigureOut">
               <a:rPr lang="en-US" smtClean="0"/>
-              <a:t>4/3/2025</a:t>
+              <a:t>4/6/2025</a:t>
             </a:fld>
             <a:endParaRPr lang="en-US"/>
           </a:p>
@@ -6154,7 +6988,7 @@
           <a:p>
             <a:fld id="{0DB78E95-DE77-44D3-BDB9-E242948FB112}" type="datetimeFigureOut">
               <a:rPr lang="en-US" smtClean="0"/>
-              <a:t>4/3/2025</a:t>
+              <a:t>4/6/2025</a:t>
             </a:fld>
             <a:endParaRPr lang="en-US"/>
           </a:p>
@@ -6382,7 +7216,7 @@
           <a:p>
             <a:fld id="{0DB78E95-DE77-44D3-BDB9-E242948FB112}" type="datetimeFigureOut">
               <a:rPr lang="en-US" smtClean="0"/>
-              <a:t>4/3/2025</a:t>
+              <a:t>4/6/2025</a:t>
             </a:fld>
             <a:endParaRPr lang="en-US"/>
           </a:p>
@@ -6590,7 +7424,7 @@
           <a:p>
             <a:fld id="{0DB78E95-DE77-44D3-BDB9-E242948FB112}" type="datetimeFigureOut">
               <a:rPr lang="en-US" smtClean="0"/>
-              <a:t>4/3/2025</a:t>
+              <a:t>4/6/2025</a:t>
             </a:fld>
             <a:endParaRPr lang="en-US"/>
           </a:p>
@@ -7317,7 +8151,7 @@
           <a:p>
             <a:fld id="{0DB78E95-DE77-44D3-BDB9-E242948FB112}" type="datetimeFigureOut">
               <a:rPr lang="en-US" smtClean="0"/>
-              <a:t>4/3/2025</a:t>
+              <a:t>4/6/2025</a:t>
             </a:fld>
             <a:endParaRPr lang="en-US"/>
           </a:p>
@@ -7696,7 +8530,7 @@
           <a:p>
             <a:fld id="{0DB78E95-DE77-44D3-BDB9-E242948FB112}" type="datetimeFigureOut">
               <a:rPr lang="en-US" smtClean="0"/>
-              <a:t>4/3/2025</a:t>
+              <a:t>4/6/2025</a:t>
             </a:fld>
             <a:endParaRPr lang="en-US"/>
           </a:p>
@@ -8108,7 +8942,7 @@
           <a:p>
             <a:fld id="{0DB78E95-DE77-44D3-BDB9-E242948FB112}" type="datetimeFigureOut">
               <a:rPr lang="en-US" smtClean="0"/>
-              <a:t>4/3/2025</a:t>
+              <a:t>4/6/2025</a:t>
             </a:fld>
             <a:endParaRPr lang="en-US"/>
           </a:p>
@@ -8249,7 +9083,7 @@
           <a:p>
             <a:fld id="{0DB78E95-DE77-44D3-BDB9-E242948FB112}" type="datetimeFigureOut">
               <a:rPr lang="en-US" smtClean="0"/>
-              <a:t>4/3/2025</a:t>
+              <a:t>4/6/2025</a:t>
             </a:fld>
             <a:endParaRPr lang="en-US"/>
           </a:p>
@@ -8362,7 +9196,7 @@
           <a:p>
             <a:fld id="{0DB78E95-DE77-44D3-BDB9-E242948FB112}" type="datetimeFigureOut">
               <a:rPr lang="en-US" smtClean="0"/>
-              <a:t>4/3/2025</a:t>
+              <a:t>4/6/2025</a:t>
             </a:fld>
             <a:endParaRPr lang="en-US"/>
           </a:p>
@@ -8673,7 +9507,7 @@
           <a:p>
             <a:fld id="{0DB78E95-DE77-44D3-BDB9-E242948FB112}" type="datetimeFigureOut">
               <a:rPr lang="en-US" smtClean="0"/>
-              <a:t>4/3/2025</a:t>
+              <a:t>4/6/2025</a:t>
             </a:fld>
             <a:endParaRPr lang="en-US"/>
           </a:p>
@@ -8961,7 +9795,7 @@
           <a:p>
             <a:fld id="{0DB78E95-DE77-44D3-BDB9-E242948FB112}" type="datetimeFigureOut">
               <a:rPr lang="en-US" smtClean="0"/>
-              <a:t>4/3/2025</a:t>
+              <a:t>4/6/2025</a:t>
             </a:fld>
             <a:endParaRPr lang="en-US"/>
           </a:p>
@@ -9202,7 +10036,7 @@
           <a:p>
             <a:fld id="{0DB78E95-DE77-44D3-BDB9-E242948FB112}" type="datetimeFigureOut">
               <a:rPr lang="en-US" smtClean="0"/>
-              <a:t>4/3/2025</a:t>
+              <a:t>4/6/2025</a:t>
             </a:fld>
             <a:endParaRPr lang="en-US"/>
           </a:p>
@@ -10763,8 +11597,8 @@
         </p:nvSpPr>
         <p:spPr>
           <a:xfrm>
-            <a:off x="10162800" y="6435720"/>
-            <a:ext cx="1650600" cy="399600"/>
+            <a:off x="10230761" y="6458400"/>
+            <a:ext cx="1751493" cy="399600"/>
           </a:xfrm>
           <a:prstGeom prst="rect">
             <a:avLst/>
@@ -10788,11 +11622,11 @@
         </p:style>
         <p:txBody>
           <a:bodyPr anchor="t">
-            <a:normAutofit/>
+            <a:normAutofit fontScale="92500" lnSpcReduction="20000"/>
           </a:bodyPr>
           <a:lstStyle/>
           <a:p>
-            <a:pPr defTabSz="914400">
+            <a:pPr algn="ctr" defTabSz="914400">
               <a:lnSpc>
                 <a:spcPct val="90000"/>
               </a:lnSpc>
@@ -10804,16 +11638,16 @@
               </a:tabLst>
             </a:pPr>
             <a:r>
-              <a:rPr lang="en-US" sz="1400" b="0" u="none" strike="noStrike">
+              <a:rPr lang="en-US" sz="1400" b="0" u="none" strike="noStrike" dirty="0">
                 <a:solidFill>
                   <a:srgbClr val="0070C0"/>
                 </a:solidFill>
                 <a:uFillTx/>
                 <a:latin typeface="Calibri"/>
               </a:rPr>
-              <a:t>Click to Open Code</a:t>
-            </a:r>
-            <a:endParaRPr lang="en-US" sz="1400" b="0" u="none" strike="noStrike">
+              <a:t>Open Colab and go to tokenization example</a:t>
+            </a:r>
+            <a:endParaRPr lang="en-US" sz="1400" b="0" u="none" strike="noStrike" dirty="0">
               <a:solidFill>
                 <a:srgbClr val="000000"/>
               </a:solidFill>
@@ -11857,6 +12691,117 @@
           </a:p>
         </p:txBody>
       </p:sp>
+      <p:sp>
+        <p:nvSpPr>
+          <p:cNvPr id="2" name="Content Placeholder 2">
+            <a:extLst>
+              <a:ext uri="{FF2B5EF4-FFF2-40B4-BE49-F238E27FC236}">
+                <a16:creationId xmlns:a16="http://schemas.microsoft.com/office/drawing/2014/main" id="{C087ADBF-4222-9D29-4601-72D8C5ECAF67}"/>
+              </a:ext>
+            </a:extLst>
+          </p:cNvPr>
+          <p:cNvSpPr/>
+          <p:nvPr/>
+        </p:nvSpPr>
+        <p:spPr>
+          <a:xfrm>
+            <a:off x="10230761" y="6458400"/>
+            <a:ext cx="1751493" cy="399600"/>
+          </a:xfrm>
+          <a:prstGeom prst="rect">
+            <a:avLst/>
+          </a:prstGeom>
+          <a:noFill/>
+          <a:ln w="0">
+            <a:noFill/>
+          </a:ln>
+        </p:spPr>
+        <p:style>
+          <a:lnRef idx="0">
+            <a:scrgbClr r="0" g="0" b="0"/>
+          </a:lnRef>
+          <a:fillRef idx="0">
+            <a:scrgbClr r="0" g="0" b="0"/>
+          </a:fillRef>
+          <a:effectRef idx="0">
+            <a:scrgbClr r="0" g="0" b="0"/>
+          </a:effectRef>
+          <a:fontRef idx="minor"/>
+        </p:style>
+        <p:txBody>
+          <a:bodyPr anchor="t">
+            <a:normAutofit fontScale="92500" lnSpcReduction="20000"/>
+          </a:bodyPr>
+          <a:lstStyle/>
+          <a:p>
+            <a:pPr algn="ctr" defTabSz="914400">
+              <a:lnSpc>
+                <a:spcPct val="90000"/>
+              </a:lnSpc>
+              <a:spcBef>
+                <a:spcPts val="1001"/>
+              </a:spcBef>
+              <a:tabLst>
+                <a:tab pos="0" algn="l"/>
+              </a:tabLst>
+            </a:pPr>
+            <a:r>
+              <a:rPr lang="en-US" sz="1400" b="0" u="none" strike="noStrike" dirty="0">
+                <a:solidFill>
+                  <a:srgbClr val="0070C0"/>
+                </a:solidFill>
+                <a:uFillTx/>
+                <a:latin typeface="Calibri"/>
+              </a:rPr>
+              <a:t>Open Colab and go to normalization example</a:t>
+            </a:r>
+            <a:endParaRPr lang="en-US" sz="1400" b="0" u="none" strike="noStrike" dirty="0">
+              <a:solidFill>
+                <a:srgbClr val="000000"/>
+              </a:solidFill>
+              <a:uFillTx/>
+              <a:latin typeface="Arial"/>
+            </a:endParaRPr>
+          </a:p>
+        </p:txBody>
+      </p:sp>
+      <p:pic>
+        <p:nvPicPr>
+          <p:cNvPr id="3" name="Graphic 6">
+            <a:hlinkClick r:id="rId2"/>
+            <a:extLst>
+              <a:ext uri="{FF2B5EF4-FFF2-40B4-BE49-F238E27FC236}">
+                <a16:creationId xmlns:a16="http://schemas.microsoft.com/office/drawing/2014/main" id="{68EA6CB0-BFE2-482A-D045-9E2274E13790}"/>
+              </a:ext>
+            </a:extLst>
+          </p:cNvPr>
+          <p:cNvPicPr/>
+          <p:nvPr/>
+        </p:nvPicPr>
+        <p:blipFill>
+          <a:blip r:embed="rId3">
+            <a:extLst>
+              <a:ext uri="{96DAC541-7B7A-43D3-8B79-37D633B846F1}">
+                <asvg:svgBlip xmlns:asvg="http://schemas.microsoft.com/office/drawing/2016/SVG/main" r:embed="rId4"/>
+              </a:ext>
+            </a:extLst>
+          </a:blip>
+          <a:stretch/>
+        </p:blipFill>
+        <p:spPr>
+          <a:xfrm>
+            <a:off x="10431000" y="6231240"/>
+            <a:ext cx="1114200" cy="190080"/>
+          </a:xfrm>
+          <a:prstGeom prst="rect">
+            <a:avLst/>
+          </a:prstGeom>
+          <a:noFill/>
+          <a:ln w="0">
+            <a:noFill/>
+          </a:ln>
+        </p:spPr>
+      </p:pic>
     </p:spTree>
   </p:cSld>
   <p:clrMapOvr>
@@ -12560,6 +13505,137 @@
           </a:p>
         </p:txBody>
       </p:sp>
+      <p:sp>
+        <p:nvSpPr>
+          <p:cNvPr id="2" name="Content Placeholder 2">
+            <a:extLst>
+              <a:ext uri="{FF2B5EF4-FFF2-40B4-BE49-F238E27FC236}">
+                <a16:creationId xmlns:a16="http://schemas.microsoft.com/office/drawing/2014/main" id="{728194F7-5559-14E2-09BA-A66A8287EE8C}"/>
+              </a:ext>
+            </a:extLst>
+          </p:cNvPr>
+          <p:cNvSpPr/>
+          <p:nvPr/>
+        </p:nvSpPr>
+        <p:spPr>
+          <a:xfrm>
+            <a:off x="10230761" y="6458400"/>
+            <a:ext cx="1751493" cy="399600"/>
+          </a:xfrm>
+          <a:prstGeom prst="rect">
+            <a:avLst/>
+          </a:prstGeom>
+          <a:noFill/>
+          <a:ln w="0">
+            <a:noFill/>
+          </a:ln>
+        </p:spPr>
+        <p:style>
+          <a:lnRef idx="0">
+            <a:scrgbClr r="0" g="0" b="0"/>
+          </a:lnRef>
+          <a:fillRef idx="0">
+            <a:scrgbClr r="0" g="0" b="0"/>
+          </a:fillRef>
+          <a:effectRef idx="0">
+            <a:scrgbClr r="0" g="0" b="0"/>
+          </a:effectRef>
+          <a:fontRef idx="minor"/>
+        </p:style>
+        <p:txBody>
+          <a:bodyPr anchor="t">
+            <a:normAutofit fontScale="92500" lnSpcReduction="20000"/>
+          </a:bodyPr>
+          <a:lstStyle/>
+          <a:p>
+            <a:pPr algn="ctr" defTabSz="914400">
+              <a:lnSpc>
+                <a:spcPct val="90000"/>
+              </a:lnSpc>
+              <a:spcBef>
+                <a:spcPts val="1001"/>
+              </a:spcBef>
+              <a:tabLst>
+                <a:tab pos="0" algn="l"/>
+              </a:tabLst>
+            </a:pPr>
+            <a:r>
+              <a:rPr lang="en-US" sz="1400" b="0" u="none" strike="noStrike" dirty="0">
+                <a:solidFill>
+                  <a:srgbClr val="0070C0"/>
+                </a:solidFill>
+                <a:uFillTx/>
+                <a:latin typeface="Calibri"/>
+              </a:rPr>
+              <a:t>Open Colab and go to </a:t>
+            </a:r>
+            <a:r>
+              <a:rPr lang="en-US" sz="1400" b="0" u="none" strike="noStrike" dirty="0" err="1">
+                <a:solidFill>
+                  <a:srgbClr val="0070C0"/>
+                </a:solidFill>
+                <a:uFillTx/>
+                <a:latin typeface="Calibri"/>
+              </a:rPr>
+              <a:t>stopwords</a:t>
+            </a:r>
+            <a:r>
+              <a:rPr lang="en-US" sz="1400" b="0" u="none" strike="noStrike" dirty="0">
+                <a:solidFill>
+                  <a:srgbClr val="0070C0"/>
+                </a:solidFill>
+                <a:uFillTx/>
+                <a:latin typeface="Calibri"/>
+              </a:rPr>
+              <a:t> example</a:t>
+            </a:r>
+            <a:endParaRPr lang="en-US" sz="1400" b="0" u="none" strike="noStrike" dirty="0">
+              <a:solidFill>
+                <a:srgbClr val="000000"/>
+              </a:solidFill>
+              <a:uFillTx/>
+              <a:latin typeface="Arial"/>
+            </a:endParaRPr>
+          </a:p>
+        </p:txBody>
+      </p:sp>
+      <p:pic>
+        <p:nvPicPr>
+          <p:cNvPr id="3" name="Graphic 6">
+            <a:hlinkClick r:id="rId2"/>
+            <a:extLst>
+              <a:ext uri="{FF2B5EF4-FFF2-40B4-BE49-F238E27FC236}">
+                <a16:creationId xmlns:a16="http://schemas.microsoft.com/office/drawing/2014/main" id="{53D1A3D5-A337-E152-A2D3-43439D59A1BE}"/>
+              </a:ext>
+            </a:extLst>
+          </p:cNvPr>
+          <p:cNvPicPr/>
+          <p:nvPr/>
+        </p:nvPicPr>
+        <p:blipFill>
+          <a:blip r:embed="rId3">
+            <a:extLst>
+              <a:ext uri="{96DAC541-7B7A-43D3-8B79-37D633B846F1}">
+                <asvg:svgBlip xmlns:asvg="http://schemas.microsoft.com/office/drawing/2016/SVG/main" r:embed="rId4"/>
+              </a:ext>
+            </a:extLst>
+          </a:blip>
+          <a:stretch/>
+        </p:blipFill>
+        <p:spPr>
+          <a:xfrm>
+            <a:off x="10431000" y="6231240"/>
+            <a:ext cx="1114200" cy="190080"/>
+          </a:xfrm>
+          <a:prstGeom prst="rect">
+            <a:avLst/>
+          </a:prstGeom>
+          <a:noFill/>
+          <a:ln w="0">
+            <a:noFill/>
+          </a:ln>
+        </p:spPr>
+      </p:pic>
     </p:spTree>
   </p:cSld>
   <p:clrMapOvr>
@@ -14299,6 +15375,117 @@
           </a:p>
         </p:txBody>
       </p:sp>
+      <p:sp>
+        <p:nvSpPr>
+          <p:cNvPr id="2" name="Content Placeholder 2">
+            <a:extLst>
+              <a:ext uri="{FF2B5EF4-FFF2-40B4-BE49-F238E27FC236}">
+                <a16:creationId xmlns:a16="http://schemas.microsoft.com/office/drawing/2014/main" id="{41E2257B-B6B3-4705-2781-EF4AE061934E}"/>
+              </a:ext>
+            </a:extLst>
+          </p:cNvPr>
+          <p:cNvSpPr/>
+          <p:nvPr/>
+        </p:nvSpPr>
+        <p:spPr>
+          <a:xfrm>
+            <a:off x="10230761" y="6458400"/>
+            <a:ext cx="1751493" cy="399600"/>
+          </a:xfrm>
+          <a:prstGeom prst="rect">
+            <a:avLst/>
+          </a:prstGeom>
+          <a:noFill/>
+          <a:ln w="0">
+            <a:noFill/>
+          </a:ln>
+        </p:spPr>
+        <p:style>
+          <a:lnRef idx="0">
+            <a:scrgbClr r="0" g="0" b="0"/>
+          </a:lnRef>
+          <a:fillRef idx="0">
+            <a:scrgbClr r="0" g="0" b="0"/>
+          </a:fillRef>
+          <a:effectRef idx="0">
+            <a:scrgbClr r="0" g="0" b="0"/>
+          </a:effectRef>
+          <a:fontRef idx="minor"/>
+        </p:style>
+        <p:txBody>
+          <a:bodyPr anchor="t">
+            <a:normAutofit fontScale="92500" lnSpcReduction="20000"/>
+          </a:bodyPr>
+          <a:lstStyle/>
+          <a:p>
+            <a:pPr algn="ctr" defTabSz="914400">
+              <a:lnSpc>
+                <a:spcPct val="90000"/>
+              </a:lnSpc>
+              <a:spcBef>
+                <a:spcPts val="1001"/>
+              </a:spcBef>
+              <a:tabLst>
+                <a:tab pos="0" algn="l"/>
+              </a:tabLst>
+            </a:pPr>
+            <a:r>
+              <a:rPr lang="en-US" sz="1400" b="0" u="none" strike="noStrike" dirty="0">
+                <a:solidFill>
+                  <a:srgbClr val="0070C0"/>
+                </a:solidFill>
+                <a:uFillTx/>
+                <a:latin typeface="Calibri"/>
+              </a:rPr>
+              <a:t>Open Colab and go to stemming example</a:t>
+            </a:r>
+            <a:endParaRPr lang="en-US" sz="1400" b="0" u="none" strike="noStrike" dirty="0">
+              <a:solidFill>
+                <a:srgbClr val="000000"/>
+              </a:solidFill>
+              <a:uFillTx/>
+              <a:latin typeface="Arial"/>
+            </a:endParaRPr>
+          </a:p>
+        </p:txBody>
+      </p:sp>
+      <p:pic>
+        <p:nvPicPr>
+          <p:cNvPr id="3" name="Graphic 6">
+            <a:hlinkClick r:id="rId2"/>
+            <a:extLst>
+              <a:ext uri="{FF2B5EF4-FFF2-40B4-BE49-F238E27FC236}">
+                <a16:creationId xmlns:a16="http://schemas.microsoft.com/office/drawing/2014/main" id="{E9501D06-4E28-42B8-54EC-6C48C4567DB7}"/>
+              </a:ext>
+            </a:extLst>
+          </p:cNvPr>
+          <p:cNvPicPr/>
+          <p:nvPr/>
+        </p:nvPicPr>
+        <p:blipFill>
+          <a:blip r:embed="rId3">
+            <a:extLst>
+              <a:ext uri="{96DAC541-7B7A-43D3-8B79-37D633B846F1}">
+                <asvg:svgBlip xmlns:asvg="http://schemas.microsoft.com/office/drawing/2016/SVG/main" r:embed="rId4"/>
+              </a:ext>
+            </a:extLst>
+          </a:blip>
+          <a:stretch/>
+        </p:blipFill>
+        <p:spPr>
+          <a:xfrm>
+            <a:off x="10431000" y="6231240"/>
+            <a:ext cx="1114200" cy="190080"/>
+          </a:xfrm>
+          <a:prstGeom prst="rect">
+            <a:avLst/>
+          </a:prstGeom>
+          <a:noFill/>
+          <a:ln w="0">
+            <a:noFill/>
+          </a:ln>
+        </p:spPr>
+      </p:pic>
     </p:spTree>
   </p:cSld>
   <p:clrMapOvr>
@@ -17125,6 +18312,137 @@
           </a:graphicData>
         </a:graphic>
       </p:graphicFrame>
+      <p:sp>
+        <p:nvSpPr>
+          <p:cNvPr id="2" name="Content Placeholder 2">
+            <a:extLst>
+              <a:ext uri="{FF2B5EF4-FFF2-40B4-BE49-F238E27FC236}">
+                <a16:creationId xmlns:a16="http://schemas.microsoft.com/office/drawing/2014/main" id="{11147F20-7F9A-6F30-2416-024618CB1325}"/>
+              </a:ext>
+            </a:extLst>
+          </p:cNvPr>
+          <p:cNvSpPr/>
+          <p:nvPr/>
+        </p:nvSpPr>
+        <p:spPr>
+          <a:xfrm>
+            <a:off x="10230761" y="6458400"/>
+            <a:ext cx="1751493" cy="399600"/>
+          </a:xfrm>
+          <a:prstGeom prst="rect">
+            <a:avLst/>
+          </a:prstGeom>
+          <a:noFill/>
+          <a:ln w="0">
+            <a:noFill/>
+          </a:ln>
+        </p:spPr>
+        <p:style>
+          <a:lnRef idx="0">
+            <a:scrgbClr r="0" g="0" b="0"/>
+          </a:lnRef>
+          <a:fillRef idx="0">
+            <a:scrgbClr r="0" g="0" b="0"/>
+          </a:fillRef>
+          <a:effectRef idx="0">
+            <a:scrgbClr r="0" g="0" b="0"/>
+          </a:effectRef>
+          <a:fontRef idx="minor"/>
+        </p:style>
+        <p:txBody>
+          <a:bodyPr anchor="t">
+            <a:normAutofit fontScale="92500" lnSpcReduction="20000"/>
+          </a:bodyPr>
+          <a:lstStyle/>
+          <a:p>
+            <a:pPr algn="ctr" defTabSz="914400">
+              <a:lnSpc>
+                <a:spcPct val="90000"/>
+              </a:lnSpc>
+              <a:spcBef>
+                <a:spcPts val="1001"/>
+              </a:spcBef>
+              <a:tabLst>
+                <a:tab pos="0" algn="l"/>
+              </a:tabLst>
+            </a:pPr>
+            <a:r>
+              <a:rPr lang="en-US" sz="1400" b="0" u="none" strike="noStrike" dirty="0">
+                <a:solidFill>
+                  <a:srgbClr val="0070C0"/>
+                </a:solidFill>
+                <a:uFillTx/>
+                <a:latin typeface="Calibri"/>
+              </a:rPr>
+              <a:t>Open Colab and go to </a:t>
+            </a:r>
+            <a:r>
+              <a:rPr lang="en-US" sz="1400" b="0" u="none" strike="noStrike" dirty="0" err="1">
+                <a:solidFill>
+                  <a:srgbClr val="0070C0"/>
+                </a:solidFill>
+                <a:uFillTx/>
+                <a:latin typeface="Calibri"/>
+              </a:rPr>
+              <a:t>BoW</a:t>
+            </a:r>
+            <a:r>
+              <a:rPr lang="en-US" sz="1400" b="0" u="none" strike="noStrike" dirty="0">
+                <a:solidFill>
+                  <a:srgbClr val="0070C0"/>
+                </a:solidFill>
+                <a:uFillTx/>
+                <a:latin typeface="Calibri"/>
+              </a:rPr>
+              <a:t> example</a:t>
+            </a:r>
+            <a:endParaRPr lang="en-US" sz="1400" b="0" u="none" strike="noStrike" dirty="0">
+              <a:solidFill>
+                <a:srgbClr val="000000"/>
+              </a:solidFill>
+              <a:uFillTx/>
+              <a:latin typeface="Arial"/>
+            </a:endParaRPr>
+          </a:p>
+        </p:txBody>
+      </p:sp>
+      <p:pic>
+        <p:nvPicPr>
+          <p:cNvPr id="3" name="Graphic 6">
+            <a:hlinkClick r:id="rId2"/>
+            <a:extLst>
+              <a:ext uri="{FF2B5EF4-FFF2-40B4-BE49-F238E27FC236}">
+                <a16:creationId xmlns:a16="http://schemas.microsoft.com/office/drawing/2014/main" id="{2137DE1E-E18E-A534-77E6-28A80EF44BD2}"/>
+              </a:ext>
+            </a:extLst>
+          </p:cNvPr>
+          <p:cNvPicPr/>
+          <p:nvPr/>
+        </p:nvPicPr>
+        <p:blipFill>
+          <a:blip r:embed="rId3">
+            <a:extLst>
+              <a:ext uri="{96DAC541-7B7A-43D3-8B79-37D633B846F1}">
+                <asvg:svgBlip xmlns:asvg="http://schemas.microsoft.com/office/drawing/2016/SVG/main" r:embed="rId4"/>
+              </a:ext>
+            </a:extLst>
+          </a:blip>
+          <a:stretch/>
+        </p:blipFill>
+        <p:spPr>
+          <a:xfrm>
+            <a:off x="10431000" y="6231240"/>
+            <a:ext cx="1114200" cy="190080"/>
+          </a:xfrm>
+          <a:prstGeom prst="rect">
+            <a:avLst/>
+          </a:prstGeom>
+          <a:noFill/>
+          <a:ln w="0">
+            <a:noFill/>
+          </a:ln>
+        </p:spPr>
+      </p:pic>
     </p:spTree>
   </p:cSld>
   <p:clrMapOvr>
@@ -17232,36 +18550,326 @@
         </p:spPr>
         <p:txBody>
           <a:bodyPr lIns="91440" tIns="45720" rIns="91440" bIns="45720" anchor="t">
-            <a:normAutofit/>
+            <a:normAutofit fontScale="77500" lnSpcReduction="20000"/>
           </a:bodyPr>
           <a:lstStyle/>
           <a:p>
-            <a:pPr indent="0" defTabSz="914400">
-              <a:lnSpc>
-                <a:spcPct val="100000"/>
-              </a:lnSpc>
-              <a:buNone/>
+            <a:pPr>
+              <a:spcBef>
+                <a:spcPts val="1001"/>
+              </a:spcBef>
               <a:tabLst>
                 <a:tab pos="0" algn="l"/>
               </a:tabLst>
             </a:pPr>
             <a:r>
-              <a:rPr lang="en-US" sz="2400" b="1" u="none" strike="noStrike" dirty="0">
+              <a:rPr lang="en-US" sz="2400" b="1" dirty="0">
                 <a:solidFill>
                   <a:schemeClr val="dk1"/>
                 </a:solidFill>
-                <a:uFillTx/>
                 <a:latin typeface="Calibri"/>
               </a:rPr>
               <a:t>Applications</a:t>
             </a:r>
-            <a:endParaRPr lang="en-US" sz="2400" b="0" u="none" strike="noStrike" dirty="0">
-              <a:solidFill>
-                <a:schemeClr val="dk1"/>
-              </a:solidFill>
-              <a:uFillTx/>
-              <a:latin typeface="Calibri"/>
-            </a:endParaRPr>
+          </a:p>
+          <a:p>
+            <a:pPr marL="342900" indent="-342900">
+              <a:spcBef>
+                <a:spcPts val="1001"/>
+              </a:spcBef>
+              <a:buFont typeface="Arial" panose="020B0604020202020204" pitchFamily="34" charset="0"/>
+              <a:buChar char="•"/>
+              <a:tabLst>
+                <a:tab pos="0" algn="l"/>
+              </a:tabLst>
+            </a:pPr>
+            <a:r>
+              <a:rPr lang="en-US" sz="2400" dirty="0">
+                <a:solidFill>
+                  <a:schemeClr val="dk1"/>
+                </a:solidFill>
+                <a:latin typeface="Calibri"/>
+              </a:rPr>
+              <a:t>BOW is commonly used in:</a:t>
+            </a:r>
+          </a:p>
+          <a:p>
+            <a:pPr marL="342900" indent="-342900">
+              <a:spcBef>
+                <a:spcPts val="1001"/>
+              </a:spcBef>
+              <a:buFont typeface="Arial" panose="020B0604020202020204" pitchFamily="34" charset="0"/>
+              <a:buChar char="•"/>
+              <a:tabLst>
+                <a:tab pos="0" algn="l"/>
+              </a:tabLst>
+            </a:pPr>
+            <a:r>
+              <a:rPr lang="en-US" sz="2400" dirty="0">
+                <a:solidFill>
+                  <a:schemeClr val="dk1"/>
+                </a:solidFill>
+                <a:latin typeface="Calibri"/>
+              </a:rPr>
+              <a:t>Text classification (spam detection, sentiment analysis)</a:t>
+            </a:r>
+          </a:p>
+          <a:p>
+            <a:pPr marL="342900" indent="-342900">
+              <a:spcBef>
+                <a:spcPts val="1001"/>
+              </a:spcBef>
+              <a:buFont typeface="Arial" panose="020B0604020202020204" pitchFamily="34" charset="0"/>
+              <a:buChar char="•"/>
+              <a:tabLst>
+                <a:tab pos="0" algn="l"/>
+              </a:tabLst>
+            </a:pPr>
+            <a:r>
+              <a:rPr lang="en-US" sz="2400" dirty="0">
+                <a:solidFill>
+                  <a:schemeClr val="dk1"/>
+                </a:solidFill>
+                <a:latin typeface="Calibri"/>
+              </a:rPr>
+              <a:t>Document clustering</a:t>
+            </a:r>
+          </a:p>
+          <a:p>
+            <a:pPr marL="342900" indent="-342900">
+              <a:spcBef>
+                <a:spcPts val="1001"/>
+              </a:spcBef>
+              <a:buFont typeface="Arial" panose="020B0604020202020204" pitchFamily="34" charset="0"/>
+              <a:buChar char="•"/>
+              <a:tabLst>
+                <a:tab pos="0" algn="l"/>
+              </a:tabLst>
+            </a:pPr>
+            <a:r>
+              <a:rPr lang="en-US" sz="2400" dirty="0">
+                <a:solidFill>
+                  <a:schemeClr val="dk1"/>
+                </a:solidFill>
+                <a:latin typeface="Calibri"/>
+              </a:rPr>
+              <a:t>Information retrieval</a:t>
+            </a:r>
+          </a:p>
+          <a:p>
+            <a:pPr marL="342900" indent="-342900">
+              <a:spcBef>
+                <a:spcPts val="1001"/>
+              </a:spcBef>
+              <a:buFont typeface="Arial" panose="020B0604020202020204" pitchFamily="34" charset="0"/>
+              <a:buChar char="•"/>
+              <a:tabLst>
+                <a:tab pos="0" algn="l"/>
+              </a:tabLst>
+            </a:pPr>
+            <a:r>
+              <a:rPr lang="en-US" sz="2400" dirty="0">
+                <a:solidFill>
+                  <a:schemeClr val="dk1"/>
+                </a:solidFill>
+                <a:latin typeface="Calibri"/>
+              </a:rPr>
+              <a:t>Topic modeling</a:t>
+            </a:r>
+          </a:p>
+          <a:p>
+            <a:pPr>
+              <a:spcBef>
+                <a:spcPts val="1001"/>
+              </a:spcBef>
+              <a:tabLst>
+                <a:tab pos="0" algn="l"/>
+              </a:tabLst>
+            </a:pPr>
+            <a:r>
+              <a:rPr lang="en-US" sz="2400" b="1" dirty="0">
+                <a:solidFill>
+                  <a:schemeClr val="dk1"/>
+                </a:solidFill>
+                <a:latin typeface="Calibri"/>
+              </a:rPr>
+              <a:t>Advantages</a:t>
+            </a:r>
+          </a:p>
+          <a:p>
+            <a:pPr marL="342900" indent="-342900">
+              <a:spcBef>
+                <a:spcPts val="1001"/>
+              </a:spcBef>
+              <a:buFont typeface="Arial" panose="020B0604020202020204" pitchFamily="34" charset="0"/>
+              <a:buChar char="•"/>
+              <a:tabLst>
+                <a:tab pos="0" algn="l"/>
+              </a:tabLst>
+            </a:pPr>
+            <a:r>
+              <a:rPr lang="en-US" sz="2400" dirty="0">
+                <a:solidFill>
+                  <a:schemeClr val="dk1"/>
+                </a:solidFill>
+                <a:latin typeface="Calibri"/>
+              </a:rPr>
+              <a:t>Simple to understand and implement</a:t>
+            </a:r>
+          </a:p>
+          <a:p>
+            <a:pPr marL="342900" indent="-342900">
+              <a:spcBef>
+                <a:spcPts val="1001"/>
+              </a:spcBef>
+              <a:buFont typeface="Arial" panose="020B0604020202020204" pitchFamily="34" charset="0"/>
+              <a:buChar char="•"/>
+              <a:tabLst>
+                <a:tab pos="0" algn="l"/>
+              </a:tabLst>
+            </a:pPr>
+            <a:r>
+              <a:rPr lang="en-US" sz="2400" dirty="0">
+                <a:solidFill>
+                  <a:schemeClr val="dk1"/>
+                </a:solidFill>
+                <a:latin typeface="Calibri"/>
+              </a:rPr>
+              <a:t>Computationally efficient</a:t>
+            </a:r>
+          </a:p>
+          <a:p>
+            <a:pPr marL="342900" indent="-342900">
+              <a:spcBef>
+                <a:spcPts val="1001"/>
+              </a:spcBef>
+              <a:buFont typeface="Arial" panose="020B0604020202020204" pitchFamily="34" charset="0"/>
+              <a:buChar char="•"/>
+              <a:tabLst>
+                <a:tab pos="0" algn="l"/>
+              </a:tabLst>
+            </a:pPr>
+            <a:r>
+              <a:rPr lang="en-US" sz="2400" dirty="0">
+                <a:solidFill>
+                  <a:schemeClr val="dk1"/>
+                </a:solidFill>
+                <a:latin typeface="Calibri"/>
+              </a:rPr>
+              <a:t>Effective for many basic NLP tasks</a:t>
+            </a:r>
+          </a:p>
+          <a:p>
+            <a:pPr>
+              <a:spcBef>
+                <a:spcPts val="1001"/>
+              </a:spcBef>
+              <a:tabLst>
+                <a:tab pos="0" algn="l"/>
+              </a:tabLst>
+            </a:pPr>
+            <a:r>
+              <a:rPr lang="en-US" sz="2400" b="1" dirty="0">
+                <a:solidFill>
+                  <a:schemeClr val="dk1"/>
+                </a:solidFill>
+                <a:latin typeface="Calibri"/>
+              </a:rPr>
+              <a:t>Limitations</a:t>
+            </a:r>
+          </a:p>
+          <a:p>
+            <a:pPr marL="342900" indent="-342900">
+              <a:spcBef>
+                <a:spcPts val="1001"/>
+              </a:spcBef>
+              <a:buFont typeface="Arial" panose="020B0604020202020204" pitchFamily="34" charset="0"/>
+              <a:buChar char="•"/>
+              <a:tabLst>
+                <a:tab pos="0" algn="l"/>
+              </a:tabLst>
+            </a:pPr>
+            <a:r>
+              <a:rPr lang="en-US" sz="2400" dirty="0">
+                <a:solidFill>
+                  <a:schemeClr val="dk1"/>
+                </a:solidFill>
+                <a:latin typeface="Calibri"/>
+              </a:rPr>
+              <a:t>Loses word order information</a:t>
+            </a:r>
+          </a:p>
+          <a:p>
+            <a:pPr marL="342900" indent="-342900">
+              <a:spcBef>
+                <a:spcPts val="1001"/>
+              </a:spcBef>
+              <a:buClr>
+                <a:srgbClr val="000000"/>
+              </a:buClr>
+              <a:buFont typeface="Arial" panose="020B0604020202020204" pitchFamily="34" charset="0"/>
+              <a:buChar char="•"/>
+              <a:tabLst>
+                <a:tab pos="0" algn="l"/>
+              </a:tabLst>
+            </a:pPr>
+            <a:r>
+              <a:rPr lang="en-US" sz="2400" dirty="0">
+                <a:solidFill>
+                  <a:schemeClr val="dk1"/>
+                </a:solidFill>
+                <a:latin typeface="Calibri"/>
+              </a:rPr>
+              <a:t>Ignores semantics and context</a:t>
+            </a:r>
+          </a:p>
+          <a:p>
+            <a:pPr marL="342900" indent="-342900">
+              <a:spcBef>
+                <a:spcPts val="1001"/>
+              </a:spcBef>
+              <a:buClr>
+                <a:srgbClr val="000000"/>
+              </a:buClr>
+              <a:buFont typeface="Arial" panose="020B0604020202020204" pitchFamily="34" charset="0"/>
+              <a:buChar char="•"/>
+              <a:tabLst>
+                <a:tab pos="0" algn="l"/>
+              </a:tabLst>
+            </a:pPr>
+            <a:r>
+              <a:rPr lang="en-US" sz="2400" dirty="0">
+                <a:solidFill>
+                  <a:schemeClr val="dk1"/>
+                </a:solidFill>
+                <a:latin typeface="Calibri"/>
+              </a:rPr>
+              <a:t>Creates high-dimensional, sparse vectors</a:t>
+            </a:r>
+          </a:p>
+          <a:p>
+            <a:pPr marL="342900" indent="-342900">
+              <a:spcBef>
+                <a:spcPts val="1001"/>
+              </a:spcBef>
+              <a:buClr>
+                <a:srgbClr val="000000"/>
+              </a:buClr>
+              <a:buFont typeface="Arial" panose="020B0604020202020204" pitchFamily="34" charset="0"/>
+              <a:buChar char="•"/>
+              <a:tabLst>
+                <a:tab pos="0" algn="l"/>
+              </a:tabLst>
+            </a:pPr>
+            <a:r>
+              <a:rPr lang="en-US" sz="2400" dirty="0">
+                <a:solidFill>
+                  <a:schemeClr val="dk1"/>
+                </a:solidFill>
+                <a:latin typeface="Calibri"/>
+              </a:rPr>
+              <a:t>Struggles with out-of-vocabulary words</a:t>
+            </a:r>
           </a:p>
           <a:p>
             <a:pPr marL="342900" indent="-342900" defTabSz="914400">
@@ -17274,125 +18882,6 @@
                 <a:tab pos="0" algn="l"/>
               </a:tabLst>
             </a:pPr>
-            <a:r>
-              <a:rPr lang="en-US" sz="2400" b="0" u="none" strike="noStrike" dirty="0">
-                <a:solidFill>
-                  <a:schemeClr val="dk1"/>
-                </a:solidFill>
-                <a:uFillTx/>
-                <a:latin typeface="Calibri"/>
-              </a:rPr>
-              <a:t>BOW is commonly used in:</a:t>
-            </a:r>
-          </a:p>
-          <a:p>
-            <a:pPr marL="342900" indent="-342900" defTabSz="914400">
-              <a:lnSpc>
-                <a:spcPct val="100000"/>
-              </a:lnSpc>
-              <a:buFont typeface="Arial" panose="020B0604020202020204" pitchFamily="34" charset="0"/>
-              <a:buChar char="•"/>
-              <a:tabLst>
-                <a:tab pos="0" algn="l"/>
-              </a:tabLst>
-            </a:pPr>
-            <a:r>
-              <a:rPr lang="en-US" sz="2400" b="0" u="none" strike="noStrike" dirty="0">
-                <a:solidFill>
-                  <a:schemeClr val="dk1"/>
-                </a:solidFill>
-                <a:uFillTx/>
-                <a:latin typeface="Calibri"/>
-              </a:rPr>
-              <a:t>Text classification (spam detection, sentiment analysis)</a:t>
-            </a:r>
-          </a:p>
-          <a:p>
-            <a:pPr marL="342900" indent="-342900" defTabSz="914400">
-              <a:lnSpc>
-                <a:spcPct val="100000"/>
-              </a:lnSpc>
-              <a:buFont typeface="Arial" panose="020B0604020202020204" pitchFamily="34" charset="0"/>
-              <a:buChar char="•"/>
-              <a:tabLst>
-                <a:tab pos="0" algn="l"/>
-              </a:tabLst>
-            </a:pPr>
-            <a:r>
-              <a:rPr lang="en-US" sz="2400" b="0" u="none" strike="noStrike" dirty="0">
-                <a:solidFill>
-                  <a:schemeClr val="dk1"/>
-                </a:solidFill>
-                <a:uFillTx/>
-                <a:latin typeface="Calibri"/>
-              </a:rPr>
-              <a:t>Document clustering</a:t>
-            </a:r>
-          </a:p>
-          <a:p>
-            <a:pPr marL="342900" indent="-342900" defTabSz="914400">
-              <a:lnSpc>
-                <a:spcPct val="100000"/>
-              </a:lnSpc>
-              <a:buFont typeface="Arial" panose="020B0604020202020204" pitchFamily="34" charset="0"/>
-              <a:buChar char="•"/>
-              <a:tabLst>
-                <a:tab pos="0" algn="l"/>
-              </a:tabLst>
-            </a:pPr>
-            <a:r>
-              <a:rPr lang="en-US" sz="2400" b="0" u="none" strike="noStrike" dirty="0">
-                <a:solidFill>
-                  <a:schemeClr val="dk1"/>
-                </a:solidFill>
-                <a:uFillTx/>
-                <a:latin typeface="Calibri"/>
-              </a:rPr>
-              <a:t>Information retrieval</a:t>
-            </a:r>
-          </a:p>
-          <a:p>
-            <a:pPr marL="342900" indent="-342900" defTabSz="914400">
-              <a:lnSpc>
-                <a:spcPct val="100000"/>
-              </a:lnSpc>
-              <a:buFont typeface="Arial" panose="020B0604020202020204" pitchFamily="34" charset="0"/>
-              <a:buChar char="•"/>
-              <a:tabLst>
-                <a:tab pos="0" algn="l"/>
-              </a:tabLst>
-            </a:pPr>
-            <a:r>
-              <a:rPr lang="en-US" sz="2400" b="0" u="none" strike="noStrike" dirty="0">
-                <a:solidFill>
-                  <a:schemeClr val="dk1"/>
-                </a:solidFill>
-                <a:uFillTx/>
-                <a:latin typeface="Calibri"/>
-              </a:rPr>
-              <a:t>Topic modeling</a:t>
-            </a:r>
-          </a:p>
-          <a:p>
-            <a:pPr indent="0" defTabSz="914400">
-              <a:lnSpc>
-                <a:spcPct val="100000"/>
-              </a:lnSpc>
-              <a:buNone/>
-              <a:tabLst>
-                <a:tab pos="0" algn="l"/>
-              </a:tabLst>
-            </a:pPr>
-            <a:r>
-              <a:rPr lang="en-US" sz="2400" b="1" u="none" strike="noStrike" dirty="0">
-                <a:solidFill>
-                  <a:schemeClr val="dk1"/>
-                </a:solidFill>
-                <a:uFillTx/>
-                <a:latin typeface="Calibri"/>
-              </a:rPr>
-              <a:t>Advantages</a:t>
-            </a:r>
             <a:endParaRPr lang="en-US" sz="2400" b="0" u="none" strike="noStrike" dirty="0">
               <a:solidFill>
                 <a:schemeClr val="dk1"/>
@@ -17400,72 +18889,6 @@
               <a:uFillTx/>
               <a:latin typeface="Calibri"/>
             </a:endParaRPr>
-          </a:p>
-          <a:p>
-            <a:pPr marL="342900" indent="-342900" defTabSz="914400">
-              <a:lnSpc>
-                <a:spcPct val="100000"/>
-              </a:lnSpc>
-              <a:buFont typeface="Arial" panose="020B0604020202020204" pitchFamily="34" charset="0"/>
-              <a:buChar char="•"/>
-              <a:tabLst>
-                <a:tab pos="0" algn="l"/>
-              </a:tabLst>
-            </a:pPr>
-            <a:r>
-              <a:rPr lang="en-US" sz="2400" b="0" u="none" strike="noStrike" dirty="0">
-                <a:solidFill>
-                  <a:schemeClr val="dk1"/>
-                </a:solidFill>
-                <a:uFillTx/>
-                <a:latin typeface="Calibri"/>
-              </a:rPr>
-              <a:t>Simple to understand and implement</a:t>
-            </a:r>
-          </a:p>
-          <a:p>
-            <a:pPr marL="342900" indent="-342900" defTabSz="914400">
-              <a:lnSpc>
-                <a:spcPct val="100000"/>
-              </a:lnSpc>
-              <a:buFont typeface="Arial" panose="020B0604020202020204" pitchFamily="34" charset="0"/>
-              <a:buChar char="•"/>
-              <a:tabLst>
-                <a:tab pos="0" algn="l"/>
-              </a:tabLst>
-            </a:pPr>
-            <a:r>
-              <a:rPr lang="en-US" sz="2400" b="0" u="none" strike="noStrike" dirty="0">
-                <a:solidFill>
-                  <a:schemeClr val="dk1"/>
-                </a:solidFill>
-                <a:uFillTx/>
-                <a:latin typeface="Calibri"/>
-              </a:rPr>
-              <a:t>Computationally efficient</a:t>
-            </a:r>
-          </a:p>
-          <a:p>
-            <a:pPr marL="342900" indent="-342900" defTabSz="914400">
-              <a:lnSpc>
-                <a:spcPct val="100000"/>
-              </a:lnSpc>
-              <a:buFont typeface="Arial" panose="020B0604020202020204" pitchFamily="34" charset="0"/>
-              <a:buChar char="•"/>
-              <a:tabLst>
-                <a:tab pos="0" algn="l"/>
-              </a:tabLst>
-            </a:pPr>
-            <a:r>
-              <a:rPr lang="en-US" sz="2400" b="0" u="none" strike="noStrike" dirty="0">
-                <a:solidFill>
-                  <a:schemeClr val="dk1"/>
-                </a:solidFill>
-                <a:uFillTx/>
-                <a:latin typeface="Calibri"/>
-              </a:rPr>
-              <a:t>Effective for many basic NLP tasks</a:t>
-            </a:r>
           </a:p>
         </p:txBody>
       </p:sp>
@@ -19526,7 +20949,7 @@
         <p:spPr>
           <a:xfrm>
             <a:off x="838080" y="1784160"/>
-            <a:ext cx="10515240" cy="3330420"/>
+            <a:ext cx="10515240" cy="2875167"/>
           </a:xfrm>
           <a:prstGeom prst="rect">
             <a:avLst/>
@@ -19560,7 +20983,7 @@
           <a:p>
             <a:pPr>
               <a:lnSpc>
-                <a:spcPts val="1425"/>
+                <a:spcPts val="1200"/>
               </a:lnSpc>
               <a:buNone/>
             </a:pPr>
@@ -19645,7 +21068,7 @@
           <a:p>
             <a:pPr>
               <a:lnSpc>
-                <a:spcPts val="1425"/>
+                <a:spcPts val="1200"/>
               </a:lnSpc>
               <a:buNone/>
             </a:pPr>
@@ -19672,7 +21095,7 @@
           <a:p>
             <a:pPr>
               <a:lnSpc>
-                <a:spcPts val="1425"/>
+                <a:spcPts val="1200"/>
               </a:lnSpc>
               <a:buNone/>
             </a:pPr>
@@ -19710,7 +21133,7 @@
           <a:p>
             <a:pPr>
               <a:lnSpc>
-                <a:spcPts val="1425"/>
+                <a:spcPts val="1200"/>
               </a:lnSpc>
               <a:buNone/>
             </a:pPr>
@@ -19748,7 +21171,7 @@
           <a:p>
             <a:pPr>
               <a:lnSpc>
-                <a:spcPts val="1425"/>
+                <a:spcPts val="1200"/>
               </a:lnSpc>
               <a:buNone/>
             </a:pPr>
@@ -19783,7 +21206,7 @@
           <a:p>
             <a:pPr>
               <a:lnSpc>
-                <a:spcPts val="1425"/>
+                <a:spcPts val="1200"/>
               </a:lnSpc>
               <a:buNone/>
             </a:pPr>
@@ -19801,7 +21224,7 @@
           <a:p>
             <a:pPr>
               <a:lnSpc>
-                <a:spcPts val="1425"/>
+                <a:spcPts val="1200"/>
               </a:lnSpc>
               <a:buNone/>
             </a:pPr>
@@ -19858,7 +21281,7 @@
           <a:p>
             <a:pPr>
               <a:lnSpc>
-                <a:spcPts val="1425"/>
+                <a:spcPts val="1200"/>
               </a:lnSpc>
               <a:buNone/>
             </a:pPr>
@@ -19892,7 +21315,7 @@
           <a:p>
             <a:pPr>
               <a:lnSpc>
-                <a:spcPts val="1425"/>
+                <a:spcPts val="1200"/>
               </a:lnSpc>
               <a:buNone/>
             </a:pPr>
@@ -19917,7 +21340,7 @@
           <a:p>
             <a:pPr>
               <a:lnSpc>
-                <a:spcPts val="1425"/>
+                <a:spcPts val="1200"/>
               </a:lnSpc>
               <a:buNone/>
             </a:pPr>
@@ -19942,7 +21365,7 @@
           <a:p>
             <a:pPr>
               <a:lnSpc>
-                <a:spcPts val="1425"/>
+                <a:spcPts val="1200"/>
               </a:lnSpc>
               <a:buNone/>
             </a:pPr>
@@ -19990,7 +21413,7 @@
           <a:p>
             <a:pPr>
               <a:lnSpc>
-                <a:spcPts val="1425"/>
+                <a:spcPts val="1200"/>
               </a:lnSpc>
               <a:buNone/>
             </a:pPr>
@@ -20096,7 +21519,7 @@
           <a:p>
             <a:pPr>
               <a:lnSpc>
-                <a:spcPts val="1425"/>
+                <a:spcPts val="1200"/>
               </a:lnSpc>
             </a:pPr>
             <a:r>
@@ -20126,13 +21549,13 @@
           <p:nvPr>
             <p:extLst>
               <p:ext uri="{D42A27DB-BD31-4B8C-83A1-F6EECF244321}">
-                <p14:modId xmlns:p14="http://schemas.microsoft.com/office/powerpoint/2010/main" val="4255696938"/>
+                <p14:modId xmlns:p14="http://schemas.microsoft.com/office/powerpoint/2010/main" val="70068938"/>
               </p:ext>
             </p:extLst>
           </p:nvPr>
         </p:nvGraphicFramePr>
         <p:xfrm>
-          <a:off x="838080" y="5542440"/>
+          <a:off x="838080" y="4863060"/>
           <a:ext cx="11021400" cy="1036320"/>
         </p:xfrm>
         <a:graphic>
@@ -22765,7 +24188,7 @@
                         </a:lnSpc>
                       </a:pPr>
                       <a:r>
-                        <a:rPr lang="en-US" sz="1100" b="0" u="none" strike="noStrike">
+                        <a:rPr lang="en-US" sz="1100" b="0" u="none" strike="noStrike" dirty="0">
                           <a:solidFill>
                             <a:srgbClr val="000000"/>
                           </a:solidFill>
@@ -22774,7 +24197,7 @@
                         </a:rPr>
                         <a:t>0</a:t>
                       </a:r>
-                      <a:endParaRPr lang="en-US" sz="1100" b="0" u="none" strike="noStrike">
+                      <a:endParaRPr lang="en-US" sz="1100" b="0" u="none" strike="noStrike" dirty="0">
                         <a:solidFill>
                           <a:srgbClr val="000000"/>
                         </a:solidFill>
@@ -22993,7 +24416,7 @@
                         </a:lnSpc>
                       </a:pPr>
                       <a:r>
-                        <a:rPr lang="en-US" sz="1100" b="0" u="none" strike="noStrike">
+                        <a:rPr lang="en-US" sz="1100" b="0" u="none" strike="noStrike" dirty="0">
                           <a:solidFill>
                             <a:srgbClr val="000000"/>
                           </a:solidFill>
@@ -23002,7 +24425,7 @@
                         </a:rPr>
                         <a:t>0</a:t>
                       </a:r>
-                      <a:endParaRPr lang="en-US" sz="1100" b="0" u="none" strike="noStrike">
+                      <a:endParaRPr lang="en-US" sz="1100" b="0" u="none" strike="noStrike" dirty="0">
                         <a:solidFill>
                           <a:srgbClr val="000000"/>
                         </a:solidFill>
@@ -23277,6 +24700,117 @@
           </a:graphicData>
         </a:graphic>
       </p:graphicFrame>
+      <p:sp>
+        <p:nvSpPr>
+          <p:cNvPr id="2" name="Content Placeholder 2">
+            <a:extLst>
+              <a:ext uri="{FF2B5EF4-FFF2-40B4-BE49-F238E27FC236}">
+                <a16:creationId xmlns:a16="http://schemas.microsoft.com/office/drawing/2014/main" id="{9F86630B-6277-607F-1A5C-CDB3A4D93BB7}"/>
+              </a:ext>
+            </a:extLst>
+          </p:cNvPr>
+          <p:cNvSpPr/>
+          <p:nvPr/>
+        </p:nvSpPr>
+        <p:spPr>
+          <a:xfrm>
+            <a:off x="10230761" y="6458400"/>
+            <a:ext cx="1751493" cy="399600"/>
+          </a:xfrm>
+          <a:prstGeom prst="rect">
+            <a:avLst/>
+          </a:prstGeom>
+          <a:noFill/>
+          <a:ln w="0">
+            <a:noFill/>
+          </a:ln>
+        </p:spPr>
+        <p:style>
+          <a:lnRef idx="0">
+            <a:scrgbClr r="0" g="0" b="0"/>
+          </a:lnRef>
+          <a:fillRef idx="0">
+            <a:scrgbClr r="0" g="0" b="0"/>
+          </a:fillRef>
+          <a:effectRef idx="0">
+            <a:scrgbClr r="0" g="0" b="0"/>
+          </a:effectRef>
+          <a:fontRef idx="minor"/>
+        </p:style>
+        <p:txBody>
+          <a:bodyPr anchor="t">
+            <a:normAutofit fontScale="92500" lnSpcReduction="20000"/>
+          </a:bodyPr>
+          <a:lstStyle/>
+          <a:p>
+            <a:pPr algn="ctr" defTabSz="914400">
+              <a:lnSpc>
+                <a:spcPct val="90000"/>
+              </a:lnSpc>
+              <a:spcBef>
+                <a:spcPts val="1001"/>
+              </a:spcBef>
+              <a:tabLst>
+                <a:tab pos="0" algn="l"/>
+              </a:tabLst>
+            </a:pPr>
+            <a:r>
+              <a:rPr lang="en-US" sz="1400" b="0" u="none" strike="noStrike" dirty="0">
+                <a:solidFill>
+                  <a:srgbClr val="0070C0"/>
+                </a:solidFill>
+                <a:uFillTx/>
+                <a:latin typeface="Calibri"/>
+              </a:rPr>
+              <a:t>Open Colab and go to TF-IDF example</a:t>
+            </a:r>
+            <a:endParaRPr lang="en-US" sz="1400" b="0" u="none" strike="noStrike" dirty="0">
+              <a:solidFill>
+                <a:srgbClr val="000000"/>
+              </a:solidFill>
+              <a:uFillTx/>
+              <a:latin typeface="Arial"/>
+            </a:endParaRPr>
+          </a:p>
+        </p:txBody>
+      </p:sp>
+      <p:pic>
+        <p:nvPicPr>
+          <p:cNvPr id="3" name="Graphic 6">
+            <a:hlinkClick r:id="rId2"/>
+            <a:extLst>
+              <a:ext uri="{FF2B5EF4-FFF2-40B4-BE49-F238E27FC236}">
+                <a16:creationId xmlns:a16="http://schemas.microsoft.com/office/drawing/2014/main" id="{12B2D59F-BB12-6EC1-7754-F99FB98DC6B1}"/>
+              </a:ext>
+            </a:extLst>
+          </p:cNvPr>
+          <p:cNvPicPr/>
+          <p:nvPr/>
+        </p:nvPicPr>
+        <p:blipFill>
+          <a:blip r:embed="rId3">
+            <a:extLst>
+              <a:ext uri="{96DAC541-7B7A-43D3-8B79-37D633B846F1}">
+                <asvg:svgBlip xmlns:asvg="http://schemas.microsoft.com/office/drawing/2016/SVG/main" r:embed="rId4"/>
+              </a:ext>
+            </a:extLst>
+          </a:blip>
+          <a:stretch/>
+        </p:blipFill>
+        <p:spPr>
+          <a:xfrm>
+            <a:off x="10431000" y="6231240"/>
+            <a:ext cx="1114200" cy="190080"/>
+          </a:xfrm>
+          <a:prstGeom prst="rect">
+            <a:avLst/>
+          </a:prstGeom>
+          <a:noFill/>
+          <a:ln w="0">
+            <a:noFill/>
+          </a:ln>
+        </p:spPr>
+      </p:pic>
     </p:spTree>
   </p:cSld>
   <p:clrMapOvr>
@@ -23751,247 +25285,6 @@
       </p:grpSpPr>
       <p:sp>
         <p:nvSpPr>
-          <p:cNvPr id="157" name="PlaceHolder 1"/>
-          <p:cNvSpPr>
-            <a:spLocks noGrp="1"/>
-          </p:cNvSpPr>
-          <p:nvPr>
-            <p:ph type="title"/>
-          </p:nvPr>
-        </p:nvSpPr>
-        <p:spPr>
-          <a:xfrm>
-            <a:off x="838080" y="797400"/>
-            <a:ext cx="10515240" cy="747720"/>
-          </a:xfrm>
-          <a:prstGeom prst="rect">
-            <a:avLst/>
-          </a:prstGeom>
-          <a:solidFill>
-            <a:srgbClr val="67337A"/>
-          </a:solidFill>
-          <a:ln w="0">
-            <a:noFill/>
-          </a:ln>
-        </p:spPr>
-        <p:txBody>
-          <a:bodyPr lIns="91440" tIns="45720" rIns="91440" bIns="45720" anchor="ctr">
-            <a:noAutofit/>
-          </a:bodyPr>
-          <a:lstStyle/>
-          <a:p>
-            <a:pPr indent="0" defTabSz="914400">
-              <a:lnSpc>
-                <a:spcPct val="90000"/>
-              </a:lnSpc>
-              <a:buNone/>
-            </a:pPr>
-            <a:r>
-              <a:rPr lang="en-US" sz="2800" b="0" u="none" strike="noStrike">
-                <a:solidFill>
-                  <a:schemeClr val="lt1"/>
-                </a:solidFill>
-                <a:uFillTx/>
-                <a:latin typeface="Calibri Light"/>
-              </a:rPr>
-              <a:t>Limitations of BoW Method</a:t>
-            </a:r>
-            <a:endParaRPr lang="en-US" sz="2800" b="0" u="none" strike="noStrike">
-              <a:solidFill>
-                <a:schemeClr val="dk1"/>
-              </a:solidFill>
-              <a:uFillTx/>
-              <a:latin typeface="Calibri"/>
-            </a:endParaRPr>
-          </a:p>
-        </p:txBody>
-      </p:sp>
-      <p:sp>
-        <p:nvSpPr>
-          <p:cNvPr id="158" name="PlaceHolder 2"/>
-          <p:cNvSpPr>
-            <a:spLocks noGrp="1"/>
-          </p:cNvSpPr>
-          <p:nvPr>
-            <p:ph/>
-          </p:nvPr>
-        </p:nvSpPr>
-        <p:spPr>
-          <a:xfrm>
-            <a:off x="838080" y="1706040"/>
-            <a:ext cx="10515240" cy="4990680"/>
-          </a:xfrm>
-          <a:prstGeom prst="rect">
-            <a:avLst/>
-          </a:prstGeom>
-          <a:noFill/>
-          <a:ln w="0">
-            <a:noFill/>
-          </a:ln>
-        </p:spPr>
-        <p:txBody>
-          <a:bodyPr lIns="91440" tIns="45720" rIns="91440" bIns="45720" anchor="t">
-            <a:normAutofit/>
-          </a:bodyPr>
-          <a:lstStyle/>
-          <a:p>
-            <a:pPr marL="342900" indent="-342900" defTabSz="914400">
-              <a:lnSpc>
-                <a:spcPct val="90000"/>
-              </a:lnSpc>
-              <a:spcBef>
-                <a:spcPts val="1001"/>
-              </a:spcBef>
-              <a:buFont typeface="Arial" panose="020B0604020202020204" pitchFamily="34" charset="0"/>
-              <a:buChar char="•"/>
-              <a:tabLst>
-                <a:tab pos="0" algn="l"/>
-              </a:tabLst>
-            </a:pPr>
-            <a:r>
-              <a:rPr lang="en-US" sz="2400" b="0" u="none" strike="noStrike" dirty="0">
-                <a:solidFill>
-                  <a:schemeClr val="dk1"/>
-                </a:solidFill>
-                <a:uFillTx/>
-                <a:latin typeface="Calibri"/>
-              </a:rPr>
-              <a:t>Loses word order information</a:t>
-            </a:r>
-          </a:p>
-          <a:p>
-            <a:pPr marL="342900" indent="-342900" defTabSz="914400">
-              <a:lnSpc>
-                <a:spcPct val="90000"/>
-              </a:lnSpc>
-              <a:spcBef>
-                <a:spcPts val="1001"/>
-              </a:spcBef>
-              <a:buClr>
-                <a:srgbClr val="000000"/>
-              </a:buClr>
-              <a:buFont typeface="Arial" panose="020B0604020202020204" pitchFamily="34" charset="0"/>
-              <a:buChar char="•"/>
-              <a:tabLst>
-                <a:tab pos="0" algn="l"/>
-              </a:tabLst>
-            </a:pPr>
-            <a:r>
-              <a:rPr lang="en-US" sz="2400" b="0" u="none" strike="noStrike" dirty="0">
-                <a:solidFill>
-                  <a:schemeClr val="dk1"/>
-                </a:solidFill>
-                <a:uFillTx/>
-                <a:latin typeface="Calibri"/>
-              </a:rPr>
-              <a:t>Ignores semantics and context</a:t>
-            </a:r>
-          </a:p>
-          <a:p>
-            <a:pPr marL="342900" indent="-342900" defTabSz="914400">
-              <a:lnSpc>
-                <a:spcPct val="90000"/>
-              </a:lnSpc>
-              <a:spcBef>
-                <a:spcPts val="1001"/>
-              </a:spcBef>
-              <a:buClr>
-                <a:srgbClr val="000000"/>
-              </a:buClr>
-              <a:buFont typeface="Arial" panose="020B0604020202020204" pitchFamily="34" charset="0"/>
-              <a:buChar char="•"/>
-              <a:tabLst>
-                <a:tab pos="0" algn="l"/>
-              </a:tabLst>
-            </a:pPr>
-            <a:r>
-              <a:rPr lang="en-US" sz="2400" b="0" u="none" strike="noStrike" dirty="0">
-                <a:solidFill>
-                  <a:schemeClr val="dk1"/>
-                </a:solidFill>
-                <a:uFillTx/>
-                <a:latin typeface="Calibri"/>
-              </a:rPr>
-              <a:t>Creates high-dimensional, sparse vectors</a:t>
-            </a:r>
-          </a:p>
-          <a:p>
-            <a:pPr marL="342900" indent="-342900" defTabSz="914400">
-              <a:lnSpc>
-                <a:spcPct val="90000"/>
-              </a:lnSpc>
-              <a:spcBef>
-                <a:spcPts val="1001"/>
-              </a:spcBef>
-              <a:buClr>
-                <a:srgbClr val="000000"/>
-              </a:buClr>
-              <a:buFont typeface="Arial" panose="020B0604020202020204" pitchFamily="34" charset="0"/>
-              <a:buChar char="•"/>
-              <a:tabLst>
-                <a:tab pos="0" algn="l"/>
-              </a:tabLst>
-            </a:pPr>
-            <a:r>
-              <a:rPr lang="en-US" sz="2400" b="0" u="none" strike="noStrike" dirty="0">
-                <a:solidFill>
-                  <a:schemeClr val="dk1"/>
-                </a:solidFill>
-                <a:uFillTx/>
-                <a:latin typeface="Calibri"/>
-              </a:rPr>
-              <a:t>Struggles with out-of-vocabulary words</a:t>
-            </a:r>
-          </a:p>
-          <a:p>
-            <a:pPr defTabSz="914400">
-              <a:lnSpc>
-                <a:spcPct val="90000"/>
-              </a:lnSpc>
-              <a:spcBef>
-                <a:spcPts val="1001"/>
-              </a:spcBef>
-              <a:tabLst>
-                <a:tab pos="0" algn="l"/>
-              </a:tabLst>
-            </a:pPr>
-            <a:endParaRPr lang="en-US" sz="2400" b="0" u="none" strike="noStrike" dirty="0">
-              <a:solidFill>
-                <a:schemeClr val="dk1"/>
-              </a:solidFill>
-              <a:uFillTx/>
-              <a:latin typeface="Calibri"/>
-            </a:endParaRPr>
-          </a:p>
-        </p:txBody>
-      </p:sp>
-    </p:spTree>
-  </p:cSld>
-  <p:clrMapOvr>
-    <a:masterClrMapping/>
-  </p:clrMapOvr>
-</p:sld>
-</file>
-
-<file path=ppt/slides/slide27.xml><?xml version="1.0" encoding="utf-8"?>
-<p:sld xmlns:a="http://schemas.openxmlformats.org/drawingml/2006/main" xmlns:r="http://schemas.openxmlformats.org/officeDocument/2006/relationships" xmlns:p="http://schemas.openxmlformats.org/presentationml/2006/main">
-  <p:cSld>
-    <p:spTree>
-      <p:nvGrpSpPr>
-        <p:cNvPr id="1" name=""/>
-        <p:cNvGrpSpPr/>
-        <p:nvPr/>
-      </p:nvGrpSpPr>
-      <p:grpSpPr>
-        <a:xfrm>
-          <a:off x="0" y="0"/>
-          <a:ext cx="0" cy="0"/>
-          <a:chOff x="0" y="0"/>
-          <a:chExt cx="0" cy="0"/>
-        </a:xfrm>
-      </p:grpSpPr>
-      <p:sp>
-        <p:nvSpPr>
           <p:cNvPr id="159" name="PlaceHolder 1"/>
           <p:cNvSpPr>
             <a:spLocks noGrp="1"/>
@@ -24114,7 +25407,7 @@
 </p:sld>
 </file>
 
-<file path=ppt/slides/slide28.xml><?xml version="1.0" encoding="utf-8"?>
+<file path=ppt/slides/slide27.xml><?xml version="1.0" encoding="utf-8"?>
 <p:sld xmlns:a="http://schemas.openxmlformats.org/drawingml/2006/main" xmlns:r="http://schemas.openxmlformats.org/officeDocument/2006/relationships" xmlns:p="http://schemas.openxmlformats.org/presentationml/2006/main">
   <p:cSld>
     <p:spTree>
@@ -24142,10 +25435,6 @@
           </p:nvPr>
         </p:nvSpPr>
         <p:spPr>
-          <a:xfrm>
-            <a:off x="838080" y="797400"/>
-            <a:ext cx="10515240" cy="747720"/>
-          </a:xfrm>
           <a:prstGeom prst="rect">
             <a:avLst/>
           </a:prstGeom>
@@ -24195,14 +25484,10 @@
             <a:spLocks noGrp="1"/>
           </p:cNvSpPr>
           <p:nvPr>
-            <p:ph/>
+            <p:ph idx="1"/>
           </p:nvPr>
         </p:nvSpPr>
         <p:spPr>
-          <a:xfrm>
-            <a:off x="838080" y="1706040"/>
-            <a:ext cx="10515240" cy="1722960"/>
-          </a:xfrm>
           <a:prstGeom prst="rect">
             <a:avLst/>
           </a:prstGeom>
@@ -24361,38 +25646,6 @@
           </a:p>
         </p:txBody>
       </p:sp>
-      <p:pic>
-        <p:nvPicPr>
-          <p:cNvPr id="164" name="Graphic 6">
-            <a:hlinkClick r:id="rId2"/>
-          </p:cNvPr>
-          <p:cNvPicPr/>
-          <p:nvPr/>
-        </p:nvPicPr>
-        <p:blipFill>
-          <a:blip r:embed="rId3">
-            <a:extLst>
-              <a:ext uri="{96DAC541-7B7A-43D3-8B79-37D633B846F1}">
-                <asvg:svgBlip xmlns:asvg="http://schemas.microsoft.com/office/drawing/2016/SVG/main" r:embed="rId4"/>
-              </a:ext>
-            </a:extLst>
-          </a:blip>
-          <a:stretch/>
-        </p:blipFill>
-        <p:spPr>
-          <a:xfrm>
-            <a:off x="8390293" y="4730618"/>
-            <a:ext cx="1469701" cy="289956"/>
-          </a:xfrm>
-          <a:prstGeom prst="rect">
-            <a:avLst/>
-          </a:prstGeom>
-          <a:noFill/>
-          <a:ln w="0">
-            <a:noFill/>
-          </a:ln>
-        </p:spPr>
-      </p:pic>
       <p:pic>
         <p:nvPicPr>
           <p:cNvPr id="2050" name="Picture 2">
@@ -24408,7 +25661,7 @@
           <p:nvPr/>
         </p:nvPicPr>
         <p:blipFill>
-          <a:blip r:embed="rId5">
+          <a:blip r:embed="rId2">
             <a:extLst>
               <a:ext uri="{28A0092B-C50C-407E-A947-70E740481C1C}">
                 <a14:useLocalDpi xmlns:a14="http://schemas.microsoft.com/office/drawing/2010/main" val="0"/>
@@ -24442,24 +25695,20 @@
       </p:pic>
       <p:sp>
         <p:nvSpPr>
-          <p:cNvPr id="2" name="PlaceHolder 2">
+          <p:cNvPr id="3" name="Content Placeholder 2">
             <a:extLst>
               <a:ext uri="{FF2B5EF4-FFF2-40B4-BE49-F238E27FC236}">
-                <a16:creationId xmlns:a16="http://schemas.microsoft.com/office/drawing/2014/main" id="{F3E208A7-9D3D-C8FD-62BA-246574698579}"/>
+                <a16:creationId xmlns:a16="http://schemas.microsoft.com/office/drawing/2014/main" id="{7322A9D0-3D18-E1FF-3896-23ACCCD217FC}"/>
               </a:ext>
             </a:extLst>
           </p:cNvPr>
-          <p:cNvSpPr>
-            <a:spLocks noGrp="1"/>
-          </p:cNvSpPr>
-          <p:nvPr>
-            <p:ph/>
-          </p:nvPr>
+          <p:cNvSpPr/>
+          <p:nvPr/>
         </p:nvSpPr>
         <p:spPr>
           <a:xfrm>
-            <a:off x="7290915" y="5128518"/>
-            <a:ext cx="3940677" cy="356984"/>
+            <a:off x="10230761" y="6458400"/>
+            <a:ext cx="1751493" cy="399600"/>
           </a:xfrm>
           <a:prstGeom prst="rect">
             <a:avLst/>
@@ -24469,36 +25718,436 @@
             <a:noFill/>
           </a:ln>
         </p:spPr>
+        <p:style>
+          <a:lnRef idx="0">
+            <a:scrgbClr r="0" g="0" b="0"/>
+          </a:lnRef>
+          <a:fillRef idx="0">
+            <a:scrgbClr r="0" g="0" b="0"/>
+          </a:fillRef>
+          <a:effectRef idx="0">
+            <a:scrgbClr r="0" g="0" b="0"/>
+          </a:effectRef>
+          <a:fontRef idx="minor"/>
+        </p:style>
         <p:txBody>
-          <a:bodyPr lIns="91440" tIns="45720" rIns="91440" bIns="45720" anchor="t">
-            <a:noAutofit/>
+          <a:bodyPr anchor="t">
+            <a:normAutofit fontScale="77500" lnSpcReduction="20000"/>
           </a:bodyPr>
           <a:lstStyle/>
           <a:p>
-            <a:pPr defTabSz="914400">
+            <a:pPr algn="ctr" defTabSz="914400">
               <a:lnSpc>
                 <a:spcPct val="90000"/>
               </a:lnSpc>
               <a:spcBef>
                 <a:spcPts val="1001"/>
               </a:spcBef>
-              <a:buClr>
+              <a:tabLst>
+                <a:tab pos="0" algn="l"/>
+              </a:tabLst>
+            </a:pPr>
+            <a:r>
+              <a:rPr lang="en-US" sz="1400" b="0" u="none" strike="noStrike" dirty="0">
+                <a:solidFill>
+                  <a:srgbClr val="0070C0"/>
+                </a:solidFill>
+                <a:uFillTx/>
+                <a:latin typeface="Calibri"/>
+              </a:rPr>
+              <a:t>Open Colab and go to sentiment analysis example</a:t>
+            </a:r>
+            <a:endParaRPr lang="en-US" sz="1400" b="0" u="none" strike="noStrike" dirty="0">
+              <a:solidFill>
                 <a:srgbClr val="000000"/>
-              </a:buClr>
-            </a:pPr>
-            <a:r>
-              <a:rPr lang="en-US" sz="1400" b="0" u="none" strike="noStrike" dirty="0">
-                <a:solidFill>
-                  <a:schemeClr val="dk1"/>
-                </a:solidFill>
-                <a:uFillTx/>
-                <a:latin typeface="Calibri"/>
-              </a:rPr>
-              <a:t>Goto  Sentiment Analysis Example in the Notebook</a:t>
-            </a:r>
+              </a:solidFill>
+              <a:uFillTx/>
+              <a:latin typeface="Arial"/>
+            </a:endParaRPr>
           </a:p>
         </p:txBody>
       </p:sp>
+      <p:pic>
+        <p:nvPicPr>
+          <p:cNvPr id="4" name="Graphic 6">
+            <a:hlinkClick r:id="rId3"/>
+            <a:extLst>
+              <a:ext uri="{FF2B5EF4-FFF2-40B4-BE49-F238E27FC236}">
+                <a16:creationId xmlns:a16="http://schemas.microsoft.com/office/drawing/2014/main" id="{C1F36920-6CAD-70BE-C466-935BEA705640}"/>
+              </a:ext>
+            </a:extLst>
+          </p:cNvPr>
+          <p:cNvPicPr/>
+          <p:nvPr/>
+        </p:nvPicPr>
+        <p:blipFill>
+          <a:blip r:embed="rId4">
+            <a:extLst>
+              <a:ext uri="{96DAC541-7B7A-43D3-8B79-37D633B846F1}">
+                <asvg:svgBlip xmlns:asvg="http://schemas.microsoft.com/office/drawing/2016/SVG/main" r:embed="rId5"/>
+              </a:ext>
+            </a:extLst>
+          </a:blip>
+          <a:stretch/>
+        </p:blipFill>
+        <p:spPr>
+          <a:xfrm>
+            <a:off x="10431000" y="6231240"/>
+            <a:ext cx="1114200" cy="190080"/>
+          </a:xfrm>
+          <a:prstGeom prst="rect">
+            <a:avLst/>
+          </a:prstGeom>
+          <a:noFill/>
+          <a:ln w="0">
+            <a:noFill/>
+          </a:ln>
+        </p:spPr>
+      </p:pic>
+    </p:spTree>
+  </p:cSld>
+  <p:clrMapOvr>
+    <a:masterClrMapping/>
+  </p:clrMapOvr>
+</p:sld>
+</file>
+
+<file path=ppt/slides/slide28.xml><?xml version="1.0" encoding="utf-8"?>
+<p:sld xmlns:a="http://schemas.openxmlformats.org/drawingml/2006/main" xmlns:r="http://schemas.openxmlformats.org/officeDocument/2006/relationships" xmlns:p="http://schemas.openxmlformats.org/presentationml/2006/main">
+  <p:cSld>
+    <p:spTree>
+      <p:nvGrpSpPr>
+        <p:cNvPr id="1" name=""/>
+        <p:cNvGrpSpPr/>
+        <p:nvPr/>
+      </p:nvGrpSpPr>
+      <p:grpSpPr>
+        <a:xfrm>
+          <a:off x="0" y="0"/>
+          <a:ext cx="0" cy="0"/>
+          <a:chOff x="0" y="0"/>
+          <a:chExt cx="0" cy="0"/>
+        </a:xfrm>
+      </p:grpSpPr>
+      <p:sp>
+        <p:nvSpPr>
+          <p:cNvPr id="2" name="Title 1"/>
+          <p:cNvSpPr>
+            <a:spLocks noGrp="1"/>
+          </p:cNvSpPr>
+          <p:nvPr>
+            <p:ph type="title"/>
+          </p:nvPr>
+        </p:nvSpPr>
+        <p:spPr/>
+        <p:txBody>
+          <a:bodyPr/>
+          <a:lstStyle/>
+          <a:p>
+            <a:r>
+              <a:rPr lang="en-US" dirty="0"/>
+              <a:t>Naive Bayes Classifier for Sentiment Analysis</a:t>
+            </a:r>
+            <a:endParaRPr dirty="0"/>
+          </a:p>
+        </p:txBody>
+      </p:sp>
+      <p:sp>
+        <p:nvSpPr>
+          <p:cNvPr id="3" name="Content Placeholder 2"/>
+          <p:cNvSpPr>
+            <a:spLocks noGrp="1"/>
+          </p:cNvSpPr>
+          <p:nvPr>
+            <p:ph idx="1"/>
+          </p:nvPr>
+        </p:nvSpPr>
+        <p:spPr>
+          <a:xfrm>
+            <a:off x="838200" y="1706008"/>
+            <a:ext cx="5257800" cy="2285224"/>
+          </a:xfrm>
+        </p:spPr>
+        <p:txBody>
+          <a:bodyPr>
+            <a:normAutofit/>
+          </a:bodyPr>
+          <a:lstStyle/>
+          <a:p>
+            <a:r>
+              <a:rPr sz="2000" dirty="0"/>
+              <a:t>A probabilistic machine learning model based on Bayes’ Theorem</a:t>
+            </a:r>
+          </a:p>
+          <a:p>
+            <a:r>
+              <a:rPr sz="2000" dirty="0"/>
+              <a:t>Assumes independence between features (words in our case)</a:t>
+            </a:r>
+          </a:p>
+          <a:p>
+            <a:r>
+              <a:rPr sz="2000" dirty="0"/>
+              <a:t>Commonly used for text classification (e.g. spam detection, sentiment analysis)</a:t>
+            </a:r>
+          </a:p>
+          <a:p>
+            <a:endParaRPr sz="2000" dirty="0"/>
+          </a:p>
+        </p:txBody>
+      </p:sp>
+      <p:pic>
+        <p:nvPicPr>
+          <p:cNvPr id="32" name="Picture 31">
+            <a:extLst>
+              <a:ext uri="{FF2B5EF4-FFF2-40B4-BE49-F238E27FC236}">
+                <a16:creationId xmlns:a16="http://schemas.microsoft.com/office/drawing/2014/main" id="{D4E70C0B-CB58-ABE7-5B5E-0B4085ED8903}"/>
+              </a:ext>
+            </a:extLst>
+          </p:cNvPr>
+          <p:cNvPicPr>
+            <a:picLocks noChangeAspect="1"/>
+          </p:cNvPicPr>
+          <p:nvPr/>
+        </p:nvPicPr>
+        <p:blipFill>
+          <a:blip r:embed="rId2"/>
+          <a:stretch>
+            <a:fillRect/>
+          </a:stretch>
+        </p:blipFill>
+        <p:spPr>
+          <a:xfrm>
+            <a:off x="1217365" y="3890919"/>
+            <a:ext cx="3704975" cy="2231853"/>
+          </a:xfrm>
+          <a:prstGeom prst="rect">
+            <a:avLst/>
+          </a:prstGeom>
+        </p:spPr>
+      </p:pic>
+      <p:pic>
+        <p:nvPicPr>
+          <p:cNvPr id="1028" name="Picture 4" descr="Calculate conditional probabilities - CFA, FRM, and Actuarial Exams Study  Notes">
+            <a:extLst>
+              <a:ext uri="{FF2B5EF4-FFF2-40B4-BE49-F238E27FC236}">
+                <a16:creationId xmlns:a16="http://schemas.microsoft.com/office/drawing/2014/main" id="{974A0B8E-89DD-B734-C25D-CBAC00E08EDD}"/>
+              </a:ext>
+            </a:extLst>
+          </p:cNvPr>
+          <p:cNvPicPr>
+            <a:picLocks noChangeAspect="1" noChangeArrowheads="1"/>
+          </p:cNvPicPr>
+          <p:nvPr/>
+        </p:nvPicPr>
+        <p:blipFill>
+          <a:blip r:embed="rId3">
+            <a:extLst>
+              <a:ext uri="{28A0092B-C50C-407E-A947-70E740481C1C}">
+                <a14:useLocalDpi xmlns:a14="http://schemas.microsoft.com/office/drawing/2010/main" val="0"/>
+              </a:ext>
+            </a:extLst>
+          </a:blip>
+          <a:srcRect/>
+          <a:stretch>
+            <a:fillRect/>
+          </a:stretch>
+        </p:blipFill>
+        <p:spPr bwMode="auto">
+          <a:xfrm>
+            <a:off x="6371256" y="1904485"/>
+            <a:ext cx="4982544" cy="2778726"/>
+          </a:xfrm>
+          <a:prstGeom prst="rect">
+            <a:avLst/>
+          </a:prstGeom>
+          <a:noFill/>
+          <a:extLst>
+            <a:ext uri="{909E8E84-426E-40DD-AFC4-6F175D3DCCD1}">
+              <a14:hiddenFill xmlns:a14="http://schemas.microsoft.com/office/drawing/2010/main">
+                <a:solidFill>
+                  <a:srgbClr val="FFFFFF"/>
+                </a:solidFill>
+              </a14:hiddenFill>
+            </a:ext>
+          </a:extLst>
+        </p:spPr>
+      </p:pic>
+      <p:cxnSp>
+        <p:nvCxnSpPr>
+          <p:cNvPr id="34" name="Straight Arrow Connector 33">
+            <a:extLst>
+              <a:ext uri="{FF2B5EF4-FFF2-40B4-BE49-F238E27FC236}">
+                <a16:creationId xmlns:a16="http://schemas.microsoft.com/office/drawing/2014/main" id="{F314804B-B785-97DA-92C0-0F635BD5F896}"/>
+              </a:ext>
+            </a:extLst>
+          </p:cNvPr>
+          <p:cNvCxnSpPr>
+            <a:cxnSpLocks/>
+          </p:cNvCxnSpPr>
+          <p:nvPr/>
+        </p:nvCxnSpPr>
+        <p:spPr>
+          <a:xfrm flipV="1">
+            <a:off x="7821827" y="4392828"/>
+            <a:ext cx="472893" cy="797010"/>
+          </a:xfrm>
+          <a:prstGeom prst="straightConnector1">
+            <a:avLst/>
+          </a:prstGeom>
+          <a:ln w="19050" cap="flat" cmpd="sng" algn="ctr">
+            <a:solidFill>
+              <a:schemeClr val="dk1"/>
+            </a:solidFill>
+            <a:prstDash val="solid"/>
+            <a:round/>
+            <a:headEnd type="none" w="med" len="med"/>
+            <a:tailEnd type="arrow" w="med" len="med"/>
+          </a:ln>
+        </p:spPr>
+        <p:style>
+          <a:lnRef idx="0">
+            <a:scrgbClr r="0" g="0" b="0"/>
+          </a:lnRef>
+          <a:fillRef idx="0">
+            <a:scrgbClr r="0" g="0" b="0"/>
+          </a:fillRef>
+          <a:effectRef idx="0">
+            <a:scrgbClr r="0" g="0" b="0"/>
+          </a:effectRef>
+          <a:fontRef idx="minor">
+            <a:schemeClr val="tx1"/>
+          </a:fontRef>
+        </p:style>
+      </p:cxnSp>
+      <p:sp>
+        <p:nvSpPr>
+          <p:cNvPr id="36" name="TextBox 35">
+            <a:extLst>
+              <a:ext uri="{FF2B5EF4-FFF2-40B4-BE49-F238E27FC236}">
+                <a16:creationId xmlns:a16="http://schemas.microsoft.com/office/drawing/2014/main" id="{8A872414-729F-9E03-B477-BAABC9F887E1}"/>
+              </a:ext>
+            </a:extLst>
+          </p:cNvPr>
+          <p:cNvSpPr txBox="1"/>
+          <p:nvPr/>
+        </p:nvSpPr>
+        <p:spPr>
+          <a:xfrm>
+            <a:off x="9745291" y="5413063"/>
+            <a:ext cx="1802252" cy="338554"/>
+          </a:xfrm>
+          <a:prstGeom prst="rect">
+            <a:avLst/>
+          </a:prstGeom>
+          <a:noFill/>
+        </p:spPr>
+        <p:txBody>
+          <a:bodyPr wrap="square" rtlCol="0">
+            <a:spAutoFit/>
+          </a:bodyPr>
+          <a:lstStyle/>
+          <a:p>
+            <a:pPr algn="ctr"/>
+            <a:r>
+              <a:rPr lang="en-US" sz="1600" b="1" dirty="0">
+                <a:solidFill>
+                  <a:srgbClr val="0070C0"/>
+                </a:solidFill>
+              </a:rPr>
+              <a:t>P(black and black)</a:t>
+            </a:r>
+          </a:p>
+        </p:txBody>
+      </p:sp>
+      <p:sp>
+        <p:nvSpPr>
+          <p:cNvPr id="37" name="TextBox 36">
+            <a:extLst>
+              <a:ext uri="{FF2B5EF4-FFF2-40B4-BE49-F238E27FC236}">
+                <a16:creationId xmlns:a16="http://schemas.microsoft.com/office/drawing/2014/main" id="{20BD6CB6-17EB-1B10-C421-A2DD8C4AC45D}"/>
+              </a:ext>
+            </a:extLst>
+          </p:cNvPr>
+          <p:cNvSpPr txBox="1"/>
+          <p:nvPr/>
+        </p:nvSpPr>
+        <p:spPr>
+          <a:xfrm>
+            <a:off x="6930082" y="5255741"/>
+            <a:ext cx="1624914" cy="338554"/>
+          </a:xfrm>
+          <a:prstGeom prst="rect">
+            <a:avLst/>
+          </a:prstGeom>
+          <a:noFill/>
+        </p:spPr>
+        <p:txBody>
+          <a:bodyPr wrap="square" rtlCol="0">
+            <a:spAutoFit/>
+          </a:bodyPr>
+          <a:lstStyle/>
+          <a:p>
+            <a:pPr algn="ctr"/>
+            <a:r>
+              <a:rPr lang="en-US" sz="1600" b="1" dirty="0">
+                <a:solidFill>
+                  <a:srgbClr val="0070C0"/>
+                </a:solidFill>
+              </a:rPr>
+              <a:t>P(black | black)</a:t>
+            </a:r>
+          </a:p>
+        </p:txBody>
+      </p:sp>
+      <p:cxnSp>
+        <p:nvCxnSpPr>
+          <p:cNvPr id="39" name="Straight Arrow Connector 38">
+            <a:extLst>
+              <a:ext uri="{FF2B5EF4-FFF2-40B4-BE49-F238E27FC236}">
+                <a16:creationId xmlns:a16="http://schemas.microsoft.com/office/drawing/2014/main" id="{B977B6F6-7628-93C6-1CCA-377325D2C96B}"/>
+              </a:ext>
+            </a:extLst>
+          </p:cNvPr>
+          <p:cNvCxnSpPr>
+            <a:cxnSpLocks/>
+            <a:stCxn id="36" idx="0"/>
+          </p:cNvCxnSpPr>
+          <p:nvPr/>
+        </p:nvCxnSpPr>
+        <p:spPr>
+          <a:xfrm flipH="1" flipV="1">
+            <a:off x="10447638" y="4392828"/>
+            <a:ext cx="198779" cy="1020235"/>
+          </a:xfrm>
+          <a:prstGeom prst="straightConnector1">
+            <a:avLst/>
+          </a:prstGeom>
+          <a:ln w="19050" cap="flat" cmpd="sng" algn="ctr">
+            <a:solidFill>
+              <a:schemeClr val="dk1"/>
+            </a:solidFill>
+            <a:prstDash val="solid"/>
+            <a:round/>
+            <a:headEnd type="none" w="med" len="med"/>
+            <a:tailEnd type="arrow" w="med" len="med"/>
+          </a:ln>
+        </p:spPr>
+        <p:style>
+          <a:lnRef idx="0">
+            <a:scrgbClr r="0" g="0" b="0"/>
+          </a:lnRef>
+          <a:fillRef idx="0">
+            <a:scrgbClr r="0" g="0" b="0"/>
+          </a:fillRef>
+          <a:effectRef idx="0">
+            <a:scrgbClr r="0" g="0" b="0"/>
+          </a:effectRef>
+          <a:fontRef idx="minor">
+            <a:schemeClr val="tx1"/>
+          </a:fontRef>
+        </p:style>
+      </p:cxnSp>
     </p:spTree>
   </p:cSld>
   <p:clrMapOvr>
@@ -24526,7 +26175,13 @@
       </p:grpSpPr>
       <p:sp>
         <p:nvSpPr>
-          <p:cNvPr id="169" name="PlaceHolder 1"/>
+          <p:cNvPr id="2" name="Title 1">
+            <a:extLst>
+              <a:ext uri="{FF2B5EF4-FFF2-40B4-BE49-F238E27FC236}">
+                <a16:creationId xmlns:a16="http://schemas.microsoft.com/office/drawing/2014/main" id="{41BDA84C-AD74-5814-D82A-5F88FC8C9069}"/>
+              </a:ext>
+            </a:extLst>
+          </p:cNvPr>
           <p:cNvSpPr>
             <a:spLocks noGrp="1"/>
           </p:cNvSpPr>
@@ -24534,102 +26189,83 @@
             <p:ph type="title"/>
           </p:nvPr>
         </p:nvSpPr>
+        <p:spPr/>
+        <p:txBody>
+          <a:bodyPr/>
+          <a:lstStyle/>
+          <a:p>
+            <a:r>
+              <a:rPr lang="en-US" dirty="0"/>
+              <a:t>Bayes vs. Naïve Bayes</a:t>
+            </a:r>
+          </a:p>
+        </p:txBody>
+      </p:sp>
+      <p:pic>
+        <p:nvPicPr>
+          <p:cNvPr id="9" name="Content Placeholder 8">
+            <a:extLst>
+              <a:ext uri="{FF2B5EF4-FFF2-40B4-BE49-F238E27FC236}">
+                <a16:creationId xmlns:a16="http://schemas.microsoft.com/office/drawing/2014/main" id="{F079DF9D-D91F-8F19-E096-CEB55AE60F5E}"/>
+              </a:ext>
+            </a:extLst>
+          </p:cNvPr>
+          <p:cNvPicPr>
+            <a:picLocks noGrp="1" noChangeAspect="1"/>
+          </p:cNvPicPr>
+          <p:nvPr>
+            <p:ph idx="1"/>
+          </p:nvPr>
+        </p:nvPicPr>
+        <p:blipFill>
+          <a:blip r:embed="rId2"/>
+          <a:stretch>
+            <a:fillRect/>
+          </a:stretch>
+        </p:blipFill>
         <p:spPr>
           <a:xfrm>
-            <a:off x="831960" y="3429000"/>
-            <a:ext cx="10515240" cy="1410120"/>
+            <a:off x="838199" y="1808318"/>
+            <a:ext cx="5147847" cy="2343735"/>
+          </a:xfrm>
+        </p:spPr>
+      </p:pic>
+      <p:pic>
+        <p:nvPicPr>
+          <p:cNvPr id="11" name="Picture 10">
+            <a:extLst>
+              <a:ext uri="{FF2B5EF4-FFF2-40B4-BE49-F238E27FC236}">
+                <a16:creationId xmlns:a16="http://schemas.microsoft.com/office/drawing/2014/main" id="{A62FBA81-FB50-9A3F-4551-5D02D03696AD}"/>
+              </a:ext>
+            </a:extLst>
+          </p:cNvPr>
+          <p:cNvPicPr>
+            <a:picLocks noChangeAspect="1"/>
+          </p:cNvPicPr>
+          <p:nvPr/>
+        </p:nvPicPr>
+        <p:blipFill>
+          <a:blip r:embed="rId3"/>
+          <a:stretch>
+            <a:fillRect/>
+          </a:stretch>
+        </p:blipFill>
+        <p:spPr>
+          <a:xfrm>
+            <a:off x="838200" y="4363669"/>
+            <a:ext cx="8376564" cy="2086814"/>
           </a:xfrm>
           <a:prstGeom prst="rect">
             <a:avLst/>
           </a:prstGeom>
-          <a:noFill/>
-          <a:ln w="0">
-            <a:noFill/>
-          </a:ln>
         </p:spPr>
-        <p:txBody>
-          <a:bodyPr lIns="91440" tIns="45720" rIns="91440" bIns="45720" anchor="b">
-            <a:noAutofit/>
-          </a:bodyPr>
-          <a:lstStyle/>
-          <a:p>
-            <a:pPr indent="0" defTabSz="914400">
-              <a:lnSpc>
-                <a:spcPct val="90000"/>
-              </a:lnSpc>
-              <a:buNone/>
-            </a:pPr>
-            <a:r>
-              <a:rPr lang="en-US" sz="6000" b="0" u="none" strike="noStrike">
-                <a:solidFill>
-                  <a:schemeClr val="dk1"/>
-                </a:solidFill>
-                <a:uFillTx/>
-                <a:latin typeface="Calibri Light"/>
-              </a:rPr>
-              <a:t>Language Models</a:t>
-            </a:r>
-            <a:endParaRPr lang="en-US" sz="6000" b="0" u="none" strike="noStrike">
-              <a:solidFill>
-                <a:schemeClr val="dk1"/>
-              </a:solidFill>
-              <a:uFillTx/>
-              <a:latin typeface="Calibri"/>
-            </a:endParaRPr>
-          </a:p>
-        </p:txBody>
-      </p:sp>
-      <p:sp>
-        <p:nvSpPr>
-          <p:cNvPr id="170" name="PlaceHolder 2"/>
-          <p:cNvSpPr>
-            <a:spLocks noGrp="1"/>
-          </p:cNvSpPr>
-          <p:nvPr>
-            <p:ph/>
-          </p:nvPr>
-        </p:nvSpPr>
-        <p:spPr>
-          <a:xfrm>
-            <a:off x="831960" y="4956120"/>
-            <a:ext cx="10515240" cy="1133280"/>
-          </a:xfrm>
-          <a:prstGeom prst="rect">
-            <a:avLst/>
-          </a:prstGeom>
-          <a:noFill/>
-          <a:ln w="0">
-            <a:noFill/>
-          </a:ln>
-        </p:spPr>
-        <p:txBody>
-          <a:bodyPr lIns="91440" tIns="45720" rIns="91440" bIns="45720" anchor="t">
-            <a:noAutofit/>
-          </a:bodyPr>
-          <a:lstStyle/>
-          <a:p>
-            <a:pPr indent="0">
-              <a:lnSpc>
-                <a:spcPct val="90000"/>
-              </a:lnSpc>
-              <a:spcBef>
-                <a:spcPts val="1417"/>
-              </a:spcBef>
-              <a:buNone/>
-            </a:pPr>
-            <a:endParaRPr lang="en-US" sz="2400" b="0" u="none" strike="noStrike">
-              <a:solidFill>
-                <a:schemeClr val="dk1">
-                  <a:tint val="75000"/>
-                </a:schemeClr>
-              </a:solidFill>
-              <a:uFillTx/>
-              <a:latin typeface="Calibri"/>
-            </a:endParaRPr>
-          </a:p>
-        </p:txBody>
-      </p:sp>
+      </p:pic>
     </p:spTree>
+    <p:extLst>
+      <p:ext uri="{BB962C8B-B14F-4D97-AF65-F5344CB8AC3E}">
+        <p14:creationId xmlns:p14="http://schemas.microsoft.com/office/powerpoint/2010/main" val="2501734364"/>
+      </p:ext>
+    </p:extLst>
   </p:cSld>
   <p:clrMapOvr>
     <a:masterClrMapping/>
@@ -25422,6 +27058,3326 @@
   <p:cSld>
     <p:spTree>
       <p:nvGrpSpPr>
+        <p:cNvPr id="1" name="">
+          <a:extLst>
+            <a:ext uri="{FF2B5EF4-FFF2-40B4-BE49-F238E27FC236}">
+              <a16:creationId xmlns:a16="http://schemas.microsoft.com/office/drawing/2014/main" id="{184D490E-5FB1-97DA-0C13-3312F73878ED}"/>
+            </a:ext>
+          </a:extLst>
+        </p:cNvPr>
+        <p:cNvGrpSpPr/>
+        <p:nvPr/>
+      </p:nvGrpSpPr>
+      <p:grpSpPr>
+        <a:xfrm>
+          <a:off x="0" y="0"/>
+          <a:ext cx="0" cy="0"/>
+          <a:chOff x="0" y="0"/>
+          <a:chExt cx="0" cy="0"/>
+        </a:xfrm>
+      </p:grpSpPr>
+      <p:sp>
+        <p:nvSpPr>
+          <p:cNvPr id="2" name="Title 1">
+            <a:extLst>
+              <a:ext uri="{FF2B5EF4-FFF2-40B4-BE49-F238E27FC236}">
+                <a16:creationId xmlns:a16="http://schemas.microsoft.com/office/drawing/2014/main" id="{E29DCCA5-5688-A913-9E06-C55BB75847F6}"/>
+              </a:ext>
+            </a:extLst>
+          </p:cNvPr>
+          <p:cNvSpPr>
+            <a:spLocks noGrp="1"/>
+          </p:cNvSpPr>
+          <p:nvPr>
+            <p:ph type="title"/>
+          </p:nvPr>
+        </p:nvSpPr>
+        <p:spPr/>
+        <p:txBody>
+          <a:bodyPr/>
+          <a:lstStyle/>
+          <a:p>
+            <a:r>
+              <a:rPr lang="en-US" dirty="0"/>
+              <a:t>Naive Bayes Classifier for Sentiment Analysis</a:t>
+            </a:r>
+            <a:endParaRPr dirty="0"/>
+          </a:p>
+        </p:txBody>
+      </p:sp>
+      <p:graphicFrame>
+        <p:nvGraphicFramePr>
+          <p:cNvPr id="22" name="Table 21">
+            <a:extLst>
+              <a:ext uri="{FF2B5EF4-FFF2-40B4-BE49-F238E27FC236}">
+                <a16:creationId xmlns:a16="http://schemas.microsoft.com/office/drawing/2014/main" id="{53F1F5EE-70D4-3E8D-5A86-84A19E1FE030}"/>
+              </a:ext>
+            </a:extLst>
+          </p:cNvPr>
+          <p:cNvGraphicFramePr>
+            <a:graphicFrameLocks noGrp="1"/>
+          </p:cNvGraphicFramePr>
+          <p:nvPr/>
+        </p:nvGraphicFramePr>
+        <p:xfrm>
+          <a:off x="7477897" y="1774332"/>
+          <a:ext cx="3334268" cy="1714500"/>
+        </p:xfrm>
+        <a:graphic>
+          <a:graphicData uri="http://schemas.openxmlformats.org/drawingml/2006/table">
+            <a:tbl>
+              <a:tblPr>
+                <a:tableStyleId>{616DA210-FB5B-4158-B5E0-FEB733F419BA}</a:tableStyleId>
+              </a:tblPr>
+              <a:tblGrid>
+                <a:gridCol w="833567">
+                  <a:extLst>
+                    <a:ext uri="{9D8B030D-6E8A-4147-A177-3AD203B41FA5}">
+                      <a16:colId xmlns:a16="http://schemas.microsoft.com/office/drawing/2014/main" val="766495822"/>
+                    </a:ext>
+                  </a:extLst>
+                </a:gridCol>
+                <a:gridCol w="833567">
+                  <a:extLst>
+                    <a:ext uri="{9D8B030D-6E8A-4147-A177-3AD203B41FA5}">
+                      <a16:colId xmlns:a16="http://schemas.microsoft.com/office/drawing/2014/main" val="3241324341"/>
+                    </a:ext>
+                  </a:extLst>
+                </a:gridCol>
+                <a:gridCol w="833567">
+                  <a:extLst>
+                    <a:ext uri="{9D8B030D-6E8A-4147-A177-3AD203B41FA5}">
+                      <a16:colId xmlns:a16="http://schemas.microsoft.com/office/drawing/2014/main" val="2852744593"/>
+                    </a:ext>
+                  </a:extLst>
+                </a:gridCol>
+                <a:gridCol w="833567">
+                  <a:extLst>
+                    <a:ext uri="{9D8B030D-6E8A-4147-A177-3AD203B41FA5}">
+                      <a16:colId xmlns:a16="http://schemas.microsoft.com/office/drawing/2014/main" val="3803580012"/>
+                    </a:ext>
+                  </a:extLst>
+                </a:gridCol>
+              </a:tblGrid>
+              <a:tr h="381000">
+                <a:tc>
+                  <a:txBody>
+                    <a:bodyPr/>
+                    <a:lstStyle/>
+                    <a:p>
+                      <a:pPr algn="ctr" fontAlgn="ctr"/>
+                      <a:r>
+                        <a:rPr lang="en-US" sz="1100" u="none" strike="noStrike">
+                          <a:effectLst/>
+                        </a:rPr>
+                        <a:t>Word</a:t>
+                      </a:r>
+                      <a:endParaRPr lang="en-US" sz="1100" b="1" i="0" u="none" strike="noStrike">
+                        <a:solidFill>
+                          <a:srgbClr val="000000"/>
+                        </a:solidFill>
+                        <a:effectLst/>
+                        <a:latin typeface="Aptos Narrow" panose="020B0004020202020204" pitchFamily="34" charset="0"/>
+                      </a:endParaRPr>
+                    </a:p>
+                  </a:txBody>
+                  <a:tcPr marL="9525" marR="9525" marT="9525" marB="0" anchor="ctr"/>
+                </a:tc>
+                <a:tc>
+                  <a:txBody>
+                    <a:bodyPr/>
+                    <a:lstStyle/>
+                    <a:p>
+                      <a:pPr algn="ctr" fontAlgn="ctr"/>
+                      <a:r>
+                        <a:rPr lang="en-US" sz="1100" u="none" strike="noStrike" dirty="0">
+                          <a:solidFill>
+                            <a:srgbClr val="00823B"/>
+                          </a:solidFill>
+                          <a:effectLst/>
+                        </a:rPr>
+                        <a:t>Positive</a:t>
+                      </a:r>
+                      <a:endParaRPr lang="en-US" sz="1100" b="1" i="0" u="none" strike="noStrike" dirty="0">
+                        <a:solidFill>
+                          <a:srgbClr val="00823B"/>
+                        </a:solidFill>
+                        <a:effectLst/>
+                        <a:latin typeface="Aptos Narrow" panose="020B0004020202020204" pitchFamily="34" charset="0"/>
+                      </a:endParaRPr>
+                    </a:p>
+                  </a:txBody>
+                  <a:tcPr marL="9525" marR="9525" marT="9525" marB="0" anchor="ctr"/>
+                </a:tc>
+                <a:tc>
+                  <a:txBody>
+                    <a:bodyPr/>
+                    <a:lstStyle/>
+                    <a:p>
+                      <a:pPr algn="ctr" fontAlgn="ctr"/>
+                      <a:r>
+                        <a:rPr lang="en-US" sz="1100" u="none" strike="noStrike" dirty="0">
+                          <a:solidFill>
+                            <a:srgbClr val="FF0000"/>
+                          </a:solidFill>
+                          <a:effectLst/>
+                        </a:rPr>
+                        <a:t>Negative</a:t>
+                      </a:r>
+                      <a:endParaRPr lang="en-US" sz="1100" b="1" i="0" u="none" strike="noStrike" dirty="0">
+                        <a:solidFill>
+                          <a:srgbClr val="FF0000"/>
+                        </a:solidFill>
+                        <a:effectLst/>
+                        <a:latin typeface="Aptos Narrow" panose="020B0004020202020204" pitchFamily="34" charset="0"/>
+                      </a:endParaRPr>
+                    </a:p>
+                  </a:txBody>
+                  <a:tcPr marL="9525" marR="9525" marT="9525" marB="0" anchor="ctr"/>
+                </a:tc>
+                <a:tc>
+                  <a:txBody>
+                    <a:bodyPr/>
+                    <a:lstStyle/>
+                    <a:p>
+                      <a:pPr algn="ctr" fontAlgn="ctr"/>
+                      <a:r>
+                        <a:rPr lang="en-US" sz="1100" u="none" strike="noStrike">
+                          <a:effectLst/>
+                        </a:rPr>
+                        <a:t>Row Total</a:t>
+                      </a:r>
+                      <a:endParaRPr lang="en-US" sz="1100" b="1" i="0" u="none" strike="noStrike">
+                        <a:solidFill>
+                          <a:srgbClr val="000000"/>
+                        </a:solidFill>
+                        <a:effectLst/>
+                        <a:latin typeface="Aptos Narrow" panose="020B0004020202020204" pitchFamily="34" charset="0"/>
+                      </a:endParaRPr>
+                    </a:p>
+                  </a:txBody>
+                  <a:tcPr marL="9525" marR="9525" marT="9525" marB="0" anchor="ctr"/>
+                </a:tc>
+                <a:extLst>
+                  <a:ext uri="{0D108BD9-81ED-4DB2-BD59-A6C34878D82A}">
+                    <a16:rowId xmlns:a16="http://schemas.microsoft.com/office/drawing/2014/main" val="190839846"/>
+                  </a:ext>
+                </a:extLst>
+              </a:tr>
+              <a:tr h="190500">
+                <a:tc>
+                  <a:txBody>
+                    <a:bodyPr/>
+                    <a:lstStyle/>
+                    <a:p>
+                      <a:pPr algn="ctr" fontAlgn="ctr"/>
+                      <a:r>
+                        <a:rPr lang="en-US" sz="1100" u="none" strike="noStrike">
+                          <a:effectLst/>
+                        </a:rPr>
+                        <a:t>love</a:t>
+                      </a:r>
+                      <a:endParaRPr lang="en-US" sz="1100" b="1" i="0" u="none" strike="noStrike">
+                        <a:solidFill>
+                          <a:srgbClr val="000000"/>
+                        </a:solidFill>
+                        <a:effectLst/>
+                        <a:latin typeface="Aptos Narrow" panose="020B0004020202020204" pitchFamily="34" charset="0"/>
+                      </a:endParaRPr>
+                    </a:p>
+                  </a:txBody>
+                  <a:tcPr marL="9525" marR="9525" marT="9525" marB="0" anchor="ctr"/>
+                </a:tc>
+                <a:tc>
+                  <a:txBody>
+                    <a:bodyPr/>
+                    <a:lstStyle/>
+                    <a:p>
+                      <a:pPr algn="ctr" fontAlgn="ctr"/>
+                      <a:r>
+                        <a:rPr lang="en-US" sz="1100" u="none" strike="noStrike">
+                          <a:effectLst/>
+                        </a:rPr>
+                        <a:t>20</a:t>
+                      </a:r>
+                      <a:endParaRPr lang="en-US" sz="1100" b="0" i="0" u="none" strike="noStrike">
+                        <a:solidFill>
+                          <a:srgbClr val="000000"/>
+                        </a:solidFill>
+                        <a:effectLst/>
+                        <a:latin typeface="Aptos Narrow" panose="020B0004020202020204" pitchFamily="34" charset="0"/>
+                      </a:endParaRPr>
+                    </a:p>
+                  </a:txBody>
+                  <a:tcPr marL="9525" marR="9525" marT="9525" marB="0" anchor="ctr"/>
+                </a:tc>
+                <a:tc>
+                  <a:txBody>
+                    <a:bodyPr/>
+                    <a:lstStyle/>
+                    <a:p>
+                      <a:pPr algn="ctr" fontAlgn="ctr"/>
+                      <a:r>
+                        <a:rPr lang="en-US" sz="1100" u="none" strike="noStrike">
+                          <a:effectLst/>
+                        </a:rPr>
+                        <a:t>2</a:t>
+                      </a:r>
+                      <a:endParaRPr lang="en-US" sz="1100" b="0" i="0" u="none" strike="noStrike">
+                        <a:solidFill>
+                          <a:srgbClr val="000000"/>
+                        </a:solidFill>
+                        <a:effectLst/>
+                        <a:latin typeface="Aptos Narrow" panose="020B0004020202020204" pitchFamily="34" charset="0"/>
+                      </a:endParaRPr>
+                    </a:p>
+                  </a:txBody>
+                  <a:tcPr marL="9525" marR="9525" marT="9525" marB="0" anchor="ctr"/>
+                </a:tc>
+                <a:tc>
+                  <a:txBody>
+                    <a:bodyPr/>
+                    <a:lstStyle/>
+                    <a:p>
+                      <a:pPr algn="ctr" fontAlgn="ctr"/>
+                      <a:r>
+                        <a:rPr lang="en-US" sz="1100" u="none" strike="noStrike">
+                          <a:effectLst/>
+                        </a:rPr>
+                        <a:t>22</a:t>
+                      </a:r>
+                      <a:endParaRPr lang="en-US" sz="1100" b="0" i="0" u="none" strike="noStrike">
+                        <a:solidFill>
+                          <a:srgbClr val="000000"/>
+                        </a:solidFill>
+                        <a:effectLst/>
+                        <a:latin typeface="Aptos Narrow" panose="020B0004020202020204" pitchFamily="34" charset="0"/>
+                      </a:endParaRPr>
+                    </a:p>
+                  </a:txBody>
+                  <a:tcPr marL="9525" marR="9525" marT="9525" marB="0" anchor="ctr"/>
+                </a:tc>
+                <a:extLst>
+                  <a:ext uri="{0D108BD9-81ED-4DB2-BD59-A6C34878D82A}">
+                    <a16:rowId xmlns:a16="http://schemas.microsoft.com/office/drawing/2014/main" val="3079552177"/>
+                  </a:ext>
+                </a:extLst>
+              </a:tr>
+              <a:tr h="190500">
+                <a:tc>
+                  <a:txBody>
+                    <a:bodyPr/>
+                    <a:lstStyle/>
+                    <a:p>
+                      <a:pPr algn="ctr" fontAlgn="ctr"/>
+                      <a:r>
+                        <a:rPr lang="en-US" sz="1100" u="none" strike="noStrike">
+                          <a:effectLst/>
+                        </a:rPr>
+                        <a:t>great</a:t>
+                      </a:r>
+                      <a:endParaRPr lang="en-US" sz="1100" b="1" i="0" u="none" strike="noStrike">
+                        <a:solidFill>
+                          <a:srgbClr val="000000"/>
+                        </a:solidFill>
+                        <a:effectLst/>
+                        <a:latin typeface="Aptos Narrow" panose="020B0004020202020204" pitchFamily="34" charset="0"/>
+                      </a:endParaRPr>
+                    </a:p>
+                  </a:txBody>
+                  <a:tcPr marL="9525" marR="9525" marT="9525" marB="0" anchor="ctr"/>
+                </a:tc>
+                <a:tc>
+                  <a:txBody>
+                    <a:bodyPr/>
+                    <a:lstStyle/>
+                    <a:p>
+                      <a:pPr algn="ctr" fontAlgn="ctr"/>
+                      <a:r>
+                        <a:rPr lang="en-US" sz="1100" u="none" strike="noStrike">
+                          <a:effectLst/>
+                        </a:rPr>
+                        <a:t>15</a:t>
+                      </a:r>
+                      <a:endParaRPr lang="en-US" sz="1100" b="0" i="0" u="none" strike="noStrike">
+                        <a:solidFill>
+                          <a:srgbClr val="000000"/>
+                        </a:solidFill>
+                        <a:effectLst/>
+                        <a:latin typeface="Aptos Narrow" panose="020B0004020202020204" pitchFamily="34" charset="0"/>
+                      </a:endParaRPr>
+                    </a:p>
+                  </a:txBody>
+                  <a:tcPr marL="9525" marR="9525" marT="9525" marB="0" anchor="ctr"/>
+                </a:tc>
+                <a:tc>
+                  <a:txBody>
+                    <a:bodyPr/>
+                    <a:lstStyle/>
+                    <a:p>
+                      <a:pPr algn="ctr" fontAlgn="ctr"/>
+                      <a:r>
+                        <a:rPr lang="en-US" sz="1100" u="none" strike="noStrike">
+                          <a:effectLst/>
+                        </a:rPr>
+                        <a:t>3</a:t>
+                      </a:r>
+                      <a:endParaRPr lang="en-US" sz="1100" b="0" i="0" u="none" strike="noStrike">
+                        <a:solidFill>
+                          <a:srgbClr val="000000"/>
+                        </a:solidFill>
+                        <a:effectLst/>
+                        <a:latin typeface="Aptos Narrow" panose="020B0004020202020204" pitchFamily="34" charset="0"/>
+                      </a:endParaRPr>
+                    </a:p>
+                  </a:txBody>
+                  <a:tcPr marL="9525" marR="9525" marT="9525" marB="0" anchor="ctr"/>
+                </a:tc>
+                <a:tc>
+                  <a:txBody>
+                    <a:bodyPr/>
+                    <a:lstStyle/>
+                    <a:p>
+                      <a:pPr algn="ctr" fontAlgn="ctr"/>
+                      <a:r>
+                        <a:rPr lang="en-US" sz="1100" u="none" strike="noStrike">
+                          <a:effectLst/>
+                        </a:rPr>
+                        <a:t>18</a:t>
+                      </a:r>
+                      <a:endParaRPr lang="en-US" sz="1100" b="0" i="0" u="none" strike="noStrike">
+                        <a:solidFill>
+                          <a:srgbClr val="000000"/>
+                        </a:solidFill>
+                        <a:effectLst/>
+                        <a:latin typeface="Aptos Narrow" panose="020B0004020202020204" pitchFamily="34" charset="0"/>
+                      </a:endParaRPr>
+                    </a:p>
+                  </a:txBody>
+                  <a:tcPr marL="9525" marR="9525" marT="9525" marB="0" anchor="ctr"/>
+                </a:tc>
+                <a:extLst>
+                  <a:ext uri="{0D108BD9-81ED-4DB2-BD59-A6C34878D82A}">
+                    <a16:rowId xmlns:a16="http://schemas.microsoft.com/office/drawing/2014/main" val="483529521"/>
+                  </a:ext>
+                </a:extLst>
+              </a:tr>
+              <a:tr h="190500">
+                <a:tc>
+                  <a:txBody>
+                    <a:bodyPr/>
+                    <a:lstStyle/>
+                    <a:p>
+                      <a:pPr algn="ctr" fontAlgn="ctr"/>
+                      <a:r>
+                        <a:rPr lang="en-US" sz="1100" u="none" strike="noStrike">
+                          <a:effectLst/>
+                        </a:rPr>
+                        <a:t>amazing</a:t>
+                      </a:r>
+                      <a:endParaRPr lang="en-US" sz="1100" b="1" i="0" u="none" strike="noStrike">
+                        <a:solidFill>
+                          <a:srgbClr val="000000"/>
+                        </a:solidFill>
+                        <a:effectLst/>
+                        <a:latin typeface="Aptos Narrow" panose="020B0004020202020204" pitchFamily="34" charset="0"/>
+                      </a:endParaRPr>
+                    </a:p>
+                  </a:txBody>
+                  <a:tcPr marL="9525" marR="9525" marT="9525" marB="0" anchor="ctr"/>
+                </a:tc>
+                <a:tc>
+                  <a:txBody>
+                    <a:bodyPr/>
+                    <a:lstStyle/>
+                    <a:p>
+                      <a:pPr algn="ctr" fontAlgn="ctr"/>
+                      <a:r>
+                        <a:rPr lang="en-US" sz="1100" u="none" strike="noStrike">
+                          <a:effectLst/>
+                        </a:rPr>
+                        <a:t>12</a:t>
+                      </a:r>
+                      <a:endParaRPr lang="en-US" sz="1100" b="0" i="0" u="none" strike="noStrike">
+                        <a:solidFill>
+                          <a:srgbClr val="000000"/>
+                        </a:solidFill>
+                        <a:effectLst/>
+                        <a:latin typeface="Aptos Narrow" panose="020B0004020202020204" pitchFamily="34" charset="0"/>
+                      </a:endParaRPr>
+                    </a:p>
+                  </a:txBody>
+                  <a:tcPr marL="9525" marR="9525" marT="9525" marB="0" anchor="ctr"/>
+                </a:tc>
+                <a:tc>
+                  <a:txBody>
+                    <a:bodyPr/>
+                    <a:lstStyle/>
+                    <a:p>
+                      <a:pPr algn="ctr" fontAlgn="ctr"/>
+                      <a:r>
+                        <a:rPr lang="en-US" sz="1100" u="none" strike="noStrike">
+                          <a:effectLst/>
+                        </a:rPr>
+                        <a:t>1</a:t>
+                      </a:r>
+                      <a:endParaRPr lang="en-US" sz="1100" b="0" i="0" u="none" strike="noStrike">
+                        <a:solidFill>
+                          <a:srgbClr val="000000"/>
+                        </a:solidFill>
+                        <a:effectLst/>
+                        <a:latin typeface="Aptos Narrow" panose="020B0004020202020204" pitchFamily="34" charset="0"/>
+                      </a:endParaRPr>
+                    </a:p>
+                  </a:txBody>
+                  <a:tcPr marL="9525" marR="9525" marT="9525" marB="0" anchor="ctr"/>
+                </a:tc>
+                <a:tc>
+                  <a:txBody>
+                    <a:bodyPr/>
+                    <a:lstStyle/>
+                    <a:p>
+                      <a:pPr algn="ctr" fontAlgn="ctr"/>
+                      <a:r>
+                        <a:rPr lang="en-US" sz="1100" u="none" strike="noStrike">
+                          <a:effectLst/>
+                        </a:rPr>
+                        <a:t>13</a:t>
+                      </a:r>
+                      <a:endParaRPr lang="en-US" sz="1100" b="0" i="0" u="none" strike="noStrike">
+                        <a:solidFill>
+                          <a:srgbClr val="000000"/>
+                        </a:solidFill>
+                        <a:effectLst/>
+                        <a:latin typeface="Aptos Narrow" panose="020B0004020202020204" pitchFamily="34" charset="0"/>
+                      </a:endParaRPr>
+                    </a:p>
+                  </a:txBody>
+                  <a:tcPr marL="9525" marR="9525" marT="9525" marB="0" anchor="ctr"/>
+                </a:tc>
+                <a:extLst>
+                  <a:ext uri="{0D108BD9-81ED-4DB2-BD59-A6C34878D82A}">
+                    <a16:rowId xmlns:a16="http://schemas.microsoft.com/office/drawing/2014/main" val="4076068478"/>
+                  </a:ext>
+                </a:extLst>
+              </a:tr>
+              <a:tr h="190500">
+                <a:tc>
+                  <a:txBody>
+                    <a:bodyPr/>
+                    <a:lstStyle/>
+                    <a:p>
+                      <a:pPr algn="ctr" fontAlgn="ctr"/>
+                      <a:r>
+                        <a:rPr lang="en-US" sz="1100" u="none" strike="noStrike">
+                          <a:effectLst/>
+                        </a:rPr>
+                        <a:t>boring</a:t>
+                      </a:r>
+                      <a:endParaRPr lang="en-US" sz="1100" b="1" i="0" u="none" strike="noStrike">
+                        <a:solidFill>
+                          <a:srgbClr val="000000"/>
+                        </a:solidFill>
+                        <a:effectLst/>
+                        <a:latin typeface="Aptos Narrow" panose="020B0004020202020204" pitchFamily="34" charset="0"/>
+                      </a:endParaRPr>
+                    </a:p>
+                  </a:txBody>
+                  <a:tcPr marL="9525" marR="9525" marT="9525" marB="0" anchor="ctr"/>
+                </a:tc>
+                <a:tc>
+                  <a:txBody>
+                    <a:bodyPr/>
+                    <a:lstStyle/>
+                    <a:p>
+                      <a:pPr algn="ctr" fontAlgn="ctr"/>
+                      <a:r>
+                        <a:rPr lang="en-US" sz="1100" u="none" strike="noStrike" dirty="0">
+                          <a:effectLst/>
+                        </a:rPr>
+                        <a:t>1</a:t>
+                      </a:r>
+                      <a:endParaRPr lang="en-US" sz="1100" b="0" i="0" u="none" strike="noStrike" dirty="0">
+                        <a:solidFill>
+                          <a:srgbClr val="000000"/>
+                        </a:solidFill>
+                        <a:effectLst/>
+                        <a:latin typeface="Aptos Narrow" panose="020B0004020202020204" pitchFamily="34" charset="0"/>
+                      </a:endParaRPr>
+                    </a:p>
+                  </a:txBody>
+                  <a:tcPr marL="9525" marR="9525" marT="9525" marB="0" anchor="ctr"/>
+                </a:tc>
+                <a:tc>
+                  <a:txBody>
+                    <a:bodyPr/>
+                    <a:lstStyle/>
+                    <a:p>
+                      <a:pPr algn="ctr" fontAlgn="ctr"/>
+                      <a:r>
+                        <a:rPr lang="en-US" sz="1100" u="none" strike="noStrike">
+                          <a:effectLst/>
+                        </a:rPr>
+                        <a:t>14</a:t>
+                      </a:r>
+                      <a:endParaRPr lang="en-US" sz="1100" b="0" i="0" u="none" strike="noStrike">
+                        <a:solidFill>
+                          <a:srgbClr val="000000"/>
+                        </a:solidFill>
+                        <a:effectLst/>
+                        <a:latin typeface="Aptos Narrow" panose="020B0004020202020204" pitchFamily="34" charset="0"/>
+                      </a:endParaRPr>
+                    </a:p>
+                  </a:txBody>
+                  <a:tcPr marL="9525" marR="9525" marT="9525" marB="0" anchor="ctr"/>
+                </a:tc>
+                <a:tc>
+                  <a:txBody>
+                    <a:bodyPr/>
+                    <a:lstStyle/>
+                    <a:p>
+                      <a:pPr algn="ctr" fontAlgn="ctr"/>
+                      <a:r>
+                        <a:rPr lang="en-US" sz="1100" u="none" strike="noStrike">
+                          <a:effectLst/>
+                        </a:rPr>
+                        <a:t>15</a:t>
+                      </a:r>
+                      <a:endParaRPr lang="en-US" sz="1100" b="0" i="0" u="none" strike="noStrike">
+                        <a:solidFill>
+                          <a:srgbClr val="000000"/>
+                        </a:solidFill>
+                        <a:effectLst/>
+                        <a:latin typeface="Aptos Narrow" panose="020B0004020202020204" pitchFamily="34" charset="0"/>
+                      </a:endParaRPr>
+                    </a:p>
+                  </a:txBody>
+                  <a:tcPr marL="9525" marR="9525" marT="9525" marB="0" anchor="ctr"/>
+                </a:tc>
+                <a:extLst>
+                  <a:ext uri="{0D108BD9-81ED-4DB2-BD59-A6C34878D82A}">
+                    <a16:rowId xmlns:a16="http://schemas.microsoft.com/office/drawing/2014/main" val="3066668540"/>
+                  </a:ext>
+                </a:extLst>
+              </a:tr>
+              <a:tr h="190500">
+                <a:tc>
+                  <a:txBody>
+                    <a:bodyPr/>
+                    <a:lstStyle/>
+                    <a:p>
+                      <a:pPr algn="ctr" fontAlgn="ctr"/>
+                      <a:r>
+                        <a:rPr lang="en-US" sz="1100" u="none" strike="noStrike">
+                          <a:effectLst/>
+                        </a:rPr>
+                        <a:t>terrible</a:t>
+                      </a:r>
+                      <a:endParaRPr lang="en-US" sz="1100" b="1" i="0" u="none" strike="noStrike">
+                        <a:solidFill>
+                          <a:srgbClr val="000000"/>
+                        </a:solidFill>
+                        <a:effectLst/>
+                        <a:latin typeface="Aptos Narrow" panose="020B0004020202020204" pitchFamily="34" charset="0"/>
+                      </a:endParaRPr>
+                    </a:p>
+                  </a:txBody>
+                  <a:tcPr marL="9525" marR="9525" marT="9525" marB="0" anchor="ctr"/>
+                </a:tc>
+                <a:tc>
+                  <a:txBody>
+                    <a:bodyPr/>
+                    <a:lstStyle/>
+                    <a:p>
+                      <a:pPr algn="ctr" fontAlgn="ctr"/>
+                      <a:r>
+                        <a:rPr lang="en-US" sz="1100" u="none" strike="noStrike">
+                          <a:effectLst/>
+                        </a:rPr>
+                        <a:t>0</a:t>
+                      </a:r>
+                      <a:endParaRPr lang="en-US" sz="1100" b="0" i="0" u="none" strike="noStrike">
+                        <a:solidFill>
+                          <a:srgbClr val="000000"/>
+                        </a:solidFill>
+                        <a:effectLst/>
+                        <a:latin typeface="Aptos Narrow" panose="020B0004020202020204" pitchFamily="34" charset="0"/>
+                      </a:endParaRPr>
+                    </a:p>
+                  </a:txBody>
+                  <a:tcPr marL="9525" marR="9525" marT="9525" marB="0" anchor="ctr"/>
+                </a:tc>
+                <a:tc>
+                  <a:txBody>
+                    <a:bodyPr/>
+                    <a:lstStyle/>
+                    <a:p>
+                      <a:pPr algn="ctr" fontAlgn="ctr"/>
+                      <a:r>
+                        <a:rPr lang="en-US" sz="1100" u="none" strike="noStrike">
+                          <a:effectLst/>
+                        </a:rPr>
+                        <a:t>18</a:t>
+                      </a:r>
+                      <a:endParaRPr lang="en-US" sz="1100" b="0" i="0" u="none" strike="noStrike">
+                        <a:solidFill>
+                          <a:srgbClr val="000000"/>
+                        </a:solidFill>
+                        <a:effectLst/>
+                        <a:latin typeface="Aptos Narrow" panose="020B0004020202020204" pitchFamily="34" charset="0"/>
+                      </a:endParaRPr>
+                    </a:p>
+                  </a:txBody>
+                  <a:tcPr marL="9525" marR="9525" marT="9525" marB="0" anchor="ctr"/>
+                </a:tc>
+                <a:tc>
+                  <a:txBody>
+                    <a:bodyPr/>
+                    <a:lstStyle/>
+                    <a:p>
+                      <a:pPr algn="ctr" fontAlgn="ctr"/>
+                      <a:r>
+                        <a:rPr lang="en-US" sz="1100" u="none" strike="noStrike">
+                          <a:effectLst/>
+                        </a:rPr>
+                        <a:t>18</a:t>
+                      </a:r>
+                      <a:endParaRPr lang="en-US" sz="1100" b="0" i="0" u="none" strike="noStrike">
+                        <a:solidFill>
+                          <a:srgbClr val="000000"/>
+                        </a:solidFill>
+                        <a:effectLst/>
+                        <a:latin typeface="Aptos Narrow" panose="020B0004020202020204" pitchFamily="34" charset="0"/>
+                      </a:endParaRPr>
+                    </a:p>
+                  </a:txBody>
+                  <a:tcPr marL="9525" marR="9525" marT="9525" marB="0" anchor="ctr"/>
+                </a:tc>
+                <a:extLst>
+                  <a:ext uri="{0D108BD9-81ED-4DB2-BD59-A6C34878D82A}">
+                    <a16:rowId xmlns:a16="http://schemas.microsoft.com/office/drawing/2014/main" val="3448544856"/>
+                  </a:ext>
+                </a:extLst>
+              </a:tr>
+              <a:tr h="190500">
+                <a:tc>
+                  <a:txBody>
+                    <a:bodyPr/>
+                    <a:lstStyle/>
+                    <a:p>
+                      <a:pPr algn="ctr" fontAlgn="ctr"/>
+                      <a:r>
+                        <a:rPr lang="en-US" sz="1100" u="none" strike="noStrike">
+                          <a:effectLst/>
+                        </a:rPr>
+                        <a:t>bad</a:t>
+                      </a:r>
+                      <a:endParaRPr lang="en-US" sz="1100" b="1" i="0" u="none" strike="noStrike">
+                        <a:solidFill>
+                          <a:srgbClr val="000000"/>
+                        </a:solidFill>
+                        <a:effectLst/>
+                        <a:latin typeface="Aptos Narrow" panose="020B0004020202020204" pitchFamily="34" charset="0"/>
+                      </a:endParaRPr>
+                    </a:p>
+                  </a:txBody>
+                  <a:tcPr marL="9525" marR="9525" marT="9525" marB="0" anchor="ctr"/>
+                </a:tc>
+                <a:tc>
+                  <a:txBody>
+                    <a:bodyPr/>
+                    <a:lstStyle/>
+                    <a:p>
+                      <a:pPr algn="ctr" fontAlgn="ctr"/>
+                      <a:r>
+                        <a:rPr lang="en-US" sz="1100" u="none" strike="noStrike">
+                          <a:effectLst/>
+                        </a:rPr>
+                        <a:t>2</a:t>
+                      </a:r>
+                      <a:endParaRPr lang="en-US" sz="1100" b="0" i="0" u="none" strike="noStrike">
+                        <a:solidFill>
+                          <a:srgbClr val="000000"/>
+                        </a:solidFill>
+                        <a:effectLst/>
+                        <a:latin typeface="Aptos Narrow" panose="020B0004020202020204" pitchFamily="34" charset="0"/>
+                      </a:endParaRPr>
+                    </a:p>
+                  </a:txBody>
+                  <a:tcPr marL="9525" marR="9525" marT="9525" marB="0" anchor="ctr"/>
+                </a:tc>
+                <a:tc>
+                  <a:txBody>
+                    <a:bodyPr/>
+                    <a:lstStyle/>
+                    <a:p>
+                      <a:pPr algn="ctr" fontAlgn="ctr"/>
+                      <a:r>
+                        <a:rPr lang="en-US" sz="1100" u="none" strike="noStrike">
+                          <a:effectLst/>
+                        </a:rPr>
+                        <a:t>16</a:t>
+                      </a:r>
+                      <a:endParaRPr lang="en-US" sz="1100" b="0" i="0" u="none" strike="noStrike">
+                        <a:solidFill>
+                          <a:srgbClr val="000000"/>
+                        </a:solidFill>
+                        <a:effectLst/>
+                        <a:latin typeface="Aptos Narrow" panose="020B0004020202020204" pitchFamily="34" charset="0"/>
+                      </a:endParaRPr>
+                    </a:p>
+                  </a:txBody>
+                  <a:tcPr marL="9525" marR="9525" marT="9525" marB="0" anchor="ctr"/>
+                </a:tc>
+                <a:tc>
+                  <a:txBody>
+                    <a:bodyPr/>
+                    <a:lstStyle/>
+                    <a:p>
+                      <a:pPr algn="ctr" fontAlgn="ctr"/>
+                      <a:r>
+                        <a:rPr lang="en-US" sz="1100" u="none" strike="noStrike">
+                          <a:effectLst/>
+                        </a:rPr>
+                        <a:t>18</a:t>
+                      </a:r>
+                      <a:endParaRPr lang="en-US" sz="1100" b="0" i="0" u="none" strike="noStrike">
+                        <a:solidFill>
+                          <a:srgbClr val="000000"/>
+                        </a:solidFill>
+                        <a:effectLst/>
+                        <a:latin typeface="Aptos Narrow" panose="020B0004020202020204" pitchFamily="34" charset="0"/>
+                      </a:endParaRPr>
+                    </a:p>
+                  </a:txBody>
+                  <a:tcPr marL="9525" marR="9525" marT="9525" marB="0" anchor="ctr"/>
+                </a:tc>
+                <a:extLst>
+                  <a:ext uri="{0D108BD9-81ED-4DB2-BD59-A6C34878D82A}">
+                    <a16:rowId xmlns:a16="http://schemas.microsoft.com/office/drawing/2014/main" val="1475584649"/>
+                  </a:ext>
+                </a:extLst>
+              </a:tr>
+              <a:tr h="190500">
+                <a:tc>
+                  <a:txBody>
+                    <a:bodyPr/>
+                    <a:lstStyle/>
+                    <a:p>
+                      <a:pPr algn="ctr" fontAlgn="ctr"/>
+                      <a:r>
+                        <a:rPr lang="en-US" sz="1100" u="none" strike="noStrike">
+                          <a:effectLst/>
+                        </a:rPr>
+                        <a:t>Total</a:t>
+                      </a:r>
+                      <a:endParaRPr lang="en-US" sz="1100" b="1" i="0" u="none" strike="noStrike">
+                        <a:solidFill>
+                          <a:srgbClr val="000000"/>
+                        </a:solidFill>
+                        <a:effectLst/>
+                        <a:latin typeface="Aptos Narrow" panose="020B0004020202020204" pitchFamily="34" charset="0"/>
+                      </a:endParaRPr>
+                    </a:p>
+                  </a:txBody>
+                  <a:tcPr marL="9525" marR="9525" marT="9525" marB="0" anchor="ctr"/>
+                </a:tc>
+                <a:tc>
+                  <a:txBody>
+                    <a:bodyPr/>
+                    <a:lstStyle/>
+                    <a:p>
+                      <a:pPr algn="ctr" fontAlgn="ctr"/>
+                      <a:r>
+                        <a:rPr lang="en-US" sz="1100" u="none" strike="noStrike">
+                          <a:effectLst/>
+                        </a:rPr>
+                        <a:t>50</a:t>
+                      </a:r>
+                      <a:endParaRPr lang="en-US" sz="1100" b="0" i="0" u="none" strike="noStrike">
+                        <a:solidFill>
+                          <a:srgbClr val="000000"/>
+                        </a:solidFill>
+                        <a:effectLst/>
+                        <a:latin typeface="Aptos Narrow" panose="020B0004020202020204" pitchFamily="34" charset="0"/>
+                      </a:endParaRPr>
+                    </a:p>
+                  </a:txBody>
+                  <a:tcPr marL="9525" marR="9525" marT="9525" marB="0" anchor="ctr"/>
+                </a:tc>
+                <a:tc>
+                  <a:txBody>
+                    <a:bodyPr/>
+                    <a:lstStyle/>
+                    <a:p>
+                      <a:pPr algn="ctr" fontAlgn="ctr"/>
+                      <a:r>
+                        <a:rPr lang="en-US" sz="1100" u="none" strike="noStrike">
+                          <a:effectLst/>
+                        </a:rPr>
+                        <a:t>54</a:t>
+                      </a:r>
+                      <a:endParaRPr lang="en-US" sz="1100" b="0" i="0" u="none" strike="noStrike">
+                        <a:solidFill>
+                          <a:srgbClr val="000000"/>
+                        </a:solidFill>
+                        <a:effectLst/>
+                        <a:latin typeface="Aptos Narrow" panose="020B0004020202020204" pitchFamily="34" charset="0"/>
+                      </a:endParaRPr>
+                    </a:p>
+                  </a:txBody>
+                  <a:tcPr marL="9525" marR="9525" marT="9525" marB="0" anchor="ctr"/>
+                </a:tc>
+                <a:tc>
+                  <a:txBody>
+                    <a:bodyPr/>
+                    <a:lstStyle/>
+                    <a:p>
+                      <a:pPr algn="ctr" fontAlgn="ctr"/>
+                      <a:r>
+                        <a:rPr lang="en-US" sz="1100" u="none" strike="noStrike" dirty="0">
+                          <a:effectLst/>
+                        </a:rPr>
+                        <a:t>104</a:t>
+                      </a:r>
+                      <a:endParaRPr lang="en-US" sz="1100" b="0" i="0" u="none" strike="noStrike" dirty="0">
+                        <a:solidFill>
+                          <a:srgbClr val="000000"/>
+                        </a:solidFill>
+                        <a:effectLst/>
+                        <a:latin typeface="Aptos Narrow" panose="020B0004020202020204" pitchFamily="34" charset="0"/>
+                      </a:endParaRPr>
+                    </a:p>
+                  </a:txBody>
+                  <a:tcPr marL="9525" marR="9525" marT="9525" marB="0" anchor="ctr"/>
+                </a:tc>
+                <a:extLst>
+                  <a:ext uri="{0D108BD9-81ED-4DB2-BD59-A6C34878D82A}">
+                    <a16:rowId xmlns:a16="http://schemas.microsoft.com/office/drawing/2014/main" val="425241735"/>
+                  </a:ext>
+                </a:extLst>
+              </a:tr>
+            </a:tbl>
+          </a:graphicData>
+        </a:graphic>
+      </p:graphicFrame>
+      <p:pic>
+        <p:nvPicPr>
+          <p:cNvPr id="7" name="Content Placeholder 6">
+            <a:extLst>
+              <a:ext uri="{FF2B5EF4-FFF2-40B4-BE49-F238E27FC236}">
+                <a16:creationId xmlns:a16="http://schemas.microsoft.com/office/drawing/2014/main" id="{52F9A5DE-4DA5-02A4-E05C-513BE84CC55D}"/>
+              </a:ext>
+            </a:extLst>
+          </p:cNvPr>
+          <p:cNvPicPr>
+            <a:picLocks noGrp="1" noChangeAspect="1"/>
+          </p:cNvPicPr>
+          <p:nvPr>
+            <p:ph idx="1"/>
+          </p:nvPr>
+        </p:nvPicPr>
+        <p:blipFill>
+          <a:blip r:embed="rId2"/>
+          <a:stretch>
+            <a:fillRect/>
+          </a:stretch>
+        </p:blipFill>
+        <p:spPr>
+          <a:xfrm>
+            <a:off x="838200" y="1774332"/>
+            <a:ext cx="5492669" cy="2281881"/>
+          </a:xfrm>
+        </p:spPr>
+      </p:pic>
+      <p:pic>
+        <p:nvPicPr>
+          <p:cNvPr id="9" name="Picture 8">
+            <a:extLst>
+              <a:ext uri="{FF2B5EF4-FFF2-40B4-BE49-F238E27FC236}">
+                <a16:creationId xmlns:a16="http://schemas.microsoft.com/office/drawing/2014/main" id="{A97FD6D9-93B3-C33B-BA1A-25EAA798FBF7}"/>
+              </a:ext>
+            </a:extLst>
+          </p:cNvPr>
+          <p:cNvPicPr>
+            <a:picLocks noChangeAspect="1"/>
+          </p:cNvPicPr>
+          <p:nvPr/>
+        </p:nvPicPr>
+        <p:blipFill>
+          <a:blip r:embed="rId3"/>
+          <a:stretch>
+            <a:fillRect/>
+          </a:stretch>
+        </p:blipFill>
+        <p:spPr>
+          <a:xfrm>
+            <a:off x="8382149" y="4521695"/>
+            <a:ext cx="2672602" cy="1934712"/>
+          </a:xfrm>
+          <a:prstGeom prst="rect">
+            <a:avLst/>
+          </a:prstGeom>
+        </p:spPr>
+      </p:pic>
+      <p:pic>
+        <p:nvPicPr>
+          <p:cNvPr id="11" name="Picture 10">
+            <a:extLst>
+              <a:ext uri="{FF2B5EF4-FFF2-40B4-BE49-F238E27FC236}">
+                <a16:creationId xmlns:a16="http://schemas.microsoft.com/office/drawing/2014/main" id="{0402BC08-439D-17A5-DBFC-F0D1CA4DBB8D}"/>
+              </a:ext>
+            </a:extLst>
+          </p:cNvPr>
+          <p:cNvPicPr>
+            <a:picLocks noChangeAspect="1"/>
+          </p:cNvPicPr>
+          <p:nvPr/>
+        </p:nvPicPr>
+        <p:blipFill>
+          <a:blip r:embed="rId4"/>
+          <a:stretch>
+            <a:fillRect/>
+          </a:stretch>
+        </p:blipFill>
+        <p:spPr>
+          <a:xfrm>
+            <a:off x="1022012" y="4056213"/>
+            <a:ext cx="3874740" cy="2498573"/>
+          </a:xfrm>
+          <a:prstGeom prst="rect">
+            <a:avLst/>
+          </a:prstGeom>
+        </p:spPr>
+      </p:pic>
+    </p:spTree>
+    <p:extLst>
+      <p:ext uri="{BB962C8B-B14F-4D97-AF65-F5344CB8AC3E}">
+        <p14:creationId xmlns:p14="http://schemas.microsoft.com/office/powerpoint/2010/main" val="566407149"/>
+      </p:ext>
+    </p:extLst>
+  </p:cSld>
+  <p:clrMapOvr>
+    <a:masterClrMapping/>
+  </p:clrMapOvr>
+</p:sld>
+</file>
+
+<file path=ppt/slides/slide31.xml><?xml version="1.0" encoding="utf-8"?>
+<p:sld xmlns:a="http://schemas.openxmlformats.org/drawingml/2006/main" xmlns:r="http://schemas.openxmlformats.org/officeDocument/2006/relationships" xmlns:p="http://schemas.openxmlformats.org/presentationml/2006/main">
+  <p:cSld>
+    <p:spTree>
+      <p:nvGrpSpPr>
+        <p:cNvPr id="1" name=""/>
+        <p:cNvGrpSpPr/>
+        <p:nvPr/>
+      </p:nvGrpSpPr>
+      <p:grpSpPr>
+        <a:xfrm>
+          <a:off x="0" y="0"/>
+          <a:ext cx="0" cy="0"/>
+          <a:chOff x="0" y="0"/>
+          <a:chExt cx="0" cy="0"/>
+        </a:xfrm>
+      </p:grpSpPr>
+      <p:sp>
+        <p:nvSpPr>
+          <p:cNvPr id="2" name="Title 1"/>
+          <p:cNvSpPr>
+            <a:spLocks noGrp="1"/>
+          </p:cNvSpPr>
+          <p:nvPr>
+            <p:ph type="title"/>
+          </p:nvPr>
+        </p:nvSpPr>
+        <p:spPr/>
+        <p:txBody>
+          <a:bodyPr/>
+          <a:lstStyle/>
+          <a:p>
+            <a:r>
+              <a:t>Problem Example</a:t>
+            </a:r>
+          </a:p>
+        </p:txBody>
+      </p:sp>
+      <p:sp>
+        <p:nvSpPr>
+          <p:cNvPr id="3" name="Content Placeholder 2"/>
+          <p:cNvSpPr>
+            <a:spLocks noGrp="1"/>
+          </p:cNvSpPr>
+          <p:nvPr>
+            <p:ph idx="1"/>
+          </p:nvPr>
+        </p:nvSpPr>
+        <p:spPr/>
+        <p:txBody>
+          <a:bodyPr/>
+          <a:lstStyle/>
+          <a:p>
+            <a:pPr marL="0" indent="0">
+              <a:buNone/>
+            </a:pPr>
+            <a:r>
+              <a:rPr dirty="0"/>
+              <a:t>Task: Classify the sentiment of a sentence</a:t>
+            </a:r>
+          </a:p>
+          <a:p>
+            <a:endParaRPr dirty="0"/>
+          </a:p>
+          <a:p>
+            <a:pPr marL="0" indent="0">
+              <a:buNone/>
+            </a:pPr>
+            <a:r>
+              <a:rPr dirty="0"/>
+              <a:t>Training Data:</a:t>
+            </a:r>
+          </a:p>
+          <a:p>
+            <a:pPr marL="0" indent="0">
+              <a:buNone/>
+            </a:pPr>
+            <a:r>
+              <a:rPr dirty="0"/>
+              <a:t>1. I love this movie (</a:t>
+            </a:r>
+            <a:r>
+              <a:rPr dirty="0">
+                <a:solidFill>
+                  <a:srgbClr val="00B050"/>
+                </a:solidFill>
+              </a:rPr>
+              <a:t>Positive</a:t>
+            </a:r>
+            <a:r>
+              <a:rPr dirty="0"/>
+              <a:t>)</a:t>
+            </a:r>
+          </a:p>
+          <a:p>
+            <a:pPr marL="0" indent="0">
+              <a:buNone/>
+            </a:pPr>
+            <a:r>
+              <a:rPr dirty="0"/>
+              <a:t>2. This film is amazing (</a:t>
+            </a:r>
+            <a:r>
+              <a:rPr dirty="0">
+                <a:solidFill>
+                  <a:srgbClr val="00B050"/>
+                </a:solidFill>
+              </a:rPr>
+              <a:t>Positive</a:t>
+            </a:r>
+            <a:r>
+              <a:rPr dirty="0"/>
+              <a:t>)</a:t>
+            </a:r>
+          </a:p>
+          <a:p>
+            <a:pPr marL="0" indent="0">
+              <a:buNone/>
+            </a:pPr>
+            <a:r>
+              <a:rPr dirty="0"/>
+              <a:t>3. I hate this movie (</a:t>
+            </a:r>
+            <a:r>
+              <a:rPr dirty="0">
+                <a:solidFill>
+                  <a:srgbClr val="FF0000"/>
+                </a:solidFill>
+              </a:rPr>
+              <a:t>Negative</a:t>
+            </a:r>
+            <a:r>
+              <a:rPr dirty="0"/>
+              <a:t>)</a:t>
+            </a:r>
+          </a:p>
+          <a:p>
+            <a:pPr marL="0" indent="0">
+              <a:buNone/>
+            </a:pPr>
+            <a:r>
+              <a:rPr dirty="0"/>
+              <a:t>4. This film is terrible (</a:t>
+            </a:r>
+            <a:r>
+              <a:rPr dirty="0">
+                <a:solidFill>
+                  <a:srgbClr val="FF0000"/>
+                </a:solidFill>
+              </a:rPr>
+              <a:t>Negative</a:t>
+            </a:r>
+            <a:r>
+              <a:rPr dirty="0"/>
+              <a:t>)</a:t>
+            </a:r>
+          </a:p>
+          <a:p>
+            <a:endParaRPr dirty="0"/>
+          </a:p>
+          <a:p>
+            <a:pPr marL="0" indent="0">
+              <a:buNone/>
+            </a:pPr>
+            <a:r>
+              <a:rPr dirty="0"/>
+              <a:t>Classify: 'I love this film'</a:t>
+            </a:r>
+          </a:p>
+        </p:txBody>
+      </p:sp>
+    </p:spTree>
+  </p:cSld>
+  <p:clrMapOvr>
+    <a:masterClrMapping/>
+  </p:clrMapOvr>
+</p:sld>
+</file>
+
+<file path=ppt/slides/slide32.xml><?xml version="1.0" encoding="utf-8"?>
+<p:sld xmlns:a="http://schemas.openxmlformats.org/drawingml/2006/main" xmlns:r="http://schemas.openxmlformats.org/officeDocument/2006/relationships" xmlns:p="http://schemas.openxmlformats.org/presentationml/2006/main">
+  <p:cSld>
+    <p:spTree>
+      <p:nvGrpSpPr>
+        <p:cNvPr id="1" name=""/>
+        <p:cNvGrpSpPr/>
+        <p:nvPr/>
+      </p:nvGrpSpPr>
+      <p:grpSpPr>
+        <a:xfrm>
+          <a:off x="0" y="0"/>
+          <a:ext cx="0" cy="0"/>
+          <a:chOff x="0" y="0"/>
+          <a:chExt cx="0" cy="0"/>
+        </a:xfrm>
+      </p:grpSpPr>
+      <p:sp>
+        <p:nvSpPr>
+          <p:cNvPr id="2" name="Title 1"/>
+          <p:cNvSpPr>
+            <a:spLocks noGrp="1"/>
+          </p:cNvSpPr>
+          <p:nvPr>
+            <p:ph type="title"/>
+          </p:nvPr>
+        </p:nvSpPr>
+        <p:spPr/>
+        <p:txBody>
+          <a:bodyPr/>
+          <a:lstStyle/>
+          <a:p>
+            <a:r>
+              <a:t>Step 1 – Vocabulary</a:t>
+            </a:r>
+          </a:p>
+        </p:txBody>
+      </p:sp>
+      <p:sp>
+        <p:nvSpPr>
+          <p:cNvPr id="3" name="Content Placeholder 2"/>
+          <p:cNvSpPr>
+            <a:spLocks noGrp="1"/>
+          </p:cNvSpPr>
+          <p:nvPr>
+            <p:ph idx="1"/>
+          </p:nvPr>
+        </p:nvSpPr>
+        <p:spPr/>
+        <p:txBody>
+          <a:bodyPr/>
+          <a:lstStyle/>
+          <a:p>
+            <a:pPr marL="0" indent="0">
+              <a:buNone/>
+            </a:pPr>
+            <a:r>
+              <a:rPr dirty="0"/>
+              <a:t>Create a vocabulary of all words:</a:t>
+            </a:r>
+          </a:p>
+          <a:p>
+            <a:pPr marL="0" indent="0">
+              <a:buNone/>
+            </a:pPr>
+            <a:r>
+              <a:rPr dirty="0"/>
+              <a:t>[I, love, this, movie, film, is, amazing, hate, terrible]</a:t>
+            </a:r>
+          </a:p>
+        </p:txBody>
+      </p:sp>
+    </p:spTree>
+  </p:cSld>
+  <p:clrMapOvr>
+    <a:masterClrMapping/>
+  </p:clrMapOvr>
+</p:sld>
+</file>
+
+<file path=ppt/slides/slide33.xml><?xml version="1.0" encoding="utf-8"?>
+<p:sld xmlns:a="http://schemas.openxmlformats.org/drawingml/2006/main" xmlns:r="http://schemas.openxmlformats.org/officeDocument/2006/relationships" xmlns:p="http://schemas.openxmlformats.org/presentationml/2006/main">
+  <p:cSld>
+    <p:spTree>
+      <p:nvGrpSpPr>
+        <p:cNvPr id="1" name=""/>
+        <p:cNvGrpSpPr/>
+        <p:nvPr/>
+      </p:nvGrpSpPr>
+      <p:grpSpPr>
+        <a:xfrm>
+          <a:off x="0" y="0"/>
+          <a:ext cx="0" cy="0"/>
+          <a:chOff x="0" y="0"/>
+          <a:chExt cx="0" cy="0"/>
+        </a:xfrm>
+      </p:grpSpPr>
+      <p:sp>
+        <p:nvSpPr>
+          <p:cNvPr id="2" name="Title 1"/>
+          <p:cNvSpPr>
+            <a:spLocks noGrp="1"/>
+          </p:cNvSpPr>
+          <p:nvPr>
+            <p:ph type="title"/>
+          </p:nvPr>
+        </p:nvSpPr>
+        <p:spPr/>
+        <p:txBody>
+          <a:bodyPr/>
+          <a:lstStyle/>
+          <a:p>
+            <a:r>
+              <a:t>Step 2 – Word Frequencies</a:t>
+            </a:r>
+          </a:p>
+        </p:txBody>
+      </p:sp>
+      <p:sp>
+        <p:nvSpPr>
+          <p:cNvPr id="3" name="Content Placeholder 2"/>
+          <p:cNvSpPr>
+            <a:spLocks noGrp="1"/>
+          </p:cNvSpPr>
+          <p:nvPr>
+            <p:ph idx="1"/>
+          </p:nvPr>
+        </p:nvSpPr>
+        <p:spPr>
+          <a:xfrm>
+            <a:off x="838200" y="1706008"/>
+            <a:ext cx="10515600" cy="505852"/>
+          </a:xfrm>
+        </p:spPr>
+        <p:txBody>
+          <a:bodyPr/>
+          <a:lstStyle/>
+          <a:p>
+            <a:pPr marL="0" indent="0">
+              <a:buNone/>
+            </a:pPr>
+            <a:r>
+              <a:rPr dirty="0"/>
+              <a:t>Count how often each word appears in each class:</a:t>
+            </a:r>
+          </a:p>
+          <a:p>
+            <a:pPr marL="0" indent="0">
+              <a:buNone/>
+            </a:pPr>
+            <a:endParaRPr dirty="0"/>
+          </a:p>
+        </p:txBody>
+      </p:sp>
+      <p:graphicFrame>
+        <p:nvGraphicFramePr>
+          <p:cNvPr id="8" name="Table 7">
+            <a:extLst>
+              <a:ext uri="{FF2B5EF4-FFF2-40B4-BE49-F238E27FC236}">
+                <a16:creationId xmlns:a16="http://schemas.microsoft.com/office/drawing/2014/main" id="{BF509A1C-22C8-318A-67E2-B4F741CEEA6A}"/>
+              </a:ext>
+            </a:extLst>
+          </p:cNvPr>
+          <p:cNvGraphicFramePr>
+            <a:graphicFrameLocks noGrp="1"/>
+          </p:cNvGraphicFramePr>
+          <p:nvPr>
+            <p:extLst>
+              <p:ext uri="{D42A27DB-BD31-4B8C-83A1-F6EECF244321}">
+                <p14:modId xmlns:p14="http://schemas.microsoft.com/office/powerpoint/2010/main" val="3941962298"/>
+              </p:ext>
+            </p:extLst>
+          </p:nvPr>
+        </p:nvGraphicFramePr>
+        <p:xfrm>
+          <a:off x="838200" y="2592347"/>
+          <a:ext cx="3206580" cy="3048000"/>
+        </p:xfrm>
+        <a:graphic>
+          <a:graphicData uri="http://schemas.openxmlformats.org/drawingml/2006/table">
+            <a:tbl>
+              <a:tblPr>
+                <a:tableStyleId>{616DA210-FB5B-4158-B5E0-FEB733F419BA}</a:tableStyleId>
+              </a:tblPr>
+              <a:tblGrid>
+                <a:gridCol w="1068860">
+                  <a:extLst>
+                    <a:ext uri="{9D8B030D-6E8A-4147-A177-3AD203B41FA5}">
+                      <a16:colId xmlns:a16="http://schemas.microsoft.com/office/drawing/2014/main" val="3523250311"/>
+                    </a:ext>
+                  </a:extLst>
+                </a:gridCol>
+                <a:gridCol w="1068860">
+                  <a:extLst>
+                    <a:ext uri="{9D8B030D-6E8A-4147-A177-3AD203B41FA5}">
+                      <a16:colId xmlns:a16="http://schemas.microsoft.com/office/drawing/2014/main" val="2531495765"/>
+                    </a:ext>
+                  </a:extLst>
+                </a:gridCol>
+                <a:gridCol w="1068860">
+                  <a:extLst>
+                    <a:ext uri="{9D8B030D-6E8A-4147-A177-3AD203B41FA5}">
+                      <a16:colId xmlns:a16="http://schemas.microsoft.com/office/drawing/2014/main" val="3528724569"/>
+                    </a:ext>
+                  </a:extLst>
+                </a:gridCol>
+              </a:tblGrid>
+              <a:tr h="304800">
+                <a:tc>
+                  <a:txBody>
+                    <a:bodyPr/>
+                    <a:lstStyle/>
+                    <a:p>
+                      <a:pPr algn="ctr" rtl="0" fontAlgn="ctr"/>
+                      <a:r>
+                        <a:rPr lang="en-US" sz="1800" u="none" strike="noStrike">
+                          <a:effectLst/>
+                        </a:rPr>
+                        <a:t>Word</a:t>
+                      </a:r>
+                      <a:endParaRPr lang="en-US" sz="1800" b="1" i="0" u="none" strike="noStrike">
+                        <a:solidFill>
+                          <a:srgbClr val="000000"/>
+                        </a:solidFill>
+                        <a:effectLst/>
+                        <a:latin typeface="Aptos Narrow" panose="020B0004020202020204" pitchFamily="34" charset="0"/>
+                      </a:endParaRPr>
+                    </a:p>
+                  </a:txBody>
+                  <a:tcPr marL="9525" marR="9525" marT="9525" marB="0" anchor="ctr"/>
+                </a:tc>
+                <a:tc>
+                  <a:txBody>
+                    <a:bodyPr/>
+                    <a:lstStyle/>
+                    <a:p>
+                      <a:pPr algn="ctr" rtl="0" fontAlgn="ctr"/>
+                      <a:r>
+                        <a:rPr lang="en-US" sz="1800" u="none" strike="noStrike" dirty="0">
+                          <a:solidFill>
+                            <a:srgbClr val="00B050"/>
+                          </a:solidFill>
+                          <a:effectLst/>
+                        </a:rPr>
+                        <a:t>Positive</a:t>
+                      </a:r>
+                      <a:endParaRPr lang="en-US" sz="1800" b="1" i="0" u="none" strike="noStrike" dirty="0">
+                        <a:solidFill>
+                          <a:srgbClr val="00B050"/>
+                        </a:solidFill>
+                        <a:effectLst/>
+                        <a:latin typeface="Aptos Narrow" panose="020B0004020202020204" pitchFamily="34" charset="0"/>
+                      </a:endParaRPr>
+                    </a:p>
+                  </a:txBody>
+                  <a:tcPr marL="9525" marR="9525" marT="9525" marB="0" anchor="ctr"/>
+                </a:tc>
+                <a:tc>
+                  <a:txBody>
+                    <a:bodyPr/>
+                    <a:lstStyle/>
+                    <a:p>
+                      <a:pPr algn="ctr" rtl="0" fontAlgn="ctr"/>
+                      <a:r>
+                        <a:rPr lang="en-US" sz="1800" u="none" strike="noStrike" dirty="0">
+                          <a:solidFill>
+                            <a:srgbClr val="FF0000"/>
+                          </a:solidFill>
+                          <a:effectLst/>
+                        </a:rPr>
+                        <a:t>Negative</a:t>
+                      </a:r>
+                      <a:endParaRPr lang="en-US" sz="1800" b="1" i="0" u="none" strike="noStrike" dirty="0">
+                        <a:solidFill>
+                          <a:srgbClr val="FF0000"/>
+                        </a:solidFill>
+                        <a:effectLst/>
+                        <a:latin typeface="Aptos Narrow" panose="020B0004020202020204" pitchFamily="34" charset="0"/>
+                      </a:endParaRPr>
+                    </a:p>
+                  </a:txBody>
+                  <a:tcPr marL="9525" marR="9525" marT="9525" marB="0" anchor="ctr"/>
+                </a:tc>
+                <a:extLst>
+                  <a:ext uri="{0D108BD9-81ED-4DB2-BD59-A6C34878D82A}">
+                    <a16:rowId xmlns:a16="http://schemas.microsoft.com/office/drawing/2014/main" val="3494100329"/>
+                  </a:ext>
+                </a:extLst>
+              </a:tr>
+              <a:tr h="304800">
+                <a:tc>
+                  <a:txBody>
+                    <a:bodyPr/>
+                    <a:lstStyle/>
+                    <a:p>
+                      <a:pPr algn="ctr" rtl="0" fontAlgn="ctr"/>
+                      <a:r>
+                        <a:rPr lang="en-US" sz="1800" u="none" strike="noStrike">
+                          <a:effectLst/>
+                        </a:rPr>
+                        <a:t>I</a:t>
+                      </a:r>
+                      <a:endParaRPr lang="en-US" sz="1800" b="0" i="0" u="none" strike="noStrike">
+                        <a:solidFill>
+                          <a:srgbClr val="000000"/>
+                        </a:solidFill>
+                        <a:effectLst/>
+                        <a:latin typeface="Aptos Narrow" panose="020B0004020202020204" pitchFamily="34" charset="0"/>
+                      </a:endParaRPr>
+                    </a:p>
+                  </a:txBody>
+                  <a:tcPr marL="9525" marR="9525" marT="9525" marB="0" anchor="ctr"/>
+                </a:tc>
+                <a:tc>
+                  <a:txBody>
+                    <a:bodyPr/>
+                    <a:lstStyle/>
+                    <a:p>
+                      <a:pPr algn="ctr" rtl="0" fontAlgn="ctr"/>
+                      <a:r>
+                        <a:rPr lang="en-US" sz="1800" u="none" strike="noStrike" dirty="0">
+                          <a:effectLst/>
+                        </a:rPr>
+                        <a:t>1</a:t>
+                      </a:r>
+                      <a:endParaRPr lang="en-US" sz="1800" b="0" i="0" u="none" strike="noStrike" dirty="0">
+                        <a:solidFill>
+                          <a:srgbClr val="000000"/>
+                        </a:solidFill>
+                        <a:effectLst/>
+                        <a:latin typeface="Aptos Narrow" panose="020B0004020202020204" pitchFamily="34" charset="0"/>
+                      </a:endParaRPr>
+                    </a:p>
+                  </a:txBody>
+                  <a:tcPr marL="9525" marR="9525" marT="9525" marB="0" anchor="ctr"/>
+                </a:tc>
+                <a:tc>
+                  <a:txBody>
+                    <a:bodyPr/>
+                    <a:lstStyle/>
+                    <a:p>
+                      <a:pPr algn="ctr" rtl="0" fontAlgn="ctr"/>
+                      <a:r>
+                        <a:rPr lang="en-US" sz="1800" u="none" strike="noStrike" dirty="0">
+                          <a:effectLst/>
+                        </a:rPr>
+                        <a:t>1</a:t>
+                      </a:r>
+                      <a:endParaRPr lang="en-US" sz="1800" b="0" i="0" u="none" strike="noStrike" dirty="0">
+                        <a:solidFill>
+                          <a:srgbClr val="000000"/>
+                        </a:solidFill>
+                        <a:effectLst/>
+                        <a:latin typeface="Aptos Narrow" panose="020B0004020202020204" pitchFamily="34" charset="0"/>
+                      </a:endParaRPr>
+                    </a:p>
+                  </a:txBody>
+                  <a:tcPr marL="9525" marR="9525" marT="9525" marB="0" anchor="ctr"/>
+                </a:tc>
+                <a:extLst>
+                  <a:ext uri="{0D108BD9-81ED-4DB2-BD59-A6C34878D82A}">
+                    <a16:rowId xmlns:a16="http://schemas.microsoft.com/office/drawing/2014/main" val="3588663636"/>
+                  </a:ext>
+                </a:extLst>
+              </a:tr>
+              <a:tr h="304800">
+                <a:tc>
+                  <a:txBody>
+                    <a:bodyPr/>
+                    <a:lstStyle/>
+                    <a:p>
+                      <a:pPr algn="ctr" rtl="0" fontAlgn="ctr"/>
+                      <a:r>
+                        <a:rPr lang="en-US" sz="1800" u="none" strike="noStrike">
+                          <a:effectLst/>
+                        </a:rPr>
+                        <a:t>love</a:t>
+                      </a:r>
+                      <a:endParaRPr lang="en-US" sz="1800" b="0" i="0" u="none" strike="noStrike">
+                        <a:solidFill>
+                          <a:srgbClr val="000000"/>
+                        </a:solidFill>
+                        <a:effectLst/>
+                        <a:latin typeface="Aptos Narrow" panose="020B0004020202020204" pitchFamily="34" charset="0"/>
+                      </a:endParaRPr>
+                    </a:p>
+                  </a:txBody>
+                  <a:tcPr marL="9525" marR="9525" marT="9525" marB="0" anchor="ctr"/>
+                </a:tc>
+                <a:tc>
+                  <a:txBody>
+                    <a:bodyPr/>
+                    <a:lstStyle/>
+                    <a:p>
+                      <a:pPr algn="ctr" rtl="0" fontAlgn="ctr"/>
+                      <a:r>
+                        <a:rPr lang="en-US" sz="1800" u="none" strike="noStrike" dirty="0">
+                          <a:effectLst/>
+                        </a:rPr>
+                        <a:t>1</a:t>
+                      </a:r>
+                      <a:endParaRPr lang="en-US" sz="1800" b="0" i="0" u="none" strike="noStrike" dirty="0">
+                        <a:solidFill>
+                          <a:srgbClr val="000000"/>
+                        </a:solidFill>
+                        <a:effectLst/>
+                        <a:latin typeface="Aptos Narrow" panose="020B0004020202020204" pitchFamily="34" charset="0"/>
+                      </a:endParaRPr>
+                    </a:p>
+                  </a:txBody>
+                  <a:tcPr marL="9525" marR="9525" marT="9525" marB="0" anchor="ctr"/>
+                </a:tc>
+                <a:tc>
+                  <a:txBody>
+                    <a:bodyPr/>
+                    <a:lstStyle/>
+                    <a:p>
+                      <a:pPr algn="ctr" rtl="0" fontAlgn="ctr"/>
+                      <a:r>
+                        <a:rPr lang="en-US" sz="1800" u="none" strike="noStrike">
+                          <a:effectLst/>
+                        </a:rPr>
+                        <a:t>0</a:t>
+                      </a:r>
+                      <a:endParaRPr lang="en-US" sz="1800" b="0" i="0" u="none" strike="noStrike">
+                        <a:solidFill>
+                          <a:srgbClr val="000000"/>
+                        </a:solidFill>
+                        <a:effectLst/>
+                        <a:latin typeface="Aptos Narrow" panose="020B0004020202020204" pitchFamily="34" charset="0"/>
+                      </a:endParaRPr>
+                    </a:p>
+                  </a:txBody>
+                  <a:tcPr marL="9525" marR="9525" marT="9525" marB="0" anchor="ctr"/>
+                </a:tc>
+                <a:extLst>
+                  <a:ext uri="{0D108BD9-81ED-4DB2-BD59-A6C34878D82A}">
+                    <a16:rowId xmlns:a16="http://schemas.microsoft.com/office/drawing/2014/main" val="3506405497"/>
+                  </a:ext>
+                </a:extLst>
+              </a:tr>
+              <a:tr h="304800">
+                <a:tc>
+                  <a:txBody>
+                    <a:bodyPr/>
+                    <a:lstStyle/>
+                    <a:p>
+                      <a:pPr algn="ctr" rtl="0" fontAlgn="ctr"/>
+                      <a:r>
+                        <a:rPr lang="en-US" sz="1800" u="none" strike="noStrike">
+                          <a:effectLst/>
+                        </a:rPr>
+                        <a:t>this</a:t>
+                      </a:r>
+                      <a:endParaRPr lang="en-US" sz="1800" b="0" i="0" u="none" strike="noStrike">
+                        <a:solidFill>
+                          <a:srgbClr val="000000"/>
+                        </a:solidFill>
+                        <a:effectLst/>
+                        <a:latin typeface="Aptos Narrow" panose="020B0004020202020204" pitchFamily="34" charset="0"/>
+                      </a:endParaRPr>
+                    </a:p>
+                  </a:txBody>
+                  <a:tcPr marL="9525" marR="9525" marT="9525" marB="0" anchor="ctr"/>
+                </a:tc>
+                <a:tc>
+                  <a:txBody>
+                    <a:bodyPr/>
+                    <a:lstStyle/>
+                    <a:p>
+                      <a:pPr algn="ctr" rtl="0" fontAlgn="ctr"/>
+                      <a:r>
+                        <a:rPr lang="en-US" sz="1800" u="none" strike="noStrike" dirty="0">
+                          <a:effectLst/>
+                        </a:rPr>
+                        <a:t>2</a:t>
+                      </a:r>
+                      <a:endParaRPr lang="en-US" sz="1800" b="0" i="0" u="none" strike="noStrike" dirty="0">
+                        <a:solidFill>
+                          <a:srgbClr val="000000"/>
+                        </a:solidFill>
+                        <a:effectLst/>
+                        <a:latin typeface="Aptos Narrow" panose="020B0004020202020204" pitchFamily="34" charset="0"/>
+                      </a:endParaRPr>
+                    </a:p>
+                  </a:txBody>
+                  <a:tcPr marL="9525" marR="9525" marT="9525" marB="0" anchor="ctr"/>
+                </a:tc>
+                <a:tc>
+                  <a:txBody>
+                    <a:bodyPr/>
+                    <a:lstStyle/>
+                    <a:p>
+                      <a:pPr algn="ctr" rtl="0" fontAlgn="ctr"/>
+                      <a:r>
+                        <a:rPr lang="en-US" sz="1800" u="none" strike="noStrike">
+                          <a:effectLst/>
+                        </a:rPr>
+                        <a:t>2</a:t>
+                      </a:r>
+                      <a:endParaRPr lang="en-US" sz="1800" b="0" i="0" u="none" strike="noStrike">
+                        <a:solidFill>
+                          <a:srgbClr val="000000"/>
+                        </a:solidFill>
+                        <a:effectLst/>
+                        <a:latin typeface="Aptos Narrow" panose="020B0004020202020204" pitchFamily="34" charset="0"/>
+                      </a:endParaRPr>
+                    </a:p>
+                  </a:txBody>
+                  <a:tcPr marL="9525" marR="9525" marT="9525" marB="0" anchor="ctr"/>
+                </a:tc>
+                <a:extLst>
+                  <a:ext uri="{0D108BD9-81ED-4DB2-BD59-A6C34878D82A}">
+                    <a16:rowId xmlns:a16="http://schemas.microsoft.com/office/drawing/2014/main" val="2658946441"/>
+                  </a:ext>
+                </a:extLst>
+              </a:tr>
+              <a:tr h="304800">
+                <a:tc>
+                  <a:txBody>
+                    <a:bodyPr/>
+                    <a:lstStyle/>
+                    <a:p>
+                      <a:pPr algn="ctr" rtl="0" fontAlgn="ctr"/>
+                      <a:r>
+                        <a:rPr lang="en-US" sz="1800" u="none" strike="noStrike">
+                          <a:effectLst/>
+                        </a:rPr>
+                        <a:t>movie</a:t>
+                      </a:r>
+                      <a:endParaRPr lang="en-US" sz="1800" b="0" i="0" u="none" strike="noStrike">
+                        <a:solidFill>
+                          <a:srgbClr val="000000"/>
+                        </a:solidFill>
+                        <a:effectLst/>
+                        <a:latin typeface="Aptos Narrow" panose="020B0004020202020204" pitchFamily="34" charset="0"/>
+                      </a:endParaRPr>
+                    </a:p>
+                  </a:txBody>
+                  <a:tcPr marL="9525" marR="9525" marT="9525" marB="0" anchor="ctr"/>
+                </a:tc>
+                <a:tc>
+                  <a:txBody>
+                    <a:bodyPr/>
+                    <a:lstStyle/>
+                    <a:p>
+                      <a:pPr algn="ctr" rtl="0" fontAlgn="ctr"/>
+                      <a:r>
+                        <a:rPr lang="en-US" sz="1800" u="none" strike="noStrike" dirty="0">
+                          <a:effectLst/>
+                        </a:rPr>
+                        <a:t>1</a:t>
+                      </a:r>
+                      <a:endParaRPr lang="en-US" sz="1800" b="0" i="0" u="none" strike="noStrike" dirty="0">
+                        <a:solidFill>
+                          <a:srgbClr val="000000"/>
+                        </a:solidFill>
+                        <a:effectLst/>
+                        <a:latin typeface="Aptos Narrow" panose="020B0004020202020204" pitchFamily="34" charset="0"/>
+                      </a:endParaRPr>
+                    </a:p>
+                  </a:txBody>
+                  <a:tcPr marL="9525" marR="9525" marT="9525" marB="0" anchor="ctr"/>
+                </a:tc>
+                <a:tc>
+                  <a:txBody>
+                    <a:bodyPr/>
+                    <a:lstStyle/>
+                    <a:p>
+                      <a:pPr algn="ctr" rtl="0" fontAlgn="ctr"/>
+                      <a:r>
+                        <a:rPr lang="en-US" sz="1800" u="none" strike="noStrike" dirty="0">
+                          <a:effectLst/>
+                        </a:rPr>
+                        <a:t>1</a:t>
+                      </a:r>
+                      <a:endParaRPr lang="en-US" sz="1800" b="0" i="0" u="none" strike="noStrike" dirty="0">
+                        <a:solidFill>
+                          <a:srgbClr val="000000"/>
+                        </a:solidFill>
+                        <a:effectLst/>
+                        <a:latin typeface="Aptos Narrow" panose="020B0004020202020204" pitchFamily="34" charset="0"/>
+                      </a:endParaRPr>
+                    </a:p>
+                  </a:txBody>
+                  <a:tcPr marL="9525" marR="9525" marT="9525" marB="0" anchor="ctr"/>
+                </a:tc>
+                <a:extLst>
+                  <a:ext uri="{0D108BD9-81ED-4DB2-BD59-A6C34878D82A}">
+                    <a16:rowId xmlns:a16="http://schemas.microsoft.com/office/drawing/2014/main" val="2872202801"/>
+                  </a:ext>
+                </a:extLst>
+              </a:tr>
+              <a:tr h="304800">
+                <a:tc>
+                  <a:txBody>
+                    <a:bodyPr/>
+                    <a:lstStyle/>
+                    <a:p>
+                      <a:pPr algn="ctr" rtl="0" fontAlgn="ctr"/>
+                      <a:r>
+                        <a:rPr lang="en-US" sz="1800" u="none" strike="noStrike">
+                          <a:effectLst/>
+                        </a:rPr>
+                        <a:t>film</a:t>
+                      </a:r>
+                      <a:endParaRPr lang="en-US" sz="1800" b="0" i="0" u="none" strike="noStrike">
+                        <a:solidFill>
+                          <a:srgbClr val="000000"/>
+                        </a:solidFill>
+                        <a:effectLst/>
+                        <a:latin typeface="Aptos Narrow" panose="020B0004020202020204" pitchFamily="34" charset="0"/>
+                      </a:endParaRPr>
+                    </a:p>
+                  </a:txBody>
+                  <a:tcPr marL="9525" marR="9525" marT="9525" marB="0" anchor="ctr"/>
+                </a:tc>
+                <a:tc>
+                  <a:txBody>
+                    <a:bodyPr/>
+                    <a:lstStyle/>
+                    <a:p>
+                      <a:pPr algn="ctr" rtl="0" fontAlgn="ctr"/>
+                      <a:r>
+                        <a:rPr lang="en-US" sz="1800" u="none" strike="noStrike" dirty="0">
+                          <a:effectLst/>
+                        </a:rPr>
+                        <a:t>1</a:t>
+                      </a:r>
+                      <a:endParaRPr lang="en-US" sz="1800" b="0" i="0" u="none" strike="noStrike" dirty="0">
+                        <a:solidFill>
+                          <a:srgbClr val="000000"/>
+                        </a:solidFill>
+                        <a:effectLst/>
+                        <a:latin typeface="Aptos Narrow" panose="020B0004020202020204" pitchFamily="34" charset="0"/>
+                      </a:endParaRPr>
+                    </a:p>
+                  </a:txBody>
+                  <a:tcPr marL="9525" marR="9525" marT="9525" marB="0" anchor="ctr"/>
+                </a:tc>
+                <a:tc>
+                  <a:txBody>
+                    <a:bodyPr/>
+                    <a:lstStyle/>
+                    <a:p>
+                      <a:pPr algn="ctr" rtl="0" fontAlgn="ctr"/>
+                      <a:r>
+                        <a:rPr lang="en-US" sz="1800" u="none" strike="noStrike" dirty="0">
+                          <a:effectLst/>
+                        </a:rPr>
+                        <a:t>1</a:t>
+                      </a:r>
+                      <a:endParaRPr lang="en-US" sz="1800" b="0" i="0" u="none" strike="noStrike" dirty="0">
+                        <a:solidFill>
+                          <a:srgbClr val="000000"/>
+                        </a:solidFill>
+                        <a:effectLst/>
+                        <a:latin typeface="Aptos Narrow" panose="020B0004020202020204" pitchFamily="34" charset="0"/>
+                      </a:endParaRPr>
+                    </a:p>
+                  </a:txBody>
+                  <a:tcPr marL="9525" marR="9525" marT="9525" marB="0" anchor="ctr"/>
+                </a:tc>
+                <a:extLst>
+                  <a:ext uri="{0D108BD9-81ED-4DB2-BD59-A6C34878D82A}">
+                    <a16:rowId xmlns:a16="http://schemas.microsoft.com/office/drawing/2014/main" val="531571544"/>
+                  </a:ext>
+                </a:extLst>
+              </a:tr>
+              <a:tr h="304800">
+                <a:tc>
+                  <a:txBody>
+                    <a:bodyPr/>
+                    <a:lstStyle/>
+                    <a:p>
+                      <a:pPr algn="ctr" rtl="0" fontAlgn="ctr"/>
+                      <a:r>
+                        <a:rPr lang="en-US" sz="1800" u="none" strike="noStrike">
+                          <a:effectLst/>
+                        </a:rPr>
+                        <a:t>is</a:t>
+                      </a:r>
+                      <a:endParaRPr lang="en-US" sz="1800" b="0" i="0" u="none" strike="noStrike">
+                        <a:solidFill>
+                          <a:srgbClr val="000000"/>
+                        </a:solidFill>
+                        <a:effectLst/>
+                        <a:latin typeface="Aptos Narrow" panose="020B0004020202020204" pitchFamily="34" charset="0"/>
+                      </a:endParaRPr>
+                    </a:p>
+                  </a:txBody>
+                  <a:tcPr marL="9525" marR="9525" marT="9525" marB="0" anchor="ctr"/>
+                </a:tc>
+                <a:tc>
+                  <a:txBody>
+                    <a:bodyPr/>
+                    <a:lstStyle/>
+                    <a:p>
+                      <a:pPr algn="ctr" rtl="0" fontAlgn="ctr"/>
+                      <a:r>
+                        <a:rPr lang="en-US" sz="1800" u="none" strike="noStrike" dirty="0">
+                          <a:effectLst/>
+                        </a:rPr>
+                        <a:t>1</a:t>
+                      </a:r>
+                      <a:endParaRPr lang="en-US" sz="1800" b="0" i="0" u="none" strike="noStrike" dirty="0">
+                        <a:solidFill>
+                          <a:srgbClr val="000000"/>
+                        </a:solidFill>
+                        <a:effectLst/>
+                        <a:latin typeface="Aptos Narrow" panose="020B0004020202020204" pitchFamily="34" charset="0"/>
+                      </a:endParaRPr>
+                    </a:p>
+                  </a:txBody>
+                  <a:tcPr marL="9525" marR="9525" marT="9525" marB="0" anchor="ctr"/>
+                </a:tc>
+                <a:tc>
+                  <a:txBody>
+                    <a:bodyPr/>
+                    <a:lstStyle/>
+                    <a:p>
+                      <a:pPr algn="ctr" rtl="0" fontAlgn="ctr"/>
+                      <a:r>
+                        <a:rPr lang="en-US" sz="1800" u="none" strike="noStrike" dirty="0">
+                          <a:effectLst/>
+                        </a:rPr>
+                        <a:t>1</a:t>
+                      </a:r>
+                      <a:endParaRPr lang="en-US" sz="1800" b="0" i="0" u="none" strike="noStrike" dirty="0">
+                        <a:solidFill>
+                          <a:srgbClr val="000000"/>
+                        </a:solidFill>
+                        <a:effectLst/>
+                        <a:latin typeface="Aptos Narrow" panose="020B0004020202020204" pitchFamily="34" charset="0"/>
+                      </a:endParaRPr>
+                    </a:p>
+                  </a:txBody>
+                  <a:tcPr marL="9525" marR="9525" marT="9525" marB="0" anchor="ctr"/>
+                </a:tc>
+                <a:extLst>
+                  <a:ext uri="{0D108BD9-81ED-4DB2-BD59-A6C34878D82A}">
+                    <a16:rowId xmlns:a16="http://schemas.microsoft.com/office/drawing/2014/main" val="1307785434"/>
+                  </a:ext>
+                </a:extLst>
+              </a:tr>
+              <a:tr h="304800">
+                <a:tc>
+                  <a:txBody>
+                    <a:bodyPr/>
+                    <a:lstStyle/>
+                    <a:p>
+                      <a:pPr algn="ctr" rtl="0" fontAlgn="ctr"/>
+                      <a:r>
+                        <a:rPr lang="en-US" sz="1800" u="none" strike="noStrike">
+                          <a:effectLst/>
+                        </a:rPr>
+                        <a:t>amazing</a:t>
+                      </a:r>
+                      <a:endParaRPr lang="en-US" sz="1800" b="0" i="0" u="none" strike="noStrike">
+                        <a:solidFill>
+                          <a:srgbClr val="000000"/>
+                        </a:solidFill>
+                        <a:effectLst/>
+                        <a:latin typeface="Aptos Narrow" panose="020B0004020202020204" pitchFamily="34" charset="0"/>
+                      </a:endParaRPr>
+                    </a:p>
+                  </a:txBody>
+                  <a:tcPr marL="9525" marR="9525" marT="9525" marB="0" anchor="ctr"/>
+                </a:tc>
+                <a:tc>
+                  <a:txBody>
+                    <a:bodyPr/>
+                    <a:lstStyle/>
+                    <a:p>
+                      <a:pPr algn="ctr" rtl="0" fontAlgn="ctr"/>
+                      <a:r>
+                        <a:rPr lang="en-US" sz="1800" u="none" strike="noStrike" dirty="0">
+                          <a:effectLst/>
+                        </a:rPr>
+                        <a:t>1</a:t>
+                      </a:r>
+                      <a:endParaRPr lang="en-US" sz="1800" b="0" i="0" u="none" strike="noStrike" dirty="0">
+                        <a:solidFill>
+                          <a:srgbClr val="000000"/>
+                        </a:solidFill>
+                        <a:effectLst/>
+                        <a:latin typeface="Aptos Narrow" panose="020B0004020202020204" pitchFamily="34" charset="0"/>
+                      </a:endParaRPr>
+                    </a:p>
+                  </a:txBody>
+                  <a:tcPr marL="9525" marR="9525" marT="9525" marB="0" anchor="ctr"/>
+                </a:tc>
+                <a:tc>
+                  <a:txBody>
+                    <a:bodyPr/>
+                    <a:lstStyle/>
+                    <a:p>
+                      <a:pPr algn="ctr" rtl="0" fontAlgn="ctr"/>
+                      <a:r>
+                        <a:rPr lang="en-US" sz="1800" u="none" strike="noStrike">
+                          <a:effectLst/>
+                        </a:rPr>
+                        <a:t>0</a:t>
+                      </a:r>
+                      <a:endParaRPr lang="en-US" sz="1800" b="0" i="0" u="none" strike="noStrike">
+                        <a:solidFill>
+                          <a:srgbClr val="000000"/>
+                        </a:solidFill>
+                        <a:effectLst/>
+                        <a:latin typeface="Aptos Narrow" panose="020B0004020202020204" pitchFamily="34" charset="0"/>
+                      </a:endParaRPr>
+                    </a:p>
+                  </a:txBody>
+                  <a:tcPr marL="9525" marR="9525" marT="9525" marB="0" anchor="ctr"/>
+                </a:tc>
+                <a:extLst>
+                  <a:ext uri="{0D108BD9-81ED-4DB2-BD59-A6C34878D82A}">
+                    <a16:rowId xmlns:a16="http://schemas.microsoft.com/office/drawing/2014/main" val="913493509"/>
+                  </a:ext>
+                </a:extLst>
+              </a:tr>
+              <a:tr h="304800">
+                <a:tc>
+                  <a:txBody>
+                    <a:bodyPr/>
+                    <a:lstStyle/>
+                    <a:p>
+                      <a:pPr algn="ctr" rtl="0" fontAlgn="ctr"/>
+                      <a:r>
+                        <a:rPr lang="en-US" sz="1800" u="none" strike="noStrike">
+                          <a:effectLst/>
+                        </a:rPr>
+                        <a:t>hate</a:t>
+                      </a:r>
+                      <a:endParaRPr lang="en-US" sz="1800" b="0" i="0" u="none" strike="noStrike">
+                        <a:solidFill>
+                          <a:srgbClr val="000000"/>
+                        </a:solidFill>
+                        <a:effectLst/>
+                        <a:latin typeface="Aptos Narrow" panose="020B0004020202020204" pitchFamily="34" charset="0"/>
+                      </a:endParaRPr>
+                    </a:p>
+                  </a:txBody>
+                  <a:tcPr marL="9525" marR="9525" marT="9525" marB="0" anchor="ctr"/>
+                </a:tc>
+                <a:tc>
+                  <a:txBody>
+                    <a:bodyPr/>
+                    <a:lstStyle/>
+                    <a:p>
+                      <a:pPr algn="ctr" rtl="0" fontAlgn="ctr"/>
+                      <a:r>
+                        <a:rPr lang="en-US" sz="1800" u="none" strike="noStrike">
+                          <a:effectLst/>
+                        </a:rPr>
+                        <a:t>0</a:t>
+                      </a:r>
+                      <a:endParaRPr lang="en-US" sz="1800" b="0" i="0" u="none" strike="noStrike">
+                        <a:solidFill>
+                          <a:srgbClr val="000000"/>
+                        </a:solidFill>
+                        <a:effectLst/>
+                        <a:latin typeface="Aptos Narrow" panose="020B0004020202020204" pitchFamily="34" charset="0"/>
+                      </a:endParaRPr>
+                    </a:p>
+                  </a:txBody>
+                  <a:tcPr marL="9525" marR="9525" marT="9525" marB="0" anchor="ctr"/>
+                </a:tc>
+                <a:tc>
+                  <a:txBody>
+                    <a:bodyPr/>
+                    <a:lstStyle/>
+                    <a:p>
+                      <a:pPr algn="ctr" rtl="0" fontAlgn="ctr"/>
+                      <a:r>
+                        <a:rPr lang="en-US" sz="1800" u="none" strike="noStrike" dirty="0">
+                          <a:effectLst/>
+                        </a:rPr>
+                        <a:t>1</a:t>
+                      </a:r>
+                      <a:endParaRPr lang="en-US" sz="1800" b="0" i="0" u="none" strike="noStrike" dirty="0">
+                        <a:solidFill>
+                          <a:srgbClr val="000000"/>
+                        </a:solidFill>
+                        <a:effectLst/>
+                        <a:latin typeface="Aptos Narrow" panose="020B0004020202020204" pitchFamily="34" charset="0"/>
+                      </a:endParaRPr>
+                    </a:p>
+                  </a:txBody>
+                  <a:tcPr marL="9525" marR="9525" marT="9525" marB="0" anchor="ctr"/>
+                </a:tc>
+                <a:extLst>
+                  <a:ext uri="{0D108BD9-81ED-4DB2-BD59-A6C34878D82A}">
+                    <a16:rowId xmlns:a16="http://schemas.microsoft.com/office/drawing/2014/main" val="2976911174"/>
+                  </a:ext>
+                </a:extLst>
+              </a:tr>
+              <a:tr h="304800">
+                <a:tc>
+                  <a:txBody>
+                    <a:bodyPr/>
+                    <a:lstStyle/>
+                    <a:p>
+                      <a:pPr algn="ctr" rtl="0" fontAlgn="ctr"/>
+                      <a:r>
+                        <a:rPr lang="en-US" sz="1800" u="none" strike="noStrike">
+                          <a:effectLst/>
+                        </a:rPr>
+                        <a:t>terrible</a:t>
+                      </a:r>
+                      <a:endParaRPr lang="en-US" sz="1800" b="0" i="0" u="none" strike="noStrike">
+                        <a:solidFill>
+                          <a:srgbClr val="000000"/>
+                        </a:solidFill>
+                        <a:effectLst/>
+                        <a:latin typeface="Aptos Narrow" panose="020B0004020202020204" pitchFamily="34" charset="0"/>
+                      </a:endParaRPr>
+                    </a:p>
+                  </a:txBody>
+                  <a:tcPr marL="9525" marR="9525" marT="9525" marB="0" anchor="ctr"/>
+                </a:tc>
+                <a:tc>
+                  <a:txBody>
+                    <a:bodyPr/>
+                    <a:lstStyle/>
+                    <a:p>
+                      <a:pPr algn="ctr" rtl="0" fontAlgn="ctr"/>
+                      <a:r>
+                        <a:rPr lang="en-US" sz="1800" u="none" strike="noStrike">
+                          <a:effectLst/>
+                        </a:rPr>
+                        <a:t>0</a:t>
+                      </a:r>
+                      <a:endParaRPr lang="en-US" sz="1800" b="0" i="0" u="none" strike="noStrike">
+                        <a:solidFill>
+                          <a:srgbClr val="000000"/>
+                        </a:solidFill>
+                        <a:effectLst/>
+                        <a:latin typeface="Aptos Narrow" panose="020B0004020202020204" pitchFamily="34" charset="0"/>
+                      </a:endParaRPr>
+                    </a:p>
+                  </a:txBody>
+                  <a:tcPr marL="9525" marR="9525" marT="9525" marB="0" anchor="ctr"/>
+                </a:tc>
+                <a:tc>
+                  <a:txBody>
+                    <a:bodyPr/>
+                    <a:lstStyle/>
+                    <a:p>
+                      <a:pPr algn="ctr" rtl="0" fontAlgn="ctr"/>
+                      <a:r>
+                        <a:rPr lang="en-US" sz="1800" u="none" strike="noStrike" dirty="0">
+                          <a:effectLst/>
+                        </a:rPr>
+                        <a:t>1</a:t>
+                      </a:r>
+                      <a:endParaRPr lang="en-US" sz="1800" b="0" i="0" u="none" strike="noStrike" dirty="0">
+                        <a:solidFill>
+                          <a:srgbClr val="000000"/>
+                        </a:solidFill>
+                        <a:effectLst/>
+                        <a:latin typeface="Aptos Narrow" panose="020B0004020202020204" pitchFamily="34" charset="0"/>
+                      </a:endParaRPr>
+                    </a:p>
+                  </a:txBody>
+                  <a:tcPr marL="9525" marR="9525" marT="9525" marB="0" anchor="ctr"/>
+                </a:tc>
+                <a:extLst>
+                  <a:ext uri="{0D108BD9-81ED-4DB2-BD59-A6C34878D82A}">
+                    <a16:rowId xmlns:a16="http://schemas.microsoft.com/office/drawing/2014/main" val="3940057080"/>
+                  </a:ext>
+                </a:extLst>
+              </a:tr>
+            </a:tbl>
+          </a:graphicData>
+        </a:graphic>
+      </p:graphicFrame>
+    </p:spTree>
+  </p:cSld>
+  <p:clrMapOvr>
+    <a:masterClrMapping/>
+  </p:clrMapOvr>
+</p:sld>
+</file>
+
+<file path=ppt/slides/slide34.xml><?xml version="1.0" encoding="utf-8"?>
+<p:sld xmlns:a="http://schemas.openxmlformats.org/drawingml/2006/main" xmlns:r="http://schemas.openxmlformats.org/officeDocument/2006/relationships" xmlns:p="http://schemas.openxmlformats.org/presentationml/2006/main">
+  <p:cSld>
+    <p:spTree>
+      <p:nvGrpSpPr>
+        <p:cNvPr id="1" name=""/>
+        <p:cNvGrpSpPr/>
+        <p:nvPr/>
+      </p:nvGrpSpPr>
+      <p:grpSpPr>
+        <a:xfrm>
+          <a:off x="0" y="0"/>
+          <a:ext cx="0" cy="0"/>
+          <a:chOff x="0" y="0"/>
+          <a:chExt cx="0" cy="0"/>
+        </a:xfrm>
+      </p:grpSpPr>
+      <p:sp>
+        <p:nvSpPr>
+          <p:cNvPr id="2" name="Title 1"/>
+          <p:cNvSpPr>
+            <a:spLocks noGrp="1"/>
+          </p:cNvSpPr>
+          <p:nvPr>
+            <p:ph type="title"/>
+          </p:nvPr>
+        </p:nvSpPr>
+        <p:spPr/>
+        <p:txBody>
+          <a:bodyPr/>
+          <a:lstStyle/>
+          <a:p>
+            <a:r>
+              <a:t>Step 3 – Class Probabilities</a:t>
+            </a:r>
+          </a:p>
+        </p:txBody>
+      </p:sp>
+      <p:sp>
+        <p:nvSpPr>
+          <p:cNvPr id="3" name="Content Placeholder 2"/>
+          <p:cNvSpPr>
+            <a:spLocks noGrp="1"/>
+          </p:cNvSpPr>
+          <p:nvPr>
+            <p:ph idx="1"/>
+          </p:nvPr>
+        </p:nvSpPr>
+        <p:spPr/>
+        <p:txBody>
+          <a:bodyPr/>
+          <a:lstStyle/>
+          <a:p>
+            <a:pPr marL="0" indent="0">
+              <a:buNone/>
+            </a:pPr>
+            <a:r>
+              <a:rPr dirty="0"/>
+              <a:t>We have 2 Positive and 2 Negative examples.</a:t>
+            </a:r>
+          </a:p>
+          <a:p>
+            <a:endParaRPr dirty="0"/>
+          </a:p>
+          <a:p>
+            <a:pPr marL="0" indent="0">
+              <a:buNone/>
+            </a:pPr>
+            <a:r>
+              <a:rPr dirty="0"/>
+              <a:t>P(Positive) = 2/4 = 0.5</a:t>
+            </a:r>
+          </a:p>
+          <a:p>
+            <a:pPr marL="0" indent="0">
+              <a:buNone/>
+            </a:pPr>
+            <a:r>
+              <a:rPr dirty="0"/>
+              <a:t>P(Negative) = 2/4 = 0.5</a:t>
+            </a:r>
+          </a:p>
+        </p:txBody>
+      </p:sp>
+    </p:spTree>
+  </p:cSld>
+  <p:clrMapOvr>
+    <a:masterClrMapping/>
+  </p:clrMapOvr>
+</p:sld>
+</file>
+
+<file path=ppt/slides/slide35.xml><?xml version="1.0" encoding="utf-8"?>
+<p:sld xmlns:a="http://schemas.openxmlformats.org/drawingml/2006/main" xmlns:r="http://schemas.openxmlformats.org/officeDocument/2006/relationships" xmlns:p="http://schemas.openxmlformats.org/presentationml/2006/main">
+  <p:cSld>
+    <p:spTree>
+      <p:nvGrpSpPr>
+        <p:cNvPr id="1" name=""/>
+        <p:cNvGrpSpPr/>
+        <p:nvPr/>
+      </p:nvGrpSpPr>
+      <p:grpSpPr>
+        <a:xfrm>
+          <a:off x="0" y="0"/>
+          <a:ext cx="0" cy="0"/>
+          <a:chOff x="0" y="0"/>
+          <a:chExt cx="0" cy="0"/>
+        </a:xfrm>
+      </p:grpSpPr>
+      <p:sp>
+        <p:nvSpPr>
+          <p:cNvPr id="2" name="Title 1"/>
+          <p:cNvSpPr>
+            <a:spLocks noGrp="1"/>
+          </p:cNvSpPr>
+          <p:nvPr>
+            <p:ph type="title"/>
+          </p:nvPr>
+        </p:nvSpPr>
+        <p:spPr/>
+        <p:txBody>
+          <a:bodyPr/>
+          <a:lstStyle/>
+          <a:p>
+            <a:r>
+              <a:t>Step 4 – Laplace Smoothing</a:t>
+            </a:r>
+          </a:p>
+        </p:txBody>
+      </p:sp>
+      <p:pic>
+        <p:nvPicPr>
+          <p:cNvPr id="17" name="Content Placeholder 16">
+            <a:extLst>
+              <a:ext uri="{FF2B5EF4-FFF2-40B4-BE49-F238E27FC236}">
+                <a16:creationId xmlns:a16="http://schemas.microsoft.com/office/drawing/2014/main" id="{7E184D5F-AB91-4FC3-B4FD-043A5C589982}"/>
+              </a:ext>
+            </a:extLst>
+          </p:cNvPr>
+          <p:cNvPicPr>
+            <a:picLocks noGrp="1" noChangeAspect="1"/>
+          </p:cNvPicPr>
+          <p:nvPr>
+            <p:ph idx="1"/>
+          </p:nvPr>
+        </p:nvPicPr>
+        <p:blipFill>
+          <a:blip r:embed="rId2"/>
+          <a:stretch>
+            <a:fillRect/>
+          </a:stretch>
+        </p:blipFill>
+        <p:spPr>
+          <a:xfrm>
+            <a:off x="838200" y="1700573"/>
+            <a:ext cx="7678222" cy="3134162"/>
+          </a:xfrm>
+        </p:spPr>
+      </p:pic>
+    </p:spTree>
+  </p:cSld>
+  <p:clrMapOvr>
+    <a:masterClrMapping/>
+  </p:clrMapOvr>
+</p:sld>
+</file>
+
+<file path=ppt/slides/slide36.xml><?xml version="1.0" encoding="utf-8"?>
+<p:sld xmlns:a="http://schemas.openxmlformats.org/drawingml/2006/main" xmlns:r="http://schemas.openxmlformats.org/officeDocument/2006/relationships" xmlns:p="http://schemas.openxmlformats.org/presentationml/2006/main">
+  <p:cSld>
+    <p:spTree>
+      <p:nvGrpSpPr>
+        <p:cNvPr id="1" name=""/>
+        <p:cNvGrpSpPr/>
+        <p:nvPr/>
+      </p:nvGrpSpPr>
+      <p:grpSpPr>
+        <a:xfrm>
+          <a:off x="0" y="0"/>
+          <a:ext cx="0" cy="0"/>
+          <a:chOff x="0" y="0"/>
+          <a:chExt cx="0" cy="0"/>
+        </a:xfrm>
+      </p:grpSpPr>
+      <p:sp>
+        <p:nvSpPr>
+          <p:cNvPr id="2" name="Title 1"/>
+          <p:cNvSpPr>
+            <a:spLocks noGrp="1"/>
+          </p:cNvSpPr>
+          <p:nvPr>
+            <p:ph type="title"/>
+          </p:nvPr>
+        </p:nvSpPr>
+        <p:spPr/>
+        <p:txBody>
+          <a:bodyPr/>
+          <a:lstStyle/>
+          <a:p>
+            <a:r>
+              <a:t>Step 5 – Calculate Probabilities (Positive)</a:t>
+            </a:r>
+          </a:p>
+        </p:txBody>
+      </p:sp>
+      <p:pic>
+        <p:nvPicPr>
+          <p:cNvPr id="7" name="Content Placeholder 6">
+            <a:extLst>
+              <a:ext uri="{FF2B5EF4-FFF2-40B4-BE49-F238E27FC236}">
+                <a16:creationId xmlns:a16="http://schemas.microsoft.com/office/drawing/2014/main" id="{CA11F557-4092-5303-C3E7-245686D24A6B}"/>
+              </a:ext>
+            </a:extLst>
+          </p:cNvPr>
+          <p:cNvPicPr>
+            <a:picLocks noGrp="1" noChangeAspect="1"/>
+          </p:cNvPicPr>
+          <p:nvPr>
+            <p:ph idx="1"/>
+          </p:nvPr>
+        </p:nvPicPr>
+        <p:blipFill>
+          <a:blip r:embed="rId2"/>
+          <a:stretch>
+            <a:fillRect/>
+          </a:stretch>
+        </p:blipFill>
+        <p:spPr>
+          <a:xfrm>
+            <a:off x="838200" y="1802740"/>
+            <a:ext cx="10515600" cy="3252520"/>
+          </a:xfrm>
+        </p:spPr>
+      </p:pic>
+    </p:spTree>
+  </p:cSld>
+  <p:clrMapOvr>
+    <a:masterClrMapping/>
+  </p:clrMapOvr>
+</p:sld>
+</file>
+
+<file path=ppt/slides/slide37.xml><?xml version="1.0" encoding="utf-8"?>
+<p:sld xmlns:a="http://schemas.openxmlformats.org/drawingml/2006/main" xmlns:r="http://schemas.openxmlformats.org/officeDocument/2006/relationships" xmlns:p="http://schemas.openxmlformats.org/presentationml/2006/main">
+  <p:cSld>
+    <p:spTree>
+      <p:nvGrpSpPr>
+        <p:cNvPr id="1" name=""/>
+        <p:cNvGrpSpPr/>
+        <p:nvPr/>
+      </p:nvGrpSpPr>
+      <p:grpSpPr>
+        <a:xfrm>
+          <a:off x="0" y="0"/>
+          <a:ext cx="0" cy="0"/>
+          <a:chOff x="0" y="0"/>
+          <a:chExt cx="0" cy="0"/>
+        </a:xfrm>
+      </p:grpSpPr>
+      <p:sp>
+        <p:nvSpPr>
+          <p:cNvPr id="2" name="Title 1"/>
+          <p:cNvSpPr>
+            <a:spLocks noGrp="1"/>
+          </p:cNvSpPr>
+          <p:nvPr>
+            <p:ph type="title"/>
+          </p:nvPr>
+        </p:nvSpPr>
+        <p:spPr/>
+        <p:txBody>
+          <a:bodyPr/>
+          <a:lstStyle/>
+          <a:p>
+            <a:r>
+              <a:t>Step 5 – Calculate Probabilities (Negative)</a:t>
+            </a:r>
+          </a:p>
+        </p:txBody>
+      </p:sp>
+      <p:pic>
+        <p:nvPicPr>
+          <p:cNvPr id="7" name="Content Placeholder 6">
+            <a:extLst>
+              <a:ext uri="{FF2B5EF4-FFF2-40B4-BE49-F238E27FC236}">
+                <a16:creationId xmlns:a16="http://schemas.microsoft.com/office/drawing/2014/main" id="{C161519D-5871-0665-567B-918E90876D30}"/>
+              </a:ext>
+            </a:extLst>
+          </p:cNvPr>
+          <p:cNvPicPr>
+            <a:picLocks noGrp="1" noChangeAspect="1"/>
+          </p:cNvPicPr>
+          <p:nvPr>
+            <p:ph idx="1"/>
+          </p:nvPr>
+        </p:nvPicPr>
+        <p:blipFill>
+          <a:blip r:embed="rId2"/>
+          <a:stretch>
+            <a:fillRect/>
+          </a:stretch>
+        </p:blipFill>
+        <p:spPr>
+          <a:xfrm>
+            <a:off x="729827" y="1804401"/>
+            <a:ext cx="8735644" cy="2343477"/>
+          </a:xfrm>
+        </p:spPr>
+      </p:pic>
+    </p:spTree>
+  </p:cSld>
+  <p:clrMapOvr>
+    <a:masterClrMapping/>
+  </p:clrMapOvr>
+</p:sld>
+</file>
+
+<file path=ppt/slides/slide38.xml><?xml version="1.0" encoding="utf-8"?>
+<p:sld xmlns:a="http://schemas.openxmlformats.org/drawingml/2006/main" xmlns:r="http://schemas.openxmlformats.org/officeDocument/2006/relationships" xmlns:p="http://schemas.openxmlformats.org/presentationml/2006/main">
+  <p:cSld>
+    <p:spTree>
+      <p:nvGrpSpPr>
+        <p:cNvPr id="1" name=""/>
+        <p:cNvGrpSpPr/>
+        <p:nvPr/>
+      </p:nvGrpSpPr>
+      <p:grpSpPr>
+        <a:xfrm>
+          <a:off x="0" y="0"/>
+          <a:ext cx="0" cy="0"/>
+          <a:chOff x="0" y="0"/>
+          <a:chExt cx="0" cy="0"/>
+        </a:xfrm>
+      </p:grpSpPr>
+      <p:sp>
+        <p:nvSpPr>
+          <p:cNvPr id="2" name="Title 1"/>
+          <p:cNvSpPr>
+            <a:spLocks noGrp="1"/>
+          </p:cNvSpPr>
+          <p:nvPr>
+            <p:ph type="title"/>
+          </p:nvPr>
+        </p:nvSpPr>
+        <p:spPr/>
+        <p:txBody>
+          <a:bodyPr/>
+          <a:lstStyle/>
+          <a:p>
+            <a:r>
+              <a:t>Final Calculation (Rough Comparison)</a:t>
+            </a:r>
+          </a:p>
+        </p:txBody>
+      </p:sp>
+      <p:pic>
+        <p:nvPicPr>
+          <p:cNvPr id="9" name="Content Placeholder 8">
+            <a:extLst>
+              <a:ext uri="{FF2B5EF4-FFF2-40B4-BE49-F238E27FC236}">
+                <a16:creationId xmlns:a16="http://schemas.microsoft.com/office/drawing/2014/main" id="{F6DB4D3B-209A-3F7B-B0C5-EDC2EC27C070}"/>
+              </a:ext>
+            </a:extLst>
+          </p:cNvPr>
+          <p:cNvPicPr>
+            <a:picLocks noGrp="1" noChangeAspect="1"/>
+          </p:cNvPicPr>
+          <p:nvPr>
+            <p:ph idx="1"/>
+          </p:nvPr>
+        </p:nvPicPr>
+        <p:blipFill>
+          <a:blip r:embed="rId2"/>
+          <a:stretch>
+            <a:fillRect/>
+          </a:stretch>
+        </p:blipFill>
+        <p:spPr>
+          <a:xfrm>
+            <a:off x="838200" y="1810868"/>
+            <a:ext cx="5687219" cy="2181529"/>
+          </a:xfrm>
+        </p:spPr>
+      </p:pic>
+    </p:spTree>
+  </p:cSld>
+  <p:clrMapOvr>
+    <a:masterClrMapping/>
+  </p:clrMapOvr>
+</p:sld>
+</file>
+
+<file path=ppt/slides/slide39.xml><?xml version="1.0" encoding="utf-8"?>
+<p:sld xmlns:a="http://schemas.openxmlformats.org/drawingml/2006/main" xmlns:r="http://schemas.openxmlformats.org/officeDocument/2006/relationships" xmlns:p="http://schemas.openxmlformats.org/presentationml/2006/main">
+  <p:cSld>
+    <p:spTree>
+      <p:nvGrpSpPr>
+        <p:cNvPr id="1" name=""/>
+        <p:cNvGrpSpPr/>
+        <p:nvPr/>
+      </p:nvGrpSpPr>
+      <p:grpSpPr>
+        <a:xfrm>
+          <a:off x="0" y="0"/>
+          <a:ext cx="0" cy="0"/>
+          <a:chOff x="0" y="0"/>
+          <a:chExt cx="0" cy="0"/>
+        </a:xfrm>
+      </p:grpSpPr>
+      <p:sp>
+        <p:nvSpPr>
+          <p:cNvPr id="169" name="PlaceHolder 1"/>
+          <p:cNvSpPr>
+            <a:spLocks noGrp="1"/>
+          </p:cNvSpPr>
+          <p:nvPr>
+            <p:ph type="title"/>
+          </p:nvPr>
+        </p:nvSpPr>
+        <p:spPr>
+          <a:xfrm>
+            <a:off x="831960" y="3429000"/>
+            <a:ext cx="10515240" cy="1410120"/>
+          </a:xfrm>
+          <a:prstGeom prst="rect">
+            <a:avLst/>
+          </a:prstGeom>
+          <a:noFill/>
+          <a:ln w="0">
+            <a:noFill/>
+          </a:ln>
+        </p:spPr>
+        <p:txBody>
+          <a:bodyPr lIns="91440" tIns="45720" rIns="91440" bIns="45720" anchor="b">
+            <a:noAutofit/>
+          </a:bodyPr>
+          <a:lstStyle/>
+          <a:p>
+            <a:pPr indent="0" defTabSz="914400">
+              <a:lnSpc>
+                <a:spcPct val="90000"/>
+              </a:lnSpc>
+              <a:buNone/>
+            </a:pPr>
+            <a:r>
+              <a:rPr lang="en-US" sz="6000" b="0" u="none" strike="noStrike">
+                <a:solidFill>
+                  <a:schemeClr val="dk1"/>
+                </a:solidFill>
+                <a:uFillTx/>
+                <a:latin typeface="Calibri Light"/>
+              </a:rPr>
+              <a:t>Language Models</a:t>
+            </a:r>
+            <a:endParaRPr lang="en-US" sz="6000" b="0" u="none" strike="noStrike">
+              <a:solidFill>
+                <a:schemeClr val="dk1"/>
+              </a:solidFill>
+              <a:uFillTx/>
+              <a:latin typeface="Calibri"/>
+            </a:endParaRPr>
+          </a:p>
+        </p:txBody>
+      </p:sp>
+      <p:sp>
+        <p:nvSpPr>
+          <p:cNvPr id="170" name="PlaceHolder 2"/>
+          <p:cNvSpPr>
+            <a:spLocks noGrp="1"/>
+          </p:cNvSpPr>
+          <p:nvPr>
+            <p:ph/>
+          </p:nvPr>
+        </p:nvSpPr>
+        <p:spPr>
+          <a:xfrm>
+            <a:off x="831960" y="4956120"/>
+            <a:ext cx="10515240" cy="1133280"/>
+          </a:xfrm>
+          <a:prstGeom prst="rect">
+            <a:avLst/>
+          </a:prstGeom>
+          <a:noFill/>
+          <a:ln w="0">
+            <a:noFill/>
+          </a:ln>
+        </p:spPr>
+        <p:txBody>
+          <a:bodyPr lIns="91440" tIns="45720" rIns="91440" bIns="45720" anchor="t">
+            <a:noAutofit/>
+          </a:bodyPr>
+          <a:lstStyle/>
+          <a:p>
+            <a:pPr indent="0">
+              <a:lnSpc>
+                <a:spcPct val="90000"/>
+              </a:lnSpc>
+              <a:spcBef>
+                <a:spcPts val="1417"/>
+              </a:spcBef>
+              <a:buNone/>
+            </a:pPr>
+            <a:endParaRPr lang="en-US" sz="2400" b="0" u="none" strike="noStrike">
+              <a:solidFill>
+                <a:schemeClr val="dk1">
+                  <a:tint val="75000"/>
+                </a:schemeClr>
+              </a:solidFill>
+              <a:uFillTx/>
+              <a:latin typeface="Calibri"/>
+            </a:endParaRPr>
+          </a:p>
+        </p:txBody>
+      </p:sp>
+    </p:spTree>
+  </p:cSld>
+  <p:clrMapOvr>
+    <a:masterClrMapping/>
+  </p:clrMapOvr>
+</p:sld>
+</file>
+
+<file path=ppt/slides/slide4.xml><?xml version="1.0" encoding="utf-8"?>
+<p:sld xmlns:a="http://schemas.openxmlformats.org/drawingml/2006/main" xmlns:r="http://schemas.openxmlformats.org/officeDocument/2006/relationships" xmlns:p="http://schemas.openxmlformats.org/presentationml/2006/main">
+  <p:cSld>
+    <p:spTree>
+      <p:nvGrpSpPr>
+        <p:cNvPr id="1" name=""/>
+        <p:cNvGrpSpPr/>
+        <p:nvPr/>
+      </p:nvGrpSpPr>
+      <p:grpSpPr>
+        <a:xfrm>
+          <a:off x="0" y="0"/>
+          <a:ext cx="0" cy="0"/>
+          <a:chOff x="0" y="0"/>
+          <a:chExt cx="0" cy="0"/>
+        </a:xfrm>
+      </p:grpSpPr>
+      <p:sp>
+        <p:nvSpPr>
+          <p:cNvPr id="100" name="PlaceHolder 1"/>
+          <p:cNvSpPr>
+            <a:spLocks noGrp="1"/>
+          </p:cNvSpPr>
+          <p:nvPr>
+            <p:ph type="title"/>
+          </p:nvPr>
+        </p:nvSpPr>
+        <p:spPr>
+          <a:xfrm>
+            <a:off x="838080" y="797400"/>
+            <a:ext cx="10515240" cy="747720"/>
+          </a:xfrm>
+          <a:prstGeom prst="rect">
+            <a:avLst/>
+          </a:prstGeom>
+          <a:solidFill>
+            <a:srgbClr val="67337A"/>
+          </a:solidFill>
+          <a:ln w="0">
+            <a:noFill/>
+          </a:ln>
+        </p:spPr>
+        <p:txBody>
+          <a:bodyPr lIns="91440" tIns="45720" rIns="91440" bIns="45720" anchor="ctr">
+            <a:noAutofit/>
+          </a:bodyPr>
+          <a:lstStyle/>
+          <a:p>
+            <a:pPr indent="0" defTabSz="914400">
+              <a:lnSpc>
+                <a:spcPct val="90000"/>
+              </a:lnSpc>
+              <a:buNone/>
+            </a:pPr>
+            <a:r>
+              <a:rPr lang="en-US" sz="2800" b="0" u="none" strike="noStrike">
+                <a:solidFill>
+                  <a:schemeClr val="lt1"/>
+                </a:solidFill>
+                <a:uFillTx/>
+                <a:latin typeface="Calibri Light"/>
+              </a:rPr>
+              <a:t>Why is NLP Challenging?</a:t>
+            </a:r>
+            <a:endParaRPr lang="en-US" sz="2800" b="0" u="none" strike="noStrike">
+              <a:solidFill>
+                <a:schemeClr val="dk1"/>
+              </a:solidFill>
+              <a:uFillTx/>
+              <a:latin typeface="Calibri"/>
+            </a:endParaRPr>
+          </a:p>
+        </p:txBody>
+      </p:sp>
+      <p:sp>
+        <p:nvSpPr>
+          <p:cNvPr id="101" name="PlaceHolder 2"/>
+          <p:cNvSpPr>
+            <a:spLocks noGrp="1"/>
+          </p:cNvSpPr>
+          <p:nvPr>
+            <p:ph/>
+          </p:nvPr>
+        </p:nvSpPr>
+        <p:spPr>
+          <a:xfrm>
+            <a:off x="838080" y="1706040"/>
+            <a:ext cx="11107440" cy="4990680"/>
+          </a:xfrm>
+          <a:prstGeom prst="rect">
+            <a:avLst/>
+          </a:prstGeom>
+          <a:noFill/>
+          <a:ln w="0">
+            <a:noFill/>
+          </a:ln>
+        </p:spPr>
+        <p:txBody>
+          <a:bodyPr lIns="91440" tIns="45720" rIns="91440" bIns="45720" anchor="t">
+            <a:normAutofit fontScale="85000" lnSpcReduction="19999"/>
+          </a:bodyPr>
+          <a:lstStyle/>
+          <a:p>
+            <a:pPr indent="0" defTabSz="914400">
+              <a:lnSpc>
+                <a:spcPct val="90000"/>
+              </a:lnSpc>
+              <a:spcBef>
+                <a:spcPts val="1001"/>
+              </a:spcBef>
+              <a:buNone/>
+              <a:tabLst>
+                <a:tab pos="0" algn="l"/>
+              </a:tabLst>
+            </a:pPr>
+            <a:r>
+              <a:rPr lang="en-US" sz="2400" b="0" u="none" strike="noStrike">
+                <a:solidFill>
+                  <a:schemeClr val="dk1"/>
+                </a:solidFill>
+                <a:uFillTx/>
+                <a:latin typeface="Calibri"/>
+              </a:rPr>
+              <a:t>Human language is ambiguous: Words and sentences can have multiple interpretations</a:t>
+            </a:r>
+          </a:p>
+          <a:p>
+            <a:pPr marL="228600" indent="-228600" defTabSz="914400">
+              <a:lnSpc>
+                <a:spcPct val="90000"/>
+              </a:lnSpc>
+              <a:spcBef>
+                <a:spcPts val="1001"/>
+              </a:spcBef>
+              <a:buClr>
+                <a:srgbClr val="000000"/>
+              </a:buClr>
+              <a:buFont typeface="Arial"/>
+              <a:buChar char="•"/>
+              <a:tabLst>
+                <a:tab pos="0" algn="l"/>
+              </a:tabLst>
+            </a:pPr>
+            <a:r>
+              <a:rPr lang="en-US" sz="2400" b="1" u="none" strike="noStrike">
+                <a:solidFill>
+                  <a:schemeClr val="dk1"/>
+                </a:solidFill>
+                <a:uFillTx/>
+                <a:latin typeface="Calibri"/>
+              </a:rPr>
+              <a:t>Lexical ambiguity</a:t>
+            </a:r>
+            <a:r>
+              <a:rPr lang="en-US" sz="2400" b="0" u="none" strike="noStrike">
+                <a:solidFill>
+                  <a:schemeClr val="dk1"/>
+                </a:solidFill>
+                <a:uFillTx/>
+                <a:latin typeface="Calibri"/>
+              </a:rPr>
+              <a:t>: When a word has multiple meanings</a:t>
+            </a:r>
+          </a:p>
+          <a:p>
+            <a:pPr marL="685800" lvl="1" indent="-228600" defTabSz="914400">
+              <a:lnSpc>
+                <a:spcPct val="90000"/>
+              </a:lnSpc>
+              <a:spcBef>
+                <a:spcPts val="499"/>
+              </a:spcBef>
+              <a:buClr>
+                <a:srgbClr val="000000"/>
+              </a:buClr>
+              <a:buFont typeface="Arial"/>
+              <a:buChar char="•"/>
+              <a:tabLst>
+                <a:tab pos="0" algn="l"/>
+              </a:tabLst>
+            </a:pPr>
+            <a:r>
+              <a:rPr lang="en-US" sz="2000" b="0" u="none" strike="noStrike">
+                <a:solidFill>
+                  <a:schemeClr val="dk1"/>
+                </a:solidFill>
+                <a:uFillTx/>
+                <a:latin typeface="Calibri"/>
+              </a:rPr>
+              <a:t>Example: "The bank is closed" (financial institution or riverbank)</a:t>
+            </a:r>
+          </a:p>
+          <a:p>
+            <a:pPr marL="685800" lvl="1" indent="-228600" defTabSz="914400">
+              <a:lnSpc>
+                <a:spcPct val="90000"/>
+              </a:lnSpc>
+              <a:spcBef>
+                <a:spcPts val="499"/>
+              </a:spcBef>
+              <a:buClr>
+                <a:srgbClr val="000000"/>
+              </a:buClr>
+              <a:buFont typeface="Arial"/>
+              <a:buChar char="•"/>
+              <a:tabLst>
+                <a:tab pos="0" algn="l"/>
+              </a:tabLst>
+            </a:pPr>
+            <a:r>
+              <a:rPr lang="en-US" sz="2000" b="0" u="none" strike="noStrike">
+                <a:solidFill>
+                  <a:schemeClr val="dk1"/>
+                </a:solidFill>
+                <a:uFillTx/>
+                <a:latin typeface="Calibri"/>
+              </a:rPr>
+              <a:t>Example: "The suit was expensive" (Formal set of clothes or Legal proceeding)</a:t>
+            </a:r>
+          </a:p>
+          <a:p>
+            <a:pPr marL="685800" lvl="1" indent="-228600" defTabSz="914400">
+              <a:lnSpc>
+                <a:spcPct val="90000"/>
+              </a:lnSpc>
+              <a:spcBef>
+                <a:spcPts val="499"/>
+              </a:spcBef>
+              <a:buClr>
+                <a:srgbClr val="000000"/>
+              </a:buClr>
+              <a:buFont typeface="Arial"/>
+              <a:buChar char="•"/>
+              <a:tabLst>
+                <a:tab pos="0" algn="l"/>
+              </a:tabLst>
+            </a:pPr>
+            <a:r>
+              <a:rPr lang="en-US" sz="2100" b="0" u="none" strike="noStrike">
+                <a:solidFill>
+                  <a:schemeClr val="dk1"/>
+                </a:solidFill>
+                <a:uFillTx/>
+                <a:latin typeface="Calibri"/>
+              </a:rPr>
+              <a:t>Computational challenge: Systems must select the correct word sense from multiple possibilities</a:t>
+            </a:r>
+          </a:p>
+          <a:p>
+            <a:pPr marL="228600" indent="-228600" defTabSz="914400">
+              <a:lnSpc>
+                <a:spcPct val="90000"/>
+              </a:lnSpc>
+              <a:spcBef>
+                <a:spcPts val="1001"/>
+              </a:spcBef>
+              <a:buClr>
+                <a:srgbClr val="000000"/>
+              </a:buClr>
+              <a:buFont typeface="Arial"/>
+              <a:buChar char="•"/>
+              <a:tabLst>
+                <a:tab pos="0" algn="l"/>
+              </a:tabLst>
+            </a:pPr>
+            <a:r>
+              <a:rPr lang="en-US" sz="2400" b="1" u="none" strike="noStrike">
+                <a:solidFill>
+                  <a:schemeClr val="dk1"/>
+                </a:solidFill>
+                <a:uFillTx/>
+                <a:latin typeface="Calibri"/>
+              </a:rPr>
+              <a:t>Syntactic ambiguity</a:t>
+            </a:r>
+            <a:r>
+              <a:rPr lang="en-US" sz="2400" b="0" u="none" strike="noStrike">
+                <a:solidFill>
+                  <a:schemeClr val="dk1"/>
+                </a:solidFill>
+                <a:uFillTx/>
+                <a:latin typeface="Calibri"/>
+              </a:rPr>
+              <a:t>: When a sentence can be parsed in multiple ways</a:t>
+            </a:r>
+          </a:p>
+          <a:p>
+            <a:pPr marL="685800" lvl="1" indent="-228600" defTabSz="914400">
+              <a:lnSpc>
+                <a:spcPct val="90000"/>
+              </a:lnSpc>
+              <a:spcBef>
+                <a:spcPts val="499"/>
+              </a:spcBef>
+              <a:buClr>
+                <a:srgbClr val="000000"/>
+              </a:buClr>
+              <a:buFont typeface="Arial"/>
+              <a:buChar char="•"/>
+              <a:tabLst>
+                <a:tab pos="0" algn="l"/>
+              </a:tabLst>
+            </a:pPr>
+            <a:r>
+              <a:rPr lang="en-US" sz="2000" b="0" u="none" strike="noStrike">
+                <a:solidFill>
+                  <a:schemeClr val="dk1"/>
+                </a:solidFill>
+                <a:uFillTx/>
+                <a:latin typeface="Calibri"/>
+              </a:rPr>
+              <a:t>Example: "I saw the man with the telescope" (Who has the telescope?)</a:t>
+            </a:r>
+          </a:p>
+          <a:p>
+            <a:pPr marL="685800" lvl="1" indent="-228600" defTabSz="914400">
+              <a:lnSpc>
+                <a:spcPct val="90000"/>
+              </a:lnSpc>
+              <a:spcBef>
+                <a:spcPts val="499"/>
+              </a:spcBef>
+              <a:buClr>
+                <a:srgbClr val="000000"/>
+              </a:buClr>
+              <a:buFont typeface="Arial"/>
+              <a:buChar char="•"/>
+              <a:tabLst>
+                <a:tab pos="0" algn="l"/>
+              </a:tabLst>
+            </a:pPr>
+            <a:r>
+              <a:rPr lang="en-US" sz="2000" b="0" u="none" strike="noStrike">
+                <a:solidFill>
+                  <a:schemeClr val="dk1"/>
+                </a:solidFill>
+                <a:uFillTx/>
+                <a:latin typeface="Calibri"/>
+              </a:rPr>
+              <a:t>Example: "Flying planes can be dangerous" (The act of flying planes or planes that are flying?)</a:t>
+            </a:r>
+          </a:p>
+          <a:p>
+            <a:pPr marL="685800" lvl="1" indent="-228600" defTabSz="914400">
+              <a:lnSpc>
+                <a:spcPct val="90000"/>
+              </a:lnSpc>
+              <a:spcBef>
+                <a:spcPts val="499"/>
+              </a:spcBef>
+              <a:buClr>
+                <a:srgbClr val="000000"/>
+              </a:buClr>
+              <a:buFont typeface="Arial"/>
+              <a:buChar char="•"/>
+              <a:tabLst>
+                <a:tab pos="0" algn="l"/>
+              </a:tabLst>
+            </a:pPr>
+            <a:r>
+              <a:rPr lang="en-US" sz="2000" b="0" u="none" strike="noStrike">
+                <a:solidFill>
+                  <a:schemeClr val="dk1"/>
+                </a:solidFill>
+                <a:uFillTx/>
+                <a:latin typeface="Calibri"/>
+              </a:rPr>
+              <a:t>Computational challenge: Models must determine the correct grammatical structure</a:t>
+            </a:r>
+          </a:p>
+          <a:p>
+            <a:pPr marL="228600" indent="-228600" defTabSz="914400">
+              <a:lnSpc>
+                <a:spcPct val="90000"/>
+              </a:lnSpc>
+              <a:spcBef>
+                <a:spcPts val="1001"/>
+              </a:spcBef>
+              <a:buClr>
+                <a:srgbClr val="000000"/>
+              </a:buClr>
+              <a:buFont typeface="Arial"/>
+              <a:buChar char="•"/>
+              <a:tabLst>
+                <a:tab pos="0" algn="l"/>
+              </a:tabLst>
+            </a:pPr>
+            <a:r>
+              <a:rPr lang="en-US" sz="2400" b="1" u="none" strike="noStrike">
+                <a:solidFill>
+                  <a:schemeClr val="dk1"/>
+                </a:solidFill>
+                <a:uFillTx/>
+                <a:latin typeface="Calibri"/>
+              </a:rPr>
+              <a:t>Semantic ambiguity</a:t>
+            </a:r>
+            <a:r>
+              <a:rPr lang="en-US" sz="2400" b="0" u="none" strike="noStrike">
+                <a:solidFill>
+                  <a:schemeClr val="dk1"/>
+                </a:solidFill>
+                <a:uFillTx/>
+                <a:latin typeface="Calibri"/>
+              </a:rPr>
+              <a:t>: When the meaning of a sentence has multiple interpretations</a:t>
+            </a:r>
+          </a:p>
+          <a:p>
+            <a:pPr marL="685800" lvl="1" indent="-228600" defTabSz="914400">
+              <a:lnSpc>
+                <a:spcPct val="90000"/>
+              </a:lnSpc>
+              <a:spcBef>
+                <a:spcPts val="499"/>
+              </a:spcBef>
+              <a:buClr>
+                <a:srgbClr val="000000"/>
+              </a:buClr>
+              <a:buFont typeface="Arial"/>
+              <a:buChar char="•"/>
+              <a:tabLst>
+                <a:tab pos="0" algn="l"/>
+              </a:tabLst>
+            </a:pPr>
+            <a:r>
+              <a:rPr lang="en-US" sz="2000" b="0" u="none" strike="noStrike">
+                <a:solidFill>
+                  <a:schemeClr val="dk1"/>
+                </a:solidFill>
+                <a:uFillTx/>
+                <a:latin typeface="Calibri"/>
+              </a:rPr>
+              <a:t>Example: "The chicken is ready to eat" (Ready to be eaten or ready to consume food?)</a:t>
+            </a:r>
+          </a:p>
+          <a:p>
+            <a:pPr marL="685800" lvl="1" indent="-228600" defTabSz="914400">
+              <a:lnSpc>
+                <a:spcPct val="90000"/>
+              </a:lnSpc>
+              <a:spcBef>
+                <a:spcPts val="499"/>
+              </a:spcBef>
+              <a:buClr>
+                <a:srgbClr val="000000"/>
+              </a:buClr>
+              <a:buFont typeface="Arial"/>
+              <a:buChar char="•"/>
+              <a:tabLst>
+                <a:tab pos="0" algn="l"/>
+              </a:tabLst>
+            </a:pPr>
+            <a:r>
+              <a:rPr lang="en-US" sz="2000" b="0" u="none" strike="noStrike">
+                <a:solidFill>
+                  <a:schemeClr val="dk1"/>
+                </a:solidFill>
+                <a:uFillTx/>
+                <a:latin typeface="Calibri"/>
+              </a:rPr>
+              <a:t>Example: "John and Mary got married last year" (To each other or to other people?)</a:t>
+            </a:r>
+          </a:p>
+          <a:p>
+            <a:pPr marL="685800" lvl="1" indent="-228600" defTabSz="914400">
+              <a:lnSpc>
+                <a:spcPct val="90000"/>
+              </a:lnSpc>
+              <a:spcBef>
+                <a:spcPts val="499"/>
+              </a:spcBef>
+              <a:buClr>
+                <a:srgbClr val="000000"/>
+              </a:buClr>
+              <a:buFont typeface="Arial"/>
+              <a:buChar char="•"/>
+              <a:tabLst>
+                <a:tab pos="0" algn="l"/>
+              </a:tabLst>
+            </a:pPr>
+            <a:r>
+              <a:rPr lang="en-US" sz="2000" b="0" u="none" strike="noStrike">
+                <a:solidFill>
+                  <a:schemeClr val="dk1"/>
+                </a:solidFill>
+                <a:uFillTx/>
+                <a:latin typeface="Calibri"/>
+              </a:rPr>
+              <a:t>Computational challenge: Systems must infer the intended meaning based on context</a:t>
+            </a:r>
+          </a:p>
+          <a:p>
+            <a:pPr marL="228600" indent="-228600" defTabSz="914400">
+              <a:lnSpc>
+                <a:spcPct val="90000"/>
+              </a:lnSpc>
+              <a:spcBef>
+                <a:spcPts val="1001"/>
+              </a:spcBef>
+              <a:buClr>
+                <a:srgbClr val="000000"/>
+              </a:buClr>
+              <a:buFont typeface="Arial"/>
+              <a:buChar char="•"/>
+              <a:tabLst>
+                <a:tab pos="0" algn="l"/>
+              </a:tabLst>
+            </a:pPr>
+            <a:r>
+              <a:rPr lang="en-US" sz="2400" b="1" u="none" strike="noStrike">
+                <a:solidFill>
+                  <a:schemeClr val="dk1"/>
+                </a:solidFill>
+                <a:uFillTx/>
+                <a:latin typeface="Calibri"/>
+              </a:rPr>
+              <a:t>Pragmatic ambiguity</a:t>
+            </a:r>
+            <a:r>
+              <a:rPr lang="en-US" sz="2400" b="0" u="none" strike="noStrike">
+                <a:solidFill>
+                  <a:schemeClr val="dk1"/>
+                </a:solidFill>
+                <a:uFillTx/>
+                <a:latin typeface="Calibri"/>
+              </a:rPr>
+              <a:t>: When the intended meaning depends on context, intent, or implied information</a:t>
+            </a:r>
+          </a:p>
+          <a:p>
+            <a:pPr marL="685800" lvl="1" indent="-228600" defTabSz="914400">
+              <a:lnSpc>
+                <a:spcPct val="90000"/>
+              </a:lnSpc>
+              <a:spcBef>
+                <a:spcPts val="499"/>
+              </a:spcBef>
+              <a:buClr>
+                <a:srgbClr val="000000"/>
+              </a:buClr>
+              <a:buFont typeface="Arial"/>
+              <a:buChar char="•"/>
+              <a:tabLst>
+                <a:tab pos="0" algn="l"/>
+              </a:tabLst>
+            </a:pPr>
+            <a:r>
+              <a:rPr lang="en-US" sz="2000" b="0" u="none" strike="noStrike">
+                <a:solidFill>
+                  <a:schemeClr val="dk1"/>
+                </a:solidFill>
+                <a:uFillTx/>
+                <a:latin typeface="Calibri"/>
+              </a:rPr>
+              <a:t>Example: "It's cold in here" (Statement of fact or request to close a window/turn up heat?)</a:t>
+            </a:r>
+          </a:p>
+          <a:p>
+            <a:pPr marL="685800" lvl="1" indent="-228600" defTabSz="914400">
+              <a:lnSpc>
+                <a:spcPct val="90000"/>
+              </a:lnSpc>
+              <a:spcBef>
+                <a:spcPts val="499"/>
+              </a:spcBef>
+              <a:buClr>
+                <a:srgbClr val="000000"/>
+              </a:buClr>
+              <a:buFont typeface="Arial"/>
+              <a:buChar char="•"/>
+              <a:tabLst>
+                <a:tab pos="0" algn="l"/>
+              </a:tabLst>
+            </a:pPr>
+            <a:r>
+              <a:rPr lang="en-US" sz="2000" b="0" u="none" strike="noStrike">
+                <a:solidFill>
+                  <a:schemeClr val="dk1"/>
+                </a:solidFill>
+                <a:uFillTx/>
+                <a:latin typeface="Calibri"/>
+              </a:rPr>
+              <a:t>Example: "Do you know what time it is?" (Yes/no question or request for the time?)</a:t>
+            </a:r>
+          </a:p>
+          <a:p>
+            <a:pPr marL="685800" lvl="1" indent="-228600" defTabSz="914400">
+              <a:lnSpc>
+                <a:spcPct val="90000"/>
+              </a:lnSpc>
+              <a:spcBef>
+                <a:spcPts val="499"/>
+              </a:spcBef>
+              <a:buClr>
+                <a:srgbClr val="000000"/>
+              </a:buClr>
+              <a:buFont typeface="Arial"/>
+              <a:buChar char="•"/>
+              <a:tabLst>
+                <a:tab pos="0" algn="l"/>
+              </a:tabLst>
+            </a:pPr>
+            <a:r>
+              <a:rPr lang="en-US" sz="2000" b="0" u="none" strike="noStrike">
+                <a:solidFill>
+                  <a:schemeClr val="dk1"/>
+                </a:solidFill>
+                <a:uFillTx/>
+                <a:latin typeface="Calibri"/>
+              </a:rPr>
+              <a:t>Computational challenge: Models must understand communicative intent beyond literal meaning</a:t>
+            </a:r>
+          </a:p>
+        </p:txBody>
+      </p:sp>
+    </p:spTree>
+  </p:cSld>
+  <p:clrMapOvr>
+    <a:masterClrMapping/>
+  </p:clrMapOvr>
+</p:sld>
+</file>
+
+<file path=ppt/slides/slide40.xml><?xml version="1.0" encoding="utf-8"?>
+<p:sld xmlns:a="http://schemas.openxmlformats.org/drawingml/2006/main" xmlns:r="http://schemas.openxmlformats.org/officeDocument/2006/relationships" xmlns:p="http://schemas.openxmlformats.org/presentationml/2006/main">
+  <p:cSld>
+    <p:spTree>
+      <p:nvGrpSpPr>
         <p:cNvPr id="1" name=""/>
         <p:cNvGrpSpPr/>
         <p:nvPr/>
@@ -26095,7 +31051,7 @@
 </p:sld>
 </file>
 
-<file path=ppt/slides/slide31.xml><?xml version="1.0" encoding="utf-8"?>
+<file path=ppt/slides/slide41.xml><?xml version="1.0" encoding="utf-8"?>
 <p:sld xmlns:a="http://schemas.openxmlformats.org/drawingml/2006/main" xmlns:r="http://schemas.openxmlformats.org/officeDocument/2006/relationships" xmlns:p="http://schemas.openxmlformats.org/presentationml/2006/main">
   <p:cSld>
     <p:spTree>
@@ -26367,7 +31323,7 @@
 </p:sld>
 </file>
 
-<file path=ppt/slides/slide32.xml><?xml version="1.0" encoding="utf-8"?>
+<file path=ppt/slides/slide42.xml><?xml version="1.0" encoding="utf-8"?>
 <p:sld xmlns:a="http://schemas.openxmlformats.org/drawingml/2006/main" xmlns:r="http://schemas.openxmlformats.org/officeDocument/2006/relationships" xmlns:p="http://schemas.openxmlformats.org/presentationml/2006/main">
   <p:cSld>
     <p:spTree>
@@ -26599,7 +31555,7 @@
 </p:sld>
 </file>
 
-<file path=ppt/slides/slide33.xml><?xml version="1.0" encoding="utf-8"?>
+<file path=ppt/slides/slide43.xml><?xml version="1.0" encoding="utf-8"?>
 <p:sld xmlns:a="http://schemas.openxmlformats.org/drawingml/2006/main" xmlns:r="http://schemas.openxmlformats.org/officeDocument/2006/relationships" xmlns:p="http://schemas.openxmlformats.org/presentationml/2006/main">
   <p:cSld>
     <p:spTree>
@@ -26904,7 +31860,7 @@
 </p:sld>
 </file>
 
-<file path=ppt/slides/slide34.xml><?xml version="1.0" encoding="utf-8"?>
+<file path=ppt/slides/slide44.xml><?xml version="1.0" encoding="utf-8"?>
 <p:sld xmlns:a="http://schemas.openxmlformats.org/drawingml/2006/main" xmlns:r="http://schemas.openxmlformats.org/officeDocument/2006/relationships" xmlns:p="http://schemas.openxmlformats.org/presentationml/2006/main">
   <p:cSld>
     <p:spTree>
@@ -27514,630 +32470,6 @@
               <a:uFillTx/>
               <a:latin typeface="Calibri"/>
             </a:endParaRPr>
-          </a:p>
-        </p:txBody>
-      </p:sp>
-    </p:spTree>
-  </p:cSld>
-  <p:clrMapOvr>
-    <a:masterClrMapping/>
-  </p:clrMapOvr>
-</p:sld>
-</file>
-
-<file path=ppt/slides/slide4.xml><?xml version="1.0" encoding="utf-8"?>
-<p:sld xmlns:a="http://schemas.openxmlformats.org/drawingml/2006/main" xmlns:r="http://schemas.openxmlformats.org/officeDocument/2006/relationships" xmlns:p="http://schemas.openxmlformats.org/presentationml/2006/main">
-  <p:cSld>
-    <p:spTree>
-      <p:nvGrpSpPr>
-        <p:cNvPr id="1" name=""/>
-        <p:cNvGrpSpPr/>
-        <p:nvPr/>
-      </p:nvGrpSpPr>
-      <p:grpSpPr>
-        <a:xfrm>
-          <a:off x="0" y="0"/>
-          <a:ext cx="0" cy="0"/>
-          <a:chOff x="0" y="0"/>
-          <a:chExt cx="0" cy="0"/>
-        </a:xfrm>
-      </p:grpSpPr>
-      <p:sp>
-        <p:nvSpPr>
-          <p:cNvPr id="100" name="PlaceHolder 1"/>
-          <p:cNvSpPr>
-            <a:spLocks noGrp="1"/>
-          </p:cNvSpPr>
-          <p:nvPr>
-            <p:ph type="title"/>
-          </p:nvPr>
-        </p:nvSpPr>
-        <p:spPr>
-          <a:xfrm>
-            <a:off x="838080" y="797400"/>
-            <a:ext cx="10515240" cy="747720"/>
-          </a:xfrm>
-          <a:prstGeom prst="rect">
-            <a:avLst/>
-          </a:prstGeom>
-          <a:solidFill>
-            <a:srgbClr val="67337A"/>
-          </a:solidFill>
-          <a:ln w="0">
-            <a:noFill/>
-          </a:ln>
-        </p:spPr>
-        <p:txBody>
-          <a:bodyPr lIns="91440" tIns="45720" rIns="91440" bIns="45720" anchor="ctr">
-            <a:noAutofit/>
-          </a:bodyPr>
-          <a:lstStyle/>
-          <a:p>
-            <a:pPr indent="0" defTabSz="914400">
-              <a:lnSpc>
-                <a:spcPct val="90000"/>
-              </a:lnSpc>
-              <a:buNone/>
-            </a:pPr>
-            <a:r>
-              <a:rPr lang="en-US" sz="2800" b="0" u="none" strike="noStrike">
-                <a:solidFill>
-                  <a:schemeClr val="lt1"/>
-                </a:solidFill>
-                <a:uFillTx/>
-                <a:latin typeface="Calibri Light"/>
-              </a:rPr>
-              <a:t>Why is NLP Challenging?</a:t>
-            </a:r>
-            <a:endParaRPr lang="en-US" sz="2800" b="0" u="none" strike="noStrike">
-              <a:solidFill>
-                <a:schemeClr val="dk1"/>
-              </a:solidFill>
-              <a:uFillTx/>
-              <a:latin typeface="Calibri"/>
-            </a:endParaRPr>
-          </a:p>
-        </p:txBody>
-      </p:sp>
-      <p:sp>
-        <p:nvSpPr>
-          <p:cNvPr id="101" name="PlaceHolder 2"/>
-          <p:cNvSpPr>
-            <a:spLocks noGrp="1"/>
-          </p:cNvSpPr>
-          <p:nvPr>
-            <p:ph/>
-          </p:nvPr>
-        </p:nvSpPr>
-        <p:spPr>
-          <a:xfrm>
-            <a:off x="838080" y="1706040"/>
-            <a:ext cx="11107440" cy="4990680"/>
-          </a:xfrm>
-          <a:prstGeom prst="rect">
-            <a:avLst/>
-          </a:prstGeom>
-          <a:noFill/>
-          <a:ln w="0">
-            <a:noFill/>
-          </a:ln>
-        </p:spPr>
-        <p:txBody>
-          <a:bodyPr lIns="91440" tIns="45720" rIns="91440" bIns="45720" anchor="t">
-            <a:normAutofit fontScale="85000" lnSpcReduction="19999"/>
-          </a:bodyPr>
-          <a:lstStyle/>
-          <a:p>
-            <a:pPr indent="0" defTabSz="914400">
-              <a:lnSpc>
-                <a:spcPct val="90000"/>
-              </a:lnSpc>
-              <a:spcBef>
-                <a:spcPts val="1001"/>
-              </a:spcBef>
-              <a:buNone/>
-              <a:tabLst>
-                <a:tab pos="0" algn="l"/>
-              </a:tabLst>
-            </a:pPr>
-            <a:r>
-              <a:rPr lang="en-US" sz="2400" b="0" u="none" strike="noStrike">
-                <a:solidFill>
-                  <a:schemeClr val="dk1"/>
-                </a:solidFill>
-                <a:uFillTx/>
-                <a:latin typeface="Calibri"/>
-              </a:rPr>
-              <a:t>Human language is ambiguous: Words and sentences can have multiple interpretations</a:t>
-            </a:r>
-          </a:p>
-          <a:p>
-            <a:pPr marL="228600" indent="-228600" defTabSz="914400">
-              <a:lnSpc>
-                <a:spcPct val="90000"/>
-              </a:lnSpc>
-              <a:spcBef>
-                <a:spcPts val="1001"/>
-              </a:spcBef>
-              <a:buClr>
-                <a:srgbClr val="000000"/>
-              </a:buClr>
-              <a:buFont typeface="Arial"/>
-              <a:buChar char="•"/>
-              <a:tabLst>
-                <a:tab pos="0" algn="l"/>
-              </a:tabLst>
-            </a:pPr>
-            <a:r>
-              <a:rPr lang="en-US" sz="2400" b="1" u="none" strike="noStrike">
-                <a:solidFill>
-                  <a:schemeClr val="dk1"/>
-                </a:solidFill>
-                <a:uFillTx/>
-                <a:latin typeface="Calibri"/>
-              </a:rPr>
-              <a:t>Lexical ambiguity</a:t>
-            </a:r>
-            <a:r>
-              <a:rPr lang="en-US" sz="2400" b="0" u="none" strike="noStrike">
-                <a:solidFill>
-                  <a:schemeClr val="dk1"/>
-                </a:solidFill>
-                <a:uFillTx/>
-                <a:latin typeface="Calibri"/>
-              </a:rPr>
-              <a:t>: When a word has multiple meanings</a:t>
-            </a:r>
-          </a:p>
-          <a:p>
-            <a:pPr marL="685800" lvl="1" indent="-228600" defTabSz="914400">
-              <a:lnSpc>
-                <a:spcPct val="90000"/>
-              </a:lnSpc>
-              <a:spcBef>
-                <a:spcPts val="499"/>
-              </a:spcBef>
-              <a:buClr>
-                <a:srgbClr val="000000"/>
-              </a:buClr>
-              <a:buFont typeface="Arial"/>
-              <a:buChar char="•"/>
-              <a:tabLst>
-                <a:tab pos="0" algn="l"/>
-              </a:tabLst>
-            </a:pPr>
-            <a:r>
-              <a:rPr lang="en-US" sz="2000" b="0" u="none" strike="noStrike">
-                <a:solidFill>
-                  <a:schemeClr val="dk1"/>
-                </a:solidFill>
-                <a:uFillTx/>
-                <a:latin typeface="Calibri"/>
-              </a:rPr>
-              <a:t>Example: "The bank is closed" (financial institution or riverbank)</a:t>
-            </a:r>
-          </a:p>
-          <a:p>
-            <a:pPr marL="685800" lvl="1" indent="-228600" defTabSz="914400">
-              <a:lnSpc>
-                <a:spcPct val="90000"/>
-              </a:lnSpc>
-              <a:spcBef>
-                <a:spcPts val="499"/>
-              </a:spcBef>
-              <a:buClr>
-                <a:srgbClr val="000000"/>
-              </a:buClr>
-              <a:buFont typeface="Arial"/>
-              <a:buChar char="•"/>
-              <a:tabLst>
-                <a:tab pos="0" algn="l"/>
-              </a:tabLst>
-            </a:pPr>
-            <a:r>
-              <a:rPr lang="en-US" sz="2000" b="0" u="none" strike="noStrike">
-                <a:solidFill>
-                  <a:schemeClr val="dk1"/>
-                </a:solidFill>
-                <a:uFillTx/>
-                <a:latin typeface="Calibri"/>
-              </a:rPr>
-              <a:t>Example: "The suit was expensive" (Formal set of clothes or Legal proceeding)</a:t>
-            </a:r>
-          </a:p>
-          <a:p>
-            <a:pPr marL="685800" lvl="1" indent="-228600" defTabSz="914400">
-              <a:lnSpc>
-                <a:spcPct val="90000"/>
-              </a:lnSpc>
-              <a:spcBef>
-                <a:spcPts val="499"/>
-              </a:spcBef>
-              <a:buClr>
-                <a:srgbClr val="000000"/>
-              </a:buClr>
-              <a:buFont typeface="Arial"/>
-              <a:buChar char="•"/>
-              <a:tabLst>
-                <a:tab pos="0" algn="l"/>
-              </a:tabLst>
-            </a:pPr>
-            <a:r>
-              <a:rPr lang="en-US" sz="2100" b="0" u="none" strike="noStrike">
-                <a:solidFill>
-                  <a:schemeClr val="dk1"/>
-                </a:solidFill>
-                <a:uFillTx/>
-                <a:latin typeface="Calibri"/>
-              </a:rPr>
-              <a:t>Computational challenge: Systems must select the correct word sense from multiple possibilities</a:t>
-            </a:r>
-          </a:p>
-          <a:p>
-            <a:pPr marL="228600" indent="-228600" defTabSz="914400">
-              <a:lnSpc>
-                <a:spcPct val="90000"/>
-              </a:lnSpc>
-              <a:spcBef>
-                <a:spcPts val="1001"/>
-              </a:spcBef>
-              <a:buClr>
-                <a:srgbClr val="000000"/>
-              </a:buClr>
-              <a:buFont typeface="Arial"/>
-              <a:buChar char="•"/>
-              <a:tabLst>
-                <a:tab pos="0" algn="l"/>
-              </a:tabLst>
-            </a:pPr>
-            <a:r>
-              <a:rPr lang="en-US" sz="2400" b="1" u="none" strike="noStrike">
-                <a:solidFill>
-                  <a:schemeClr val="dk1"/>
-                </a:solidFill>
-                <a:uFillTx/>
-                <a:latin typeface="Calibri"/>
-              </a:rPr>
-              <a:t>Syntactic ambiguity</a:t>
-            </a:r>
-            <a:r>
-              <a:rPr lang="en-US" sz="2400" b="0" u="none" strike="noStrike">
-                <a:solidFill>
-                  <a:schemeClr val="dk1"/>
-                </a:solidFill>
-                <a:uFillTx/>
-                <a:latin typeface="Calibri"/>
-              </a:rPr>
-              <a:t>: When a sentence can be parsed in multiple ways</a:t>
-            </a:r>
-          </a:p>
-          <a:p>
-            <a:pPr marL="685800" lvl="1" indent="-228600" defTabSz="914400">
-              <a:lnSpc>
-                <a:spcPct val="90000"/>
-              </a:lnSpc>
-              <a:spcBef>
-                <a:spcPts val="499"/>
-              </a:spcBef>
-              <a:buClr>
-                <a:srgbClr val="000000"/>
-              </a:buClr>
-              <a:buFont typeface="Arial"/>
-              <a:buChar char="•"/>
-              <a:tabLst>
-                <a:tab pos="0" algn="l"/>
-              </a:tabLst>
-            </a:pPr>
-            <a:r>
-              <a:rPr lang="en-US" sz="2000" b="0" u="none" strike="noStrike">
-                <a:solidFill>
-                  <a:schemeClr val="dk1"/>
-                </a:solidFill>
-                <a:uFillTx/>
-                <a:latin typeface="Calibri"/>
-              </a:rPr>
-              <a:t>Example: "I saw the man with the telescope" (Who has the telescope?)</a:t>
-            </a:r>
-          </a:p>
-          <a:p>
-            <a:pPr marL="685800" lvl="1" indent="-228600" defTabSz="914400">
-              <a:lnSpc>
-                <a:spcPct val="90000"/>
-              </a:lnSpc>
-              <a:spcBef>
-                <a:spcPts val="499"/>
-              </a:spcBef>
-              <a:buClr>
-                <a:srgbClr val="000000"/>
-              </a:buClr>
-              <a:buFont typeface="Arial"/>
-              <a:buChar char="•"/>
-              <a:tabLst>
-                <a:tab pos="0" algn="l"/>
-              </a:tabLst>
-            </a:pPr>
-            <a:r>
-              <a:rPr lang="en-US" sz="2000" b="0" u="none" strike="noStrike">
-                <a:solidFill>
-                  <a:schemeClr val="dk1"/>
-                </a:solidFill>
-                <a:uFillTx/>
-                <a:latin typeface="Calibri"/>
-              </a:rPr>
-              <a:t>Example: "Flying planes can be dangerous" (The act of flying planes or planes that are flying?)</a:t>
-            </a:r>
-          </a:p>
-          <a:p>
-            <a:pPr marL="685800" lvl="1" indent="-228600" defTabSz="914400">
-              <a:lnSpc>
-                <a:spcPct val="90000"/>
-              </a:lnSpc>
-              <a:spcBef>
-                <a:spcPts val="499"/>
-              </a:spcBef>
-              <a:buClr>
-                <a:srgbClr val="000000"/>
-              </a:buClr>
-              <a:buFont typeface="Arial"/>
-              <a:buChar char="•"/>
-              <a:tabLst>
-                <a:tab pos="0" algn="l"/>
-              </a:tabLst>
-            </a:pPr>
-            <a:r>
-              <a:rPr lang="en-US" sz="2000" b="0" u="none" strike="noStrike">
-                <a:solidFill>
-                  <a:schemeClr val="dk1"/>
-                </a:solidFill>
-                <a:uFillTx/>
-                <a:latin typeface="Calibri"/>
-              </a:rPr>
-              <a:t>Computational challenge: Models must determine the correct grammatical structure</a:t>
-            </a:r>
-          </a:p>
-          <a:p>
-            <a:pPr marL="228600" indent="-228600" defTabSz="914400">
-              <a:lnSpc>
-                <a:spcPct val="90000"/>
-              </a:lnSpc>
-              <a:spcBef>
-                <a:spcPts val="1001"/>
-              </a:spcBef>
-              <a:buClr>
-                <a:srgbClr val="000000"/>
-              </a:buClr>
-              <a:buFont typeface="Arial"/>
-              <a:buChar char="•"/>
-              <a:tabLst>
-                <a:tab pos="0" algn="l"/>
-              </a:tabLst>
-            </a:pPr>
-            <a:r>
-              <a:rPr lang="en-US" sz="2400" b="1" u="none" strike="noStrike">
-                <a:solidFill>
-                  <a:schemeClr val="dk1"/>
-                </a:solidFill>
-                <a:uFillTx/>
-                <a:latin typeface="Calibri"/>
-              </a:rPr>
-              <a:t>Semantic ambiguity</a:t>
-            </a:r>
-            <a:r>
-              <a:rPr lang="en-US" sz="2400" b="0" u="none" strike="noStrike">
-                <a:solidFill>
-                  <a:schemeClr val="dk1"/>
-                </a:solidFill>
-                <a:uFillTx/>
-                <a:latin typeface="Calibri"/>
-              </a:rPr>
-              <a:t>: When the meaning of a sentence has multiple interpretations</a:t>
-            </a:r>
-          </a:p>
-          <a:p>
-            <a:pPr marL="685800" lvl="1" indent="-228600" defTabSz="914400">
-              <a:lnSpc>
-                <a:spcPct val="90000"/>
-              </a:lnSpc>
-              <a:spcBef>
-                <a:spcPts val="499"/>
-              </a:spcBef>
-              <a:buClr>
-                <a:srgbClr val="000000"/>
-              </a:buClr>
-              <a:buFont typeface="Arial"/>
-              <a:buChar char="•"/>
-              <a:tabLst>
-                <a:tab pos="0" algn="l"/>
-              </a:tabLst>
-            </a:pPr>
-            <a:r>
-              <a:rPr lang="en-US" sz="2000" b="0" u="none" strike="noStrike">
-                <a:solidFill>
-                  <a:schemeClr val="dk1"/>
-                </a:solidFill>
-                <a:uFillTx/>
-                <a:latin typeface="Calibri"/>
-              </a:rPr>
-              <a:t>Example: "The chicken is ready to eat" (Ready to be eaten or ready to consume food?)</a:t>
-            </a:r>
-          </a:p>
-          <a:p>
-            <a:pPr marL="685800" lvl="1" indent="-228600" defTabSz="914400">
-              <a:lnSpc>
-                <a:spcPct val="90000"/>
-              </a:lnSpc>
-              <a:spcBef>
-                <a:spcPts val="499"/>
-              </a:spcBef>
-              <a:buClr>
-                <a:srgbClr val="000000"/>
-              </a:buClr>
-              <a:buFont typeface="Arial"/>
-              <a:buChar char="•"/>
-              <a:tabLst>
-                <a:tab pos="0" algn="l"/>
-              </a:tabLst>
-            </a:pPr>
-            <a:r>
-              <a:rPr lang="en-US" sz="2000" b="0" u="none" strike="noStrike">
-                <a:solidFill>
-                  <a:schemeClr val="dk1"/>
-                </a:solidFill>
-                <a:uFillTx/>
-                <a:latin typeface="Calibri"/>
-              </a:rPr>
-              <a:t>Example: "John and Mary got married last year" (To each other or to other people?)</a:t>
-            </a:r>
-          </a:p>
-          <a:p>
-            <a:pPr marL="685800" lvl="1" indent="-228600" defTabSz="914400">
-              <a:lnSpc>
-                <a:spcPct val="90000"/>
-              </a:lnSpc>
-              <a:spcBef>
-                <a:spcPts val="499"/>
-              </a:spcBef>
-              <a:buClr>
-                <a:srgbClr val="000000"/>
-              </a:buClr>
-              <a:buFont typeface="Arial"/>
-              <a:buChar char="•"/>
-              <a:tabLst>
-                <a:tab pos="0" algn="l"/>
-              </a:tabLst>
-            </a:pPr>
-            <a:r>
-              <a:rPr lang="en-US" sz="2000" b="0" u="none" strike="noStrike">
-                <a:solidFill>
-                  <a:schemeClr val="dk1"/>
-                </a:solidFill>
-                <a:uFillTx/>
-                <a:latin typeface="Calibri"/>
-              </a:rPr>
-              <a:t>Computational challenge: Systems must infer the intended meaning based on context</a:t>
-            </a:r>
-          </a:p>
-          <a:p>
-            <a:pPr marL="228600" indent="-228600" defTabSz="914400">
-              <a:lnSpc>
-                <a:spcPct val="90000"/>
-              </a:lnSpc>
-              <a:spcBef>
-                <a:spcPts val="1001"/>
-              </a:spcBef>
-              <a:buClr>
-                <a:srgbClr val="000000"/>
-              </a:buClr>
-              <a:buFont typeface="Arial"/>
-              <a:buChar char="•"/>
-              <a:tabLst>
-                <a:tab pos="0" algn="l"/>
-              </a:tabLst>
-            </a:pPr>
-            <a:r>
-              <a:rPr lang="en-US" sz="2400" b="1" u="none" strike="noStrike">
-                <a:solidFill>
-                  <a:schemeClr val="dk1"/>
-                </a:solidFill>
-                <a:uFillTx/>
-                <a:latin typeface="Calibri"/>
-              </a:rPr>
-              <a:t>Pragmatic ambiguity</a:t>
-            </a:r>
-            <a:r>
-              <a:rPr lang="en-US" sz="2400" b="0" u="none" strike="noStrike">
-                <a:solidFill>
-                  <a:schemeClr val="dk1"/>
-                </a:solidFill>
-                <a:uFillTx/>
-                <a:latin typeface="Calibri"/>
-              </a:rPr>
-              <a:t>: When the intended meaning depends on context, intent, or implied information</a:t>
-            </a:r>
-          </a:p>
-          <a:p>
-            <a:pPr marL="685800" lvl="1" indent="-228600" defTabSz="914400">
-              <a:lnSpc>
-                <a:spcPct val="90000"/>
-              </a:lnSpc>
-              <a:spcBef>
-                <a:spcPts val="499"/>
-              </a:spcBef>
-              <a:buClr>
-                <a:srgbClr val="000000"/>
-              </a:buClr>
-              <a:buFont typeface="Arial"/>
-              <a:buChar char="•"/>
-              <a:tabLst>
-                <a:tab pos="0" algn="l"/>
-              </a:tabLst>
-            </a:pPr>
-            <a:r>
-              <a:rPr lang="en-US" sz="2000" b="0" u="none" strike="noStrike">
-                <a:solidFill>
-                  <a:schemeClr val="dk1"/>
-                </a:solidFill>
-                <a:uFillTx/>
-                <a:latin typeface="Calibri"/>
-              </a:rPr>
-              <a:t>Example: "It's cold in here" (Statement of fact or request to close a window/turn up heat?)</a:t>
-            </a:r>
-          </a:p>
-          <a:p>
-            <a:pPr marL="685800" lvl="1" indent="-228600" defTabSz="914400">
-              <a:lnSpc>
-                <a:spcPct val="90000"/>
-              </a:lnSpc>
-              <a:spcBef>
-                <a:spcPts val="499"/>
-              </a:spcBef>
-              <a:buClr>
-                <a:srgbClr val="000000"/>
-              </a:buClr>
-              <a:buFont typeface="Arial"/>
-              <a:buChar char="•"/>
-              <a:tabLst>
-                <a:tab pos="0" algn="l"/>
-              </a:tabLst>
-            </a:pPr>
-            <a:r>
-              <a:rPr lang="en-US" sz="2000" b="0" u="none" strike="noStrike">
-                <a:solidFill>
-                  <a:schemeClr val="dk1"/>
-                </a:solidFill>
-                <a:uFillTx/>
-                <a:latin typeface="Calibri"/>
-              </a:rPr>
-              <a:t>Example: "Do you know what time it is?" (Yes/no question or request for the time?)</a:t>
-            </a:r>
-          </a:p>
-          <a:p>
-            <a:pPr marL="685800" lvl="1" indent="-228600" defTabSz="914400">
-              <a:lnSpc>
-                <a:spcPct val="90000"/>
-              </a:lnSpc>
-              <a:spcBef>
-                <a:spcPts val="499"/>
-              </a:spcBef>
-              <a:buClr>
-                <a:srgbClr val="000000"/>
-              </a:buClr>
-              <a:buFont typeface="Arial"/>
-              <a:buChar char="•"/>
-              <a:tabLst>
-                <a:tab pos="0" algn="l"/>
-              </a:tabLst>
-            </a:pPr>
-            <a:r>
-              <a:rPr lang="en-US" sz="2000" b="0" u="none" strike="noStrike">
-                <a:solidFill>
-                  <a:schemeClr val="dk1"/>
-                </a:solidFill>
-                <a:uFillTx/>
-                <a:latin typeface="Calibri"/>
-              </a:rPr>
-              <a:t>Computational challenge: Models must understand communicative intent beyond literal meaning</a:t>
-            </a:r>
           </a:p>
         </p:txBody>
       </p:sp>

--- a/20242-NLP-LLM/lecture notes/Part 1 - Introduction to NLP/1.1-introduction to NLP.pptx
+++ b/20242-NLP-LLM/lecture notes/Part 1 - Introduction to NLP/1.1-introduction to NLP.pptx
@@ -168,12 +168,281 @@
 <p1510:revInfo xmlns:a="http://schemas.openxmlformats.org/drawingml/2006/main" xmlns:r="http://schemas.openxmlformats.org/officeDocument/2006/relationships" xmlns:p1510="http://schemas.microsoft.com/office/powerpoint/2015/10/main">
   <p1510:revLst>
     <p1510:client id="{1430C6B2-0695-4939-9A81-7D403BE3894B}" v="45" dt="2025-04-06T04:26:48.307"/>
+    <p1510:client id="{9DEFE369-4FE8-C0FA-AE89-88E89C96B65F}" v="51" dt="2025-04-07T19:02:15.269"/>
   </p1510:revLst>
 </p1510:revInfo>
 </file>
 
 <file path=ppt/changesInfos/changesInfo1.xml><?xml version="1.0" encoding="utf-8"?>
 <pc:chgInfo xmlns:a="http://schemas.openxmlformats.org/drawingml/2006/main" xmlns:r="http://schemas.openxmlformats.org/officeDocument/2006/relationships" xmlns:ac="http://schemas.microsoft.com/office/drawing/2013/main/command" xmlns:pc="http://schemas.microsoft.com/office/powerpoint/2013/main/command">
+  <pc:docChgLst>
+    <pc:chgData name="Mohammed Fasha" userId="cc64f42d-a1a6-4f08-b97b-0c37f877119f" providerId="ADAL" clId="{BECD4A7F-C1AF-4585-8C31-FE7D4FE3ED16}"/>
+    <pc:docChg chg="undo redo custSel addSld delSld modSld sldOrd">
+      <pc:chgData name="Mohammed Fasha" userId="cc64f42d-a1a6-4f08-b97b-0c37f877119f" providerId="ADAL" clId="{BECD4A7F-C1AF-4585-8C31-FE7D4FE3ED16}" dt="2025-01-05T16:36:16.605" v="1945" actId="1076"/>
+      <pc:docMkLst>
+        <pc:docMk/>
+      </pc:docMkLst>
+      <pc:sldChg chg="modSp mod">
+        <pc:chgData name="Mohammed Fasha" userId="cc64f42d-a1a6-4f08-b97b-0c37f877119f" providerId="ADAL" clId="{BECD4A7F-C1AF-4585-8C31-FE7D4FE3ED16}" dt="2024-12-30T18:47:27.683" v="988" actId="20577"/>
+        <pc:sldMkLst>
+          <pc:docMk/>
+          <pc:sldMk cId="2281221656" sldId="527"/>
+        </pc:sldMkLst>
+      </pc:sldChg>
+      <pc:sldChg chg="modSp mod">
+        <pc:chgData name="Mohammed Fasha" userId="cc64f42d-a1a6-4f08-b97b-0c37f877119f" providerId="ADAL" clId="{BECD4A7F-C1AF-4585-8C31-FE7D4FE3ED16}" dt="2024-12-27T13:59:26.893" v="366" actId="20577"/>
+        <pc:sldMkLst>
+          <pc:docMk/>
+          <pc:sldMk cId="3474268344" sldId="596"/>
+        </pc:sldMkLst>
+      </pc:sldChg>
+      <pc:sldChg chg="modSp mod">
+        <pc:chgData name="Mohammed Fasha" userId="cc64f42d-a1a6-4f08-b97b-0c37f877119f" providerId="ADAL" clId="{BECD4A7F-C1AF-4585-8C31-FE7D4FE3ED16}" dt="2024-12-30T18:44:34.649" v="884" actId="20577"/>
+        <pc:sldMkLst>
+          <pc:docMk/>
+          <pc:sldMk cId="916802035" sldId="651"/>
+        </pc:sldMkLst>
+      </pc:sldChg>
+      <pc:sldChg chg="del">
+        <pc:chgData name="Mohammed Fasha" userId="cc64f42d-a1a6-4f08-b97b-0c37f877119f" providerId="ADAL" clId="{BECD4A7F-C1AF-4585-8C31-FE7D4FE3ED16}" dt="2025-01-05T14:42:38.675" v="989" actId="2696"/>
+        <pc:sldMkLst>
+          <pc:docMk/>
+          <pc:sldMk cId="426516858" sldId="662"/>
+        </pc:sldMkLst>
+      </pc:sldChg>
+      <pc:sldChg chg="modSp add del mod">
+        <pc:chgData name="Mohammed Fasha" userId="cc64f42d-a1a6-4f08-b97b-0c37f877119f" providerId="ADAL" clId="{BECD4A7F-C1AF-4585-8C31-FE7D4FE3ED16}" dt="2025-01-05T16:34:59.233" v="1926" actId="20577"/>
+        <pc:sldMkLst>
+          <pc:docMk/>
+          <pc:sldMk cId="691538069" sldId="662"/>
+        </pc:sldMkLst>
+      </pc:sldChg>
+      <pc:sldChg chg="del">
+        <pc:chgData name="Mohammed Fasha" userId="cc64f42d-a1a6-4f08-b97b-0c37f877119f" providerId="ADAL" clId="{BECD4A7F-C1AF-4585-8C31-FE7D4FE3ED16}" dt="2025-01-05T14:42:38.675" v="989" actId="2696"/>
+        <pc:sldMkLst>
+          <pc:docMk/>
+          <pc:sldMk cId="895445062" sldId="663"/>
+        </pc:sldMkLst>
+      </pc:sldChg>
+      <pc:sldChg chg="add del">
+        <pc:chgData name="Mohammed Fasha" userId="cc64f42d-a1a6-4f08-b97b-0c37f877119f" providerId="ADAL" clId="{BECD4A7F-C1AF-4585-8C31-FE7D4FE3ED16}" dt="2025-01-05T14:43:16.100" v="993" actId="2696"/>
+        <pc:sldMkLst>
+          <pc:docMk/>
+          <pc:sldMk cId="3980180774" sldId="663"/>
+        </pc:sldMkLst>
+      </pc:sldChg>
+      <pc:sldChg chg="add del">
+        <pc:chgData name="Mohammed Fasha" userId="cc64f42d-a1a6-4f08-b97b-0c37f877119f" providerId="ADAL" clId="{BECD4A7F-C1AF-4585-8C31-FE7D4FE3ED16}" dt="2025-01-05T14:43:16.100" v="993" actId="2696"/>
+        <pc:sldMkLst>
+          <pc:docMk/>
+          <pc:sldMk cId="1728680596" sldId="664"/>
+        </pc:sldMkLst>
+      </pc:sldChg>
+      <pc:sldChg chg="del">
+        <pc:chgData name="Mohammed Fasha" userId="cc64f42d-a1a6-4f08-b97b-0c37f877119f" providerId="ADAL" clId="{BECD4A7F-C1AF-4585-8C31-FE7D4FE3ED16}" dt="2025-01-05T14:42:38.675" v="989" actId="2696"/>
+        <pc:sldMkLst>
+          <pc:docMk/>
+          <pc:sldMk cId="3900588277" sldId="664"/>
+        </pc:sldMkLst>
+      </pc:sldChg>
+      <pc:sldChg chg="del">
+        <pc:chgData name="Mohammed Fasha" userId="cc64f42d-a1a6-4f08-b97b-0c37f877119f" providerId="ADAL" clId="{BECD4A7F-C1AF-4585-8C31-FE7D4FE3ED16}" dt="2025-01-05T14:42:38.675" v="989" actId="2696"/>
+        <pc:sldMkLst>
+          <pc:docMk/>
+          <pc:sldMk cId="123002105" sldId="665"/>
+        </pc:sldMkLst>
+      </pc:sldChg>
+      <pc:sldChg chg="modSp add del mod">
+        <pc:chgData name="Mohammed Fasha" userId="cc64f42d-a1a6-4f08-b97b-0c37f877119f" providerId="ADAL" clId="{BECD4A7F-C1AF-4585-8C31-FE7D4FE3ED16}" dt="2025-01-05T15:05:12.729" v="1226" actId="21"/>
+        <pc:sldMkLst>
+          <pc:docMk/>
+          <pc:sldMk cId="148099094" sldId="665"/>
+        </pc:sldMkLst>
+      </pc:sldChg>
+      <pc:sldChg chg="del">
+        <pc:chgData name="Mohammed Fasha" userId="cc64f42d-a1a6-4f08-b97b-0c37f877119f" providerId="ADAL" clId="{BECD4A7F-C1AF-4585-8C31-FE7D4FE3ED16}" dt="2025-01-05T14:42:38.675" v="989" actId="2696"/>
+        <pc:sldMkLst>
+          <pc:docMk/>
+          <pc:sldMk cId="659863378" sldId="676"/>
+        </pc:sldMkLst>
+      </pc:sldChg>
+      <pc:sldChg chg="modSp add del mod">
+        <pc:chgData name="Mohammed Fasha" userId="cc64f42d-a1a6-4f08-b97b-0c37f877119f" providerId="ADAL" clId="{BECD4A7F-C1AF-4585-8C31-FE7D4FE3ED16}" dt="2025-01-05T14:55:27.595" v="1130" actId="255"/>
+        <pc:sldMkLst>
+          <pc:docMk/>
+          <pc:sldMk cId="1577854815" sldId="676"/>
+        </pc:sldMkLst>
+      </pc:sldChg>
+      <pc:sldChg chg="modSp add del mod">
+        <pc:chgData name="Mohammed Fasha" userId="cc64f42d-a1a6-4f08-b97b-0c37f877119f" providerId="ADAL" clId="{BECD4A7F-C1AF-4585-8C31-FE7D4FE3ED16}" dt="2025-01-05T14:55:43.754" v="1132" actId="1076"/>
+        <pc:sldMkLst>
+          <pc:docMk/>
+          <pc:sldMk cId="139882925" sldId="677"/>
+        </pc:sldMkLst>
+      </pc:sldChg>
+      <pc:sldChg chg="del">
+        <pc:chgData name="Mohammed Fasha" userId="cc64f42d-a1a6-4f08-b97b-0c37f877119f" providerId="ADAL" clId="{BECD4A7F-C1AF-4585-8C31-FE7D4FE3ED16}" dt="2025-01-05T14:42:38.675" v="989" actId="2696"/>
+        <pc:sldMkLst>
+          <pc:docMk/>
+          <pc:sldMk cId="2736863534" sldId="677"/>
+        </pc:sldMkLst>
+      </pc:sldChg>
+      <pc:sldChg chg="add del">
+        <pc:chgData name="Mohammed Fasha" userId="cc64f42d-a1a6-4f08-b97b-0c37f877119f" providerId="ADAL" clId="{BECD4A7F-C1AF-4585-8C31-FE7D4FE3ED16}" dt="2025-01-05T14:43:16.100" v="993" actId="2696"/>
+        <pc:sldMkLst>
+          <pc:docMk/>
+          <pc:sldMk cId="4146654093" sldId="678"/>
+        </pc:sldMkLst>
+      </pc:sldChg>
+      <pc:sldChg chg="del">
+        <pc:chgData name="Mohammed Fasha" userId="cc64f42d-a1a6-4f08-b97b-0c37f877119f" providerId="ADAL" clId="{BECD4A7F-C1AF-4585-8C31-FE7D4FE3ED16}" dt="2025-01-05T14:42:38.675" v="989" actId="2696"/>
+        <pc:sldMkLst>
+          <pc:docMk/>
+          <pc:sldMk cId="4228312762" sldId="678"/>
+        </pc:sldMkLst>
+      </pc:sldChg>
+      <pc:sldChg chg="del">
+        <pc:chgData name="Mohammed Fasha" userId="cc64f42d-a1a6-4f08-b97b-0c37f877119f" providerId="ADAL" clId="{BECD4A7F-C1AF-4585-8C31-FE7D4FE3ED16}" dt="2025-01-05T14:42:38.675" v="989" actId="2696"/>
+        <pc:sldMkLst>
+          <pc:docMk/>
+          <pc:sldMk cId="581717462" sldId="679"/>
+        </pc:sldMkLst>
+      </pc:sldChg>
+      <pc:sldChg chg="addSp delSp modSp add del mod chgLayout">
+        <pc:chgData name="Mohammed Fasha" userId="cc64f42d-a1a6-4f08-b97b-0c37f877119f" providerId="ADAL" clId="{BECD4A7F-C1AF-4585-8C31-FE7D4FE3ED16}" dt="2025-01-05T16:36:16.605" v="1945" actId="1076"/>
+        <pc:sldMkLst>
+          <pc:docMk/>
+          <pc:sldMk cId="3454522070" sldId="679"/>
+        </pc:sldMkLst>
+      </pc:sldChg>
+      <pc:sldChg chg="add del">
+        <pc:chgData name="Mohammed Fasha" userId="cc64f42d-a1a6-4f08-b97b-0c37f877119f" providerId="ADAL" clId="{BECD4A7F-C1AF-4585-8C31-FE7D4FE3ED16}" dt="2025-01-05T14:43:16.100" v="993" actId="2696"/>
+        <pc:sldMkLst>
+          <pc:docMk/>
+          <pc:sldMk cId="2856814121" sldId="681"/>
+        </pc:sldMkLst>
+      </pc:sldChg>
+      <pc:sldChg chg="del">
+        <pc:chgData name="Mohammed Fasha" userId="cc64f42d-a1a6-4f08-b97b-0c37f877119f" providerId="ADAL" clId="{BECD4A7F-C1AF-4585-8C31-FE7D4FE3ED16}" dt="2025-01-05T14:42:38.675" v="989" actId="2696"/>
+        <pc:sldMkLst>
+          <pc:docMk/>
+          <pc:sldMk cId="3083966018" sldId="681"/>
+        </pc:sldMkLst>
+      </pc:sldChg>
+      <pc:sldChg chg="modSp mod">
+        <pc:chgData name="Mohammed Fasha" userId="cc64f42d-a1a6-4f08-b97b-0c37f877119f" providerId="ADAL" clId="{BECD4A7F-C1AF-4585-8C31-FE7D4FE3ED16}" dt="2025-01-05T14:42:50.596" v="990" actId="14100"/>
+        <pc:sldMkLst>
+          <pc:docMk/>
+          <pc:sldMk cId="1697141369" sldId="695"/>
+        </pc:sldMkLst>
+      </pc:sldChg>
+      <pc:sldChg chg="addSp delSp modSp add del mod">
+        <pc:chgData name="Mohammed Fasha" userId="cc64f42d-a1a6-4f08-b97b-0c37f877119f" providerId="ADAL" clId="{BECD4A7F-C1AF-4585-8C31-FE7D4FE3ED16}" dt="2025-01-05T14:54:31.375" v="1125" actId="14100"/>
+        <pc:sldMkLst>
+          <pc:docMk/>
+          <pc:sldMk cId="265576630" sldId="698"/>
+        </pc:sldMkLst>
+      </pc:sldChg>
+      <pc:sldChg chg="del">
+        <pc:chgData name="Mohammed Fasha" userId="cc64f42d-a1a6-4f08-b97b-0c37f877119f" providerId="ADAL" clId="{BECD4A7F-C1AF-4585-8C31-FE7D4FE3ED16}" dt="2025-01-05T14:42:38.675" v="989" actId="2696"/>
+        <pc:sldMkLst>
+          <pc:docMk/>
+          <pc:sldMk cId="991725834" sldId="698"/>
+        </pc:sldMkLst>
+      </pc:sldChg>
+      <pc:sldChg chg="del">
+        <pc:chgData name="Mohammed Fasha" userId="cc64f42d-a1a6-4f08-b97b-0c37f877119f" providerId="ADAL" clId="{BECD4A7F-C1AF-4585-8C31-FE7D4FE3ED16}" dt="2025-01-05T14:42:38.675" v="989" actId="2696"/>
+        <pc:sldMkLst>
+          <pc:docMk/>
+          <pc:sldMk cId="3109561867" sldId="700"/>
+        </pc:sldMkLst>
+      </pc:sldChg>
+      <pc:sldChg chg="addSp delSp modSp add del mod">
+        <pc:chgData name="Mohammed Fasha" userId="cc64f42d-a1a6-4f08-b97b-0c37f877119f" providerId="ADAL" clId="{BECD4A7F-C1AF-4585-8C31-FE7D4FE3ED16}" dt="2025-01-05T16:00:05.564" v="1529" actId="20577"/>
+        <pc:sldMkLst>
+          <pc:docMk/>
+          <pc:sldMk cId="4247717824" sldId="700"/>
+        </pc:sldMkLst>
+      </pc:sldChg>
+      <pc:sldChg chg="addSp delSp modSp add mod">
+        <pc:chgData name="Mohammed Fasha" userId="cc64f42d-a1a6-4f08-b97b-0c37f877119f" providerId="ADAL" clId="{BECD4A7F-C1AF-4585-8C31-FE7D4FE3ED16}" dt="2025-01-05T14:53:29.185" v="1101" actId="21"/>
+        <pc:sldMkLst>
+          <pc:docMk/>
+          <pc:sldMk cId="67871309" sldId="709"/>
+        </pc:sldMkLst>
+      </pc:sldChg>
+      <pc:sldChg chg="modSp add mod">
+        <pc:chgData name="Mohammed Fasha" userId="cc64f42d-a1a6-4f08-b97b-0c37f877119f" providerId="ADAL" clId="{BECD4A7F-C1AF-4585-8C31-FE7D4FE3ED16}" dt="2025-01-05T15:31:09.113" v="1385" actId="6549"/>
+        <pc:sldMkLst>
+          <pc:docMk/>
+          <pc:sldMk cId="4114896152" sldId="710"/>
+        </pc:sldMkLst>
+      </pc:sldChg>
+      <pc:sldChg chg="addSp modSp add mod">
+        <pc:chgData name="Mohammed Fasha" userId="cc64f42d-a1a6-4f08-b97b-0c37f877119f" providerId="ADAL" clId="{BECD4A7F-C1AF-4585-8C31-FE7D4FE3ED16}" dt="2025-01-05T15:27:36.027" v="1348" actId="20577"/>
+        <pc:sldMkLst>
+          <pc:docMk/>
+          <pc:sldMk cId="3794385322" sldId="711"/>
+        </pc:sldMkLst>
+      </pc:sldChg>
+      <pc:sldChg chg="add del">
+        <pc:chgData name="Mohammed Fasha" userId="cc64f42d-a1a6-4f08-b97b-0c37f877119f" providerId="ADAL" clId="{BECD4A7F-C1AF-4585-8C31-FE7D4FE3ED16}" dt="2025-01-05T14:57:43.613" v="1146" actId="2696"/>
+        <pc:sldMkLst>
+          <pc:docMk/>
+          <pc:sldMk cId="501127302" sldId="712"/>
+        </pc:sldMkLst>
+      </pc:sldChg>
+      <pc:sldChg chg="modSp add mod">
+        <pc:chgData name="Mohammed Fasha" userId="cc64f42d-a1a6-4f08-b97b-0c37f877119f" providerId="ADAL" clId="{BECD4A7F-C1AF-4585-8C31-FE7D4FE3ED16}" dt="2025-01-05T15:32:23.870" v="1388"/>
+        <pc:sldMkLst>
+          <pc:docMk/>
+          <pc:sldMk cId="3701206727" sldId="712"/>
+        </pc:sldMkLst>
+      </pc:sldChg>
+      <pc:sldChg chg="addSp modSp add mod">
+        <pc:chgData name="Mohammed Fasha" userId="cc64f42d-a1a6-4f08-b97b-0c37f877119f" providerId="ADAL" clId="{BECD4A7F-C1AF-4585-8C31-FE7D4FE3ED16}" dt="2025-01-05T16:06:36.028" v="1538" actId="1076"/>
+        <pc:sldMkLst>
+          <pc:docMk/>
+          <pc:sldMk cId="1499972066" sldId="713"/>
+        </pc:sldMkLst>
+      </pc:sldChg>
+      <pc:sldChg chg="addSp delSp modSp add mod">
+        <pc:chgData name="Mohammed Fasha" userId="cc64f42d-a1a6-4f08-b97b-0c37f877119f" providerId="ADAL" clId="{BECD4A7F-C1AF-4585-8C31-FE7D4FE3ED16}" dt="2025-01-05T16:19:08.436" v="1705" actId="1036"/>
+        <pc:sldMkLst>
+          <pc:docMk/>
+          <pc:sldMk cId="1270641495" sldId="714"/>
+        </pc:sldMkLst>
+      </pc:sldChg>
+      <pc:sldChg chg="addSp modSp new mod">
+        <pc:chgData name="Mohammed Fasha" userId="cc64f42d-a1a6-4f08-b97b-0c37f877119f" providerId="ADAL" clId="{BECD4A7F-C1AF-4585-8C31-FE7D4FE3ED16}" dt="2025-01-05T16:23:44.632" v="1736" actId="12"/>
+        <pc:sldMkLst>
+          <pc:docMk/>
+          <pc:sldMk cId="1096386322" sldId="715"/>
+        </pc:sldMkLst>
+      </pc:sldChg>
+      <pc:sldChg chg="modSp new mod">
+        <pc:chgData name="Mohammed Fasha" userId="cc64f42d-a1a6-4f08-b97b-0c37f877119f" providerId="ADAL" clId="{BECD4A7F-C1AF-4585-8C31-FE7D4FE3ED16}" dt="2025-01-05T16:34:02.360" v="1902" actId="27636"/>
+        <pc:sldMkLst>
+          <pc:docMk/>
+          <pc:sldMk cId="1784058309" sldId="716"/>
+        </pc:sldMkLst>
+      </pc:sldChg>
+      <pc:sldChg chg="modSp add mod ord">
+        <pc:chgData name="Mohammed Fasha" userId="cc64f42d-a1a6-4f08-b97b-0c37f877119f" providerId="ADAL" clId="{BECD4A7F-C1AF-4585-8C31-FE7D4FE3ED16}" dt="2025-01-05T16:27:20.520" v="1803"/>
+        <pc:sldMkLst>
+          <pc:docMk/>
+          <pc:sldMk cId="3139017106" sldId="717"/>
+        </pc:sldMkLst>
+      </pc:sldChg>
+      <pc:sldChg chg="addSp delSp modSp new mod">
+        <pc:chgData name="Mohammed Fasha" userId="cc64f42d-a1a6-4f08-b97b-0c37f877119f" providerId="ADAL" clId="{BECD4A7F-C1AF-4585-8C31-FE7D4FE3ED16}" dt="2025-01-05T16:32:45.446" v="1897" actId="20577"/>
+        <pc:sldMkLst>
+          <pc:docMk/>
+          <pc:sldMk cId="3043812923" sldId="718"/>
+        </pc:sldMkLst>
+      </pc:sldChg>
+    </pc:docChg>
+  </pc:docChgLst>
   <pc:docChgLst>
     <pc:chgData name="Mohammed Fasha" userId="cc64f42d-a1a6-4f08-b97b-0c37f877119f" providerId="ADAL" clId="{18637E31-0E18-4A5A-AC68-AF9D3439D974}"/>
     <pc:docChg chg="undo custSel delSld modSld sldOrd">
@@ -255,6 +524,36 @@
             <ac:spMk id="3" creationId="{8AEDF9A6-3E2A-ECD5-AC94-898AAFEDC346}"/>
           </ac:spMkLst>
         </pc:spChg>
+      </pc:sldChg>
+    </pc:docChg>
+  </pc:docChgLst>
+  <pc:docChgLst>
+    <pc:chgData name="Mohammed Fasha" userId="cc64f42d-a1a6-4f08-b97b-0c37f877119f" providerId="ADAL" clId="{4C71ED24-115E-432D-933D-C801DA3E52F1}"/>
+    <pc:docChg chg="delSld">
+      <pc:chgData name="Mohammed Fasha" userId="cc64f42d-a1a6-4f08-b97b-0c37f877119f" providerId="ADAL" clId="{4C71ED24-115E-432D-933D-C801DA3E52F1}" dt="2024-12-29T03:12:49.974" v="2" actId="47"/>
+      <pc:docMkLst>
+        <pc:docMk/>
+      </pc:docMkLst>
+      <pc:sldChg chg="del">
+        <pc:chgData name="Mohammed Fasha" userId="cc64f42d-a1a6-4f08-b97b-0c37f877119f" providerId="ADAL" clId="{4C71ED24-115E-432D-933D-C801DA3E52F1}" dt="2024-12-29T03:12:48.360" v="0" actId="47"/>
+        <pc:sldMkLst>
+          <pc:docMk/>
+          <pc:sldMk cId="2341000601" sldId="701"/>
+        </pc:sldMkLst>
+      </pc:sldChg>
+      <pc:sldChg chg="del">
+        <pc:chgData name="Mohammed Fasha" userId="cc64f42d-a1a6-4f08-b97b-0c37f877119f" providerId="ADAL" clId="{4C71ED24-115E-432D-933D-C801DA3E52F1}" dt="2024-12-29T03:12:49.133" v="1" actId="47"/>
+        <pc:sldMkLst>
+          <pc:docMk/>
+          <pc:sldMk cId="3519698944" sldId="702"/>
+        </pc:sldMkLst>
+      </pc:sldChg>
+      <pc:sldChg chg="del">
+        <pc:chgData name="Mohammed Fasha" userId="cc64f42d-a1a6-4f08-b97b-0c37f877119f" providerId="ADAL" clId="{4C71ED24-115E-432D-933D-C801DA3E52F1}" dt="2024-12-29T03:12:49.974" v="2" actId="47"/>
+        <pc:sldMkLst>
+          <pc:docMk/>
+          <pc:sldMk cId="3934257344" sldId="703"/>
+        </pc:sldMkLst>
       </pc:sldChg>
     </pc:docChg>
   </pc:docChgLst>
@@ -1845,6 +2144,139 @@
     </pc:docChg>
   </pc:docChgLst>
   <pc:docChgLst>
+    <pc:chgData name="Mohammed Fasha" userId="cc64f42d-a1a6-4f08-b97b-0c37f877119f" providerId="ADAL" clId="{2E5FBF59-3168-4932-9518-582502FE1AD5}"/>
+    <pc:docChg chg="undo custSel delSld modSld">
+      <pc:chgData name="Mohammed Fasha" userId="cc64f42d-a1a6-4f08-b97b-0c37f877119f" providerId="ADAL" clId="{2E5FBF59-3168-4932-9518-582502FE1AD5}" dt="2024-12-24T08:08:19.987" v="550" actId="20577"/>
+      <pc:docMkLst>
+        <pc:docMk/>
+      </pc:docMkLst>
+      <pc:sldChg chg="delSp">
+        <pc:chgData name="Mohammed Fasha" userId="cc64f42d-a1a6-4f08-b97b-0c37f877119f" providerId="ADAL" clId="{2E5FBF59-3168-4932-9518-582502FE1AD5}" dt="2024-11-19T07:40:47.121" v="208" actId="478"/>
+        <pc:sldMkLst>
+          <pc:docMk/>
+          <pc:sldMk cId="391491219" sldId="428"/>
+        </pc:sldMkLst>
+      </pc:sldChg>
+      <pc:sldChg chg="modSp">
+        <pc:chgData name="Mohammed Fasha" userId="cc64f42d-a1a6-4f08-b97b-0c37f877119f" providerId="ADAL" clId="{2E5FBF59-3168-4932-9518-582502FE1AD5}" dt="2024-12-03T07:43:58.007" v="456" actId="1076"/>
+        <pc:sldMkLst>
+          <pc:docMk/>
+          <pc:sldMk cId="3339445507" sldId="430"/>
+        </pc:sldMkLst>
+      </pc:sldChg>
+      <pc:sldChg chg="modSp">
+        <pc:chgData name="Mohammed Fasha" userId="cc64f42d-a1a6-4f08-b97b-0c37f877119f" providerId="ADAL" clId="{2E5FBF59-3168-4932-9518-582502FE1AD5}" dt="2024-12-03T07:45:08.136" v="474" actId="20577"/>
+        <pc:sldMkLst>
+          <pc:docMk/>
+          <pc:sldMk cId="3389046835" sldId="431"/>
+        </pc:sldMkLst>
+      </pc:sldChg>
+      <pc:sldChg chg="modSp">
+        <pc:chgData name="Mohammed Fasha" userId="cc64f42d-a1a6-4f08-b97b-0c37f877119f" providerId="ADAL" clId="{2E5FBF59-3168-4932-9518-582502FE1AD5}" dt="2024-11-10T06:33:09.727" v="37" actId="207"/>
+        <pc:sldMkLst>
+          <pc:docMk/>
+          <pc:sldMk cId="2726994946" sldId="479"/>
+        </pc:sldMkLst>
+      </pc:sldChg>
+      <pc:sldChg chg="modSp">
+        <pc:chgData name="Mohammed Fasha" userId="cc64f42d-a1a6-4f08-b97b-0c37f877119f" providerId="ADAL" clId="{2E5FBF59-3168-4932-9518-582502FE1AD5}" dt="2024-11-19T07:44:28.766" v="211" actId="20577"/>
+        <pc:sldMkLst>
+          <pc:docMk/>
+          <pc:sldMk cId="2297456757" sldId="483"/>
+        </pc:sldMkLst>
+      </pc:sldChg>
+      <pc:sldChg chg="modSp">
+        <pc:chgData name="Mohammed Fasha" userId="cc64f42d-a1a6-4f08-b97b-0c37f877119f" providerId="ADAL" clId="{2E5FBF59-3168-4932-9518-582502FE1AD5}" dt="2024-11-10T06:45:09.392" v="40" actId="20577"/>
+        <pc:sldMkLst>
+          <pc:docMk/>
+          <pc:sldMk cId="3474268344" sldId="596"/>
+        </pc:sldMkLst>
+      </pc:sldChg>
+      <pc:sldChg chg="modSp">
+        <pc:chgData name="Mohammed Fasha" userId="cc64f42d-a1a6-4f08-b97b-0c37f877119f" providerId="ADAL" clId="{2E5FBF59-3168-4932-9518-582502FE1AD5}" dt="2024-12-03T07:47:21.561" v="476" actId="6549"/>
+        <pc:sldMkLst>
+          <pc:docMk/>
+          <pc:sldMk cId="399592497" sldId="613"/>
+        </pc:sldMkLst>
+      </pc:sldChg>
+      <pc:sldChg chg="modSp">
+        <pc:chgData name="Mohammed Fasha" userId="cc64f42d-a1a6-4f08-b97b-0c37f877119f" providerId="ADAL" clId="{2E5FBF59-3168-4932-9518-582502FE1AD5}" dt="2024-12-03T07:49:02.980" v="478" actId="207"/>
+        <pc:sldMkLst>
+          <pc:docMk/>
+          <pc:sldMk cId="3329135496" sldId="617"/>
+        </pc:sldMkLst>
+      </pc:sldChg>
+      <pc:sldChg chg="modSp">
+        <pc:chgData name="Mohammed Fasha" userId="cc64f42d-a1a6-4f08-b97b-0c37f877119f" providerId="ADAL" clId="{2E5FBF59-3168-4932-9518-582502FE1AD5}" dt="2024-12-24T08:05:16.608" v="482" actId="403"/>
+        <pc:sldMkLst>
+          <pc:docMk/>
+          <pc:sldMk cId="2990045589" sldId="659"/>
+        </pc:sldMkLst>
+      </pc:sldChg>
+      <pc:sldChg chg="modSp">
+        <pc:chgData name="Mohammed Fasha" userId="cc64f42d-a1a6-4f08-b97b-0c37f877119f" providerId="ADAL" clId="{2E5FBF59-3168-4932-9518-582502FE1AD5}" dt="2024-12-24T08:08:19.987" v="550" actId="20577"/>
+        <pc:sldMkLst>
+          <pc:docMk/>
+          <pc:sldMk cId="2680231355" sldId="669"/>
+        </pc:sldMkLst>
+      </pc:sldChg>
+      <pc:sldChg chg="addSp modSp">
+        <pc:chgData name="Mohammed Fasha" userId="cc64f42d-a1a6-4f08-b97b-0c37f877119f" providerId="ADAL" clId="{2E5FBF59-3168-4932-9518-582502FE1AD5}" dt="2024-12-24T08:05:52.910" v="488" actId="1076"/>
+        <pc:sldMkLst>
+          <pc:docMk/>
+          <pc:sldMk cId="916102856" sldId="685"/>
+        </pc:sldMkLst>
+      </pc:sldChg>
+      <pc:sldChg chg="modSp">
+        <pc:chgData name="Mohammed Fasha" userId="cc64f42d-a1a6-4f08-b97b-0c37f877119f" providerId="ADAL" clId="{2E5FBF59-3168-4932-9518-582502FE1AD5}" dt="2024-11-19T07:03:29.557" v="206" actId="207"/>
+        <pc:sldMkLst>
+          <pc:docMk/>
+          <pc:sldMk cId="32004852" sldId="708"/>
+        </pc:sldMkLst>
+      </pc:sldChg>
+    </pc:docChg>
+  </pc:docChgLst>
+  <pc:docChgLst>
+    <pc:chgData name="Mohammed Fasha" userId="cc64f42d-a1a6-4f08-b97b-0c37f877119f" providerId="ADAL" clId="{5980B3BB-4EB6-4E37-92BF-3A2A8F4B2C7A}"/>
+    <pc:docChg chg="custSel modSld">
+      <pc:chgData name="Mohammed Fasha" userId="cc64f42d-a1a6-4f08-b97b-0c37f877119f" providerId="ADAL" clId="{5980B3BB-4EB6-4E37-92BF-3A2A8F4B2C7A}" dt="2024-10-15T02:28:13.535" v="0" actId="478"/>
+      <pc:docMkLst>
+        <pc:docMk/>
+      </pc:docMkLst>
+      <pc:sldChg chg="delSp mod">
+        <pc:chgData name="Mohammed Fasha" userId="cc64f42d-a1a6-4f08-b97b-0c37f877119f" providerId="ADAL" clId="{5980B3BB-4EB6-4E37-92BF-3A2A8F4B2C7A}" dt="2024-10-15T02:28:13.535" v="0" actId="478"/>
+        <pc:sldMkLst>
+          <pc:docMk/>
+          <pc:sldMk cId="2297456757" sldId="483"/>
+        </pc:sldMkLst>
+      </pc:sldChg>
+    </pc:docChg>
+  </pc:docChgLst>
+  <pc:docChgLst>
+    <pc:chgData name="Mohammed Fasha" userId="cc64f42d-a1a6-4f08-b97b-0c37f877119f" providerId="ADAL" clId="{6804A8E6-8D7F-46E3-B091-66A8F6B926BF}"/>
+    <pc:docChg chg="custSel modMainMaster">
+      <pc:chgData name="Mohammed Fasha" userId="cc64f42d-a1a6-4f08-b97b-0c37f877119f" providerId="ADAL" clId="{6804A8E6-8D7F-46E3-B091-66A8F6B926BF}" dt="2024-11-09T05:15:35.019" v="2" actId="1076"/>
+      <pc:docMkLst>
+        <pc:docMk/>
+      </pc:docMkLst>
+      <pc:sldMasterChg chg="delSp mod modSldLayout">
+        <pc:chgData name="Mohammed Fasha" userId="cc64f42d-a1a6-4f08-b97b-0c37f877119f" providerId="ADAL" clId="{6804A8E6-8D7F-46E3-B091-66A8F6B926BF}" dt="2024-11-09T05:15:35.019" v="2" actId="1076"/>
+        <pc:sldMasterMkLst>
+          <pc:docMk/>
+          <pc:sldMasterMk cId="742811419" sldId="2147483648"/>
+        </pc:sldMasterMkLst>
+        <pc:sldLayoutChg chg="addSp modSp mod">
+          <pc:chgData name="Mohammed Fasha" userId="cc64f42d-a1a6-4f08-b97b-0c37f877119f" providerId="ADAL" clId="{6804A8E6-8D7F-46E3-B091-66A8F6B926BF}" dt="2024-11-09T05:15:35.019" v="2" actId="1076"/>
+          <pc:sldLayoutMkLst>
+            <pc:docMk/>
+            <pc:sldMasterMk cId="742811419" sldId="2147483648"/>
+            <pc:sldLayoutMk cId="4063788262" sldId="2147483649"/>
+          </pc:sldLayoutMkLst>
+        </pc:sldLayoutChg>
+      </pc:sldMasterChg>
+    </pc:docChg>
+  </pc:docChgLst>
+  <pc:docChgLst>
     <pc:chgData name="Mohammed Fasha" userId="cc64f42d-a1a6-4f08-b97b-0c37f877119f" providerId="ADAL" clId="{1430C6B2-0695-4939-9A81-7D403BE3894B}"/>
     <pc:docChg chg="undo redo custSel addSld delSld modSld">
       <pc:chgData name="Mohammed Fasha" userId="cc64f42d-a1a6-4f08-b97b-0c37f877119f" providerId="ADAL" clId="{1430C6B2-0695-4939-9A81-7D403BE3894B}" dt="2025-04-06T04:27:46.978" v="903" actId="2696"/>
@@ -2725,434 +3157,203 @@
     </pc:docChg>
   </pc:docChgLst>
   <pc:docChgLst>
-    <pc:chgData name="Mohammed Fasha" userId="cc64f42d-a1a6-4f08-b97b-0c37f877119f" providerId="ADAL" clId="{5980B3BB-4EB6-4E37-92BF-3A2A8F4B2C7A}"/>
-    <pc:docChg chg="custSel modSld">
-      <pc:chgData name="Mohammed Fasha" userId="cc64f42d-a1a6-4f08-b97b-0c37f877119f" providerId="ADAL" clId="{5980B3BB-4EB6-4E37-92BF-3A2A8F4B2C7A}" dt="2024-10-15T02:28:13.535" v="0" actId="478"/>
+    <pc:chgData name="Mohammed Fasha" userId="S::mohammed.fasha@uop.edu.jo::cc64f42d-a1a6-4f08-b97b-0c37f877119f" providerId="AD" clId="Web-{9DEFE369-4FE8-C0FA-AE89-88E89C96B65F}"/>
+    <pc:docChg chg="modSld">
+      <pc:chgData name="Mohammed Fasha" userId="S::mohammed.fasha@uop.edu.jo::cc64f42d-a1a6-4f08-b97b-0c37f877119f" providerId="AD" clId="Web-{9DEFE369-4FE8-C0FA-AE89-88E89C96B65F}" dt="2025-04-07T19:02:15.269" v="50" actId="1076"/>
       <pc:docMkLst>
         <pc:docMk/>
       </pc:docMkLst>
-      <pc:sldChg chg="delSp mod">
-        <pc:chgData name="Mohammed Fasha" userId="cc64f42d-a1a6-4f08-b97b-0c37f877119f" providerId="ADAL" clId="{5980B3BB-4EB6-4E37-92BF-3A2A8F4B2C7A}" dt="2024-10-15T02:28:13.535" v="0" actId="478"/>
+      <pc:sldChg chg="modSp">
+        <pc:chgData name="Mohammed Fasha" userId="S::mohammed.fasha@uop.edu.jo::cc64f42d-a1a6-4f08-b97b-0c37f877119f" providerId="AD" clId="Web-{9DEFE369-4FE8-C0FA-AE89-88E89C96B65F}" dt="2025-04-07T19:02:15.269" v="50" actId="1076"/>
         <pc:sldMkLst>
           <pc:docMk/>
-          <pc:sldMk cId="2297456757" sldId="483"/>
+          <pc:sldMk cId="0" sldId="264"/>
         </pc:sldMkLst>
+        <pc:picChg chg="mod">
+          <ac:chgData name="Mohammed Fasha" userId="S::mohammed.fasha@uop.edu.jo::cc64f42d-a1a6-4f08-b97b-0c37f877119f" providerId="AD" clId="Web-{9DEFE369-4FE8-C0FA-AE89-88E89C96B65F}" dt="2025-04-07T19:02:15.269" v="50" actId="1076"/>
+          <ac:picMkLst>
+            <pc:docMk/>
+            <pc:sldMk cId="0" sldId="264"/>
+            <ac:picMk id="115" creationId="{00000000-0000-0000-0000-000000000000}"/>
+          </ac:picMkLst>
+        </pc:picChg>
       </pc:sldChg>
-    </pc:docChg>
-  </pc:docChgLst>
-  <pc:docChgLst>
-    <pc:chgData name="Mohammed Fasha" userId="cc64f42d-a1a6-4f08-b97b-0c37f877119f" providerId="ADAL" clId="{4C71ED24-115E-432D-933D-C801DA3E52F1}"/>
-    <pc:docChg chg="delSld">
-      <pc:chgData name="Mohammed Fasha" userId="cc64f42d-a1a6-4f08-b97b-0c37f877119f" providerId="ADAL" clId="{4C71ED24-115E-432D-933D-C801DA3E52F1}" dt="2024-12-29T03:12:49.974" v="2" actId="47"/>
-      <pc:docMkLst>
-        <pc:docMk/>
-      </pc:docMkLst>
-      <pc:sldChg chg="del">
-        <pc:chgData name="Mohammed Fasha" userId="cc64f42d-a1a6-4f08-b97b-0c37f877119f" providerId="ADAL" clId="{4C71ED24-115E-432D-933D-C801DA3E52F1}" dt="2024-12-29T03:12:48.360" v="0" actId="47"/>
+      <pc:sldChg chg="modSp">
+        <pc:chgData name="Mohammed Fasha" userId="S::mohammed.fasha@uop.edu.jo::cc64f42d-a1a6-4f08-b97b-0c37f877119f" providerId="AD" clId="Web-{9DEFE369-4FE8-C0FA-AE89-88E89C96B65F}" dt="2025-04-07T19:02:08.988" v="49" actId="1076"/>
         <pc:sldMkLst>
           <pc:docMk/>
-          <pc:sldMk cId="2341000601" sldId="701"/>
+          <pc:sldMk cId="0" sldId="265"/>
         </pc:sldMkLst>
+        <pc:picChg chg="mod">
+          <ac:chgData name="Mohammed Fasha" userId="S::mohammed.fasha@uop.edu.jo::cc64f42d-a1a6-4f08-b97b-0c37f877119f" providerId="AD" clId="Web-{9DEFE369-4FE8-C0FA-AE89-88E89C96B65F}" dt="2025-04-07T19:02:08.988" v="49" actId="1076"/>
+          <ac:picMkLst>
+            <pc:docMk/>
+            <pc:sldMk cId="0" sldId="265"/>
+            <ac:picMk id="3" creationId="{68EA6CB0-BFE2-482A-D045-9E2274E13790}"/>
+          </ac:picMkLst>
+        </pc:picChg>
       </pc:sldChg>
-      <pc:sldChg chg="del">
-        <pc:chgData name="Mohammed Fasha" userId="cc64f42d-a1a6-4f08-b97b-0c37f877119f" providerId="ADAL" clId="{4C71ED24-115E-432D-933D-C801DA3E52F1}" dt="2024-12-29T03:12:49.133" v="1" actId="47"/>
+      <pc:sldChg chg="modSp">
+        <pc:chgData name="Mohammed Fasha" userId="S::mohammed.fasha@uop.edu.jo::cc64f42d-a1a6-4f08-b97b-0c37f877119f" providerId="AD" clId="Web-{9DEFE369-4FE8-C0FA-AE89-88E89C96B65F}" dt="2025-04-07T19:02:02.675" v="48" actId="1076"/>
         <pc:sldMkLst>
           <pc:docMk/>
-          <pc:sldMk cId="3519698944" sldId="702"/>
+          <pc:sldMk cId="0" sldId="266"/>
         </pc:sldMkLst>
+        <pc:picChg chg="mod">
+          <ac:chgData name="Mohammed Fasha" userId="S::mohammed.fasha@uop.edu.jo::cc64f42d-a1a6-4f08-b97b-0c37f877119f" providerId="AD" clId="Web-{9DEFE369-4FE8-C0FA-AE89-88E89C96B65F}" dt="2025-04-07T19:02:02.675" v="48" actId="1076"/>
+          <ac:picMkLst>
+            <pc:docMk/>
+            <pc:sldMk cId="0" sldId="266"/>
+            <ac:picMk id="3" creationId="{53D1A3D5-A337-E152-A2D3-43439D59A1BE}"/>
+          </ac:picMkLst>
+        </pc:picChg>
       </pc:sldChg>
-      <pc:sldChg chg="del">
-        <pc:chgData name="Mohammed Fasha" userId="cc64f42d-a1a6-4f08-b97b-0c37f877119f" providerId="ADAL" clId="{4C71ED24-115E-432D-933D-C801DA3E52F1}" dt="2024-12-29T03:12:49.974" v="2" actId="47"/>
+      <pc:sldChg chg="modSp">
+        <pc:chgData name="Mohammed Fasha" userId="S::mohammed.fasha@uop.edu.jo::cc64f42d-a1a6-4f08-b97b-0c37f877119f" providerId="AD" clId="Web-{9DEFE369-4FE8-C0FA-AE89-88E89C96B65F}" dt="2025-04-07T19:01:55.612" v="47" actId="1076"/>
         <pc:sldMkLst>
           <pc:docMk/>
-          <pc:sldMk cId="3934257344" sldId="703"/>
+          <pc:sldMk cId="0" sldId="270"/>
         </pc:sldMkLst>
+        <pc:picChg chg="mod">
+          <ac:chgData name="Mohammed Fasha" userId="S::mohammed.fasha@uop.edu.jo::cc64f42d-a1a6-4f08-b97b-0c37f877119f" providerId="AD" clId="Web-{9DEFE369-4FE8-C0FA-AE89-88E89C96B65F}" dt="2025-04-07T19:01:55.612" v="47" actId="1076"/>
+          <ac:picMkLst>
+            <pc:docMk/>
+            <pc:sldMk cId="0" sldId="270"/>
+            <ac:picMk id="3" creationId="{E9501D06-4E28-42B8-54EC-6C48C4567DB7}"/>
+          </ac:picMkLst>
+        </pc:picChg>
       </pc:sldChg>
-    </pc:docChg>
-  </pc:docChgLst>
-  <pc:docChgLst>
-    <pc:chgData name="Mohammed Fasha" userId="cc64f42d-a1a6-4f08-b97b-0c37f877119f" providerId="ADAL" clId="{BECD4A7F-C1AF-4585-8C31-FE7D4FE3ED16}"/>
-    <pc:docChg chg="undo redo custSel addSld delSld modSld sldOrd">
-      <pc:chgData name="Mohammed Fasha" userId="cc64f42d-a1a6-4f08-b97b-0c37f877119f" providerId="ADAL" clId="{BECD4A7F-C1AF-4585-8C31-FE7D4FE3ED16}" dt="2025-01-05T16:36:16.605" v="1945" actId="1076"/>
-      <pc:docMkLst>
-        <pc:docMk/>
-      </pc:docMkLst>
-      <pc:sldChg chg="modSp mod">
-        <pc:chgData name="Mohammed Fasha" userId="cc64f42d-a1a6-4f08-b97b-0c37f877119f" providerId="ADAL" clId="{BECD4A7F-C1AF-4585-8C31-FE7D4FE3ED16}" dt="2024-12-30T18:47:27.683" v="988" actId="20577"/>
+      <pc:sldChg chg="modSp">
+        <pc:chgData name="Mohammed Fasha" userId="S::mohammed.fasha@uop.edu.jo::cc64f42d-a1a6-4f08-b97b-0c37f877119f" providerId="AD" clId="Web-{9DEFE369-4FE8-C0FA-AE89-88E89C96B65F}" dt="2025-04-07T19:01:49.472" v="46" actId="1076"/>
         <pc:sldMkLst>
           <pc:docMk/>
-          <pc:sldMk cId="2281221656" sldId="527"/>
+          <pc:sldMk cId="0" sldId="274"/>
         </pc:sldMkLst>
+        <pc:picChg chg="mod">
+          <ac:chgData name="Mohammed Fasha" userId="S::mohammed.fasha@uop.edu.jo::cc64f42d-a1a6-4f08-b97b-0c37f877119f" providerId="AD" clId="Web-{9DEFE369-4FE8-C0FA-AE89-88E89C96B65F}" dt="2025-04-07T19:01:49.472" v="46" actId="1076"/>
+          <ac:picMkLst>
+            <pc:docMk/>
+            <pc:sldMk cId="0" sldId="274"/>
+            <ac:picMk id="3" creationId="{2137DE1E-E18E-A534-77E6-28A80EF44BD2}"/>
+          </ac:picMkLst>
+        </pc:picChg>
       </pc:sldChg>
-      <pc:sldChg chg="modSp mod">
-        <pc:chgData name="Mohammed Fasha" userId="cc64f42d-a1a6-4f08-b97b-0c37f877119f" providerId="ADAL" clId="{BECD4A7F-C1AF-4585-8C31-FE7D4FE3ED16}" dt="2024-12-27T13:59:26.893" v="366" actId="20577"/>
+      <pc:sldChg chg="modSp">
+        <pc:chgData name="Mohammed Fasha" userId="S::mohammed.fasha@uop.edu.jo::cc64f42d-a1a6-4f08-b97b-0c37f877119f" providerId="AD" clId="Web-{9DEFE369-4FE8-C0FA-AE89-88E89C96B65F}" dt="2025-04-07T19:01:39.424" v="45" actId="1076"/>
         <pc:sldMkLst>
           <pc:docMk/>
-          <pc:sldMk cId="3474268344" sldId="596"/>
+          <pc:sldMk cId="0" sldId="277"/>
         </pc:sldMkLst>
+        <pc:picChg chg="mod">
+          <ac:chgData name="Mohammed Fasha" userId="S::mohammed.fasha@uop.edu.jo::cc64f42d-a1a6-4f08-b97b-0c37f877119f" providerId="AD" clId="Web-{9DEFE369-4FE8-C0FA-AE89-88E89C96B65F}" dt="2025-04-07T19:01:39.424" v="45" actId="1076"/>
+          <ac:picMkLst>
+            <pc:docMk/>
+            <pc:sldMk cId="0" sldId="277"/>
+            <ac:picMk id="3" creationId="{12B2D59F-BB12-6EC1-7754-F99FB98DC6B1}"/>
+          </ac:picMkLst>
+        </pc:picChg>
       </pc:sldChg>
-      <pc:sldChg chg="modSp mod">
-        <pc:chgData name="Mohammed Fasha" userId="cc64f42d-a1a6-4f08-b97b-0c37f877119f" providerId="ADAL" clId="{BECD4A7F-C1AF-4585-8C31-FE7D4FE3ED16}" dt="2024-12-30T18:44:34.649" v="884" actId="20577"/>
+      <pc:sldChg chg="modSp">
+        <pc:chgData name="Mohammed Fasha" userId="S::mohammed.fasha@uop.edu.jo::cc64f42d-a1a6-4f08-b97b-0c37f877119f" providerId="AD" clId="Web-{9DEFE369-4FE8-C0FA-AE89-88E89C96B65F}" dt="2025-04-07T19:01:20.830" v="42" actId="1076"/>
         <pc:sldMkLst>
           <pc:docMk/>
-          <pc:sldMk cId="916802035" sldId="651"/>
+          <pc:sldMk cId="0" sldId="281"/>
         </pc:sldMkLst>
+        <pc:picChg chg="mod">
+          <ac:chgData name="Mohammed Fasha" userId="S::mohammed.fasha@uop.edu.jo::cc64f42d-a1a6-4f08-b97b-0c37f877119f" providerId="AD" clId="Web-{9DEFE369-4FE8-C0FA-AE89-88E89C96B65F}" dt="2025-04-07T19:01:20.830" v="42" actId="1076"/>
+          <ac:picMkLst>
+            <pc:docMk/>
+            <pc:sldMk cId="0" sldId="281"/>
+            <ac:picMk id="4" creationId="{C1F36920-6CAD-70BE-C466-935BEA705640}"/>
+          </ac:picMkLst>
+        </pc:picChg>
       </pc:sldChg>
-      <pc:sldChg chg="del">
-        <pc:chgData name="Mohammed Fasha" userId="cc64f42d-a1a6-4f08-b97b-0c37f877119f" providerId="ADAL" clId="{BECD4A7F-C1AF-4585-8C31-FE7D4FE3ED16}" dt="2025-01-05T14:42:38.675" v="989" actId="2696"/>
+      <pc:sldChg chg="addSp delSp modSp">
+        <pc:chgData name="Mohammed Fasha" userId="S::mohammed.fasha@uop.edu.jo::cc64f42d-a1a6-4f08-b97b-0c37f877119f" providerId="AD" clId="Web-{9DEFE369-4FE8-C0FA-AE89-88E89C96B65F}" dt="2025-04-07T19:00:40.751" v="41" actId="14100"/>
         <pc:sldMkLst>
           <pc:docMk/>
-          <pc:sldMk cId="426516858" sldId="662"/>
+          <pc:sldMk cId="566407149" sldId="307"/>
         </pc:sldMkLst>
+        <pc:spChg chg="add del mod">
+          <ac:chgData name="Mohammed Fasha" userId="S::mohammed.fasha@uop.edu.jo::cc64f42d-a1a6-4f08-b97b-0c37f877119f" providerId="AD" clId="Web-{9DEFE369-4FE8-C0FA-AE89-88E89C96B65F}" dt="2025-04-07T18:57:07.869" v="14"/>
+          <ac:spMkLst>
+            <pc:docMk/>
+            <pc:sldMk cId="566407149" sldId="307"/>
+            <ac:spMk id="4" creationId="{0040CD8B-1B26-3594-C154-7524D9A6B713}"/>
+          </ac:spMkLst>
+        </pc:spChg>
+        <pc:spChg chg="add del mod">
+          <ac:chgData name="Mohammed Fasha" userId="S::mohammed.fasha@uop.edu.jo::cc64f42d-a1a6-4f08-b97b-0c37f877119f" providerId="AD" clId="Web-{9DEFE369-4FE8-C0FA-AE89-88E89C96B65F}" dt="2025-04-07T18:57:38.979" v="23"/>
+          <ac:spMkLst>
+            <pc:docMk/>
+            <pc:sldMk cId="566407149" sldId="307"/>
+            <ac:spMk id="8" creationId="{9DAC81FE-CF6A-619C-BE80-FA4ADE6B1065}"/>
+          </ac:spMkLst>
+        </pc:spChg>
+        <pc:picChg chg="add del mod ord">
+          <ac:chgData name="Mohammed Fasha" userId="S::mohammed.fasha@uop.edu.jo::cc64f42d-a1a6-4f08-b97b-0c37f877119f" providerId="AD" clId="Web-{9DEFE369-4FE8-C0FA-AE89-88E89C96B65F}" dt="2025-04-07T18:57:04.447" v="13"/>
+          <ac:picMkLst>
+            <pc:docMk/>
+            <pc:sldMk cId="566407149" sldId="307"/>
+            <ac:picMk id="5" creationId="{8EDC12A8-6612-7EAD-4B49-73F846796682}"/>
+          </ac:picMkLst>
+        </pc:picChg>
+        <pc:picChg chg="add del mod">
+          <ac:chgData name="Mohammed Fasha" userId="S::mohammed.fasha@uop.edu.jo::cc64f42d-a1a6-4f08-b97b-0c37f877119f" providerId="AD" clId="Web-{9DEFE369-4FE8-C0FA-AE89-88E89C96B65F}" dt="2025-04-07T18:58:07.652" v="33" actId="14100"/>
+          <ac:picMkLst>
+            <pc:docMk/>
+            <pc:sldMk cId="566407149" sldId="307"/>
+            <ac:picMk id="7" creationId="{52F9A5DE-4DA5-02A4-E05C-513BE84CC55D}"/>
+          </ac:picMkLst>
+        </pc:picChg>
+        <pc:picChg chg="mod">
+          <ac:chgData name="Mohammed Fasha" userId="S::mohammed.fasha@uop.edu.jo::cc64f42d-a1a6-4f08-b97b-0c37f877119f" providerId="AD" clId="Web-{9DEFE369-4FE8-C0FA-AE89-88E89C96B65F}" dt="2025-04-07T18:58:16.371" v="37" actId="1076"/>
+          <ac:picMkLst>
+            <pc:docMk/>
+            <pc:sldMk cId="566407149" sldId="307"/>
+            <ac:picMk id="9" creationId="{A97FD6D9-93B3-C33B-BA1A-25EAA798FBF7}"/>
+          </ac:picMkLst>
+        </pc:picChg>
+        <pc:picChg chg="add del mod ord">
+          <ac:chgData name="Mohammed Fasha" userId="S::mohammed.fasha@uop.edu.jo::cc64f42d-a1a6-4f08-b97b-0c37f877119f" providerId="AD" clId="Web-{9DEFE369-4FE8-C0FA-AE89-88E89C96B65F}" dt="2025-04-07T18:57:37.432" v="22"/>
+          <ac:picMkLst>
+            <pc:docMk/>
+            <pc:sldMk cId="566407149" sldId="307"/>
+            <ac:picMk id="10" creationId="{0AB83646-5D5F-02CD-6927-39E6A68A00E2}"/>
+          </ac:picMkLst>
+        </pc:picChg>
+        <pc:picChg chg="mod">
+          <ac:chgData name="Mohammed Fasha" userId="S::mohammed.fasha@uop.edu.jo::cc64f42d-a1a6-4f08-b97b-0c37f877119f" providerId="AD" clId="Web-{9DEFE369-4FE8-C0FA-AE89-88E89C96B65F}" dt="2025-04-07T19:00:40.751" v="41" actId="14100"/>
+          <ac:picMkLst>
+            <pc:docMk/>
+            <pc:sldMk cId="566407149" sldId="307"/>
+            <ac:picMk id="11" creationId="{0402BC08-439D-17A5-DBFC-F0D1CA4DBB8D}"/>
+          </ac:picMkLst>
+        </pc:picChg>
       </pc:sldChg>
-      <pc:sldChg chg="modSp add del mod">
-        <pc:chgData name="Mohammed Fasha" userId="cc64f42d-a1a6-4f08-b97b-0c37f877119f" providerId="ADAL" clId="{BECD4A7F-C1AF-4585-8C31-FE7D4FE3ED16}" dt="2025-01-05T16:34:59.233" v="1926" actId="20577"/>
+      <pc:sldChg chg="modSp">
+        <pc:chgData name="Mohammed Fasha" userId="S::mohammed.fasha@uop.edu.jo::cc64f42d-a1a6-4f08-b97b-0c37f877119f" providerId="AD" clId="Web-{9DEFE369-4FE8-C0FA-AE89-88E89C96B65F}" dt="2025-04-07T19:00:05.250" v="39" actId="1076"/>
         <pc:sldMkLst>
           <pc:docMk/>
-          <pc:sldMk cId="691538069" sldId="662"/>
+          <pc:sldMk cId="2501734364" sldId="308"/>
         </pc:sldMkLst>
+        <pc:picChg chg="mod">
+          <ac:chgData name="Mohammed Fasha" userId="S::mohammed.fasha@uop.edu.jo::cc64f42d-a1a6-4f08-b97b-0c37f877119f" providerId="AD" clId="Web-{9DEFE369-4FE8-C0FA-AE89-88E89C96B65F}" dt="2025-04-07T19:00:02.374" v="38" actId="14100"/>
+          <ac:picMkLst>
+            <pc:docMk/>
+            <pc:sldMk cId="2501734364" sldId="308"/>
+            <ac:picMk id="9" creationId="{F079DF9D-D91F-8F19-E096-CEB55AE60F5E}"/>
+          </ac:picMkLst>
+        </pc:picChg>
+        <pc:picChg chg="mod">
+          <ac:chgData name="Mohammed Fasha" userId="S::mohammed.fasha@uop.edu.jo::cc64f42d-a1a6-4f08-b97b-0c37f877119f" providerId="AD" clId="Web-{9DEFE369-4FE8-C0FA-AE89-88E89C96B65F}" dt="2025-04-07T19:00:05.250" v="39" actId="1076"/>
+          <ac:picMkLst>
+            <pc:docMk/>
+            <pc:sldMk cId="2501734364" sldId="308"/>
+            <ac:picMk id="11" creationId="{A62FBA81-FB50-9A3F-4551-5D02D03696AD}"/>
+          </ac:picMkLst>
+        </pc:picChg>
       </pc:sldChg>
-      <pc:sldChg chg="del">
-        <pc:chgData name="Mohammed Fasha" userId="cc64f42d-a1a6-4f08-b97b-0c37f877119f" providerId="ADAL" clId="{BECD4A7F-C1AF-4585-8C31-FE7D4FE3ED16}" dt="2025-01-05T14:42:38.675" v="989" actId="2696"/>
-        <pc:sldMkLst>
-          <pc:docMk/>
-          <pc:sldMk cId="895445062" sldId="663"/>
-        </pc:sldMkLst>
-      </pc:sldChg>
-      <pc:sldChg chg="add del">
-        <pc:chgData name="Mohammed Fasha" userId="cc64f42d-a1a6-4f08-b97b-0c37f877119f" providerId="ADAL" clId="{BECD4A7F-C1AF-4585-8C31-FE7D4FE3ED16}" dt="2025-01-05T14:43:16.100" v="993" actId="2696"/>
-        <pc:sldMkLst>
-          <pc:docMk/>
-          <pc:sldMk cId="3980180774" sldId="663"/>
-        </pc:sldMkLst>
-      </pc:sldChg>
-      <pc:sldChg chg="add del">
-        <pc:chgData name="Mohammed Fasha" userId="cc64f42d-a1a6-4f08-b97b-0c37f877119f" providerId="ADAL" clId="{BECD4A7F-C1AF-4585-8C31-FE7D4FE3ED16}" dt="2025-01-05T14:43:16.100" v="993" actId="2696"/>
-        <pc:sldMkLst>
-          <pc:docMk/>
-          <pc:sldMk cId="1728680596" sldId="664"/>
-        </pc:sldMkLst>
-      </pc:sldChg>
-      <pc:sldChg chg="del">
-        <pc:chgData name="Mohammed Fasha" userId="cc64f42d-a1a6-4f08-b97b-0c37f877119f" providerId="ADAL" clId="{BECD4A7F-C1AF-4585-8C31-FE7D4FE3ED16}" dt="2025-01-05T14:42:38.675" v="989" actId="2696"/>
-        <pc:sldMkLst>
-          <pc:docMk/>
-          <pc:sldMk cId="3900588277" sldId="664"/>
-        </pc:sldMkLst>
-      </pc:sldChg>
-      <pc:sldChg chg="del">
-        <pc:chgData name="Mohammed Fasha" userId="cc64f42d-a1a6-4f08-b97b-0c37f877119f" providerId="ADAL" clId="{BECD4A7F-C1AF-4585-8C31-FE7D4FE3ED16}" dt="2025-01-05T14:42:38.675" v="989" actId="2696"/>
-        <pc:sldMkLst>
-          <pc:docMk/>
-          <pc:sldMk cId="123002105" sldId="665"/>
-        </pc:sldMkLst>
-      </pc:sldChg>
-      <pc:sldChg chg="modSp add del mod">
-        <pc:chgData name="Mohammed Fasha" userId="cc64f42d-a1a6-4f08-b97b-0c37f877119f" providerId="ADAL" clId="{BECD4A7F-C1AF-4585-8C31-FE7D4FE3ED16}" dt="2025-01-05T15:05:12.729" v="1226" actId="21"/>
-        <pc:sldMkLst>
-          <pc:docMk/>
-          <pc:sldMk cId="148099094" sldId="665"/>
-        </pc:sldMkLst>
-      </pc:sldChg>
-      <pc:sldChg chg="del">
-        <pc:chgData name="Mohammed Fasha" userId="cc64f42d-a1a6-4f08-b97b-0c37f877119f" providerId="ADAL" clId="{BECD4A7F-C1AF-4585-8C31-FE7D4FE3ED16}" dt="2025-01-05T14:42:38.675" v="989" actId="2696"/>
-        <pc:sldMkLst>
-          <pc:docMk/>
-          <pc:sldMk cId="659863378" sldId="676"/>
-        </pc:sldMkLst>
-      </pc:sldChg>
-      <pc:sldChg chg="modSp add del mod">
-        <pc:chgData name="Mohammed Fasha" userId="cc64f42d-a1a6-4f08-b97b-0c37f877119f" providerId="ADAL" clId="{BECD4A7F-C1AF-4585-8C31-FE7D4FE3ED16}" dt="2025-01-05T14:55:27.595" v="1130" actId="255"/>
-        <pc:sldMkLst>
-          <pc:docMk/>
-          <pc:sldMk cId="1577854815" sldId="676"/>
-        </pc:sldMkLst>
-      </pc:sldChg>
-      <pc:sldChg chg="modSp add del mod">
-        <pc:chgData name="Mohammed Fasha" userId="cc64f42d-a1a6-4f08-b97b-0c37f877119f" providerId="ADAL" clId="{BECD4A7F-C1AF-4585-8C31-FE7D4FE3ED16}" dt="2025-01-05T14:55:43.754" v="1132" actId="1076"/>
-        <pc:sldMkLst>
-          <pc:docMk/>
-          <pc:sldMk cId="139882925" sldId="677"/>
-        </pc:sldMkLst>
-      </pc:sldChg>
-      <pc:sldChg chg="del">
-        <pc:chgData name="Mohammed Fasha" userId="cc64f42d-a1a6-4f08-b97b-0c37f877119f" providerId="ADAL" clId="{BECD4A7F-C1AF-4585-8C31-FE7D4FE3ED16}" dt="2025-01-05T14:42:38.675" v="989" actId="2696"/>
-        <pc:sldMkLst>
-          <pc:docMk/>
-          <pc:sldMk cId="2736863534" sldId="677"/>
-        </pc:sldMkLst>
-      </pc:sldChg>
-      <pc:sldChg chg="add del">
-        <pc:chgData name="Mohammed Fasha" userId="cc64f42d-a1a6-4f08-b97b-0c37f877119f" providerId="ADAL" clId="{BECD4A7F-C1AF-4585-8C31-FE7D4FE3ED16}" dt="2025-01-05T14:43:16.100" v="993" actId="2696"/>
-        <pc:sldMkLst>
-          <pc:docMk/>
-          <pc:sldMk cId="4146654093" sldId="678"/>
-        </pc:sldMkLst>
-      </pc:sldChg>
-      <pc:sldChg chg="del">
-        <pc:chgData name="Mohammed Fasha" userId="cc64f42d-a1a6-4f08-b97b-0c37f877119f" providerId="ADAL" clId="{BECD4A7F-C1AF-4585-8C31-FE7D4FE3ED16}" dt="2025-01-05T14:42:38.675" v="989" actId="2696"/>
-        <pc:sldMkLst>
-          <pc:docMk/>
-          <pc:sldMk cId="4228312762" sldId="678"/>
-        </pc:sldMkLst>
-      </pc:sldChg>
-      <pc:sldChg chg="del">
-        <pc:chgData name="Mohammed Fasha" userId="cc64f42d-a1a6-4f08-b97b-0c37f877119f" providerId="ADAL" clId="{BECD4A7F-C1AF-4585-8C31-FE7D4FE3ED16}" dt="2025-01-05T14:42:38.675" v="989" actId="2696"/>
-        <pc:sldMkLst>
-          <pc:docMk/>
-          <pc:sldMk cId="581717462" sldId="679"/>
-        </pc:sldMkLst>
-      </pc:sldChg>
-      <pc:sldChg chg="addSp delSp modSp add del mod chgLayout">
-        <pc:chgData name="Mohammed Fasha" userId="cc64f42d-a1a6-4f08-b97b-0c37f877119f" providerId="ADAL" clId="{BECD4A7F-C1AF-4585-8C31-FE7D4FE3ED16}" dt="2025-01-05T16:36:16.605" v="1945" actId="1076"/>
-        <pc:sldMkLst>
-          <pc:docMk/>
-          <pc:sldMk cId="3454522070" sldId="679"/>
-        </pc:sldMkLst>
-      </pc:sldChg>
-      <pc:sldChg chg="add del">
-        <pc:chgData name="Mohammed Fasha" userId="cc64f42d-a1a6-4f08-b97b-0c37f877119f" providerId="ADAL" clId="{BECD4A7F-C1AF-4585-8C31-FE7D4FE3ED16}" dt="2025-01-05T14:43:16.100" v="993" actId="2696"/>
-        <pc:sldMkLst>
-          <pc:docMk/>
-          <pc:sldMk cId="2856814121" sldId="681"/>
-        </pc:sldMkLst>
-      </pc:sldChg>
-      <pc:sldChg chg="del">
-        <pc:chgData name="Mohammed Fasha" userId="cc64f42d-a1a6-4f08-b97b-0c37f877119f" providerId="ADAL" clId="{BECD4A7F-C1AF-4585-8C31-FE7D4FE3ED16}" dt="2025-01-05T14:42:38.675" v="989" actId="2696"/>
-        <pc:sldMkLst>
-          <pc:docMk/>
-          <pc:sldMk cId="3083966018" sldId="681"/>
-        </pc:sldMkLst>
-      </pc:sldChg>
-      <pc:sldChg chg="modSp mod">
-        <pc:chgData name="Mohammed Fasha" userId="cc64f42d-a1a6-4f08-b97b-0c37f877119f" providerId="ADAL" clId="{BECD4A7F-C1AF-4585-8C31-FE7D4FE3ED16}" dt="2025-01-05T14:42:50.596" v="990" actId="14100"/>
-        <pc:sldMkLst>
-          <pc:docMk/>
-          <pc:sldMk cId="1697141369" sldId="695"/>
-        </pc:sldMkLst>
-      </pc:sldChg>
-      <pc:sldChg chg="addSp delSp modSp add del mod">
-        <pc:chgData name="Mohammed Fasha" userId="cc64f42d-a1a6-4f08-b97b-0c37f877119f" providerId="ADAL" clId="{BECD4A7F-C1AF-4585-8C31-FE7D4FE3ED16}" dt="2025-01-05T14:54:31.375" v="1125" actId="14100"/>
-        <pc:sldMkLst>
-          <pc:docMk/>
-          <pc:sldMk cId="265576630" sldId="698"/>
-        </pc:sldMkLst>
-      </pc:sldChg>
-      <pc:sldChg chg="del">
-        <pc:chgData name="Mohammed Fasha" userId="cc64f42d-a1a6-4f08-b97b-0c37f877119f" providerId="ADAL" clId="{BECD4A7F-C1AF-4585-8C31-FE7D4FE3ED16}" dt="2025-01-05T14:42:38.675" v="989" actId="2696"/>
-        <pc:sldMkLst>
-          <pc:docMk/>
-          <pc:sldMk cId="991725834" sldId="698"/>
-        </pc:sldMkLst>
-      </pc:sldChg>
-      <pc:sldChg chg="del">
-        <pc:chgData name="Mohammed Fasha" userId="cc64f42d-a1a6-4f08-b97b-0c37f877119f" providerId="ADAL" clId="{BECD4A7F-C1AF-4585-8C31-FE7D4FE3ED16}" dt="2025-01-05T14:42:38.675" v="989" actId="2696"/>
-        <pc:sldMkLst>
-          <pc:docMk/>
-          <pc:sldMk cId="3109561867" sldId="700"/>
-        </pc:sldMkLst>
-      </pc:sldChg>
-      <pc:sldChg chg="addSp delSp modSp add del mod">
-        <pc:chgData name="Mohammed Fasha" userId="cc64f42d-a1a6-4f08-b97b-0c37f877119f" providerId="ADAL" clId="{BECD4A7F-C1AF-4585-8C31-FE7D4FE3ED16}" dt="2025-01-05T16:00:05.564" v="1529" actId="20577"/>
-        <pc:sldMkLst>
-          <pc:docMk/>
-          <pc:sldMk cId="4247717824" sldId="700"/>
-        </pc:sldMkLst>
-      </pc:sldChg>
-      <pc:sldChg chg="addSp delSp modSp add mod">
-        <pc:chgData name="Mohammed Fasha" userId="cc64f42d-a1a6-4f08-b97b-0c37f877119f" providerId="ADAL" clId="{BECD4A7F-C1AF-4585-8C31-FE7D4FE3ED16}" dt="2025-01-05T14:53:29.185" v="1101" actId="21"/>
-        <pc:sldMkLst>
-          <pc:docMk/>
-          <pc:sldMk cId="67871309" sldId="709"/>
-        </pc:sldMkLst>
-      </pc:sldChg>
-      <pc:sldChg chg="modSp add mod">
-        <pc:chgData name="Mohammed Fasha" userId="cc64f42d-a1a6-4f08-b97b-0c37f877119f" providerId="ADAL" clId="{BECD4A7F-C1AF-4585-8C31-FE7D4FE3ED16}" dt="2025-01-05T15:31:09.113" v="1385" actId="6549"/>
-        <pc:sldMkLst>
-          <pc:docMk/>
-          <pc:sldMk cId="4114896152" sldId="710"/>
-        </pc:sldMkLst>
-      </pc:sldChg>
-      <pc:sldChg chg="addSp modSp add mod">
-        <pc:chgData name="Mohammed Fasha" userId="cc64f42d-a1a6-4f08-b97b-0c37f877119f" providerId="ADAL" clId="{BECD4A7F-C1AF-4585-8C31-FE7D4FE3ED16}" dt="2025-01-05T15:27:36.027" v="1348" actId="20577"/>
-        <pc:sldMkLst>
-          <pc:docMk/>
-          <pc:sldMk cId="3794385322" sldId="711"/>
-        </pc:sldMkLst>
-      </pc:sldChg>
-      <pc:sldChg chg="add del">
-        <pc:chgData name="Mohammed Fasha" userId="cc64f42d-a1a6-4f08-b97b-0c37f877119f" providerId="ADAL" clId="{BECD4A7F-C1AF-4585-8C31-FE7D4FE3ED16}" dt="2025-01-05T14:57:43.613" v="1146" actId="2696"/>
-        <pc:sldMkLst>
-          <pc:docMk/>
-          <pc:sldMk cId="501127302" sldId="712"/>
-        </pc:sldMkLst>
-      </pc:sldChg>
-      <pc:sldChg chg="modSp add mod">
-        <pc:chgData name="Mohammed Fasha" userId="cc64f42d-a1a6-4f08-b97b-0c37f877119f" providerId="ADAL" clId="{BECD4A7F-C1AF-4585-8C31-FE7D4FE3ED16}" dt="2025-01-05T15:32:23.870" v="1388"/>
-        <pc:sldMkLst>
-          <pc:docMk/>
-          <pc:sldMk cId="3701206727" sldId="712"/>
-        </pc:sldMkLst>
-      </pc:sldChg>
-      <pc:sldChg chg="addSp modSp add mod">
-        <pc:chgData name="Mohammed Fasha" userId="cc64f42d-a1a6-4f08-b97b-0c37f877119f" providerId="ADAL" clId="{BECD4A7F-C1AF-4585-8C31-FE7D4FE3ED16}" dt="2025-01-05T16:06:36.028" v="1538" actId="1076"/>
-        <pc:sldMkLst>
-          <pc:docMk/>
-          <pc:sldMk cId="1499972066" sldId="713"/>
-        </pc:sldMkLst>
-      </pc:sldChg>
-      <pc:sldChg chg="addSp delSp modSp add mod">
-        <pc:chgData name="Mohammed Fasha" userId="cc64f42d-a1a6-4f08-b97b-0c37f877119f" providerId="ADAL" clId="{BECD4A7F-C1AF-4585-8C31-FE7D4FE3ED16}" dt="2025-01-05T16:19:08.436" v="1705" actId="1036"/>
-        <pc:sldMkLst>
-          <pc:docMk/>
-          <pc:sldMk cId="1270641495" sldId="714"/>
-        </pc:sldMkLst>
-      </pc:sldChg>
-      <pc:sldChg chg="addSp modSp new mod">
-        <pc:chgData name="Mohammed Fasha" userId="cc64f42d-a1a6-4f08-b97b-0c37f877119f" providerId="ADAL" clId="{BECD4A7F-C1AF-4585-8C31-FE7D4FE3ED16}" dt="2025-01-05T16:23:44.632" v="1736" actId="12"/>
-        <pc:sldMkLst>
-          <pc:docMk/>
-          <pc:sldMk cId="1096386322" sldId="715"/>
-        </pc:sldMkLst>
-      </pc:sldChg>
-      <pc:sldChg chg="modSp new mod">
-        <pc:chgData name="Mohammed Fasha" userId="cc64f42d-a1a6-4f08-b97b-0c37f877119f" providerId="ADAL" clId="{BECD4A7F-C1AF-4585-8C31-FE7D4FE3ED16}" dt="2025-01-05T16:34:02.360" v="1902" actId="27636"/>
-        <pc:sldMkLst>
-          <pc:docMk/>
-          <pc:sldMk cId="1784058309" sldId="716"/>
-        </pc:sldMkLst>
-      </pc:sldChg>
-      <pc:sldChg chg="modSp add mod ord">
-        <pc:chgData name="Mohammed Fasha" userId="cc64f42d-a1a6-4f08-b97b-0c37f877119f" providerId="ADAL" clId="{BECD4A7F-C1AF-4585-8C31-FE7D4FE3ED16}" dt="2025-01-05T16:27:20.520" v="1803"/>
-        <pc:sldMkLst>
-          <pc:docMk/>
-          <pc:sldMk cId="3139017106" sldId="717"/>
-        </pc:sldMkLst>
-      </pc:sldChg>
-      <pc:sldChg chg="addSp delSp modSp new mod">
-        <pc:chgData name="Mohammed Fasha" userId="cc64f42d-a1a6-4f08-b97b-0c37f877119f" providerId="ADAL" clId="{BECD4A7F-C1AF-4585-8C31-FE7D4FE3ED16}" dt="2025-01-05T16:32:45.446" v="1897" actId="20577"/>
-        <pc:sldMkLst>
-          <pc:docMk/>
-          <pc:sldMk cId="3043812923" sldId="718"/>
-        </pc:sldMkLst>
-      </pc:sldChg>
-    </pc:docChg>
-  </pc:docChgLst>
-  <pc:docChgLst>
-    <pc:chgData name="Mohammed Fasha" userId="cc64f42d-a1a6-4f08-b97b-0c37f877119f" providerId="ADAL" clId="{2E5FBF59-3168-4932-9518-582502FE1AD5}"/>
-    <pc:docChg chg="undo custSel delSld modSld">
-      <pc:chgData name="Mohammed Fasha" userId="cc64f42d-a1a6-4f08-b97b-0c37f877119f" providerId="ADAL" clId="{2E5FBF59-3168-4932-9518-582502FE1AD5}" dt="2024-12-24T08:08:19.987" v="550" actId="20577"/>
-      <pc:docMkLst>
-        <pc:docMk/>
-      </pc:docMkLst>
-      <pc:sldChg chg="delSp">
-        <pc:chgData name="Mohammed Fasha" userId="cc64f42d-a1a6-4f08-b97b-0c37f877119f" providerId="ADAL" clId="{2E5FBF59-3168-4932-9518-582502FE1AD5}" dt="2024-11-19T07:40:47.121" v="208" actId="478"/>
-        <pc:sldMkLst>
-          <pc:docMk/>
-          <pc:sldMk cId="391491219" sldId="428"/>
-        </pc:sldMkLst>
-      </pc:sldChg>
-      <pc:sldChg chg="modSp">
-        <pc:chgData name="Mohammed Fasha" userId="cc64f42d-a1a6-4f08-b97b-0c37f877119f" providerId="ADAL" clId="{2E5FBF59-3168-4932-9518-582502FE1AD5}" dt="2024-12-03T07:43:58.007" v="456" actId="1076"/>
-        <pc:sldMkLst>
-          <pc:docMk/>
-          <pc:sldMk cId="3339445507" sldId="430"/>
-        </pc:sldMkLst>
-      </pc:sldChg>
-      <pc:sldChg chg="modSp">
-        <pc:chgData name="Mohammed Fasha" userId="cc64f42d-a1a6-4f08-b97b-0c37f877119f" providerId="ADAL" clId="{2E5FBF59-3168-4932-9518-582502FE1AD5}" dt="2024-12-03T07:45:08.136" v="474" actId="20577"/>
-        <pc:sldMkLst>
-          <pc:docMk/>
-          <pc:sldMk cId="3389046835" sldId="431"/>
-        </pc:sldMkLst>
-      </pc:sldChg>
-      <pc:sldChg chg="modSp">
-        <pc:chgData name="Mohammed Fasha" userId="cc64f42d-a1a6-4f08-b97b-0c37f877119f" providerId="ADAL" clId="{2E5FBF59-3168-4932-9518-582502FE1AD5}" dt="2024-11-10T06:33:09.727" v="37" actId="207"/>
-        <pc:sldMkLst>
-          <pc:docMk/>
-          <pc:sldMk cId="2726994946" sldId="479"/>
-        </pc:sldMkLst>
-      </pc:sldChg>
-      <pc:sldChg chg="modSp">
-        <pc:chgData name="Mohammed Fasha" userId="cc64f42d-a1a6-4f08-b97b-0c37f877119f" providerId="ADAL" clId="{2E5FBF59-3168-4932-9518-582502FE1AD5}" dt="2024-11-19T07:44:28.766" v="211" actId="20577"/>
-        <pc:sldMkLst>
-          <pc:docMk/>
-          <pc:sldMk cId="2297456757" sldId="483"/>
-        </pc:sldMkLst>
-      </pc:sldChg>
-      <pc:sldChg chg="modSp">
-        <pc:chgData name="Mohammed Fasha" userId="cc64f42d-a1a6-4f08-b97b-0c37f877119f" providerId="ADAL" clId="{2E5FBF59-3168-4932-9518-582502FE1AD5}" dt="2024-11-10T06:45:09.392" v="40" actId="20577"/>
-        <pc:sldMkLst>
-          <pc:docMk/>
-          <pc:sldMk cId="3474268344" sldId="596"/>
-        </pc:sldMkLst>
-      </pc:sldChg>
-      <pc:sldChg chg="modSp">
-        <pc:chgData name="Mohammed Fasha" userId="cc64f42d-a1a6-4f08-b97b-0c37f877119f" providerId="ADAL" clId="{2E5FBF59-3168-4932-9518-582502FE1AD5}" dt="2024-12-03T07:47:21.561" v="476" actId="6549"/>
-        <pc:sldMkLst>
-          <pc:docMk/>
-          <pc:sldMk cId="399592497" sldId="613"/>
-        </pc:sldMkLst>
-      </pc:sldChg>
-      <pc:sldChg chg="modSp">
-        <pc:chgData name="Mohammed Fasha" userId="cc64f42d-a1a6-4f08-b97b-0c37f877119f" providerId="ADAL" clId="{2E5FBF59-3168-4932-9518-582502FE1AD5}" dt="2024-12-03T07:49:02.980" v="478" actId="207"/>
-        <pc:sldMkLst>
-          <pc:docMk/>
-          <pc:sldMk cId="3329135496" sldId="617"/>
-        </pc:sldMkLst>
-      </pc:sldChg>
-      <pc:sldChg chg="modSp">
-        <pc:chgData name="Mohammed Fasha" userId="cc64f42d-a1a6-4f08-b97b-0c37f877119f" providerId="ADAL" clId="{2E5FBF59-3168-4932-9518-582502FE1AD5}" dt="2024-12-24T08:05:16.608" v="482" actId="403"/>
-        <pc:sldMkLst>
-          <pc:docMk/>
-          <pc:sldMk cId="2990045589" sldId="659"/>
-        </pc:sldMkLst>
-      </pc:sldChg>
-      <pc:sldChg chg="modSp">
-        <pc:chgData name="Mohammed Fasha" userId="cc64f42d-a1a6-4f08-b97b-0c37f877119f" providerId="ADAL" clId="{2E5FBF59-3168-4932-9518-582502FE1AD5}" dt="2024-12-24T08:08:19.987" v="550" actId="20577"/>
-        <pc:sldMkLst>
-          <pc:docMk/>
-          <pc:sldMk cId="2680231355" sldId="669"/>
-        </pc:sldMkLst>
-      </pc:sldChg>
-      <pc:sldChg chg="addSp modSp">
-        <pc:chgData name="Mohammed Fasha" userId="cc64f42d-a1a6-4f08-b97b-0c37f877119f" providerId="ADAL" clId="{2E5FBF59-3168-4932-9518-582502FE1AD5}" dt="2024-12-24T08:05:52.910" v="488" actId="1076"/>
-        <pc:sldMkLst>
-          <pc:docMk/>
-          <pc:sldMk cId="916102856" sldId="685"/>
-        </pc:sldMkLst>
-      </pc:sldChg>
-      <pc:sldChg chg="modSp">
-        <pc:chgData name="Mohammed Fasha" userId="cc64f42d-a1a6-4f08-b97b-0c37f877119f" providerId="ADAL" clId="{2E5FBF59-3168-4932-9518-582502FE1AD5}" dt="2024-11-19T07:03:29.557" v="206" actId="207"/>
-        <pc:sldMkLst>
-          <pc:docMk/>
-          <pc:sldMk cId="32004852" sldId="708"/>
-        </pc:sldMkLst>
-      </pc:sldChg>
-    </pc:docChg>
-  </pc:docChgLst>
-  <pc:docChgLst>
-    <pc:chgData name="Mohammed Fasha" userId="cc64f42d-a1a6-4f08-b97b-0c37f877119f" providerId="ADAL" clId="{6804A8E6-8D7F-46E3-B091-66A8F6B926BF}"/>
-    <pc:docChg chg="custSel modMainMaster">
-      <pc:chgData name="Mohammed Fasha" userId="cc64f42d-a1a6-4f08-b97b-0c37f877119f" providerId="ADAL" clId="{6804A8E6-8D7F-46E3-B091-66A8F6B926BF}" dt="2024-11-09T05:15:35.019" v="2" actId="1076"/>
-      <pc:docMkLst>
-        <pc:docMk/>
-      </pc:docMkLst>
-      <pc:sldMasterChg chg="delSp mod modSldLayout">
-        <pc:chgData name="Mohammed Fasha" userId="cc64f42d-a1a6-4f08-b97b-0c37f877119f" providerId="ADAL" clId="{6804A8E6-8D7F-46E3-B091-66A8F6B926BF}" dt="2024-11-09T05:15:35.019" v="2" actId="1076"/>
-        <pc:sldMasterMkLst>
-          <pc:docMk/>
-          <pc:sldMasterMk cId="742811419" sldId="2147483648"/>
-        </pc:sldMasterMkLst>
-        <pc:sldLayoutChg chg="addSp modSp mod">
-          <pc:chgData name="Mohammed Fasha" userId="cc64f42d-a1a6-4f08-b97b-0c37f877119f" providerId="ADAL" clId="{6804A8E6-8D7F-46E3-B091-66A8F6B926BF}" dt="2024-11-09T05:15:35.019" v="2" actId="1076"/>
-          <pc:sldLayoutMkLst>
-            <pc:docMk/>
-            <pc:sldMasterMk cId="742811419" sldId="2147483648"/>
-            <pc:sldLayoutMk cId="4063788262" sldId="2147483649"/>
-          </pc:sldLayoutMkLst>
-        </pc:sldLayoutChg>
-      </pc:sldMasterChg>
     </pc:docChg>
   </pc:docChgLst>
 </pc:chgInfo>
@@ -6574,7 +6775,7 @@
           <a:p>
             <a:fld id="{13BA03A4-B9F1-404C-8A74-B1AFD6480953}" type="datetimeFigureOut">
               <a:rPr lang="en-US" smtClean="0"/>
-              <a:t>4/6/2025</a:t>
+              <a:t>4/7/2025</a:t>
             </a:fld>
             <a:endParaRPr lang="en-US"/>
           </a:p>
@@ -6988,7 +7189,7 @@
           <a:p>
             <a:fld id="{0DB78E95-DE77-44D3-BDB9-E242948FB112}" type="datetimeFigureOut">
               <a:rPr lang="en-US" smtClean="0"/>
-              <a:t>4/6/2025</a:t>
+              <a:t>4/7/2025</a:t>
             </a:fld>
             <a:endParaRPr lang="en-US"/>
           </a:p>
@@ -7216,7 +7417,7 @@
           <a:p>
             <a:fld id="{0DB78E95-DE77-44D3-BDB9-E242948FB112}" type="datetimeFigureOut">
               <a:rPr lang="en-US" smtClean="0"/>
-              <a:t>4/6/2025</a:t>
+              <a:t>4/7/2025</a:t>
             </a:fld>
             <a:endParaRPr lang="en-US"/>
           </a:p>
@@ -7424,7 +7625,7 @@
           <a:p>
             <a:fld id="{0DB78E95-DE77-44D3-BDB9-E242948FB112}" type="datetimeFigureOut">
               <a:rPr lang="en-US" smtClean="0"/>
-              <a:t>4/6/2025</a:t>
+              <a:t>4/7/2025</a:t>
             </a:fld>
             <a:endParaRPr lang="en-US"/>
           </a:p>
@@ -8151,7 +8352,7 @@
           <a:p>
             <a:fld id="{0DB78E95-DE77-44D3-BDB9-E242948FB112}" type="datetimeFigureOut">
               <a:rPr lang="en-US" smtClean="0"/>
-              <a:t>4/6/2025</a:t>
+              <a:t>4/7/2025</a:t>
             </a:fld>
             <a:endParaRPr lang="en-US"/>
           </a:p>
@@ -8530,7 +8731,7 @@
           <a:p>
             <a:fld id="{0DB78E95-DE77-44D3-BDB9-E242948FB112}" type="datetimeFigureOut">
               <a:rPr lang="en-US" smtClean="0"/>
-              <a:t>4/6/2025</a:t>
+              <a:t>4/7/2025</a:t>
             </a:fld>
             <a:endParaRPr lang="en-US"/>
           </a:p>
@@ -8942,7 +9143,7 @@
           <a:p>
             <a:fld id="{0DB78E95-DE77-44D3-BDB9-E242948FB112}" type="datetimeFigureOut">
               <a:rPr lang="en-US" smtClean="0"/>
-              <a:t>4/6/2025</a:t>
+              <a:t>4/7/2025</a:t>
             </a:fld>
             <a:endParaRPr lang="en-US"/>
           </a:p>
@@ -9083,7 +9284,7 @@
           <a:p>
             <a:fld id="{0DB78E95-DE77-44D3-BDB9-E242948FB112}" type="datetimeFigureOut">
               <a:rPr lang="en-US" smtClean="0"/>
-              <a:t>4/6/2025</a:t>
+              <a:t>4/7/2025</a:t>
             </a:fld>
             <a:endParaRPr lang="en-US"/>
           </a:p>
@@ -9196,7 +9397,7 @@
           <a:p>
             <a:fld id="{0DB78E95-DE77-44D3-BDB9-E242948FB112}" type="datetimeFigureOut">
               <a:rPr lang="en-US" smtClean="0"/>
-              <a:t>4/6/2025</a:t>
+              <a:t>4/7/2025</a:t>
             </a:fld>
             <a:endParaRPr lang="en-US"/>
           </a:p>
@@ -9507,7 +9708,7 @@
           <a:p>
             <a:fld id="{0DB78E95-DE77-44D3-BDB9-E242948FB112}" type="datetimeFigureOut">
               <a:rPr lang="en-US" smtClean="0"/>
-              <a:t>4/6/2025</a:t>
+              <a:t>4/7/2025</a:t>
             </a:fld>
             <a:endParaRPr lang="en-US"/>
           </a:p>
@@ -9795,7 +9996,7 @@
           <a:p>
             <a:fld id="{0DB78E95-DE77-44D3-BDB9-E242948FB112}" type="datetimeFigureOut">
               <a:rPr lang="en-US" smtClean="0"/>
-              <a:t>4/6/2025</a:t>
+              <a:t>4/7/2025</a:t>
             </a:fld>
             <a:endParaRPr lang="en-US"/>
           </a:p>
@@ -10036,7 +10237,7 @@
           <a:p>
             <a:fld id="{0DB78E95-DE77-44D3-BDB9-E242948FB112}" type="datetimeFigureOut">
               <a:rPr lang="en-US" smtClean="0"/>
-              <a:t>4/6/2025</a:t>
+              <a:t>4/7/2025</a:t>
             </a:fld>
             <a:endParaRPr lang="en-US"/>
           </a:p>
@@ -11677,7 +11878,7 @@
         </p:blipFill>
         <p:spPr>
           <a:xfrm>
-            <a:off x="10431000" y="6231240"/>
+            <a:off x="10525407" y="6231240"/>
             <a:ext cx="1114200" cy="190080"/>
           </a:xfrm>
           <a:prstGeom prst="rect">
@@ -12790,7 +12991,7 @@
         </p:blipFill>
         <p:spPr>
           <a:xfrm>
-            <a:off x="10431000" y="6231240"/>
+            <a:off x="10525407" y="6231240"/>
             <a:ext cx="1114200" cy="190080"/>
           </a:xfrm>
           <a:prstGeom prst="rect">
@@ -13624,7 +13825,7 @@
         </p:blipFill>
         <p:spPr>
           <a:xfrm>
-            <a:off x="10431000" y="6231240"/>
+            <a:off x="10525407" y="6231240"/>
             <a:ext cx="1114200" cy="190080"/>
           </a:xfrm>
           <a:prstGeom prst="rect">
@@ -15474,7 +15675,7 @@
         </p:blipFill>
         <p:spPr>
           <a:xfrm>
-            <a:off x="10431000" y="6231240"/>
+            <a:off x="10525407" y="6231240"/>
             <a:ext cx="1114200" cy="190080"/>
           </a:xfrm>
           <a:prstGeom prst="rect">
@@ -18431,7 +18632,7 @@
         </p:blipFill>
         <p:spPr>
           <a:xfrm>
-            <a:off x="10431000" y="6231240"/>
+            <a:off x="10525407" y="6231240"/>
             <a:ext cx="1114200" cy="190080"/>
           </a:xfrm>
           <a:prstGeom prst="rect">
@@ -24799,7 +25000,7 @@
         </p:blipFill>
         <p:spPr>
           <a:xfrm>
-            <a:off x="10431000" y="6231240"/>
+            <a:off x="10525408" y="6231240"/>
             <a:ext cx="1114200" cy="190080"/>
           </a:xfrm>
           <a:prstGeom prst="rect">
@@ -25792,7 +25993,7 @@
         </p:blipFill>
         <p:spPr>
           <a:xfrm>
-            <a:off x="10431000" y="6231240"/>
+            <a:off x="10518664" y="6231240"/>
             <a:ext cx="1114200" cy="190080"/>
           </a:xfrm>
           <a:prstGeom prst="rect">
@@ -26225,8 +26426,8 @@
         </p:blipFill>
         <p:spPr>
           <a:xfrm>
-            <a:off x="838199" y="1808318"/>
-            <a:ext cx="5147847" cy="2343735"/>
+            <a:off x="838199" y="1646478"/>
+            <a:ext cx="5511988" cy="2505575"/>
           </a:xfrm>
         </p:spPr>
       </p:pic>
@@ -26252,7 +26453,7 @@
         </p:blipFill>
         <p:spPr>
           <a:xfrm>
-            <a:off x="838200" y="4363669"/>
+            <a:off x="838200" y="4444589"/>
             <a:ext cx="8376564" cy="2086814"/>
           </a:xfrm>
           <a:prstGeom prst="rect">
@@ -27985,7 +28186,7 @@
         </p:blipFill>
         <p:spPr>
           <a:xfrm>
-            <a:off x="838200" y="1774332"/>
+            <a:off x="898890" y="1774332"/>
             <a:ext cx="5492669" cy="2281881"/>
           </a:xfrm>
         </p:spPr>
@@ -28012,8 +28213,8 @@
         </p:blipFill>
         <p:spPr>
           <a:xfrm>
-            <a:off x="8382149" y="4521695"/>
-            <a:ext cx="2672602" cy="1934712"/>
+            <a:off x="7357158" y="3651801"/>
+            <a:ext cx="3717823" cy="2730428"/>
           </a:xfrm>
           <a:prstGeom prst="rect">
             <a:avLst/>
@@ -28042,8 +28243,8 @@
         </p:blipFill>
         <p:spPr>
           <a:xfrm>
-            <a:off x="1022012" y="4056213"/>
-            <a:ext cx="3874740" cy="2498573"/>
+            <a:off x="968065" y="4224797"/>
+            <a:ext cx="3948916" cy="2545776"/>
           </a:xfrm>
           <a:prstGeom prst="rect">
             <a:avLst/>
